--- a/Thesis Defence Presentation Final.pptx
+++ b/Thesis Defence Presentation Final.pptx
@@ -17,10 +17,10 @@
     <p:sldId id="301" r:id="rId8"/>
     <p:sldId id="280" r:id="rId9"/>
     <p:sldId id="281" r:id="rId10"/>
-    <p:sldId id="284" r:id="rId11"/>
+    <p:sldId id="303" r:id="rId11"/>
     <p:sldId id="290" r:id="rId12"/>
     <p:sldId id="295" r:id="rId13"/>
-    <p:sldId id="293" r:id="rId14"/>
+    <p:sldId id="310" r:id="rId14"/>
     <p:sldId id="294" r:id="rId15"/>
     <p:sldId id="287" r:id="rId16"/>
     <p:sldId id="262" r:id="rId17"/>
@@ -239,7 +239,7 @@
           <a:p>
             <a:fld id="{5D16D8C7-7ACE-0E43-ADC6-5E8A68AC397B}" type="datetimeFigureOut">
               <a:rPr lang="en-US" smtClean="0"/>
-              <a:t>8/14/26</a:t>
+              <a:t>8/16/26</a:t>
             </a:fld>
             <a:endParaRPr lang="en-US"/>
           </a:p>
@@ -770,7 +770,7 @@
           <a:p>
             <a:fld id="{5BCAD085-E8A6-8845-BD4E-CB4CCA059FC4}" type="datetimeFigureOut">
               <a:rPr lang="en-US" smtClean="0"/>
-              <a:t>8/14/26</a:t>
+              <a:t>8/16/26</a:t>
             </a:fld>
             <a:endParaRPr lang="en-US"/>
           </a:p>
@@ -938,7 +938,7 @@
           <a:p>
             <a:fld id="{5BCAD085-E8A6-8845-BD4E-CB4CCA059FC4}" type="datetimeFigureOut">
               <a:rPr lang="en-US" smtClean="0"/>
-              <a:t>8/14/26</a:t>
+              <a:t>8/16/26</a:t>
             </a:fld>
             <a:endParaRPr lang="en-US"/>
           </a:p>
@@ -1116,7 +1116,7 @@
           <a:p>
             <a:fld id="{5BCAD085-E8A6-8845-BD4E-CB4CCA059FC4}" type="datetimeFigureOut">
               <a:rPr lang="en-US" smtClean="0"/>
-              <a:t>8/14/26</a:t>
+              <a:t>8/16/26</a:t>
             </a:fld>
             <a:endParaRPr lang="en-US"/>
           </a:p>
@@ -1284,7 +1284,7 @@
           <a:p>
             <a:fld id="{5BCAD085-E8A6-8845-BD4E-CB4CCA059FC4}" type="datetimeFigureOut">
               <a:rPr lang="en-US" smtClean="0"/>
-              <a:t>8/14/26</a:t>
+              <a:t>8/16/26</a:t>
             </a:fld>
             <a:endParaRPr lang="en-US"/>
           </a:p>
@@ -1529,7 +1529,7 @@
           <a:p>
             <a:fld id="{5BCAD085-E8A6-8845-BD4E-CB4CCA059FC4}" type="datetimeFigureOut">
               <a:rPr lang="en-US" smtClean="0"/>
-              <a:t>8/14/26</a:t>
+              <a:t>8/16/26</a:t>
             </a:fld>
             <a:endParaRPr lang="en-US"/>
           </a:p>
@@ -1814,7 +1814,7 @@
           <a:p>
             <a:fld id="{5BCAD085-E8A6-8845-BD4E-CB4CCA059FC4}" type="datetimeFigureOut">
               <a:rPr lang="en-US" smtClean="0"/>
-              <a:t>8/14/26</a:t>
+              <a:t>8/16/26</a:t>
             </a:fld>
             <a:endParaRPr lang="en-US"/>
           </a:p>
@@ -2233,7 +2233,7 @@
           <a:p>
             <a:fld id="{5BCAD085-E8A6-8845-BD4E-CB4CCA059FC4}" type="datetimeFigureOut">
               <a:rPr lang="en-US" smtClean="0"/>
-              <a:t>8/14/26</a:t>
+              <a:t>8/16/26</a:t>
             </a:fld>
             <a:endParaRPr lang="en-US"/>
           </a:p>
@@ -2350,7 +2350,7 @@
           <a:p>
             <a:fld id="{5BCAD085-E8A6-8845-BD4E-CB4CCA059FC4}" type="datetimeFigureOut">
               <a:rPr lang="en-US" smtClean="0"/>
-              <a:t>8/14/26</a:t>
+              <a:t>8/16/26</a:t>
             </a:fld>
             <a:endParaRPr lang="en-US"/>
           </a:p>
@@ -2445,7 +2445,7 @@
           <a:p>
             <a:fld id="{5BCAD085-E8A6-8845-BD4E-CB4CCA059FC4}" type="datetimeFigureOut">
               <a:rPr lang="en-US" smtClean="0"/>
-              <a:t>8/14/26</a:t>
+              <a:t>8/16/26</a:t>
             </a:fld>
             <a:endParaRPr lang="en-US"/>
           </a:p>
@@ -2720,7 +2720,7 @@
           <a:p>
             <a:fld id="{5BCAD085-E8A6-8845-BD4E-CB4CCA059FC4}" type="datetimeFigureOut">
               <a:rPr lang="en-US" smtClean="0"/>
-              <a:t>8/14/26</a:t>
+              <a:t>8/16/26</a:t>
             </a:fld>
             <a:endParaRPr lang="en-US"/>
           </a:p>
@@ -2972,7 +2972,7 @@
           <a:p>
             <a:fld id="{5BCAD085-E8A6-8845-BD4E-CB4CCA059FC4}" type="datetimeFigureOut">
               <a:rPr lang="en-US" smtClean="0"/>
-              <a:t>8/14/26</a:t>
+              <a:t>8/16/26</a:t>
             </a:fld>
             <a:endParaRPr lang="en-US"/>
           </a:p>
@@ -3183,7 +3183,7 @@
           <a:p>
             <a:fld id="{5BCAD085-E8A6-8845-BD4E-CB4CCA059FC4}" type="datetimeFigureOut">
               <a:rPr lang="en-US" smtClean="0"/>
-              <a:t>8/14/26</a:t>
+              <a:t>8/16/26</a:t>
             </a:fld>
             <a:endParaRPr lang="en-US"/>
           </a:p>
@@ -4718,19 +4718,20 @@
         </p:nvSpPr>
         <p:spPr>
           <a:xfrm>
-            <a:off x="980082" y="1091429"/>
+            <a:off x="980081" y="1091429"/>
             <a:ext cx="10058400" cy="777240"/>
           </a:xfrm>
           <a:prstGeom prst="roundRect">
             <a:avLst/>
           </a:prstGeom>
           <a:solidFill>
-            <a:srgbClr val="EFF5EA"/>
+            <a:schemeClr val="accent5">
+              <a:lumMod val="75000"/>
+            </a:schemeClr>
           </a:solidFill>
-          <a:ln w="12700">
-            <a:solidFill>
-              <a:srgbClr val="6A8C69"/>
-            </a:solidFill>
+          <a:ln w="12700" cap="flat" cmpd="sng" algn="ctr">
+            <a:noFill/>
+            <a:prstDash val="solid"/>
           </a:ln>
         </p:spPr>
         <p:style>
@@ -4752,67 +4753,9 @@
           <a:lstStyle/>
           <a:p>
             <a:pPr algn="ctr"/>
-            <a:endParaRPr sz="1300">
+            <a:endParaRPr sz="1300" dirty="0">
               <a:latin typeface="Avenir Next" panose="020B0503020202020204" pitchFamily="34" charset="0"/>
             </a:endParaRPr>
-          </a:p>
-        </p:txBody>
-      </p:sp>
-      <p:sp>
-        <p:nvSpPr>
-          <p:cNvPr id="7" name="TextBox 6"/>
-          <p:cNvSpPr txBox="1"/>
-          <p:nvPr/>
-        </p:nvSpPr>
-        <p:spPr>
-          <a:xfrm>
-            <a:off x="980083" y="1120753"/>
-            <a:ext cx="9829800" cy="738664"/>
-          </a:xfrm>
-          <a:prstGeom prst="rect">
-            <a:avLst/>
-          </a:prstGeom>
-          <a:noFill/>
-        </p:spPr>
-        <p:txBody>
-          <a:bodyPr wrap="square" anchor="t">
-            <a:spAutoFit/>
-          </a:bodyPr>
-          <a:lstStyle/>
-          <a:p>
-            <a:pPr algn="ctr">
-              <a:defRPr sz="1150" b="1">
-                <a:solidFill>
-                  <a:srgbClr val="12402D"/>
-                </a:solidFill>
-                <a:latin typeface="Avenir Next"/>
-              </a:defRPr>
-            </a:pPr>
-            <a:r>
-              <a:rPr sz="1400" dirty="0">
-                <a:latin typeface="Avenir Next" panose="020B0503020202020204" pitchFamily="34" charset="0"/>
-              </a:rPr>
-              <a:t>Constitutional Bedrock: </a:t>
-            </a:r>
-            <a:endParaRPr lang="en-US" sz="1400" dirty="0">
-              <a:latin typeface="Avenir Next" panose="020B0503020202020204" pitchFamily="34" charset="0"/>
-            </a:endParaRPr>
-          </a:p>
-          <a:p>
-            <a:pPr algn="ctr">
-              <a:defRPr sz="1150" b="1">
-                <a:solidFill>
-                  <a:srgbClr val="12402D"/>
-                </a:solidFill>
-                <a:latin typeface="Avenir Next"/>
-              </a:defRPr>
-            </a:pPr>
-            <a:r>
-              <a:rPr sz="1400" dirty="0">
-                <a:latin typeface="Avenir Next" panose="020B0503020202020204" pitchFamily="34" charset="0"/>
-              </a:rPr>
-              <a:t>Articles 21, 48A, 51A(g), and the landmark M.K. Ranjitsinh ruling establish a strong duty to take environmental claims seriously.</a:t>
-            </a:r>
           </a:p>
         </p:txBody>
       </p:sp>
@@ -5814,10 +5757,128 @@
           </a:p>
         </p:txBody>
       </p:sp>
+      <p:sp>
+        <p:nvSpPr>
+          <p:cNvPr id="2" name="Rectangle 1">
+            <a:extLst>
+              <a:ext uri="{FF2B5EF4-FFF2-40B4-BE49-F238E27FC236}">
+                <a16:creationId xmlns:a16="http://schemas.microsoft.com/office/drawing/2014/main" id="{31E9E058-3437-A04F-963A-EEB454EC2EEF}"/>
+              </a:ext>
+            </a:extLst>
+          </p:cNvPr>
+          <p:cNvSpPr/>
+          <p:nvPr/>
+        </p:nvSpPr>
+        <p:spPr>
+          <a:xfrm>
+            <a:off x="980081" y="1091429"/>
+            <a:ext cx="101600" cy="777240"/>
+          </a:xfrm>
+          <a:prstGeom prst="rect">
+            <a:avLst/>
+          </a:prstGeom>
+          <a:solidFill>
+            <a:srgbClr val="D1A94B"/>
+          </a:solidFill>
+          <a:ln w="9525" cap="flat" cmpd="sng" algn="ctr">
+            <a:noFill/>
+            <a:prstDash val="solid"/>
+          </a:ln>
+        </p:spPr>
+        <p:style>
+          <a:lnRef idx="1">
+            <a:schemeClr val="accent1"/>
+          </a:lnRef>
+          <a:fillRef idx="3">
+            <a:schemeClr val="accent1"/>
+          </a:fillRef>
+          <a:effectRef idx="2">
+            <a:schemeClr val="accent1"/>
+          </a:effectRef>
+          <a:fontRef idx="minor">
+            <a:schemeClr val="lt1"/>
+          </a:fontRef>
+        </p:style>
+        <p:txBody>
+          <a:bodyPr vertOverflow="clip" horzOverflow="clip" rtlCol="0" anchor="t"/>
+          <a:lstStyle/>
+          <a:p>
+            <a:pPr algn="l"/>
+            <a:endParaRPr lang="en-US"/>
+          </a:p>
+        </p:txBody>
+      </p:sp>
+      <p:sp>
+        <p:nvSpPr>
+          <p:cNvPr id="7" name="TextBox 6"/>
+          <p:cNvSpPr txBox="1"/>
+          <p:nvPr/>
+        </p:nvSpPr>
+        <p:spPr>
+          <a:xfrm>
+            <a:off x="1282700" y="1136650"/>
+            <a:ext cx="9499600" cy="715581"/>
+          </a:xfrm>
+          <a:prstGeom prst="rect">
+            <a:avLst/>
+          </a:prstGeom>
+          <a:noFill/>
+        </p:spPr>
+        <p:txBody>
+          <a:bodyPr wrap="square" anchor="t">
+            <a:spAutoFit/>
+          </a:bodyPr>
+          <a:lstStyle/>
+          <a:p>
+            <a:pPr algn="l">
+              <a:defRPr sz="1250" b="1">
+                <a:solidFill>
+                  <a:srgbClr val="D1A94B"/>
+                </a:solidFill>
+                <a:latin typeface="Avenir Next"/>
+              </a:defRPr>
+            </a:pPr>
+            <a:r>
+              <a:rPr sz="1250" b="1" dirty="0">
+                <a:solidFill>
+                  <a:srgbClr val="D1A94B"/>
+                </a:solidFill>
+                <a:latin typeface="Avenir Next" panose="020B0503020202020204" pitchFamily="34" charset="0"/>
+              </a:rPr>
+              <a:t>Constitutional Bedrock: </a:t>
+            </a:r>
+            <a:endParaRPr lang="en-US" sz="1250" b="1" dirty="0">
+              <a:solidFill>
+                <a:srgbClr val="D1A94B"/>
+              </a:solidFill>
+              <a:latin typeface="Avenir Next" panose="020B0503020202020204" pitchFamily="34" charset="0"/>
+            </a:endParaRPr>
+          </a:p>
+          <a:p>
+            <a:pPr algn="l">
+              <a:defRPr sz="1400" b="1">
+                <a:solidFill>
+                  <a:srgbClr val="FFFFFF"/>
+                </a:solidFill>
+                <a:latin typeface="Avenir Next"/>
+              </a:defRPr>
+            </a:pPr>
+            <a:r>
+              <a:rPr sz="1400" b="1" dirty="0">
+                <a:latin typeface="Avenir Next" panose="020B0503020202020204" pitchFamily="34" charset="0"/>
+              </a:rPr>
+              <a:t>Articles 21, 48A, 51A(g), and the landmark M.K. Ranjitsinh ruling establish a strong duty to take environmental claims seriously.</a:t>
+            </a:r>
+            <a:endParaRPr lang="en-US" sz="1400" b="1" dirty="0">
+              <a:latin typeface="Avenir Next" panose="020B0503020202020204" pitchFamily="34" charset="0"/>
+            </a:endParaRPr>
+          </a:p>
+        </p:txBody>
+      </p:sp>
     </p:spTree>
     <p:extLst>
       <p:ext uri="{BB962C8B-B14F-4D97-AF65-F5344CB8AC3E}">
-        <p14:creationId xmlns:p14="http://schemas.microsoft.com/office/powerpoint/2010/main" val="2513919549"/>
+        <p14:creationId xmlns:p14="http://schemas.microsoft.com/office/powerpoint/2010/main" val="1693384132"/>
       </p:ext>
     </p:extLst>
   </p:cSld>
@@ -5927,310 +5988,23 @@
       </p:sp>
       <p:sp>
         <p:nvSpPr>
-          <p:cNvPr id="8" name="Chevron 7"/>
-          <p:cNvSpPr/>
-          <p:nvPr/>
-        </p:nvSpPr>
-        <p:spPr>
-          <a:xfrm>
-            <a:off x="1065366" y="5858837"/>
-            <a:ext cx="1901952" cy="411480"/>
-          </a:xfrm>
-          <a:prstGeom prst="chevron">
-            <a:avLst/>
-          </a:prstGeom>
-          <a:solidFill>
-            <a:srgbClr val="E8EFE6"/>
-          </a:solidFill>
-          <a:ln>
-            <a:solidFill>
-              <a:srgbClr val="D8D1C6"/>
-            </a:solidFill>
-          </a:ln>
-        </p:spPr>
-        <p:style>
-          <a:lnRef idx="1">
-            <a:schemeClr val="accent1"/>
-          </a:lnRef>
-          <a:fillRef idx="3">
-            <a:schemeClr val="accent1"/>
-          </a:fillRef>
-          <a:effectRef idx="2">
-            <a:schemeClr val="accent1"/>
-          </a:effectRef>
-          <a:fontRef idx="minor">
-            <a:schemeClr val="lt1"/>
-          </a:fontRef>
-        </p:style>
-        <p:txBody>
-          <a:bodyPr rtlCol="0" anchor="ctr"/>
-          <a:lstStyle/>
-          <a:p>
-            <a:pPr algn="ctr">
-              <a:defRPr sz="1100" b="1">
-                <a:solidFill>
-                  <a:srgbClr val="173F35"/>
-                </a:solidFill>
-                <a:latin typeface="Avenir Next"/>
-              </a:defRPr>
-            </a:pPr>
-            <a:r>
-              <a:rPr sz="1300">
-                <a:latin typeface="Avenir Next" panose="020B0503020202020204" pitchFamily="34" charset="0"/>
-              </a:rPr>
-              <a:t>Product Labels</a:t>
-            </a:r>
-          </a:p>
-        </p:txBody>
-      </p:sp>
-      <p:sp>
-        <p:nvSpPr>
-          <p:cNvPr id="9" name="Chevron 8"/>
-          <p:cNvSpPr/>
-          <p:nvPr/>
-        </p:nvSpPr>
-        <p:spPr>
-          <a:xfrm>
-            <a:off x="3022182" y="5858837"/>
-            <a:ext cx="1901952" cy="411480"/>
-          </a:xfrm>
-          <a:prstGeom prst="chevron">
-            <a:avLst/>
-          </a:prstGeom>
-          <a:solidFill>
-            <a:srgbClr val="E8EFE6"/>
-          </a:solidFill>
-          <a:ln>
-            <a:solidFill>
-              <a:srgbClr val="D8D1C6"/>
-            </a:solidFill>
-          </a:ln>
-        </p:spPr>
-        <p:style>
-          <a:lnRef idx="1">
-            <a:schemeClr val="accent1"/>
-          </a:lnRef>
-          <a:fillRef idx="3">
-            <a:schemeClr val="accent1"/>
-          </a:fillRef>
-          <a:effectRef idx="2">
-            <a:schemeClr val="accent1"/>
-          </a:effectRef>
-          <a:fontRef idx="minor">
-            <a:schemeClr val="lt1"/>
-          </a:fontRef>
-        </p:style>
-        <p:txBody>
-          <a:bodyPr rtlCol="0" anchor="ctr"/>
-          <a:lstStyle/>
-          <a:p>
-            <a:pPr algn="ctr">
-              <a:defRPr sz="1100" b="1">
-                <a:solidFill>
-                  <a:srgbClr val="173F35"/>
-                </a:solidFill>
-                <a:latin typeface="Avenir Next"/>
-              </a:defRPr>
-            </a:pPr>
-            <a:r>
-              <a:rPr sz="1300">
-                <a:latin typeface="Avenir Next" panose="020B0503020202020204" pitchFamily="34" charset="0"/>
-              </a:rPr>
-              <a:t>Websites</a:t>
-            </a:r>
-          </a:p>
-        </p:txBody>
-      </p:sp>
-      <p:sp>
-        <p:nvSpPr>
-          <p:cNvPr id="10" name="Chevron 9"/>
-          <p:cNvSpPr/>
-          <p:nvPr/>
-        </p:nvSpPr>
-        <p:spPr>
-          <a:xfrm>
-            <a:off x="4978998" y="5858837"/>
-            <a:ext cx="1901952" cy="411480"/>
-          </a:xfrm>
-          <a:prstGeom prst="chevron">
-            <a:avLst/>
-          </a:prstGeom>
-          <a:solidFill>
-            <a:srgbClr val="E8EFE6"/>
-          </a:solidFill>
-          <a:ln>
-            <a:solidFill>
-              <a:srgbClr val="D8D1C6"/>
-            </a:solidFill>
-          </a:ln>
-        </p:spPr>
-        <p:style>
-          <a:lnRef idx="1">
-            <a:schemeClr val="accent1"/>
-          </a:lnRef>
-          <a:fillRef idx="3">
-            <a:schemeClr val="accent1"/>
-          </a:fillRef>
-          <a:effectRef idx="2">
-            <a:schemeClr val="accent1"/>
-          </a:effectRef>
-          <a:fontRef idx="minor">
-            <a:schemeClr val="lt1"/>
-          </a:fontRef>
-        </p:style>
-        <p:txBody>
-          <a:bodyPr rtlCol="0" anchor="ctr"/>
-          <a:lstStyle/>
-          <a:p>
-            <a:pPr algn="ctr">
-              <a:defRPr sz="1100" b="1">
-                <a:solidFill>
-                  <a:srgbClr val="173F35"/>
-                </a:solidFill>
-                <a:latin typeface="Avenir Next"/>
-              </a:defRPr>
-            </a:pPr>
-            <a:r>
-              <a:rPr sz="1300">
-                <a:latin typeface="Avenir Next" panose="020B0503020202020204" pitchFamily="34" charset="0"/>
-              </a:rPr>
-              <a:t>Sustainability Reports</a:t>
-            </a:r>
-          </a:p>
-        </p:txBody>
-      </p:sp>
-      <p:sp>
-        <p:nvSpPr>
-          <p:cNvPr id="11" name="Chevron 10"/>
-          <p:cNvSpPr/>
-          <p:nvPr/>
-        </p:nvSpPr>
-        <p:spPr>
-          <a:xfrm>
-            <a:off x="6935814" y="5858837"/>
-            <a:ext cx="1901952" cy="411480"/>
-          </a:xfrm>
-          <a:prstGeom prst="chevron">
-            <a:avLst/>
-          </a:prstGeom>
-          <a:solidFill>
-            <a:srgbClr val="E8EFE6"/>
-          </a:solidFill>
-          <a:ln>
-            <a:solidFill>
-              <a:srgbClr val="D8D1C6"/>
-            </a:solidFill>
-          </a:ln>
-        </p:spPr>
-        <p:style>
-          <a:lnRef idx="1">
-            <a:schemeClr val="accent1"/>
-          </a:lnRef>
-          <a:fillRef idx="3">
-            <a:schemeClr val="accent1"/>
-          </a:fillRef>
-          <a:effectRef idx="2">
-            <a:schemeClr val="accent1"/>
-          </a:effectRef>
-          <a:fontRef idx="minor">
-            <a:schemeClr val="lt1"/>
-          </a:fontRef>
-        </p:style>
-        <p:txBody>
-          <a:bodyPr rtlCol="0" anchor="ctr"/>
-          <a:lstStyle/>
-          <a:p>
-            <a:pPr algn="ctr">
-              <a:defRPr sz="1100" b="1">
-                <a:solidFill>
-                  <a:srgbClr val="173F35"/>
-                </a:solidFill>
-                <a:latin typeface="Avenir Next"/>
-              </a:defRPr>
-            </a:pPr>
-            <a:r>
-              <a:rPr sz="1300">
-                <a:latin typeface="Avenir Next" panose="020B0503020202020204" pitchFamily="34" charset="0"/>
-              </a:rPr>
-              <a:t>BRSR / ESG</a:t>
-            </a:r>
-          </a:p>
-        </p:txBody>
-      </p:sp>
-      <p:sp>
-        <p:nvSpPr>
-          <p:cNvPr id="12" name="Chevron 11"/>
-          <p:cNvSpPr/>
-          <p:nvPr/>
-        </p:nvSpPr>
-        <p:spPr>
-          <a:xfrm>
-            <a:off x="8892630" y="5858837"/>
-            <a:ext cx="2231136" cy="411480"/>
-          </a:xfrm>
-          <a:prstGeom prst="chevron">
-            <a:avLst/>
-          </a:prstGeom>
-          <a:solidFill>
-            <a:srgbClr val="E8EFE6"/>
-          </a:solidFill>
-          <a:ln>
-            <a:solidFill>
-              <a:srgbClr val="D8D1C6"/>
-            </a:solidFill>
-          </a:ln>
-        </p:spPr>
-        <p:style>
-          <a:lnRef idx="1">
-            <a:schemeClr val="accent1"/>
-          </a:lnRef>
-          <a:fillRef idx="3">
-            <a:schemeClr val="accent1"/>
-          </a:fillRef>
-          <a:effectRef idx="2">
-            <a:schemeClr val="accent1"/>
-          </a:effectRef>
-          <a:fontRef idx="minor">
-            <a:schemeClr val="lt1"/>
-          </a:fontRef>
-        </p:style>
-        <p:txBody>
-          <a:bodyPr rtlCol="0" anchor="ctr"/>
-          <a:lstStyle/>
-          <a:p>
-            <a:pPr algn="ctr">
-              <a:defRPr sz="1100" b="1">
-                <a:solidFill>
-                  <a:srgbClr val="173F35"/>
-                </a:solidFill>
-                <a:latin typeface="Avenir Next"/>
-              </a:defRPr>
-            </a:pPr>
-            <a:r>
-              <a:rPr sz="1300">
-                <a:latin typeface="Avenir Next" panose="020B0503020202020204" pitchFamily="34" charset="0"/>
-              </a:rPr>
-              <a:t>Green Debt / Net Zero</a:t>
-            </a:r>
-          </a:p>
-        </p:txBody>
-      </p:sp>
-      <p:sp>
-        <p:nvSpPr>
           <p:cNvPr id="19" name="Rounded Rectangle 18"/>
           <p:cNvSpPr/>
           <p:nvPr/>
         </p:nvSpPr>
         <p:spPr>
           <a:xfrm>
-            <a:off x="7570381" y="1438153"/>
-            <a:ext cx="4226454" cy="2386996"/>
+            <a:off x="7570381" y="1147204"/>
+            <a:ext cx="4226454" cy="2622908"/>
           </a:xfrm>
           <a:prstGeom prst="roundRect">
             <a:avLst/>
           </a:prstGeom>
           <a:solidFill>
-            <a:srgbClr val="FFF3F0"/>
+            <a:schemeClr val="accent6">
+              <a:lumMod val="40000"/>
+              <a:lumOff val="60000"/>
+            </a:schemeClr>
           </a:solidFill>
           <a:ln w="12700">
             <a:solidFill>
@@ -6271,7 +6045,7 @@
         </p:nvSpPr>
         <p:spPr>
           <a:xfrm>
-            <a:off x="7740502" y="1593195"/>
+            <a:off x="7740502" y="1302246"/>
             <a:ext cx="3934413" cy="2164695"/>
           </a:xfrm>
           <a:prstGeom prst="rect">
@@ -6426,8 +6200,8 @@
         </p:nvSpPr>
         <p:spPr>
           <a:xfrm>
-            <a:off x="646996" y="1054085"/>
-            <a:ext cx="6678424" cy="4579060"/>
+            <a:off x="646996" y="1054084"/>
+            <a:ext cx="6678424" cy="5000351"/>
           </a:xfrm>
           <a:prstGeom prst="roundRect">
             <a:avLst/>
@@ -6948,8 +6722,8 @@
         </p:nvSpPr>
         <p:spPr>
           <a:xfrm>
-            <a:off x="7570381" y="3987046"/>
-            <a:ext cx="4226454" cy="1646099"/>
+            <a:off x="7570381" y="4236431"/>
+            <a:ext cx="4226454" cy="1808786"/>
           </a:xfrm>
           <a:prstGeom prst="roundRect">
             <a:avLst>
@@ -6998,7 +6772,7 @@
         </p:nvSpPr>
         <p:spPr>
           <a:xfrm>
-            <a:off x="7740502" y="4143355"/>
+            <a:off x="7740502" y="4392740"/>
             <a:ext cx="3920726" cy="1377300"/>
           </a:xfrm>
           <a:prstGeom prst="rect">
@@ -7505,10 +7279,16 @@
               <a:t>• </a:t>
             </a:r>
             <a:r>
+              <a:rPr lang="en-IN" sz="1400" b="1" dirty="0">
+                <a:latin typeface="Avenir Next" panose="020B0503020202020204" pitchFamily="34" charset="0"/>
+              </a:rPr>
+              <a:t>Duty breached: </a:t>
+            </a:r>
+            <a:r>
               <a:rPr lang="en-IN" sz="1400" dirty="0">
                 <a:latin typeface="Avenir Next" panose="020B0503020202020204" pitchFamily="34" charset="0"/>
               </a:rPr>
-              <a:t>Duty breached — the duty not to mislead, owed to the State and to investors.</a:t>
+              <a:t>the duty not to mislead, owed to the State and to investors.</a:t>
             </a:r>
           </a:p>
           <a:p>
@@ -7526,7 +7306,19 @@
               <a:rPr lang="en-IN" sz="1400" dirty="0">
                 <a:latin typeface="Avenir Next" panose="020B0503020202020204" pitchFamily="34" charset="0"/>
               </a:rPr>
-              <a:t>•  Privilege misused — managers may choose how to communicate, but that freedom stops at deception.</a:t>
+              <a:t>•  </a:t>
+            </a:r>
+            <a:r>
+              <a:rPr lang="en-IN" sz="1400" b="1" dirty="0">
+                <a:latin typeface="Avenir Next" panose="020B0503020202020204" pitchFamily="34" charset="0"/>
+              </a:rPr>
+              <a:t>Manager’s privilege misused: </a:t>
+            </a:r>
+            <a:r>
+              <a:rPr lang="en-IN" sz="1400" dirty="0">
+                <a:latin typeface="Avenir Next" panose="020B0503020202020204" pitchFamily="34" charset="0"/>
+              </a:rPr>
+              <a:t>managers may choose how to communicate, but that freedom stops at deception.</a:t>
             </a:r>
           </a:p>
           <a:p>
@@ -7544,7 +7336,19 @@
               <a:rPr lang="en-IN" sz="1400" dirty="0">
                 <a:latin typeface="Avenir Next" panose="020B0503020202020204" pitchFamily="34" charset="0"/>
               </a:rPr>
-              <a:t>•  Power held — companies control the ESG information that everyone else acts on.</a:t>
+              <a:t>•  </a:t>
+            </a:r>
+            <a:r>
+              <a:rPr lang="en-IN" sz="1400" b="1" dirty="0">
+                <a:latin typeface="Avenir Next" panose="020B0503020202020204" pitchFamily="34" charset="0"/>
+              </a:rPr>
+              <a:t>Power held: </a:t>
+            </a:r>
+            <a:r>
+              <a:rPr lang="en-IN" sz="1400" dirty="0">
+                <a:latin typeface="Avenir Next" panose="020B0503020202020204" pitchFamily="34" charset="0"/>
+              </a:rPr>
+              <a:t>companies control the ESG information that everyone else acts on.</a:t>
             </a:r>
           </a:p>
           <a:p>
@@ -7562,7 +7366,19 @@
               <a:rPr lang="en-IN" sz="1400" dirty="0">
                 <a:latin typeface="Avenir Next" panose="020B0503020202020204" pitchFamily="34" charset="0"/>
               </a:rPr>
-              <a:t>•  Immunity retained — limited liability insulates those who gain from a green reputation.</a:t>
+              <a:t>•  </a:t>
+            </a:r>
+            <a:r>
+              <a:rPr lang="en-IN" sz="1400" b="1" dirty="0">
+                <a:latin typeface="Avenir Next" panose="020B0503020202020204" pitchFamily="34" charset="0"/>
+              </a:rPr>
+              <a:t>Immunity retained: </a:t>
+            </a:r>
+            <a:r>
+              <a:rPr lang="en-IN" sz="1400" dirty="0">
+                <a:latin typeface="Avenir Next" panose="020B0503020202020204" pitchFamily="34" charset="0"/>
+              </a:rPr>
+              <a:t>limited liability saves those who gain from a green reputation.</a:t>
             </a:r>
           </a:p>
         </p:txBody>
@@ -7706,7 +7522,7 @@
                 </a:solidFill>
                 <a:latin typeface="Avenir Next" panose="020B0503020202020204" pitchFamily="34" charset="0"/>
               </a:rPr>
-              <a:t>•  Duties owed to the State are strongest — the CCPA and SEBI can act to enforce them.</a:t>
+              <a:t>•  Duties owed to the State are strongest, the CCPA and SEBI can act to enforce them.</a:t>
             </a:r>
           </a:p>
           <a:p>
@@ -7817,7 +7633,7 @@
         <p:spPr>
           <a:xfrm>
             <a:off x="6326000" y="3795193"/>
-            <a:ext cx="5155405" cy="1282402"/>
+            <a:ext cx="5155405" cy="1066959"/>
           </a:xfrm>
           <a:prstGeom prst="rect">
             <a:avLst/>
@@ -7865,16 +7681,22 @@
               <a:t>• </a:t>
             </a:r>
             <a:r>
-              <a:rPr lang="en-US" sz="1400" dirty="0">
+              <a:rPr lang="en-US" sz="1400" b="1" dirty="0">
                 <a:latin typeface="Avenir Next" panose="020B0503020202020204" pitchFamily="34" charset="0"/>
               </a:rPr>
               <a:t>Information Asymmetry</a:t>
             </a:r>
             <a:r>
+              <a:rPr sz="1400" b="1" dirty="0">
+                <a:latin typeface="Avenir Next" panose="020B0503020202020204" pitchFamily="34" charset="0"/>
+              </a:rPr>
+              <a:t>: </a:t>
+            </a:r>
+            <a:r>
               <a:rPr sz="1400" dirty="0">
                 <a:latin typeface="Avenir Next" panose="020B0503020202020204" pitchFamily="34" charset="0"/>
               </a:rPr>
-              <a:t>: Insiders know true pollution; outsiders only see polished PR.</a:t>
+              <a:t>Insiders know true pollution; outsiders only see polished PR.</a:t>
             </a:r>
           </a:p>
           <a:p>
@@ -7892,19 +7714,55 @@
               <a:rPr sz="1400" dirty="0">
                 <a:latin typeface="Avenir Next" panose="020B0503020202020204" pitchFamily="34" charset="0"/>
               </a:rPr>
-              <a:t>• Verifying claims requires technical expertise </a:t>
+              <a:t>• </a:t>
+            </a:r>
+            <a:r>
+              <a:rPr lang="en-US" sz="1400" b="1" dirty="0">
+                <a:latin typeface="Avenir Next" panose="020B0503020202020204" pitchFamily="34" charset="0"/>
+              </a:rPr>
+              <a:t>Lack of T</a:t>
+            </a:r>
+            <a:r>
+              <a:rPr sz="1400" b="1" dirty="0">
+                <a:latin typeface="Avenir Next" panose="020B0503020202020204" pitchFamily="34" charset="0"/>
+              </a:rPr>
+              <a:t>echnical </a:t>
+            </a:r>
+            <a:r>
+              <a:rPr lang="en-US" sz="1400" b="1" dirty="0">
+                <a:latin typeface="Avenir Next" panose="020B0503020202020204" pitchFamily="34" charset="0"/>
+              </a:rPr>
+              <a:t>E</a:t>
+            </a:r>
+            <a:r>
+              <a:rPr sz="1400" b="1" dirty="0">
+                <a:latin typeface="Avenir Next" panose="020B0503020202020204" pitchFamily="34" charset="0"/>
+              </a:rPr>
+              <a:t>xpertise</a:t>
+            </a:r>
+            <a:r>
+              <a:rPr lang="en-US" sz="1400" b="1" dirty="0">
+                <a:latin typeface="Avenir Next" panose="020B0503020202020204" pitchFamily="34" charset="0"/>
+              </a:rPr>
+              <a:t>:</a:t>
+            </a:r>
+            <a:r>
+              <a:rPr sz="1400" b="1" dirty="0">
+                <a:latin typeface="Avenir Next" panose="020B0503020202020204" pitchFamily="34" charset="0"/>
+              </a:rPr>
+              <a:t> </a:t>
             </a:r>
             <a:r>
               <a:rPr lang="en-US" sz="1400" dirty="0">
                 <a:latin typeface="Avenir Next" panose="020B0503020202020204" pitchFamily="34" charset="0"/>
               </a:rPr>
-              <a:t>that </a:t>
+              <a:t>among </a:t>
             </a:r>
             <a:r>
               <a:rPr sz="1400" dirty="0">
                 <a:latin typeface="Avenir Next" panose="020B0503020202020204" pitchFamily="34" charset="0"/>
               </a:rPr>
-              <a:t>ordinary citizens lack.</a:t>
+              <a:t>ordinary citizens.</a:t>
             </a:r>
           </a:p>
         </p:txBody>
@@ -8131,499 +7989,987 @@
       </p:grpSpPr>
       <p:sp>
         <p:nvSpPr>
-          <p:cNvPr id="3" name="Rectangle 2"/>
+          <p:cNvPr id="2" name="Top bar"/>
           <p:cNvSpPr/>
           <p:nvPr/>
         </p:nvSpPr>
         <p:spPr>
           <a:xfrm>
             <a:off x="0" y="0"/>
-            <a:ext cx="12191695" cy="201168"/>
+            <a:ext cx="12192000" cy="203200"/>
           </a:xfrm>
           <a:prstGeom prst="rect">
             <a:avLst/>
           </a:prstGeom>
           <a:solidFill>
-            <a:srgbClr val="173F35"/>
+            <a:srgbClr val="1A3C34"/>
           </a:solidFill>
           <a:ln>
             <a:noFill/>
           </a:ln>
         </p:spPr>
-        <p:style>
-          <a:lnRef idx="1">
-            <a:schemeClr val="accent1"/>
-          </a:lnRef>
-          <a:fillRef idx="3">
-            <a:schemeClr val="accent1"/>
-          </a:fillRef>
-          <a:effectRef idx="2">
-            <a:schemeClr val="accent1"/>
-          </a:effectRef>
-          <a:fontRef idx="minor">
-            <a:schemeClr val="lt1"/>
-          </a:fontRef>
-        </p:style>
-        <p:txBody>
-          <a:bodyPr rtlCol="0" anchor="ctr"/>
+        <p:txBody>
+          <a:bodyPr/>
+          <a:lstStyle/>
+          <a:p>
+            <a:endParaRPr lang="en-US"/>
+          </a:p>
+        </p:txBody>
+      </p:sp>
+      <p:sp>
+        <p:nvSpPr>
+          <p:cNvPr id="3" name="Title"/>
+          <p:cNvSpPr txBox="1"/>
+          <p:nvPr/>
+        </p:nvSpPr>
+        <p:spPr>
+          <a:xfrm>
+            <a:off x="508000" y="355600"/>
+            <a:ext cx="11176000" cy="508000"/>
+          </a:xfrm>
+          <a:prstGeom prst="rect">
+            <a:avLst/>
+          </a:prstGeom>
+        </p:spPr>
+        <p:txBody>
+          <a:bodyPr wrap="square" rtlCol="0" anchor="ctr">
+            <a:normAutofit lnSpcReduction="10000"/>
+          </a:bodyPr>
+          <a:lstStyle/>
+          <a:p>
+            <a:pPr algn="l"/>
+            <a:r>
+              <a:rPr lang="en-US" sz="2800" b="1" dirty="0">
+                <a:solidFill>
+                  <a:srgbClr val="173F35"/>
+                </a:solidFill>
+              </a:rPr>
+              <a:t>Why Section 166(2) of Companies Act Remains Weakly Enforced ?</a:t>
+            </a:r>
+          </a:p>
+        </p:txBody>
+      </p:sp>
+      <p:sp>
+        <p:nvSpPr>
+          <p:cNvPr id="4" name="Card 1 bg"/>
+          <p:cNvSpPr/>
+          <p:nvPr/>
+        </p:nvSpPr>
+        <p:spPr>
+          <a:xfrm>
+            <a:off x="457200" y="1041400"/>
+            <a:ext cx="3657600" cy="3810000"/>
+          </a:xfrm>
+          <a:prstGeom prst="roundRect">
+            <a:avLst/>
+          </a:prstGeom>
+          <a:solidFill>
+            <a:srgbClr val="F7F3E8"/>
+          </a:solidFill>
+          <a:ln>
+            <a:noFill/>
+          </a:ln>
+        </p:spPr>
+        <p:txBody>
+          <a:bodyPr/>
+          <a:lstStyle/>
+          <a:p>
+            <a:endParaRPr lang="en-US"/>
+          </a:p>
+        </p:txBody>
+      </p:sp>
+      <p:sp>
+        <p:nvSpPr>
+          <p:cNvPr id="5" name="Card 2 bg"/>
+          <p:cNvSpPr/>
+          <p:nvPr/>
+        </p:nvSpPr>
+        <p:spPr>
+          <a:xfrm>
+            <a:off x="4267200" y="1041400"/>
+            <a:ext cx="3657600" cy="3810000"/>
+          </a:xfrm>
+          <a:prstGeom prst="roundRect">
+            <a:avLst/>
+          </a:prstGeom>
+          <a:solidFill>
+            <a:srgbClr val="E8F0EA"/>
+          </a:solidFill>
+          <a:ln>
+            <a:noFill/>
+          </a:ln>
+        </p:spPr>
+        <p:txBody>
+          <a:bodyPr/>
+          <a:lstStyle/>
+          <a:p>
+            <a:endParaRPr lang="en-US"/>
+          </a:p>
+        </p:txBody>
+      </p:sp>
+      <p:sp>
+        <p:nvSpPr>
+          <p:cNvPr id="6" name="Card 3 bg"/>
+          <p:cNvSpPr/>
+          <p:nvPr/>
+        </p:nvSpPr>
+        <p:spPr>
+          <a:xfrm>
+            <a:off x="8077200" y="1041400"/>
+            <a:ext cx="3657600" cy="3810000"/>
+          </a:xfrm>
+          <a:prstGeom prst="roundRect">
+            <a:avLst/>
+          </a:prstGeom>
+          <a:solidFill>
+            <a:srgbClr val="F5EDE6"/>
+          </a:solidFill>
+          <a:ln>
+            <a:noFill/>
+          </a:ln>
+        </p:spPr>
+        <p:txBody>
+          <a:bodyPr/>
+          <a:lstStyle/>
+          <a:p>
+            <a:endParaRPr lang="en-US"/>
+          </a:p>
+        </p:txBody>
+      </p:sp>
+      <p:sp>
+        <p:nvSpPr>
+          <p:cNvPr id="7" name="Num 1 circle"/>
+          <p:cNvSpPr/>
+          <p:nvPr/>
+        </p:nvSpPr>
+        <p:spPr>
+          <a:xfrm>
+            <a:off x="660400" y="1219200"/>
+            <a:ext cx="457200" cy="457200"/>
+          </a:xfrm>
+          <a:prstGeom prst="ellipse">
+            <a:avLst/>
+          </a:prstGeom>
+          <a:solidFill>
+            <a:srgbClr val="1A3C34"/>
+          </a:solidFill>
+          <a:ln>
+            <a:noFill/>
+          </a:ln>
+        </p:spPr>
+        <p:txBody>
+          <a:bodyPr/>
+          <a:lstStyle/>
+          <a:p>
+            <a:endParaRPr lang="en-US"/>
+          </a:p>
+        </p:txBody>
+      </p:sp>
+      <p:sp>
+        <p:nvSpPr>
+          <p:cNvPr id="8" name="Num 1"/>
+          <p:cNvSpPr txBox="1"/>
+          <p:nvPr/>
+        </p:nvSpPr>
+        <p:spPr>
+          <a:xfrm>
+            <a:off x="660400" y="1219200"/>
+            <a:ext cx="457200" cy="457200"/>
+          </a:xfrm>
+          <a:prstGeom prst="rect">
+            <a:avLst/>
+          </a:prstGeom>
+        </p:spPr>
+        <p:txBody>
+          <a:bodyPr wrap="square" rtlCol="0" anchor="ctr">
+            <a:normAutofit/>
+          </a:bodyPr>
           <a:lstStyle/>
           <a:p>
             <a:pPr algn="ctr"/>
-            <a:endParaRPr/>
-          </a:p>
-        </p:txBody>
-      </p:sp>
-      <p:sp>
-        <p:nvSpPr>
-          <p:cNvPr id="4" name="TextBox 3"/>
+            <a:r>
+              <a:rPr lang="en-US" sz="1600" b="1" dirty="0">
+                <a:solidFill>
+                  <a:srgbClr val="FFFFFF"/>
+                </a:solidFill>
+              </a:rPr>
+              <a:t>1</a:t>
+            </a:r>
+          </a:p>
+        </p:txBody>
+      </p:sp>
+      <p:sp>
+        <p:nvSpPr>
+          <p:cNvPr id="9" name="Num 2 circle"/>
+          <p:cNvSpPr/>
+          <p:nvPr/>
+        </p:nvSpPr>
+        <p:spPr>
+          <a:xfrm>
+            <a:off x="4470400" y="1219200"/>
+            <a:ext cx="457200" cy="457200"/>
+          </a:xfrm>
+          <a:prstGeom prst="ellipse">
+            <a:avLst/>
+          </a:prstGeom>
+          <a:solidFill>
+            <a:srgbClr val="2F6B4F"/>
+          </a:solidFill>
+          <a:ln>
+            <a:noFill/>
+          </a:ln>
+        </p:spPr>
+        <p:txBody>
+          <a:bodyPr/>
+          <a:lstStyle/>
+          <a:p>
+            <a:endParaRPr lang="en-US"/>
+          </a:p>
+        </p:txBody>
+      </p:sp>
+      <p:sp>
+        <p:nvSpPr>
+          <p:cNvPr id="10" name="Num 2"/>
           <p:cNvSpPr txBox="1"/>
           <p:nvPr/>
         </p:nvSpPr>
         <p:spPr>
           <a:xfrm>
-            <a:off x="555043" y="391600"/>
-            <a:ext cx="11300000" cy="523220"/>
+            <a:off x="4470400" y="1219200"/>
+            <a:ext cx="457200" cy="457200"/>
           </a:xfrm>
           <a:prstGeom prst="rect">
             <a:avLst/>
           </a:prstGeom>
-          <a:noFill/>
-        </p:spPr>
-        <p:txBody>
-          <a:bodyPr wrap="square" lIns="91440" tIns="45720" rIns="91440" bIns="45720" anchor="t">
-            <a:spAutoFit/>
+        </p:spPr>
+        <p:txBody>
+          <a:bodyPr wrap="square" rtlCol="0" anchor="ctr">
+            <a:normAutofit/>
           </a:bodyPr>
           <a:lstStyle/>
           <a:p>
-            <a:pPr>
-              <a:defRPr sz="2200" b="1">
+            <a:pPr algn="ctr"/>
+            <a:r>
+              <a:rPr lang="en-US" sz="1600" b="1" dirty="0">
+                <a:solidFill>
+                  <a:srgbClr val="FFFFFF"/>
+                </a:solidFill>
+              </a:rPr>
+              <a:t>2</a:t>
+            </a:r>
+          </a:p>
+        </p:txBody>
+      </p:sp>
+      <p:sp>
+        <p:nvSpPr>
+          <p:cNvPr id="11" name="Num 3 circle"/>
+          <p:cNvSpPr/>
+          <p:nvPr/>
+        </p:nvSpPr>
+        <p:spPr>
+          <a:xfrm>
+            <a:off x="8280400" y="1219200"/>
+            <a:ext cx="457200" cy="457200"/>
+          </a:xfrm>
+          <a:prstGeom prst="ellipse">
+            <a:avLst/>
+          </a:prstGeom>
+          <a:solidFill>
+            <a:srgbClr val="8B5A2B"/>
+          </a:solidFill>
+          <a:ln>
+            <a:noFill/>
+          </a:ln>
+        </p:spPr>
+        <p:txBody>
+          <a:bodyPr/>
+          <a:lstStyle/>
+          <a:p>
+            <a:endParaRPr lang="en-US"/>
+          </a:p>
+        </p:txBody>
+      </p:sp>
+      <p:sp>
+        <p:nvSpPr>
+          <p:cNvPr id="12" name="Num 3"/>
+          <p:cNvSpPr txBox="1"/>
+          <p:nvPr/>
+        </p:nvSpPr>
+        <p:spPr>
+          <a:xfrm>
+            <a:off x="8280400" y="1219200"/>
+            <a:ext cx="457200" cy="457200"/>
+          </a:xfrm>
+          <a:prstGeom prst="rect">
+            <a:avLst/>
+          </a:prstGeom>
+        </p:spPr>
+        <p:txBody>
+          <a:bodyPr wrap="square" rtlCol="0" anchor="ctr">
+            <a:normAutofit/>
+          </a:bodyPr>
+          <a:lstStyle/>
+          <a:p>
+            <a:pPr algn="ctr"/>
+            <a:r>
+              <a:rPr lang="en-US" sz="1600" b="1" dirty="0">
+                <a:solidFill>
+                  <a:srgbClr val="FFFFFF"/>
+                </a:solidFill>
+              </a:rPr>
+              <a:t>3</a:t>
+            </a:r>
+          </a:p>
+        </p:txBody>
+      </p:sp>
+      <p:sp>
+        <p:nvSpPr>
+          <p:cNvPr id="13" name="H1"/>
+          <p:cNvSpPr txBox="1"/>
+          <p:nvPr/>
+        </p:nvSpPr>
+        <p:spPr>
+          <a:xfrm>
+            <a:off x="1219200" y="1244600"/>
+            <a:ext cx="2692400" cy="508000"/>
+          </a:xfrm>
+          <a:prstGeom prst="rect">
+            <a:avLst/>
+          </a:prstGeom>
+        </p:spPr>
+        <p:txBody>
+          <a:bodyPr wrap="square" rtlCol="0" anchor="ctr">
+            <a:noAutofit/>
+          </a:bodyPr>
+          <a:lstStyle/>
+          <a:p>
+            <a:pPr algn="l"/>
+            <a:r>
+              <a:rPr lang="en-US" sz="1600" b="1" dirty="0">
                 <a:solidFill>
                   <a:srgbClr val="173F35"/>
                 </a:solidFill>
-                <a:latin typeface="Avenir Next Demi Bold"/>
-              </a:defRPr>
-            </a:pPr>
-            <a:r>
-              <a:rPr lang="en-US" sz="2800" dirty="0"/>
-              <a:t>Why</a:t>
-            </a:r>
-            <a:r>
-              <a:rPr sz="2800" dirty="0"/>
-              <a:t> Section 166(2) </a:t>
-            </a:r>
-            <a:r>
-              <a:rPr lang="en-US" sz="2800" dirty="0"/>
-              <a:t>of Companies Act </a:t>
-            </a:r>
-            <a:r>
-              <a:rPr sz="2800" dirty="0"/>
-              <a:t>Remains Weakly Enforced</a:t>
-            </a:r>
-            <a:r>
-              <a:rPr lang="en-US" sz="2800" dirty="0"/>
-              <a:t> ?</a:t>
-            </a:r>
-            <a:endParaRPr sz="2800" dirty="0"/>
-          </a:p>
-        </p:txBody>
-      </p:sp>
-      <p:sp>
-        <p:nvSpPr>
-          <p:cNvPr id="6" name="Rounded Rectangle 5"/>
+              </a:rPr>
+              <a:t>Substantive &amp;</a:t>
+            </a:r>
+          </a:p>
+          <a:p>
+            <a:pPr algn="l"/>
+            <a:r>
+              <a:rPr lang="en-US" sz="1600" b="1" dirty="0">
+                <a:solidFill>
+                  <a:srgbClr val="173F35"/>
+                </a:solidFill>
+              </a:rPr>
+              <a:t>Doctrinal Hurdles</a:t>
+            </a:r>
+          </a:p>
+        </p:txBody>
+      </p:sp>
+      <p:sp>
+        <p:nvSpPr>
+          <p:cNvPr id="14" name="H2"/>
+          <p:cNvSpPr txBox="1"/>
+          <p:nvPr/>
+        </p:nvSpPr>
+        <p:spPr>
+          <a:xfrm>
+            <a:off x="5029200" y="1244600"/>
+            <a:ext cx="2692400" cy="508000"/>
+          </a:xfrm>
+          <a:prstGeom prst="rect">
+            <a:avLst/>
+          </a:prstGeom>
+        </p:spPr>
+        <p:txBody>
+          <a:bodyPr wrap="square" rtlCol="0" anchor="ctr">
+            <a:noAutofit/>
+          </a:bodyPr>
+          <a:lstStyle/>
+          <a:p>
+            <a:pPr algn="l"/>
+            <a:r>
+              <a:rPr lang="en-US" sz="1600" b="1" dirty="0">
+                <a:solidFill>
+                  <a:srgbClr val="173F35"/>
+                </a:solidFill>
+              </a:rPr>
+              <a:t>Procedural &amp;</a:t>
+            </a:r>
+          </a:p>
+          <a:p>
+            <a:pPr algn="l"/>
+            <a:r>
+              <a:rPr lang="en-US" sz="1600" b="1" dirty="0">
+                <a:solidFill>
+                  <a:srgbClr val="173F35"/>
+                </a:solidFill>
+              </a:rPr>
+              <a:t>Standing Barriers</a:t>
+            </a:r>
+          </a:p>
+        </p:txBody>
+      </p:sp>
+      <p:sp>
+        <p:nvSpPr>
+          <p:cNvPr id="15" name="H3"/>
+          <p:cNvSpPr txBox="1"/>
+          <p:nvPr/>
+        </p:nvSpPr>
+        <p:spPr>
+          <a:xfrm>
+            <a:off x="8839200" y="1244600"/>
+            <a:ext cx="2692400" cy="508000"/>
+          </a:xfrm>
+          <a:prstGeom prst="rect">
+            <a:avLst/>
+          </a:prstGeom>
+        </p:spPr>
+        <p:txBody>
+          <a:bodyPr wrap="square" rtlCol="0" anchor="ctr">
+            <a:noAutofit/>
+          </a:bodyPr>
+          <a:lstStyle/>
+          <a:p>
+            <a:pPr algn="l"/>
+            <a:r>
+              <a:rPr lang="en-US" sz="1600" b="1" dirty="0">
+                <a:solidFill>
+                  <a:srgbClr val="173F35"/>
+                </a:solidFill>
+              </a:rPr>
+              <a:t>Remedial &amp;</a:t>
+            </a:r>
+          </a:p>
+          <a:p>
+            <a:pPr algn="l"/>
+            <a:r>
+              <a:rPr lang="en-US" sz="1600" b="1" dirty="0">
+                <a:solidFill>
+                  <a:srgbClr val="173F35"/>
+                </a:solidFill>
+              </a:rPr>
+              <a:t>Economic Deficits</a:t>
+            </a:r>
+          </a:p>
+        </p:txBody>
+      </p:sp>
+      <p:sp>
+        <p:nvSpPr>
+          <p:cNvPr id="16" name="Div 1"/>
           <p:cNvSpPr/>
           <p:nvPr/>
         </p:nvSpPr>
         <p:spPr>
           <a:xfrm>
-            <a:off x="786384" y="1004068"/>
-            <a:ext cx="10607040" cy="4764721"/>
+            <a:off x="660400" y="1854200"/>
+            <a:ext cx="3251200" cy="25400"/>
+          </a:xfrm>
+          <a:prstGeom prst="rect">
+            <a:avLst/>
+          </a:prstGeom>
+          <a:solidFill>
+            <a:srgbClr val="C5B89A"/>
+          </a:solidFill>
+          <a:ln>
+            <a:noFill/>
+          </a:ln>
+        </p:spPr>
+        <p:txBody>
+          <a:bodyPr/>
+          <a:lstStyle/>
+          <a:p>
+            <a:endParaRPr lang="en-US"/>
+          </a:p>
+        </p:txBody>
+      </p:sp>
+      <p:sp>
+        <p:nvSpPr>
+          <p:cNvPr id="17" name="Div 2"/>
+          <p:cNvSpPr/>
+          <p:nvPr/>
+        </p:nvSpPr>
+        <p:spPr>
+          <a:xfrm>
+            <a:off x="4470400" y="1854200"/>
+            <a:ext cx="3251200" cy="25400"/>
+          </a:xfrm>
+          <a:prstGeom prst="rect">
+            <a:avLst/>
+          </a:prstGeom>
+          <a:solidFill>
+            <a:srgbClr val="A8C4B0"/>
+          </a:solidFill>
+          <a:ln>
+            <a:noFill/>
+          </a:ln>
+        </p:spPr>
+        <p:txBody>
+          <a:bodyPr/>
+          <a:lstStyle/>
+          <a:p>
+            <a:endParaRPr lang="en-US"/>
+          </a:p>
+        </p:txBody>
+      </p:sp>
+      <p:sp>
+        <p:nvSpPr>
+          <p:cNvPr id="18" name="Div 3"/>
+          <p:cNvSpPr/>
+          <p:nvPr/>
+        </p:nvSpPr>
+        <p:spPr>
+          <a:xfrm>
+            <a:off x="8280400" y="1854200"/>
+            <a:ext cx="3251200" cy="25400"/>
+          </a:xfrm>
+          <a:prstGeom prst="rect">
+            <a:avLst/>
+          </a:prstGeom>
+          <a:solidFill>
+            <a:srgbClr val="D4B89A"/>
+          </a:solidFill>
+          <a:ln>
+            <a:noFill/>
+          </a:ln>
+        </p:spPr>
+        <p:txBody>
+          <a:bodyPr/>
+          <a:lstStyle/>
+          <a:p>
+            <a:endParaRPr lang="en-US"/>
+          </a:p>
+        </p:txBody>
+      </p:sp>
+      <p:sp>
+        <p:nvSpPr>
+          <p:cNvPr id="19" name="Body 1"/>
+          <p:cNvSpPr txBox="1"/>
+          <p:nvPr/>
+        </p:nvSpPr>
+        <p:spPr>
+          <a:xfrm>
+            <a:off x="660400" y="1951180"/>
+            <a:ext cx="3403600" cy="2362200"/>
+          </a:xfrm>
+          <a:prstGeom prst="rect">
+            <a:avLst/>
+          </a:prstGeom>
+        </p:spPr>
+        <p:txBody>
+          <a:bodyPr wrap="square" rtlCol="0" anchor="t">
+            <a:noAutofit/>
+          </a:bodyPr>
+          <a:lstStyle/>
+          <a:p>
+            <a:pPr algn="l"/>
+            <a:r>
+              <a:rPr lang="en-US" sz="1400" b="1" dirty="0">
+                <a:solidFill>
+                  <a:srgbClr val="173F35"/>
+                </a:solidFill>
+                <a:latin typeface="Calibri"/>
+                <a:ea typeface="Calibri"/>
+                <a:cs typeface="Calibri"/>
+              </a:rPr>
+              <a:t>Vague terms</a:t>
+            </a:r>
+          </a:p>
+          <a:p>
+            <a:pPr algn="l"/>
+            <a:r>
+              <a:rPr lang="en-US" sz="1400" dirty="0">
+                <a:solidFill>
+                  <a:srgbClr val="2A2A2A"/>
+                </a:solidFill>
+                <a:latin typeface="Calibri"/>
+                <a:ea typeface="Calibri"/>
+                <a:cs typeface="Calibri"/>
+              </a:rPr>
+              <a:t>"Community," "environment," and stakeholder "best interests" stay undefined.</a:t>
+            </a:r>
+          </a:p>
+          <a:p>
+            <a:pPr algn="l"/>
+            <a:endParaRPr lang="en-US" sz="1400" dirty="0"/>
+          </a:p>
+          <a:p>
+            <a:pPr algn="l"/>
+            <a:r>
+              <a:rPr lang="en-US" sz="1400" b="1" dirty="0">
+                <a:solidFill>
+                  <a:srgbClr val="173F35"/>
+                </a:solidFill>
+                <a:latin typeface="Calibri"/>
+                <a:ea typeface="Calibri"/>
+                <a:cs typeface="Calibri"/>
+              </a:rPr>
+              <a:t>Business judgment shield</a:t>
+            </a:r>
+          </a:p>
+          <a:p>
+            <a:pPr algn="l"/>
+            <a:r>
+              <a:rPr lang="en-US" sz="1400" dirty="0">
+                <a:solidFill>
+                  <a:srgbClr val="2A2A2A"/>
+                </a:solidFill>
+                <a:latin typeface="Calibri"/>
+                <a:ea typeface="Calibri"/>
+                <a:cs typeface="Calibri"/>
+              </a:rPr>
+              <a:t>Courts rarely second-guess commercial fiduciary choices.</a:t>
+            </a:r>
+          </a:p>
+          <a:p>
+            <a:pPr algn="l"/>
+            <a:endParaRPr lang="en-US" sz="1400" dirty="0"/>
+          </a:p>
+          <a:p>
+            <a:pPr algn="l"/>
+            <a:r>
+              <a:rPr lang="en-US" sz="1400" b="1" dirty="0">
+                <a:solidFill>
+                  <a:srgbClr val="173F35"/>
+                </a:solidFill>
+                <a:latin typeface="Calibri"/>
+                <a:ea typeface="Calibri"/>
+                <a:cs typeface="Calibri"/>
+              </a:rPr>
+              <a:t>Precedent gap</a:t>
+            </a:r>
+          </a:p>
+          <a:p>
+            <a:pPr algn="l"/>
+            <a:r>
+              <a:rPr lang="en-US" sz="1400" dirty="0">
+                <a:solidFill>
+                  <a:srgbClr val="2A2A2A"/>
+                </a:solidFill>
+                <a:latin typeface="Calibri"/>
+                <a:ea typeface="Calibri"/>
+                <a:cs typeface="Calibri"/>
+              </a:rPr>
+              <a:t>No case law links environmental misstatements to a director's breach of duty.</a:t>
+            </a:r>
+          </a:p>
+        </p:txBody>
+      </p:sp>
+      <p:sp>
+        <p:nvSpPr>
+          <p:cNvPr id="20" name="Body 2"/>
+          <p:cNvSpPr txBox="1"/>
+          <p:nvPr/>
+        </p:nvSpPr>
+        <p:spPr>
+          <a:xfrm>
+            <a:off x="4470400" y="1951180"/>
+            <a:ext cx="3251200" cy="2362200"/>
+          </a:xfrm>
+          <a:prstGeom prst="rect">
+            <a:avLst/>
+          </a:prstGeom>
+        </p:spPr>
+        <p:txBody>
+          <a:bodyPr wrap="square" rtlCol="0" anchor="t">
+            <a:noAutofit/>
+          </a:bodyPr>
+          <a:lstStyle/>
+          <a:p>
+            <a:pPr algn="l"/>
+            <a:r>
+              <a:rPr lang="en-US" sz="1400" b="1" dirty="0">
+                <a:solidFill>
+                  <a:srgbClr val="173F35"/>
+                </a:solidFill>
+                <a:latin typeface="Calibri"/>
+                <a:ea typeface="Calibri"/>
+                <a:cs typeface="Calibri"/>
+              </a:rPr>
+              <a:t>Narrow standing</a:t>
+            </a:r>
+          </a:p>
+          <a:p>
+            <a:pPr algn="l"/>
+            <a:r>
+              <a:rPr lang="en-US" sz="1400" dirty="0">
+                <a:solidFill>
+                  <a:srgbClr val="2A2A2A"/>
+                </a:solidFill>
+                <a:latin typeface="Calibri"/>
+                <a:ea typeface="Calibri"/>
+                <a:cs typeface="Calibri"/>
+              </a:rPr>
+              <a:t>Ss. 241–244 mismanagement petitions open only to shareholders.</a:t>
+            </a:r>
+          </a:p>
+          <a:p>
+            <a:pPr algn="l"/>
+            <a:endParaRPr lang="en-US" sz="1400" dirty="0"/>
+          </a:p>
+          <a:p>
+            <a:pPr algn="l"/>
+            <a:r>
+              <a:rPr lang="en-US" sz="1400" b="1" dirty="0">
+                <a:solidFill>
+                  <a:srgbClr val="173F35"/>
+                </a:solidFill>
+                <a:latin typeface="Calibri"/>
+                <a:ea typeface="Calibri"/>
+                <a:cs typeface="Calibri"/>
+              </a:rPr>
+              <a:t>Stakeholders shut out</a:t>
+            </a:r>
+          </a:p>
+          <a:p>
+            <a:pPr algn="l"/>
+            <a:r>
+              <a:rPr lang="en-US" sz="1400" dirty="0">
+                <a:solidFill>
+                  <a:srgbClr val="2A2A2A"/>
+                </a:solidFill>
+                <a:latin typeface="Calibri"/>
+                <a:ea typeface="Calibri"/>
+                <a:cs typeface="Calibri"/>
+              </a:rPr>
+              <a:t>External parties cannot enforce the environmental duty.</a:t>
+            </a:r>
+          </a:p>
+          <a:p>
+            <a:pPr algn="l"/>
+            <a:endParaRPr lang="en-US" sz="1400" dirty="0"/>
+          </a:p>
+          <a:p>
+            <a:pPr algn="l"/>
+            <a:r>
+              <a:rPr lang="en-US" sz="1400" b="1" dirty="0">
+                <a:solidFill>
+                  <a:srgbClr val="173F35"/>
+                </a:solidFill>
+                <a:latin typeface="Calibri"/>
+                <a:ea typeface="Calibri"/>
+                <a:cs typeface="Calibri"/>
+              </a:rPr>
+              <a:t>Missing referral bridge</a:t>
+            </a:r>
+          </a:p>
+          <a:p>
+            <a:pPr algn="l"/>
+            <a:r>
+              <a:rPr lang="en-US" sz="1400" dirty="0">
+                <a:solidFill>
+                  <a:srgbClr val="2A2A2A"/>
+                </a:solidFill>
+                <a:latin typeface="Calibri"/>
+                <a:ea typeface="Calibri"/>
+                <a:cs typeface="Calibri"/>
+              </a:rPr>
+              <a:t>CCPA or SEBI greenwashing findings do not auto-trigger MCA action under s. 166(2).</a:t>
+            </a:r>
+          </a:p>
+        </p:txBody>
+      </p:sp>
+      <p:sp>
+        <p:nvSpPr>
+          <p:cNvPr id="21" name="Body 3"/>
+          <p:cNvSpPr txBox="1"/>
+          <p:nvPr/>
+        </p:nvSpPr>
+        <p:spPr>
+          <a:xfrm>
+            <a:off x="8280400" y="1951180"/>
+            <a:ext cx="3251200" cy="2362200"/>
+          </a:xfrm>
+          <a:prstGeom prst="rect">
+            <a:avLst/>
+          </a:prstGeom>
+        </p:spPr>
+        <p:txBody>
+          <a:bodyPr wrap="square" rtlCol="0" anchor="t">
+            <a:normAutofit/>
+          </a:bodyPr>
+          <a:lstStyle/>
+          <a:p>
+            <a:pPr algn="l"/>
+            <a:r>
+              <a:rPr lang="en-US" sz="1400" b="1" dirty="0">
+                <a:solidFill>
+                  <a:srgbClr val="173F35"/>
+                </a:solidFill>
+                <a:latin typeface="Calibri"/>
+                <a:ea typeface="Calibri"/>
+                <a:cs typeface="Calibri"/>
+              </a:rPr>
+              <a:t>Ineffective fines</a:t>
+            </a:r>
+          </a:p>
+          <a:p>
+            <a:pPr algn="l"/>
+            <a:r>
+              <a:rPr lang="en-US" sz="1400" dirty="0">
+                <a:solidFill>
+                  <a:srgbClr val="2A2A2A"/>
+                </a:solidFill>
+                <a:latin typeface="Calibri"/>
+                <a:ea typeface="Calibri"/>
+                <a:cs typeface="Calibri"/>
+              </a:rPr>
+              <a:t>S. 166(7) caps penalties at ₹1–5 Lakh, too small to deter board-level greenwashing.</a:t>
+            </a:r>
+          </a:p>
+          <a:p>
+            <a:pPr algn="l"/>
+            <a:endParaRPr lang="en-US" sz="1400" dirty="0"/>
+          </a:p>
+          <a:p>
+            <a:pPr algn="l"/>
+            <a:r>
+              <a:rPr lang="en-US" sz="1400" b="1" dirty="0">
+                <a:solidFill>
+                  <a:srgbClr val="173F35"/>
+                </a:solidFill>
+                <a:latin typeface="Calibri"/>
+                <a:ea typeface="Calibri"/>
+                <a:cs typeface="Calibri"/>
+              </a:rPr>
+              <a:t>Short-term bias</a:t>
+            </a:r>
+          </a:p>
+          <a:p>
+            <a:pPr algn="l"/>
+            <a:r>
+              <a:rPr lang="en-US" sz="1400" dirty="0">
+                <a:solidFill>
+                  <a:srgbClr val="2A2A2A"/>
+                </a:solidFill>
+                <a:latin typeface="Calibri"/>
+                <a:ea typeface="Calibri"/>
+                <a:cs typeface="Calibri"/>
+              </a:rPr>
+              <a:t>Directors favour immediate profit over unpenalized environmental duties.</a:t>
+            </a:r>
+          </a:p>
+        </p:txBody>
+      </p:sp>
+      <p:sp>
+        <p:nvSpPr>
+          <p:cNvPr id="22" name="Answer bar"/>
+          <p:cNvSpPr/>
+          <p:nvPr/>
+        </p:nvSpPr>
+        <p:spPr>
+          <a:xfrm>
+            <a:off x="457200" y="5029200"/>
+            <a:ext cx="11277600" cy="1320800"/>
           </a:xfrm>
           <a:prstGeom prst="roundRect">
             <a:avLst/>
           </a:prstGeom>
           <a:solidFill>
-            <a:srgbClr val="FFF6EA"/>
+            <a:srgbClr val="F7F3E8"/>
           </a:solidFill>
-          <a:ln w="12700">
-            <a:solidFill>
-              <a:srgbClr val="E7C894"/>
-            </a:solidFill>
+          <a:ln>
+            <a:noFill/>
           </a:ln>
         </p:spPr>
-        <p:style>
-          <a:lnRef idx="1">
-            <a:schemeClr val="accent1"/>
-          </a:lnRef>
-          <a:fillRef idx="3">
-            <a:schemeClr val="accent1"/>
-          </a:fillRef>
-          <a:effectRef idx="2">
-            <a:schemeClr val="accent1"/>
-          </a:effectRef>
-          <a:fontRef idx="minor">
-            <a:schemeClr val="lt1"/>
-          </a:fontRef>
-        </p:style>
-        <p:txBody>
-          <a:bodyPr rtlCol="0" anchor="ctr"/>
-          <a:lstStyle/>
-          <a:p>
-            <a:pPr algn="ctr"/>
-            <a:endParaRPr>
-              <a:latin typeface="Avenir Next" panose="020B0503020202020204" pitchFamily="34" charset="0"/>
+        <p:txBody>
+          <a:bodyPr/>
+          <a:lstStyle/>
+          <a:p>
+            <a:endParaRPr lang="en-US"/>
+          </a:p>
+        </p:txBody>
+      </p:sp>
+      <p:sp>
+        <p:nvSpPr>
+          <p:cNvPr id="23" name="Answer"/>
+          <p:cNvSpPr txBox="1"/>
+          <p:nvPr/>
+        </p:nvSpPr>
+        <p:spPr>
+          <a:xfrm>
+            <a:off x="660400" y="5181600"/>
+            <a:ext cx="10871200" cy="914400"/>
+          </a:xfrm>
+          <a:prstGeom prst="rect">
+            <a:avLst/>
+          </a:prstGeom>
+        </p:spPr>
+        <p:txBody>
+          <a:bodyPr wrap="square" rtlCol="0" anchor="ctr">
+            <a:noAutofit/>
+          </a:bodyPr>
+          <a:lstStyle/>
+          <a:p>
+            <a:r>
+              <a:rPr lang="en-IN" sz="1400" b="1" dirty="0">
+                <a:solidFill>
+                  <a:srgbClr val="173F35"/>
+                </a:solidFill>
+              </a:rPr>
+              <a:t>Research Question 4: What duties of directors, disclosure obligations and assurance requirements, under Indian company and securities law, can ground liability for misleading environmental claims?</a:t>
+            </a:r>
+          </a:p>
+          <a:p>
+            <a:pPr algn="l"/>
+            <a:endParaRPr lang="en-US" sz="500" b="1" dirty="0">
+              <a:solidFill>
+                <a:srgbClr val="173F35"/>
+              </a:solidFill>
             </a:endParaRPr>
           </a:p>
-        </p:txBody>
-      </p:sp>
-      <p:sp>
-        <p:nvSpPr>
-          <p:cNvPr id="10" name="TextBox 9"/>
+          <a:p>
+            <a:pPr algn="l"/>
+            <a:r>
+              <a:rPr lang="en-US" sz="1400" dirty="0">
+                <a:solidFill>
+                  <a:srgbClr val="2A2A2A"/>
+                </a:solidFill>
+                <a:latin typeface="Calibri"/>
+                <a:cs typeface="Calibri"/>
+              </a:rPr>
+              <a:t>Answer to RQ4: Duties already exist in Section 166(2) and SEBI rules. What is missing is the trigger, open legal standing, meaningful penalties, and an automatic bridge between regulators.</a:t>
+            </a:r>
+          </a:p>
+        </p:txBody>
+      </p:sp>
+      <p:sp>
+        <p:nvSpPr>
+          <p:cNvPr id="24" name="Source"/>
           <p:cNvSpPr txBox="1"/>
           <p:nvPr/>
         </p:nvSpPr>
         <p:spPr>
           <a:xfrm>
-            <a:off x="1111962" y="1254045"/>
-            <a:ext cx="10073490" cy="4349909"/>
+            <a:off x="457200" y="6474695"/>
+            <a:ext cx="3556000" cy="279400"/>
           </a:xfrm>
           <a:prstGeom prst="rect">
             <a:avLst/>
           </a:prstGeom>
-          <a:noFill/>
-        </p:spPr>
-        <p:txBody>
-          <a:bodyPr wrap="square" lIns="91440" tIns="45720" rIns="91440" bIns="45720" anchor="t">
-            <a:spAutoFit/>
+        </p:spPr>
+        <p:txBody>
+          <a:bodyPr wrap="square" rtlCol="0" anchor="t">
+            <a:normAutofit/>
           </a:bodyPr>
           <a:lstStyle/>
           <a:p>
-            <a:pPr algn="just">
-              <a:spcAft>
-                <a:spcPts val="400"/>
-              </a:spcAft>
-              <a:defRPr sz="1400" b="1">
-                <a:solidFill>
-                  <a:srgbClr val="12402D"/>
-                </a:solidFill>
-                <a:latin typeface="Avenir Next"/>
-              </a:defRPr>
-            </a:pPr>
-            <a:r>
-              <a:rPr sz="1600" dirty="0">
-                <a:latin typeface="Avenir Next" panose="020B0503020202020204" pitchFamily="34" charset="0"/>
-              </a:rPr>
-              <a:t>1. Substantive &amp; Doctrinal Hurdles</a:t>
-            </a:r>
-          </a:p>
-          <a:p>
-            <a:pPr>
-              <a:spcAft>
-                <a:spcPts val="300"/>
-              </a:spcAft>
-              <a:defRPr sz="1150">
-                <a:solidFill>
-                  <a:srgbClr val="2D2D2D"/>
-                </a:solidFill>
-              </a:defRPr>
-            </a:pPr>
-            <a:r>
-              <a:rPr sz="1600" dirty="0">
-                <a:latin typeface="Avenir Next" panose="020B0503020202020204" pitchFamily="34" charset="0"/>
-              </a:rPr>
-              <a:t>• Vague Statutory Terms: </a:t>
-            </a:r>
-            <a:r>
-              <a:rPr lang="en-US" sz="1600" dirty="0">
-                <a:latin typeface="Avenir Next" panose="020B0503020202020204" pitchFamily="34" charset="0"/>
-                <a:ea typeface="+mn-lt"/>
-                <a:cs typeface="+mn-lt"/>
-              </a:rPr>
-              <a:t>The terms "community," "environment," and "best interests of stakeholders" are broad and undefined. </a:t>
-            </a:r>
-          </a:p>
-          <a:p>
-            <a:pPr>
-              <a:spcAft>
-                <a:spcPts val="300"/>
-              </a:spcAft>
-              <a:defRPr sz="1150">
-                <a:solidFill>
-                  <a:srgbClr val="2D2D2D"/>
-                </a:solidFill>
-              </a:defRPr>
-            </a:pPr>
-            <a:r>
-              <a:rPr lang="en-US" sz="1600" dirty="0">
-                <a:latin typeface="Avenir Next" panose="020B0503020202020204" pitchFamily="34" charset="0"/>
-              </a:rPr>
-              <a:t>• Business Judgment Rule: Courts hesitate to question commercial decisions under fiduciary duties.</a:t>
-            </a:r>
-          </a:p>
-          <a:p>
-            <a:pPr>
-              <a:spcAft>
-                <a:spcPts val="1000"/>
-              </a:spcAft>
-              <a:defRPr sz="1150">
-                <a:solidFill>
-                  <a:srgbClr val="2D2D2D"/>
-                </a:solidFill>
-              </a:defRPr>
-            </a:pPr>
-            <a:r>
-              <a:rPr sz="1600" dirty="0">
-                <a:latin typeface="Avenir Next" panose="020B0503020202020204" pitchFamily="34" charset="0"/>
-              </a:rPr>
-              <a:t>• Precedent Gap: No established case law connects environmental misstatements directly to a director's breach of duty.</a:t>
-            </a:r>
-          </a:p>
-          <a:p>
-            <a:pPr>
-              <a:spcAft>
-                <a:spcPts val="400"/>
-              </a:spcAft>
-              <a:defRPr sz="1400" b="1">
-                <a:solidFill>
-                  <a:srgbClr val="12402D"/>
-                </a:solidFill>
-              </a:defRPr>
-            </a:pPr>
-            <a:r>
-              <a:rPr sz="1600" dirty="0">
-                <a:latin typeface="Avenir Next" panose="020B0503020202020204" pitchFamily="34" charset="0"/>
-              </a:rPr>
-              <a:t>2. Procedural &amp; Standing Barriers</a:t>
-            </a:r>
-          </a:p>
-          <a:p>
-            <a:pPr>
-              <a:spcAft>
-                <a:spcPts val="300"/>
-              </a:spcAft>
-              <a:defRPr sz="1150">
-                <a:solidFill>
-                  <a:srgbClr val="2D2D2D"/>
-                </a:solidFill>
-              </a:defRPr>
-            </a:pPr>
-            <a:r>
-              <a:rPr sz="1600" dirty="0">
-                <a:latin typeface="Avenir Next" panose="020B0503020202020204" pitchFamily="34" charset="0"/>
-              </a:rPr>
-              <a:t>• Narrow Standing: Mismanagement petitions (Sections 241–244) are open only to shareholders; external stakeholders are excluded.</a:t>
-            </a:r>
-          </a:p>
-          <a:p>
-            <a:pPr>
-              <a:spcAft>
-                <a:spcPts val="1000"/>
-              </a:spcAft>
-              <a:defRPr sz="1150">
-                <a:solidFill>
-                  <a:srgbClr val="2D2D2D"/>
-                </a:solidFill>
-              </a:defRPr>
-            </a:pPr>
-            <a:r>
-              <a:rPr sz="1600" dirty="0">
-                <a:latin typeface="Avenir Next" panose="020B0503020202020204" pitchFamily="34" charset="0"/>
-              </a:rPr>
-              <a:t>• Missing Referral Bridge: CCPA or SEBI greenwashing findings do not automatically trigger MCA action under Section 166(2).</a:t>
-            </a:r>
-          </a:p>
-          <a:p>
-            <a:pPr>
-              <a:spcAft>
-                <a:spcPts val="400"/>
-              </a:spcAft>
-              <a:defRPr sz="1400" b="1">
-                <a:solidFill>
-                  <a:srgbClr val="A8552F"/>
-                </a:solidFill>
-              </a:defRPr>
-            </a:pPr>
-            <a:r>
-              <a:rPr sz="1600" b="1" dirty="0">
-                <a:solidFill>
-                  <a:srgbClr val="12402D"/>
-                </a:solidFill>
-                <a:latin typeface="Avenir Next" panose="020B0503020202020204" pitchFamily="34" charset="0"/>
-              </a:rPr>
-              <a:t>3. Remedial &amp; Economic Deficits</a:t>
-            </a:r>
-          </a:p>
-          <a:p>
-            <a:pPr>
-              <a:spcAft>
-                <a:spcPts val="300"/>
-              </a:spcAft>
-              <a:defRPr sz="1150">
-                <a:solidFill>
-                  <a:srgbClr val="2D2D2D"/>
-                </a:solidFill>
-              </a:defRPr>
-            </a:pPr>
-            <a:r>
-              <a:rPr sz="1600" dirty="0">
-                <a:latin typeface="Avenir Next" panose="020B0503020202020204" pitchFamily="34" charset="0"/>
-              </a:rPr>
-              <a:t>• Ineffective Fines: Section 166(7) caps penalties at ₹1–5 Lakhs</a:t>
-            </a:r>
-            <a:r>
-              <a:rPr lang="en-US" sz="1600" dirty="0">
-                <a:latin typeface="Avenir Next" panose="020B0503020202020204" pitchFamily="34" charset="0"/>
-              </a:rPr>
-              <a:t>, </a:t>
-            </a:r>
-            <a:r>
-              <a:rPr sz="1600" dirty="0">
-                <a:latin typeface="Avenir Next" panose="020B0503020202020204" pitchFamily="34" charset="0"/>
-              </a:rPr>
-              <a:t>far too small to deter board-level greenwashing.</a:t>
-            </a:r>
-          </a:p>
-          <a:p>
-            <a:pPr>
-              <a:defRPr sz="1150">
-                <a:solidFill>
-                  <a:srgbClr val="2D2D2D"/>
-                </a:solidFill>
-              </a:defRPr>
-            </a:pPr>
-            <a:r>
-              <a:rPr sz="1600" dirty="0">
-                <a:latin typeface="Avenir Next" panose="020B0503020202020204" pitchFamily="34" charset="0"/>
-              </a:rPr>
-              <a:t>• Short-Term Bias: Directors prioritize </a:t>
-            </a:r>
-            <a:r>
-              <a:rPr lang="en-US" sz="1600" dirty="0">
-                <a:latin typeface="Avenir Next" panose="020B0503020202020204" pitchFamily="34" charset="0"/>
-              </a:rPr>
-              <a:t>short term</a:t>
-            </a:r>
-            <a:r>
-              <a:rPr sz="1600" dirty="0">
-                <a:latin typeface="Avenir Next" panose="020B0503020202020204" pitchFamily="34" charset="0"/>
-              </a:rPr>
-              <a:t> commercial profit over </a:t>
-            </a:r>
-            <a:r>
-              <a:rPr lang="en-US" sz="1600" dirty="0">
-                <a:latin typeface="Avenir Next" panose="020B0503020202020204" pitchFamily="34" charset="0"/>
-              </a:rPr>
-              <a:t>un-penalized </a:t>
-            </a:r>
-            <a:r>
-              <a:rPr sz="1600" dirty="0">
-                <a:latin typeface="Avenir Next" panose="020B0503020202020204" pitchFamily="34" charset="0"/>
-              </a:rPr>
-              <a:t>environmental duties.</a:t>
-            </a:r>
-          </a:p>
-        </p:txBody>
-      </p:sp>
-      <p:sp>
-        <p:nvSpPr>
-          <p:cNvPr id="17" name="TextBox 16"/>
-          <p:cNvSpPr txBox="1"/>
-          <p:nvPr/>
-        </p:nvSpPr>
-        <p:spPr>
-          <a:xfrm>
-            <a:off x="786384" y="6547401"/>
-            <a:ext cx="2153154" cy="307777"/>
-          </a:xfrm>
-          <a:prstGeom prst="rect">
-            <a:avLst/>
-          </a:prstGeom>
-          <a:noFill/>
-        </p:spPr>
-        <p:txBody>
-          <a:bodyPr wrap="none" lIns="91440" tIns="45720" rIns="91440" bIns="45720" anchor="t">
-            <a:spAutoFit/>
-          </a:bodyPr>
-          <a:lstStyle/>
-          <a:p>
-            <a:pPr>
-              <a:defRPr sz="850">
-                <a:solidFill>
-                  <a:srgbClr val="6B6F6A"/>
-                </a:solidFill>
-                <a:latin typeface="Avenir Next"/>
-              </a:defRPr>
-            </a:pPr>
-            <a:r>
-              <a:rPr sz="1400" dirty="0">
-                <a:latin typeface="Avenir Next" panose="020B0503020202020204" pitchFamily="34" charset="0"/>
-              </a:rPr>
-              <a:t>Source base: Chapter </a:t>
-            </a:r>
-            <a:r>
-              <a:rPr lang="en-US" sz="1400" dirty="0">
-                <a:latin typeface="Avenir Next" panose="020B0503020202020204" pitchFamily="34" charset="0"/>
-              </a:rPr>
-              <a:t>3.</a:t>
-            </a:r>
-            <a:endParaRPr sz="1400" dirty="0">
-              <a:latin typeface="Avenir Next" panose="020B0503020202020204" pitchFamily="34" charset="0"/>
-            </a:endParaRPr>
-          </a:p>
-        </p:txBody>
-      </p:sp>
-      <p:sp>
-        <p:nvSpPr>
-          <p:cNvPr id="2" name="TextBox 1">
-            <a:extLst>
-              <a:ext uri="{FF2B5EF4-FFF2-40B4-BE49-F238E27FC236}">
-                <a16:creationId xmlns:a16="http://schemas.microsoft.com/office/drawing/2014/main" id="{3CF64308-CD14-51EE-4990-8D520F4793B7}"/>
-              </a:ext>
-            </a:extLst>
-          </p:cNvPr>
-          <p:cNvSpPr txBox="1"/>
-          <p:nvPr/>
-        </p:nvSpPr>
-        <p:spPr>
-          <a:xfrm>
-            <a:off x="786384" y="5898882"/>
-            <a:ext cx="10753086" cy="538609"/>
-          </a:xfrm>
-          <a:prstGeom prst="rect">
-            <a:avLst/>
-          </a:prstGeom>
-          <a:noFill/>
-        </p:spPr>
-        <p:txBody>
-          <a:bodyPr wrap="square" lIns="45720" tIns="22860" rIns="45720" bIns="22860" anchor="t">
-            <a:spAutoFit/>
-          </a:bodyPr>
-          <a:lstStyle/>
-          <a:p>
-            <a:pPr>
-              <a:defRPr sz="1100" b="1">
-                <a:solidFill>
-                  <a:srgbClr val="12402D"/>
-                </a:solidFill>
-              </a:defRPr>
-            </a:pPr>
-            <a:r>
-              <a:rPr sz="1600" dirty="0">
-                <a:latin typeface="Avenir Next" panose="020B0503020202020204" pitchFamily="34" charset="0"/>
-              </a:rPr>
-              <a:t>Answer to RQ4: The duties already exist in Section 166(2) and SEBI rules. What is missing is the trigger: open legal standing, meaningful penalties, and an automatic bridge between regulators.</a:t>
-            </a:r>
-            <a:endParaRPr lang="en-US" sz="1200" dirty="0">
-              <a:latin typeface="Avenir Next" panose="020B0503020202020204" pitchFamily="34" charset="0"/>
-              <a:ea typeface="+mn-lt"/>
-              <a:cs typeface="+mn-lt"/>
-            </a:endParaRPr>
+            <a:pPr algn="l"/>
+            <a:r>
+              <a:rPr lang="en-US" sz="1200" dirty="0">
+                <a:solidFill>
+                  <a:srgbClr val="6B6B6B"/>
+                </a:solidFill>
+              </a:rPr>
+              <a:t>Source base: Chapter 3.</a:t>
+            </a:r>
           </a:p>
         </p:txBody>
       </p:sp>
     </p:spTree>
     <p:extLst>
       <p:ext uri="{BB962C8B-B14F-4D97-AF65-F5344CB8AC3E}">
-        <p14:creationId xmlns:p14="http://schemas.microsoft.com/office/powerpoint/2010/main" val="2815261695"/>
+        <p14:creationId xmlns:p14="http://schemas.microsoft.com/office/powerpoint/2010/main" val="4076067572"/>
       </p:ext>
     </p:extLst>
   </p:cSld>
@@ -17529,7 +17875,7 @@
                     <a:lstStyle/>
                     <a:p>
                       <a:r>
-                        <a:rPr sz="1200" b="1">
+                        <a:rPr sz="1200" b="1" dirty="0">
                           <a:latin typeface="Avenir Next" panose="020B0503020202020204" pitchFamily="34" charset="0"/>
                         </a:rPr>
                         <a:t>4</a:t>
@@ -17548,7 +17894,7 @@
                     <a:lstStyle/>
                     <a:p>
                       <a:r>
-                        <a:rPr sz="1200">
+                        <a:rPr sz="1200" dirty="0">
                           <a:latin typeface="Avenir Next" panose="020B0503020202020204" pitchFamily="34" charset="0"/>
                         </a:rPr>
                         <a:t>What duties of directors, disclosure obligations and assurance requirements, under Indian company and securities law, can ground liability for misleading environmental claims?</a:t>
@@ -27612,612 +27958,6 @@
       </p:sp>
       <p:sp>
         <p:nvSpPr>
-          <p:cNvPr id="5" name="Rounded Rectangle 4"/>
-          <p:cNvSpPr/>
-          <p:nvPr/>
-        </p:nvSpPr>
-        <p:spPr>
-          <a:xfrm>
-            <a:off x="557784" y="1056067"/>
-            <a:ext cx="3557016" cy="4043967"/>
-          </a:xfrm>
-          <a:prstGeom prst="roundRect">
-            <a:avLst/>
-          </a:prstGeom>
-          <a:solidFill>
-            <a:srgbClr val="FFFDF8"/>
-          </a:solidFill>
-          <a:ln w="15240">
-            <a:solidFill>
-              <a:srgbClr val="D6C9B8"/>
-            </a:solidFill>
-          </a:ln>
-        </p:spPr>
-        <p:style>
-          <a:lnRef idx="1">
-            <a:schemeClr val="accent1"/>
-          </a:lnRef>
-          <a:fillRef idx="3">
-            <a:schemeClr val="accent1"/>
-          </a:fillRef>
-          <a:effectRef idx="2">
-            <a:schemeClr val="accent1"/>
-          </a:effectRef>
-          <a:fontRef idx="minor">
-            <a:schemeClr val="lt1"/>
-          </a:fontRef>
-        </p:style>
-        <p:txBody>
-          <a:bodyPr wrap="square" lIns="164592" tIns="164592" rIns="164592" bIns="164592" rtlCol="0" anchor="ctr"/>
-          <a:lstStyle/>
-          <a:p>
-            <a:pPr algn="ctr">
-              <a:spcAft>
-                <a:spcPts val="1000"/>
-              </a:spcAft>
-              <a:defRPr sz="1400" b="1">
-                <a:solidFill>
-                  <a:srgbClr val="12402D"/>
-                </a:solidFill>
-                <a:latin typeface="Calibri"/>
-              </a:defRPr>
-            </a:pPr>
-            <a:r>
-              <a:rPr sz="1200" dirty="0">
-                <a:latin typeface="Avenir Next" panose="020B0503020202020204" pitchFamily="34" charset="0"/>
-              </a:rPr>
-              <a:t>1. Definition &amp; Core Trick</a:t>
-            </a:r>
-          </a:p>
-          <a:p>
-            <a:pPr>
-              <a:spcAft>
-                <a:spcPts val="800"/>
-              </a:spcAft>
-            </a:pPr>
-            <a:r>
-              <a:rPr sz="1200" b="1" dirty="0">
-                <a:solidFill>
-                  <a:srgbClr val="22704E"/>
-                </a:solidFill>
-                <a:latin typeface="Avenir Next" panose="020B0503020202020204" pitchFamily="34" charset="0"/>
-              </a:rPr>
-              <a:t>• CCPA 2024 </a:t>
-            </a:r>
-            <a:r>
-              <a:rPr lang="en-US" sz="1200" b="1" dirty="0">
-                <a:solidFill>
-                  <a:srgbClr val="22704E"/>
-                </a:solidFill>
-                <a:latin typeface="Avenir Next" panose="020B0503020202020204" pitchFamily="34" charset="0"/>
-              </a:rPr>
-              <a:t>Definition</a:t>
-            </a:r>
-            <a:r>
-              <a:rPr sz="1200" b="1" dirty="0">
-                <a:solidFill>
-                  <a:srgbClr val="22704E"/>
-                </a:solidFill>
-                <a:latin typeface="Avenir Next" panose="020B0503020202020204" pitchFamily="34" charset="0"/>
-              </a:rPr>
-              <a:t>: </a:t>
-            </a:r>
-            <a:r>
-              <a:rPr lang="en-IN" sz="1200" dirty="0">
-                <a:solidFill>
-                  <a:srgbClr val="2D2D2D"/>
-                </a:solidFill>
-                <a:latin typeface="Avenir Next" panose="020B0503020202020204" pitchFamily="34" charset="0"/>
-              </a:rPr>
-              <a:t>India’s CCPA Guidelines define greenwashing as "any deceptive or misleading practice" involving: (</a:t>
-            </a:r>
-            <a:r>
-              <a:rPr lang="en-IN" sz="1200" dirty="0" err="1">
-                <a:solidFill>
-                  <a:srgbClr val="2D2D2D"/>
-                </a:solidFill>
-                <a:latin typeface="Avenir Next" panose="020B0503020202020204" pitchFamily="34" charset="0"/>
-              </a:rPr>
-              <a:t>i</a:t>
-            </a:r>
-            <a:r>
-              <a:rPr lang="en-IN" sz="1200" dirty="0">
-                <a:solidFill>
-                  <a:srgbClr val="2D2D2D"/>
-                </a:solidFill>
-                <a:latin typeface="Avenir Next" panose="020B0503020202020204" pitchFamily="34" charset="0"/>
-              </a:rPr>
-              <a:t>) concealing or omitting info; (ii) making vague, false, or unsubstantiated claims; or (iii) using misleading words/imagery emphasizing positive aspects while downplaying harmful attributes.</a:t>
-            </a:r>
-          </a:p>
-          <a:p>
-            <a:pPr>
-              <a:spcAft>
-                <a:spcPts val="800"/>
-              </a:spcAft>
-            </a:pPr>
-            <a:r>
-              <a:rPr sz="1200" b="1" dirty="0">
-                <a:solidFill>
-                  <a:srgbClr val="22704E"/>
-                </a:solidFill>
-                <a:latin typeface="Avenir Next" panose="020B0503020202020204" pitchFamily="34" charset="0"/>
-              </a:rPr>
-              <a:t>• Global Scope (ESMA): </a:t>
-            </a:r>
-            <a:r>
-              <a:rPr lang="en-IN" sz="1200" dirty="0">
-                <a:solidFill>
-                  <a:srgbClr val="2D2D2D"/>
-                </a:solidFill>
-                <a:latin typeface="Avenir Next" panose="020B0503020202020204" pitchFamily="34" charset="0"/>
-              </a:rPr>
-              <a:t>ESMA &amp; Greenpeace view it as sustainability communications that fail to fairly reflect the true environmental profile of an entity, product, or financial service.</a:t>
-            </a:r>
-          </a:p>
-          <a:p>
-            <a:pPr>
-              <a:spcAft>
-                <a:spcPts val="400"/>
-              </a:spcAft>
-            </a:pPr>
-            <a:r>
-              <a:rPr lang="en-IN" sz="1200" b="1" dirty="0">
-                <a:solidFill>
-                  <a:srgbClr val="22704E"/>
-                </a:solidFill>
-                <a:latin typeface="Avenir Next" panose="020B0503020202020204" pitchFamily="34" charset="0"/>
-              </a:rPr>
-              <a:t>• Core Mechanism: </a:t>
-            </a:r>
-            <a:r>
-              <a:rPr lang="en-IN" sz="1200" dirty="0">
-                <a:solidFill>
-                  <a:srgbClr val="2D2D2D"/>
-                </a:solidFill>
-                <a:latin typeface="Avenir Next" panose="020B0503020202020204" pitchFamily="34" charset="0"/>
-              </a:rPr>
-              <a:t>Organizational Decoupling — public green commitments operating detached from day-to-day operations.</a:t>
-            </a:r>
-          </a:p>
-        </p:txBody>
-      </p:sp>
-      <p:sp>
-        <p:nvSpPr>
-          <p:cNvPr id="6" name="Rounded Rectangle 5"/>
-          <p:cNvSpPr/>
-          <p:nvPr/>
-        </p:nvSpPr>
-        <p:spPr>
-          <a:xfrm>
-            <a:off x="4315968" y="1056067"/>
-            <a:ext cx="3557016" cy="4043967"/>
-          </a:xfrm>
-          <a:prstGeom prst="roundRect">
-            <a:avLst/>
-          </a:prstGeom>
-          <a:solidFill>
-            <a:srgbClr val="EEF4ED"/>
-          </a:solidFill>
-          <a:ln w="15240">
-            <a:solidFill>
-              <a:srgbClr val="9EB89D"/>
-            </a:solidFill>
-          </a:ln>
-        </p:spPr>
-        <p:style>
-          <a:lnRef idx="1">
-            <a:schemeClr val="accent1"/>
-          </a:lnRef>
-          <a:fillRef idx="3">
-            <a:schemeClr val="accent1"/>
-          </a:fillRef>
-          <a:effectRef idx="2">
-            <a:schemeClr val="accent1"/>
-          </a:effectRef>
-          <a:fontRef idx="minor">
-            <a:schemeClr val="lt1"/>
-          </a:fontRef>
-        </p:style>
-        <p:txBody>
-          <a:bodyPr wrap="square" lIns="164592" tIns="164592" rIns="164592" bIns="164592" rtlCol="0" anchor="ctr"/>
-          <a:lstStyle/>
-          <a:p>
-            <a:pPr algn="ctr">
-              <a:spcAft>
-                <a:spcPts val="1000"/>
-              </a:spcAft>
-              <a:defRPr sz="1400" b="1">
-                <a:solidFill>
-                  <a:srgbClr val="12402D"/>
-                </a:solidFill>
-                <a:latin typeface="Calibri"/>
-              </a:defRPr>
-            </a:pPr>
-            <a:r>
-              <a:rPr sz="1400" dirty="0">
-                <a:latin typeface="Avenir Next" panose="020B0503020202020204" pitchFamily="34" charset="0"/>
-              </a:rPr>
-              <a:t>2. How It Has Grown</a:t>
-            </a:r>
-          </a:p>
-          <a:p>
-            <a:pPr>
-              <a:spcAft>
-                <a:spcPts val="800"/>
-              </a:spcAft>
-            </a:pPr>
-            <a:r>
-              <a:rPr sz="1400" b="1" dirty="0">
-                <a:solidFill>
-                  <a:srgbClr val="22704E"/>
-                </a:solidFill>
-                <a:latin typeface="Avenir Next" panose="020B0503020202020204" pitchFamily="34" charset="0"/>
-              </a:rPr>
-              <a:t>• Product Level (1986–): </a:t>
-            </a:r>
-            <a:r>
-              <a:rPr lang="en-IN" sz="1400" dirty="0" err="1">
-                <a:solidFill>
-                  <a:srgbClr val="2D2D2D"/>
-                </a:solidFill>
-                <a:latin typeface="Avenir Next" panose="020B0503020202020204" pitchFamily="34" charset="0"/>
-              </a:rPr>
-              <a:t>TerraChoice</a:t>
-            </a:r>
-            <a:r>
-              <a:rPr lang="en-IN" sz="1400" dirty="0">
-                <a:solidFill>
-                  <a:srgbClr val="2D2D2D"/>
-                </a:solidFill>
-                <a:latin typeface="Avenir Next" panose="020B0503020202020204" pitchFamily="34" charset="0"/>
-              </a:rPr>
-              <a:t> "7 Sins": vagueness, hidden trade-offs, false seals, irrelevance, lesser of two evils, plus nature imagery &amp; </a:t>
-            </a:r>
-            <a:r>
-              <a:rPr lang="en-IN" sz="1400" dirty="0" err="1">
-                <a:solidFill>
-                  <a:srgbClr val="2D2D2D"/>
-                </a:solidFill>
-                <a:latin typeface="Avenir Next" panose="020B0503020202020204" pitchFamily="34" charset="0"/>
-              </a:rPr>
-              <a:t>color</a:t>
-            </a:r>
-            <a:r>
-              <a:rPr lang="en-IN" sz="1400" dirty="0">
-                <a:solidFill>
-                  <a:srgbClr val="2D2D2D"/>
-                </a:solidFill>
-                <a:latin typeface="Avenir Next" panose="020B0503020202020204" pitchFamily="34" charset="0"/>
-              </a:rPr>
-              <a:t> trickery.</a:t>
-            </a:r>
-          </a:p>
-          <a:p>
-            <a:pPr>
-              <a:spcAft>
-                <a:spcPts val="800"/>
-              </a:spcAft>
-            </a:pPr>
-            <a:r>
-              <a:rPr sz="1400" b="1" dirty="0">
-                <a:solidFill>
-                  <a:srgbClr val="22704E"/>
-                </a:solidFill>
-                <a:latin typeface="Avenir Next" panose="020B0503020202020204" pitchFamily="34" charset="0"/>
-              </a:rPr>
-              <a:t>• Corporate Level (1990s–): </a:t>
-            </a:r>
-            <a:r>
-              <a:rPr sz="1400" dirty="0">
-                <a:solidFill>
-                  <a:srgbClr val="2D2D2D"/>
-                </a:solidFill>
-                <a:latin typeface="Avenir Next" panose="020B0503020202020204" pitchFamily="34" charset="0"/>
-              </a:rPr>
-              <a:t>Brand image makeover and halo </a:t>
-            </a:r>
-            <a:r>
-              <a:rPr lang="en-US" sz="1400" dirty="0">
-                <a:solidFill>
-                  <a:srgbClr val="2D2D2D"/>
-                </a:solidFill>
-                <a:latin typeface="Avenir Next" panose="020B0503020202020204" pitchFamily="34" charset="0"/>
-              </a:rPr>
-              <a:t>marketing</a:t>
-            </a:r>
-            <a:r>
-              <a:rPr sz="1400" dirty="0">
-                <a:solidFill>
-                  <a:srgbClr val="2D2D2D"/>
-                </a:solidFill>
-                <a:latin typeface="Avenir Next" panose="020B0503020202020204" pitchFamily="34" charset="0"/>
-              </a:rPr>
-              <a:t> to deflect attention from polluting core business.</a:t>
-            </a:r>
-          </a:p>
-          <a:p>
-            <a:pPr>
-              <a:spcAft>
-                <a:spcPts val="400"/>
-              </a:spcAft>
-            </a:pPr>
-            <a:r>
-              <a:rPr sz="1400" b="1" dirty="0">
-                <a:solidFill>
-                  <a:srgbClr val="22704E"/>
-                </a:solidFill>
-                <a:latin typeface="Avenir Next" panose="020B0503020202020204" pitchFamily="34" charset="0"/>
-              </a:rPr>
-              <a:t>• ESG &amp; Financial (Today): </a:t>
-            </a:r>
-            <a:r>
-              <a:rPr lang="en-IN" sz="1400" dirty="0" err="1">
-                <a:solidFill>
-                  <a:srgbClr val="2D2D2D"/>
-                </a:solidFill>
-                <a:latin typeface="Avenir Next" panose="020B0503020202020204" pitchFamily="34" charset="0"/>
-              </a:rPr>
-              <a:t>Crosswashing</a:t>
-            </a:r>
-            <a:r>
-              <a:rPr lang="en-IN" sz="1400" dirty="0">
-                <a:solidFill>
-                  <a:srgbClr val="2D2D2D"/>
-                </a:solidFill>
-                <a:latin typeface="Avenir Next" panose="020B0503020202020204" pitchFamily="34" charset="0"/>
-              </a:rPr>
-              <a:t> (selective ESG PR), Reporting Manipulation (omitting Scope 3 value-chain emissions), &amp; </a:t>
-            </a:r>
-            <a:r>
-              <a:rPr lang="en-IN" sz="1400" dirty="0" err="1">
-                <a:solidFill>
-                  <a:srgbClr val="2D2D2D"/>
-                </a:solidFill>
-                <a:latin typeface="Avenir Next" panose="020B0503020202020204" pitchFamily="34" charset="0"/>
-              </a:rPr>
-              <a:t>Futurewashing</a:t>
-            </a:r>
-            <a:r>
-              <a:rPr lang="en-IN" sz="1400" dirty="0">
-                <a:solidFill>
-                  <a:srgbClr val="2D2D2D"/>
-                </a:solidFill>
-                <a:latin typeface="Avenir Next" panose="020B0503020202020204" pitchFamily="34" charset="0"/>
-              </a:rPr>
-              <a:t> (unverified net-zero pledges lacking interim milestones).</a:t>
-            </a:r>
-            <a:endParaRPr sz="1400" dirty="0">
-              <a:solidFill>
-                <a:srgbClr val="2D2D2D"/>
-              </a:solidFill>
-              <a:latin typeface="Avenir Next" panose="020B0503020202020204" pitchFamily="34" charset="0"/>
-            </a:endParaRPr>
-          </a:p>
-        </p:txBody>
-      </p:sp>
-      <p:sp>
-        <p:nvSpPr>
-          <p:cNvPr id="7" name="Rounded Rectangle 6"/>
-          <p:cNvSpPr/>
-          <p:nvPr/>
-        </p:nvSpPr>
-        <p:spPr>
-          <a:xfrm>
-            <a:off x="8074152" y="1056067"/>
-            <a:ext cx="3557016" cy="4043967"/>
-          </a:xfrm>
-          <a:prstGeom prst="roundRect">
-            <a:avLst/>
-          </a:prstGeom>
-          <a:solidFill>
-            <a:srgbClr val="FDF6EE"/>
-          </a:solidFill>
-          <a:ln w="15240">
-            <a:solidFill>
-              <a:srgbClr val="E5C494"/>
-            </a:solidFill>
-          </a:ln>
-        </p:spPr>
-        <p:style>
-          <a:lnRef idx="1">
-            <a:schemeClr val="accent1"/>
-          </a:lnRef>
-          <a:fillRef idx="3">
-            <a:schemeClr val="accent1"/>
-          </a:fillRef>
-          <a:effectRef idx="2">
-            <a:schemeClr val="accent1"/>
-          </a:effectRef>
-          <a:fontRef idx="minor">
-            <a:schemeClr val="lt1"/>
-          </a:fontRef>
-        </p:style>
-        <p:txBody>
-          <a:bodyPr wrap="square" lIns="164592" tIns="164592" rIns="164592" bIns="164592" rtlCol="0" anchor="ctr"/>
-          <a:lstStyle/>
-          <a:p>
-            <a:pPr algn="ctr">
-              <a:spcAft>
-                <a:spcPts val="1000"/>
-              </a:spcAft>
-              <a:defRPr sz="1400" b="1">
-                <a:solidFill>
-                  <a:srgbClr val="12402D"/>
-                </a:solidFill>
-                <a:latin typeface="Calibri"/>
-              </a:defRPr>
-            </a:pPr>
-            <a:r>
-              <a:rPr sz="1400" dirty="0">
-                <a:latin typeface="Avenir Next" panose="020B0503020202020204" pitchFamily="34" charset="0"/>
-              </a:rPr>
-              <a:t>3. Multi-Layered Harm</a:t>
-            </a:r>
-          </a:p>
-          <a:p>
-            <a:pPr>
-              <a:spcAft>
-                <a:spcPts val="800"/>
-              </a:spcAft>
-            </a:pPr>
-            <a:r>
-              <a:rPr sz="1400" b="1" dirty="0">
-                <a:solidFill>
-                  <a:srgbClr val="22704E"/>
-                </a:solidFill>
-                <a:latin typeface="Avenir Next" panose="020B0503020202020204" pitchFamily="34" charset="0"/>
-              </a:rPr>
-              <a:t>• </a:t>
-            </a:r>
-            <a:r>
-              <a:rPr lang="en-US" sz="1400" b="1" dirty="0">
-                <a:solidFill>
-                  <a:srgbClr val="22704E"/>
-                </a:solidFill>
-                <a:latin typeface="Avenir Next" panose="020B0503020202020204" pitchFamily="34" charset="0"/>
-              </a:rPr>
-              <a:t>Climate and Environmental</a:t>
-            </a:r>
-            <a:r>
-              <a:rPr sz="1400" b="1" dirty="0">
-                <a:solidFill>
-                  <a:srgbClr val="22704E"/>
-                </a:solidFill>
-                <a:latin typeface="Avenir Next" panose="020B0503020202020204" pitchFamily="34" charset="0"/>
-              </a:rPr>
-              <a:t>: </a:t>
-            </a:r>
-            <a:r>
-              <a:rPr sz="1400" dirty="0">
-                <a:solidFill>
-                  <a:srgbClr val="2D2D2D"/>
-                </a:solidFill>
-                <a:latin typeface="Avenir Next" panose="020B0503020202020204" pitchFamily="34" charset="0"/>
-              </a:rPr>
-              <a:t>Delays real </a:t>
-            </a:r>
-            <a:r>
-              <a:rPr sz="1400" dirty="0" err="1">
-                <a:solidFill>
-                  <a:srgbClr val="2D2D2D"/>
-                </a:solidFill>
-                <a:latin typeface="Avenir Next" panose="020B0503020202020204" pitchFamily="34" charset="0"/>
-              </a:rPr>
-              <a:t>decarbonisation</a:t>
-            </a:r>
-            <a:r>
-              <a:rPr sz="1400" dirty="0">
-                <a:solidFill>
-                  <a:srgbClr val="2D2D2D"/>
-                </a:solidFill>
-                <a:latin typeface="Avenir Next" panose="020B0503020202020204" pitchFamily="34" charset="0"/>
-              </a:rPr>
-              <a:t> and keeps high-emission business alive under transition slogans.</a:t>
-            </a:r>
-            <a:r>
-              <a:rPr lang="en-US" sz="1400" dirty="0">
-                <a:solidFill>
-                  <a:srgbClr val="2D2D2D"/>
-                </a:solidFill>
-                <a:latin typeface="Avenir Next" panose="020B0503020202020204" pitchFamily="34" charset="0"/>
-              </a:rPr>
-              <a:t> Creates false comfort.</a:t>
-            </a:r>
-            <a:endParaRPr sz="1400" dirty="0">
-              <a:solidFill>
-                <a:srgbClr val="2D2D2D"/>
-              </a:solidFill>
-              <a:latin typeface="Avenir Next" panose="020B0503020202020204" pitchFamily="34" charset="0"/>
-            </a:endParaRPr>
-          </a:p>
-          <a:p>
-            <a:pPr>
-              <a:spcAft>
-                <a:spcPts val="800"/>
-              </a:spcAft>
-            </a:pPr>
-            <a:r>
-              <a:rPr sz="1400" b="1" dirty="0">
-                <a:solidFill>
-                  <a:srgbClr val="22704E"/>
-                </a:solidFill>
-                <a:latin typeface="Avenir Next" panose="020B0503020202020204" pitchFamily="34" charset="0"/>
-              </a:rPr>
-              <a:t>• Financial: </a:t>
-            </a:r>
-            <a:r>
-              <a:rPr sz="1400" dirty="0">
-                <a:solidFill>
-                  <a:srgbClr val="2D2D2D"/>
-                </a:solidFill>
-                <a:latin typeface="Avenir Next" panose="020B0503020202020204" pitchFamily="34" charset="0"/>
-              </a:rPr>
-              <a:t>Misdirects green capital ($55.9B ESG debt in India); dishonest claims </a:t>
-            </a:r>
-            <a:r>
-              <a:rPr lang="en-US" sz="1400" dirty="0">
-                <a:solidFill>
-                  <a:srgbClr val="2D2D2D"/>
-                </a:solidFill>
-                <a:latin typeface="Avenir Next" panose="020B0503020202020204" pitchFamily="34" charset="0"/>
-              </a:rPr>
-              <a:t>drive</a:t>
-            </a:r>
-            <a:r>
-              <a:rPr sz="1400" dirty="0">
-                <a:solidFill>
-                  <a:srgbClr val="2D2D2D"/>
-                </a:solidFill>
-                <a:latin typeface="Avenir Next" panose="020B0503020202020204" pitchFamily="34" charset="0"/>
-              </a:rPr>
-              <a:t> out genuine green businesses.</a:t>
-            </a:r>
-          </a:p>
-          <a:p>
-            <a:pPr>
-              <a:spcAft>
-                <a:spcPts val="400"/>
-              </a:spcAft>
-            </a:pPr>
-            <a:r>
-              <a:rPr sz="1400" b="1" dirty="0">
-                <a:solidFill>
-                  <a:srgbClr val="22704E"/>
-                </a:solidFill>
-                <a:latin typeface="Avenir Next" panose="020B0503020202020204" pitchFamily="34" charset="0"/>
-              </a:rPr>
-              <a:t>• Market Trust:</a:t>
-            </a:r>
-            <a:r>
-              <a:rPr lang="en-US" sz="1400" b="1" dirty="0">
-                <a:solidFill>
-                  <a:srgbClr val="22704E"/>
-                </a:solidFill>
-                <a:latin typeface="Avenir Next" panose="020B0503020202020204" pitchFamily="34" charset="0"/>
-              </a:rPr>
-              <a:t> </a:t>
-            </a:r>
-            <a:r>
-              <a:rPr lang="en-IN" sz="1400" dirty="0">
-                <a:solidFill>
-                  <a:srgbClr val="2D2D2D"/>
-                </a:solidFill>
-                <a:latin typeface="Avenir Next" panose="020B0503020202020204" pitchFamily="34" charset="0"/>
-              </a:rPr>
-              <a:t>Erodes investor/consumer trust. Small fixed fines make greenwashing a cheap business gamble.</a:t>
-            </a:r>
-            <a:endParaRPr sz="1400" dirty="0">
-              <a:solidFill>
-                <a:srgbClr val="2D2D2D"/>
-              </a:solidFill>
-              <a:latin typeface="Avenir Next" panose="020B0503020202020204" pitchFamily="34" charset="0"/>
-            </a:endParaRPr>
-          </a:p>
-        </p:txBody>
-      </p:sp>
-      <p:sp>
-        <p:nvSpPr>
           <p:cNvPr id="8" name="TextBox 7"/>
           <p:cNvSpPr txBox="1"/>
           <p:nvPr/>
@@ -28334,6 +28074,1191 @@
                 <a:latin typeface="Avenir Next" panose="020B0503020202020204" pitchFamily="34" charset="0"/>
               </a:rPr>
               <a:t>Answer to RQ1: Greenwashing has shifted from product labels to corporate disclosures and balance sheets. Its harm extends beyond consumer deception to capital misallocation, market distortion, and delayed climate action.</a:t>
+            </a:r>
+          </a:p>
+        </p:txBody>
+      </p:sp>
+      <p:sp>
+        <p:nvSpPr>
+          <p:cNvPr id="55" name="Rounded Rectangle 54">
+            <a:extLst>
+              <a:ext uri="{FF2B5EF4-FFF2-40B4-BE49-F238E27FC236}">
+                <a16:creationId xmlns:a16="http://schemas.microsoft.com/office/drawing/2014/main" id="{C9BA0869-E04F-0349-ADAB-9183F4D0C548}"/>
+              </a:ext>
+            </a:extLst>
+          </p:cNvPr>
+          <p:cNvSpPr/>
+          <p:nvPr/>
+        </p:nvSpPr>
+        <p:spPr>
+          <a:xfrm>
+            <a:off x="557530" y="1056640"/>
+            <a:ext cx="3352800" cy="4043679"/>
+          </a:xfrm>
+          <a:prstGeom prst="roundRect">
+            <a:avLst/>
+          </a:prstGeom>
+          <a:solidFill>
+            <a:srgbClr val="FFF8EE"/>
+          </a:solidFill>
+          <a:ln w="12700" cap="flat" cmpd="sng" algn="ctr">
+            <a:solidFill>
+              <a:srgbClr val="E4C28D"/>
+            </a:solidFill>
+            <a:prstDash val="solid"/>
+          </a:ln>
+        </p:spPr>
+        <p:style>
+          <a:lnRef idx="1">
+            <a:schemeClr val="accent1"/>
+          </a:lnRef>
+          <a:fillRef idx="3">
+            <a:schemeClr val="accent1"/>
+          </a:fillRef>
+          <a:effectRef idx="2">
+            <a:schemeClr val="accent1"/>
+          </a:effectRef>
+          <a:fontRef idx="minor">
+            <a:schemeClr val="lt1"/>
+          </a:fontRef>
+        </p:style>
+        <p:txBody>
+          <a:bodyPr vertOverflow="clip" horzOverflow="clip" rtlCol="0" anchor="t"/>
+          <a:lstStyle/>
+          <a:p>
+            <a:pPr algn="l"/>
+            <a:endParaRPr lang="en-US"/>
+          </a:p>
+        </p:txBody>
+      </p:sp>
+      <p:sp>
+        <p:nvSpPr>
+          <p:cNvPr id="56" name="Rounded Rectangle 55">
+            <a:extLst>
+              <a:ext uri="{FF2B5EF4-FFF2-40B4-BE49-F238E27FC236}">
+                <a16:creationId xmlns:a16="http://schemas.microsoft.com/office/drawing/2014/main" id="{3593AA0C-24A7-3046-B4DA-3F5DB7699358}"/>
+              </a:ext>
+            </a:extLst>
+          </p:cNvPr>
+          <p:cNvSpPr/>
+          <p:nvPr/>
+        </p:nvSpPr>
+        <p:spPr>
+          <a:xfrm>
+            <a:off x="4088129" y="1056640"/>
+            <a:ext cx="3619500" cy="4043679"/>
+          </a:xfrm>
+          <a:prstGeom prst="roundRect">
+            <a:avLst/>
+          </a:prstGeom>
+          <a:solidFill>
+            <a:srgbClr val="EEF5F0"/>
+          </a:solidFill>
+          <a:ln w="12700" cap="flat" cmpd="sng" algn="ctr">
+            <a:solidFill>
+              <a:srgbClr val="A9C6B2"/>
+            </a:solidFill>
+            <a:prstDash val="solid"/>
+          </a:ln>
+        </p:spPr>
+        <p:style>
+          <a:lnRef idx="1">
+            <a:schemeClr val="accent1"/>
+          </a:lnRef>
+          <a:fillRef idx="3">
+            <a:schemeClr val="accent1"/>
+          </a:fillRef>
+          <a:effectRef idx="2">
+            <a:schemeClr val="accent1"/>
+          </a:effectRef>
+          <a:fontRef idx="minor">
+            <a:schemeClr val="lt1"/>
+          </a:fontRef>
+        </p:style>
+        <p:txBody>
+          <a:bodyPr vertOverflow="clip" horzOverflow="clip" rtlCol="0" anchor="t"/>
+          <a:lstStyle/>
+          <a:p>
+            <a:pPr algn="l"/>
+            <a:endParaRPr lang="en-US"/>
+          </a:p>
+        </p:txBody>
+      </p:sp>
+      <p:sp>
+        <p:nvSpPr>
+          <p:cNvPr id="57" name="Rounded Rectangle 56">
+            <a:extLst>
+              <a:ext uri="{FF2B5EF4-FFF2-40B4-BE49-F238E27FC236}">
+                <a16:creationId xmlns:a16="http://schemas.microsoft.com/office/drawing/2014/main" id="{0C9A670F-AC7C-044F-A888-D7E9A358BB19}"/>
+              </a:ext>
+            </a:extLst>
+          </p:cNvPr>
+          <p:cNvSpPr/>
+          <p:nvPr/>
+        </p:nvSpPr>
+        <p:spPr>
+          <a:xfrm>
+            <a:off x="7885430" y="1056640"/>
+            <a:ext cx="3746500" cy="4043679"/>
+          </a:xfrm>
+          <a:prstGeom prst="roundRect">
+            <a:avLst/>
+          </a:prstGeom>
+          <a:solidFill>
+            <a:srgbClr val="FBFCFA"/>
+          </a:solidFill>
+          <a:ln w="12700" cap="flat" cmpd="sng" algn="ctr">
+            <a:solidFill>
+              <a:srgbClr val="A9C6B2"/>
+            </a:solidFill>
+            <a:prstDash val="solid"/>
+          </a:ln>
+        </p:spPr>
+        <p:style>
+          <a:lnRef idx="1">
+            <a:schemeClr val="accent1"/>
+          </a:lnRef>
+          <a:fillRef idx="3">
+            <a:schemeClr val="accent1"/>
+          </a:fillRef>
+          <a:effectRef idx="2">
+            <a:schemeClr val="accent1"/>
+          </a:effectRef>
+          <a:fontRef idx="minor">
+            <a:schemeClr val="lt1"/>
+          </a:fontRef>
+        </p:style>
+        <p:txBody>
+          <a:bodyPr vertOverflow="clip" horzOverflow="clip" rtlCol="0" anchor="t"/>
+          <a:lstStyle/>
+          <a:p>
+            <a:pPr algn="l"/>
+            <a:endParaRPr lang="en-US"/>
+          </a:p>
+        </p:txBody>
+      </p:sp>
+      <p:sp>
+        <p:nvSpPr>
+          <p:cNvPr id="58" name="TextBox 57">
+            <a:extLst>
+              <a:ext uri="{FF2B5EF4-FFF2-40B4-BE49-F238E27FC236}">
+                <a16:creationId xmlns:a16="http://schemas.microsoft.com/office/drawing/2014/main" id="{71CEE6AD-8511-3748-8703-AD112E08D0E6}"/>
+              </a:ext>
+            </a:extLst>
+          </p:cNvPr>
+          <p:cNvSpPr txBox="1"/>
+          <p:nvPr/>
+        </p:nvSpPr>
+        <p:spPr>
+          <a:xfrm>
+            <a:off x="774700" y="1219200"/>
+            <a:ext cx="2921000" cy="292100"/>
+          </a:xfrm>
+          <a:prstGeom prst="rect">
+            <a:avLst/>
+          </a:prstGeom>
+          <a:noFill/>
+          <a:ln>
+            <a:noFill/>
+          </a:ln>
+        </p:spPr>
+        <p:txBody>
+          <a:bodyPr vertOverflow="overflow" vert="horz" wrap="square" rtlCol="0" anchor="ctr" anchorCtr="0">
+            <a:normAutofit lnSpcReduction="10000"/>
+          </a:bodyPr>
+          <a:lstStyle/>
+          <a:p>
+            <a:pPr algn="l"/>
+            <a:r>
+              <a:rPr lang="en-US" sz="1400" b="1" dirty="0">
+                <a:solidFill>
+                  <a:srgbClr val="12402D"/>
+                </a:solidFill>
+                <a:latin typeface="Avenir Next"/>
+              </a:rPr>
+              <a:t>1. CCPA DEFINITION</a:t>
+            </a:r>
+          </a:p>
+        </p:txBody>
+      </p:sp>
+      <p:sp>
+        <p:nvSpPr>
+          <p:cNvPr id="60" name="Rounded Rectangle 59">
+            <a:extLst>
+              <a:ext uri="{FF2B5EF4-FFF2-40B4-BE49-F238E27FC236}">
+                <a16:creationId xmlns:a16="http://schemas.microsoft.com/office/drawing/2014/main" id="{714F67E9-9F81-ED47-819B-4FEFB9ADF290}"/>
+              </a:ext>
+            </a:extLst>
+          </p:cNvPr>
+          <p:cNvSpPr/>
+          <p:nvPr/>
+        </p:nvSpPr>
+        <p:spPr>
+          <a:xfrm>
+            <a:off x="665019" y="1600200"/>
+            <a:ext cx="3094180" cy="3365500"/>
+          </a:xfrm>
+          <a:prstGeom prst="roundRect">
+            <a:avLst/>
+          </a:prstGeom>
+          <a:solidFill>
+            <a:srgbClr val="FFFFFF"/>
+          </a:solidFill>
+          <a:ln w="12700" cap="flat" cmpd="sng" algn="ctr">
+            <a:solidFill>
+              <a:srgbClr val="D8C7AA"/>
+            </a:solidFill>
+            <a:prstDash val="solid"/>
+          </a:ln>
+        </p:spPr>
+        <p:style>
+          <a:lnRef idx="1">
+            <a:schemeClr val="accent1"/>
+          </a:lnRef>
+          <a:fillRef idx="3">
+            <a:schemeClr val="accent1"/>
+          </a:fillRef>
+          <a:effectRef idx="2">
+            <a:schemeClr val="accent1"/>
+          </a:effectRef>
+          <a:fontRef idx="minor">
+            <a:schemeClr val="lt1"/>
+          </a:fontRef>
+        </p:style>
+        <p:txBody>
+          <a:bodyPr vertOverflow="clip" horzOverflow="clip" wrap="square" rtlCol="0" anchor="ctr" anchorCtr="0">
+            <a:normAutofit/>
+          </a:bodyPr>
+          <a:lstStyle/>
+          <a:p>
+            <a:pPr algn="l"/>
+            <a:r>
+              <a:rPr lang="en-US" sz="1400" dirty="0">
+                <a:solidFill>
+                  <a:srgbClr val="2D2D2D"/>
+                </a:solidFill>
+                <a:latin typeface="Avenir Next"/>
+              </a:rPr>
+              <a:t>India’s CCPA Guidelines define greenwashing as "any deceptive or misleading practice" involving: (</a:t>
+            </a:r>
+            <a:r>
+              <a:rPr lang="en-US" sz="1400" dirty="0" err="1">
+                <a:solidFill>
+                  <a:srgbClr val="2D2D2D"/>
+                </a:solidFill>
+                <a:latin typeface="Avenir Next"/>
+              </a:rPr>
+              <a:t>i</a:t>
+            </a:r>
+            <a:r>
+              <a:rPr lang="en-US" sz="1400" dirty="0">
+                <a:solidFill>
+                  <a:srgbClr val="2D2D2D"/>
+                </a:solidFill>
+                <a:latin typeface="Avenir Next"/>
+              </a:rPr>
+              <a:t>) concealing or omitting info; (ii) making vague, false, or unsubstantiated claims; or (iii) using misleading words/imagery emphasizing positive aspects while downplaying harmful attributes.</a:t>
+            </a:r>
+          </a:p>
+        </p:txBody>
+      </p:sp>
+      <p:sp>
+        <p:nvSpPr>
+          <p:cNvPr id="62" name="TextBox 61">
+            <a:extLst>
+              <a:ext uri="{FF2B5EF4-FFF2-40B4-BE49-F238E27FC236}">
+                <a16:creationId xmlns:a16="http://schemas.microsoft.com/office/drawing/2014/main" id="{6442682B-924F-9843-88ED-F061C01A8E3C}"/>
+              </a:ext>
+            </a:extLst>
+          </p:cNvPr>
+          <p:cNvSpPr txBox="1"/>
+          <p:nvPr/>
+        </p:nvSpPr>
+        <p:spPr>
+          <a:xfrm>
+            <a:off x="4305300" y="1219200"/>
+            <a:ext cx="3187700" cy="292100"/>
+          </a:xfrm>
+          <a:prstGeom prst="rect">
+            <a:avLst/>
+          </a:prstGeom>
+          <a:noFill/>
+          <a:ln>
+            <a:noFill/>
+          </a:ln>
+        </p:spPr>
+        <p:txBody>
+          <a:bodyPr vertOverflow="overflow" vert="horz" wrap="square" rtlCol="0" anchor="ctr" anchorCtr="0">
+            <a:normAutofit lnSpcReduction="10000"/>
+          </a:bodyPr>
+          <a:lstStyle/>
+          <a:p>
+            <a:pPr algn="l"/>
+            <a:r>
+              <a:rPr lang="en-US" sz="1400" b="1" dirty="0">
+                <a:solidFill>
+                  <a:srgbClr val="12402D"/>
+                </a:solidFill>
+                <a:latin typeface="Avenir Next"/>
+              </a:rPr>
+              <a:t>2. HOW IT HAS GROWN</a:t>
+            </a:r>
+          </a:p>
+        </p:txBody>
+      </p:sp>
+      <p:sp>
+        <p:nvSpPr>
+          <p:cNvPr id="63" name="TextBox 62">
+            <a:extLst>
+              <a:ext uri="{FF2B5EF4-FFF2-40B4-BE49-F238E27FC236}">
+                <a16:creationId xmlns:a16="http://schemas.microsoft.com/office/drawing/2014/main" id="{66F3AFD2-580F-9149-91D1-5F851BF42EC4}"/>
+              </a:ext>
+            </a:extLst>
+          </p:cNvPr>
+          <p:cNvSpPr txBox="1"/>
+          <p:nvPr/>
+        </p:nvSpPr>
+        <p:spPr>
+          <a:xfrm>
+            <a:off x="4356100" y="1511300"/>
+            <a:ext cx="3086100" cy="254000"/>
+          </a:xfrm>
+          <a:prstGeom prst="rect">
+            <a:avLst/>
+          </a:prstGeom>
+          <a:noFill/>
+          <a:ln>
+            <a:noFill/>
+          </a:ln>
+        </p:spPr>
+        <p:txBody>
+          <a:bodyPr vertOverflow="overflow" vert="horz" wrap="square" rtlCol="0" anchor="ctr" anchorCtr="0">
+            <a:normAutofit/>
+          </a:bodyPr>
+          <a:lstStyle/>
+          <a:p>
+            <a:pPr algn="l"/>
+            <a:r>
+              <a:rPr lang="en-US" sz="950">
+                <a:solidFill>
+                  <a:srgbClr val="22704E"/>
+                </a:solidFill>
+                <a:latin typeface="Avenir Next"/>
+              </a:rPr>
+              <a:t>The unit of deception expanded over time</a:t>
+            </a:r>
+          </a:p>
+        </p:txBody>
+      </p:sp>
+      <p:sp>
+        <p:nvSpPr>
+          <p:cNvPr id="64" name="Right Arrow 63">
+            <a:extLst>
+              <a:ext uri="{FF2B5EF4-FFF2-40B4-BE49-F238E27FC236}">
+                <a16:creationId xmlns:a16="http://schemas.microsoft.com/office/drawing/2014/main" id="{AAFD3188-06A7-7345-8741-2AE4B5640AC0}"/>
+              </a:ext>
+            </a:extLst>
+          </p:cNvPr>
+          <p:cNvSpPr/>
+          <p:nvPr/>
+        </p:nvSpPr>
+        <p:spPr>
+          <a:xfrm>
+            <a:off x="4381500" y="1892300"/>
+            <a:ext cx="2590800" cy="787400"/>
+          </a:xfrm>
+          <a:prstGeom prst="rightArrow">
+            <a:avLst/>
+          </a:prstGeom>
+          <a:solidFill>
+            <a:srgbClr val="79A98B"/>
+          </a:solidFill>
+          <a:ln w="9525" cap="flat" cmpd="sng" algn="ctr">
+            <a:noFill/>
+            <a:prstDash val="solid"/>
+          </a:ln>
+        </p:spPr>
+        <p:style>
+          <a:lnRef idx="1">
+            <a:schemeClr val="accent1"/>
+          </a:lnRef>
+          <a:fillRef idx="3">
+            <a:schemeClr val="accent1"/>
+          </a:fillRef>
+          <a:effectRef idx="2">
+            <a:schemeClr val="accent1"/>
+          </a:effectRef>
+          <a:fontRef idx="minor">
+            <a:schemeClr val="lt1"/>
+          </a:fontRef>
+        </p:style>
+        <p:txBody>
+          <a:bodyPr vertOverflow="clip" horzOverflow="clip" wrap="square" rtlCol="0" anchor="ctr" anchorCtr="0">
+            <a:normAutofit/>
+          </a:bodyPr>
+          <a:lstStyle/>
+          <a:p>
+            <a:pPr algn="l"/>
+            <a:r>
+              <a:rPr lang="en-US" sz="950" b="1">
+                <a:solidFill>
+                  <a:srgbClr val="FFFFFF"/>
+                </a:solidFill>
+                <a:latin typeface="Avenir Next"/>
+              </a:rPr>
+              <a:t>PRODUCT LEVEL  |  1986–
+Claims, seals &amp; imagery</a:t>
+            </a:r>
+          </a:p>
+        </p:txBody>
+      </p:sp>
+      <p:sp>
+        <p:nvSpPr>
+          <p:cNvPr id="65" name="Right Arrow 64">
+            <a:extLst>
+              <a:ext uri="{FF2B5EF4-FFF2-40B4-BE49-F238E27FC236}">
+                <a16:creationId xmlns:a16="http://schemas.microsoft.com/office/drawing/2014/main" id="{3ACAB8D5-EBAF-B344-B081-466A0A57BF99}"/>
+              </a:ext>
+            </a:extLst>
+          </p:cNvPr>
+          <p:cNvSpPr/>
+          <p:nvPr/>
+        </p:nvSpPr>
+        <p:spPr>
+          <a:xfrm>
+            <a:off x="4381500" y="2806700"/>
+            <a:ext cx="2870200" cy="787400"/>
+          </a:xfrm>
+          <a:prstGeom prst="rightArrow">
+            <a:avLst/>
+          </a:prstGeom>
+          <a:solidFill>
+            <a:srgbClr val="3D8665"/>
+          </a:solidFill>
+          <a:ln w="9525" cap="flat" cmpd="sng" algn="ctr">
+            <a:noFill/>
+            <a:prstDash val="solid"/>
+          </a:ln>
+        </p:spPr>
+        <p:style>
+          <a:lnRef idx="1">
+            <a:schemeClr val="accent1"/>
+          </a:lnRef>
+          <a:fillRef idx="3">
+            <a:schemeClr val="accent1"/>
+          </a:fillRef>
+          <a:effectRef idx="2">
+            <a:schemeClr val="accent1"/>
+          </a:effectRef>
+          <a:fontRef idx="minor">
+            <a:schemeClr val="lt1"/>
+          </a:fontRef>
+        </p:style>
+        <p:txBody>
+          <a:bodyPr vertOverflow="clip" horzOverflow="clip" wrap="square" rtlCol="0" anchor="ctr" anchorCtr="0">
+            <a:normAutofit/>
+          </a:bodyPr>
+          <a:lstStyle/>
+          <a:p>
+            <a:pPr algn="l"/>
+            <a:r>
+              <a:rPr lang="en-US" sz="950" b="1">
+                <a:solidFill>
+                  <a:srgbClr val="FFFFFF"/>
+                </a:solidFill>
+                <a:latin typeface="Avenir Next"/>
+              </a:rPr>
+              <a:t>CORPORATE LEVEL  |  1990s–
+Brand halo masks operations</a:t>
+            </a:r>
+          </a:p>
+        </p:txBody>
+      </p:sp>
+      <p:sp>
+        <p:nvSpPr>
+          <p:cNvPr id="66" name="Right Arrow 65">
+            <a:extLst>
+              <a:ext uri="{FF2B5EF4-FFF2-40B4-BE49-F238E27FC236}">
+                <a16:creationId xmlns:a16="http://schemas.microsoft.com/office/drawing/2014/main" id="{AEB5DAE7-821E-5B4F-A416-0446D0F9ADBC}"/>
+              </a:ext>
+            </a:extLst>
+          </p:cNvPr>
+          <p:cNvSpPr/>
+          <p:nvPr/>
+        </p:nvSpPr>
+        <p:spPr>
+          <a:xfrm>
+            <a:off x="4381500" y="3721100"/>
+            <a:ext cx="3149600" cy="939800"/>
+          </a:xfrm>
+          <a:prstGeom prst="rightArrow">
+            <a:avLst/>
+          </a:prstGeom>
+          <a:solidFill>
+            <a:srgbClr val="22704E"/>
+          </a:solidFill>
+          <a:ln w="9525" cap="flat" cmpd="sng" algn="ctr">
+            <a:noFill/>
+            <a:prstDash val="solid"/>
+          </a:ln>
+        </p:spPr>
+        <p:style>
+          <a:lnRef idx="1">
+            <a:schemeClr val="accent1"/>
+          </a:lnRef>
+          <a:fillRef idx="3">
+            <a:schemeClr val="accent1"/>
+          </a:fillRef>
+          <a:effectRef idx="2">
+            <a:schemeClr val="accent1"/>
+          </a:effectRef>
+          <a:fontRef idx="minor">
+            <a:schemeClr val="lt1"/>
+          </a:fontRef>
+        </p:style>
+        <p:txBody>
+          <a:bodyPr vertOverflow="clip" horzOverflow="clip" wrap="none" rtlCol="0" anchor="ctr" anchorCtr="0">
+            <a:normAutofit/>
+          </a:bodyPr>
+          <a:lstStyle/>
+          <a:p>
+            <a:pPr algn="l"/>
+            <a:r>
+              <a:rPr lang="en-US" sz="800" b="1" dirty="0">
+                <a:solidFill>
+                  <a:srgbClr val="FFFFFF"/>
+                </a:solidFill>
+                <a:latin typeface="Avenir Next"/>
+              </a:rPr>
+              <a:t>ESG &amp; FINANCIAL  |  TODAY
+BRSR Reports, Green Debt, ESG Funds, Net Zero Claims</a:t>
+            </a:r>
+          </a:p>
+        </p:txBody>
+      </p:sp>
+      <p:sp>
+        <p:nvSpPr>
+          <p:cNvPr id="67" name="TextBox 66">
+            <a:extLst>
+              <a:ext uri="{FF2B5EF4-FFF2-40B4-BE49-F238E27FC236}">
+                <a16:creationId xmlns:a16="http://schemas.microsoft.com/office/drawing/2014/main" id="{7D0F4A9C-2EF7-244F-94E5-BB3E9EA358A1}"/>
+              </a:ext>
+            </a:extLst>
+          </p:cNvPr>
+          <p:cNvSpPr txBox="1"/>
+          <p:nvPr/>
+        </p:nvSpPr>
+        <p:spPr>
+          <a:xfrm>
+            <a:off x="4610100" y="4737100"/>
+            <a:ext cx="2679700" cy="228600"/>
+          </a:xfrm>
+          <a:prstGeom prst="rect">
+            <a:avLst/>
+          </a:prstGeom>
+          <a:noFill/>
+          <a:ln>
+            <a:noFill/>
+          </a:ln>
+        </p:spPr>
+        <p:txBody>
+          <a:bodyPr vertOverflow="overflow" vert="horz" wrap="square" rtlCol="0" anchor="ctr" anchorCtr="0">
+            <a:normAutofit lnSpcReduction="10000"/>
+          </a:bodyPr>
+          <a:lstStyle/>
+          <a:p>
+            <a:pPr algn="l"/>
+            <a:r>
+              <a:rPr lang="en-US" sz="950" b="1">
+                <a:solidFill>
+                  <a:srgbClr val="12402D"/>
+                </a:solidFill>
+                <a:latin typeface="Avenir Next"/>
+              </a:rPr>
+              <a:t>Wider scope  →  higher stakes</a:t>
+            </a:r>
+          </a:p>
+        </p:txBody>
+      </p:sp>
+      <p:sp>
+        <p:nvSpPr>
+          <p:cNvPr id="68" name="TextBox 67">
+            <a:extLst>
+              <a:ext uri="{FF2B5EF4-FFF2-40B4-BE49-F238E27FC236}">
+                <a16:creationId xmlns:a16="http://schemas.microsoft.com/office/drawing/2014/main" id="{84AA710A-7D92-FD49-8562-7F4BB2B1E368}"/>
+              </a:ext>
+            </a:extLst>
+          </p:cNvPr>
+          <p:cNvSpPr txBox="1"/>
+          <p:nvPr/>
+        </p:nvSpPr>
+        <p:spPr>
+          <a:xfrm>
+            <a:off x="8102600" y="1219200"/>
+            <a:ext cx="3302000" cy="292100"/>
+          </a:xfrm>
+          <a:prstGeom prst="rect">
+            <a:avLst/>
+          </a:prstGeom>
+          <a:noFill/>
+          <a:ln>
+            <a:noFill/>
+          </a:ln>
+        </p:spPr>
+        <p:txBody>
+          <a:bodyPr vertOverflow="overflow" vert="horz" wrap="square" rtlCol="0" anchor="ctr" anchorCtr="0">
+            <a:normAutofit lnSpcReduction="10000"/>
+          </a:bodyPr>
+          <a:lstStyle/>
+          <a:p>
+            <a:pPr algn="l"/>
+            <a:r>
+              <a:rPr lang="en-US" sz="1400" b="1" dirty="0">
+                <a:solidFill>
+                  <a:srgbClr val="12402D"/>
+                </a:solidFill>
+                <a:latin typeface="Avenir Next"/>
+              </a:rPr>
+              <a:t>3. MULTI-LAYERED HARM</a:t>
+            </a:r>
+          </a:p>
+        </p:txBody>
+      </p:sp>
+      <p:sp>
+        <p:nvSpPr>
+          <p:cNvPr id="69" name="Rounded Rectangle 68">
+            <a:extLst>
+              <a:ext uri="{FF2B5EF4-FFF2-40B4-BE49-F238E27FC236}">
+                <a16:creationId xmlns:a16="http://schemas.microsoft.com/office/drawing/2014/main" id="{E325F56B-D42A-F642-9DF6-4534FB567509}"/>
+              </a:ext>
+            </a:extLst>
+          </p:cNvPr>
+          <p:cNvSpPr/>
+          <p:nvPr/>
+        </p:nvSpPr>
+        <p:spPr>
+          <a:xfrm>
+            <a:off x="8928100" y="1625600"/>
+            <a:ext cx="1676400" cy="431800"/>
+          </a:xfrm>
+          <a:prstGeom prst="roundRect">
+            <a:avLst/>
+          </a:prstGeom>
+          <a:solidFill>
+            <a:srgbClr val="12402D"/>
+          </a:solidFill>
+          <a:ln w="9525" cap="flat" cmpd="sng" algn="ctr">
+            <a:noFill/>
+            <a:prstDash val="solid"/>
+          </a:ln>
+        </p:spPr>
+        <p:style>
+          <a:lnRef idx="1">
+            <a:schemeClr val="accent1"/>
+          </a:lnRef>
+          <a:fillRef idx="3">
+            <a:schemeClr val="accent1"/>
+          </a:fillRef>
+          <a:effectRef idx="2">
+            <a:schemeClr val="accent1"/>
+          </a:effectRef>
+          <a:fontRef idx="minor">
+            <a:schemeClr val="lt1"/>
+          </a:fontRef>
+        </p:style>
+        <p:txBody>
+          <a:bodyPr vertOverflow="clip" horzOverflow="clip" wrap="square" rtlCol="0" anchor="ctr" anchorCtr="0">
+            <a:normAutofit/>
+          </a:bodyPr>
+          <a:lstStyle/>
+          <a:p>
+            <a:pPr algn="l"/>
+            <a:r>
+              <a:rPr lang="en-US" sz="1100" b="1">
+                <a:solidFill>
+                  <a:srgbClr val="FFFFFF"/>
+                </a:solidFill>
+                <a:latin typeface="Avenir Next"/>
+              </a:rPr>
+              <a:t>GREENWASHING</a:t>
+            </a:r>
+          </a:p>
+        </p:txBody>
+      </p:sp>
+      <p:sp>
+        <p:nvSpPr>
+          <p:cNvPr id="70" name="Rectangle 69">
+            <a:extLst>
+              <a:ext uri="{FF2B5EF4-FFF2-40B4-BE49-F238E27FC236}">
+                <a16:creationId xmlns:a16="http://schemas.microsoft.com/office/drawing/2014/main" id="{9A0EFC77-BBB7-C746-A489-7A0330D2A6E8}"/>
+              </a:ext>
+            </a:extLst>
+          </p:cNvPr>
+          <p:cNvSpPr/>
+          <p:nvPr/>
+        </p:nvSpPr>
+        <p:spPr>
+          <a:xfrm>
+            <a:off x="9740900" y="2057400"/>
+            <a:ext cx="50800" cy="2400300"/>
+          </a:xfrm>
+          <a:prstGeom prst="rect">
+            <a:avLst/>
+          </a:prstGeom>
+          <a:solidFill>
+            <a:srgbClr val="C9D8CF"/>
+          </a:solidFill>
+          <a:ln w="9525" cap="flat" cmpd="sng" algn="ctr">
+            <a:noFill/>
+            <a:prstDash val="solid"/>
+          </a:ln>
+        </p:spPr>
+        <p:style>
+          <a:lnRef idx="1">
+            <a:schemeClr val="accent1"/>
+          </a:lnRef>
+          <a:fillRef idx="3">
+            <a:schemeClr val="accent1"/>
+          </a:fillRef>
+          <a:effectRef idx="2">
+            <a:schemeClr val="accent1"/>
+          </a:effectRef>
+          <a:fontRef idx="minor">
+            <a:schemeClr val="lt1"/>
+          </a:fontRef>
+        </p:style>
+        <p:txBody>
+          <a:bodyPr vertOverflow="clip" horzOverflow="clip" rtlCol="0" anchor="t"/>
+          <a:lstStyle/>
+          <a:p>
+            <a:pPr algn="l"/>
+            <a:endParaRPr lang="en-US"/>
+          </a:p>
+        </p:txBody>
+      </p:sp>
+      <p:sp>
+        <p:nvSpPr>
+          <p:cNvPr id="71" name="Rectangle 70">
+            <a:extLst>
+              <a:ext uri="{FF2B5EF4-FFF2-40B4-BE49-F238E27FC236}">
+                <a16:creationId xmlns:a16="http://schemas.microsoft.com/office/drawing/2014/main" id="{F06362E0-BFA8-224A-A772-2222F79E111F}"/>
+              </a:ext>
+            </a:extLst>
+          </p:cNvPr>
+          <p:cNvSpPr/>
+          <p:nvPr/>
+        </p:nvSpPr>
+        <p:spPr>
+          <a:xfrm>
+            <a:off x="8559800" y="2476500"/>
+            <a:ext cx="1206500" cy="38100"/>
+          </a:xfrm>
+          <a:prstGeom prst="rect">
+            <a:avLst/>
+          </a:prstGeom>
+          <a:solidFill>
+            <a:srgbClr val="C9D8CF"/>
+          </a:solidFill>
+          <a:ln w="9525" cap="flat" cmpd="sng" algn="ctr">
+            <a:noFill/>
+            <a:prstDash val="solid"/>
+          </a:ln>
+        </p:spPr>
+        <p:style>
+          <a:lnRef idx="1">
+            <a:schemeClr val="accent1"/>
+          </a:lnRef>
+          <a:fillRef idx="3">
+            <a:schemeClr val="accent1"/>
+          </a:fillRef>
+          <a:effectRef idx="2">
+            <a:schemeClr val="accent1"/>
+          </a:effectRef>
+          <a:fontRef idx="minor">
+            <a:schemeClr val="lt1"/>
+          </a:fontRef>
+        </p:style>
+        <p:txBody>
+          <a:bodyPr vertOverflow="clip" horzOverflow="clip" rtlCol="0" anchor="t"/>
+          <a:lstStyle/>
+          <a:p>
+            <a:pPr algn="l"/>
+            <a:endParaRPr lang="en-US"/>
+          </a:p>
+        </p:txBody>
+      </p:sp>
+      <p:sp>
+        <p:nvSpPr>
+          <p:cNvPr id="72" name="Rectangle 71">
+            <a:extLst>
+              <a:ext uri="{FF2B5EF4-FFF2-40B4-BE49-F238E27FC236}">
+                <a16:creationId xmlns:a16="http://schemas.microsoft.com/office/drawing/2014/main" id="{19191E99-846B-C848-BE63-9302BE25AA3F}"/>
+              </a:ext>
+            </a:extLst>
+          </p:cNvPr>
+          <p:cNvSpPr/>
+          <p:nvPr/>
+        </p:nvSpPr>
+        <p:spPr>
+          <a:xfrm>
+            <a:off x="9766300" y="3213100"/>
+            <a:ext cx="279400" cy="38100"/>
+          </a:xfrm>
+          <a:prstGeom prst="rect">
+            <a:avLst/>
+          </a:prstGeom>
+          <a:solidFill>
+            <a:srgbClr val="C9D8CF"/>
+          </a:solidFill>
+          <a:ln w="9525" cap="flat" cmpd="sng" algn="ctr">
+            <a:noFill/>
+            <a:prstDash val="solid"/>
+          </a:ln>
+        </p:spPr>
+        <p:style>
+          <a:lnRef idx="1">
+            <a:schemeClr val="accent1"/>
+          </a:lnRef>
+          <a:fillRef idx="3">
+            <a:schemeClr val="accent1"/>
+          </a:fillRef>
+          <a:effectRef idx="2">
+            <a:schemeClr val="accent1"/>
+          </a:effectRef>
+          <a:fontRef idx="minor">
+            <a:schemeClr val="lt1"/>
+          </a:fontRef>
+        </p:style>
+        <p:txBody>
+          <a:bodyPr vertOverflow="clip" horzOverflow="clip" rtlCol="0" anchor="t"/>
+          <a:lstStyle/>
+          <a:p>
+            <a:pPr algn="l"/>
+            <a:endParaRPr lang="en-US"/>
+          </a:p>
+        </p:txBody>
+      </p:sp>
+      <p:sp>
+        <p:nvSpPr>
+          <p:cNvPr id="73" name="Rectangle 72">
+            <a:extLst>
+              <a:ext uri="{FF2B5EF4-FFF2-40B4-BE49-F238E27FC236}">
+                <a16:creationId xmlns:a16="http://schemas.microsoft.com/office/drawing/2014/main" id="{6B843D70-0C59-8A4B-92B0-BB4F3CADDEC3}"/>
+              </a:ext>
+            </a:extLst>
+          </p:cNvPr>
+          <p:cNvSpPr/>
+          <p:nvPr/>
+        </p:nvSpPr>
+        <p:spPr>
+          <a:xfrm>
+            <a:off x="8559800" y="4051300"/>
+            <a:ext cx="1206500" cy="38100"/>
+          </a:xfrm>
+          <a:prstGeom prst="rect">
+            <a:avLst/>
+          </a:prstGeom>
+          <a:solidFill>
+            <a:srgbClr val="C9D8CF"/>
+          </a:solidFill>
+          <a:ln w="9525" cap="flat" cmpd="sng" algn="ctr">
+            <a:noFill/>
+            <a:prstDash val="solid"/>
+          </a:ln>
+        </p:spPr>
+        <p:style>
+          <a:lnRef idx="1">
+            <a:schemeClr val="accent1"/>
+          </a:lnRef>
+          <a:fillRef idx="3">
+            <a:schemeClr val="accent1"/>
+          </a:fillRef>
+          <a:effectRef idx="2">
+            <a:schemeClr val="accent1"/>
+          </a:effectRef>
+          <a:fontRef idx="minor">
+            <a:schemeClr val="lt1"/>
+          </a:fontRef>
+        </p:style>
+        <p:txBody>
+          <a:bodyPr vertOverflow="clip" horzOverflow="clip" rtlCol="0" anchor="t"/>
+          <a:lstStyle/>
+          <a:p>
+            <a:pPr algn="l"/>
+            <a:endParaRPr lang="en-US"/>
+          </a:p>
+        </p:txBody>
+      </p:sp>
+      <p:sp>
+        <p:nvSpPr>
+          <p:cNvPr id="74" name="Rounded Rectangle 73">
+            <a:extLst>
+              <a:ext uri="{FF2B5EF4-FFF2-40B4-BE49-F238E27FC236}">
+                <a16:creationId xmlns:a16="http://schemas.microsoft.com/office/drawing/2014/main" id="{0573DC19-537D-DD4E-BDA3-F63AD4CA431E}"/>
+              </a:ext>
+            </a:extLst>
+          </p:cNvPr>
+          <p:cNvSpPr/>
+          <p:nvPr/>
+        </p:nvSpPr>
+        <p:spPr>
+          <a:xfrm>
+            <a:off x="8128000" y="2235200"/>
+            <a:ext cx="2082800" cy="749300"/>
+          </a:xfrm>
+          <a:prstGeom prst="roundRect">
+            <a:avLst/>
+          </a:prstGeom>
+          <a:solidFill>
+            <a:srgbClr val="DCEBE1"/>
+          </a:solidFill>
+          <a:ln w="9525" cap="flat" cmpd="sng" algn="ctr">
+            <a:noFill/>
+            <a:prstDash val="solid"/>
+          </a:ln>
+        </p:spPr>
+        <p:style>
+          <a:lnRef idx="1">
+            <a:schemeClr val="accent1"/>
+          </a:lnRef>
+          <a:fillRef idx="3">
+            <a:schemeClr val="accent1"/>
+          </a:fillRef>
+          <a:effectRef idx="2">
+            <a:schemeClr val="accent1"/>
+          </a:effectRef>
+          <a:fontRef idx="minor">
+            <a:schemeClr val="lt1"/>
+          </a:fontRef>
+        </p:style>
+        <p:txBody>
+          <a:bodyPr vertOverflow="clip" horzOverflow="clip" wrap="square" rtlCol="0" anchor="ctr" anchorCtr="0">
+            <a:normAutofit/>
+          </a:bodyPr>
+          <a:lstStyle/>
+          <a:p>
+            <a:pPr algn="l"/>
+            <a:r>
+              <a:rPr lang="en-US" sz="1020" b="1">
+                <a:solidFill>
+                  <a:srgbClr val="12402D"/>
+                </a:solidFill>
+                <a:latin typeface="Avenir Next"/>
+              </a:rPr>
+              <a:t>CLIMATE &amp; ENVIRONMENT
+Delays real decarbonisation</a:t>
+            </a:r>
+          </a:p>
+        </p:txBody>
+      </p:sp>
+      <p:sp>
+        <p:nvSpPr>
+          <p:cNvPr id="75" name="Rounded Rectangle 74">
+            <a:extLst>
+              <a:ext uri="{FF2B5EF4-FFF2-40B4-BE49-F238E27FC236}">
+                <a16:creationId xmlns:a16="http://schemas.microsoft.com/office/drawing/2014/main" id="{2CAEAA33-469A-5141-B67C-9D7B011EB19A}"/>
+              </a:ext>
+            </a:extLst>
+          </p:cNvPr>
+          <p:cNvSpPr/>
+          <p:nvPr/>
+        </p:nvSpPr>
+        <p:spPr>
+          <a:xfrm>
+            <a:off x="10033000" y="2984500"/>
+            <a:ext cx="1371600" cy="736600"/>
+          </a:xfrm>
+          <a:prstGeom prst="roundRect">
+            <a:avLst/>
+          </a:prstGeom>
+          <a:solidFill>
+            <a:srgbClr val="E7F0EA"/>
+          </a:solidFill>
+          <a:ln w="9525" cap="flat" cmpd="sng" algn="ctr">
+            <a:noFill/>
+            <a:prstDash val="solid"/>
+          </a:ln>
+        </p:spPr>
+        <p:style>
+          <a:lnRef idx="1">
+            <a:schemeClr val="accent1"/>
+          </a:lnRef>
+          <a:fillRef idx="3">
+            <a:schemeClr val="accent1"/>
+          </a:fillRef>
+          <a:effectRef idx="2">
+            <a:schemeClr val="accent1"/>
+          </a:effectRef>
+          <a:fontRef idx="minor">
+            <a:schemeClr val="lt1"/>
+          </a:fontRef>
+        </p:style>
+        <p:txBody>
+          <a:bodyPr vertOverflow="clip" horzOverflow="clip" wrap="square" rtlCol="0" anchor="ctr" anchorCtr="0">
+            <a:normAutofit/>
+          </a:bodyPr>
+          <a:lstStyle/>
+          <a:p>
+            <a:pPr algn="l"/>
+            <a:r>
+              <a:rPr lang="en-US" sz="970" b="1">
+                <a:solidFill>
+                  <a:srgbClr val="12402D"/>
+                </a:solidFill>
+                <a:latin typeface="Avenir Next"/>
+              </a:rPr>
+              <a:t>FINANCIAL
+Misdirects green capital</a:t>
+            </a:r>
+          </a:p>
+        </p:txBody>
+      </p:sp>
+      <p:sp>
+        <p:nvSpPr>
+          <p:cNvPr id="76" name="Rounded Rectangle 75">
+            <a:extLst>
+              <a:ext uri="{FF2B5EF4-FFF2-40B4-BE49-F238E27FC236}">
+                <a16:creationId xmlns:a16="http://schemas.microsoft.com/office/drawing/2014/main" id="{92CCE726-3310-804B-BF66-1E6FEF259D92}"/>
+              </a:ext>
+            </a:extLst>
+          </p:cNvPr>
+          <p:cNvSpPr/>
+          <p:nvPr/>
+        </p:nvSpPr>
+        <p:spPr>
+          <a:xfrm>
+            <a:off x="8128000" y="3810000"/>
+            <a:ext cx="2082800" cy="812800"/>
+          </a:xfrm>
+          <a:prstGeom prst="roundRect">
+            <a:avLst/>
+          </a:prstGeom>
+          <a:solidFill>
+            <a:srgbClr val="FFF8EE"/>
+          </a:solidFill>
+          <a:ln w="9525" cap="flat" cmpd="sng" algn="ctr">
+            <a:noFill/>
+            <a:prstDash val="solid"/>
+          </a:ln>
+        </p:spPr>
+        <p:style>
+          <a:lnRef idx="1">
+            <a:schemeClr val="accent1"/>
+          </a:lnRef>
+          <a:fillRef idx="3">
+            <a:schemeClr val="accent1"/>
+          </a:fillRef>
+          <a:effectRef idx="2">
+            <a:schemeClr val="accent1"/>
+          </a:effectRef>
+          <a:fontRef idx="minor">
+            <a:schemeClr val="lt1"/>
+          </a:fontRef>
+        </p:style>
+        <p:txBody>
+          <a:bodyPr vertOverflow="clip" horzOverflow="clip" wrap="square" rtlCol="0" anchor="ctr" anchorCtr="0">
+            <a:normAutofit/>
+          </a:bodyPr>
+          <a:lstStyle/>
+          <a:p>
+            <a:pPr algn="l"/>
+            <a:r>
+              <a:rPr lang="en-US" sz="980" b="1">
+                <a:solidFill>
+                  <a:srgbClr val="12402D"/>
+                </a:solidFill>
+                <a:latin typeface="Avenir Next"/>
+              </a:rPr>
+              <a:t>MARKET TRUST
+Erodes investor and consumer confidence</a:t>
+            </a:r>
+          </a:p>
+        </p:txBody>
+      </p:sp>
+      <p:sp>
+        <p:nvSpPr>
+          <p:cNvPr id="77" name="TextBox 76">
+            <a:extLst>
+              <a:ext uri="{FF2B5EF4-FFF2-40B4-BE49-F238E27FC236}">
+                <a16:creationId xmlns:a16="http://schemas.microsoft.com/office/drawing/2014/main" id="{2DC1F6D8-1081-3741-9E0D-0420B988EC79}"/>
+              </a:ext>
+            </a:extLst>
+          </p:cNvPr>
+          <p:cNvSpPr txBox="1"/>
+          <p:nvPr/>
+        </p:nvSpPr>
+        <p:spPr>
+          <a:xfrm>
+            <a:off x="10261600" y="2209800"/>
+            <a:ext cx="1041400" cy="381000"/>
+          </a:xfrm>
+          <a:prstGeom prst="rect">
+            <a:avLst/>
+          </a:prstGeom>
+          <a:noFill/>
+          <a:ln>
+            <a:noFill/>
+          </a:ln>
+        </p:spPr>
+        <p:txBody>
+          <a:bodyPr vertOverflow="overflow" vert="horz" wrap="square" rtlCol="0" anchor="ctr" anchorCtr="0">
+            <a:normAutofit/>
+          </a:bodyPr>
+          <a:lstStyle/>
+          <a:p>
+            <a:pPr algn="l"/>
+            <a:r>
+              <a:rPr lang="en-US" sz="900" b="1">
+                <a:solidFill>
+                  <a:srgbClr val="22704E"/>
+                </a:solidFill>
+                <a:latin typeface="Avenir Next"/>
+              </a:rPr>
+              <a:t>False comfort</a:t>
+            </a:r>
+          </a:p>
+        </p:txBody>
+      </p:sp>
+      <p:sp>
+        <p:nvSpPr>
+          <p:cNvPr id="78" name="TextBox 77">
+            <a:extLst>
+              <a:ext uri="{FF2B5EF4-FFF2-40B4-BE49-F238E27FC236}">
+                <a16:creationId xmlns:a16="http://schemas.microsoft.com/office/drawing/2014/main" id="{454AF2D3-12E6-CD49-8F6D-0BE022F0774E}"/>
+              </a:ext>
+            </a:extLst>
+          </p:cNvPr>
+          <p:cNvSpPr txBox="1"/>
+          <p:nvPr/>
+        </p:nvSpPr>
+        <p:spPr>
+          <a:xfrm>
+            <a:off x="10261600" y="3949700"/>
+            <a:ext cx="1117600" cy="571500"/>
+          </a:xfrm>
+          <a:prstGeom prst="rect">
+            <a:avLst/>
+          </a:prstGeom>
+          <a:noFill/>
+          <a:ln>
+            <a:noFill/>
+          </a:ln>
+        </p:spPr>
+        <p:txBody>
+          <a:bodyPr vertOverflow="overflow" vert="horz" wrap="square" rtlCol="0" anchor="ctr" anchorCtr="0">
+            <a:normAutofit/>
+          </a:bodyPr>
+          <a:lstStyle/>
+          <a:p>
+            <a:pPr algn="l"/>
+            <a:r>
+              <a:rPr lang="en-US" sz="870" b="1">
+                <a:solidFill>
+                  <a:srgbClr val="22704E"/>
+                </a:solidFill>
+                <a:latin typeface="Avenir Next"/>
+              </a:rPr>
+              <a:t>Crowds out genuine green business</a:t>
             </a:r>
           </a:p>
         </p:txBody>
@@ -28984,4 +29909,45 @@
     </a:ext>
   </a:extLst>
 </a:theme>
+</file>
+
+<file path=ppt/webextensions/taskpanes.xml><?xml version="1.0" encoding="utf-8"?>
+<wetp:taskpanes xmlns:wetp="http://schemas.microsoft.com/office/webextensions/taskpanes/2010/11">
+  <wetp:taskpane dockstate="right" visibility="0" width="350" row="0">
+    <wetp:webextensionref xmlns:r="http://schemas.openxmlformats.org/officeDocument/2006/relationships" r:id="rId1"/>
+  </wetp:taskpane>
+  <wetp:taskpane dockstate="right" visibility="0" width="350" row="0">
+    <wetp:webextensionref xmlns:r="http://schemas.openxmlformats.org/officeDocument/2006/relationships" r:id="rId2"/>
+  </wetp:taskpane>
+</wetp:taskpanes>
+</file>
+
+<file path=ppt/webextensions/webextension1.xml><?xml version="1.0" encoding="utf-8"?>
+<we:webextension xmlns:we="http://schemas.microsoft.com/office/webextensions/webextension/2010/11" id="{81D4ABBE-D2DB-C940-8FAD-2C4185867D05}">
+  <we:reference id="wa200010215" version="2.0.0.0" store="en-GB" storeType="OMEX"/>
+  <we:alternateReferences>
+    <we:reference id="wa200010215" version="2.0.0.0" store="wa200010215" storeType="OMEX"/>
+  </we:alternateReferences>
+  <we:properties>
+    <we:property name="bps.codex_control.document_id" value="&quot;c6e61e05-e222-464d-8d2e-e0195923e89b&quot;"/>
+  </we:properties>
+  <we:bindings/>
+  <we:snapshot xmlns:r="http://schemas.openxmlformats.org/officeDocument/2006/relationships"/>
+</we:webextension>
+</file>
+
+<file path=ppt/webextensions/webextension2.xml><?xml version="1.0" encoding="utf-8"?>
+<we:webextension xmlns:we="http://schemas.microsoft.com/office/webextensions/webextension/2010/11" id="{23334883-7E29-3443-96B6-7930DF62723D}">
+  <we:reference id="wa200011214" version="1.0.0.1" store="en-GB" storeType="OMEX"/>
+  <we:alternateReferences>
+    <we:reference id="wa200011214" version="1.0.0.1" store="wa200011214" storeType="OMEX"/>
+  </we:alternateReferences>
+  <we:properties>
+    <we:property name="grokConversationBinding" value="{&quot;responseId&quot;:&quot;8c56439f-bdbc-9c09-83e7-aec71af2626f&quot;,&quot;title&quot;:&quot;Slide 13 Infographic Redesign&quot;,&quot;transport&quot;:&quot;responses&quot;}"/>
+    <we:property name="_postImportCommit" value="1786867566948"/>
+    <we:property name="_flush" value="1786867566948"/>
+  </we:properties>
+  <we:bindings/>
+  <we:snapshot xmlns:r="http://schemas.openxmlformats.org/officeDocument/2006/relationships"/>
+</we:webextension>
 </file>
--- a/Thesis Defence Presentation Final.pptx
+++ b/Thesis Defence Presentation Final.pptx
@@ -19,7 +19,7 @@
     <p:sldId id="281" r:id="rId10"/>
     <p:sldId id="303" r:id="rId11"/>
     <p:sldId id="290" r:id="rId12"/>
-    <p:sldId id="295" r:id="rId13"/>
+    <p:sldId id="312" r:id="rId13"/>
     <p:sldId id="310" r:id="rId14"/>
     <p:sldId id="294" r:id="rId15"/>
     <p:sldId id="287" r:id="rId16"/>
@@ -7022,41 +7022,25 @@
               <a:spcAft>
                 <a:spcPts val="600"/>
               </a:spcAft>
-              <a:defRPr sz="1350" b="1">
+              <a:defRPr sz="1600" b="1">
                 <a:solidFill>
                   <a:srgbClr val="12402D"/>
                 </a:solidFill>
-              </a:defRPr>
-            </a:pPr>
-            <a:r>
-              <a:rPr sz="1600" dirty="0">
-                <a:latin typeface="Avenir Next" panose="020B0503020202020204" pitchFamily="34" charset="0"/>
-              </a:rPr>
-              <a:t>1. What </a:t>
-            </a:r>
-            <a:r>
-              <a:rPr lang="en-US" sz="1600" dirty="0">
-                <a:latin typeface="Avenir Next" panose="020B0503020202020204" pitchFamily="34" charset="0"/>
-              </a:rPr>
-              <a:t>actually a </a:t>
-            </a:r>
-            <a:r>
-              <a:rPr sz="1600" dirty="0">
-                <a:latin typeface="Avenir Next" panose="020B0503020202020204" pitchFamily="34" charset="0"/>
-              </a:rPr>
-              <a:t>Company</a:t>
-            </a:r>
-            <a:r>
-              <a:rPr lang="en-US" sz="1600" dirty="0">
-                <a:latin typeface="Avenir Next" panose="020B0503020202020204" pitchFamily="34" charset="0"/>
-              </a:rPr>
-              <a:t> is</a:t>
-            </a:r>
-            <a:r>
-              <a:rPr sz="1600" dirty="0">
-                <a:latin typeface="Avenir Next" panose="020B0503020202020204" pitchFamily="34" charset="0"/>
-              </a:rPr>
-              <a:t>?</a:t>
+                <a:latin typeface="Avenir Next"/>
+                <a:ea typeface="Avenir Next"/>
+                <a:cs typeface="Avenir Next"/>
+              </a:defRPr>
+            </a:pPr>
+            <a:r>
+              <a:rPr lang="en-US" sz="1600" b="1" dirty="0">
+                <a:solidFill>
+                  <a:srgbClr val="12402D"/>
+                </a:solidFill>
+                <a:latin typeface="Avenir Next"/>
+                <a:ea typeface="Avenir Next"/>
+                <a:cs typeface="Avenir Next"/>
+              </a:rPr>
+              <a:t>1. What actually a Company is?</a:t>
             </a:r>
           </a:p>
           <a:p>
@@ -7064,17 +7048,25 @@
               <a:spcAft>
                 <a:spcPts val="400"/>
               </a:spcAft>
-              <a:defRPr sz="1150">
+              <a:defRPr sz="1400">
                 <a:solidFill>
                   <a:srgbClr val="2D2D2D"/>
                 </a:solidFill>
-              </a:defRPr>
-            </a:pPr>
-            <a:r>
-              <a:rPr lang="en-IN" sz="1400" dirty="0">
-                <a:latin typeface="Avenir Next" panose="020B0503020202020204" pitchFamily="34" charset="0"/>
-              </a:rPr>
-              <a:t>•  The thesis tests five classic theories of corporate personality.</a:t>
+                <a:latin typeface="Avenir Next"/>
+                <a:ea typeface="Avenir Next"/>
+                <a:cs typeface="Avenir Next"/>
+              </a:defRPr>
+            </a:pPr>
+            <a:r>
+              <a:rPr lang="en-US" sz="1400" dirty="0">
+                <a:solidFill>
+                  <a:srgbClr val="2D2D2D"/>
+                </a:solidFill>
+                <a:latin typeface="Avenir Next"/>
+                <a:ea typeface="Avenir Next"/>
+                <a:cs typeface="Avenir Next"/>
+              </a:rPr>
+              <a:t>• Five classic theories of corporate personality are tested.</a:t>
             </a:r>
           </a:p>
           <a:p>
@@ -7082,80 +7074,48 @@
               <a:spcAft>
                 <a:spcPts val="400"/>
               </a:spcAft>
-              <a:defRPr sz="1150">
+              <a:defRPr sz="1400">
                 <a:solidFill>
                   <a:srgbClr val="2D2D2D"/>
                 </a:solidFill>
-              </a:defRPr>
-            </a:pPr>
-            <a:r>
-              <a:rPr sz="1400" dirty="0">
-                <a:latin typeface="Avenir Next" panose="020B0503020202020204" pitchFamily="34" charset="0"/>
-              </a:rPr>
-              <a:t>• </a:t>
-            </a:r>
+                <a:latin typeface="Avenir Next"/>
+                <a:ea typeface="Avenir Next"/>
+                <a:cs typeface="Avenir Next"/>
+              </a:defRPr>
+            </a:pPr>
             <a:r>
               <a:rPr lang="en-US" sz="1400" dirty="0">
-                <a:latin typeface="Avenir Next" panose="020B0503020202020204" pitchFamily="34" charset="0"/>
-              </a:rPr>
-              <a:t>The theories support the view that a</a:t>
-            </a:r>
-            <a:r>
-              <a:rPr sz="1400" dirty="0">
-                <a:latin typeface="Avenir Next" panose="020B0503020202020204" pitchFamily="34" charset="0"/>
-              </a:rPr>
-              <a:t> company is a real social actor: its public green promises create real legal expectations.</a:t>
+                <a:solidFill>
+                  <a:srgbClr val="2D2D2D"/>
+                </a:solidFill>
+                <a:latin typeface="Avenir Next"/>
+                <a:ea typeface="Avenir Next"/>
+                <a:cs typeface="Avenir Next"/>
+              </a:rPr>
+              <a:t>• A company is a real social actor: public green promises create legal expectations.</a:t>
             </a:r>
           </a:p>
           <a:p>
             <a:pPr>
-              <a:defRPr sz="1150">
+              <a:defRPr sz="1400">
                 <a:solidFill>
                   <a:srgbClr val="2D2D2D"/>
                 </a:solidFill>
-              </a:defRPr>
-            </a:pPr>
-            <a:r>
-              <a:rPr sz="1400" dirty="0">
-                <a:latin typeface="Avenir Next" panose="020B0503020202020204" pitchFamily="34" charset="0"/>
-              </a:rPr>
-              <a:t>• </a:t>
-            </a:r>
+                <a:latin typeface="Avenir Next"/>
+                <a:ea typeface="Avenir Next"/>
+                <a:cs typeface="Avenir Next"/>
+              </a:defRPr>
+            </a:pPr>
             <a:r>
               <a:rPr lang="en-US" sz="1400" dirty="0">
-                <a:latin typeface="Avenir Next" panose="020B0503020202020204" pitchFamily="34" charset="0"/>
-              </a:rPr>
-              <a:t>Specifically, </a:t>
-            </a:r>
-            <a:r>
-              <a:rPr sz="1400" dirty="0">
-                <a:latin typeface="Avenir Next" panose="020B0503020202020204" pitchFamily="34" charset="0"/>
-              </a:rPr>
-              <a:t>Indian law </a:t>
-            </a:r>
-            <a:r>
-              <a:rPr lang="en-US" sz="1400" dirty="0">
-                <a:latin typeface="Avenir Next" panose="020B0503020202020204" pitchFamily="34" charset="0"/>
-              </a:rPr>
-              <a:t>closely </a:t>
-            </a:r>
-            <a:r>
-              <a:rPr sz="1400" dirty="0">
-                <a:latin typeface="Avenir Next" panose="020B0503020202020204" pitchFamily="34" charset="0"/>
-              </a:rPr>
-              <a:t>follows stakeholder </a:t>
-            </a:r>
-            <a:r>
-              <a:rPr lang="en-US" sz="1400" dirty="0">
-                <a:latin typeface="Avenir Next" panose="020B0503020202020204" pitchFamily="34" charset="0"/>
-              </a:rPr>
-              <a:t>position</a:t>
-            </a:r>
-            <a:r>
-              <a:rPr sz="1400" dirty="0">
-                <a:latin typeface="Avenir Next" panose="020B0503020202020204" pitchFamily="34" charset="0"/>
-              </a:rPr>
-              <a:t>: Section 166(2) makes environmental care an inherent duty.</a:t>
+                <a:solidFill>
+                  <a:srgbClr val="2D2D2D"/>
+                </a:solidFill>
+                <a:latin typeface="Avenir Next"/>
+                <a:ea typeface="Avenir Next"/>
+                <a:cs typeface="Avenir Next"/>
+              </a:rPr>
+              <a:t>• Indian law follows the stakeholder position: Section 166(2) makes environmental care an inherent duty.</a:t>
             </a:r>
           </a:p>
         </p:txBody>
@@ -7442,7 +7402,7 @@
         <p:spPr>
           <a:xfrm>
             <a:off x="630000" y="3122843"/>
-            <a:ext cx="5155405" cy="2462213"/>
+            <a:ext cx="5155405" cy="1992853"/>
           </a:xfrm>
           <a:prstGeom prst="rect">
             <a:avLst/>
@@ -7459,54 +7419,51 @@
               <a:spcAft>
                 <a:spcPts val="600"/>
               </a:spcAft>
-              <a:defRPr sz="1350" b="1">
+              <a:defRPr sz="1600" b="1">
                 <a:solidFill>
                   <a:srgbClr val="12402D"/>
                 </a:solidFill>
-              </a:defRPr>
-            </a:pPr>
-            <a:r>
-              <a:rPr sz="1600" dirty="0">
-                <a:latin typeface="Avenir Next" panose="020B0503020202020204" pitchFamily="34" charset="0"/>
-              </a:rPr>
-              <a:t>3. </a:t>
-            </a:r>
-            <a:r>
-              <a:rPr lang="en-US" sz="1600" dirty="0">
-                <a:latin typeface="Avenir Next" panose="020B0503020202020204" pitchFamily="34" charset="0"/>
-              </a:rPr>
-              <a:t>To whom the duty is owed</a:t>
-            </a:r>
-            <a:r>
-              <a:rPr sz="1600" dirty="0">
-                <a:latin typeface="Avenir Next" panose="020B0503020202020204" pitchFamily="34" charset="0"/>
-              </a:rPr>
-              <a:t>?</a:t>
-            </a:r>
-            <a:endParaRPr lang="en-IN" sz="1600" dirty="0">
-              <a:latin typeface="Avenir Next" panose="020B0503020202020204" pitchFamily="34" charset="0"/>
-            </a:endParaRPr>
+                <a:latin typeface="Avenir Next"/>
+                <a:ea typeface="Avenir Next"/>
+                <a:cs typeface="Avenir Next"/>
+              </a:defRPr>
+            </a:pPr>
+            <a:r>
+              <a:rPr lang="en-US" sz="1600" b="1" dirty="0">
+                <a:solidFill>
+                  <a:srgbClr val="12402D"/>
+                </a:solidFill>
+                <a:latin typeface="Avenir Next"/>
+                <a:ea typeface="Avenir Next"/>
+                <a:cs typeface="Avenir Next"/>
+              </a:rPr>
+              <a:t>3. To whom the duty is owed?</a:t>
+            </a:r>
           </a:p>
           <a:p>
             <a:pPr>
               <a:spcAft>
                 <a:spcPts val="300"/>
               </a:spcAft>
-            </a:pPr>
-            <a:r>
-              <a:rPr lang="en-IN" sz="1400" dirty="0">
-                <a:latin typeface="Avenir Next" panose="020B0503020202020204" pitchFamily="34" charset="0"/>
-              </a:rPr>
-              <a:t>•  </a:t>
-            </a:r>
-            <a:r>
-              <a:rPr lang="en-IN" sz="1400" dirty="0">
+              <a:defRPr sz="1400">
                 <a:solidFill>
                   <a:srgbClr val="3A3A4A"/>
                 </a:solidFill>
-                <a:latin typeface="Avenir Next" panose="020B0503020202020204" pitchFamily="34" charset="0"/>
-              </a:rPr>
-              <a:t>A duty only bites if somebody can enforce it.</a:t>
+                <a:latin typeface="Avenir Next"/>
+                <a:ea typeface="Avenir Next"/>
+                <a:cs typeface="Avenir Next"/>
+              </a:defRPr>
+            </a:pPr>
+            <a:r>
+              <a:rPr lang="en-US" sz="1400" dirty="0">
+                <a:solidFill>
+                  <a:srgbClr val="3A3A4A"/>
+                </a:solidFill>
+                <a:latin typeface="Avenir Next"/>
+                <a:ea typeface="Avenir Next"/>
+                <a:cs typeface="Avenir Next"/>
+              </a:rPr>
+              <a:t>• A duty only bites if somebody can enforce it.</a:t>
             </a:r>
           </a:p>
           <a:p>
@@ -7514,15 +7471,25 @@
               <a:spcAft>
                 <a:spcPts val="300"/>
               </a:spcAft>
-            </a:pPr>
-            <a:r>
-              <a:rPr lang="en-IN" sz="1400" dirty="0">
+              <a:defRPr sz="1400">
                 <a:solidFill>
                   <a:srgbClr val="3A3A4A"/>
                 </a:solidFill>
-                <a:latin typeface="Avenir Next" panose="020B0503020202020204" pitchFamily="34" charset="0"/>
-              </a:rPr>
-              <a:t>•  Duties owed to the State are strongest, the CCPA and SEBI can act to enforce them.</a:t>
+                <a:latin typeface="Avenir Next"/>
+                <a:ea typeface="Avenir Next"/>
+                <a:cs typeface="Avenir Next"/>
+              </a:defRPr>
+            </a:pPr>
+            <a:r>
+              <a:rPr lang="en-US" sz="1400" dirty="0">
+                <a:solidFill>
+                  <a:srgbClr val="3A3A4A"/>
+                </a:solidFill>
+                <a:latin typeface="Avenir Next"/>
+                <a:ea typeface="Avenir Next"/>
+                <a:cs typeface="Avenir Next"/>
+              </a:rPr>
+              <a:t>• Duties to the State are strongest — CCPA and SEBI can enforce them.</a:t>
             </a:r>
           </a:p>
           <a:p>
@@ -7530,15 +7497,25 @@
               <a:spcAft>
                 <a:spcPts val="300"/>
               </a:spcAft>
-            </a:pPr>
-            <a:r>
-              <a:rPr lang="en-IN" sz="1400" dirty="0">
+              <a:defRPr sz="1400">
                 <a:solidFill>
                   <a:srgbClr val="3A3A4A"/>
                 </a:solidFill>
-                <a:latin typeface="Avenir Next" panose="020B0503020202020204" pitchFamily="34" charset="0"/>
-              </a:rPr>
-              <a:t>•  Investor-facing duties are also enforceable, but only through narrow disclosure channels.</a:t>
+                <a:latin typeface="Avenir Next"/>
+                <a:ea typeface="Avenir Next"/>
+                <a:cs typeface="Avenir Next"/>
+              </a:defRPr>
+            </a:pPr>
+            <a:r>
+              <a:rPr lang="en-US" sz="1400" dirty="0">
+                <a:solidFill>
+                  <a:srgbClr val="3A3A4A"/>
+                </a:solidFill>
+                <a:latin typeface="Avenir Next"/>
+                <a:ea typeface="Avenir Next"/>
+                <a:cs typeface="Avenir Next"/>
+              </a:rPr>
+              <a:t>• Investor-facing duties run only through narrow disclosure channels.</a:t>
             </a:r>
           </a:p>
           <a:p>
@@ -7546,31 +7523,26 @@
               <a:spcAft>
                 <a:spcPts val="300"/>
               </a:spcAft>
-            </a:pPr>
-            <a:r>
-              <a:rPr lang="en-IN" sz="1400" dirty="0">
+              <a:defRPr sz="1400">
                 <a:solidFill>
                   <a:srgbClr val="3A3A4A"/>
                 </a:solidFill>
-                <a:latin typeface="Avenir Next" panose="020B0503020202020204" pitchFamily="34" charset="0"/>
-              </a:rPr>
-              <a:t>•  Section 166(2)'s environmental duty has no clear claimant, so it reads merely as an aspiration rather than law. That is the gap this thesis targets.</a:t>
-            </a:r>
-          </a:p>
-          <a:p>
-            <a:pPr>
-              <a:spcAft>
-                <a:spcPts val="400"/>
-              </a:spcAft>
-              <a:defRPr sz="1150">
-                <a:solidFill>
-                  <a:srgbClr val="2D2D2D"/>
-                </a:solidFill>
-              </a:defRPr>
-            </a:pPr>
-            <a:endParaRPr lang="en-IN" sz="1400" dirty="0">
-              <a:latin typeface="Avenir Next" panose="020B0503020202020204" pitchFamily="34" charset="0"/>
-            </a:endParaRPr>
+                <a:latin typeface="Avenir Next"/>
+                <a:ea typeface="Avenir Next"/>
+                <a:cs typeface="Avenir Next"/>
+              </a:defRPr>
+            </a:pPr>
+            <a:r>
+              <a:rPr lang="en-US" sz="1400" dirty="0">
+                <a:solidFill>
+                  <a:srgbClr val="3A3A4A"/>
+                </a:solidFill>
+                <a:latin typeface="Avenir Next"/>
+                <a:ea typeface="Avenir Next"/>
+                <a:cs typeface="Avenir Next"/>
+              </a:rPr>
+              <a:t>• Section 166(2)'s environmental duty has no clear claimant, so it reads as aspiration, not law — the gap this thesis targets.</a:t>
+            </a:r>
           </a:p>
         </p:txBody>
       </p:sp>
@@ -7960,7 +7932,7 @@
     </p:spTree>
     <p:extLst>
       <p:ext uri="{BB962C8B-B14F-4D97-AF65-F5344CB8AC3E}">
-        <p14:creationId xmlns:p14="http://schemas.microsoft.com/office/powerpoint/2010/main" val="3047954273"/>
+        <p14:creationId xmlns:p14="http://schemas.microsoft.com/office/powerpoint/2010/main" val="3966405348"/>
       </p:ext>
     </p:extLst>
   </p:cSld>
@@ -29943,9 +29915,9 @@
     <we:reference id="wa200011214" version="1.0.0.1" store="wa200011214" storeType="OMEX"/>
   </we:alternateReferences>
   <we:properties>
-    <we:property name="grokConversationBinding" value="{&quot;responseId&quot;:&quot;8c56439f-bdbc-9c09-83e7-aec71af2626f&quot;,&quot;title&quot;:&quot;Slide 13 Infographic Redesign&quot;,&quot;transport&quot;:&quot;responses&quot;}"/>
-    <we:property name="_postImportCommit" value="1786867566948"/>
-    <we:property name="_flush" value="1786867566948"/>
+    <we:property name="_flush" value="1786868305192"/>
+    <we:property name="_postImportCommit" value="1786868305192"/>
+    <we:property name="grokConversationBinding" value="{&quot;responseId&quot;:&quot;6ebd02e2-39fe-9866-8e33-718e47e27752&quot;,&quot;title&quot;:&quot;Condense Text in Sections 1 &amp; 3&quot;,&quot;transport&quot;:&quot;responses&quot;}"/>
   </we:properties>
   <we:bindings/>
   <we:snapshot xmlns:r="http://schemas.openxmlformats.org/officeDocument/2006/relationships"/>

--- a/Thesis Defence Presentation Final.pptx
+++ b/Thesis Defence Presentation Final.pptx
@@ -19,7 +19,7 @@
     <p:sldId id="281" r:id="rId10"/>
     <p:sldId id="303" r:id="rId11"/>
     <p:sldId id="290" r:id="rId12"/>
-    <p:sldId id="312" r:id="rId13"/>
+    <p:sldId id="317" r:id="rId13"/>
     <p:sldId id="310" r:id="rId14"/>
     <p:sldId id="294" r:id="rId15"/>
     <p:sldId id="287" r:id="rId16"/>
@@ -6926,7 +6926,7 @@
                 </a:solidFill>
                 <a:latin typeface="Avenir Next" panose="020B0503020202020204" pitchFamily="34" charset="0"/>
               </a:rPr>
-              <a:t>Why Greenwashing Is a Corporate Accountability Failure</a:t>
+              <a:t>Greenwashing </a:t>
             </a:r>
             <a:r>
               <a:rPr lang="en-US" sz="3000" b="1" dirty="0">
@@ -6935,14 +6935,17 @@
                 </a:solidFill>
                 <a:latin typeface="Avenir Next" panose="020B0503020202020204" pitchFamily="34" charset="0"/>
               </a:rPr>
-              <a:t> ?</a:t>
-            </a:r>
-            <a:endParaRPr sz="3000" b="1" dirty="0">
-              <a:solidFill>
-                <a:srgbClr val="173F35"/>
-              </a:solidFill>
-              <a:latin typeface="Avenir Next" panose="020B0503020202020204" pitchFamily="34" charset="0"/>
-            </a:endParaRPr>
+              <a:t>as a</a:t>
+            </a:r>
+            <a:r>
+              <a:rPr sz="3000" b="1" dirty="0">
+                <a:solidFill>
+                  <a:srgbClr val="173F35"/>
+                </a:solidFill>
+                <a:latin typeface="Avenir Next" panose="020B0503020202020204" pitchFamily="34" charset="0"/>
+              </a:rPr>
+              <a:t> Corporate Accountability Failure</a:t>
+            </a:r>
           </a:p>
         </p:txBody>
       </p:sp>
@@ -6954,8 +6957,8 @@
         </p:nvSpPr>
         <p:spPr>
           <a:xfrm>
-            <a:off x="500000" y="1049409"/>
-            <a:ext cx="5411403" cy="1801368"/>
+            <a:off x="495300" y="939800"/>
+            <a:ext cx="11188700" cy="990600"/>
           </a:xfrm>
           <a:prstGeom prst="roundRect">
             <a:avLst>
@@ -7004,8 +7007,8 @@
         </p:nvSpPr>
         <p:spPr>
           <a:xfrm>
-            <a:off x="630000" y="1136631"/>
-            <a:ext cx="5155405" cy="1549142"/>
+            <a:off x="622300" y="977900"/>
+            <a:ext cx="10934700" cy="914400"/>
           </a:xfrm>
           <a:prstGeom prst="rect">
             <a:avLst/>
@@ -7020,45 +7023,69 @@
           <a:p>
             <a:pPr algn="l">
               <a:spcAft>
-                <a:spcPts val="600"/>
+                <a:spcPts val="300"/>
               </a:spcAft>
-              <a:defRPr sz="1600" b="1">
+              <a:buNone/>
+            </a:pPr>
+            <a:r>
+              <a:rPr lang="en-US" sz="1400" b="1" dirty="0">
                 <a:solidFill>
                   <a:srgbClr val="12402D"/>
                 </a:solidFill>
                 <a:latin typeface="Avenir Next"/>
                 <a:ea typeface="Avenir Next"/>
                 <a:cs typeface="Avenir Next"/>
-              </a:defRPr>
-            </a:pPr>
-            <a:r>
-              <a:rPr lang="en-US" sz="1600" b="1" dirty="0">
-                <a:solidFill>
-                  <a:srgbClr val="12402D"/>
+              </a:rPr>
+              <a:t>What a Company Actually Is</a:t>
+            </a:r>
+          </a:p>
+          <a:p>
+            <a:pPr marL="171450" indent="-171450" algn="l">
+              <a:spcAft>
+                <a:spcPts val="200"/>
+              </a:spcAft>
+              <a:buFont typeface="Arial"/>
+              <a:buChar char="•"/>
+            </a:pPr>
+            <a:r>
+              <a:rPr lang="en-US" sz="1200" dirty="0">
+                <a:solidFill>
+                  <a:srgbClr val="2D2D2D"/>
                 </a:solidFill>
                 <a:latin typeface="Avenir Next"/>
                 <a:ea typeface="Avenir Next"/>
                 <a:cs typeface="Avenir Next"/>
               </a:rPr>
-              <a:t>1. What actually a Company is?</a:t>
-            </a:r>
-          </a:p>
-          <a:p>
-            <a:pPr>
+              <a:t>Five classic theories of corporate personality are tested in the thesis.</a:t>
+            </a:r>
+          </a:p>
+          <a:p>
+            <a:pPr marL="171450" indent="-171450" algn="l">
               <a:spcAft>
-                <a:spcPts val="400"/>
+                <a:spcPts val="200"/>
               </a:spcAft>
-              <a:defRPr sz="1400">
+              <a:buFont typeface="Arial"/>
+              <a:buChar char="•"/>
+            </a:pPr>
+            <a:r>
+              <a:rPr lang="en-US" sz="1200" dirty="0">
                 <a:solidFill>
                   <a:srgbClr val="2D2D2D"/>
                 </a:solidFill>
                 <a:latin typeface="Avenir Next"/>
                 <a:ea typeface="Avenir Next"/>
                 <a:cs typeface="Avenir Next"/>
-              </a:defRPr>
-            </a:pPr>
-            <a:r>
-              <a:rPr lang="en-US" sz="1400" dirty="0">
+              </a:rPr>
+              <a:t>Interpretation says that a company is a real social actor and green promises create legal expectations on the company.</a:t>
+            </a:r>
+          </a:p>
+          <a:p>
+            <a:pPr marL="171450" indent="-171450" algn="l">
+              <a:buFont typeface="Arial"/>
+              <a:buChar char="•"/>
+            </a:pPr>
+            <a:r>
+              <a:rPr lang="en-US" sz="1200" dirty="0">
                 <a:solidFill>
                   <a:srgbClr val="2D2D2D"/>
                 </a:solidFill>
@@ -7066,500 +7093,25 @@
                 <a:ea typeface="Avenir Next"/>
                 <a:cs typeface="Avenir Next"/>
               </a:rPr>
-              <a:t>• Five classic theories of corporate personality are tested.</a:t>
-            </a:r>
-          </a:p>
-          <a:p>
-            <a:pPr>
-              <a:spcAft>
-                <a:spcPts val="400"/>
-              </a:spcAft>
-              <a:defRPr sz="1400">
-                <a:solidFill>
-                  <a:srgbClr val="2D2D2D"/>
-                </a:solidFill>
-                <a:latin typeface="Avenir Next"/>
-                <a:ea typeface="Avenir Next"/>
-                <a:cs typeface="Avenir Next"/>
-              </a:defRPr>
-            </a:pPr>
-            <a:r>
-              <a:rPr lang="en-US" sz="1400" dirty="0">
-                <a:solidFill>
-                  <a:srgbClr val="2D2D2D"/>
-                </a:solidFill>
-                <a:latin typeface="Avenir Next"/>
-                <a:ea typeface="Avenir Next"/>
-                <a:cs typeface="Avenir Next"/>
-              </a:rPr>
-              <a:t>• A company is a real social actor: public green promises create legal expectations.</a:t>
-            </a:r>
-          </a:p>
-          <a:p>
-            <a:pPr>
-              <a:defRPr sz="1400">
-                <a:solidFill>
-                  <a:srgbClr val="2D2D2D"/>
-                </a:solidFill>
-                <a:latin typeface="Avenir Next"/>
-                <a:ea typeface="Avenir Next"/>
-                <a:cs typeface="Avenir Next"/>
-              </a:defRPr>
-            </a:pPr>
-            <a:r>
-              <a:rPr lang="en-US" sz="1400" dirty="0">
-                <a:solidFill>
-                  <a:srgbClr val="2D2D2D"/>
-                </a:solidFill>
-                <a:latin typeface="Avenir Next"/>
-                <a:ea typeface="Avenir Next"/>
-                <a:cs typeface="Avenir Next"/>
-              </a:rPr>
-              <a:t>• Indian law follows the stakeholder position: Section 166(2) makes environmental care an inherent duty.</a:t>
-            </a:r>
-          </a:p>
-        </p:txBody>
-      </p:sp>
-      <p:sp>
-        <p:nvSpPr>
-          <p:cNvPr id="7" name="Rounded Rectangle 6"/>
+              <a:t>Indian law follows the stakeholder position: Section 166(2) makes environmental care an inherent duty of the company.</a:t>
+            </a:r>
+          </a:p>
+        </p:txBody>
+      </p:sp>
+      <p:sp>
+        <p:nvSpPr>
+          <p:cNvPr id="13" name="Rounded Rectangle 12"/>
           <p:cNvSpPr/>
           <p:nvPr/>
         </p:nvSpPr>
         <p:spPr>
           <a:xfrm>
-            <a:off x="6196000" y="1049407"/>
-            <a:ext cx="5411403" cy="2415711"/>
+            <a:off x="500000" y="5980168"/>
+            <a:ext cx="11192000" cy="507831"/>
           </a:xfrm>
           <a:prstGeom prst="roundRect">
             <a:avLst>
-              <a:gd name="adj" fmla="val 6000"/>
-            </a:avLst>
-          </a:prstGeom>
-          <a:solidFill>
-            <a:srgbClr val="E8EFE6"/>
-          </a:solidFill>
-          <a:ln w="12700">
-            <a:solidFill>
-              <a:srgbClr val="C2D3BD"/>
-            </a:solidFill>
-          </a:ln>
-          <a:effectLst/>
-        </p:spPr>
-        <p:style>
-          <a:lnRef idx="1">
-            <a:schemeClr val="accent1"/>
-          </a:lnRef>
-          <a:fillRef idx="3">
-            <a:schemeClr val="accent1"/>
-          </a:fillRef>
-          <a:effectRef idx="2">
-            <a:schemeClr val="accent1"/>
-          </a:effectRef>
-          <a:fontRef idx="minor">
-            <a:schemeClr val="lt1"/>
-          </a:fontRef>
-        </p:style>
-        <p:txBody>
-          <a:bodyPr rtlCol="0" anchor="ctr"/>
-          <a:lstStyle/>
-          <a:p>
-            <a:endParaRPr>
-              <a:latin typeface="Avenir Next" panose="020B0503020202020204" pitchFamily="34" charset="0"/>
-            </a:endParaRPr>
-          </a:p>
-        </p:txBody>
-      </p:sp>
-      <p:sp>
-        <p:nvSpPr>
-          <p:cNvPr id="8" name="TextBox 7"/>
-          <p:cNvSpPr txBox="1"/>
-          <p:nvPr/>
-        </p:nvSpPr>
-        <p:spPr>
-          <a:xfrm>
-            <a:off x="6326000" y="1136631"/>
-            <a:ext cx="5155405" cy="2246769"/>
-          </a:xfrm>
-          <a:prstGeom prst="rect">
-            <a:avLst/>
-          </a:prstGeom>
-          <a:noFill/>
-        </p:spPr>
-        <p:txBody>
-          <a:bodyPr wrap="square" lIns="45720" tIns="22860" rIns="45720" bIns="22860" anchor="t">
-            <a:spAutoFit/>
-          </a:bodyPr>
-          <a:lstStyle/>
-          <a:p>
-            <a:pPr algn="l">
-              <a:spcAft>
-                <a:spcPts val="600"/>
-              </a:spcAft>
-              <a:defRPr sz="1350" b="1">
-                <a:solidFill>
-                  <a:srgbClr val="12402D"/>
-                </a:solidFill>
-              </a:defRPr>
-            </a:pPr>
-            <a:r>
-              <a:rPr sz="1600" dirty="0">
-                <a:latin typeface="Avenir Next" panose="020B0503020202020204" pitchFamily="34" charset="0"/>
-              </a:rPr>
-              <a:t>2. Hohfeld</a:t>
-            </a:r>
-            <a:r>
-              <a:rPr lang="en-US" sz="1600" dirty="0">
-                <a:latin typeface="Avenir Next" panose="020B0503020202020204" pitchFamily="34" charset="0"/>
-              </a:rPr>
-              <a:t>ian Analysis</a:t>
-            </a:r>
-            <a:r>
-              <a:rPr sz="1600" dirty="0">
-                <a:latin typeface="Avenir Next" panose="020B0503020202020204" pitchFamily="34" charset="0"/>
-              </a:rPr>
-              <a:t>: Clarifying Legal Relations</a:t>
-            </a:r>
-          </a:p>
-          <a:p>
-            <a:pPr>
-              <a:spcAft>
-                <a:spcPts val="400"/>
-              </a:spcAft>
-              <a:defRPr sz="1150">
-                <a:solidFill>
-                  <a:srgbClr val="2D2D2D"/>
-                </a:solidFill>
-              </a:defRPr>
-            </a:pPr>
-            <a:r>
-              <a:rPr sz="1400" dirty="0">
-                <a:latin typeface="Avenir Next" panose="020B0503020202020204" pitchFamily="34" charset="0"/>
-              </a:rPr>
-              <a:t>• </a:t>
-            </a:r>
-            <a:r>
-              <a:rPr lang="en-IN" sz="1400" b="1" dirty="0">
-                <a:latin typeface="Avenir Next" panose="020B0503020202020204" pitchFamily="34" charset="0"/>
-              </a:rPr>
-              <a:t>Duty breached: </a:t>
-            </a:r>
-            <a:r>
-              <a:rPr lang="en-IN" sz="1400" dirty="0">
-                <a:latin typeface="Avenir Next" panose="020B0503020202020204" pitchFamily="34" charset="0"/>
-              </a:rPr>
-              <a:t>the duty not to mislead, owed to the State and to investors.</a:t>
-            </a:r>
-          </a:p>
-          <a:p>
-            <a:pPr>
-              <a:spcAft>
-                <a:spcPts val="400"/>
-              </a:spcAft>
-              <a:defRPr sz="1150">
-                <a:solidFill>
-                  <a:srgbClr val="2D2D2D"/>
-                </a:solidFill>
-              </a:defRPr>
-            </a:pPr>
-            <a:r>
-              <a:rPr lang="en-IN" sz="1400" dirty="0">
-                <a:latin typeface="Avenir Next" panose="020B0503020202020204" pitchFamily="34" charset="0"/>
-              </a:rPr>
-              <a:t>•  </a:t>
-            </a:r>
-            <a:r>
-              <a:rPr lang="en-IN" sz="1400" b="1" dirty="0">
-                <a:latin typeface="Avenir Next" panose="020B0503020202020204" pitchFamily="34" charset="0"/>
-              </a:rPr>
-              <a:t>Manager’s privilege misused: </a:t>
-            </a:r>
-            <a:r>
-              <a:rPr lang="en-IN" sz="1400" dirty="0">
-                <a:latin typeface="Avenir Next" panose="020B0503020202020204" pitchFamily="34" charset="0"/>
-              </a:rPr>
-              <a:t>managers may choose how to communicate, but that freedom stops at deception.</a:t>
-            </a:r>
-          </a:p>
-          <a:p>
-            <a:pPr>
-              <a:spcAft>
-                <a:spcPts val="400"/>
-              </a:spcAft>
-              <a:defRPr sz="1150">
-                <a:solidFill>
-                  <a:srgbClr val="2D2D2D"/>
-                </a:solidFill>
-              </a:defRPr>
-            </a:pPr>
-            <a:r>
-              <a:rPr lang="en-IN" sz="1400" dirty="0">
-                <a:latin typeface="Avenir Next" panose="020B0503020202020204" pitchFamily="34" charset="0"/>
-              </a:rPr>
-              <a:t>•  </a:t>
-            </a:r>
-            <a:r>
-              <a:rPr lang="en-IN" sz="1400" b="1" dirty="0">
-                <a:latin typeface="Avenir Next" panose="020B0503020202020204" pitchFamily="34" charset="0"/>
-              </a:rPr>
-              <a:t>Power held: </a:t>
-            </a:r>
-            <a:r>
-              <a:rPr lang="en-IN" sz="1400" dirty="0">
-                <a:latin typeface="Avenir Next" panose="020B0503020202020204" pitchFamily="34" charset="0"/>
-              </a:rPr>
-              <a:t>companies control the ESG information that everyone else acts on.</a:t>
-            </a:r>
-          </a:p>
-          <a:p>
-            <a:pPr>
-              <a:spcAft>
-                <a:spcPts val="400"/>
-              </a:spcAft>
-              <a:defRPr sz="1150">
-                <a:solidFill>
-                  <a:srgbClr val="2D2D2D"/>
-                </a:solidFill>
-              </a:defRPr>
-            </a:pPr>
-            <a:r>
-              <a:rPr lang="en-IN" sz="1400" dirty="0">
-                <a:latin typeface="Avenir Next" panose="020B0503020202020204" pitchFamily="34" charset="0"/>
-              </a:rPr>
-              <a:t>•  </a:t>
-            </a:r>
-            <a:r>
-              <a:rPr lang="en-IN" sz="1400" b="1" dirty="0">
-                <a:latin typeface="Avenir Next" panose="020B0503020202020204" pitchFamily="34" charset="0"/>
-              </a:rPr>
-              <a:t>Immunity retained: </a:t>
-            </a:r>
-            <a:r>
-              <a:rPr lang="en-IN" sz="1400" dirty="0">
-                <a:latin typeface="Avenir Next" panose="020B0503020202020204" pitchFamily="34" charset="0"/>
-              </a:rPr>
-              <a:t>limited liability saves those who gain from a green reputation.</a:t>
-            </a:r>
-          </a:p>
-        </p:txBody>
-      </p:sp>
-      <p:sp>
-        <p:nvSpPr>
-          <p:cNvPr id="9" name="Rounded Rectangle 8"/>
-          <p:cNvSpPr/>
-          <p:nvPr/>
-        </p:nvSpPr>
-        <p:spPr>
-          <a:xfrm>
-            <a:off x="500000" y="3098082"/>
-            <a:ext cx="5411403" cy="2246768"/>
-          </a:xfrm>
-          <a:prstGeom prst="roundRect">
-            <a:avLst>
-              <a:gd name="adj" fmla="val 6000"/>
-            </a:avLst>
-          </a:prstGeom>
-          <a:solidFill>
-            <a:srgbClr val="E8EFE6"/>
-          </a:solidFill>
-          <a:ln w="12700">
-            <a:solidFill>
-              <a:srgbClr val="C2D3BD"/>
-            </a:solidFill>
-          </a:ln>
-          <a:effectLst/>
-        </p:spPr>
-        <p:style>
-          <a:lnRef idx="1">
-            <a:schemeClr val="accent1"/>
-          </a:lnRef>
-          <a:fillRef idx="3">
-            <a:schemeClr val="accent1"/>
-          </a:fillRef>
-          <a:effectRef idx="2">
-            <a:schemeClr val="accent1"/>
-          </a:effectRef>
-          <a:fontRef idx="minor">
-            <a:schemeClr val="lt1"/>
-          </a:fontRef>
-        </p:style>
-        <p:txBody>
-          <a:bodyPr rtlCol="0" anchor="ctr"/>
-          <a:lstStyle/>
-          <a:p>
-            <a:endParaRPr>
-              <a:latin typeface="Avenir Next" panose="020B0503020202020204" pitchFamily="34" charset="0"/>
-            </a:endParaRPr>
-          </a:p>
-        </p:txBody>
-      </p:sp>
-      <p:sp>
-        <p:nvSpPr>
-          <p:cNvPr id="10" name="TextBox 9"/>
-          <p:cNvSpPr txBox="1"/>
-          <p:nvPr/>
-        </p:nvSpPr>
-        <p:spPr>
-          <a:xfrm>
-            <a:off x="630000" y="3122843"/>
-            <a:ext cx="5155405" cy="1992853"/>
-          </a:xfrm>
-          <a:prstGeom prst="rect">
-            <a:avLst/>
-          </a:prstGeom>
-          <a:noFill/>
-        </p:spPr>
-        <p:txBody>
-          <a:bodyPr wrap="square" lIns="45720" tIns="22860" rIns="45720" bIns="22860" anchor="t">
-            <a:spAutoFit/>
-          </a:bodyPr>
-          <a:lstStyle/>
-          <a:p>
-            <a:pPr algn="l">
-              <a:spcAft>
-                <a:spcPts val="600"/>
-              </a:spcAft>
-              <a:defRPr sz="1600" b="1">
-                <a:solidFill>
-                  <a:srgbClr val="12402D"/>
-                </a:solidFill>
-                <a:latin typeface="Avenir Next"/>
-                <a:ea typeface="Avenir Next"/>
-                <a:cs typeface="Avenir Next"/>
-              </a:defRPr>
-            </a:pPr>
-            <a:r>
-              <a:rPr lang="en-US" sz="1600" b="1" dirty="0">
-                <a:solidFill>
-                  <a:srgbClr val="12402D"/>
-                </a:solidFill>
-                <a:latin typeface="Avenir Next"/>
-                <a:ea typeface="Avenir Next"/>
-                <a:cs typeface="Avenir Next"/>
-              </a:rPr>
-              <a:t>3. To whom the duty is owed?</a:t>
-            </a:r>
-          </a:p>
-          <a:p>
-            <a:pPr>
-              <a:spcAft>
-                <a:spcPts val="300"/>
-              </a:spcAft>
-              <a:defRPr sz="1400">
-                <a:solidFill>
-                  <a:srgbClr val="3A3A4A"/>
-                </a:solidFill>
-                <a:latin typeface="Avenir Next"/>
-                <a:ea typeface="Avenir Next"/>
-                <a:cs typeface="Avenir Next"/>
-              </a:defRPr>
-            </a:pPr>
-            <a:r>
-              <a:rPr lang="en-US" sz="1400" dirty="0">
-                <a:solidFill>
-                  <a:srgbClr val="3A3A4A"/>
-                </a:solidFill>
-                <a:latin typeface="Avenir Next"/>
-                <a:ea typeface="Avenir Next"/>
-                <a:cs typeface="Avenir Next"/>
-              </a:rPr>
-              <a:t>• A duty only bites if somebody can enforce it.</a:t>
-            </a:r>
-          </a:p>
-          <a:p>
-            <a:pPr>
-              <a:spcAft>
-                <a:spcPts val="300"/>
-              </a:spcAft>
-              <a:defRPr sz="1400">
-                <a:solidFill>
-                  <a:srgbClr val="3A3A4A"/>
-                </a:solidFill>
-                <a:latin typeface="Avenir Next"/>
-                <a:ea typeface="Avenir Next"/>
-                <a:cs typeface="Avenir Next"/>
-              </a:defRPr>
-            </a:pPr>
-            <a:r>
-              <a:rPr lang="en-US" sz="1400" dirty="0">
-                <a:solidFill>
-                  <a:srgbClr val="3A3A4A"/>
-                </a:solidFill>
-                <a:latin typeface="Avenir Next"/>
-                <a:ea typeface="Avenir Next"/>
-                <a:cs typeface="Avenir Next"/>
-              </a:rPr>
-              <a:t>• Duties to the State are strongest — CCPA and SEBI can enforce them.</a:t>
-            </a:r>
-          </a:p>
-          <a:p>
-            <a:pPr>
-              <a:spcAft>
-                <a:spcPts val="300"/>
-              </a:spcAft>
-              <a:defRPr sz="1400">
-                <a:solidFill>
-                  <a:srgbClr val="3A3A4A"/>
-                </a:solidFill>
-                <a:latin typeface="Avenir Next"/>
-                <a:ea typeface="Avenir Next"/>
-                <a:cs typeface="Avenir Next"/>
-              </a:defRPr>
-            </a:pPr>
-            <a:r>
-              <a:rPr lang="en-US" sz="1400" dirty="0">
-                <a:solidFill>
-                  <a:srgbClr val="3A3A4A"/>
-                </a:solidFill>
-                <a:latin typeface="Avenir Next"/>
-                <a:ea typeface="Avenir Next"/>
-                <a:cs typeface="Avenir Next"/>
-              </a:rPr>
-              <a:t>• Investor-facing duties run only through narrow disclosure channels.</a:t>
-            </a:r>
-          </a:p>
-          <a:p>
-            <a:pPr>
-              <a:spcAft>
-                <a:spcPts val="300"/>
-              </a:spcAft>
-              <a:defRPr sz="1400">
-                <a:solidFill>
-                  <a:srgbClr val="3A3A4A"/>
-                </a:solidFill>
-                <a:latin typeface="Avenir Next"/>
-                <a:ea typeface="Avenir Next"/>
-                <a:cs typeface="Avenir Next"/>
-              </a:defRPr>
-            </a:pPr>
-            <a:r>
-              <a:rPr lang="en-US" sz="1400" dirty="0">
-                <a:solidFill>
-                  <a:srgbClr val="3A3A4A"/>
-                </a:solidFill>
-                <a:latin typeface="Avenir Next"/>
-                <a:ea typeface="Avenir Next"/>
-                <a:cs typeface="Avenir Next"/>
-              </a:rPr>
-              <a:t>• Section 166(2)'s environmental duty has no clear claimant, so it reads as aspiration, not law — the gap this thesis targets.</a:t>
-            </a:r>
-          </a:p>
-        </p:txBody>
-      </p:sp>
-      <p:sp>
-        <p:nvSpPr>
-          <p:cNvPr id="11" name="Rounded Rectangle 10"/>
-          <p:cNvSpPr/>
-          <p:nvPr/>
-        </p:nvSpPr>
-        <p:spPr>
-          <a:xfrm>
-            <a:off x="6196000" y="3700001"/>
-            <a:ext cx="5411403" cy="1463669"/>
-          </a:xfrm>
-          <a:prstGeom prst="roundRect">
-            <a:avLst>
-              <a:gd name="adj" fmla="val 6000"/>
+              <a:gd name="adj" fmla="val 14000"/>
             </a:avLst>
           </a:prstGeom>
           <a:solidFill>
@@ -7590,199 +7142,6 @@
           <a:bodyPr rtlCol="0" anchor="ctr"/>
           <a:lstStyle/>
           <a:p>
-            <a:endParaRPr>
-              <a:latin typeface="Avenir Next" panose="020B0503020202020204" pitchFamily="34" charset="0"/>
-            </a:endParaRPr>
-          </a:p>
-        </p:txBody>
-      </p:sp>
-      <p:sp>
-        <p:nvSpPr>
-          <p:cNvPr id="12" name="TextBox 11"/>
-          <p:cNvSpPr txBox="1"/>
-          <p:nvPr/>
-        </p:nvSpPr>
-        <p:spPr>
-          <a:xfrm>
-            <a:off x="6326000" y="3795193"/>
-            <a:ext cx="5155405" cy="1066959"/>
-          </a:xfrm>
-          <a:prstGeom prst="rect">
-            <a:avLst/>
-          </a:prstGeom>
-          <a:noFill/>
-        </p:spPr>
-        <p:txBody>
-          <a:bodyPr wrap="square" lIns="45720" tIns="22860" rIns="45720" bIns="22860" anchor="t">
-            <a:spAutoFit/>
-          </a:bodyPr>
-          <a:lstStyle/>
-          <a:p>
-            <a:pPr algn="l">
-              <a:spcAft>
-                <a:spcPts val="600"/>
-              </a:spcAft>
-              <a:defRPr sz="1350" b="1">
-                <a:solidFill>
-                  <a:srgbClr val="12402D"/>
-                </a:solidFill>
-              </a:defRPr>
-            </a:pPr>
-            <a:r>
-              <a:rPr sz="1600" dirty="0">
-                <a:latin typeface="Avenir Next" panose="020B0503020202020204" pitchFamily="34" charset="0"/>
-              </a:rPr>
-              <a:t>4. Why the Duty Fails in Practice</a:t>
-            </a:r>
-          </a:p>
-          <a:p>
-            <a:pPr>
-              <a:spcAft>
-                <a:spcPts val="400"/>
-              </a:spcAft>
-              <a:defRPr sz="1150">
-                <a:solidFill>
-                  <a:srgbClr val="2D2D2D"/>
-                </a:solidFill>
-              </a:defRPr>
-            </a:pPr>
-            <a:r>
-              <a:rPr sz="1400" dirty="0">
-                <a:latin typeface="Avenir Next" panose="020B0503020202020204" pitchFamily="34" charset="0"/>
-              </a:rPr>
-              <a:t>• </a:t>
-            </a:r>
-            <a:r>
-              <a:rPr lang="en-US" sz="1400" b="1" dirty="0">
-                <a:latin typeface="Avenir Next" panose="020B0503020202020204" pitchFamily="34" charset="0"/>
-              </a:rPr>
-              <a:t>Information Asymmetry</a:t>
-            </a:r>
-            <a:r>
-              <a:rPr sz="1400" b="1" dirty="0">
-                <a:latin typeface="Avenir Next" panose="020B0503020202020204" pitchFamily="34" charset="0"/>
-              </a:rPr>
-              <a:t>: </a:t>
-            </a:r>
-            <a:r>
-              <a:rPr sz="1400" dirty="0">
-                <a:latin typeface="Avenir Next" panose="020B0503020202020204" pitchFamily="34" charset="0"/>
-              </a:rPr>
-              <a:t>Insiders know true pollution; outsiders only see polished PR.</a:t>
-            </a:r>
-          </a:p>
-          <a:p>
-            <a:pPr>
-              <a:spcAft>
-                <a:spcPts val="400"/>
-              </a:spcAft>
-              <a:defRPr sz="1150">
-                <a:solidFill>
-                  <a:srgbClr val="2D2D2D"/>
-                </a:solidFill>
-              </a:defRPr>
-            </a:pPr>
-            <a:r>
-              <a:rPr sz="1400" dirty="0">
-                <a:latin typeface="Avenir Next" panose="020B0503020202020204" pitchFamily="34" charset="0"/>
-              </a:rPr>
-              <a:t>• </a:t>
-            </a:r>
-            <a:r>
-              <a:rPr lang="en-US" sz="1400" b="1" dirty="0">
-                <a:latin typeface="Avenir Next" panose="020B0503020202020204" pitchFamily="34" charset="0"/>
-              </a:rPr>
-              <a:t>Lack of T</a:t>
-            </a:r>
-            <a:r>
-              <a:rPr sz="1400" b="1" dirty="0">
-                <a:latin typeface="Avenir Next" panose="020B0503020202020204" pitchFamily="34" charset="0"/>
-              </a:rPr>
-              <a:t>echnical </a:t>
-            </a:r>
-            <a:r>
-              <a:rPr lang="en-US" sz="1400" b="1" dirty="0">
-                <a:latin typeface="Avenir Next" panose="020B0503020202020204" pitchFamily="34" charset="0"/>
-              </a:rPr>
-              <a:t>E</a:t>
-            </a:r>
-            <a:r>
-              <a:rPr sz="1400" b="1" dirty="0">
-                <a:latin typeface="Avenir Next" panose="020B0503020202020204" pitchFamily="34" charset="0"/>
-              </a:rPr>
-              <a:t>xpertise</a:t>
-            </a:r>
-            <a:r>
-              <a:rPr lang="en-US" sz="1400" b="1" dirty="0">
-                <a:latin typeface="Avenir Next" panose="020B0503020202020204" pitchFamily="34" charset="0"/>
-              </a:rPr>
-              <a:t>:</a:t>
-            </a:r>
-            <a:r>
-              <a:rPr sz="1400" b="1" dirty="0">
-                <a:latin typeface="Avenir Next" panose="020B0503020202020204" pitchFamily="34" charset="0"/>
-              </a:rPr>
-              <a:t> </a:t>
-            </a:r>
-            <a:r>
-              <a:rPr lang="en-US" sz="1400" dirty="0">
-                <a:latin typeface="Avenir Next" panose="020B0503020202020204" pitchFamily="34" charset="0"/>
-              </a:rPr>
-              <a:t>among </a:t>
-            </a:r>
-            <a:r>
-              <a:rPr sz="1400" dirty="0">
-                <a:latin typeface="Avenir Next" panose="020B0503020202020204" pitchFamily="34" charset="0"/>
-              </a:rPr>
-              <a:t>ordinary citizens.</a:t>
-            </a:r>
-          </a:p>
-        </p:txBody>
-      </p:sp>
-      <p:sp>
-        <p:nvSpPr>
-          <p:cNvPr id="13" name="Rounded Rectangle 12"/>
-          <p:cNvSpPr/>
-          <p:nvPr/>
-        </p:nvSpPr>
-        <p:spPr>
-          <a:xfrm>
-            <a:off x="500000" y="5559916"/>
-            <a:ext cx="11192000" cy="928083"/>
-          </a:xfrm>
-          <a:prstGeom prst="roundRect">
-            <a:avLst>
-              <a:gd name="adj" fmla="val 14000"/>
-            </a:avLst>
-          </a:prstGeom>
-          <a:solidFill>
-            <a:srgbClr val="FFF6EA"/>
-          </a:solidFill>
-          <a:ln w="12700">
-            <a:solidFill>
-              <a:srgbClr val="E7C894"/>
-            </a:solidFill>
-          </a:ln>
-          <a:effectLst/>
-        </p:spPr>
-        <p:style>
-          <a:lnRef idx="1">
-            <a:schemeClr val="accent1"/>
-          </a:lnRef>
-          <a:fillRef idx="3">
-            <a:schemeClr val="accent1"/>
-          </a:fillRef>
-          <a:effectRef idx="2">
-            <a:schemeClr val="accent1"/>
-          </a:effectRef>
-          <a:fontRef idx="minor">
-            <a:schemeClr val="lt1"/>
-          </a:fontRef>
-        </p:style>
-        <p:txBody>
-          <a:bodyPr rtlCol="0" anchor="ctr"/>
-          <a:lstStyle/>
-          <a:p>
             <a:endParaRPr sz="2400">
               <a:latin typeface="Avenir Next" panose="020B0503020202020204" pitchFamily="34" charset="0"/>
             </a:endParaRPr>
@@ -7797,8 +7156,8 @@
         </p:nvSpPr>
         <p:spPr>
           <a:xfrm>
-            <a:off x="640000" y="5553029"/>
-            <a:ext cx="10912000" cy="938719"/>
+            <a:off x="640000" y="6037291"/>
+            <a:ext cx="10912000" cy="538609"/>
           </a:xfrm>
           <a:prstGeom prst="rect">
             <a:avLst/>
@@ -7825,7 +7184,7 @@
                 </a:solidFill>
                 <a:latin typeface="Avenir Next" panose="020B0503020202020204" pitchFamily="34" charset="0"/>
               </a:rPr>
-              <a:t>Research Question 3: </a:t>
+              <a:t>Answers Research Question 3: </a:t>
             </a:r>
             <a:r>
               <a:rPr lang="en-IN" sz="1300" b="1" dirty="0">
@@ -7856,45 +7215,6 @@
               <a:cs typeface="+mn-lt"/>
             </a:endParaRPr>
           </a:p>
-          <a:p>
-            <a:pPr algn="just">
-              <a:defRPr sz="1100">
-                <a:solidFill>
-                  <a:srgbClr val="282828"/>
-                </a:solidFill>
-              </a:defRPr>
-            </a:pPr>
-            <a:r>
-              <a:rPr sz="1300" dirty="0">
-                <a:latin typeface="Avenir Next" panose="020B0503020202020204" pitchFamily="34" charset="0"/>
-              </a:rPr>
-              <a:t>Answer: Breaking corporate responsibility into precise legal relations shows greenwashing is not an innocent PR slip. It is a broken duty, an abuse of communication freedom, and an exploitation of information power</a:t>
-            </a:r>
-            <a:r>
-              <a:rPr lang="en-US" sz="1300" dirty="0">
-                <a:latin typeface="Avenir Next" panose="020B0503020202020204" pitchFamily="34" charset="0"/>
-              </a:rPr>
-              <a:t>, </a:t>
-            </a:r>
-            <a:r>
-              <a:rPr sz="1300" dirty="0">
-                <a:latin typeface="Avenir Next" panose="020B0503020202020204" pitchFamily="34" charset="0"/>
-              </a:rPr>
-              <a:t>which </a:t>
-            </a:r>
-            <a:r>
-              <a:rPr lang="en-US" sz="1300" dirty="0">
-                <a:latin typeface="Avenir Next" panose="020B0503020202020204" pitchFamily="34" charset="0"/>
-              </a:rPr>
-              <a:t>must be addressed by corporate </a:t>
-            </a:r>
-            <a:r>
-              <a:rPr sz="1300" dirty="0">
-                <a:latin typeface="Avenir Next" panose="020B0503020202020204" pitchFamily="34" charset="0"/>
-              </a:rPr>
-              <a:t>law.</a:t>
-            </a:r>
-          </a:p>
         </p:txBody>
       </p:sp>
       <p:sp>
@@ -7929,10 +7249,946 @@
           </a:p>
         </p:txBody>
       </p:sp>
+      <p:sp>
+        <p:nvSpPr>
+          <p:cNvPr id="100" name="Card"/>
+          <p:cNvSpPr/>
+          <p:nvPr/>
+        </p:nvSpPr>
+        <p:spPr>
+          <a:xfrm>
+            <a:off x="495300" y="2043671"/>
+            <a:ext cx="5410200" cy="1913126"/>
+          </a:xfrm>
+          <a:prstGeom prst="roundRect">
+            <a:avLst>
+              <a:gd name="adj" fmla="val 7000"/>
+            </a:avLst>
+          </a:prstGeom>
+          <a:solidFill>
+            <a:srgbClr val="F6F3EB"/>
+          </a:solidFill>
+          <a:ln w="12700">
+            <a:solidFill>
+              <a:srgbClr val="A23A32"/>
+            </a:solidFill>
+          </a:ln>
+        </p:spPr>
+        <p:txBody>
+          <a:bodyPr/>
+          <a:lstStyle/>
+          <a:p>
+            <a:endParaRPr lang="en-US"/>
+          </a:p>
+        </p:txBody>
+      </p:sp>
+      <p:sp>
+        <p:nvSpPr>
+          <p:cNvPr id="101" name="Badge"/>
+          <p:cNvSpPr/>
+          <p:nvPr/>
+        </p:nvSpPr>
+        <p:spPr>
+          <a:xfrm>
+            <a:off x="698500" y="2115155"/>
+            <a:ext cx="982019" cy="381880"/>
+          </a:xfrm>
+          <a:prstGeom prst="roundRect">
+            <a:avLst>
+              <a:gd name="adj" fmla="val 50000"/>
+            </a:avLst>
+          </a:prstGeom>
+          <a:solidFill>
+            <a:schemeClr val="accent6">
+              <a:lumMod val="75000"/>
+            </a:schemeClr>
+          </a:solidFill>
+          <a:ln>
+            <a:noFill/>
+          </a:ln>
+        </p:spPr>
+        <p:txBody>
+          <a:bodyPr anchor="ctr"/>
+          <a:lstStyle/>
+          <a:p>
+            <a:pPr algn="ctr"/>
+            <a:r>
+              <a:rPr lang="en-US" sz="1200" b="1" dirty="0">
+                <a:solidFill>
+                  <a:srgbClr val="FFFFFF"/>
+                </a:solidFill>
+                <a:latin typeface="Avenir Next"/>
+              </a:rPr>
+              <a:t>Duty</a:t>
+            </a:r>
+          </a:p>
+        </p:txBody>
+      </p:sp>
+      <p:sp>
+        <p:nvSpPr>
+          <p:cNvPr id="102" name="Title"/>
+          <p:cNvSpPr/>
+          <p:nvPr/>
+        </p:nvSpPr>
+        <p:spPr>
+          <a:xfrm>
+            <a:off x="698500" y="2551671"/>
+            <a:ext cx="5003800" cy="306940"/>
+          </a:xfrm>
+          <a:prstGeom prst="rect">
+            <a:avLst/>
+          </a:prstGeom>
+          <a:noFill/>
+          <a:ln>
+            <a:noFill/>
+          </a:ln>
+        </p:spPr>
+        <p:txBody>
+          <a:bodyPr/>
+          <a:lstStyle/>
+          <a:p>
+            <a:r>
+              <a:rPr lang="en-US" sz="1400" b="1" dirty="0">
+                <a:solidFill>
+                  <a:srgbClr val="173F35"/>
+                </a:solidFill>
+                <a:latin typeface="Avenir Next"/>
+              </a:rPr>
+              <a:t>1. Broken Duty &amp; no Claimant </a:t>
+            </a:r>
+          </a:p>
+        </p:txBody>
+      </p:sp>
+      <p:sp>
+        <p:nvSpPr>
+          <p:cNvPr id="103" name="Desc"/>
+          <p:cNvSpPr/>
+          <p:nvPr/>
+        </p:nvSpPr>
+        <p:spPr>
+          <a:xfrm>
+            <a:off x="698500" y="2856471"/>
+            <a:ext cx="5003800" cy="530170"/>
+          </a:xfrm>
+          <a:prstGeom prst="rect">
+            <a:avLst/>
+          </a:prstGeom>
+          <a:noFill/>
+          <a:ln>
+            <a:noFill/>
+          </a:ln>
+        </p:spPr>
+        <p:txBody>
+          <a:bodyPr/>
+          <a:lstStyle/>
+          <a:p>
+            <a:pPr>
+              <a:lnSpc>
+                <a:spcPts val="1500"/>
+              </a:lnSpc>
+            </a:pPr>
+            <a:r>
+              <a:rPr lang="en-US" sz="1300" dirty="0">
+                <a:solidFill>
+                  <a:srgbClr val="2D2D2D"/>
+                </a:solidFill>
+                <a:latin typeface="Avenir Next"/>
+              </a:rPr>
+              <a:t>Section 166(2) mandates environmental care, yet affected stakeholders are given no standing (claim-right) to sue.</a:t>
+            </a:r>
+          </a:p>
+        </p:txBody>
+      </p:sp>
+      <p:sp>
+        <p:nvSpPr>
+          <p:cNvPr id="104" name="Callout"/>
+          <p:cNvSpPr/>
+          <p:nvPr/>
+        </p:nvSpPr>
+        <p:spPr>
+          <a:xfrm>
+            <a:off x="673100" y="3524426"/>
+            <a:ext cx="5054600" cy="334844"/>
+          </a:xfrm>
+          <a:prstGeom prst="roundRect">
+            <a:avLst>
+              <a:gd name="adj" fmla="val 30000"/>
+            </a:avLst>
+          </a:prstGeom>
+          <a:solidFill>
+            <a:srgbClr val="F4E4E3"/>
+          </a:solidFill>
+          <a:ln>
+            <a:noFill/>
+          </a:ln>
+        </p:spPr>
+        <p:txBody>
+          <a:bodyPr anchor="ctr"/>
+          <a:lstStyle/>
+          <a:p>
+            <a:r>
+              <a:rPr lang="en-US" sz="1200" b="1" dirty="0">
+                <a:solidFill>
+                  <a:srgbClr val="A23A32"/>
+                </a:solidFill>
+                <a:latin typeface="Avenir Next"/>
+              </a:rPr>
+              <a:t>So, Duty remains purely aspirational and un-enforced.</a:t>
+            </a:r>
+          </a:p>
+        </p:txBody>
+      </p:sp>
+      <p:sp>
+        <p:nvSpPr>
+          <p:cNvPr id="120" name="Card"/>
+          <p:cNvSpPr/>
+          <p:nvPr/>
+        </p:nvSpPr>
+        <p:spPr>
+          <a:xfrm>
+            <a:off x="6197600" y="2043671"/>
+            <a:ext cx="5410200" cy="1913126"/>
+          </a:xfrm>
+          <a:prstGeom prst="roundRect">
+            <a:avLst>
+              <a:gd name="adj" fmla="val 7000"/>
+            </a:avLst>
+          </a:prstGeom>
+          <a:solidFill>
+            <a:srgbClr val="F6F3EB"/>
+          </a:solidFill>
+          <a:ln w="12700">
+            <a:solidFill>
+              <a:srgbClr val="8A6410"/>
+            </a:solidFill>
+          </a:ln>
+        </p:spPr>
+        <p:txBody>
+          <a:bodyPr/>
+          <a:lstStyle/>
+          <a:p>
+            <a:endParaRPr lang="en-US"/>
+          </a:p>
+        </p:txBody>
+      </p:sp>
+      <p:sp>
+        <p:nvSpPr>
+          <p:cNvPr id="121" name="Badge"/>
+          <p:cNvSpPr/>
+          <p:nvPr/>
+        </p:nvSpPr>
+        <p:spPr>
+          <a:xfrm>
+            <a:off x="6375400" y="2115155"/>
+            <a:ext cx="1078531" cy="381880"/>
+          </a:xfrm>
+          <a:prstGeom prst="roundRect">
+            <a:avLst>
+              <a:gd name="adj" fmla="val 50000"/>
+            </a:avLst>
+          </a:prstGeom>
+          <a:solidFill>
+            <a:srgbClr val="8A6410"/>
+          </a:solidFill>
+          <a:ln>
+            <a:noFill/>
+          </a:ln>
+        </p:spPr>
+        <p:txBody>
+          <a:bodyPr anchor="ctr"/>
+          <a:lstStyle/>
+          <a:p>
+            <a:pPr algn="ctr"/>
+            <a:r>
+              <a:rPr lang="en-US" sz="1200" b="1" dirty="0">
+                <a:solidFill>
+                  <a:srgbClr val="FFFFFF"/>
+                </a:solidFill>
+                <a:latin typeface="Avenir Next"/>
+              </a:rPr>
+              <a:t>Privilege</a:t>
+            </a:r>
+          </a:p>
+        </p:txBody>
+      </p:sp>
+      <p:sp>
+        <p:nvSpPr>
+          <p:cNvPr id="122" name="Title"/>
+          <p:cNvSpPr/>
+          <p:nvPr/>
+        </p:nvSpPr>
+        <p:spPr>
+          <a:xfrm>
+            <a:off x="6400800" y="2551671"/>
+            <a:ext cx="5003800" cy="306940"/>
+          </a:xfrm>
+          <a:prstGeom prst="rect">
+            <a:avLst/>
+          </a:prstGeom>
+          <a:noFill/>
+          <a:ln>
+            <a:noFill/>
+          </a:ln>
+        </p:spPr>
+        <p:txBody>
+          <a:bodyPr/>
+          <a:lstStyle/>
+          <a:p>
+            <a:r>
+              <a:rPr lang="en-US" sz="1400" b="1">
+                <a:solidFill>
+                  <a:srgbClr val="173F35"/>
+                </a:solidFill>
+                <a:latin typeface="Avenir Next"/>
+              </a:rPr>
+              <a:t>2. Abused Communication Liberty</a:t>
+            </a:r>
+          </a:p>
+        </p:txBody>
+      </p:sp>
+      <p:sp>
+        <p:nvSpPr>
+          <p:cNvPr id="124" name="Callout"/>
+          <p:cNvSpPr/>
+          <p:nvPr/>
+        </p:nvSpPr>
+        <p:spPr>
+          <a:xfrm>
+            <a:off x="6375400" y="3524426"/>
+            <a:ext cx="5054600" cy="334844"/>
+          </a:xfrm>
+          <a:prstGeom prst="roundRect">
+            <a:avLst>
+              <a:gd name="adj" fmla="val 30000"/>
+            </a:avLst>
+          </a:prstGeom>
+          <a:solidFill>
+            <a:srgbClr val="F4ECD6"/>
+          </a:solidFill>
+          <a:ln>
+            <a:noFill/>
+          </a:ln>
+        </p:spPr>
+        <p:txBody>
+          <a:bodyPr anchor="ctr"/>
+          <a:lstStyle/>
+          <a:p>
+            <a:r>
+              <a:rPr lang="en-US" sz="1200" b="1" dirty="0">
+                <a:solidFill>
+                  <a:srgbClr val="8A6410"/>
+                </a:solidFill>
+                <a:latin typeface="Avenir Next"/>
+              </a:rPr>
+              <a:t>Managerial Discretion ≠ License to mislead</a:t>
+            </a:r>
+          </a:p>
+        </p:txBody>
+      </p:sp>
+      <p:sp>
+        <p:nvSpPr>
+          <p:cNvPr id="140" name="Card"/>
+          <p:cNvSpPr/>
+          <p:nvPr/>
+        </p:nvSpPr>
+        <p:spPr>
+          <a:xfrm>
+            <a:off x="495300" y="4117550"/>
+            <a:ext cx="5410200" cy="1676400"/>
+          </a:xfrm>
+          <a:prstGeom prst="roundRect">
+            <a:avLst>
+              <a:gd name="adj" fmla="val 7000"/>
+            </a:avLst>
+          </a:prstGeom>
+          <a:solidFill>
+            <a:srgbClr val="F6F3EB"/>
+          </a:solidFill>
+          <a:ln w="12700">
+            <a:solidFill>
+              <a:srgbClr val="176B63"/>
+            </a:solidFill>
+          </a:ln>
+        </p:spPr>
+        <p:txBody>
+          <a:bodyPr/>
+          <a:lstStyle/>
+          <a:p>
+            <a:endParaRPr lang="en-US"/>
+          </a:p>
+        </p:txBody>
+      </p:sp>
+      <p:sp>
+        <p:nvSpPr>
+          <p:cNvPr id="141" name="Badge"/>
+          <p:cNvSpPr/>
+          <p:nvPr/>
+        </p:nvSpPr>
+        <p:spPr>
+          <a:xfrm>
+            <a:off x="673100" y="4189034"/>
+            <a:ext cx="1007419" cy="347616"/>
+          </a:xfrm>
+          <a:prstGeom prst="roundRect">
+            <a:avLst>
+              <a:gd name="adj" fmla="val 50000"/>
+            </a:avLst>
+          </a:prstGeom>
+          <a:solidFill>
+            <a:srgbClr val="176B63"/>
+          </a:solidFill>
+          <a:ln>
+            <a:noFill/>
+          </a:ln>
+        </p:spPr>
+        <p:txBody>
+          <a:bodyPr anchor="ctr"/>
+          <a:lstStyle/>
+          <a:p>
+            <a:pPr algn="ctr"/>
+            <a:r>
+              <a:rPr lang="en-US" sz="1200" b="1" dirty="0">
+                <a:solidFill>
+                  <a:srgbClr val="FFFFFF"/>
+                </a:solidFill>
+                <a:latin typeface="Avenir Next"/>
+              </a:rPr>
+              <a:t>Power</a:t>
+            </a:r>
+          </a:p>
+        </p:txBody>
+      </p:sp>
+      <p:sp>
+        <p:nvSpPr>
+          <p:cNvPr id="142" name="Title"/>
+          <p:cNvSpPr/>
+          <p:nvPr/>
+        </p:nvSpPr>
+        <p:spPr>
+          <a:xfrm>
+            <a:off x="698500" y="4625550"/>
+            <a:ext cx="5003800" cy="279400"/>
+          </a:xfrm>
+          <a:prstGeom prst="rect">
+            <a:avLst/>
+          </a:prstGeom>
+          <a:noFill/>
+          <a:ln>
+            <a:noFill/>
+          </a:ln>
+        </p:spPr>
+        <p:txBody>
+          <a:bodyPr/>
+          <a:lstStyle/>
+          <a:p>
+            <a:r>
+              <a:rPr lang="en-US" sz="1400" b="1" dirty="0">
+                <a:solidFill>
+                  <a:srgbClr val="173F35"/>
+                </a:solidFill>
+                <a:latin typeface="Avenir Next"/>
+              </a:rPr>
+              <a:t>3. ESG Related Information Asymmetry</a:t>
+            </a:r>
+          </a:p>
+        </p:txBody>
+      </p:sp>
+      <p:sp>
+        <p:nvSpPr>
+          <p:cNvPr id="143" name="Desc"/>
+          <p:cNvSpPr/>
+          <p:nvPr/>
+        </p:nvSpPr>
+        <p:spPr>
+          <a:xfrm>
+            <a:off x="698500" y="4930350"/>
+            <a:ext cx="5207000" cy="482600"/>
+          </a:xfrm>
+          <a:prstGeom prst="rect">
+            <a:avLst/>
+          </a:prstGeom>
+          <a:noFill/>
+          <a:ln>
+            <a:noFill/>
+          </a:ln>
+        </p:spPr>
+        <p:txBody>
+          <a:bodyPr/>
+          <a:lstStyle/>
+          <a:p>
+            <a:pPr>
+              <a:lnSpc>
+                <a:spcPts val="1500"/>
+              </a:lnSpc>
+            </a:pPr>
+            <a:r>
+              <a:rPr lang="en-US" sz="1300" dirty="0">
+                <a:solidFill>
+                  <a:srgbClr val="2D2D2D"/>
+                </a:solidFill>
+                <a:latin typeface="Avenir Next"/>
+              </a:rPr>
+              <a:t>Companies hold informational power as the BRSR disclosures remain unverified; and the public bears the liability of acting on it.</a:t>
+            </a:r>
+          </a:p>
+        </p:txBody>
+      </p:sp>
+      <p:sp>
+        <p:nvSpPr>
+          <p:cNvPr id="144" name="Callout"/>
+          <p:cNvSpPr/>
+          <p:nvPr/>
+        </p:nvSpPr>
+        <p:spPr>
+          <a:xfrm>
+            <a:off x="673100" y="5412950"/>
+            <a:ext cx="5054600" cy="304800"/>
+          </a:xfrm>
+          <a:prstGeom prst="roundRect">
+            <a:avLst>
+              <a:gd name="adj" fmla="val 30000"/>
+            </a:avLst>
+          </a:prstGeom>
+          <a:solidFill>
+            <a:srgbClr val="DCEDEB"/>
+          </a:solidFill>
+          <a:ln>
+            <a:noFill/>
+          </a:ln>
+        </p:spPr>
+        <p:txBody>
+          <a:bodyPr anchor="ctr"/>
+          <a:lstStyle/>
+          <a:p>
+            <a:r>
+              <a:rPr lang="en-US" sz="1200" b="1">
+                <a:solidFill>
+                  <a:srgbClr val="176B63"/>
+                </a:solidFill>
+                <a:latin typeface="Avenir Next"/>
+              </a:rPr>
+              <a:t>Remedial Flaw: Public lacks upstream verification</a:t>
+            </a:r>
+          </a:p>
+        </p:txBody>
+      </p:sp>
+      <p:sp>
+        <p:nvSpPr>
+          <p:cNvPr id="160" name="Card"/>
+          <p:cNvSpPr/>
+          <p:nvPr/>
+        </p:nvSpPr>
+        <p:spPr>
+          <a:xfrm>
+            <a:off x="6197600" y="4117550"/>
+            <a:ext cx="5410200" cy="1676400"/>
+          </a:xfrm>
+          <a:prstGeom prst="roundRect">
+            <a:avLst>
+              <a:gd name="adj" fmla="val 7000"/>
+            </a:avLst>
+          </a:prstGeom>
+          <a:solidFill>
+            <a:srgbClr val="F6F3EB"/>
+          </a:solidFill>
+          <a:ln w="12700">
+            <a:solidFill>
+              <a:srgbClr val="2A6B2E"/>
+            </a:solidFill>
+          </a:ln>
+        </p:spPr>
+        <p:txBody>
+          <a:bodyPr/>
+          <a:lstStyle/>
+          <a:p>
+            <a:endParaRPr lang="en-US" dirty="0"/>
+          </a:p>
+        </p:txBody>
+      </p:sp>
+      <p:sp>
+        <p:nvSpPr>
+          <p:cNvPr id="161" name="Badge"/>
+          <p:cNvSpPr/>
+          <p:nvPr/>
+        </p:nvSpPr>
+        <p:spPr>
+          <a:xfrm>
+            <a:off x="6375400" y="4189034"/>
+            <a:ext cx="1078531" cy="347616"/>
+          </a:xfrm>
+          <a:prstGeom prst="roundRect">
+            <a:avLst>
+              <a:gd name="adj" fmla="val 50000"/>
+            </a:avLst>
+          </a:prstGeom>
+          <a:solidFill>
+            <a:srgbClr val="2A6B2E"/>
+          </a:solidFill>
+          <a:ln>
+            <a:noFill/>
+          </a:ln>
+        </p:spPr>
+        <p:txBody>
+          <a:bodyPr anchor="ctr"/>
+          <a:lstStyle/>
+          <a:p>
+            <a:pPr algn="ctr"/>
+            <a:r>
+              <a:rPr lang="en-US" sz="1200" b="1" dirty="0">
+                <a:solidFill>
+                  <a:srgbClr val="FFFFFF"/>
+                </a:solidFill>
+                <a:latin typeface="Avenir Next"/>
+              </a:rPr>
+              <a:t>Immunity</a:t>
+            </a:r>
+          </a:p>
+        </p:txBody>
+      </p:sp>
+      <p:sp>
+        <p:nvSpPr>
+          <p:cNvPr id="162" name="Title"/>
+          <p:cNvSpPr/>
+          <p:nvPr/>
+        </p:nvSpPr>
+        <p:spPr>
+          <a:xfrm>
+            <a:off x="6400800" y="4625550"/>
+            <a:ext cx="5003800" cy="279400"/>
+          </a:xfrm>
+          <a:prstGeom prst="rect">
+            <a:avLst/>
+          </a:prstGeom>
+          <a:noFill/>
+          <a:ln>
+            <a:noFill/>
+          </a:ln>
+        </p:spPr>
+        <p:txBody>
+          <a:bodyPr/>
+          <a:lstStyle/>
+          <a:p>
+            <a:r>
+              <a:rPr lang="en-US" sz="1400" b="1" dirty="0">
+                <a:solidFill>
+                  <a:srgbClr val="173F35"/>
+                </a:solidFill>
+                <a:latin typeface="Avenir Next"/>
+              </a:rPr>
+              <a:t>4. Limited Liability Shield</a:t>
+            </a:r>
+          </a:p>
+        </p:txBody>
+      </p:sp>
+      <p:sp>
+        <p:nvSpPr>
+          <p:cNvPr id="163" name="Desc"/>
+          <p:cNvSpPr/>
+          <p:nvPr/>
+        </p:nvSpPr>
+        <p:spPr>
+          <a:xfrm>
+            <a:off x="6400800" y="4930350"/>
+            <a:ext cx="5003800" cy="482600"/>
+          </a:xfrm>
+          <a:prstGeom prst="rect">
+            <a:avLst/>
+          </a:prstGeom>
+          <a:noFill/>
+          <a:ln>
+            <a:noFill/>
+          </a:ln>
+        </p:spPr>
+        <p:txBody>
+          <a:bodyPr/>
+          <a:lstStyle/>
+          <a:p>
+            <a:pPr>
+              <a:lnSpc>
+                <a:spcPts val="1500"/>
+              </a:lnSpc>
+            </a:pPr>
+            <a:r>
+              <a:rPr lang="en-US" sz="1300" dirty="0">
+                <a:solidFill>
+                  <a:srgbClr val="2D2D2D"/>
+                </a:solidFill>
+                <a:latin typeface="Avenir Next"/>
+              </a:rPr>
+              <a:t>The ‘corporate veil’ shields the corporate beneficiaries. ESG gains stay private. While environmental damage is externalized.</a:t>
+            </a:r>
+          </a:p>
+        </p:txBody>
+      </p:sp>
+      <p:sp>
+        <p:nvSpPr>
+          <p:cNvPr id="164" name="Callout"/>
+          <p:cNvSpPr/>
+          <p:nvPr/>
+        </p:nvSpPr>
+        <p:spPr>
+          <a:xfrm>
+            <a:off x="6375400" y="5412950"/>
+            <a:ext cx="5054600" cy="304800"/>
+          </a:xfrm>
+          <a:prstGeom prst="roundRect">
+            <a:avLst>
+              <a:gd name="adj" fmla="val 30000"/>
+            </a:avLst>
+          </a:prstGeom>
+          <a:solidFill>
+            <a:srgbClr val="E4EFE4"/>
+          </a:solidFill>
+          <a:ln>
+            <a:noFill/>
+          </a:ln>
+        </p:spPr>
+        <p:txBody>
+          <a:bodyPr anchor="ctr"/>
+          <a:lstStyle/>
+          <a:p>
+            <a:r>
+              <a:rPr lang="en-US" sz="1200" b="1" dirty="0">
+                <a:solidFill>
+                  <a:srgbClr val="2A6B2E"/>
+                </a:solidFill>
+                <a:latin typeface="Avenir Next"/>
+              </a:rPr>
+              <a:t>Deterrence Failure.</a:t>
+            </a:r>
+          </a:p>
+        </p:txBody>
+      </p:sp>
+      <p:sp>
+        <p:nvSpPr>
+          <p:cNvPr id="4" name="Badge">
+            <a:extLst>
+              <a:ext uri="{FF2B5EF4-FFF2-40B4-BE49-F238E27FC236}">
+                <a16:creationId xmlns:a16="http://schemas.microsoft.com/office/drawing/2014/main" id="{C38B49C3-AEC7-3574-4D7A-B5831F6FE320}"/>
+              </a:ext>
+            </a:extLst>
+          </p:cNvPr>
+          <p:cNvSpPr/>
+          <p:nvPr/>
+        </p:nvSpPr>
+        <p:spPr>
+          <a:xfrm>
+            <a:off x="2097554" y="2120990"/>
+            <a:ext cx="1293058" cy="381880"/>
+          </a:xfrm>
+          <a:prstGeom prst="roundRect">
+            <a:avLst>
+              <a:gd name="adj" fmla="val 50000"/>
+            </a:avLst>
+          </a:prstGeom>
+          <a:solidFill>
+            <a:schemeClr val="accent6">
+              <a:lumMod val="75000"/>
+            </a:schemeClr>
+          </a:solidFill>
+          <a:ln>
+            <a:noFill/>
+          </a:ln>
+        </p:spPr>
+        <p:txBody>
+          <a:bodyPr anchor="ctr"/>
+          <a:lstStyle/>
+          <a:p>
+            <a:pPr algn="ctr"/>
+            <a:r>
+              <a:rPr lang="en-US" sz="1200" b="1" dirty="0">
+                <a:solidFill>
+                  <a:srgbClr val="FFFFFF"/>
+                </a:solidFill>
+                <a:latin typeface="Avenir Next"/>
+              </a:rPr>
+              <a:t>Claim-Right</a:t>
+            </a:r>
+          </a:p>
+        </p:txBody>
+      </p:sp>
+      <p:sp>
+        <p:nvSpPr>
+          <p:cNvPr id="7" name="Badge">
+            <a:extLst>
+              <a:ext uri="{FF2B5EF4-FFF2-40B4-BE49-F238E27FC236}">
+                <a16:creationId xmlns:a16="http://schemas.microsoft.com/office/drawing/2014/main" id="{10E2D65F-29F5-8E7B-DC9F-C0F783B62D55}"/>
+              </a:ext>
+            </a:extLst>
+          </p:cNvPr>
+          <p:cNvSpPr/>
+          <p:nvPr/>
+        </p:nvSpPr>
+        <p:spPr>
+          <a:xfrm>
+            <a:off x="7722281" y="2115155"/>
+            <a:ext cx="1078531" cy="381880"/>
+          </a:xfrm>
+          <a:prstGeom prst="roundRect">
+            <a:avLst>
+              <a:gd name="adj" fmla="val 50000"/>
+            </a:avLst>
+          </a:prstGeom>
+          <a:solidFill>
+            <a:srgbClr val="8A6410"/>
+          </a:solidFill>
+          <a:ln>
+            <a:noFill/>
+          </a:ln>
+        </p:spPr>
+        <p:txBody>
+          <a:bodyPr anchor="ctr"/>
+          <a:lstStyle/>
+          <a:p>
+            <a:pPr algn="ctr"/>
+            <a:r>
+              <a:rPr lang="en-US" sz="1200" b="1" dirty="0">
+                <a:solidFill>
+                  <a:srgbClr val="FFFFFF"/>
+                </a:solidFill>
+                <a:latin typeface="Avenir Next"/>
+              </a:rPr>
+              <a:t>No-Right</a:t>
+            </a:r>
+          </a:p>
+        </p:txBody>
+      </p:sp>
+      <p:sp>
+        <p:nvSpPr>
+          <p:cNvPr id="8" name="Badge">
+            <a:extLst>
+              <a:ext uri="{FF2B5EF4-FFF2-40B4-BE49-F238E27FC236}">
+                <a16:creationId xmlns:a16="http://schemas.microsoft.com/office/drawing/2014/main" id="{0214B8AB-2C86-F250-84B4-D310F2FF66B3}"/>
+              </a:ext>
+            </a:extLst>
+          </p:cNvPr>
+          <p:cNvSpPr/>
+          <p:nvPr/>
+        </p:nvSpPr>
+        <p:spPr>
+          <a:xfrm>
+            <a:off x="2097554" y="4189034"/>
+            <a:ext cx="1293058" cy="347616"/>
+          </a:xfrm>
+          <a:prstGeom prst="roundRect">
+            <a:avLst>
+              <a:gd name="adj" fmla="val 50000"/>
+            </a:avLst>
+          </a:prstGeom>
+          <a:solidFill>
+            <a:srgbClr val="176B63"/>
+          </a:solidFill>
+          <a:ln>
+            <a:noFill/>
+          </a:ln>
+        </p:spPr>
+        <p:txBody>
+          <a:bodyPr anchor="ctr"/>
+          <a:lstStyle/>
+          <a:p>
+            <a:pPr algn="ctr"/>
+            <a:r>
+              <a:rPr lang="en-US" sz="1200" b="1" dirty="0">
+                <a:solidFill>
+                  <a:srgbClr val="FFFFFF"/>
+                </a:solidFill>
+                <a:latin typeface="Avenir Next"/>
+              </a:rPr>
+              <a:t>Liability</a:t>
+            </a:r>
+          </a:p>
+        </p:txBody>
+      </p:sp>
+      <p:sp>
+        <p:nvSpPr>
+          <p:cNvPr id="9" name="Badge">
+            <a:extLst>
+              <a:ext uri="{FF2B5EF4-FFF2-40B4-BE49-F238E27FC236}">
+                <a16:creationId xmlns:a16="http://schemas.microsoft.com/office/drawing/2014/main" id="{0D8EB7B1-7CE7-94D2-A920-66925B4D13AC}"/>
+              </a:ext>
+            </a:extLst>
+          </p:cNvPr>
+          <p:cNvSpPr/>
+          <p:nvPr/>
+        </p:nvSpPr>
+        <p:spPr>
+          <a:xfrm>
+            <a:off x="7722281" y="4190407"/>
+            <a:ext cx="1078531" cy="347616"/>
+          </a:xfrm>
+          <a:prstGeom prst="roundRect">
+            <a:avLst>
+              <a:gd name="adj" fmla="val 50000"/>
+            </a:avLst>
+          </a:prstGeom>
+          <a:solidFill>
+            <a:srgbClr val="2A6B2E"/>
+          </a:solidFill>
+          <a:ln>
+            <a:noFill/>
+          </a:ln>
+        </p:spPr>
+        <p:txBody>
+          <a:bodyPr anchor="ctr"/>
+          <a:lstStyle/>
+          <a:p>
+            <a:pPr algn="ctr"/>
+            <a:r>
+              <a:rPr lang="en-US" sz="1200" b="1" dirty="0">
+                <a:solidFill>
+                  <a:srgbClr val="FFFFFF"/>
+                </a:solidFill>
+                <a:latin typeface="Avenir Next"/>
+              </a:rPr>
+              <a:t>Disability</a:t>
+            </a:r>
+          </a:p>
+        </p:txBody>
+      </p:sp>
+      <p:sp>
+        <p:nvSpPr>
+          <p:cNvPr id="123" name="Desc"/>
+          <p:cNvSpPr/>
+          <p:nvPr/>
+        </p:nvSpPr>
+        <p:spPr>
+          <a:xfrm>
+            <a:off x="6400800" y="2856471"/>
+            <a:ext cx="5003800" cy="530170"/>
+          </a:xfrm>
+          <a:prstGeom prst="rect">
+            <a:avLst/>
+          </a:prstGeom>
+          <a:noFill/>
+          <a:ln>
+            <a:noFill/>
+          </a:ln>
+        </p:spPr>
+        <p:txBody>
+          <a:bodyPr/>
+          <a:lstStyle/>
+          <a:p>
+            <a:pPr>
+              <a:lnSpc>
+                <a:spcPts val="1500"/>
+              </a:lnSpc>
+            </a:pPr>
+            <a:r>
+              <a:rPr lang="en-US" sz="1300" dirty="0">
+                <a:solidFill>
+                  <a:srgbClr val="2D2D2D"/>
+                </a:solidFill>
+                <a:latin typeface="Avenir Next"/>
+              </a:rPr>
+              <a:t>Management holds commercial freedom (Privilege) to advertise. But this privilege is abused by crossing into deception and unsubstantiated claims.</a:t>
+            </a:r>
+          </a:p>
+        </p:txBody>
+      </p:sp>
     </p:spTree>
     <p:extLst>
       <p:ext uri="{BB962C8B-B14F-4D97-AF65-F5344CB8AC3E}">
-        <p14:creationId xmlns:p14="http://schemas.microsoft.com/office/powerpoint/2010/main" val="3966405348"/>
+        <p14:creationId xmlns:p14="http://schemas.microsoft.com/office/powerpoint/2010/main" val="2908205277"/>
       </p:ext>
     </p:extLst>
   </p:cSld>
@@ -14565,300 +14821,13 @@
       </p:sp>
       <p:sp>
         <p:nvSpPr>
-          <p:cNvPr id="8" name="Chevron 7"/>
-          <p:cNvSpPr/>
-          <p:nvPr/>
-        </p:nvSpPr>
-        <p:spPr>
-          <a:xfrm>
-            <a:off x="765637" y="5363452"/>
-            <a:ext cx="1993392" cy="743172"/>
-          </a:xfrm>
-          <a:prstGeom prst="chevron">
-            <a:avLst/>
-          </a:prstGeom>
-          <a:solidFill>
-            <a:srgbClr val="E8EFE6"/>
-          </a:solidFill>
-          <a:ln>
-            <a:solidFill>
-              <a:srgbClr val="D8D1C6"/>
-            </a:solidFill>
-          </a:ln>
-        </p:spPr>
-        <p:style>
-          <a:lnRef idx="1">
-            <a:schemeClr val="accent1"/>
-          </a:lnRef>
-          <a:fillRef idx="3">
-            <a:schemeClr val="accent1"/>
-          </a:fillRef>
-          <a:effectRef idx="2">
-            <a:schemeClr val="accent1"/>
-          </a:effectRef>
-          <a:fontRef idx="minor">
-            <a:schemeClr val="lt1"/>
-          </a:fontRef>
-        </p:style>
-        <p:txBody>
-          <a:bodyPr rtlCol="0" anchor="ctr"/>
-          <a:lstStyle/>
-          <a:p>
-            <a:pPr algn="ctr">
-              <a:defRPr sz="1100" b="1">
-                <a:solidFill>
-                  <a:srgbClr val="173F35"/>
-                </a:solidFill>
-                <a:latin typeface="Avenir Next"/>
-              </a:defRPr>
-            </a:pPr>
-            <a:r>
-              <a:rPr sz="1200">
-                <a:latin typeface="Avenir Next" panose="020B0503020202020204" pitchFamily="34" charset="0"/>
-              </a:rPr>
-              <a:t>Board Responsibility</a:t>
-            </a:r>
-          </a:p>
-        </p:txBody>
-      </p:sp>
-      <p:sp>
-        <p:nvSpPr>
-          <p:cNvPr id="9" name="Chevron 8"/>
-          <p:cNvSpPr/>
-          <p:nvPr/>
-        </p:nvSpPr>
-        <p:spPr>
-          <a:xfrm>
-            <a:off x="2813893" y="5363452"/>
-            <a:ext cx="1993392" cy="743172"/>
-          </a:xfrm>
-          <a:prstGeom prst="chevron">
-            <a:avLst/>
-          </a:prstGeom>
-          <a:solidFill>
-            <a:srgbClr val="E8EFE6"/>
-          </a:solidFill>
-          <a:ln>
-            <a:solidFill>
-              <a:srgbClr val="D8D1C6"/>
-            </a:solidFill>
-          </a:ln>
-        </p:spPr>
-        <p:style>
-          <a:lnRef idx="1">
-            <a:schemeClr val="accent1"/>
-          </a:lnRef>
-          <a:fillRef idx="3">
-            <a:schemeClr val="accent1"/>
-          </a:fillRef>
-          <a:effectRef idx="2">
-            <a:schemeClr val="accent1"/>
-          </a:effectRef>
-          <a:fontRef idx="minor">
-            <a:schemeClr val="lt1"/>
-          </a:fontRef>
-        </p:style>
-        <p:txBody>
-          <a:bodyPr rtlCol="0" anchor="ctr"/>
-          <a:lstStyle/>
-          <a:p>
-            <a:pPr algn="ctr">
-              <a:defRPr sz="1100" b="1">
-                <a:solidFill>
-                  <a:srgbClr val="173F35"/>
-                </a:solidFill>
-                <a:latin typeface="Avenir Next"/>
-              </a:defRPr>
-            </a:pPr>
-            <a:r>
-              <a:t>Claim Substantiation</a:t>
-            </a:r>
-          </a:p>
-        </p:txBody>
-      </p:sp>
-      <p:sp>
-        <p:nvSpPr>
-          <p:cNvPr id="10" name="Chevron 9"/>
-          <p:cNvSpPr/>
-          <p:nvPr/>
-        </p:nvSpPr>
-        <p:spPr>
-          <a:xfrm>
-            <a:off x="4862149" y="5363452"/>
-            <a:ext cx="1993392" cy="743172"/>
-          </a:xfrm>
-          <a:prstGeom prst="chevron">
-            <a:avLst/>
-          </a:prstGeom>
-          <a:solidFill>
-            <a:srgbClr val="E8EFE6"/>
-          </a:solidFill>
-          <a:ln>
-            <a:solidFill>
-              <a:srgbClr val="D8D1C6"/>
-            </a:solidFill>
-          </a:ln>
-        </p:spPr>
-        <p:style>
-          <a:lnRef idx="1">
-            <a:schemeClr val="accent1"/>
-          </a:lnRef>
-          <a:fillRef idx="3">
-            <a:schemeClr val="accent1"/>
-          </a:fillRef>
-          <a:effectRef idx="2">
-            <a:schemeClr val="accent1"/>
-          </a:effectRef>
-          <a:fontRef idx="minor">
-            <a:schemeClr val="lt1"/>
-          </a:fontRef>
-        </p:style>
-        <p:txBody>
-          <a:bodyPr rtlCol="0" anchor="ctr"/>
-          <a:lstStyle/>
-          <a:p>
-            <a:pPr algn="ctr">
-              <a:defRPr sz="1100" b="1">
-                <a:solidFill>
-                  <a:srgbClr val="173F35"/>
-                </a:solidFill>
-                <a:latin typeface="Avenir Next"/>
-              </a:defRPr>
-            </a:pPr>
-            <a:r>
-              <a:rPr sz="1200">
-                <a:latin typeface="Avenir Next" panose="020B0503020202020204" pitchFamily="34" charset="0"/>
-              </a:rPr>
-              <a:t>Independent Assurance</a:t>
-            </a:r>
-          </a:p>
-        </p:txBody>
-      </p:sp>
-      <p:sp>
-        <p:nvSpPr>
-          <p:cNvPr id="11" name="Chevron 10"/>
-          <p:cNvSpPr/>
-          <p:nvPr/>
-        </p:nvSpPr>
-        <p:spPr>
-          <a:xfrm>
-            <a:off x="6910405" y="5363452"/>
-            <a:ext cx="1993392" cy="743172"/>
-          </a:xfrm>
-          <a:prstGeom prst="chevron">
-            <a:avLst/>
-          </a:prstGeom>
-          <a:solidFill>
-            <a:srgbClr val="E8EFE6"/>
-          </a:solidFill>
-          <a:ln>
-            <a:solidFill>
-              <a:srgbClr val="D8D1C6"/>
-            </a:solidFill>
-          </a:ln>
-        </p:spPr>
-        <p:style>
-          <a:lnRef idx="1">
-            <a:schemeClr val="accent1"/>
-          </a:lnRef>
-          <a:fillRef idx="3">
-            <a:schemeClr val="accent1"/>
-          </a:fillRef>
-          <a:effectRef idx="2">
-            <a:schemeClr val="accent1"/>
-          </a:effectRef>
-          <a:fontRef idx="minor">
-            <a:schemeClr val="lt1"/>
-          </a:fontRef>
-        </p:style>
-        <p:txBody>
-          <a:bodyPr rtlCol="0" anchor="ctr"/>
-          <a:lstStyle/>
-          <a:p>
-            <a:pPr algn="ctr">
-              <a:defRPr sz="1100" b="1">
-                <a:solidFill>
-                  <a:srgbClr val="173F35"/>
-                </a:solidFill>
-                <a:latin typeface="Avenir Next"/>
-              </a:defRPr>
-            </a:pPr>
-            <a:r>
-              <a:rPr sz="1200">
-                <a:latin typeface="Avenir Next" panose="020B0503020202020204" pitchFamily="34" charset="0"/>
-              </a:rPr>
-              <a:t>Regulator Coordination</a:t>
-            </a:r>
-          </a:p>
-        </p:txBody>
-      </p:sp>
-      <p:sp>
-        <p:nvSpPr>
-          <p:cNvPr id="12" name="Chevron 11"/>
-          <p:cNvSpPr/>
-          <p:nvPr/>
-        </p:nvSpPr>
-        <p:spPr>
-          <a:xfrm>
-            <a:off x="8958661" y="5363452"/>
-            <a:ext cx="1993392" cy="743172"/>
-          </a:xfrm>
-          <a:prstGeom prst="chevron">
-            <a:avLst/>
-          </a:prstGeom>
-          <a:solidFill>
-            <a:srgbClr val="E8EFE6"/>
-          </a:solidFill>
-          <a:ln>
-            <a:solidFill>
-              <a:srgbClr val="D8D1C6"/>
-            </a:solidFill>
-          </a:ln>
-        </p:spPr>
-        <p:style>
-          <a:lnRef idx="1">
-            <a:schemeClr val="accent1"/>
-          </a:lnRef>
-          <a:fillRef idx="3">
-            <a:schemeClr val="accent1"/>
-          </a:fillRef>
-          <a:effectRef idx="2">
-            <a:schemeClr val="accent1"/>
-          </a:effectRef>
-          <a:fontRef idx="minor">
-            <a:schemeClr val="lt1"/>
-          </a:fontRef>
-        </p:style>
-        <p:txBody>
-          <a:bodyPr rtlCol="0" anchor="ctr"/>
-          <a:lstStyle/>
-          <a:p>
-            <a:pPr algn="ctr">
-              <a:defRPr sz="1100" b="1">
-                <a:solidFill>
-                  <a:srgbClr val="173F35"/>
-                </a:solidFill>
-                <a:latin typeface="Avenir Next"/>
-              </a:defRPr>
-            </a:pPr>
-            <a:r>
-              <a:rPr sz="1200">
-                <a:latin typeface="Avenir Next" panose="020B0503020202020204" pitchFamily="34" charset="0"/>
-              </a:rPr>
-              <a:t>Visible Penalties</a:t>
-            </a:r>
-          </a:p>
-        </p:txBody>
-      </p:sp>
-      <p:sp>
-        <p:nvSpPr>
           <p:cNvPr id="13" name="Rounded Rectangle 12"/>
           <p:cNvSpPr/>
           <p:nvPr/>
         </p:nvSpPr>
         <p:spPr>
           <a:xfrm>
-            <a:off x="697925" y="1214173"/>
+            <a:off x="697925" y="1646661"/>
             <a:ext cx="5360704" cy="3831541"/>
           </a:xfrm>
           <a:prstGeom prst="roundRect">
@@ -14906,7 +14875,7 @@
         </p:nvSpPr>
         <p:spPr>
           <a:xfrm>
-            <a:off x="601035" y="1185641"/>
+            <a:off x="601035" y="1618129"/>
             <a:ext cx="4275765" cy="626646"/>
           </a:xfrm>
           <a:prstGeom prst="roundRect">
@@ -14967,7 +14936,7 @@
         </p:nvSpPr>
         <p:spPr>
           <a:xfrm>
-            <a:off x="765637" y="1840084"/>
+            <a:off x="765637" y="2272572"/>
             <a:ext cx="5292991" cy="3057247"/>
           </a:xfrm>
           <a:prstGeom prst="rect">
@@ -14999,7 +14968,19 @@
               <a:rPr sz="1600" dirty="0">
                 <a:latin typeface="Avenir Next" panose="020B0503020202020204" pitchFamily="34" charset="0"/>
               </a:rPr>
-              <a:t>• Proof Before Publishing: Mandatory verification prior to claims (ex ante).</a:t>
+              <a:t>• </a:t>
+            </a:r>
+            <a:r>
+              <a:rPr sz="1600" b="1" dirty="0">
+                <a:latin typeface="Avenir Next" panose="020B0503020202020204" pitchFamily="34" charset="0"/>
+              </a:rPr>
+              <a:t>Proof Before Publishing: </a:t>
+            </a:r>
+            <a:r>
+              <a:rPr sz="1600" dirty="0">
+                <a:latin typeface="Avenir Next" panose="020B0503020202020204" pitchFamily="34" charset="0"/>
+              </a:rPr>
+              <a:t>Mandatory verification prior to claims (ex ante).</a:t>
             </a:r>
             <a:endParaRPr lang="en-US" sz="1600" dirty="0">
               <a:latin typeface="Avenir Next" panose="020B0503020202020204" pitchFamily="34" charset="0"/>
@@ -15020,7 +15001,19 @@
               <a:rPr sz="1600" dirty="0">
                 <a:latin typeface="Avenir Next" panose="020B0503020202020204" pitchFamily="34" charset="0"/>
               </a:rPr>
-              <a:t>• Independent Audits: Mandatory third-party assurance that escalates over time.</a:t>
+              <a:t>• </a:t>
+            </a:r>
+            <a:r>
+              <a:rPr sz="1600" b="1" dirty="0">
+                <a:latin typeface="Avenir Next" panose="020B0503020202020204" pitchFamily="34" charset="0"/>
+              </a:rPr>
+              <a:t>Independent Audits: </a:t>
+            </a:r>
+            <a:r>
+              <a:rPr sz="1600" dirty="0">
+                <a:latin typeface="Avenir Next" panose="020B0503020202020204" pitchFamily="34" charset="0"/>
+              </a:rPr>
+              <a:t>Mandatory third-party assurance that escalates over time.</a:t>
             </a:r>
           </a:p>
           <a:p>
@@ -15038,7 +15031,19 @@
               <a:rPr sz="1600" dirty="0">
                 <a:latin typeface="Avenir Next" panose="020B0503020202020204" pitchFamily="34" charset="0"/>
               </a:rPr>
-              <a:t>• Clear Accountability: Direct liability routes for decision-makers.</a:t>
+              <a:t>• </a:t>
+            </a:r>
+            <a:r>
+              <a:rPr sz="1600" b="1" dirty="0">
+                <a:latin typeface="Avenir Next" panose="020B0503020202020204" pitchFamily="34" charset="0"/>
+              </a:rPr>
+              <a:t>Clear Accountability: </a:t>
+            </a:r>
+            <a:r>
+              <a:rPr sz="1600" dirty="0">
+                <a:latin typeface="Avenir Next" panose="020B0503020202020204" pitchFamily="34" charset="0"/>
+              </a:rPr>
+              <a:t>Direct liability routes for decision-makers.</a:t>
             </a:r>
           </a:p>
           <a:p>
@@ -15056,7 +15061,19 @@
               <a:rPr sz="1600" dirty="0">
                 <a:latin typeface="Avenir Next" panose="020B0503020202020204" pitchFamily="34" charset="0"/>
               </a:rPr>
-              <a:t>• Turnover-Linked Penalties: Fines scaled to company revenue to deter misconduct.</a:t>
+              <a:t>• </a:t>
+            </a:r>
+            <a:r>
+              <a:rPr sz="1600" b="1" dirty="0">
+                <a:latin typeface="Avenir Next" panose="020B0503020202020204" pitchFamily="34" charset="0"/>
+              </a:rPr>
+              <a:t>Turnover-Linked Penalties: </a:t>
+            </a:r>
+            <a:r>
+              <a:rPr sz="1600" dirty="0">
+                <a:latin typeface="Avenir Next" panose="020B0503020202020204" pitchFamily="34" charset="0"/>
+              </a:rPr>
+              <a:t>Fines scaled to company revenue to deter misconduct.</a:t>
             </a:r>
           </a:p>
           <a:p>
@@ -15071,7 +15088,19 @@
               <a:rPr sz="1600" dirty="0">
                 <a:latin typeface="Avenir Next" panose="020B0503020202020204" pitchFamily="34" charset="0"/>
               </a:rPr>
-              <a:t>• Lifecycle Coverage: Rules apply from product labels to financial filings.</a:t>
+              <a:t>• </a:t>
+            </a:r>
+            <a:r>
+              <a:rPr sz="1600" b="1" dirty="0">
+                <a:latin typeface="Avenir Next" panose="020B0503020202020204" pitchFamily="34" charset="0"/>
+              </a:rPr>
+              <a:t>Lifecycle Coverage: </a:t>
+            </a:r>
+            <a:r>
+              <a:rPr sz="1600" dirty="0">
+                <a:latin typeface="Avenir Next" panose="020B0503020202020204" pitchFamily="34" charset="0"/>
+              </a:rPr>
+              <a:t>Rules apply from product labels to financial filings.</a:t>
             </a:r>
           </a:p>
         </p:txBody>
@@ -15084,7 +15113,7 @@
         </p:nvSpPr>
         <p:spPr>
           <a:xfrm>
-            <a:off x="6350320" y="1214172"/>
+            <a:off x="6350320" y="1646660"/>
             <a:ext cx="4897839" cy="3831541"/>
           </a:xfrm>
           <a:prstGeom prst="roundRect">
@@ -15132,7 +15161,7 @@
         </p:nvSpPr>
         <p:spPr>
           <a:xfrm>
-            <a:off x="6276188" y="1185641"/>
+            <a:off x="6276188" y="1618129"/>
             <a:ext cx="3077362" cy="588635"/>
           </a:xfrm>
           <a:prstGeom prst="roundRect">
@@ -15191,7 +15220,7 @@
         </p:nvSpPr>
         <p:spPr>
           <a:xfrm>
-            <a:off x="6402593" y="1811942"/>
+            <a:off x="6402593" y="2244430"/>
             <a:ext cx="4933553" cy="3057247"/>
           </a:xfrm>
           <a:prstGeom prst="rect">
@@ -15223,7 +15252,19 @@
               <a:rPr sz="1600" dirty="0">
                 <a:latin typeface="Avenir Next" panose="020B0503020202020204" pitchFamily="34" charset="0"/>
               </a:rPr>
-              <a:t>• Reactive Policing: Authorities only step in after an ad has already run.</a:t>
+              <a:t>• </a:t>
+            </a:r>
+            <a:r>
+              <a:rPr sz="1600" b="1" dirty="0">
+                <a:latin typeface="Avenir Next" panose="020B0503020202020204" pitchFamily="34" charset="0"/>
+              </a:rPr>
+              <a:t>Reactive Policing: </a:t>
+            </a:r>
+            <a:r>
+              <a:rPr sz="1600" dirty="0">
+                <a:latin typeface="Avenir Next" panose="020B0503020202020204" pitchFamily="34" charset="0"/>
+              </a:rPr>
+              <a:t>Authorities only step in after an ad has already run.</a:t>
             </a:r>
             <a:endParaRPr lang="en-US" sz="1600" dirty="0">
               <a:latin typeface="Avenir Next" panose="020B0503020202020204" pitchFamily="34" charset="0"/>
@@ -15244,7 +15285,19 @@
               <a:rPr sz="1600" dirty="0">
                 <a:latin typeface="Avenir Next" panose="020B0503020202020204" pitchFamily="34" charset="0"/>
               </a:rPr>
-              <a:t>• Diluted Auditing: Mandatory audits postponed and replaced with soft checks.</a:t>
+              <a:t>• </a:t>
+            </a:r>
+            <a:r>
+              <a:rPr sz="1600" b="1" dirty="0">
+                <a:latin typeface="Avenir Next" panose="020B0503020202020204" pitchFamily="34" charset="0"/>
+              </a:rPr>
+              <a:t>Diluted Auditing: </a:t>
+            </a:r>
+            <a:r>
+              <a:rPr sz="1600" dirty="0">
+                <a:latin typeface="Avenir Next" panose="020B0503020202020204" pitchFamily="34" charset="0"/>
+              </a:rPr>
+              <a:t>Mandatory audits postponed and replaced with soft checks.</a:t>
             </a:r>
           </a:p>
           <a:p>
@@ -15262,7 +15315,19 @@
               <a:rPr sz="1600" dirty="0">
                 <a:latin typeface="Avenir Next" panose="020B0503020202020204" pitchFamily="34" charset="0"/>
               </a:rPr>
-              <a:t>• No Pre-Approval: No mandatory third-party verification before claims are made.</a:t>
+              <a:t>• </a:t>
+            </a:r>
+            <a:r>
+              <a:rPr sz="1600" b="1" dirty="0">
+                <a:latin typeface="Avenir Next" panose="020B0503020202020204" pitchFamily="34" charset="0"/>
+              </a:rPr>
+              <a:t>No Pre-Approval: </a:t>
+            </a:r>
+            <a:r>
+              <a:rPr sz="1600" dirty="0">
+                <a:latin typeface="Avenir Next" panose="020B0503020202020204" pitchFamily="34" charset="0"/>
+              </a:rPr>
+              <a:t>No mandatory third-party verification before claims are made.</a:t>
             </a:r>
           </a:p>
           <a:p>
@@ -15280,7 +15345,19 @@
               <a:rPr sz="1600" dirty="0">
                 <a:latin typeface="Avenir Next" panose="020B0503020202020204" pitchFamily="34" charset="0"/>
               </a:rPr>
-              <a:t>• Regulatory Rollbacks: Repeated delays and narrowed reporting scopes.</a:t>
+              <a:t>• </a:t>
+            </a:r>
+            <a:r>
+              <a:rPr sz="1600" b="1" dirty="0">
+                <a:latin typeface="Avenir Next" panose="020B0503020202020204" pitchFamily="34" charset="0"/>
+              </a:rPr>
+              <a:t>Regulatory Rollbacks:</a:t>
+            </a:r>
+            <a:r>
+              <a:rPr sz="1600" dirty="0">
+                <a:latin typeface="Avenir Next" panose="020B0503020202020204" pitchFamily="34" charset="0"/>
+              </a:rPr>
+              <a:t> Repeated delays and narrowed reporting scopes.</a:t>
             </a:r>
           </a:p>
           <a:p>
@@ -15295,7 +15372,19 @@
               <a:rPr sz="1600" dirty="0">
                 <a:latin typeface="Avenir Next" panose="020B0503020202020204" pitchFamily="34" charset="0"/>
               </a:rPr>
-              <a:t>• Fixed Low Penalties: Nominal fines that do not deter large corporations.</a:t>
+              <a:t>• </a:t>
+            </a:r>
+            <a:r>
+              <a:rPr sz="1600" b="1" dirty="0">
+                <a:latin typeface="Avenir Next" panose="020B0503020202020204" pitchFamily="34" charset="0"/>
+              </a:rPr>
+              <a:t>Fixed Low Penalties: </a:t>
+            </a:r>
+            <a:r>
+              <a:rPr sz="1600" dirty="0">
+                <a:latin typeface="Avenir Next" panose="020B0503020202020204" pitchFamily="34" charset="0"/>
+              </a:rPr>
+              <a:t>Nominal fines that do not deter large corporations.</a:t>
             </a:r>
           </a:p>
         </p:txBody>
@@ -29891,6 +29980,9 @@
   <wetp:taskpane dockstate="right" visibility="0" width="350" row="0">
     <wetp:webextensionref xmlns:r="http://schemas.openxmlformats.org/officeDocument/2006/relationships" r:id="rId2"/>
   </wetp:taskpane>
+  <wetp:taskpane dockstate="right" visibility="0" width="350" row="0">
+    <wetp:webextensionref xmlns:r="http://schemas.openxmlformats.org/officeDocument/2006/relationships" r:id="rId3"/>
+  </wetp:taskpane>
 </wetp:taskpanes>
 </file>
 
@@ -29922,4 +30014,18 @@
   <we:bindings/>
   <we:snapshot xmlns:r="http://schemas.openxmlformats.org/officeDocument/2006/relationships"/>
 </we:webextension>
+</file>
+
+<file path=ppt/webextensions/webextension3.xml><?xml version="1.0" encoding="utf-8"?>
+<we:webextension xmlns:we="http://schemas.microsoft.com/office/webextensions/webextension/2010/11" id="{79075918-3C8C-894A-A74B-6CA191A70CA8}">
+  <we:reference id="wa200010001" version="1.0.0.1" store="en-GB" storeType="OMEX"/>
+  <we:alternateReferences>
+    <we:reference id="WA200010001" version="1.0.0.1" store="" storeType="OMEX"/>
+  </we:alternateReferences>
+  <we:properties>
+    <we:property name="claude.fileId" value="&quot;65a53d8a-3821-4041-8af4-faeace13586c&quot;"/>
+  </we:properties>
+  <we:bindings/>
+  <we:snapshot xmlns:r="http://schemas.openxmlformats.org/officeDocument/2006/relationships"/>
+</we:webextension>
 </file>
--- a/Thesis Defence Presentation Final.pptx
+++ b/Thesis Defence Presentation Final.pptx
@@ -5994,14 +5994,14 @@
         </p:nvSpPr>
         <p:spPr>
           <a:xfrm>
-            <a:off x="7570381" y="1147204"/>
+            <a:off x="7570381" y="1950397"/>
             <a:ext cx="4226454" cy="2622908"/>
           </a:xfrm>
           <a:prstGeom prst="roundRect">
             <a:avLst/>
           </a:prstGeom>
           <a:solidFill>
-            <a:schemeClr val="accent6">
+            <a:schemeClr val="accent5">
               <a:lumMod val="40000"/>
               <a:lumOff val="60000"/>
             </a:schemeClr>
@@ -6045,7 +6045,7 @@
         </p:nvSpPr>
         <p:spPr>
           <a:xfrm>
-            <a:off x="7740502" y="1302246"/>
+            <a:off x="7740502" y="2105439"/>
             <a:ext cx="3934413" cy="2164695"/>
           </a:xfrm>
           <a:prstGeom prst="rect">
@@ -6144,7 +6144,7 @@
         </p:nvSpPr>
         <p:spPr>
           <a:xfrm>
-            <a:off x="566928" y="6570920"/>
+            <a:off x="566928" y="6657419"/>
             <a:ext cx="2132315" cy="261610"/>
           </a:xfrm>
           <a:prstGeom prst="rect">
@@ -6200,8 +6200,8 @@
         </p:nvSpPr>
         <p:spPr>
           <a:xfrm>
-            <a:off x="646996" y="1054084"/>
-            <a:ext cx="6678424" cy="5000351"/>
+            <a:off x="646996" y="1054085"/>
+            <a:ext cx="6678424" cy="4627128"/>
           </a:xfrm>
           <a:prstGeom prst="roundRect">
             <a:avLst/>
@@ -6716,29 +6716,32 @@
       </p:sp>
       <p:sp>
         <p:nvSpPr>
-          <p:cNvPr id="25" name="Rounded Rectangle 24"/>
+          <p:cNvPr id="6" name="Rounded Rectangle 5">
+            <a:extLst>
+              <a:ext uri="{FF2B5EF4-FFF2-40B4-BE49-F238E27FC236}">
+                <a16:creationId xmlns:a16="http://schemas.microsoft.com/office/drawing/2014/main" id="{76858014-9536-3F1C-E2EA-411ACEBFD818}"/>
+              </a:ext>
+            </a:extLst>
+          </p:cNvPr>
           <p:cNvSpPr/>
           <p:nvPr/>
         </p:nvSpPr>
         <p:spPr>
           <a:xfrm>
-            <a:off x="7570381" y="4236431"/>
-            <a:ext cx="4226454" cy="1808786"/>
+            <a:off x="646996" y="6042920"/>
+            <a:ext cx="11073384" cy="584775"/>
           </a:xfrm>
           <a:prstGeom prst="roundRect">
-            <a:avLst>
-              <a:gd name="adj" fmla="val 14000"/>
-            </a:avLst>
+            <a:avLst/>
           </a:prstGeom>
           <a:solidFill>
-            <a:srgbClr val="E8EFE6"/>
+            <a:srgbClr val="FFF6EA"/>
           </a:solidFill>
-          <a:ln w="12700">
+          <a:ln w="19050">
             <a:solidFill>
-              <a:srgbClr val="C2D3BD"/>
+              <a:srgbClr val="E7C894"/>
             </a:solidFill>
           </a:ln>
-          <a:effectLst/>
         </p:spPr>
         <p:style>
           <a:lnRef idx="1">
@@ -6755,67 +6758,22 @@
           </a:fontRef>
         </p:style>
         <p:txBody>
-          <a:bodyPr rtlCol="0" anchor="ctr"/>
-          <a:lstStyle/>
-          <a:p>
-            <a:endParaRPr>
-              <a:latin typeface="Avenir Next" panose="020B0503020202020204" pitchFamily="34" charset="0"/>
-            </a:endParaRPr>
-          </a:p>
-        </p:txBody>
-      </p:sp>
-      <p:sp>
-        <p:nvSpPr>
-          <p:cNvPr id="26" name="TextBox 25"/>
-          <p:cNvSpPr txBox="1"/>
-          <p:nvPr/>
-        </p:nvSpPr>
-        <p:spPr>
-          <a:xfrm>
-            <a:off x="7740502" y="4392740"/>
-            <a:ext cx="3920726" cy="1377300"/>
-          </a:xfrm>
-          <a:prstGeom prst="rect">
-            <a:avLst/>
-          </a:prstGeom>
-          <a:noFill/>
-        </p:spPr>
-        <p:txBody>
-          <a:bodyPr wrap="square" lIns="45720" tIns="22860" rIns="45720" bIns="22860" anchor="ctr">
-            <a:spAutoFit/>
-          </a:bodyPr>
+          <a:bodyPr wrap="square" lIns="182880" tIns="73152" rIns="182880" bIns="73152" rtlCol="0" anchor="ctr"/>
           <a:lstStyle/>
           <a:p>
             <a:pPr>
-              <a:spcAft>
-                <a:spcPts val="300"/>
-              </a:spcAft>
-              <a:defRPr sz="1100" b="1">
-                <a:solidFill>
-                  <a:srgbClr val="12402D"/>
-                </a:solidFill>
-              </a:defRPr>
-            </a:pPr>
-            <a:r>
-              <a:rPr sz="1400" dirty="0">
-                <a:latin typeface="Avenir Next" panose="020B0503020202020204" pitchFamily="34" charset="0"/>
-              </a:rPr>
-              <a:t>Research Question 2: Why can't consumer law solve greenwashing alone?</a:t>
-            </a:r>
-          </a:p>
-          <a:p>
-            <a:pPr>
-              <a:defRPr sz="1050">
-                <a:solidFill>
-                  <a:srgbClr val="282828"/>
-                </a:solidFill>
-              </a:defRPr>
-            </a:pPr>
-            <a:r>
-              <a:rPr sz="1400" dirty="0">
-                <a:latin typeface="Avenir Next" panose="020B0503020202020204" pitchFamily="34" charset="0"/>
-              </a:rPr>
-              <a:t>Answer: Consumer law only polices the end-product ad; corporate governance polices the internal systems, board oversight, and verified data that produced the claim.</a:t>
+              <a:defRPr sz="1300" b="1">
+                <a:solidFill>
+                  <a:srgbClr val="173F35"/>
+                </a:solidFill>
+                <a:latin typeface="Calibri"/>
+              </a:defRPr>
+            </a:pPr>
+            <a:r>
+              <a:rPr lang="en-IN" sz="1300" dirty="0">
+                <a:latin typeface="Avenir Next" panose="020B0503020202020204" pitchFamily="34" charset="0"/>
+              </a:rPr>
+              <a:t>Answers Research Question 2: What are the structural limitations of consumer protection and advertising law in addressing greenwashing and what legal pathways exist through corporate governance?</a:t>
             </a:r>
           </a:p>
         </p:txBody>
@@ -8252,7 +8210,7 @@
         </p:nvSpPr>
         <p:spPr>
           <a:xfrm>
-            <a:off x="508000" y="355600"/>
+            <a:off x="433858" y="429742"/>
             <a:ext cx="11176000" cy="508000"/>
           </a:xfrm>
           <a:prstGeom prst="rect">
@@ -8285,7 +8243,7 @@
         </p:nvSpPr>
         <p:spPr>
           <a:xfrm>
-            <a:off x="457200" y="1041400"/>
+            <a:off x="457200" y="1399748"/>
             <a:ext cx="3657600" cy="3810000"/>
           </a:xfrm>
           <a:prstGeom prst="roundRect">
@@ -8314,7 +8272,7 @@
         </p:nvSpPr>
         <p:spPr>
           <a:xfrm>
-            <a:off x="4267200" y="1041400"/>
+            <a:off x="4267200" y="1399748"/>
             <a:ext cx="3657600" cy="3810000"/>
           </a:xfrm>
           <a:prstGeom prst="roundRect">
@@ -8343,7 +8301,7 @@
         </p:nvSpPr>
         <p:spPr>
           <a:xfrm>
-            <a:off x="8077200" y="1041400"/>
+            <a:off x="8077200" y="1399748"/>
             <a:ext cx="3657600" cy="3810000"/>
           </a:xfrm>
           <a:prstGeom prst="roundRect">
@@ -8372,7 +8330,7 @@
         </p:nvSpPr>
         <p:spPr>
           <a:xfrm>
-            <a:off x="660400" y="1219200"/>
+            <a:off x="660400" y="1577548"/>
             <a:ext cx="457200" cy="457200"/>
           </a:xfrm>
           <a:prstGeom prst="ellipse">
@@ -8401,7 +8359,7 @@
         </p:nvSpPr>
         <p:spPr>
           <a:xfrm>
-            <a:off x="660400" y="1219200"/>
+            <a:off x="660400" y="1577548"/>
             <a:ext cx="457200" cy="457200"/>
           </a:xfrm>
           <a:prstGeom prst="rect">
@@ -8434,7 +8392,7 @@
         </p:nvSpPr>
         <p:spPr>
           <a:xfrm>
-            <a:off x="4470400" y="1219200"/>
+            <a:off x="4470400" y="1577548"/>
             <a:ext cx="457200" cy="457200"/>
           </a:xfrm>
           <a:prstGeom prst="ellipse">
@@ -8463,7 +8421,7 @@
         </p:nvSpPr>
         <p:spPr>
           <a:xfrm>
-            <a:off x="4470400" y="1219200"/>
+            <a:off x="4470400" y="1577548"/>
             <a:ext cx="457200" cy="457200"/>
           </a:xfrm>
           <a:prstGeom prst="rect">
@@ -8496,7 +8454,7 @@
         </p:nvSpPr>
         <p:spPr>
           <a:xfrm>
-            <a:off x="8280400" y="1219200"/>
+            <a:off x="8280400" y="1577548"/>
             <a:ext cx="457200" cy="457200"/>
           </a:xfrm>
           <a:prstGeom prst="ellipse">
@@ -8525,7 +8483,7 @@
         </p:nvSpPr>
         <p:spPr>
           <a:xfrm>
-            <a:off x="8280400" y="1219200"/>
+            <a:off x="8280400" y="1577548"/>
             <a:ext cx="457200" cy="457200"/>
           </a:xfrm>
           <a:prstGeom prst="rect">
@@ -8558,7 +8516,7 @@
         </p:nvSpPr>
         <p:spPr>
           <a:xfrm>
-            <a:off x="1219200" y="1244600"/>
+            <a:off x="1219200" y="1602948"/>
             <a:ext cx="2692400" cy="508000"/>
           </a:xfrm>
           <a:prstGeom prst="rect">
@@ -8602,7 +8560,7 @@
         </p:nvSpPr>
         <p:spPr>
           <a:xfrm>
-            <a:off x="5029200" y="1244600"/>
+            <a:off x="5029200" y="1602948"/>
             <a:ext cx="2692400" cy="508000"/>
           </a:xfrm>
           <a:prstGeom prst="rect">
@@ -8646,7 +8604,7 @@
         </p:nvSpPr>
         <p:spPr>
           <a:xfrm>
-            <a:off x="8839200" y="1244600"/>
+            <a:off x="8839200" y="1602948"/>
             <a:ext cx="2692400" cy="508000"/>
           </a:xfrm>
           <a:prstGeom prst="rect">
@@ -8690,7 +8648,7 @@
         </p:nvSpPr>
         <p:spPr>
           <a:xfrm>
-            <a:off x="660400" y="1854200"/>
+            <a:off x="660400" y="2212548"/>
             <a:ext cx="3251200" cy="25400"/>
           </a:xfrm>
           <a:prstGeom prst="rect">
@@ -8719,7 +8677,7 @@
         </p:nvSpPr>
         <p:spPr>
           <a:xfrm>
-            <a:off x="4470400" y="1854200"/>
+            <a:off x="4470400" y="2212548"/>
             <a:ext cx="3251200" cy="25400"/>
           </a:xfrm>
           <a:prstGeom prst="rect">
@@ -8748,7 +8706,7 @@
         </p:nvSpPr>
         <p:spPr>
           <a:xfrm>
-            <a:off x="8280400" y="1854200"/>
+            <a:off x="8280400" y="2212548"/>
             <a:ext cx="3251200" cy="25400"/>
           </a:xfrm>
           <a:prstGeom prst="rect">
@@ -8777,7 +8735,7 @@
         </p:nvSpPr>
         <p:spPr>
           <a:xfrm>
-            <a:off x="660400" y="1951180"/>
+            <a:off x="660400" y="2309528"/>
             <a:ext cx="3403600" cy="2362200"/>
           </a:xfrm>
           <a:prstGeom prst="rect">
@@ -8891,7 +8849,7 @@
         </p:nvSpPr>
         <p:spPr>
           <a:xfrm>
-            <a:off x="4470400" y="1951180"/>
+            <a:off x="4470400" y="2309528"/>
             <a:ext cx="3251200" cy="2362200"/>
           </a:xfrm>
           <a:prstGeom prst="rect">
@@ -9005,7 +8963,7 @@
         </p:nvSpPr>
         <p:spPr>
           <a:xfrm>
-            <a:off x="8280400" y="1951180"/>
+            <a:off x="8280400" y="2309528"/>
             <a:ext cx="3251200" cy="2362200"/>
           </a:xfrm>
           <a:prstGeom prst="rect">
@@ -9087,24 +9045,46 @@
         </p:nvSpPr>
         <p:spPr>
           <a:xfrm>
-            <a:off x="457200" y="5029200"/>
-            <a:ext cx="11277600" cy="1320800"/>
+            <a:off x="457200" y="5689600"/>
+            <a:ext cx="11277600" cy="660400"/>
           </a:xfrm>
           <a:prstGeom prst="roundRect">
             <a:avLst/>
           </a:prstGeom>
           <a:solidFill>
-            <a:srgbClr val="F7F3E8"/>
+            <a:srgbClr val="FFF6EA"/>
           </a:solidFill>
-          <a:ln>
-            <a:noFill/>
+          <a:ln w="12700">
+            <a:solidFill>
+              <a:srgbClr val="E7C894"/>
+            </a:solidFill>
           </a:ln>
-        </p:spPr>
-        <p:txBody>
-          <a:bodyPr/>
-          <a:lstStyle/>
-          <a:p>
-            <a:endParaRPr lang="en-US"/>
+          <a:effectLst/>
+        </p:spPr>
+        <p:style>
+          <a:lnRef idx="1">
+            <a:schemeClr val="accent1"/>
+          </a:lnRef>
+          <a:fillRef idx="3">
+            <a:schemeClr val="accent1"/>
+          </a:fillRef>
+          <a:effectRef idx="2">
+            <a:schemeClr val="accent1"/>
+          </a:effectRef>
+          <a:fontRef idx="minor">
+            <a:schemeClr val="lt1"/>
+          </a:fontRef>
+        </p:style>
+        <p:txBody>
+          <a:bodyPr rtlCol="0" anchor="ctr"/>
+          <a:lstStyle/>
+          <a:p>
+            <a:endParaRPr lang="en-US" sz="2400">
+              <a:solidFill>
+                <a:schemeClr val="lt1"/>
+              </a:solidFill>
+              <a:latin typeface="Avenir Next" panose="020B0503020202020204" pitchFamily="34" charset="0"/>
+            </a:endParaRPr>
           </a:p>
         </p:txBody>
       </p:sp>
@@ -9116,8 +9096,8 @@
         </p:nvSpPr>
         <p:spPr>
           <a:xfrm>
-            <a:off x="660400" y="5181600"/>
-            <a:ext cx="10871200" cy="914400"/>
+            <a:off x="660400" y="5799441"/>
+            <a:ext cx="10871200" cy="457200"/>
           </a:xfrm>
           <a:prstGeom prst="rect">
             <a:avLst/>
@@ -9135,28 +9115,7 @@
                   <a:srgbClr val="173F35"/>
                 </a:solidFill>
               </a:rPr>
-              <a:t>Research Question 4: What duties of directors, disclosure obligations and assurance requirements, under Indian company and securities law, can ground liability for misleading environmental claims?</a:t>
-            </a:r>
-          </a:p>
-          <a:p>
-            <a:pPr algn="l"/>
-            <a:endParaRPr lang="en-US" sz="500" b="1" dirty="0">
-              <a:solidFill>
-                <a:srgbClr val="173F35"/>
-              </a:solidFill>
-            </a:endParaRPr>
-          </a:p>
-          <a:p>
-            <a:pPr algn="l"/>
-            <a:r>
-              <a:rPr lang="en-US" sz="1400" dirty="0">
-                <a:solidFill>
-                  <a:srgbClr val="2A2A2A"/>
-                </a:solidFill>
-                <a:latin typeface="Calibri"/>
-                <a:cs typeface="Calibri"/>
-              </a:rPr>
-              <a:t>Answer to RQ4: Duties already exist in Section 166(2) and SEBI rules. What is missing is the trigger, open legal standing, meaningful penalties, and an automatic bridge between regulators.</a:t>
+              <a:t>Answers Research Question 4: What duties of directors, disclosure obligations and assurance requirements, under Indian company and securities law, can ground liability for misleading environmental claims?</a:t>
             </a:r>
           </a:p>
         </p:txBody>
@@ -10291,19 +10250,70 @@
       </p:sp>
       <p:sp>
         <p:nvSpPr>
-          <p:cNvPr id="25" name="Rounded Rectangle 24"/>
+          <p:cNvPr id="2" name="TextBox 1">
+            <a:extLst>
+              <a:ext uri="{FF2B5EF4-FFF2-40B4-BE49-F238E27FC236}">
+                <a16:creationId xmlns:a16="http://schemas.microsoft.com/office/drawing/2014/main" id="{DE3DB7FA-663C-7695-9E18-0CC77EDD8972}"/>
+              </a:ext>
+            </a:extLst>
+          </p:cNvPr>
+          <p:cNvSpPr txBox="1"/>
+          <p:nvPr/>
+        </p:nvSpPr>
+        <p:spPr>
+          <a:xfrm>
+            <a:off x="822960" y="6651506"/>
+            <a:ext cx="4000000" cy="215444"/>
+          </a:xfrm>
+          <a:prstGeom prst="rect">
+            <a:avLst/>
+          </a:prstGeom>
+          <a:noFill/>
+        </p:spPr>
+        <p:txBody>
+          <a:bodyPr wrap="square" lIns="45720" tIns="22860" rIns="45720" bIns="22860" anchor="t">
+            <a:spAutoFit/>
+          </a:bodyPr>
+          <a:lstStyle/>
+          <a:p>
+            <a:pPr algn="l"/>
+            <a:r>
+              <a:rPr sz="1100" b="0" i="0" dirty="0">
+                <a:latin typeface="Avenir Next" panose="020B0503020202020204" pitchFamily="34" charset="0"/>
+              </a:rPr>
+              <a:t>Source base: Chapte</a:t>
+            </a:r>
+            <a:r>
+              <a:rPr lang="en-US" sz="1100" b="0" i="0" dirty="0">
+                <a:latin typeface="Avenir Next" panose="020B0503020202020204" pitchFamily="34" charset="0"/>
+              </a:rPr>
+              <a:t>r 5.</a:t>
+            </a:r>
+            <a:endParaRPr sz="1100" b="0" i="0" dirty="0">
+              <a:latin typeface="Avenir Next" panose="020B0503020202020204" pitchFamily="34" charset="0"/>
+            </a:endParaRPr>
+          </a:p>
+        </p:txBody>
+      </p:sp>
+      <p:sp>
+        <p:nvSpPr>
+          <p:cNvPr id="5" name="Answer bar">
+            <a:extLst>
+              <a:ext uri="{FF2B5EF4-FFF2-40B4-BE49-F238E27FC236}">
+                <a16:creationId xmlns:a16="http://schemas.microsoft.com/office/drawing/2014/main" id="{D1033B60-B52B-281A-5CB1-3FC4571723FE}"/>
+              </a:ext>
+            </a:extLst>
+          </p:cNvPr>
           <p:cNvSpPr/>
           <p:nvPr/>
         </p:nvSpPr>
         <p:spPr>
           <a:xfrm>
-            <a:off x="799190" y="6095425"/>
-            <a:ext cx="10587831" cy="497225"/>
+            <a:off x="568413" y="6010878"/>
+            <a:ext cx="11277600" cy="660400"/>
           </a:xfrm>
           <a:prstGeom prst="roundRect">
-            <a:avLst>
-              <a:gd name="adj" fmla="val 14000"/>
-            </a:avLst>
+            <a:avLst/>
           </a:prstGeom>
           <a:solidFill>
             <a:srgbClr val="FFF6EA"/>
@@ -10333,7 +10343,10 @@
           <a:bodyPr rtlCol="0" anchor="ctr"/>
           <a:lstStyle/>
           <a:p>
-            <a:endParaRPr sz="2800">
+            <a:endParaRPr lang="en-US" sz="2400">
+              <a:solidFill>
+                <a:schemeClr val="lt1"/>
+              </a:solidFill>
               <a:latin typeface="Avenir Next" panose="020B0503020202020204" pitchFamily="34" charset="0"/>
             </a:endParaRPr>
           </a:p>
@@ -10341,48 +10354,10 @@
       </p:sp>
       <p:sp>
         <p:nvSpPr>
-          <p:cNvPr id="26" name="TextBox 25"/>
-          <p:cNvSpPr txBox="1"/>
-          <p:nvPr/>
-        </p:nvSpPr>
-        <p:spPr>
-          <a:xfrm>
-            <a:off x="929190" y="6107918"/>
-            <a:ext cx="10327831" cy="477054"/>
-          </a:xfrm>
-          <a:prstGeom prst="rect">
-            <a:avLst/>
-          </a:prstGeom>
-          <a:noFill/>
-        </p:spPr>
-        <p:txBody>
-          <a:bodyPr wrap="square" lIns="45720" tIns="22860" rIns="45720" bIns="22860" anchor="ctr">
-            <a:spAutoFit/>
-          </a:bodyPr>
-          <a:lstStyle/>
-          <a:p>
-            <a:pPr algn="ctr">
-              <a:defRPr sz="1050">
-                <a:solidFill>
-                  <a:srgbClr val="282828"/>
-                </a:solidFill>
-              </a:defRPr>
-            </a:pPr>
-            <a:r>
-              <a:rPr sz="1400" dirty="0">
-                <a:latin typeface="Avenir Next" panose="020B0503020202020204" pitchFamily="34" charset="0"/>
-              </a:rPr>
-              <a:t>Answer to RQ4: Mandatory disclosure rules exist, but recent rollbacks have softened assurance and deferred supply-chain reporting, allowing greenwashing to persist.</a:t>
-            </a:r>
-          </a:p>
-        </p:txBody>
-      </p:sp>
-      <p:sp>
-        <p:nvSpPr>
-          <p:cNvPr id="2" name="TextBox 1">
+          <p:cNvPr id="21" name="Answer">
             <a:extLst>
               <a:ext uri="{FF2B5EF4-FFF2-40B4-BE49-F238E27FC236}">
-                <a16:creationId xmlns:a16="http://schemas.microsoft.com/office/drawing/2014/main" id="{DE3DB7FA-663C-7695-9E18-0CC77EDD8972}"/>
+                <a16:creationId xmlns:a16="http://schemas.microsoft.com/office/drawing/2014/main" id="{57C6C143-8251-AA30-5511-720353997CC2}"/>
               </a:ext>
             </a:extLst>
           </p:cNvPr>
@@ -10391,36 +10366,27 @@
         </p:nvSpPr>
         <p:spPr>
           <a:xfrm>
-            <a:off x="822960" y="6651506"/>
-            <a:ext cx="4000000" cy="215444"/>
+            <a:off x="771613" y="6120719"/>
+            <a:ext cx="10871200" cy="457200"/>
           </a:xfrm>
           <a:prstGeom prst="rect">
             <a:avLst/>
           </a:prstGeom>
-          <a:noFill/>
-        </p:spPr>
-        <p:txBody>
-          <a:bodyPr wrap="square" lIns="45720" tIns="22860" rIns="45720" bIns="22860" anchor="t">
-            <a:spAutoFit/>
+        </p:spPr>
+        <p:txBody>
+          <a:bodyPr wrap="square" rtlCol="0" anchor="ctr">
+            <a:noAutofit/>
           </a:bodyPr>
           <a:lstStyle/>
           <a:p>
-            <a:pPr algn="l"/>
-            <a:r>
-              <a:rPr sz="1100" b="0" i="0" dirty="0">
-                <a:latin typeface="Avenir Next" panose="020B0503020202020204" pitchFamily="34" charset="0"/>
-              </a:rPr>
-              <a:t>Source base: Chapte</a:t>
-            </a:r>
-            <a:r>
-              <a:rPr lang="en-US" sz="1100" b="0" i="0" dirty="0">
-                <a:latin typeface="Avenir Next" panose="020B0503020202020204" pitchFamily="34" charset="0"/>
-              </a:rPr>
-              <a:t>r 5.</a:t>
-            </a:r>
-            <a:endParaRPr sz="1100" b="0" i="0" dirty="0">
-              <a:latin typeface="Avenir Next" panose="020B0503020202020204" pitchFamily="34" charset="0"/>
-            </a:endParaRPr>
+            <a:r>
+              <a:rPr lang="en-IN" sz="1400" b="1" dirty="0">
+                <a:solidFill>
+                  <a:srgbClr val="173F35"/>
+                </a:solidFill>
+              </a:rPr>
+              <a:t>Answers Research Question 4: What duties of directors, disclosure obligations and assurance requirements, under Indian company and securities law, can ground liability for misleading environmental claims?</a:t>
+            </a:r>
           </a:p>
         </p:txBody>
       </p:sp>
@@ -11996,7 +11962,7 @@
         </p:nvSpPr>
         <p:spPr>
           <a:xfrm>
-            <a:off x="608357" y="450000"/>
+            <a:off x="546572" y="499428"/>
             <a:ext cx="11200000" cy="523220"/>
           </a:xfrm>
           <a:prstGeom prst="rect">
@@ -12043,13 +12009,13 @@
           <p:nvPr>
             <p:extLst>
               <p:ext uri="{D42A27DB-BD31-4B8C-83A1-F6EECF244321}">
-                <p14:modId xmlns:p14="http://schemas.microsoft.com/office/powerpoint/2010/main" val="4208208374"/>
+                <p14:modId xmlns:p14="http://schemas.microsoft.com/office/powerpoint/2010/main" val="90132168"/>
               </p:ext>
             </p:extLst>
           </p:nvPr>
         </p:nvGraphicFramePr>
         <p:xfrm>
-          <a:off x="627999" y="1193128"/>
+          <a:off x="627999" y="1600906"/>
           <a:ext cx="10835640" cy="3611880"/>
         </p:xfrm>
         <a:graphic>
@@ -12101,17 +12067,19 @@
                     <a:bodyPr/>
                     <a:lstStyle/>
                     <a:p>
+                      <a:pPr algn="ctr"/>
                       <a:r>
                         <a:rPr sz="1600" b="1" dirty="0">
                           <a:solidFill>
                             <a:srgbClr val="FFFFFF"/>
                           </a:solidFill>
+                          <a:latin typeface="Avenir Next" panose="020B0503020202020204" pitchFamily="34" charset="0"/>
                         </a:rPr>
                         <a:t>Design Element</a:t>
                       </a:r>
                     </a:p>
                   </a:txBody>
-                  <a:tcPr>
+                  <a:tcPr anchor="ctr">
                     <a:solidFill>
                       <a:srgbClr val="173F35"/>
                     </a:solidFill>
@@ -12122,17 +12090,19 @@
                     <a:bodyPr/>
                     <a:lstStyle/>
                     <a:p>
+                      <a:pPr algn="ctr"/>
                       <a:r>
-                        <a:rPr sz="1600" b="1">
+                        <a:rPr sz="1600" b="1" dirty="0">
                           <a:solidFill>
                             <a:srgbClr val="FFFFFF"/>
                           </a:solidFill>
+                          <a:latin typeface="Avenir Next" panose="020B0503020202020204" pitchFamily="34" charset="0"/>
                         </a:rPr>
                         <a:t>European Union</a:t>
                       </a:r>
                     </a:p>
                   </a:txBody>
-                  <a:tcPr>
+                  <a:tcPr anchor="ctr">
                     <a:solidFill>
                       <a:srgbClr val="173F35"/>
                     </a:solidFill>
@@ -12143,17 +12113,19 @@
                     <a:bodyPr/>
                     <a:lstStyle/>
                     <a:p>
+                      <a:pPr algn="ctr"/>
                       <a:r>
-                        <a:rPr sz="1600" b="1">
+                        <a:rPr sz="1600" b="1" dirty="0">
                           <a:solidFill>
                             <a:srgbClr val="FFFFFF"/>
                           </a:solidFill>
+                          <a:latin typeface="Avenir Next" panose="020B0503020202020204" pitchFamily="34" charset="0"/>
                         </a:rPr>
                         <a:t>United Kingdom</a:t>
                       </a:r>
                     </a:p>
                   </a:txBody>
-                  <a:tcPr>
+                  <a:tcPr anchor="ctr">
                     <a:solidFill>
                       <a:srgbClr val="173F35"/>
                     </a:solidFill>
@@ -12164,17 +12136,19 @@
                     <a:bodyPr/>
                     <a:lstStyle/>
                     <a:p>
+                      <a:pPr algn="ctr"/>
                       <a:r>
-                        <a:rPr sz="1600" b="1">
+                        <a:rPr sz="1600" b="1" dirty="0">
                           <a:solidFill>
                             <a:srgbClr val="FFFFFF"/>
                           </a:solidFill>
+                          <a:latin typeface="Avenir Next" panose="020B0503020202020204" pitchFamily="34" charset="0"/>
                         </a:rPr>
                         <a:t>Australia</a:t>
                       </a:r>
                     </a:p>
                   </a:txBody>
-                  <a:tcPr>
+                  <a:tcPr anchor="ctr">
                     <a:solidFill>
                       <a:srgbClr val="173F35"/>
                     </a:solidFill>
@@ -12185,17 +12159,19 @@
                     <a:bodyPr/>
                     <a:lstStyle/>
                     <a:p>
+                      <a:pPr algn="ctr"/>
                       <a:r>
-                        <a:rPr sz="1600" b="1">
+                        <a:rPr sz="1600" b="1" dirty="0">
                           <a:solidFill>
                             <a:srgbClr val="FFFFFF"/>
                           </a:solidFill>
+                          <a:latin typeface="Avenir Next" panose="020B0503020202020204" pitchFamily="34" charset="0"/>
                         </a:rPr>
                         <a:t>India</a:t>
                       </a:r>
                     </a:p>
                   </a:txBody>
-                  <a:tcPr>
+                  <a:tcPr anchor="ctr">
                     <a:solidFill>
                       <a:srgbClr val="173F35"/>
                     </a:solidFill>
@@ -12214,7 +12190,7 @@
                     <a:lstStyle/>
                     <a:p>
                       <a:r>
-                        <a:rPr sz="1400" b="1"/>
+                        <a:rPr sz="1600" b="0" dirty="0"/>
                         <a:t>Board Accountability</a:t>
                       </a:r>
                     </a:p>
@@ -12231,7 +12207,7 @@
                     <a:lstStyle/>
                     <a:p>
                       <a:r>
-                        <a:rPr sz="1400" b="0" dirty="0"/>
+                        <a:rPr sz="1600" b="0" dirty="0"/>
                         <a:t>Strong &amp; direct</a:t>
                       </a:r>
                     </a:p>
@@ -12248,7 +12224,7 @@
                     <a:lstStyle/>
                     <a:p>
                       <a:r>
-                        <a:rPr sz="1400" b="0" dirty="0"/>
+                        <a:rPr sz="1600" b="0" dirty="0"/>
                         <a:t>Strong &amp; direct</a:t>
                       </a:r>
                     </a:p>
@@ -12265,7 +12241,7 @@
                     <a:lstStyle/>
                     <a:p>
                       <a:r>
-                        <a:rPr sz="1400" b="0"/>
+                        <a:rPr sz="1600" b="0"/>
                         <a:t>Growing &amp; active</a:t>
                       </a:r>
                     </a:p>
@@ -12282,7 +12258,7 @@
                     <a:lstStyle/>
                     <a:p>
                       <a:r>
-                        <a:rPr sz="1400" b="1">
+                        <a:rPr sz="1600" b="0" dirty="0">
                           <a:solidFill>
                             <a:srgbClr val="A8552F"/>
                           </a:solidFill>
@@ -12318,7 +12294,7 @@
                         </a:defRPr>
                       </a:pPr>
                       <a:r>
-                        <a:rPr lang="en-IN" sz="1400" dirty="0"/>
+                        <a:rPr lang="en-IN" sz="1600" b="0" dirty="0"/>
                         <a:t>Integrated architecture</a:t>
                       </a:r>
                     </a:p>
@@ -12335,7 +12311,7 @@
                     <a:lstStyle/>
                     <a:p>
                       <a:r>
-                        <a:rPr sz="1400" b="0"/>
+                        <a:rPr sz="1600" b="0" dirty="0"/>
                         <a:t>Integrated reporting &amp; claim rules</a:t>
                       </a:r>
                     </a:p>
@@ -12352,7 +12328,7 @@
                     <a:lstStyle/>
                     <a:p>
                       <a:r>
-                        <a:rPr sz="1400" b="0"/>
+                        <a:rPr sz="1600" b="0" dirty="0"/>
                         <a:t>FCA + CMA + Company Law</a:t>
                       </a:r>
                     </a:p>
@@ -12369,7 +12345,7 @@
                     <a:lstStyle/>
                     <a:p>
                       <a:r>
-                        <a:rPr sz="1400" b="0" dirty="0"/>
+                        <a:rPr sz="1600" b="0" dirty="0"/>
                         <a:t>Active inter-agency teamwork</a:t>
                       </a:r>
                     </a:p>
@@ -12386,7 +12362,7 @@
                     <a:lstStyle/>
                     <a:p>
                       <a:r>
-                        <a:rPr sz="1400" b="1" dirty="0">
+                        <a:rPr sz="1600" b="0" dirty="0">
                           <a:solidFill>
                             <a:srgbClr val="A8552F"/>
                           </a:solidFill>
@@ -12394,7 +12370,7 @@
                         <a:t>MCA, SEBI &amp; CCPA</a:t>
                       </a:r>
                       <a:r>
-                        <a:rPr lang="en-US" sz="1400" b="1" dirty="0">
+                        <a:rPr lang="en-US" sz="1600" b="0" dirty="0">
                           <a:solidFill>
                             <a:srgbClr val="A8552F"/>
                           </a:solidFill>
@@ -12402,7 +12378,7 @@
                         <a:t> working</a:t>
                       </a:r>
                       <a:r>
-                        <a:rPr sz="1400" b="1" dirty="0">
+                        <a:rPr sz="1600" b="0" dirty="0">
                           <a:solidFill>
                             <a:srgbClr val="A8552F"/>
                           </a:solidFill>
@@ -12430,7 +12406,7 @@
                     <a:lstStyle/>
                     <a:p>
                       <a:r>
-                        <a:rPr sz="1400" b="1"/>
+                        <a:rPr sz="1600" b="0"/>
                         <a:t>Third-Party Audits</a:t>
                       </a:r>
                     </a:p>
@@ -12447,7 +12423,7 @@
                     <a:lstStyle/>
                     <a:p>
                       <a:r>
-                        <a:rPr sz="1400" b="0"/>
+                        <a:rPr sz="1600" b="0"/>
                         <a:t>Phased move to strict audits</a:t>
                       </a:r>
                     </a:p>
@@ -12464,7 +12440,7 @@
                     <a:lstStyle/>
                     <a:p>
                       <a:r>
-                        <a:rPr sz="1400" b="0"/>
+                        <a:rPr sz="1600" b="0" dirty="0"/>
                         <a:t>Expanding requirements</a:t>
                       </a:r>
                     </a:p>
@@ -12481,7 +12457,7 @@
                     <a:lstStyle/>
                     <a:p>
                       <a:r>
-                        <a:rPr sz="1400" b="0" dirty="0"/>
+                        <a:rPr sz="1600" b="0" dirty="0"/>
                         <a:t>Moving to mandatory audits</a:t>
                       </a:r>
                     </a:p>
@@ -12498,7 +12474,7 @@
                     <a:lstStyle/>
                     <a:p>
                       <a:r>
-                        <a:rPr sz="1400" b="1">
+                        <a:rPr sz="1600" b="0">
                           <a:solidFill>
                             <a:srgbClr val="A8552F"/>
                           </a:solidFill>
@@ -12526,7 +12502,7 @@
                     <a:lstStyle/>
                     <a:p>
                       <a:r>
-                        <a:rPr sz="1400" b="1"/>
+                        <a:rPr sz="1600" b="0"/>
                         <a:t>Future Claims &amp; Offsets</a:t>
                       </a:r>
                     </a:p>
@@ -12543,7 +12519,7 @@
                     <a:lstStyle/>
                     <a:p>
                       <a:r>
-                        <a:rPr sz="1400" b="0"/>
+                        <a:rPr sz="1600" b="0"/>
                         <a:t>Strict limits on offset claims</a:t>
                       </a:r>
                     </a:p>
@@ -12560,7 +12536,7 @@
                     <a:lstStyle/>
                     <a:p>
                       <a:r>
-                        <a:rPr sz="1400" b="0"/>
+                        <a:rPr sz="1600" b="0"/>
                         <a:t>Subject to regulatory checks</a:t>
                       </a:r>
                     </a:p>
@@ -12577,7 +12553,7 @@
                     <a:lstStyle/>
                     <a:p>
                       <a:r>
-                        <a:rPr sz="1400" b="0"/>
+                        <a:rPr sz="1600" b="0" dirty="0"/>
                         <a:t>Actively policed under law</a:t>
                       </a:r>
                     </a:p>
@@ -12594,7 +12570,7 @@
                     <a:lstStyle/>
                     <a:p>
                       <a:r>
-                        <a:rPr sz="1400" b="1" dirty="0">
+                        <a:rPr sz="1600" b="0" dirty="0">
                           <a:solidFill>
                             <a:srgbClr val="A8552F"/>
                           </a:solidFill>
@@ -12630,7 +12606,7 @@
                         </a:defRPr>
                       </a:pPr>
                       <a:r>
-                        <a:rPr lang="en-IN" sz="1400" dirty="0"/>
+                        <a:rPr lang="en-IN" sz="1600" b="0" dirty="0"/>
                         <a:t>Proportionate penalties</a:t>
                       </a:r>
                     </a:p>
@@ -12647,7 +12623,7 @@
                     <a:lstStyle/>
                     <a:p>
                       <a:r>
-                        <a:rPr sz="1400" b="0"/>
+                        <a:rPr sz="1600" b="0"/>
                         <a:t>Linked to company turnover</a:t>
                       </a:r>
                     </a:p>
@@ -12664,7 +12640,7 @@
                     <a:lstStyle/>
                     <a:p>
                       <a:r>
-                        <a:rPr sz="1400" b="0"/>
+                        <a:rPr sz="1600" b="0"/>
                         <a:t>Up to 10% global turnover</a:t>
                       </a:r>
                     </a:p>
@@ -12681,7 +12657,7 @@
                     <a:lstStyle/>
                     <a:p>
                       <a:r>
-                        <a:rPr sz="1400" b="0"/>
+                        <a:rPr sz="1600" b="0"/>
                         <a:t>High civil penalty exposure</a:t>
                       </a:r>
                     </a:p>
@@ -12698,7 +12674,7 @@
                     <a:lstStyle/>
                     <a:p>
                       <a:r>
-                        <a:rPr sz="1400" b="1" dirty="0">
+                        <a:rPr sz="1600" b="0" dirty="0">
                           <a:solidFill>
                             <a:srgbClr val="A8552F"/>
                           </a:solidFill>
@@ -12706,14 +12682,14 @@
                         <a:t>Low fixed cap </a:t>
                       </a:r>
                       <a:r>
-                        <a:rPr lang="en-US" sz="1400" b="1" dirty="0">
+                        <a:rPr lang="en-US" sz="1600" b="0" dirty="0">
                           <a:solidFill>
                             <a:srgbClr val="A8552F"/>
                           </a:solidFill>
                         </a:rPr>
                         <a:t>penalties</a:t>
                       </a:r>
-                      <a:endParaRPr sz="1400" b="1" dirty="0">
+                      <a:endParaRPr sz="1600" b="0" dirty="0">
                         <a:solidFill>
                           <a:srgbClr val="A8552F"/>
                         </a:solidFill>
@@ -12789,8 +12765,8 @@
         </p:nvSpPr>
         <p:spPr>
           <a:xfrm>
-            <a:off x="608357" y="5015806"/>
-            <a:ext cx="10835640" cy="1384994"/>
+            <a:off x="608357" y="5836568"/>
+            <a:ext cx="10835640" cy="564232"/>
           </a:xfrm>
           <a:prstGeom prst="roundRect">
             <a:avLst>
@@ -12839,8 +12815,8 @@
         </p:nvSpPr>
         <p:spPr>
           <a:xfrm>
-            <a:off x="696928" y="5194288"/>
-            <a:ext cx="10575640" cy="1123384"/>
+            <a:off x="738357" y="5880157"/>
+            <a:ext cx="10575640" cy="477054"/>
           </a:xfrm>
           <a:prstGeom prst="rect">
             <a:avLst/>
@@ -12862,44 +12838,11 @@
             </a:pPr>
             <a:r>
               <a:rPr lang="en-IN" sz="1400" b="1" dirty="0">
-                <a:latin typeface="Avenir Next" panose="020B0503020202020204" pitchFamily="34" charset="0"/>
-              </a:rPr>
-              <a:t>Research Question 5: </a:t>
-            </a:r>
-            <a:r>
-              <a:rPr lang="en-IN" sz="1400" b="1" dirty="0">
-                <a:latin typeface="Avenir Next" panose="020B0503020202020204" pitchFamily="34" charset="0"/>
-                <a:ea typeface="+mn-lt"/>
-                <a:cs typeface="+mn-lt"/>
-              </a:rPr>
-              <a:t>What comparative regulatory models and enforcement techniques have emerged in other jurisdictions to control greenwashing, and what design lessons do they offer?</a:t>
-            </a:r>
-          </a:p>
-          <a:p>
-            <a:pPr algn="just">
-              <a:defRPr sz="1100">
-                <a:solidFill>
-                  <a:srgbClr val="282828"/>
-                </a:solidFill>
-              </a:defRPr>
-            </a:pPr>
-            <a:endParaRPr lang="en-US" sz="1400" dirty="0">
-              <a:latin typeface="Avenir Next" panose="020B0503020202020204" pitchFamily="34" charset="0"/>
-            </a:endParaRPr>
-          </a:p>
-          <a:p>
-            <a:pPr algn="just">
-              <a:defRPr sz="1100">
-                <a:solidFill>
-                  <a:srgbClr val="282828"/>
-                </a:solidFill>
-              </a:defRPr>
-            </a:pPr>
-            <a:r>
-              <a:rPr sz="1400" dirty="0">
-                <a:latin typeface="Avenir Next" panose="020B0503020202020204" pitchFamily="34" charset="0"/>
-              </a:rPr>
-              <a:t>Answer to RQ5: Effective systems demand proof before publication, require independent audits, connect their regulators with automatic referrals, and link fines to turnover so honesty is always the smart business choice.</a:t>
+                <a:solidFill>
+                  <a:srgbClr val="173F35"/>
+                </a:solidFill>
+              </a:rPr>
+              <a:t>Answers Research Question 5: What comparative regulatory models and enforcement techniques have emerged in other jurisdictions to control greenwashing, and what design lessons do they offer?</a:t>
             </a:r>
           </a:p>
         </p:txBody>
@@ -14386,7 +14329,7 @@
         <p:spPr>
           <a:xfrm>
             <a:off x="6203624" y="5185533"/>
-            <a:ext cx="5226376" cy="1042335"/>
+            <a:ext cx="5226376" cy="919659"/>
           </a:xfrm>
           <a:prstGeom prst="roundRect">
             <a:avLst/>
@@ -14636,10 +14579,66 @@
       </p:sp>
       <p:sp>
         <p:nvSpPr>
-          <p:cNvPr id="2" name="TextBox 1">
+          <p:cNvPr id="3" name="Rounded Rectangle 2">
             <a:extLst>
               <a:ext uri="{FF2B5EF4-FFF2-40B4-BE49-F238E27FC236}">
-                <a16:creationId xmlns:a16="http://schemas.microsoft.com/office/drawing/2014/main" id="{73CA1F73-E102-BBCB-2FBA-B5E42CCEA779}"/>
+                <a16:creationId xmlns:a16="http://schemas.microsoft.com/office/drawing/2014/main" id="{AC9E51D9-564A-E5A2-1816-58DF8180164B}"/>
+              </a:ext>
+            </a:extLst>
+          </p:cNvPr>
+          <p:cNvSpPr/>
+          <p:nvPr/>
+        </p:nvSpPr>
+        <p:spPr>
+          <a:xfrm>
+            <a:off x="596000" y="6219629"/>
+            <a:ext cx="10835640" cy="564232"/>
+          </a:xfrm>
+          <a:prstGeom prst="roundRect">
+            <a:avLst>
+              <a:gd name="adj" fmla="val 14000"/>
+            </a:avLst>
+          </a:prstGeom>
+          <a:solidFill>
+            <a:srgbClr val="FFF6EA"/>
+          </a:solidFill>
+          <a:ln w="12700">
+            <a:solidFill>
+              <a:srgbClr val="E7C894"/>
+            </a:solidFill>
+          </a:ln>
+          <a:effectLst/>
+        </p:spPr>
+        <p:style>
+          <a:lnRef idx="1">
+            <a:schemeClr val="accent1"/>
+          </a:lnRef>
+          <a:fillRef idx="3">
+            <a:schemeClr val="accent1"/>
+          </a:fillRef>
+          <a:effectRef idx="2">
+            <a:schemeClr val="accent1"/>
+          </a:effectRef>
+          <a:fontRef idx="minor">
+            <a:schemeClr val="lt1"/>
+          </a:fontRef>
+        </p:style>
+        <p:txBody>
+          <a:bodyPr rtlCol="0" anchor="ctr"/>
+          <a:lstStyle/>
+          <a:p>
+            <a:endParaRPr sz="2400">
+              <a:latin typeface="Avenir Next" panose="020B0503020202020204" pitchFamily="34" charset="0"/>
+            </a:endParaRPr>
+          </a:p>
+        </p:txBody>
+      </p:sp>
+      <p:sp>
+        <p:nvSpPr>
+          <p:cNvPr id="4" name="TextBox 3">
+            <a:extLst>
+              <a:ext uri="{FF2B5EF4-FFF2-40B4-BE49-F238E27FC236}">
+                <a16:creationId xmlns:a16="http://schemas.microsoft.com/office/drawing/2014/main" id="{D2EEE067-9F53-D74B-D618-5A50C0CCCA75}"/>
               </a:ext>
             </a:extLst>
           </p:cNvPr>
@@ -14648,8 +14647,8 @@
         </p:nvSpPr>
         <p:spPr>
           <a:xfrm>
-            <a:off x="462633" y="6339493"/>
-            <a:ext cx="11200000" cy="646331"/>
+            <a:off x="726000" y="6263218"/>
+            <a:ext cx="10575640" cy="477054"/>
           </a:xfrm>
           <a:prstGeom prst="rect">
             <a:avLst/>
@@ -14657,51 +14656,26 @@
           <a:noFill/>
         </p:spPr>
         <p:txBody>
-          <a:bodyPr wrap="square" lIns="45720" tIns="22860" rIns="45720" bIns="22860" anchor="t">
+          <a:bodyPr wrap="square" lIns="45720" tIns="22860" rIns="45720" bIns="22860" anchor="ctr">
             <a:spAutoFit/>
           </a:bodyPr>
           <a:lstStyle/>
           <a:p>
-            <a:r>
-              <a:rPr sz="1400" b="0" i="0" dirty="0">
-                <a:solidFill>
-                  <a:srgbClr val="6B6F6A"/>
-                </a:solidFill>
-                <a:latin typeface="Avenir Next" panose="020B0503020202020204" pitchFamily="34" charset="0"/>
-              </a:rPr>
-              <a:t>Research Question 5:</a:t>
-            </a:r>
-            <a:r>
-              <a:rPr lang="en-US" sz="1400" b="0" i="0" dirty="0">
-                <a:solidFill>
-                  <a:srgbClr val="6B6F6A"/>
-                </a:solidFill>
-                <a:latin typeface="Avenir Next" panose="020B0503020202020204" pitchFamily="34" charset="0"/>
-              </a:rPr>
-              <a:t> </a:t>
-            </a:r>
-            <a:r>
-              <a:rPr lang="en-IN" sz="1400" dirty="0">
-                <a:latin typeface="Avenir Next" panose="020B0503020202020204" pitchFamily="34" charset="0"/>
-                <a:ea typeface="+mn-lt"/>
-                <a:cs typeface="+mn-lt"/>
-              </a:rPr>
-              <a:t>What comparative regulatory models and enforcement techniques have emerged in other jurisdictions to control greenwashing, and what design lessons do they offer?</a:t>
-            </a:r>
-            <a:endParaRPr lang="en-US" sz="1400" dirty="0">
-              <a:latin typeface="Avenir Next" panose="020B0503020202020204" pitchFamily="34" charset="0"/>
-              <a:ea typeface="+mn-lt"/>
-              <a:cs typeface="+mn-lt"/>
-            </a:endParaRPr>
-          </a:p>
-          <a:p>
-            <a:pPr algn="l"/>
-            <a:endParaRPr sz="1100" b="0" i="0" dirty="0">
-              <a:solidFill>
-                <a:srgbClr val="6B6F6A"/>
-              </a:solidFill>
-              <a:latin typeface="Avenir Next"/>
-            </a:endParaRPr>
+            <a:pPr algn="just">
+              <a:defRPr sz="1100">
+                <a:solidFill>
+                  <a:srgbClr val="282828"/>
+                </a:solidFill>
+              </a:defRPr>
+            </a:pPr>
+            <a:r>
+              <a:rPr lang="en-IN" sz="1400" b="1" dirty="0">
+                <a:solidFill>
+                  <a:srgbClr val="173F35"/>
+                </a:solidFill>
+              </a:rPr>
+              <a:t>Answers Research Question 5: What comparative regulatory models and enforcement techniques have emerged in other jurisdictions to control greenwashing, and what design lessons do they offer?</a:t>
+            </a:r>
           </a:p>
         </p:txBody>
       </p:sp>
@@ -16653,14 +16627,76 @@
       </p:sp>
       <p:sp>
         <p:nvSpPr>
-          <p:cNvPr id="66" name="TextBox 65"/>
+          <p:cNvPr id="2" name="Rounded Rectangle 1">
+            <a:extLst>
+              <a:ext uri="{FF2B5EF4-FFF2-40B4-BE49-F238E27FC236}">
+                <a16:creationId xmlns:a16="http://schemas.microsoft.com/office/drawing/2014/main" id="{A3A4E187-3E83-487C-5FC5-F03E9B637FA2}"/>
+              </a:ext>
+            </a:extLst>
+          </p:cNvPr>
+          <p:cNvSpPr/>
+          <p:nvPr/>
+        </p:nvSpPr>
+        <p:spPr>
+          <a:xfrm>
+            <a:off x="608357" y="6120776"/>
+            <a:ext cx="10835640" cy="564232"/>
+          </a:xfrm>
+          <a:prstGeom prst="roundRect">
+            <a:avLst>
+              <a:gd name="adj" fmla="val 14000"/>
+            </a:avLst>
+          </a:prstGeom>
+          <a:solidFill>
+            <a:srgbClr val="FFF6EA"/>
+          </a:solidFill>
+          <a:ln w="12700">
+            <a:solidFill>
+              <a:srgbClr val="E7C894"/>
+            </a:solidFill>
+          </a:ln>
+          <a:effectLst/>
+        </p:spPr>
+        <p:style>
+          <a:lnRef idx="1">
+            <a:schemeClr val="accent1"/>
+          </a:lnRef>
+          <a:fillRef idx="3">
+            <a:schemeClr val="accent1"/>
+          </a:fillRef>
+          <a:effectRef idx="2">
+            <a:schemeClr val="accent1"/>
+          </a:effectRef>
+          <a:fontRef idx="minor">
+            <a:schemeClr val="lt1"/>
+          </a:fontRef>
+        </p:style>
+        <p:txBody>
+          <a:bodyPr rtlCol="0" anchor="ctr"/>
+          <a:lstStyle/>
+          <a:p>
+            <a:endParaRPr sz="2400">
+              <a:latin typeface="Avenir Next" panose="020B0503020202020204" pitchFamily="34" charset="0"/>
+            </a:endParaRPr>
+          </a:p>
+        </p:txBody>
+      </p:sp>
+      <p:sp>
+        <p:nvSpPr>
+          <p:cNvPr id="5" name="TextBox 4">
+            <a:extLst>
+              <a:ext uri="{FF2B5EF4-FFF2-40B4-BE49-F238E27FC236}">
+                <a16:creationId xmlns:a16="http://schemas.microsoft.com/office/drawing/2014/main" id="{2F9F7C7F-7F5C-2E52-3FC6-EE9A6154ED19}"/>
+              </a:ext>
+            </a:extLst>
+          </p:cNvPr>
           <p:cNvSpPr txBox="1"/>
           <p:nvPr/>
         </p:nvSpPr>
         <p:spPr>
           <a:xfrm>
-            <a:off x="568904" y="6366652"/>
-            <a:ext cx="11400000" cy="477054"/>
+            <a:off x="738357" y="6164365"/>
+            <a:ext cx="10575640" cy="477054"/>
           </a:xfrm>
           <a:prstGeom prst="rect">
             <a:avLst/>
@@ -16668,33 +16704,26 @@
           <a:noFill/>
         </p:spPr>
         <p:txBody>
-          <a:bodyPr wrap="square" lIns="45720" tIns="22860" rIns="45720" bIns="22860" anchor="t">
+          <a:bodyPr wrap="square" lIns="45720" tIns="22860" rIns="45720" bIns="22860" anchor="ctr">
             <a:spAutoFit/>
           </a:bodyPr>
           <a:lstStyle/>
           <a:p>
-            <a:r>
-              <a:rPr sz="1400" i="0" dirty="0">
-                <a:solidFill>
-                  <a:srgbClr val="6B6F6A"/>
-                </a:solidFill>
-                <a:latin typeface="Avenir Next" panose="020B0503020202020204" pitchFamily="34" charset="0"/>
-              </a:rPr>
-              <a:t>Research Question 6: </a:t>
-            </a:r>
-            <a:r>
-              <a:rPr lang="en-IN" sz="1400" dirty="0">
-                <a:latin typeface="Avenir Next" panose="020B0503020202020204" pitchFamily="34" charset="0"/>
-                <a:ea typeface="+mn-lt"/>
-                <a:cs typeface="+mn-lt"/>
-              </a:rPr>
-              <a:t>How do fragmentation, overlap, weak coordination, and limited enforcement in India's regulatory ecosystem, impede accountability for greenwashing?</a:t>
-            </a:r>
-            <a:endParaRPr lang="en-US" sz="1400" dirty="0">
-              <a:latin typeface="Avenir Next" panose="020B0503020202020204" pitchFamily="34" charset="0"/>
-              <a:ea typeface="+mn-lt"/>
-              <a:cs typeface="+mn-lt"/>
-            </a:endParaRPr>
+            <a:pPr algn="just">
+              <a:defRPr sz="1100">
+                <a:solidFill>
+                  <a:srgbClr val="282828"/>
+                </a:solidFill>
+              </a:defRPr>
+            </a:pPr>
+            <a:r>
+              <a:rPr lang="en-IN" sz="1400" b="1" dirty="0">
+                <a:solidFill>
+                  <a:srgbClr val="173F35"/>
+                </a:solidFill>
+              </a:rPr>
+              <a:t>Answers Research Question 6: How do fragmentation, overlap, weak coordination, and limited enforcement in India's regulatory ecosystem, impede accountability for greenwashing?</a:t>
+            </a:r>
           </a:p>
         </p:txBody>
       </p:sp>
@@ -20669,10 +20698,10 @@
       </p:sp>
       <p:sp>
         <p:nvSpPr>
-          <p:cNvPr id="29" name="Rounded Rectangle 28">
+          <p:cNvPr id="2" name="Rounded Rectangle 1">
             <a:extLst>
               <a:ext uri="{FF2B5EF4-FFF2-40B4-BE49-F238E27FC236}">
-                <a16:creationId xmlns:a16="http://schemas.microsoft.com/office/drawing/2014/main" id="{26F3CA9D-8EC4-C356-F7AF-706559F73CDC}"/>
+                <a16:creationId xmlns:a16="http://schemas.microsoft.com/office/drawing/2014/main" id="{FBD67D51-3F39-14D2-2C48-0863C65689EA}"/>
               </a:ext>
             </a:extLst>
           </p:cNvPr>
@@ -20681,8 +20710,8 @@
         </p:nvSpPr>
         <p:spPr>
           <a:xfrm>
-            <a:off x="611037" y="5570319"/>
-            <a:ext cx="10735056" cy="862905"/>
+            <a:off x="620714" y="5984853"/>
+            <a:ext cx="10835640" cy="564232"/>
           </a:xfrm>
           <a:prstGeom prst="roundRect">
             <a:avLst>
@@ -20725,14 +20754,20 @@
       </p:sp>
       <p:sp>
         <p:nvSpPr>
-          <p:cNvPr id="5" name="TextBox 4"/>
+          <p:cNvPr id="26" name="TextBox 25">
+            <a:extLst>
+              <a:ext uri="{FF2B5EF4-FFF2-40B4-BE49-F238E27FC236}">
+                <a16:creationId xmlns:a16="http://schemas.microsoft.com/office/drawing/2014/main" id="{8089D9FA-8EE8-EC8F-BD84-3F5E80F48418}"/>
+              </a:ext>
+            </a:extLst>
+          </p:cNvPr>
           <p:cNvSpPr txBox="1"/>
           <p:nvPr/>
         </p:nvSpPr>
         <p:spPr>
           <a:xfrm>
-            <a:off x="734355" y="5702107"/>
-            <a:ext cx="10405998" cy="692497"/>
+            <a:off x="750714" y="6028442"/>
+            <a:ext cx="10575640" cy="477054"/>
           </a:xfrm>
           <a:prstGeom prst="rect">
             <a:avLst/>
@@ -20740,48 +20775,30 @@
           <a:noFill/>
         </p:spPr>
         <p:txBody>
-          <a:bodyPr wrap="square">
+          <a:bodyPr wrap="square" lIns="45720" tIns="22860" rIns="45720" bIns="22860" anchor="ctr">
             <a:spAutoFit/>
           </a:bodyPr>
           <a:lstStyle/>
           <a:p>
-            <a:pPr>
-              <a:defRPr sz="1200">
-                <a:solidFill>
-                  <a:srgbClr val="6B6F6A"/>
-                </a:solidFill>
-                <a:latin typeface="Avenir Next"/>
-              </a:defRPr>
-            </a:pPr>
-            <a:r>
-              <a:rPr sz="1400" b="0" dirty="0">
-                <a:latin typeface="Avenir Next"/>
-              </a:rPr>
-              <a:t>Research Question 7 (part 1): </a:t>
-            </a:r>
-            <a:r>
-              <a:rPr lang="en-IN" sz="1400" dirty="0">
-                <a:ea typeface="+mn-lt"/>
-                <a:cs typeface="+mn-lt"/>
-              </a:rPr>
-              <a:t>What legal and policy recommendations can create an integrated liability framework that holds corporations accountable for misleading environmental claims?</a:t>
-            </a:r>
-            <a:endParaRPr lang="en-US" sz="1400" dirty="0">
-              <a:ea typeface="+mn-lt"/>
-              <a:cs typeface="+mn-lt"/>
-            </a:endParaRPr>
-          </a:p>
-          <a:p>
-            <a:pPr>
-              <a:defRPr sz="1200">
-                <a:solidFill>
-                  <a:srgbClr val="6B6F6A"/>
-                </a:solidFill>
-                <a:latin typeface="Avenir Next"/>
-              </a:defRPr>
-            </a:pPr>
-            <a:endParaRPr sz="1100" b="0" dirty="0">
-              <a:latin typeface="Avenir Next"/>
+            <a:pPr algn="just">
+              <a:defRPr sz="1100">
+                <a:solidFill>
+                  <a:srgbClr val="282828"/>
+                </a:solidFill>
+              </a:defRPr>
+            </a:pPr>
+            <a:r>
+              <a:rPr lang="en-IN" sz="1400" b="1" dirty="0">
+                <a:solidFill>
+                  <a:srgbClr val="173F35"/>
+                </a:solidFill>
+              </a:rPr>
+              <a:t>Answers Research Question 7: What legal and policy recommendations can create an integrated liability framework that holds corporations accountable for misleading environmental claims?</a:t>
+            </a:r>
+            <a:endParaRPr lang="en-US" sz="1400" b="1" dirty="0">
+              <a:solidFill>
+                <a:srgbClr val="173F35"/>
+              </a:solidFill>
             </a:endParaRPr>
           </a:p>
         </p:txBody>
@@ -20922,7 +20939,7 @@
         </p:nvSpPr>
         <p:spPr>
           <a:xfrm>
-            <a:off x="731520" y="1096247"/>
+            <a:off x="652690" y="1474623"/>
             <a:ext cx="3547872" cy="4023360"/>
           </a:xfrm>
           <a:prstGeom prst="roundRect">
@@ -20970,7 +20987,7 @@
         </p:nvSpPr>
         <p:spPr>
           <a:xfrm>
-            <a:off x="731520" y="1096247"/>
+            <a:off x="652690" y="1474623"/>
             <a:ext cx="3547872" cy="73152"/>
           </a:xfrm>
           <a:prstGeom prst="rect">
@@ -21016,7 +21033,7 @@
         </p:nvSpPr>
         <p:spPr>
           <a:xfrm>
-            <a:off x="877824" y="1281413"/>
+            <a:off x="798994" y="1659789"/>
             <a:ext cx="3255264" cy="338554"/>
           </a:xfrm>
           <a:prstGeom prst="rect">
@@ -21055,7 +21072,7 @@
         </p:nvSpPr>
         <p:spPr>
           <a:xfrm>
-            <a:off x="841248" y="1791191"/>
+            <a:off x="762418" y="2169567"/>
             <a:ext cx="3255264" cy="2882840"/>
           </a:xfrm>
           <a:prstGeom prst="rect">
@@ -21130,7 +21147,7 @@
         </p:nvSpPr>
         <p:spPr>
           <a:xfrm>
-            <a:off x="4325112" y="1096247"/>
+            <a:off x="4246282" y="1474623"/>
             <a:ext cx="3547872" cy="4023360"/>
           </a:xfrm>
           <a:prstGeom prst="roundRect">
@@ -21178,7 +21195,7 @@
         </p:nvSpPr>
         <p:spPr>
           <a:xfrm>
-            <a:off x="4325112" y="1096247"/>
+            <a:off x="4246282" y="1474623"/>
             <a:ext cx="3547872" cy="73152"/>
           </a:xfrm>
           <a:prstGeom prst="rect">
@@ -21224,7 +21241,7 @@
         </p:nvSpPr>
         <p:spPr>
           <a:xfrm>
-            <a:off x="4471416" y="1281413"/>
+            <a:off x="4392586" y="1659789"/>
             <a:ext cx="3255264" cy="338554"/>
           </a:xfrm>
           <a:prstGeom prst="rect">
@@ -21263,7 +21280,7 @@
         </p:nvSpPr>
         <p:spPr>
           <a:xfrm>
-            <a:off x="4468215" y="1763759"/>
+            <a:off x="4389385" y="2142135"/>
             <a:ext cx="3255264" cy="2667397"/>
           </a:xfrm>
           <a:prstGeom prst="rect">
@@ -21338,7 +21355,7 @@
         </p:nvSpPr>
         <p:spPr>
           <a:xfrm>
-            <a:off x="7918704" y="1096247"/>
+            <a:off x="7839874" y="1474623"/>
             <a:ext cx="3547872" cy="4023360"/>
           </a:xfrm>
           <a:prstGeom prst="roundRect">
@@ -21386,7 +21403,7 @@
         </p:nvSpPr>
         <p:spPr>
           <a:xfrm>
-            <a:off x="7918704" y="1096247"/>
+            <a:off x="7839874" y="1474623"/>
             <a:ext cx="3547872" cy="73152"/>
           </a:xfrm>
           <a:prstGeom prst="rect">
@@ -21432,7 +21449,7 @@
         </p:nvSpPr>
         <p:spPr>
           <a:xfrm>
-            <a:off x="8065008" y="1281413"/>
+            <a:off x="7986178" y="1659789"/>
             <a:ext cx="3255264" cy="338554"/>
           </a:xfrm>
           <a:prstGeom prst="rect">
@@ -21471,7 +21488,7 @@
         </p:nvSpPr>
         <p:spPr>
           <a:xfrm>
-            <a:off x="8016087" y="1736327"/>
+            <a:off x="7937257" y="2114703"/>
             <a:ext cx="3255264" cy="2882840"/>
           </a:xfrm>
           <a:prstGeom prst="rect">
@@ -21588,14 +21605,20 @@
       </p:sp>
       <p:sp>
         <p:nvSpPr>
-          <p:cNvPr id="19" name="Rounded Rectangle 18"/>
+          <p:cNvPr id="2" name="Rounded Rectangle 1">
+            <a:extLst>
+              <a:ext uri="{FF2B5EF4-FFF2-40B4-BE49-F238E27FC236}">
+                <a16:creationId xmlns:a16="http://schemas.microsoft.com/office/drawing/2014/main" id="{E944D5AA-E07A-684A-99A2-363958AA91F5}"/>
+              </a:ext>
+            </a:extLst>
+          </p:cNvPr>
           <p:cNvSpPr/>
           <p:nvPr/>
         </p:nvSpPr>
         <p:spPr>
           <a:xfrm>
-            <a:off x="731520" y="5389151"/>
-            <a:ext cx="10735056" cy="1173160"/>
+            <a:off x="608357" y="5984853"/>
+            <a:ext cx="10835640" cy="564232"/>
           </a:xfrm>
           <a:prstGeom prst="roundRect">
             <a:avLst>
@@ -21638,14 +21661,20 @@
       </p:sp>
       <p:sp>
         <p:nvSpPr>
-          <p:cNvPr id="20" name="TextBox 19"/>
+          <p:cNvPr id="5" name="TextBox 4">
+            <a:extLst>
+              <a:ext uri="{FF2B5EF4-FFF2-40B4-BE49-F238E27FC236}">
+                <a16:creationId xmlns:a16="http://schemas.microsoft.com/office/drawing/2014/main" id="{89502B22-55AB-9C8B-6A2C-AF2AF36D9F98}"/>
+              </a:ext>
+            </a:extLst>
+          </p:cNvPr>
           <p:cNvSpPr txBox="1"/>
           <p:nvPr/>
         </p:nvSpPr>
         <p:spPr>
           <a:xfrm>
-            <a:off x="861520" y="5447325"/>
-            <a:ext cx="10475056" cy="1031051"/>
+            <a:off x="738357" y="6028442"/>
+            <a:ext cx="10575640" cy="477054"/>
           </a:xfrm>
           <a:prstGeom prst="rect">
             <a:avLst/>
@@ -21666,44 +21695,18 @@
               </a:defRPr>
             </a:pPr>
             <a:r>
-              <a:rPr lang="en-IN" sz="1400" dirty="0">
-                <a:solidFill>
-                  <a:srgbClr val="6B6F6A"/>
-                </a:solidFill>
-                <a:latin typeface="Avenir Next"/>
-              </a:rPr>
-              <a:t>Research Question 7 (part 2): </a:t>
-            </a:r>
-            <a:r>
-              <a:rPr lang="en-IN" sz="1400" dirty="0">
-                <a:ea typeface="+mn-lt"/>
-                <a:cs typeface="+mn-lt"/>
-              </a:rPr>
-              <a:t>What legal and policy recommendations can create an integrated liability framework that holds corporations accountable for misleading environmental claims?</a:t>
-            </a:r>
-          </a:p>
-          <a:p>
-            <a:pPr algn="just">
-              <a:defRPr sz="1100">
-                <a:solidFill>
-                  <a:srgbClr val="282828"/>
-                </a:solidFill>
-              </a:defRPr>
-            </a:pPr>
-            <a:endParaRPr lang="en-US" sz="800" dirty="0"/>
-          </a:p>
-          <a:p>
-            <a:pPr algn="just">
-              <a:defRPr sz="1100">
-                <a:solidFill>
-                  <a:srgbClr val="282828"/>
-                </a:solidFill>
-              </a:defRPr>
-            </a:pPr>
-            <a:r>
-              <a:rPr sz="1400" dirty="0"/>
-              <a:t>Answer to RQ7: Three statutes working together in sequence—substantiate before publishing, audit independently, refer cases automatically between agencies, and link penalties to turnover so leadership carries the real risk.</a:t>
-            </a:r>
+              <a:rPr lang="en-IN" sz="1400" b="1" dirty="0">
+                <a:solidFill>
+                  <a:srgbClr val="173F35"/>
+                </a:solidFill>
+              </a:rPr>
+              <a:t>Answers Research Question 7: What legal and policy recommendations can create an integrated liability framework that holds corporations accountable for misleading environmental claims?</a:t>
+            </a:r>
+            <a:endParaRPr lang="en-US" sz="1400" b="1" dirty="0">
+              <a:solidFill>
+                <a:srgbClr val="173F35"/>
+              </a:solidFill>
+            </a:endParaRPr>
           </a:p>
         </p:txBody>
       </p:sp>
@@ -28073,8 +28076,8 @@
         </p:nvSpPr>
         <p:spPr>
           <a:xfrm>
-            <a:off x="557784" y="5442933"/>
-            <a:ext cx="11073384" cy="804672"/>
+            <a:off x="557784" y="5777861"/>
+            <a:ext cx="11073384" cy="469743"/>
           </a:xfrm>
           <a:prstGeom prst="roundRect">
             <a:avLst/>
@@ -28118,23 +28121,7 @@
               <a:rPr lang="en-IN" dirty="0">
                 <a:latin typeface="Avenir Next" panose="020B0503020202020204" pitchFamily="34" charset="0"/>
               </a:rPr>
-              <a:t>Research Question 1: What is greenwashing, how has it evolved, and what are its consequences?</a:t>
-            </a:r>
-          </a:p>
-          <a:p>
-            <a:pPr>
-              <a:defRPr sz="1150" i="1">
-                <a:solidFill>
-                  <a:srgbClr val="4A4A4A"/>
-                </a:solidFill>
-                <a:latin typeface="Calibri"/>
-              </a:defRPr>
-            </a:pPr>
-            <a:r>
-              <a:rPr lang="en-IN" dirty="0">
-                <a:latin typeface="Avenir Next" panose="020B0503020202020204" pitchFamily="34" charset="0"/>
-              </a:rPr>
-              <a:t>Answer to RQ1: Greenwashing has shifted from product labels to corporate disclosures and balance sheets. Its harm extends beyond consumer deception to capital misallocation, market distortion, and delayed climate action.</a:t>
+              <a:t>Answers Research Question 1: What is greenwashing, how has it evolved, and what are its consequences?</a:t>
             </a:r>
           </a:p>
         </p:txBody>

--- a/Thesis Defence Presentation Final.pptx
+++ b/Thesis Defence Presentation Final.pptx
@@ -18634,7 +18634,7 @@
         <p:spPr>
           <a:xfrm>
             <a:off x="653650" y="2564300"/>
-            <a:ext cx="3154654" cy="3270126"/>
+            <a:ext cx="3154654" cy="3070071"/>
           </a:xfrm>
           <a:prstGeom prst="rect">
             <a:avLst/>
@@ -18671,7 +18671,7 @@
                 </a:solidFill>
                 <a:latin typeface="Avenir Next" panose="020B0503020202020204" pitchFamily="34" charset="0"/>
               </a:rPr>
-              <a:t>Greenwashing scope extends beyond consumer ads to investor-facing disclosures</a:t>
+              <a:t>Greenwashing scope extends beyond consumer ads into investor-facing disclosures</a:t>
             </a:r>
             <a:r>
               <a:rPr sz="1300" dirty="0">
@@ -18698,7 +18698,7 @@
                 </a:solidFill>
                 <a:latin typeface="Avenir Next" panose="020B0503020202020204" pitchFamily="34" charset="0"/>
               </a:rPr>
-              <a:t>BRSR reports, net-zero roadmaps, and corporate transition pledges</a:t>
+              <a:t>BRSR reports, net-zero roadmaps and transition pledges</a:t>
             </a:r>
             <a:r>
               <a:rPr lang="en-US" sz="1300" dirty="0">
@@ -18778,26 +18778,32 @@
                 </a:solidFill>
                 <a:latin typeface="Avenir Next" panose="020B0503020202020204" pitchFamily="34" charset="0"/>
               </a:rPr>
-              <a:t>Pathway: </a:t>
-            </a:r>
-            <a:r>
-              <a:rPr lang="en-IN" sz="1300" dirty="0">
-                <a:solidFill>
-                  <a:srgbClr val="2A2A2A"/>
-                </a:solidFill>
-                <a:latin typeface="Avenir Next" panose="020B0503020202020204" pitchFamily="34" charset="0"/>
-              </a:rPr>
-              <a:t>Consumer regime is reactive &amp; complaint-driven; corporate/securities pathways better reach upstream governance (board oversight, internal controls, assurance).</a:t>
-            </a:r>
-            <a:r>
-              <a:rPr sz="1300" dirty="0">
+              <a:t>Pathway:</a:t>
+            </a:r>
+            <a:r>
+              <a:rPr lang="en-US" sz="1300" b="1" dirty="0">
                 <a:solidFill>
                   <a:srgbClr val="2D2D2D"/>
                 </a:solidFill>
                 <a:latin typeface="Avenir Next" panose="020B0503020202020204" pitchFamily="34" charset="0"/>
               </a:rPr>
-              <a:t>.</a:t>
-            </a:r>
+              <a:t> </a:t>
+            </a:r>
+            <a:r>
+              <a:rPr lang="en-US" sz="1300" dirty="0">
+                <a:solidFill>
+                  <a:srgbClr val="2D2D2D"/>
+                </a:solidFill>
+                <a:latin typeface="Avenir Next" panose="020B0503020202020204" pitchFamily="34" charset="0"/>
+              </a:rPr>
+              <a:t>Consumer law is reactive and complaint-led; corporate/securities routes reach upstream — board oversight, controls, assurance.</a:t>
+            </a:r>
+            <a:endParaRPr sz="1300" dirty="0">
+              <a:solidFill>
+                <a:srgbClr val="2D2D2D"/>
+              </a:solidFill>
+              <a:latin typeface="Avenir Next" panose="020B0503020202020204" pitchFamily="34" charset="0"/>
+            </a:endParaRPr>
           </a:p>
           <a:p>
             <a:pPr>
@@ -18837,8 +18843,8 @@
         </p:nvSpPr>
         <p:spPr>
           <a:xfrm>
-            <a:off x="4356643" y="1150000"/>
-            <a:ext cx="3683771" cy="4848000"/>
+            <a:off x="4264587" y="1150000"/>
+            <a:ext cx="3843209" cy="5014354"/>
           </a:xfrm>
           <a:prstGeom prst="roundRect">
             <a:avLst/>
@@ -18931,8 +18937,8 @@
         </p:nvSpPr>
         <p:spPr>
           <a:xfrm>
-            <a:off x="4609862" y="1350000"/>
-            <a:ext cx="3263122" cy="1508105"/>
+            <a:off x="4439412" y="1350000"/>
+            <a:ext cx="3433572" cy="1292662"/>
           </a:xfrm>
           <a:prstGeom prst="rect">
             <a:avLst/>
@@ -18972,8 +18978,8 @@
         </p:nvSpPr>
         <p:spPr>
           <a:xfrm>
-            <a:off x="4609862" y="2945300"/>
-            <a:ext cx="3263122" cy="3116238"/>
+            <a:off x="4439412" y="2775180"/>
+            <a:ext cx="3433572" cy="3100849"/>
           </a:xfrm>
           <a:prstGeom prst="rect">
             <a:avLst/>
@@ -19004,32 +19010,20 @@
               <a:t>1. Scope: </a:t>
             </a:r>
             <a:r>
-              <a:rPr sz="1300" dirty="0">
+              <a:rPr lang="en-IN" sz="1300" dirty="0">
                 <a:solidFill>
                   <a:srgbClr val="2D2D2D"/>
                 </a:solidFill>
                 <a:latin typeface="Avenir Next" panose="020B0503020202020204" pitchFamily="34" charset="0"/>
               </a:rPr>
-              <a:t>Evaluates </a:t>
-            </a:r>
-            <a:r>
-              <a:rPr lang="en-US" sz="1300" dirty="0">
-                <a:solidFill>
-                  <a:srgbClr val="2D2D2D"/>
-                </a:solidFill>
-                <a:latin typeface="Avenir Next" panose="020B0503020202020204" pitchFamily="34" charset="0"/>
-              </a:rPr>
-              <a:t>whether legal costs exceed benefits</a:t>
-            </a:r>
-            <a:r>
-              <a:rPr sz="1300" dirty="0">
-                <a:solidFill>
-                  <a:srgbClr val="2D2D2D"/>
-                </a:solidFill>
-                <a:latin typeface="Avenir Next" panose="020B0503020202020204" pitchFamily="34" charset="0"/>
-              </a:rPr>
-              <a:t> across Company Law, Securities Law, and Consumer Protection.</a:t>
-            </a:r>
+              <a:t>Tests whether penalties are large and certain enough to outweigh the gains from greenwashing — across company, securities, and consumer law.</a:t>
+            </a:r>
+            <a:endParaRPr sz="1300" dirty="0">
+              <a:solidFill>
+                <a:srgbClr val="2D2D2D"/>
+              </a:solidFill>
+              <a:latin typeface="Avenir Next" panose="020B0503020202020204" pitchFamily="34" charset="0"/>
+            </a:endParaRPr>
           </a:p>
           <a:p>
             <a:pPr>
@@ -19056,7 +19050,7 @@
                 </a:solidFill>
                 <a:latin typeface="Avenir Next" panose="020B0503020202020204" pitchFamily="34" charset="0"/>
               </a:rPr>
-              <a:t>Duties exist, but ordinary liability routes are weak. Section 166(2) lacks open standing; consumer penalties lack deterrence.</a:t>
+              <a:t>Duties exist, but enforcement routes are weak for Section 166(2); and consumer penalties lack deterrence.</a:t>
             </a:r>
             <a:endParaRPr sz="1300" dirty="0">
               <a:solidFill>
@@ -19108,7 +19102,7 @@
                 </a:solidFill>
                 <a:latin typeface="Avenir Next" panose="020B0503020202020204" pitchFamily="34" charset="0"/>
               </a:rPr>
-              <a:t>Weak verification and high proof burdens shield corporate violators.</a:t>
+              <a:t>Weak verification and high proof burdens shield violators.</a:t>
             </a:r>
             <a:r>
               <a:rPr lang="en-US" sz="1300" dirty="0">
@@ -19352,106 +19346,7 @@
                 </a:solidFill>
                 <a:latin typeface="Avenir Next" panose="020B0503020202020204" pitchFamily="34" charset="0"/>
               </a:rPr>
-              <a:t>is a lifecycle phenomenon encompassing</a:t>
-            </a:r>
-            <a:r>
-              <a:rPr sz="1300" dirty="0">
-                <a:solidFill>
-                  <a:srgbClr val="2D2D2D"/>
-                </a:solidFill>
-                <a:latin typeface="Avenir Next" panose="020B0503020202020204" pitchFamily="34" charset="0"/>
-              </a:rPr>
-              <a:t> products,</a:t>
-            </a:r>
-            <a:r>
-              <a:rPr lang="en-US" sz="1300" dirty="0">
-                <a:solidFill>
-                  <a:srgbClr val="2D2D2D"/>
-                </a:solidFill>
-                <a:latin typeface="Avenir Next" panose="020B0503020202020204" pitchFamily="34" charset="0"/>
-              </a:rPr>
-              <a:t> ads,</a:t>
-            </a:r>
-            <a:r>
-              <a:rPr sz="1300" dirty="0">
-                <a:solidFill>
-                  <a:srgbClr val="2D2D2D"/>
-                </a:solidFill>
-                <a:latin typeface="Avenir Next" panose="020B0503020202020204" pitchFamily="34" charset="0"/>
-              </a:rPr>
-              <a:t> corporate </a:t>
-            </a:r>
-            <a:r>
-              <a:rPr lang="en-US" sz="1300" dirty="0">
-                <a:solidFill>
-                  <a:srgbClr val="2D2D2D"/>
-                </a:solidFill>
-                <a:latin typeface="Avenir Next" panose="020B0503020202020204" pitchFamily="34" charset="0"/>
-              </a:rPr>
-              <a:t>annual </a:t>
-            </a:r>
-            <a:r>
-              <a:rPr sz="1300" dirty="0">
-                <a:solidFill>
-                  <a:srgbClr val="2D2D2D"/>
-                </a:solidFill>
-                <a:latin typeface="Avenir Next" panose="020B0503020202020204" pitchFamily="34" charset="0"/>
-              </a:rPr>
-              <a:t>reports,</a:t>
-            </a:r>
-            <a:r>
-              <a:rPr lang="en-US" sz="1300" dirty="0">
-                <a:solidFill>
-                  <a:srgbClr val="2D2D2D"/>
-                </a:solidFill>
-                <a:latin typeface="Avenir Next" panose="020B0503020202020204" pitchFamily="34" charset="0"/>
-              </a:rPr>
-              <a:t> ESG Filings</a:t>
-            </a:r>
-            <a:r>
-              <a:rPr sz="1300" dirty="0">
-                <a:solidFill>
-                  <a:srgbClr val="2D2D2D"/>
-                </a:solidFill>
-                <a:latin typeface="Avenir Next" panose="020B0503020202020204" pitchFamily="34" charset="0"/>
-              </a:rPr>
-              <a:t> and </a:t>
-            </a:r>
-            <a:r>
-              <a:rPr lang="en-US" sz="1300" dirty="0">
-                <a:solidFill>
-                  <a:srgbClr val="2D2D2D"/>
-                </a:solidFill>
-                <a:latin typeface="Avenir Next" panose="020B0503020202020204" pitchFamily="34" charset="0"/>
-              </a:rPr>
-              <a:t>G</a:t>
-            </a:r>
-            <a:r>
-              <a:rPr sz="1300" dirty="0">
-                <a:solidFill>
-                  <a:srgbClr val="2D2D2D"/>
-                </a:solidFill>
-                <a:latin typeface="Avenir Next" panose="020B0503020202020204" pitchFamily="34" charset="0"/>
-              </a:rPr>
-              <a:t>reen </a:t>
-            </a:r>
-            <a:r>
-              <a:rPr lang="en-US" sz="1300" dirty="0">
-                <a:solidFill>
-                  <a:srgbClr val="2D2D2D"/>
-                </a:solidFill>
-                <a:latin typeface="Avenir Next" panose="020B0503020202020204" pitchFamily="34" charset="0"/>
-              </a:rPr>
-              <a:t>B</a:t>
-            </a:r>
-            <a:r>
-              <a:rPr sz="1300" dirty="0">
-                <a:solidFill>
-                  <a:srgbClr val="2D2D2D"/>
-                </a:solidFill>
-                <a:latin typeface="Avenir Next" panose="020B0503020202020204" pitchFamily="34" charset="0"/>
-              </a:rPr>
-              <a:t>onds.</a:t>
+              <a:t>is a lifecycle phenomenon spanning products, ads, annual reports, ESG filings, and green bonds.</a:t>
             </a:r>
           </a:p>
           <a:p>
@@ -19566,8 +19461,8 @@
         </p:nvSpPr>
         <p:spPr>
           <a:xfrm>
-            <a:off x="731519" y="6188762"/>
-            <a:ext cx="10911841" cy="473970"/>
+            <a:off x="731519" y="6322112"/>
+            <a:ext cx="10911841" cy="340620"/>
           </a:xfrm>
           <a:prstGeom prst="roundRect">
             <a:avLst/>
@@ -19614,8 +19509,8 @@
         </p:nvSpPr>
         <p:spPr>
           <a:xfrm>
-            <a:off x="858319" y="6322112"/>
-            <a:ext cx="10475056" cy="231602"/>
+            <a:off x="858319" y="6403757"/>
+            <a:ext cx="10475056" cy="198516"/>
           </a:xfrm>
           <a:prstGeom prst="rect">
             <a:avLst/>
@@ -19639,12 +19534,12 @@
               </a:defRPr>
             </a:pPr>
             <a:r>
-              <a:rPr sz="1400" dirty="0">
+              <a:rPr sz="1200" dirty="0">
                 <a:latin typeface="Avenir Next" panose="020B0503020202020204" pitchFamily="34" charset="0"/>
               </a:rPr>
               <a:t>All Three Hypotheses Stand Formally Validated</a:t>
             </a:r>
-            <a:endParaRPr sz="1400" dirty="0">
+            <a:endParaRPr sz="1200" dirty="0">
               <a:solidFill>
                 <a:srgbClr val="3A3A4A"/>
               </a:solidFill>
@@ -29996,7 +29891,7 @@
   <we:properties>
     <we:property name="_flush" value="1786868305192"/>
     <we:property name="_postImportCommit" value="1786868305192"/>
-    <we:property name="grokConversationBinding" value="{&quot;responseId&quot;:&quot;6ebd02e2-39fe-9866-8e33-718e47e27752&quot;,&quot;title&quot;:&quot;Condense Text in Sections 1 &amp; 3&quot;,&quot;transport&quot;:&quot;responses&quot;}"/>
+    <we:property name="grokConversationBinding" value="{&quot;responseId&quot;:&quot;262e1e5b-f2ad-9fc2-aee0-e09e10d73375&quot;,&quot;title&quot;:&quot;Reduce Text Load Sections 1,3&quot;,&quot;transport&quot;:&quot;responses&quot;}"/>
   </we:properties>
   <we:bindings/>
   <we:snapshot xmlns:r="http://schemas.openxmlformats.org/officeDocument/2006/relationships"/>

--- a/Thesis Defence Presentation Final.pptx
+++ b/Thesis Defence Presentation Final.pptx
@@ -239,7 +239,7 @@
           <a:p>
             <a:fld id="{5D16D8C7-7ACE-0E43-ADC6-5E8A68AC397B}" type="datetimeFigureOut">
               <a:rPr lang="en-US" smtClean="0"/>
-              <a:t>8/16/26</a:t>
+              <a:t>8/18/26</a:t>
             </a:fld>
             <a:endParaRPr lang="en-US"/>
           </a:p>
@@ -770,7 +770,7 @@
           <a:p>
             <a:fld id="{5BCAD085-E8A6-8845-BD4E-CB4CCA059FC4}" type="datetimeFigureOut">
               <a:rPr lang="en-US" smtClean="0"/>
-              <a:t>8/16/26</a:t>
+              <a:t>8/18/26</a:t>
             </a:fld>
             <a:endParaRPr lang="en-US"/>
           </a:p>
@@ -938,7 +938,7 @@
           <a:p>
             <a:fld id="{5BCAD085-E8A6-8845-BD4E-CB4CCA059FC4}" type="datetimeFigureOut">
               <a:rPr lang="en-US" smtClean="0"/>
-              <a:t>8/16/26</a:t>
+              <a:t>8/18/26</a:t>
             </a:fld>
             <a:endParaRPr lang="en-US"/>
           </a:p>
@@ -1116,7 +1116,7 @@
           <a:p>
             <a:fld id="{5BCAD085-E8A6-8845-BD4E-CB4CCA059FC4}" type="datetimeFigureOut">
               <a:rPr lang="en-US" smtClean="0"/>
-              <a:t>8/16/26</a:t>
+              <a:t>8/18/26</a:t>
             </a:fld>
             <a:endParaRPr lang="en-US"/>
           </a:p>
@@ -1284,7 +1284,7 @@
           <a:p>
             <a:fld id="{5BCAD085-E8A6-8845-BD4E-CB4CCA059FC4}" type="datetimeFigureOut">
               <a:rPr lang="en-US" smtClean="0"/>
-              <a:t>8/16/26</a:t>
+              <a:t>8/18/26</a:t>
             </a:fld>
             <a:endParaRPr lang="en-US"/>
           </a:p>
@@ -1529,7 +1529,7 @@
           <a:p>
             <a:fld id="{5BCAD085-E8A6-8845-BD4E-CB4CCA059FC4}" type="datetimeFigureOut">
               <a:rPr lang="en-US" smtClean="0"/>
-              <a:t>8/16/26</a:t>
+              <a:t>8/18/26</a:t>
             </a:fld>
             <a:endParaRPr lang="en-US"/>
           </a:p>
@@ -1814,7 +1814,7 @@
           <a:p>
             <a:fld id="{5BCAD085-E8A6-8845-BD4E-CB4CCA059FC4}" type="datetimeFigureOut">
               <a:rPr lang="en-US" smtClean="0"/>
-              <a:t>8/16/26</a:t>
+              <a:t>8/18/26</a:t>
             </a:fld>
             <a:endParaRPr lang="en-US"/>
           </a:p>
@@ -2233,7 +2233,7 @@
           <a:p>
             <a:fld id="{5BCAD085-E8A6-8845-BD4E-CB4CCA059FC4}" type="datetimeFigureOut">
               <a:rPr lang="en-US" smtClean="0"/>
-              <a:t>8/16/26</a:t>
+              <a:t>8/18/26</a:t>
             </a:fld>
             <a:endParaRPr lang="en-US"/>
           </a:p>
@@ -2350,7 +2350,7 @@
           <a:p>
             <a:fld id="{5BCAD085-E8A6-8845-BD4E-CB4CCA059FC4}" type="datetimeFigureOut">
               <a:rPr lang="en-US" smtClean="0"/>
-              <a:t>8/16/26</a:t>
+              <a:t>8/18/26</a:t>
             </a:fld>
             <a:endParaRPr lang="en-US"/>
           </a:p>
@@ -2445,7 +2445,7 @@
           <a:p>
             <a:fld id="{5BCAD085-E8A6-8845-BD4E-CB4CCA059FC4}" type="datetimeFigureOut">
               <a:rPr lang="en-US" smtClean="0"/>
-              <a:t>8/16/26</a:t>
+              <a:t>8/18/26</a:t>
             </a:fld>
             <a:endParaRPr lang="en-US"/>
           </a:p>
@@ -2720,7 +2720,7 @@
           <a:p>
             <a:fld id="{5BCAD085-E8A6-8845-BD4E-CB4CCA059FC4}" type="datetimeFigureOut">
               <a:rPr lang="en-US" smtClean="0"/>
-              <a:t>8/16/26</a:t>
+              <a:t>8/18/26</a:t>
             </a:fld>
             <a:endParaRPr lang="en-US"/>
           </a:p>
@@ -2972,7 +2972,7 @@
           <a:p>
             <a:fld id="{5BCAD085-E8A6-8845-BD4E-CB4CCA059FC4}" type="datetimeFigureOut">
               <a:rPr lang="en-US" smtClean="0"/>
-              <a:t>8/16/26</a:t>
+              <a:t>8/18/26</a:t>
             </a:fld>
             <a:endParaRPr lang="en-US"/>
           </a:p>
@@ -3183,7 +3183,7 @@
           <a:p>
             <a:fld id="{5BCAD085-E8A6-8845-BD4E-CB4CCA059FC4}" type="datetimeFigureOut">
               <a:rPr lang="en-US" smtClean="0"/>
-              <a:t>8/16/26</a:t>
+              <a:t>8/18/26</a:t>
             </a:fld>
             <a:endParaRPr lang="en-US"/>
           </a:p>
@@ -10605,7 +10605,7 @@
         </p:nvSpPr>
         <p:spPr>
           <a:xfrm>
-            <a:off x="718950" y="1759662"/>
+            <a:off x="718950" y="1599022"/>
             <a:ext cx="4919472" cy="2743200"/>
           </a:xfrm>
           <a:prstGeom prst="roundRect">
@@ -10653,7 +10653,7 @@
         </p:nvSpPr>
         <p:spPr>
           <a:xfrm>
-            <a:off x="970404" y="1852094"/>
+            <a:off x="970404" y="1691454"/>
             <a:ext cx="1719072" cy="347472"/>
           </a:xfrm>
           <a:prstGeom prst="roundRect">
@@ -10715,7 +10715,7 @@
         </p:nvSpPr>
         <p:spPr>
           <a:xfrm>
-            <a:off x="956694" y="2343888"/>
+            <a:off x="956694" y="2183248"/>
             <a:ext cx="4352544" cy="2046714"/>
           </a:xfrm>
           <a:prstGeom prst="rect">
@@ -10811,7 +10811,7 @@
         </p:nvSpPr>
         <p:spPr>
           <a:xfrm>
-            <a:off x="5839590" y="1759662"/>
+            <a:off x="5839590" y="1599022"/>
             <a:ext cx="5468112" cy="2743200"/>
           </a:xfrm>
           <a:prstGeom prst="roundRect">
@@ -10859,7 +10859,7 @@
         </p:nvSpPr>
         <p:spPr>
           <a:xfrm>
-            <a:off x="6059045" y="1852094"/>
+            <a:off x="6059045" y="1691454"/>
             <a:ext cx="2755769" cy="347472"/>
           </a:xfrm>
           <a:prstGeom prst="roundRect">
@@ -10918,7 +10918,7 @@
         </p:nvSpPr>
         <p:spPr>
           <a:xfrm>
-            <a:off x="6095622" y="2343888"/>
+            <a:off x="6095622" y="2183248"/>
             <a:ext cx="4846320" cy="2046714"/>
           </a:xfrm>
           <a:prstGeom prst="rect">
@@ -11083,7 +11083,7 @@
         </p:nvSpPr>
         <p:spPr>
           <a:xfrm>
-            <a:off x="824248" y="4895800"/>
+            <a:off x="824248" y="4735160"/>
             <a:ext cx="2559032" cy="1479296"/>
           </a:xfrm>
           <a:prstGeom prst="roundRect">
@@ -11137,7 +11137,7 @@
         </p:nvSpPr>
         <p:spPr>
           <a:xfrm>
-            <a:off x="824248" y="4895800"/>
+            <a:off x="824248" y="4735160"/>
             <a:ext cx="2559032" cy="93924"/>
           </a:xfrm>
           <a:prstGeom prst="rect">
@@ -11189,7 +11189,7 @@
         </p:nvSpPr>
         <p:spPr>
           <a:xfrm>
-            <a:off x="970404" y="5023815"/>
+            <a:off x="970404" y="4863175"/>
             <a:ext cx="2266571" cy="338554"/>
           </a:xfrm>
           <a:prstGeom prst="rect">
@@ -11234,7 +11234,7 @@
         </p:nvSpPr>
         <p:spPr>
           <a:xfrm>
-            <a:off x="970404" y="5389576"/>
+            <a:off x="970404" y="5228936"/>
             <a:ext cx="2266571" cy="646331"/>
           </a:xfrm>
           <a:prstGeom prst="rect">
@@ -11279,7 +11279,7 @@
         </p:nvSpPr>
         <p:spPr>
           <a:xfrm>
-            <a:off x="3613168" y="4895800"/>
+            <a:off x="3613168" y="4735160"/>
             <a:ext cx="2559032" cy="1479296"/>
           </a:xfrm>
           <a:prstGeom prst="roundRect">
@@ -11333,7 +11333,7 @@
         </p:nvSpPr>
         <p:spPr>
           <a:xfrm>
-            <a:off x="3613168" y="4895800"/>
+            <a:off x="3613168" y="4735160"/>
             <a:ext cx="2559032" cy="93924"/>
           </a:xfrm>
           <a:prstGeom prst="rect">
@@ -11385,7 +11385,7 @@
         </p:nvSpPr>
         <p:spPr>
           <a:xfrm>
-            <a:off x="3759324" y="5023815"/>
+            <a:off x="3759324" y="4863175"/>
             <a:ext cx="2266571" cy="338554"/>
           </a:xfrm>
           <a:prstGeom prst="rect">
@@ -11439,7 +11439,7 @@
         </p:nvSpPr>
         <p:spPr>
           <a:xfrm>
-            <a:off x="3759324" y="5389576"/>
+            <a:off x="3759324" y="5228936"/>
             <a:ext cx="2266571" cy="646331"/>
           </a:xfrm>
           <a:prstGeom prst="rect">
@@ -11487,7 +11487,7 @@
         </p:nvSpPr>
         <p:spPr>
           <a:xfrm>
-            <a:off x="6402088" y="4895799"/>
+            <a:off x="6402088" y="4735159"/>
             <a:ext cx="2559032" cy="1521017"/>
           </a:xfrm>
           <a:prstGeom prst="roundRect">
@@ -11541,7 +11541,7 @@
         </p:nvSpPr>
         <p:spPr>
           <a:xfrm>
-            <a:off x="6402088" y="4895800"/>
+            <a:off x="6402088" y="4735160"/>
             <a:ext cx="2559032" cy="93924"/>
           </a:xfrm>
           <a:prstGeom prst="rect">
@@ -11593,7 +11593,7 @@
         </p:nvSpPr>
         <p:spPr>
           <a:xfrm>
-            <a:off x="6548244" y="5023815"/>
+            <a:off x="6548244" y="4863175"/>
             <a:ext cx="2266571" cy="338554"/>
           </a:xfrm>
           <a:prstGeom prst="rect">
@@ -11638,7 +11638,7 @@
         </p:nvSpPr>
         <p:spPr>
           <a:xfrm>
-            <a:off x="6483211" y="5362370"/>
+            <a:off x="6483211" y="5201730"/>
             <a:ext cx="2412802" cy="646331"/>
           </a:xfrm>
           <a:prstGeom prst="rect">
@@ -11686,7 +11686,7 @@
         </p:nvSpPr>
         <p:spPr>
           <a:xfrm>
-            <a:off x="9190778" y="4895799"/>
+            <a:off x="9190778" y="4735159"/>
             <a:ext cx="2102062" cy="1521017"/>
           </a:xfrm>
           <a:prstGeom prst="roundRect">
@@ -11740,7 +11740,7 @@
         </p:nvSpPr>
         <p:spPr>
           <a:xfrm>
-            <a:off x="9190778" y="4895800"/>
+            <a:off x="9190778" y="4735160"/>
             <a:ext cx="2102062" cy="93924"/>
           </a:xfrm>
           <a:prstGeom prst="rect">
@@ -11792,7 +11792,7 @@
         </p:nvSpPr>
         <p:spPr>
           <a:xfrm>
-            <a:off x="9336934" y="5023815"/>
+            <a:off x="9336934" y="4863175"/>
             <a:ext cx="1809601" cy="338554"/>
           </a:xfrm>
           <a:prstGeom prst="rect">
@@ -11837,7 +11837,7 @@
         </p:nvSpPr>
         <p:spPr>
           <a:xfrm>
-            <a:off x="9336934" y="5340148"/>
+            <a:off x="9336934" y="5179508"/>
             <a:ext cx="1955906" cy="1015663"/>
           </a:xfrm>
           <a:prstGeom prst="rect">
@@ -16765,7 +16765,7 @@
         </p:nvSpPr>
         <p:spPr>
           <a:xfrm>
-            <a:off x="731520" y="396667"/>
+            <a:off x="558522" y="359596"/>
             <a:ext cx="10698480" cy="677108"/>
           </a:xfrm>
           <a:prstGeom prst="rect">
@@ -16861,7 +16861,7 @@
         <p:spPr>
           <a:xfrm>
             <a:off x="594360" y="1787485"/>
-            <a:ext cx="5760720" cy="4921660"/>
+            <a:ext cx="5760720" cy="4761596"/>
           </a:xfrm>
           <a:prstGeom prst="roundRect">
             <a:avLst/>
@@ -16955,7 +16955,7 @@
         <p:spPr>
           <a:xfrm>
             <a:off x="868680" y="2071145"/>
-            <a:ext cx="5486400" cy="4452501"/>
+            <a:ext cx="5486400" cy="3931846"/>
           </a:xfrm>
           <a:prstGeom prst="rect">
             <a:avLst/>
@@ -16982,7 +16982,19 @@
               <a:rPr dirty="0">
                 <a:latin typeface="Avenir Next" panose="020B0503020202020204" pitchFamily="34" charset="0"/>
               </a:rPr>
-              <a:t>The Green Façade (What Companies Show)</a:t>
+              <a:t>The Green Fa</a:t>
+            </a:r>
+            <a:r>
+              <a:rPr lang="en-US" dirty="0">
+                <a:latin typeface="Avenir Next" panose="020B0503020202020204" pitchFamily="34" charset="0"/>
+              </a:rPr>
+              <a:t>c</a:t>
+            </a:r>
+            <a:r>
+              <a:rPr dirty="0">
+                <a:latin typeface="Avenir Next" panose="020B0503020202020204" pitchFamily="34" charset="0"/>
+              </a:rPr>
+              <a:t>ade (What Companies Show)</a:t>
             </a:r>
           </a:p>
           <a:p>
@@ -17204,7 +17216,19 @@
               <a:rPr dirty="0">
                 <a:latin typeface="Avenir Next" panose="020B0503020202020204" pitchFamily="34" charset="0"/>
               </a:rPr>
-              <a:t>The Hidden Reality (What Stays Concealed)</a:t>
+              <a:t>The Hidden Reality (What Stays </a:t>
+            </a:r>
+            <a:r>
+              <a:rPr lang="en-US" dirty="0">
+                <a:latin typeface="Avenir Next" panose="020B0503020202020204" pitchFamily="34" charset="0"/>
+              </a:rPr>
+              <a:t>Hidden</a:t>
+            </a:r>
+            <a:r>
+              <a:rPr dirty="0">
+                <a:latin typeface="Avenir Next" panose="020B0503020202020204" pitchFamily="34" charset="0"/>
+              </a:rPr>
+              <a:t>)</a:t>
             </a:r>
           </a:p>
           <a:p>
@@ -17297,34 +17321,6 @@
                 <a:latin typeface="Avenir Next" panose="020B0503020202020204" pitchFamily="34" charset="0"/>
               </a:rPr>
               <a:t> independent audits, or verifiable data backing up the claims.</a:t>
-            </a:r>
-          </a:p>
-          <a:p>
-            <a:pPr>
-              <a:spcBef>
-                <a:spcPts val="300"/>
-              </a:spcBef>
-              <a:spcAft>
-                <a:spcPts val="400"/>
-              </a:spcAft>
-            </a:pPr>
-            <a:r>
-              <a:rPr sz="1400" b="1" dirty="0">
-                <a:solidFill>
-                  <a:srgbClr val="A8552F"/>
-                </a:solidFill>
-                <a:latin typeface="Avenir Next" panose="020B0503020202020204" pitchFamily="34" charset="0"/>
-              </a:rPr>
-              <a:t>• Disconnected Governance: </a:t>
-            </a:r>
-            <a:r>
-              <a:rPr sz="1400" dirty="0">
-                <a:solidFill>
-                  <a:srgbClr val="2D2D2D"/>
-                </a:solidFill>
-                <a:latin typeface="Avenir Next" panose="020B0503020202020204" pitchFamily="34" charset="0"/>
-              </a:rPr>
-              <a:t>PR and marketing operate independently from boardroom decisions and oversight.</a:t>
             </a:r>
           </a:p>
         </p:txBody>
@@ -17367,7 +17363,7 @@
         </p:nvSpPr>
         <p:spPr>
           <a:xfrm>
-            <a:off x="731520" y="1041256"/>
+            <a:off x="706806" y="1016542"/>
             <a:ext cx="7717021" cy="677108"/>
           </a:xfrm>
           <a:prstGeom prst="rect">
@@ -17395,6 +17391,56 @@
               </a:rPr>
               <a:t>Greenwashing is defined as any misleading, exaggerated, vague, or unsubstantiated environmental claim made by an entity.</a:t>
             </a:r>
+          </a:p>
+        </p:txBody>
+      </p:sp>
+      <p:sp>
+        <p:nvSpPr>
+          <p:cNvPr id="2" name="Rectangle 1">
+            <a:extLst>
+              <a:ext uri="{FF2B5EF4-FFF2-40B4-BE49-F238E27FC236}">
+                <a16:creationId xmlns:a16="http://schemas.microsoft.com/office/drawing/2014/main" id="{3FDCB222-8459-526C-D2D9-E81267351D93}"/>
+              </a:ext>
+            </a:extLst>
+          </p:cNvPr>
+          <p:cNvSpPr/>
+          <p:nvPr/>
+        </p:nvSpPr>
+        <p:spPr>
+          <a:xfrm>
+            <a:off x="0" y="0"/>
+            <a:ext cx="12191695" cy="201168"/>
+          </a:xfrm>
+          <a:prstGeom prst="rect">
+            <a:avLst/>
+          </a:prstGeom>
+          <a:solidFill>
+            <a:srgbClr val="173F35"/>
+          </a:solidFill>
+          <a:ln>
+            <a:noFill/>
+          </a:ln>
+        </p:spPr>
+        <p:style>
+          <a:lnRef idx="1">
+            <a:schemeClr val="accent1"/>
+          </a:lnRef>
+          <a:fillRef idx="3">
+            <a:schemeClr val="accent1"/>
+          </a:fillRef>
+          <a:effectRef idx="2">
+            <a:schemeClr val="accent1"/>
+          </a:effectRef>
+          <a:fontRef idx="minor">
+            <a:schemeClr val="lt1"/>
+          </a:fontRef>
+        </p:style>
+        <p:txBody>
+          <a:bodyPr rtlCol="0" anchor="ctr"/>
+          <a:lstStyle/>
+          <a:p>
+            <a:pPr algn="ctr"/>
+            <a:endParaRPr/>
           </a:p>
         </p:txBody>
       </p:sp>
@@ -19698,7 +19744,7 @@
         <p:spPr>
           <a:xfrm>
             <a:off x="670473" y="1700443"/>
-            <a:ext cx="2057400" cy="3233507"/>
+            <a:ext cx="1911096" cy="3233507"/>
           </a:xfrm>
           <a:prstGeom prst="roundRect">
             <a:avLst/>
@@ -19746,7 +19792,7 @@
         <p:spPr>
           <a:xfrm>
             <a:off x="670473" y="1700443"/>
-            <a:ext cx="2057400" cy="97615"/>
+            <a:ext cx="1911096" cy="97615"/>
           </a:xfrm>
           <a:prstGeom prst="rect">
             <a:avLst/>
@@ -19870,7 +19916,7 @@
         <p:spPr>
           <a:xfrm>
             <a:off x="2810169" y="1700443"/>
-            <a:ext cx="2057400" cy="3233507"/>
+            <a:ext cx="1911096" cy="3233507"/>
           </a:xfrm>
           <a:prstGeom prst="roundRect">
             <a:avLst/>
@@ -19918,7 +19964,7 @@
         <p:spPr>
           <a:xfrm>
             <a:off x="2810169" y="1700443"/>
-            <a:ext cx="2057400" cy="97615"/>
+            <a:ext cx="1911096" cy="97615"/>
           </a:xfrm>
           <a:prstGeom prst="rect">
             <a:avLst/>
@@ -20042,7 +20088,7 @@
         <p:spPr>
           <a:xfrm>
             <a:off x="4949865" y="1700443"/>
-            <a:ext cx="2057400" cy="3233507"/>
+            <a:ext cx="1911096" cy="3233507"/>
           </a:xfrm>
           <a:prstGeom prst="roundRect">
             <a:avLst/>
@@ -20090,7 +20136,7 @@
         <p:spPr>
           <a:xfrm>
             <a:off x="4949865" y="1700443"/>
-            <a:ext cx="2057400" cy="97615"/>
+            <a:ext cx="1911096" cy="97615"/>
           </a:xfrm>
           <a:prstGeom prst="rect">
             <a:avLst/>
@@ -20214,7 +20260,7 @@
         <p:spPr>
           <a:xfrm>
             <a:off x="7089561" y="1700443"/>
-            <a:ext cx="2057400" cy="3233507"/>
+            <a:ext cx="1911096" cy="3233507"/>
           </a:xfrm>
           <a:prstGeom prst="roundRect">
             <a:avLst/>
@@ -20262,7 +20308,7 @@
         <p:spPr>
           <a:xfrm>
             <a:off x="7089561" y="1700443"/>
-            <a:ext cx="2057400" cy="97615"/>
+            <a:ext cx="1911096" cy="97615"/>
           </a:xfrm>
           <a:prstGeom prst="rect">
             <a:avLst/>
@@ -20386,7 +20432,7 @@
         <p:spPr>
           <a:xfrm>
             <a:off x="9229257" y="1700443"/>
-            <a:ext cx="2057400" cy="3233507"/>
+            <a:ext cx="1911096" cy="3233507"/>
           </a:xfrm>
           <a:prstGeom prst="roundRect">
             <a:avLst/>
@@ -20434,7 +20480,7 @@
         <p:spPr>
           <a:xfrm>
             <a:off x="9229257" y="1700443"/>
-            <a:ext cx="2057400" cy="97615"/>
+            <a:ext cx="1911096" cy="97615"/>
           </a:xfrm>
           <a:prstGeom prst="rect">
             <a:avLst/>
@@ -20605,8 +20651,8 @@
         </p:nvSpPr>
         <p:spPr>
           <a:xfrm>
-            <a:off x="620714" y="5984853"/>
-            <a:ext cx="10835640" cy="564232"/>
+            <a:off x="620714" y="5680103"/>
+            <a:ext cx="10835640" cy="584775"/>
           </a:xfrm>
           <a:prstGeom prst="roundRect">
             <a:avLst>
@@ -20661,7 +20707,7 @@
         </p:nvSpPr>
         <p:spPr>
           <a:xfrm>
-            <a:off x="750714" y="6028442"/>
+            <a:off x="750714" y="5744235"/>
             <a:ext cx="10575640" cy="477054"/>
           </a:xfrm>
           <a:prstGeom prst="rect">
@@ -20835,7 +20881,7 @@
         <p:spPr>
           <a:xfrm>
             <a:off x="652690" y="1474623"/>
-            <a:ext cx="3547872" cy="4023360"/>
+            <a:ext cx="3300984" cy="4023360"/>
           </a:xfrm>
           <a:prstGeom prst="roundRect">
             <a:avLst/>
@@ -20883,7 +20929,7 @@
         <p:spPr>
           <a:xfrm>
             <a:off x="652690" y="1474623"/>
-            <a:ext cx="3547872" cy="73152"/>
+            <a:ext cx="3255264" cy="73152"/>
           </a:xfrm>
           <a:prstGeom prst="rect">
             <a:avLst/>
@@ -21043,7 +21089,7 @@
         <p:spPr>
           <a:xfrm>
             <a:off x="4246282" y="1474623"/>
-            <a:ext cx="3547872" cy="4023360"/>
+            <a:ext cx="3300984" cy="4023360"/>
           </a:xfrm>
           <a:prstGeom prst="roundRect">
             <a:avLst/>
@@ -21091,7 +21137,7 @@
         <p:spPr>
           <a:xfrm>
             <a:off x="4246282" y="1474623"/>
-            <a:ext cx="3547872" cy="73152"/>
+            <a:ext cx="3255264" cy="73152"/>
           </a:xfrm>
           <a:prstGeom prst="rect">
             <a:avLst/>
@@ -21251,7 +21297,7 @@
         <p:spPr>
           <a:xfrm>
             <a:off x="7839874" y="1474623"/>
-            <a:ext cx="3547872" cy="4023360"/>
+            <a:ext cx="3300984" cy="4023360"/>
           </a:xfrm>
           <a:prstGeom prst="roundRect">
             <a:avLst/>
@@ -21299,7 +21345,7 @@
         <p:spPr>
           <a:xfrm>
             <a:off x="7839874" y="1474623"/>
-            <a:ext cx="3547872" cy="73152"/>
+            <a:ext cx="3255264" cy="73152"/>
           </a:xfrm>
           <a:prstGeom prst="rect">
             <a:avLst/>
@@ -22081,7 +22127,7 @@
         </p:nvSpPr>
         <p:spPr>
           <a:xfrm>
-            <a:off x="731520" y="370909"/>
+            <a:off x="484384" y="418457"/>
             <a:ext cx="10698480" cy="677108"/>
           </a:xfrm>
           <a:prstGeom prst="rect">
@@ -22128,7 +22174,7 @@
         </p:nvSpPr>
         <p:spPr>
           <a:xfrm>
-            <a:off x="731520" y="1067013"/>
+            <a:off x="731520" y="1314149"/>
             <a:ext cx="10698480" cy="430887"/>
           </a:xfrm>
           <a:prstGeom prst="rect">
@@ -22153,7 +22199,43 @@
               <a:rPr sz="1600" dirty="0">
                 <a:latin typeface="Avenir Next" panose="020B0503020202020204" pitchFamily="34" charset="0"/>
               </a:rPr>
-              <a:t>Greenwashing is not just a distant corporate issue—it directly affects our wallets, our choices, and our future.</a:t>
+              <a:t>Greenwashing is not</a:t>
+            </a:r>
+            <a:r>
+              <a:rPr lang="en-US" sz="1600" dirty="0">
+                <a:latin typeface="Avenir Next" panose="020B0503020202020204" pitchFamily="34" charset="0"/>
+              </a:rPr>
+              <a:t> </a:t>
+            </a:r>
+            <a:r>
+              <a:rPr sz="1600" dirty="0">
+                <a:latin typeface="Avenir Next" panose="020B0503020202020204" pitchFamily="34" charset="0"/>
+              </a:rPr>
+              <a:t>a distant</a:t>
+            </a:r>
+            <a:r>
+              <a:rPr lang="en-US" sz="1600" dirty="0">
+                <a:latin typeface="Avenir Next" panose="020B0503020202020204" pitchFamily="34" charset="0"/>
+              </a:rPr>
+              <a:t> </a:t>
+            </a:r>
+            <a:r>
+              <a:rPr sz="1600" dirty="0">
+                <a:latin typeface="Avenir Next" panose="020B0503020202020204" pitchFamily="34" charset="0"/>
+              </a:rPr>
+              <a:t>issue</a:t>
+            </a:r>
+            <a:r>
+              <a:rPr lang="en-US" sz="1600" dirty="0">
+                <a:latin typeface="Avenir Next" panose="020B0503020202020204" pitchFamily="34" charset="0"/>
+              </a:rPr>
+              <a:t>, </a:t>
+            </a:r>
+            <a:r>
+              <a:rPr sz="1600" dirty="0">
+                <a:latin typeface="Avenir Next" panose="020B0503020202020204" pitchFamily="34" charset="0"/>
+              </a:rPr>
+              <a:t>it directly affects our wallets, our choices, and our future.</a:t>
             </a:r>
           </a:p>
         </p:txBody>
@@ -22166,7 +22248,7 @@
         </p:nvSpPr>
         <p:spPr>
           <a:xfrm>
-            <a:off x="731520" y="1737360"/>
+            <a:off x="731520" y="2182205"/>
             <a:ext cx="3383280" cy="3474720"/>
           </a:xfrm>
           <a:prstGeom prst="roundRect">
@@ -22214,7 +22296,7 @@
         </p:nvSpPr>
         <p:spPr>
           <a:xfrm>
-            <a:off x="731520" y="1737360"/>
+            <a:off x="731520" y="2182205"/>
             <a:ext cx="3383280" cy="109728"/>
           </a:xfrm>
           <a:prstGeom prst="rect">
@@ -22260,7 +22342,7 @@
         </p:nvSpPr>
         <p:spPr>
           <a:xfrm>
-            <a:off x="868680" y="1920240"/>
+            <a:off x="868680" y="2365085"/>
             <a:ext cx="3108960" cy="2908489"/>
           </a:xfrm>
           <a:prstGeom prst="rect">
@@ -22364,7 +22446,7 @@
         </p:nvSpPr>
         <p:spPr>
           <a:xfrm>
-            <a:off x="4389120" y="1737360"/>
+            <a:off x="4389120" y="2182205"/>
             <a:ext cx="3383280" cy="3474720"/>
           </a:xfrm>
           <a:prstGeom prst="roundRect">
@@ -22412,7 +22494,7 @@
         </p:nvSpPr>
         <p:spPr>
           <a:xfrm>
-            <a:off x="4389120" y="1737360"/>
+            <a:off x="4389120" y="2182205"/>
             <a:ext cx="3383280" cy="109728"/>
           </a:xfrm>
           <a:prstGeom prst="rect">
@@ -22458,7 +22540,7 @@
         </p:nvSpPr>
         <p:spPr>
           <a:xfrm>
-            <a:off x="4526280" y="1920240"/>
+            <a:off x="4526280" y="2365085"/>
             <a:ext cx="3108960" cy="3154710"/>
           </a:xfrm>
           <a:prstGeom prst="rect">
@@ -22562,7 +22644,7 @@
         </p:nvSpPr>
         <p:spPr>
           <a:xfrm>
-            <a:off x="8046720" y="1737360"/>
+            <a:off x="8046720" y="2182205"/>
             <a:ext cx="3383280" cy="3474720"/>
           </a:xfrm>
           <a:prstGeom prst="roundRect">
@@ -22610,7 +22692,7 @@
         </p:nvSpPr>
         <p:spPr>
           <a:xfrm>
-            <a:off x="8046720" y="1737360"/>
+            <a:off x="8046720" y="2182205"/>
             <a:ext cx="3383280" cy="109728"/>
           </a:xfrm>
           <a:prstGeom prst="rect">
@@ -22656,7 +22738,7 @@
         </p:nvSpPr>
         <p:spPr>
           <a:xfrm>
-            <a:off x="8183880" y="1920240"/>
+            <a:off x="8183880" y="2365085"/>
             <a:ext cx="3108960" cy="3154710"/>
           </a:xfrm>
           <a:prstGeom prst="rect">
@@ -22720,7 +22802,19 @@
               <a:rPr sz="1600" dirty="0">
                 <a:latin typeface="Avenir Next" panose="020B0503020202020204" pitchFamily="34" charset="0"/>
               </a:rPr>
-              <a:t>• Corporate slogans like 'Net-Zero by 2050' create a false comfort that someone else is solving the climate crisis.</a:t>
+              <a:t>• </a:t>
+            </a:r>
+            <a:r>
+              <a:rPr lang="en-US" sz="1600" dirty="0">
+                <a:latin typeface="Avenir Next" panose="020B0503020202020204" pitchFamily="34" charset="0"/>
+              </a:rPr>
+              <a:t>Un-substantiated slogans like </a:t>
+            </a:r>
+            <a:r>
+              <a:rPr sz="1600" dirty="0">
+                <a:latin typeface="Avenir Next" panose="020B0503020202020204" pitchFamily="34" charset="0"/>
+              </a:rPr>
+              <a:t>'Net-Zero by 2050' create a false comfort that someone else is solving the climate crisis.</a:t>
             </a:r>
           </a:p>
           <a:p>
@@ -22759,23 +22853,41 @@
               <a:rPr sz="1600" dirty="0">
                 <a:latin typeface="Avenir Next" panose="020B0503020202020204" pitchFamily="34" charset="0"/>
               </a:rPr>
-              <a:t>delays urgent action, while extreme weather and toxic pollution directly threaten our families.</a:t>
-            </a:r>
-          </a:p>
-        </p:txBody>
-      </p:sp>
-      <p:sp>
-        <p:nvSpPr>
-          <p:cNvPr id="15" name="Rounded Rectangle 14"/>
+              <a:t>delays urgent </a:t>
+            </a:r>
+            <a:r>
+              <a:rPr lang="en-US" sz="1600" dirty="0">
+                <a:latin typeface="Avenir Next" panose="020B0503020202020204" pitchFamily="34" charset="0"/>
+              </a:rPr>
+              <a:t>climate </a:t>
+            </a:r>
+            <a:r>
+              <a:rPr sz="1600" dirty="0">
+                <a:latin typeface="Avenir Next" panose="020B0503020202020204" pitchFamily="34" charset="0"/>
+              </a:rPr>
+              <a:t>action, while extreme weather and toxic pollution directly threaten our families.</a:t>
+            </a:r>
+          </a:p>
+        </p:txBody>
+      </p:sp>
+      <p:sp>
+        <p:nvSpPr>
+          <p:cNvPr id="2" name="Rectangle 1">
+            <a:extLst>
+              <a:ext uri="{FF2B5EF4-FFF2-40B4-BE49-F238E27FC236}">
+                <a16:creationId xmlns:a16="http://schemas.microsoft.com/office/drawing/2014/main" id="{66655456-B331-7B6A-DA3E-76E0DEDDAA45}"/>
+              </a:ext>
+            </a:extLst>
+          </p:cNvPr>
           <p:cNvSpPr/>
           <p:nvPr/>
         </p:nvSpPr>
         <p:spPr>
           <a:xfrm>
-            <a:off x="731520" y="5394960"/>
-            <a:ext cx="10698480" cy="1005840"/>
-          </a:xfrm>
-          <a:prstGeom prst="roundRect">
+            <a:off x="0" y="0"/>
+            <a:ext cx="12191695" cy="201168"/>
+          </a:xfrm>
+          <a:prstGeom prst="rect">
             <a:avLst/>
           </a:prstGeom>
           <a:solidFill>
@@ -22800,76 +22912,11 @@
           </a:fontRef>
         </p:style>
         <p:txBody>
-          <a:bodyPr wrap="square" lIns="274320" tIns="137160" rIns="274320" rtlCol="0" anchor="ctr"/>
-          <a:lstStyle/>
-          <a:p>
-            <a:pPr algn="ctr">
-              <a:spcAft>
-                <a:spcPts val="400"/>
-              </a:spcAft>
-              <a:defRPr sz="1100" b="1">
-                <a:solidFill>
-                  <a:srgbClr val="F5C542"/>
-                </a:solidFill>
-              </a:defRPr>
-            </a:pPr>
-            <a:r>
-              <a:rPr dirty="0">
-                <a:latin typeface="Avenir Next" panose="020B0503020202020204" pitchFamily="34" charset="0"/>
-              </a:rPr>
-              <a:t>THE </a:t>
-            </a:r>
-            <a:r>
-              <a:rPr lang="en-US" dirty="0">
-                <a:latin typeface="Avenir Next" panose="020B0503020202020204" pitchFamily="34" charset="0"/>
-              </a:rPr>
-              <a:t>PROBLEM</a:t>
-            </a:r>
-            <a:r>
-              <a:rPr dirty="0">
-                <a:latin typeface="Avenir Next" panose="020B0503020202020204" pitchFamily="34" charset="0"/>
-              </a:rPr>
-              <a:t> </a:t>
-            </a:r>
-            <a:r>
-              <a:rPr lang="en-US" dirty="0">
-                <a:latin typeface="Avenir Next" panose="020B0503020202020204" pitchFamily="34" charset="0"/>
-              </a:rPr>
-              <a:t>IN FRONT OF</a:t>
-            </a:r>
-            <a:r>
-              <a:rPr dirty="0">
-                <a:latin typeface="Avenir Next" panose="020B0503020202020204" pitchFamily="34" charset="0"/>
-              </a:rPr>
-              <a:t> US:</a:t>
-            </a:r>
-          </a:p>
-          <a:p>
-            <a:pPr algn="ctr">
-              <a:defRPr sz="1500" b="1" i="1">
-                <a:solidFill>
-                  <a:srgbClr val="FFFFFF"/>
-                </a:solidFill>
-              </a:defRPr>
-            </a:pPr>
-            <a:r>
-              <a:rPr dirty="0">
-                <a:latin typeface="Avenir Next" panose="020B0503020202020204" pitchFamily="34" charset="0"/>
-              </a:rPr>
-              <a:t>“When every label claims to be 'green', how do </a:t>
-            </a:r>
-            <a:r>
-              <a:rPr lang="en-US" dirty="0">
-                <a:latin typeface="Avenir Next" panose="020B0503020202020204" pitchFamily="34" charset="0"/>
-              </a:rPr>
-              <a:t>we</a:t>
-            </a:r>
-            <a:r>
-              <a:rPr dirty="0">
-                <a:latin typeface="Avenir Next" panose="020B0503020202020204" pitchFamily="34" charset="0"/>
-              </a:rPr>
-              <a:t> protect our wallet, our trust and our family's future?”</a:t>
-            </a:r>
+          <a:bodyPr rtlCol="0" anchor="ctr"/>
+          <a:lstStyle/>
+          <a:p>
+            <a:pPr algn="ctr"/>
+            <a:endParaRPr/>
           </a:p>
         </p:txBody>
       </p:sp>
@@ -22991,7 +23038,7 @@
                 </a:solidFill>
                 <a:latin typeface="Avenir Next Demi Bold"/>
               </a:rPr>
-              <a:t>: As </a:t>
+              <a:t> </a:t>
             </a:r>
             <a:r>
               <a:rPr sz="3200" b="1" dirty="0">
@@ -23000,7 +23047,7 @@
                 </a:solidFill>
                 <a:latin typeface="Avenir Next Demi Bold"/>
               </a:rPr>
-              <a:t>Visible in India</a:t>
+              <a:t>in India</a:t>
             </a:r>
           </a:p>
         </p:txBody>
@@ -23014,7 +23061,7 @@
         <p:spPr>
           <a:xfrm>
             <a:off x="783524" y="1614768"/>
-            <a:ext cx="3166684" cy="2968856"/>
+            <a:ext cx="3009045" cy="2574173"/>
           </a:xfrm>
           <a:prstGeom prst="roundRect">
             <a:avLst/>
@@ -23061,8 +23108,8 @@
         </p:nvSpPr>
         <p:spPr>
           <a:xfrm>
-            <a:off x="948116" y="1721529"/>
-            <a:ext cx="2207454" cy="553533"/>
+            <a:off x="713336" y="1560889"/>
+            <a:ext cx="2782636" cy="553533"/>
           </a:xfrm>
           <a:prstGeom prst="roundRect">
             <a:avLst/>
@@ -23165,8 +23212,8 @@
         </p:nvSpPr>
         <p:spPr>
           <a:xfrm>
-            <a:off x="987552" y="2752875"/>
-            <a:ext cx="2670048" cy="1384995"/>
+            <a:off x="783524" y="2693225"/>
+            <a:ext cx="2712448" cy="1292662"/>
           </a:xfrm>
           <a:prstGeom prst="rect">
             <a:avLst/>
@@ -23179,7 +23226,9 @@
           </a:bodyPr>
           <a:lstStyle/>
           <a:p>
-            <a:pPr>
+            <a:pPr marL="285750" indent="-285750" algn="just">
+              <a:buFont typeface="Arial" panose="020B0604020202020204" pitchFamily="34" charset="0"/>
+              <a:buChar char="•"/>
               <a:defRPr sz="1150" b="0">
                 <a:solidFill>
                   <a:srgbClr val="2A2A2A"/>
@@ -23188,31 +23237,49 @@
               </a:defRPr>
             </a:pPr>
             <a:r>
-              <a:rPr sz="1400" dirty="0">
+              <a:rPr sz="1300" b="1" dirty="0">
                 <a:latin typeface="Avenir Next" panose="020B0503020202020204" pitchFamily="34" charset="0"/>
               </a:rPr>
               <a:t>ASCI reviewed 211 environmental ads in </a:t>
             </a:r>
             <a:r>
-              <a:rPr lang="en-US" sz="1400" dirty="0">
-                <a:latin typeface="Avenir Next" panose="020B0503020202020204" pitchFamily="34" charset="0"/>
-              </a:rPr>
-              <a:t>its 2024-25 Annual Report </a:t>
-            </a:r>
-            <a:r>
-              <a:rPr sz="1400" dirty="0">
-                <a:latin typeface="Avenir Next" panose="020B0503020202020204" pitchFamily="34" charset="0"/>
-              </a:rPr>
-              <a:t>and every one </a:t>
-            </a:r>
-            <a:r>
-              <a:rPr lang="en-US" sz="1400" dirty="0">
+              <a:rPr lang="en-US" sz="1300" b="1" dirty="0">
+                <a:latin typeface="Avenir Next" panose="020B0503020202020204" pitchFamily="34" charset="0"/>
+              </a:rPr>
+              <a:t>its 2024-25 Annual Report.</a:t>
+            </a:r>
+          </a:p>
+          <a:p>
+            <a:pPr marL="285750" indent="-285750" algn="just">
+              <a:buFont typeface="Arial" panose="020B0604020202020204" pitchFamily="34" charset="0"/>
+              <a:buChar char="•"/>
+              <a:defRPr sz="1150" b="0">
+                <a:solidFill>
+                  <a:srgbClr val="2A2A2A"/>
+                </a:solidFill>
+                <a:latin typeface="Avenir Next"/>
+              </a:defRPr>
+            </a:pPr>
+            <a:r>
+              <a:rPr lang="en-US" sz="1300" b="1" dirty="0">
+                <a:latin typeface="Avenir Next" panose="020B0503020202020204" pitchFamily="34" charset="0"/>
+              </a:rPr>
+              <a:t>A</a:t>
+            </a:r>
+            <a:r>
+              <a:rPr sz="1300" b="1" dirty="0">
+                <a:latin typeface="Avenir Next" panose="020B0503020202020204" pitchFamily="34" charset="0"/>
+              </a:rPr>
+              <a:t>nd every one </a:t>
+            </a:r>
+            <a:r>
+              <a:rPr lang="en-US" sz="1300" b="1" dirty="0">
                 <a:latin typeface="Avenir Next" panose="020B0503020202020204" pitchFamily="34" charset="0"/>
               </a:rPr>
               <a:t>of them </a:t>
             </a:r>
             <a:r>
-              <a:rPr sz="1400" dirty="0">
+              <a:rPr sz="1300" b="1" dirty="0">
                 <a:latin typeface="Avenir Next" panose="020B0503020202020204" pitchFamily="34" charset="0"/>
               </a:rPr>
               <a:t>required modification for lack of substantiation.</a:t>
@@ -23276,7 +23343,7 @@
         </p:nvSpPr>
         <p:spPr>
           <a:xfrm>
-            <a:off x="4315968" y="1721528"/>
+            <a:off x="4068831" y="1548531"/>
             <a:ext cx="2542032" cy="553189"/>
           </a:xfrm>
           <a:prstGeom prst="roundRect">
@@ -23352,8 +23419,8 @@
         </p:nvSpPr>
         <p:spPr>
           <a:xfrm>
-            <a:off x="4226470" y="2299101"/>
-            <a:ext cx="2722970" cy="738664"/>
+            <a:off x="4169811" y="2221724"/>
+            <a:ext cx="2945376" cy="2492990"/>
           </a:xfrm>
           <a:prstGeom prst="rect">
             <a:avLst/>
@@ -23366,7 +23433,7 @@
           </a:bodyPr>
           <a:lstStyle/>
           <a:p>
-            <a:pPr marL="285750" indent="-285750" algn="l">
+            <a:pPr marL="285750" indent="-285750" algn="just">
               <a:buFont typeface="Arial" panose="020B0604020202020204" pitchFamily="34" charset="0"/>
               <a:buChar char="•"/>
               <a:defRPr sz="1150" b="1">
@@ -23377,40 +23444,30 @@
               </a:defRPr>
             </a:pPr>
             <a:r>
-              <a:rPr sz="1400" dirty="0">
+              <a:rPr sz="1300" dirty="0">
                 <a:latin typeface="Avenir Next" panose="020B0503020202020204" pitchFamily="34" charset="0"/>
               </a:rPr>
               <a:t>54% of NSE-listed firms in one study engaged in greenwashing.</a:t>
             </a:r>
-            <a:endParaRPr lang="en-US" sz="1400" dirty="0">
+            <a:endParaRPr lang="en-US" sz="1300" dirty="0">
               <a:latin typeface="Avenir Next" panose="020B0503020202020204" pitchFamily="34" charset="0"/>
             </a:endParaRPr>
           </a:p>
-        </p:txBody>
-      </p:sp>
-      <p:sp>
-        <p:nvSpPr>
-          <p:cNvPr id="16" name="TextBox 15"/>
-          <p:cNvSpPr txBox="1"/>
-          <p:nvPr/>
-        </p:nvSpPr>
-        <p:spPr>
-          <a:xfrm>
-            <a:off x="4226470" y="3008074"/>
-            <a:ext cx="2722970" cy="738664"/>
-          </a:xfrm>
-          <a:prstGeom prst="rect">
-            <a:avLst/>
-          </a:prstGeom>
-          <a:noFill/>
-        </p:spPr>
-        <p:txBody>
-          <a:bodyPr wrap="square" lIns="91440" tIns="45720" rIns="91440" bIns="45720" anchor="t">
-            <a:spAutoFit/>
-          </a:bodyPr>
-          <a:lstStyle/>
-          <a:p>
-            <a:pPr marL="342900" indent="-342900">
+          <a:p>
+            <a:pPr algn="just">
+              <a:defRPr sz="1150" b="1">
+                <a:solidFill>
+                  <a:srgbClr val="2A2A2A"/>
+                </a:solidFill>
+                <a:latin typeface="Avenir Next"/>
+              </a:defRPr>
+            </a:pPr>
+            <a:endParaRPr lang="en-US" sz="1050" dirty="0">
+              <a:latin typeface="Avenir Next" panose="020B0503020202020204" pitchFamily="34" charset="0"/>
+            </a:endParaRPr>
+          </a:p>
+          <a:p>
+            <a:pPr marL="285750" indent="-285750" algn="just">
               <a:buFont typeface="Arial" panose="020B0604020202020204" pitchFamily="34" charset="0"/>
               <a:buChar char="•"/>
               <a:defRPr sz="1150" b="1">
@@ -23421,55 +23478,30 @@
               </a:defRPr>
             </a:pPr>
             <a:r>
-              <a:rPr sz="1400" dirty="0">
-                <a:latin typeface="Avenir Next" panose="020B0503020202020204" pitchFamily="34" charset="0"/>
-              </a:rPr>
-              <a:t>47% of NIFTY 50 companies were flagged in </a:t>
-            </a:r>
-            <a:r>
-              <a:rPr lang="en-US" sz="1400" dirty="0">
-                <a:latin typeface="Avenir Next" panose="020B0503020202020204" pitchFamily="34" charset="0"/>
-              </a:rPr>
-              <a:t>another research</a:t>
-            </a:r>
-            <a:r>
-              <a:rPr sz="1400" dirty="0">
-                <a:latin typeface="Avenir Next" panose="020B0503020202020204" pitchFamily="34" charset="0"/>
-              </a:rPr>
-              <a:t>.</a:t>
-            </a:r>
-            <a:endParaRPr lang="en-US" sz="1400" dirty="0">
+              <a:rPr lang="en-IN" sz="1300" dirty="0">
+                <a:latin typeface="Avenir Next" panose="020B0503020202020204" pitchFamily="34" charset="0"/>
+              </a:rPr>
+              <a:t>47% of NIFTY 50 companies were flagged in another research.</a:t>
+            </a:r>
+          </a:p>
+          <a:p>
+            <a:pPr algn="just">
+              <a:defRPr sz="1150" b="1">
+                <a:solidFill>
+                  <a:srgbClr val="2A2A2A"/>
+                </a:solidFill>
+                <a:latin typeface="Avenir Next"/>
+              </a:defRPr>
+            </a:pPr>
+            <a:endParaRPr lang="en-IN" sz="1050" dirty="0">
               <a:latin typeface="Avenir Next" panose="020B0503020202020204" pitchFamily="34" charset="0"/>
             </a:endParaRPr>
           </a:p>
-        </p:txBody>
-      </p:sp>
-      <p:sp>
-        <p:nvSpPr>
-          <p:cNvPr id="17" name="TextBox 16"/>
-          <p:cNvSpPr txBox="1"/>
-          <p:nvPr/>
-        </p:nvSpPr>
-        <p:spPr>
-          <a:xfrm>
-            <a:off x="4212151" y="3692983"/>
-            <a:ext cx="2938457" cy="954107"/>
-          </a:xfrm>
-          <a:prstGeom prst="rect">
-            <a:avLst/>
-          </a:prstGeom>
-          <a:noFill/>
-        </p:spPr>
-        <p:txBody>
-          <a:bodyPr wrap="square" anchor="t">
-            <a:spAutoFit/>
-          </a:bodyPr>
-          <a:lstStyle/>
-          <a:p>
-            <a:pPr marL="285750" indent="-285750" algn="l">
+          <a:p>
+            <a:pPr marL="285750" indent="-285750" algn="just">
               <a:buFont typeface="Arial" panose="020B0604020202020204" pitchFamily="34" charset="0"/>
               <a:buChar char="•"/>
-              <a:defRPr sz="1080" b="0">
+              <a:defRPr sz="1150" b="1">
                 <a:solidFill>
                   <a:srgbClr val="2A2A2A"/>
                 </a:solidFill>
@@ -23477,7 +23509,7 @@
               </a:defRPr>
             </a:pPr>
             <a:r>
-              <a:rPr sz="1400" dirty="0">
+              <a:rPr lang="en-IN" sz="1300" dirty="0">
                 <a:latin typeface="Avenir Next" panose="020B0503020202020204" pitchFamily="34" charset="0"/>
               </a:rPr>
               <a:t>CRISIL also found nearly 80% of 586 companies scored below average or weak on ESG parameters.</a:t>
@@ -23493,8 +23525,8 @@
         </p:nvSpPr>
         <p:spPr>
           <a:xfrm>
-            <a:off x="7443216" y="1614769"/>
-            <a:ext cx="4224528" cy="3352221"/>
+            <a:off x="7588036" y="1614769"/>
+            <a:ext cx="4079708" cy="3352221"/>
           </a:xfrm>
           <a:prstGeom prst="roundRect">
             <a:avLst/>
@@ -23541,7 +23573,7 @@
         </p:nvSpPr>
         <p:spPr>
           <a:xfrm>
-            <a:off x="7644382" y="1721529"/>
+            <a:off x="7496101" y="1560889"/>
             <a:ext cx="1792223" cy="426572"/>
           </a:xfrm>
           <a:prstGeom prst="roundRect">
@@ -23600,7 +23632,7 @@
         </p:nvSpPr>
         <p:spPr>
           <a:xfrm>
-            <a:off x="7699248" y="2289590"/>
+            <a:off x="7588036" y="2166020"/>
             <a:ext cx="1591056" cy="400110"/>
           </a:xfrm>
           <a:prstGeom prst="rect">
@@ -23626,19 +23658,7 @@
               <a:rPr sz="2000" dirty="0">
                 <a:latin typeface="Avenir Next" panose="020B0503020202020204" pitchFamily="34" charset="0"/>
               </a:rPr>
-              <a:t>USD 1.2</a:t>
-            </a:r>
-            <a:r>
-              <a:rPr lang="en-US" sz="2000" dirty="0">
-                <a:latin typeface="Avenir Next" panose="020B0503020202020204" pitchFamily="34" charset="0"/>
-              </a:rPr>
-              <a:t> </a:t>
-            </a:r>
-            <a:r>
-              <a:rPr sz="2000" dirty="0">
-                <a:latin typeface="Avenir Next" panose="020B0503020202020204" pitchFamily="34" charset="0"/>
-              </a:rPr>
-              <a:t>B</a:t>
+              <a:t>USD 1.2B</a:t>
             </a:r>
             <a:endParaRPr lang="en-US" sz="2000" dirty="0">
               <a:latin typeface="Avenir Next" panose="020B0503020202020204" pitchFamily="34" charset="0"/>
@@ -23654,7 +23674,7 @@
         </p:nvSpPr>
         <p:spPr>
           <a:xfrm>
-            <a:off x="7719478" y="2634238"/>
+            <a:off x="7719478" y="2510668"/>
             <a:ext cx="1591056" cy="830997"/>
           </a:xfrm>
           <a:prstGeom prst="rect">
@@ -23668,7 +23688,7 @@
           </a:bodyPr>
           <a:lstStyle/>
           <a:p>
-            <a:pPr algn="ctr">
+            <a:pPr algn="just">
               <a:defRPr sz="1050" b="0">
                 <a:solidFill>
                   <a:srgbClr val="2A2A2A"/>
@@ -23693,7 +23713,7 @@
         </p:nvSpPr>
         <p:spPr>
           <a:xfrm>
-            <a:off x="9400032" y="2289590"/>
+            <a:off x="9400032" y="2166020"/>
             <a:ext cx="1792224" cy="400110"/>
           </a:xfrm>
           <a:prstGeom prst="rect">
@@ -23719,19 +23739,7 @@
               <a:rPr sz="2000" dirty="0">
                 <a:latin typeface="Avenir Next" panose="020B0503020202020204" pitchFamily="34" charset="0"/>
               </a:rPr>
-              <a:t>USD 55.9</a:t>
-            </a:r>
-            <a:r>
-              <a:rPr lang="en-US" sz="2000" dirty="0">
-                <a:latin typeface="Avenir Next" panose="020B0503020202020204" pitchFamily="34" charset="0"/>
-              </a:rPr>
-              <a:t> </a:t>
-            </a:r>
-            <a:r>
-              <a:rPr sz="2000" dirty="0">
-                <a:latin typeface="Avenir Next" panose="020B0503020202020204" pitchFamily="34" charset="0"/>
-              </a:rPr>
-              <a:t>B</a:t>
+              <a:t>USD 55.9B</a:t>
             </a:r>
             <a:endParaRPr lang="en-US" sz="2000" dirty="0">
               <a:latin typeface="Avenir Next" panose="020B0503020202020204" pitchFamily="34" charset="0"/>
@@ -23747,8 +23755,8 @@
         </p:nvSpPr>
         <p:spPr>
           <a:xfrm>
-            <a:off x="9349052" y="2701672"/>
-            <a:ext cx="1901952" cy="830997"/>
+            <a:off x="9586796" y="2528674"/>
+            <a:ext cx="1591056" cy="830997"/>
           </a:xfrm>
           <a:prstGeom prst="rect">
             <a:avLst/>
@@ -23761,7 +23769,7 @@
           </a:bodyPr>
           <a:lstStyle/>
           <a:p>
-            <a:pPr algn="ctr">
+            <a:pPr algn="just">
               <a:defRPr sz="1050" b="0">
                 <a:solidFill>
                   <a:srgbClr val="2A2A2A"/>
@@ -23786,8 +23794,8 @@
         </p:nvSpPr>
         <p:spPr>
           <a:xfrm>
-            <a:off x="7702107" y="3585394"/>
-            <a:ext cx="3657600" cy="1384995"/>
+            <a:off x="7702107" y="3461824"/>
+            <a:ext cx="3657600" cy="1431161"/>
           </a:xfrm>
           <a:prstGeom prst="rect">
             <a:avLst/>
@@ -23800,7 +23808,9 @@
           </a:bodyPr>
           <a:lstStyle/>
           <a:p>
-            <a:pPr algn="ctr">
+            <a:pPr marL="285750" indent="-285750" algn="just">
+              <a:buFont typeface="Arial" panose="020B0604020202020204" pitchFamily="34" charset="0"/>
+              <a:buChar char="•"/>
               <a:defRPr sz="1070" b="1">
                 <a:solidFill>
                   <a:srgbClr val="A23E2A"/>
@@ -23809,17 +23819,29 @@
               </a:defRPr>
             </a:pPr>
             <a:r>
-              <a:rPr sz="1400" dirty="0">
+              <a:rPr sz="1300" dirty="0">
+                <a:solidFill>
+                  <a:schemeClr val="tx1">
+                    <a:lumMod val="95000"/>
+                    <a:lumOff val="5000"/>
+                  </a:schemeClr>
+                </a:solidFill>
                 <a:latin typeface="Avenir Next" panose="020B0503020202020204" pitchFamily="34" charset="0"/>
               </a:rPr>
               <a:t>India is already the fourth-largest emerging-market source of sustainable debt globally, </a:t>
             </a:r>
-            <a:endParaRPr lang="en-US" sz="1400" dirty="0">
+            <a:endParaRPr lang="en-US" sz="1300" dirty="0">
+              <a:solidFill>
+                <a:schemeClr val="tx1">
+                  <a:lumMod val="95000"/>
+                  <a:lumOff val="5000"/>
+                </a:schemeClr>
+              </a:solidFill>
               <a:latin typeface="Avenir Next" panose="020B0503020202020204" pitchFamily="34" charset="0"/>
             </a:endParaRPr>
           </a:p>
           <a:p>
-            <a:pPr algn="ctr">
+            <a:pPr algn="just">
               <a:defRPr sz="1070" b="1">
                 <a:solidFill>
                   <a:srgbClr val="A23E2A"/>
@@ -23827,26 +23849,71 @@
                 <a:latin typeface="Avenir Next"/>
               </a:defRPr>
             </a:pPr>
-            <a:r>
-              <a:rPr lang="en-US" sz="1400" dirty="0">
+            <a:endParaRPr lang="en-US" sz="600" dirty="0">
+              <a:solidFill>
+                <a:schemeClr val="tx1">
+                  <a:lumMod val="95000"/>
+                  <a:lumOff val="5000"/>
+                </a:schemeClr>
+              </a:solidFill>
+              <a:latin typeface="Avenir Next" panose="020B0503020202020204" pitchFamily="34" charset="0"/>
+            </a:endParaRPr>
+          </a:p>
+          <a:p>
+            <a:pPr marL="285750" indent="-285750" algn="just">
+              <a:buFont typeface="Arial" panose="020B0604020202020204" pitchFamily="34" charset="0"/>
+              <a:buChar char="•"/>
+              <a:defRPr sz="1070" b="1">
+                <a:solidFill>
+                  <a:srgbClr val="A23E2A"/>
+                </a:solidFill>
+                <a:latin typeface="Avenir Next"/>
+              </a:defRPr>
+            </a:pPr>
+            <a:r>
+              <a:rPr lang="en-US" sz="1300" dirty="0">
+                <a:solidFill>
+                  <a:schemeClr val="tx1">
+                    <a:lumMod val="95000"/>
+                    <a:lumOff val="5000"/>
+                  </a:schemeClr>
+                </a:solidFill>
                 <a:latin typeface="Avenir Next" panose="020B0503020202020204" pitchFamily="34" charset="0"/>
               </a:rPr>
               <a:t>And</a:t>
             </a:r>
             <a:r>
-              <a:rPr sz="1400" dirty="0">
+              <a:rPr sz="1300" dirty="0">
+                <a:solidFill>
+                  <a:schemeClr val="tx1">
+                    <a:lumMod val="95000"/>
+                    <a:lumOff val="5000"/>
+                  </a:schemeClr>
+                </a:solidFill>
                 <a:latin typeface="Avenir Next" panose="020B0503020202020204" pitchFamily="34" charset="0"/>
               </a:rPr>
               <a:t> RBI research finds ESG </a:t>
             </a:r>
             <a:r>
-              <a:rPr lang="en-US" sz="1400" dirty="0">
+              <a:rPr lang="en-US" sz="1300" dirty="0">
+                <a:solidFill>
+                  <a:schemeClr val="tx1">
+                    <a:lumMod val="95000"/>
+                    <a:lumOff val="5000"/>
+                  </a:schemeClr>
+                </a:solidFill>
                 <a:latin typeface="Avenir Next" panose="020B0503020202020204" pitchFamily="34" charset="0"/>
               </a:rPr>
               <a:t>claim based stocks have returns</a:t>
             </a:r>
             <a:r>
-              <a:rPr sz="1400" dirty="0">
+              <a:rPr sz="1300" dirty="0">
+                <a:solidFill>
+                  <a:schemeClr val="tx1">
+                    <a:lumMod val="95000"/>
+                    <a:lumOff val="5000"/>
+                  </a:schemeClr>
+                </a:solidFill>
                 <a:latin typeface="Avenir Next" panose="020B0503020202020204" pitchFamily="34" charset="0"/>
               </a:rPr>
               <a:t> above market predictions.</a:t>
@@ -23862,8 +23929,8 @@
         </p:nvSpPr>
         <p:spPr>
           <a:xfrm>
-            <a:off x="770037" y="4909764"/>
-            <a:ext cx="4931936" cy="1453652"/>
+            <a:off x="770037" y="4909763"/>
+            <a:ext cx="4931936" cy="1553965"/>
           </a:xfrm>
           <a:prstGeom prst="roundRect">
             <a:avLst/>
@@ -23910,7 +23977,7 @@
         </p:nvSpPr>
         <p:spPr>
           <a:xfrm>
-            <a:off x="948116" y="5038696"/>
+            <a:off x="713336" y="4865699"/>
             <a:ext cx="3459291" cy="487833"/>
           </a:xfrm>
           <a:prstGeom prst="roundRect">
@@ -23959,7 +24026,7 @@
               <a:rPr lang="en-US" sz="1400" dirty="0">
                 <a:latin typeface="Avenir Next" panose="020B0503020202020204" pitchFamily="34" charset="0"/>
               </a:rPr>
-              <a:t>infrastructure lacks proper Verification</a:t>
+              <a:t>infrastructure in India lacks substance</a:t>
             </a:r>
             <a:endParaRPr sz="1400" dirty="0">
               <a:latin typeface="Avenir Next" panose="020B0503020202020204" pitchFamily="34" charset="0"/>
@@ -23975,8 +24042,8 @@
         </p:nvSpPr>
         <p:spPr>
           <a:xfrm>
-            <a:off x="783524" y="5555990"/>
-            <a:ext cx="4918449" cy="830997"/>
+            <a:off x="770037" y="5417225"/>
+            <a:ext cx="4918449" cy="892552"/>
           </a:xfrm>
           <a:prstGeom prst="rect">
             <a:avLst/>
@@ -23989,7 +24056,9 @@
           </a:bodyPr>
           <a:lstStyle/>
           <a:p>
-            <a:pPr algn="ctr">
+            <a:pPr marL="171450" indent="-171450" algn="just">
+              <a:buFont typeface="Arial" panose="020B0604020202020204" pitchFamily="34" charset="0"/>
+              <a:buChar char="•"/>
               <a:defRPr sz="1100" b="0">
                 <a:solidFill>
                   <a:srgbClr val="2A2A2A"/>
@@ -23998,50 +24067,28 @@
               </a:defRPr>
             </a:pPr>
             <a:r>
-              <a:rPr sz="1200" dirty="0">
+              <a:rPr sz="1300" b="1" dirty="0">
                 <a:latin typeface="Avenir Next" panose="020B0503020202020204" pitchFamily="34" charset="0"/>
               </a:rPr>
               <a:t>CPCB uncovered about 600,000 fake EPR certificates in 2024, </a:t>
             </a:r>
             <a:r>
-              <a:rPr lang="en-US" sz="1200" dirty="0">
+              <a:rPr lang="en-US" sz="1300" b="1" dirty="0">
                 <a:latin typeface="Avenir Next" panose="020B0503020202020204" pitchFamily="34" charset="0"/>
               </a:rPr>
               <a:t>and NGT took </a:t>
             </a:r>
             <a:r>
-              <a:rPr lang="en-US" sz="1200" dirty="0" err="1">
+              <a:rPr lang="en-US" sz="1300" b="1" dirty="0" err="1">
                 <a:latin typeface="Avenir Next" panose="020B0503020202020204" pitchFamily="34" charset="0"/>
               </a:rPr>
               <a:t>suo</a:t>
             </a:r>
             <a:r>
-              <a:rPr lang="en-US" sz="1200" dirty="0">
-                <a:latin typeface="Avenir Next" panose="020B0503020202020204" pitchFamily="34" charset="0"/>
-              </a:rPr>
-              <a:t> moto cognizance of it; </a:t>
-            </a:r>
-          </a:p>
-          <a:p>
-            <a:pPr algn="ctr">
-              <a:defRPr sz="1100" b="0">
-                <a:solidFill>
-                  <a:srgbClr val="2A2A2A"/>
-                </a:solidFill>
-                <a:latin typeface="Avenir Next"/>
-              </a:defRPr>
-            </a:pPr>
-            <a:r>
-              <a:rPr lang="en-US" sz="1200" dirty="0">
-                <a:latin typeface="Avenir Next" panose="020B0503020202020204" pitchFamily="34" charset="0"/>
-              </a:rPr>
-              <a:t>showing</a:t>
-            </a:r>
-            <a:r>
-              <a:rPr sz="1200" dirty="0">
-                <a:latin typeface="Avenir Next" panose="020B0503020202020204" pitchFamily="34" charset="0"/>
-              </a:rPr>
-              <a:t> that the verification deficit reaches the infrastructure of environmental compliance itself.</a:t>
+              <a:rPr lang="en-US" sz="1300" b="1" dirty="0">
+                <a:latin typeface="Avenir Next" panose="020B0503020202020204" pitchFamily="34" charset="0"/>
+              </a:rPr>
+              <a:t> moto cognizance of it; showing that the verification deficit reaches the infrastructure of environmental compliance itself.</a:t>
             </a:r>
           </a:p>
         </p:txBody>
@@ -24055,7 +24102,7 @@
         <p:spPr>
           <a:xfrm>
             <a:off x="5925312" y="5390971"/>
-            <a:ext cx="5742432" cy="934460"/>
+            <a:ext cx="5742432" cy="993388"/>
           </a:xfrm>
           <a:prstGeom prst="roundRect">
             <a:avLst/>
@@ -24103,7 +24150,7 @@
         <p:spPr>
           <a:xfrm>
             <a:off x="5987728" y="5464473"/>
-            <a:ext cx="5266944" cy="738664"/>
+            <a:ext cx="5266944" cy="861774"/>
           </a:xfrm>
           <a:prstGeom prst="rect">
             <a:avLst/>
@@ -24125,15 +24172,44 @@
               </a:defRPr>
             </a:pPr>
             <a:r>
-              <a:rPr lang="en-IN" sz="1400" dirty="0">
-                <a:latin typeface="Avenir Next" panose="020B0503020202020204" pitchFamily="34" charset="0"/>
-              </a:rPr>
-              <a:t>Key Takeaway: At this scale, greenwashing is not harmless marketing hype. It distorts both consumer choice and capital allocation.</a:t>
-            </a:r>
-            <a:endParaRPr lang="en-IN" sz="1600" dirty="0">
+              <a:rPr lang="en-US" sz="1400" cap="small" dirty="0">
+                <a:latin typeface="Avenir Next" panose="020B0503020202020204" pitchFamily="34" charset="0"/>
+              </a:rPr>
+              <a:t>Greenwashing distorts the information on which consumers, investors and regulators rely on.</a:t>
+            </a:r>
+          </a:p>
+          <a:p>
+            <a:pPr algn="ctr">
+              <a:defRPr sz="1150" b="1">
+                <a:solidFill>
+                  <a:srgbClr val="12402D"/>
+                </a:solidFill>
+                <a:latin typeface="Avenir Next Demi Bold"/>
+              </a:defRPr>
+            </a:pPr>
+            <a:endParaRPr lang="en-IN" sz="600" cap="small" dirty="0">
               <a:latin typeface="Avenir Next" panose="020B0503020202020204" pitchFamily="34" charset="0"/>
             </a:endParaRPr>
           </a:p>
+          <a:p>
+            <a:pPr algn="ctr">
+              <a:defRPr sz="1150" b="1">
+                <a:solidFill>
+                  <a:srgbClr val="12402D"/>
+                </a:solidFill>
+                <a:latin typeface="Avenir Next Demi Bold"/>
+              </a:defRPr>
+            </a:pPr>
+            <a:r>
+              <a:rPr lang="en-IN" sz="1400" cap="small" dirty="0">
+                <a:latin typeface="Avenir Next" panose="020B0503020202020204" pitchFamily="34" charset="0"/>
+              </a:rPr>
+              <a:t>It affects consumer choice and capital allocation.</a:t>
+            </a:r>
+            <a:endParaRPr lang="en-IN" sz="1600" cap="small" dirty="0">
+              <a:latin typeface="Avenir Next" panose="020B0503020202020204" pitchFamily="34" charset="0"/>
+            </a:endParaRPr>
+          </a:p>
         </p:txBody>
       </p:sp>
       <p:sp>
@@ -24144,8 +24220,8 @@
         </p:nvSpPr>
         <p:spPr>
           <a:xfrm>
-            <a:off x="593901" y="6545178"/>
-            <a:ext cx="6784230" cy="261610"/>
+            <a:off x="643329" y="6557535"/>
+            <a:ext cx="8112927" cy="307777"/>
           </a:xfrm>
           <a:prstGeom prst="rect">
             <a:avLst/>
@@ -24167,23 +24243,80 @@
               </a:defRPr>
             </a:pPr>
             <a:r>
-              <a:rPr sz="1100" dirty="0"/>
+              <a:rPr sz="1400" dirty="0">
+                <a:solidFill>
+                  <a:schemeClr val="tx1">
+                    <a:lumMod val="95000"/>
+                    <a:lumOff val="5000"/>
+                  </a:schemeClr>
+                </a:solidFill>
+              </a:rPr>
               <a:t>Source base: </a:t>
             </a:r>
             <a:r>
-              <a:rPr lang="en-US" sz="1100" dirty="0"/>
+              <a:rPr lang="en-US" sz="1400" dirty="0">
+                <a:solidFill>
+                  <a:schemeClr val="tx1">
+                    <a:lumMod val="95000"/>
+                    <a:lumOff val="5000"/>
+                  </a:schemeClr>
+                </a:solidFill>
+              </a:rPr>
               <a:t>ASCI</a:t>
             </a:r>
             <a:r>
-              <a:rPr sz="1100" dirty="0"/>
-              <a:t>, CRISIL, RBI, CPCB figures</a:t>
-            </a:r>
-            <a:r>
-              <a:rPr lang="en-US" sz="1100" dirty="0"/>
-              <a:t> and NSE/NIFTY peer-reviewed studies, </a:t>
-            </a:r>
-            <a:r>
-              <a:rPr sz="1100" dirty="0"/>
+              <a:rPr sz="1400" dirty="0">
+                <a:solidFill>
+                  <a:schemeClr val="tx1">
+                    <a:lumMod val="95000"/>
+                    <a:lumOff val="5000"/>
+                  </a:schemeClr>
+                </a:solidFill>
+              </a:rPr>
+              <a:t>, RBI,</a:t>
+            </a:r>
+            <a:r>
+              <a:rPr lang="en-US" sz="1400" dirty="0">
+                <a:solidFill>
+                  <a:schemeClr val="tx1">
+                    <a:lumMod val="95000"/>
+                    <a:lumOff val="5000"/>
+                  </a:schemeClr>
+                </a:solidFill>
+              </a:rPr>
+              <a:t> CRISIL,</a:t>
+            </a:r>
+            <a:r>
+              <a:rPr sz="1400" dirty="0">
+                <a:solidFill>
+                  <a:schemeClr val="tx1">
+                    <a:lumMod val="95000"/>
+                    <a:lumOff val="5000"/>
+                  </a:schemeClr>
+                </a:solidFill>
+              </a:rPr>
+              <a:t> CPCB figures</a:t>
+            </a:r>
+            <a:r>
+              <a:rPr lang="en-US" sz="1400" dirty="0">
+                <a:solidFill>
+                  <a:schemeClr val="tx1">
+                    <a:lumMod val="95000"/>
+                    <a:lumOff val="5000"/>
+                  </a:schemeClr>
+                </a:solidFill>
+              </a:rPr>
+              <a:t> and some peer-reviewed studies, </a:t>
+            </a:r>
+            <a:r>
+              <a:rPr sz="1400" dirty="0">
+                <a:solidFill>
+                  <a:schemeClr val="tx1">
+                    <a:lumMod val="95000"/>
+                    <a:lumOff val="5000"/>
+                  </a:schemeClr>
+                </a:solidFill>
+              </a:rPr>
               <a:t>cited in the thesis.</a:t>
             </a:r>
           </a:p>
@@ -24203,8 +24336,8 @@
         </p:nvSpPr>
         <p:spPr>
           <a:xfrm>
-            <a:off x="695718" y="1088910"/>
-            <a:ext cx="4844596" cy="307777"/>
+            <a:off x="695718" y="1039482"/>
+            <a:ext cx="5464894" cy="338554"/>
           </a:xfrm>
           <a:prstGeom prst="rect">
             <a:avLst/>
@@ -24226,7 +24359,10 @@
               </a:defRPr>
             </a:pPr>
             <a:r>
-              <a:rPr lang="en-US" sz="1400" b="1" dirty="0">
+              <a:rPr lang="en-US" sz="1600" b="1" i="1" dirty="0">
+                <a:solidFill>
+                  <a:srgbClr val="12402D"/>
+                </a:solidFill>
                 <a:latin typeface="Avenir Next" panose="020B0503020202020204" pitchFamily="34" charset="0"/>
               </a:rPr>
               <a:t>Based on available data from authority-based sources</a:t>
@@ -24280,7 +24416,7 @@
         </p:nvSpPr>
         <p:spPr>
           <a:xfrm>
-            <a:off x="914400" y="428064"/>
+            <a:off x="620486" y="428064"/>
             <a:ext cx="10058400" cy="584775"/>
           </a:xfrm>
           <a:prstGeom prst="rect">
@@ -24319,55 +24455,14 @@
       </p:sp>
       <p:sp>
         <p:nvSpPr>
-          <p:cNvPr id="4" name="TextBox 3"/>
-          <p:cNvSpPr txBox="1"/>
-          <p:nvPr/>
-        </p:nvSpPr>
-        <p:spPr>
-          <a:xfrm>
-            <a:off x="731520" y="1251794"/>
-            <a:ext cx="10698480" cy="584775"/>
-          </a:xfrm>
-          <a:prstGeom prst="rect">
-            <a:avLst/>
-          </a:prstGeom>
-          <a:noFill/>
-        </p:spPr>
-        <p:txBody>
-          <a:bodyPr wrap="square" lIns="91440" tIns="45720" rIns="91440" bIns="45720" anchor="t">
-            <a:spAutoFit/>
-          </a:bodyPr>
-          <a:lstStyle/>
-          <a:p>
-            <a:pPr>
-              <a:defRPr sz="1200" b="0">
-                <a:solidFill>
-                  <a:srgbClr val="6B6B7B"/>
-                </a:solidFill>
-                <a:latin typeface="Calibri"/>
-              </a:defRPr>
-            </a:pPr>
-            <a:r>
-              <a:rPr sz="1600" b="1" dirty="0"/>
-              <a:t>Existing scholarship treats greenwashing primarily as a marketing issue. This research investigates the structural flaws in legal accountability.</a:t>
-            </a:r>
-            <a:endParaRPr lang="en-US" sz="1600" b="1" dirty="0">
-              <a:ea typeface="Calibri"/>
-              <a:cs typeface="Calibri"/>
-            </a:endParaRPr>
-          </a:p>
-        </p:txBody>
-      </p:sp>
-      <p:sp>
-        <p:nvSpPr>
           <p:cNvPr id="5" name="Rounded Rectangle 4"/>
           <p:cNvSpPr/>
           <p:nvPr/>
         </p:nvSpPr>
         <p:spPr>
           <a:xfrm>
-            <a:off x="746974" y="1850000"/>
-            <a:ext cx="5196625" cy="1080000"/>
+            <a:off x="709903" y="1181657"/>
+            <a:ext cx="10627808" cy="4267792"/>
           </a:xfrm>
           <a:prstGeom prst="roundRect">
             <a:avLst/>
@@ -24408,69 +24503,14 @@
       </p:sp>
       <p:sp>
         <p:nvSpPr>
-          <p:cNvPr id="6" name="Rounded Rectangle 5"/>
-          <p:cNvSpPr/>
-          <p:nvPr/>
-        </p:nvSpPr>
-        <p:spPr>
-          <a:xfrm>
-            <a:off x="824586" y="1970000"/>
-            <a:ext cx="547013" cy="318828"/>
-          </a:xfrm>
-          <a:prstGeom prst="roundRect">
-            <a:avLst/>
-          </a:prstGeom>
-          <a:solidFill>
-            <a:srgbClr val="0E8A74"/>
-          </a:solidFill>
-          <a:ln>
-            <a:noFill/>
-          </a:ln>
-        </p:spPr>
-        <p:style>
-          <a:lnRef idx="1">
-            <a:schemeClr val="accent1"/>
-          </a:lnRef>
-          <a:fillRef idx="3">
-            <a:schemeClr val="accent1"/>
-          </a:fillRef>
-          <a:effectRef idx="2">
-            <a:schemeClr val="accent1"/>
-          </a:effectRef>
-          <a:fontRef idx="minor">
-            <a:schemeClr val="lt1"/>
-          </a:fontRef>
-        </p:style>
-        <p:txBody>
-          <a:bodyPr rtlCol="0" anchor="ctr"/>
-          <a:lstStyle/>
-          <a:p>
-            <a:pPr algn="ctr">
-              <a:defRPr sz="900" b="1">
-                <a:solidFill>
-                  <a:srgbClr val="FFFFFF"/>
-                </a:solidFill>
-              </a:defRPr>
-            </a:pPr>
-            <a:r>
-              <a:rPr sz="1100">
-                <a:latin typeface="Avenir Next" panose="020B0503020202020204" pitchFamily="34" charset="0"/>
-              </a:rPr>
-              <a:t>Gap 1</a:t>
-            </a:r>
-          </a:p>
-        </p:txBody>
-      </p:sp>
-      <p:sp>
-        <p:nvSpPr>
           <p:cNvPr id="7" name="TextBox 6"/>
           <p:cNvSpPr txBox="1"/>
           <p:nvPr/>
         </p:nvSpPr>
         <p:spPr>
           <a:xfrm>
-            <a:off x="1475918" y="1930000"/>
-            <a:ext cx="4330521" cy="956672"/>
+            <a:off x="1004990" y="1408552"/>
+            <a:ext cx="10140803" cy="3960058"/>
           </a:xfrm>
           <a:prstGeom prst="rect">
             <a:avLst/>
@@ -24495,10 +24535,10 @@
               </a:defRPr>
             </a:pPr>
             <a:r>
-              <a:rPr dirty="0">
-                <a:latin typeface="Avenir Next" panose="020B0503020202020204" pitchFamily="34" charset="0"/>
-              </a:rPr>
-              <a:t>Board-Level Accountability</a:t>
+              <a:rPr lang="en-US" sz="1350" dirty="0">
+                <a:latin typeface="Avenir Next" panose="020B0503020202020204" pitchFamily="34" charset="0"/>
+              </a:rPr>
+              <a:t>Lack of an integrated analysis </a:t>
             </a:r>
           </a:p>
           <a:p>
@@ -24506,152 +24546,22 @@
               <a:defRPr sz="1050"/>
             </a:pPr>
             <a:r>
-              <a:rPr sz="1400" dirty="0">
-                <a:latin typeface="Avenir Next" panose="020B0503020202020204" pitchFamily="34" charset="0"/>
-              </a:rPr>
-              <a:t>Limited </a:t>
-            </a:r>
-            <a:r>
-              <a:rPr lang="en-US" sz="1400" dirty="0">
-                <a:latin typeface="Avenir Next" panose="020B0503020202020204" pitchFamily="34" charset="0"/>
-              </a:rPr>
-              <a:t>existing doctrinal </a:t>
-            </a:r>
-            <a:r>
-              <a:rPr sz="1400" dirty="0">
-                <a:latin typeface="Avenir Next" panose="020B0503020202020204" pitchFamily="34" charset="0"/>
-              </a:rPr>
-              <a:t>work on invoking Section 166(2) against misleading sustainability claims in corporate reports and ESG disclosures.</a:t>
-            </a:r>
-          </a:p>
-        </p:txBody>
-      </p:sp>
-      <p:sp>
-        <p:nvSpPr>
-          <p:cNvPr id="8" name="Rounded Rectangle 7"/>
-          <p:cNvSpPr/>
-          <p:nvPr/>
-        </p:nvSpPr>
-        <p:spPr>
-          <a:xfrm>
-            <a:off x="746974" y="3050000"/>
-            <a:ext cx="5196625" cy="1080000"/>
-          </a:xfrm>
-          <a:prstGeom prst="roundRect">
-            <a:avLst/>
-          </a:prstGeom>
-          <a:solidFill>
-            <a:srgbClr val="FFFFFF"/>
-          </a:solidFill>
-          <a:ln w="10160">
-            <a:solidFill>
-              <a:srgbClr val="DEE0E5"/>
-            </a:solidFill>
-          </a:ln>
-        </p:spPr>
-        <p:style>
-          <a:lnRef idx="1">
-            <a:schemeClr val="accent1"/>
-          </a:lnRef>
-          <a:fillRef idx="3">
-            <a:schemeClr val="accent1"/>
-          </a:fillRef>
-          <a:effectRef idx="2">
-            <a:schemeClr val="accent1"/>
-          </a:effectRef>
-          <a:fontRef idx="minor">
-            <a:schemeClr val="lt1"/>
-          </a:fontRef>
-        </p:style>
-        <p:txBody>
-          <a:bodyPr rtlCol="0" anchor="ctr"/>
-          <a:lstStyle/>
-          <a:p>
-            <a:pPr algn="ctr"/>
-            <a:endParaRPr sz="2800">
+              <a:rPr lang="en-IN" sz="1350" dirty="0">
+                <a:latin typeface="Avenir Next" panose="020B0503020202020204" pitchFamily="34" charset="0"/>
+              </a:rPr>
+              <a:t>The research gap is not the complete absence of laws or regulations tackling greenwashing, but the absence of an integrated analysis of how those rules translate into enforceable accountability.</a:t>
+            </a:r>
+          </a:p>
+          <a:p>
+            <a:pPr>
+              <a:defRPr sz="1050"/>
+            </a:pPr>
+            <a:endParaRPr lang="en-IN" sz="1350" dirty="0">
               <a:latin typeface="Avenir Next" panose="020B0503020202020204" pitchFamily="34" charset="0"/>
             </a:endParaRPr>
           </a:p>
-        </p:txBody>
-      </p:sp>
-      <p:sp>
-        <p:nvSpPr>
-          <p:cNvPr id="9" name="Rounded Rectangle 8"/>
-          <p:cNvSpPr/>
-          <p:nvPr/>
-        </p:nvSpPr>
-        <p:spPr>
-          <a:xfrm>
-            <a:off x="824586" y="3170000"/>
-            <a:ext cx="547013" cy="318828"/>
-          </a:xfrm>
-          <a:prstGeom prst="roundRect">
-            <a:avLst/>
-          </a:prstGeom>
-          <a:solidFill>
-            <a:srgbClr val="0E8A74"/>
-          </a:solidFill>
-          <a:ln>
-            <a:noFill/>
-          </a:ln>
-        </p:spPr>
-        <p:style>
-          <a:lnRef idx="1">
-            <a:schemeClr val="accent1"/>
-          </a:lnRef>
-          <a:fillRef idx="3">
-            <a:schemeClr val="accent1"/>
-          </a:fillRef>
-          <a:effectRef idx="2">
-            <a:schemeClr val="accent1"/>
-          </a:effectRef>
-          <a:fontRef idx="minor">
-            <a:schemeClr val="lt1"/>
-          </a:fontRef>
-        </p:style>
-        <p:txBody>
-          <a:bodyPr rtlCol="0" anchor="ctr"/>
-          <a:lstStyle/>
-          <a:p>
-            <a:pPr algn="ctr">
-              <a:defRPr sz="900" b="1">
-                <a:solidFill>
-                  <a:srgbClr val="FFFFFF"/>
-                </a:solidFill>
-              </a:defRPr>
-            </a:pPr>
-            <a:r>
-              <a:rPr sz="1100">
-                <a:latin typeface="Avenir Next" panose="020B0503020202020204" pitchFamily="34" charset="0"/>
-              </a:rPr>
-              <a:t>Gap 2</a:t>
-            </a:r>
-          </a:p>
-        </p:txBody>
-      </p:sp>
-      <p:sp>
-        <p:nvSpPr>
-          <p:cNvPr id="10" name="TextBox 9"/>
-          <p:cNvSpPr txBox="1"/>
-          <p:nvPr/>
-        </p:nvSpPr>
-        <p:spPr>
-          <a:xfrm>
-            <a:off x="1475918" y="3130000"/>
-            <a:ext cx="4330521" cy="956672"/>
-          </a:xfrm>
-          <a:prstGeom prst="rect">
-            <a:avLst/>
-          </a:prstGeom>
-          <a:noFill/>
-        </p:spPr>
-        <p:txBody>
-          <a:bodyPr wrap="square">
-            <a:spAutoFit/>
-          </a:bodyPr>
-          <a:lstStyle/>
-          <a:p>
-            <a:pPr algn="l">
+          <a:p>
+            <a:pPr>
               <a:spcAft>
                 <a:spcPts val="200"/>
               </a:spcAft>
@@ -24663,10 +24573,10 @@
               </a:defRPr>
             </a:pPr>
             <a:r>
-              <a:rPr dirty="0">
-                <a:latin typeface="Avenir Next" panose="020B0503020202020204" pitchFamily="34" charset="0"/>
-              </a:rPr>
-              <a:t>Regulatory Fragmentation</a:t>
+              <a:rPr lang="en-US" sz="1350" dirty="0">
+                <a:latin typeface="Avenir Next" panose="020B0503020202020204" pitchFamily="34" charset="0"/>
+              </a:rPr>
+              <a:t>Limited doctrinal work on board-level accountability for environmental claims</a:t>
             </a:r>
           </a:p>
           <a:p>
@@ -24674,140 +24584,22 @@
               <a:defRPr sz="1050"/>
             </a:pPr>
             <a:r>
-              <a:rPr sz="1400" dirty="0">
-                <a:latin typeface="Avenir Next" panose="020B0503020202020204" pitchFamily="34" charset="0"/>
-              </a:rPr>
-              <a:t>Green claims are policed across siloed regimes (MCA, SEBI, CCPA/ASCI), creating jurisdictional overlap and an accountability vacuum.</a:t>
-            </a:r>
-          </a:p>
-        </p:txBody>
-      </p:sp>
-      <p:sp>
-        <p:nvSpPr>
-          <p:cNvPr id="11" name="Rounded Rectangle 10"/>
-          <p:cNvSpPr/>
-          <p:nvPr/>
-        </p:nvSpPr>
-        <p:spPr>
-          <a:xfrm>
-            <a:off x="746974" y="4250000"/>
-            <a:ext cx="5196625" cy="1080000"/>
-          </a:xfrm>
-          <a:prstGeom prst="roundRect">
-            <a:avLst/>
-          </a:prstGeom>
-          <a:solidFill>
-            <a:srgbClr val="FFFFFF"/>
-          </a:solidFill>
-          <a:ln w="10160">
-            <a:solidFill>
-              <a:srgbClr val="DEE0E5"/>
-            </a:solidFill>
-          </a:ln>
-        </p:spPr>
-        <p:style>
-          <a:lnRef idx="1">
-            <a:schemeClr val="accent1"/>
-          </a:lnRef>
-          <a:fillRef idx="3">
-            <a:schemeClr val="accent1"/>
-          </a:fillRef>
-          <a:effectRef idx="2">
-            <a:schemeClr val="accent1"/>
-          </a:effectRef>
-          <a:fontRef idx="minor">
-            <a:schemeClr val="lt1"/>
-          </a:fontRef>
-        </p:style>
-        <p:txBody>
-          <a:bodyPr rtlCol="0" anchor="ctr"/>
-          <a:lstStyle/>
-          <a:p>
-            <a:pPr algn="ctr"/>
-            <a:endParaRPr sz="2800">
+              <a:rPr lang="en-US" sz="1350" dirty="0">
+                <a:latin typeface="Avenir Next" panose="020B0503020202020204" pitchFamily="34" charset="0"/>
+              </a:rPr>
+              <a:t>Section 166(2) of the Companies Act, 2013 creates a statutory expectation that remains under-studied.</a:t>
+            </a:r>
+          </a:p>
+          <a:p>
+            <a:pPr>
+              <a:defRPr sz="1050"/>
+            </a:pPr>
+            <a:endParaRPr lang="en-US" sz="1350" dirty="0">
               <a:latin typeface="Avenir Next" panose="020B0503020202020204" pitchFamily="34" charset="0"/>
             </a:endParaRPr>
           </a:p>
-        </p:txBody>
-      </p:sp>
-      <p:sp>
-        <p:nvSpPr>
-          <p:cNvPr id="12" name="Rounded Rectangle 11"/>
-          <p:cNvSpPr/>
-          <p:nvPr/>
-        </p:nvSpPr>
-        <p:spPr>
-          <a:xfrm>
-            <a:off x="824586" y="4370000"/>
-            <a:ext cx="547013" cy="318828"/>
-          </a:xfrm>
-          <a:prstGeom prst="roundRect">
-            <a:avLst/>
-          </a:prstGeom>
-          <a:solidFill>
-            <a:srgbClr val="0E8A74"/>
-          </a:solidFill>
-          <a:ln>
-            <a:noFill/>
-          </a:ln>
-        </p:spPr>
-        <p:style>
-          <a:lnRef idx="1">
-            <a:schemeClr val="accent1"/>
-          </a:lnRef>
-          <a:fillRef idx="3">
-            <a:schemeClr val="accent1"/>
-          </a:fillRef>
-          <a:effectRef idx="2">
-            <a:schemeClr val="accent1"/>
-          </a:effectRef>
-          <a:fontRef idx="minor">
-            <a:schemeClr val="lt1"/>
-          </a:fontRef>
-        </p:style>
-        <p:txBody>
-          <a:bodyPr rtlCol="0" anchor="ctr"/>
-          <a:lstStyle/>
-          <a:p>
-            <a:pPr algn="ctr">
-              <a:defRPr sz="900" b="1">
-                <a:solidFill>
-                  <a:srgbClr val="FFFFFF"/>
-                </a:solidFill>
-              </a:defRPr>
-            </a:pPr>
-            <a:r>
-              <a:rPr sz="1100">
-                <a:latin typeface="Avenir Next" panose="020B0503020202020204" pitchFamily="34" charset="0"/>
-              </a:rPr>
-              <a:t>Gap 3</a:t>
-            </a:r>
-          </a:p>
-        </p:txBody>
-      </p:sp>
-      <p:sp>
-        <p:nvSpPr>
-          <p:cNvPr id="13" name="TextBox 12"/>
-          <p:cNvSpPr txBox="1"/>
-          <p:nvPr/>
-        </p:nvSpPr>
-        <p:spPr>
-          <a:xfrm>
-            <a:off x="1475918" y="4330000"/>
-            <a:ext cx="4330521" cy="956672"/>
-          </a:xfrm>
-          <a:prstGeom prst="rect">
-            <a:avLst/>
-          </a:prstGeom>
-          <a:noFill/>
-        </p:spPr>
-        <p:txBody>
-          <a:bodyPr wrap="square">
-            <a:spAutoFit/>
-          </a:bodyPr>
-          <a:lstStyle/>
-          <a:p>
-            <a:pPr algn="l">
+          <a:p>
+            <a:pPr>
               <a:spcAft>
                 <a:spcPts val="200"/>
               </a:spcAft>
@@ -24819,10 +24611,10 @@
               </a:defRPr>
             </a:pPr>
             <a:r>
-              <a:rPr>
-                <a:latin typeface="Avenir Next" panose="020B0503020202020204" pitchFamily="34" charset="0"/>
-              </a:rPr>
-              <a:t>Verification &amp; Assurance Gap</a:t>
+              <a:rPr lang="en-IN" sz="1350" dirty="0">
+                <a:latin typeface="Avenir Next" panose="020B0503020202020204" pitchFamily="34" charset="0"/>
+              </a:rPr>
+              <a:t>Regulatory Fragmentation</a:t>
             </a:r>
           </a:p>
           <a:p>
@@ -24830,140 +24622,22 @@
               <a:defRPr sz="1050"/>
             </a:pPr>
             <a:r>
-              <a:rPr sz="1400">
-                <a:latin typeface="Avenir Next" panose="020B0503020202020204" pitchFamily="34" charset="0"/>
-              </a:rPr>
-              <a:t>Mandatory ESG disclosure has expanded without mandatory third-party verification, leaving claims unverified.</a:t>
-            </a:r>
-          </a:p>
-        </p:txBody>
-      </p:sp>
-      <p:sp>
-        <p:nvSpPr>
-          <p:cNvPr id="14" name="Rounded Rectangle 13"/>
-          <p:cNvSpPr/>
-          <p:nvPr/>
-        </p:nvSpPr>
-        <p:spPr>
-          <a:xfrm>
-            <a:off x="6233374" y="1850000"/>
-            <a:ext cx="5196625" cy="1080000"/>
-          </a:xfrm>
-          <a:prstGeom prst="roundRect">
-            <a:avLst/>
-          </a:prstGeom>
-          <a:solidFill>
-            <a:srgbClr val="FFFFFF"/>
-          </a:solidFill>
-          <a:ln w="10160">
-            <a:solidFill>
-              <a:srgbClr val="DEE0E5"/>
-            </a:solidFill>
-          </a:ln>
-        </p:spPr>
-        <p:style>
-          <a:lnRef idx="1">
-            <a:schemeClr val="accent1"/>
-          </a:lnRef>
-          <a:fillRef idx="3">
-            <a:schemeClr val="accent1"/>
-          </a:fillRef>
-          <a:effectRef idx="2">
-            <a:schemeClr val="accent1"/>
-          </a:effectRef>
-          <a:fontRef idx="minor">
-            <a:schemeClr val="lt1"/>
-          </a:fontRef>
-        </p:style>
-        <p:txBody>
-          <a:bodyPr rtlCol="0" anchor="ctr"/>
-          <a:lstStyle/>
-          <a:p>
-            <a:pPr algn="ctr"/>
-            <a:endParaRPr sz="2800">
+              <a:rPr lang="en-IN" sz="1350" dirty="0">
+                <a:latin typeface="Avenir Next" panose="020B0503020202020204" pitchFamily="34" charset="0"/>
+              </a:rPr>
+              <a:t>The regulatory fragmentation problem has not been sufficiently examined as a structural cause of greenwashing. Green claims are policed across siloed regimes (MCA, SEBI, CCPA/ASCI), creating jurisdictional overlap and an accountability vacuum.</a:t>
+            </a:r>
+          </a:p>
+          <a:p>
+            <a:pPr>
+              <a:defRPr sz="1050"/>
+            </a:pPr>
+            <a:endParaRPr lang="en-IN" sz="1350" dirty="0">
               <a:latin typeface="Avenir Next" panose="020B0503020202020204" pitchFamily="34" charset="0"/>
             </a:endParaRPr>
           </a:p>
-        </p:txBody>
-      </p:sp>
-      <p:sp>
-        <p:nvSpPr>
-          <p:cNvPr id="15" name="Rounded Rectangle 14"/>
-          <p:cNvSpPr/>
-          <p:nvPr/>
-        </p:nvSpPr>
-        <p:spPr>
-          <a:xfrm>
-            <a:off x="6310986" y="1970000"/>
-            <a:ext cx="547013" cy="318828"/>
-          </a:xfrm>
-          <a:prstGeom prst="roundRect">
-            <a:avLst/>
-          </a:prstGeom>
-          <a:solidFill>
-            <a:srgbClr val="0E8A74"/>
-          </a:solidFill>
-          <a:ln>
-            <a:noFill/>
-          </a:ln>
-        </p:spPr>
-        <p:style>
-          <a:lnRef idx="1">
-            <a:schemeClr val="accent1"/>
-          </a:lnRef>
-          <a:fillRef idx="3">
-            <a:schemeClr val="accent1"/>
-          </a:fillRef>
-          <a:effectRef idx="2">
-            <a:schemeClr val="accent1"/>
-          </a:effectRef>
-          <a:fontRef idx="minor">
-            <a:schemeClr val="lt1"/>
-          </a:fontRef>
-        </p:style>
-        <p:txBody>
-          <a:bodyPr rtlCol="0" anchor="ctr"/>
-          <a:lstStyle/>
-          <a:p>
-            <a:pPr algn="ctr">
-              <a:defRPr sz="900" b="1">
-                <a:solidFill>
-                  <a:srgbClr val="FFFFFF"/>
-                </a:solidFill>
-              </a:defRPr>
-            </a:pPr>
-            <a:r>
-              <a:rPr sz="1100">
-                <a:latin typeface="Avenir Next" panose="020B0503020202020204" pitchFamily="34" charset="0"/>
-              </a:rPr>
-              <a:t>Gap 4</a:t>
-            </a:r>
-          </a:p>
-        </p:txBody>
-      </p:sp>
-      <p:sp>
-        <p:nvSpPr>
-          <p:cNvPr id="16" name="TextBox 15"/>
-          <p:cNvSpPr txBox="1"/>
-          <p:nvPr/>
-        </p:nvSpPr>
-        <p:spPr>
-          <a:xfrm>
-            <a:off x="6962318" y="1930000"/>
-            <a:ext cx="4330521" cy="956672"/>
-          </a:xfrm>
-          <a:prstGeom prst="rect">
-            <a:avLst/>
-          </a:prstGeom>
-          <a:noFill/>
-        </p:spPr>
-        <p:txBody>
-          <a:bodyPr wrap="square">
-            <a:spAutoFit/>
-          </a:bodyPr>
-          <a:lstStyle/>
-          <a:p>
-            <a:pPr algn="l">
+          <a:p>
+            <a:pPr>
               <a:spcAft>
                 <a:spcPts val="200"/>
               </a:spcAft>
@@ -24975,160 +24649,33 @@
               </a:defRPr>
             </a:pPr>
             <a:r>
-              <a:rPr dirty="0">
-                <a:latin typeface="Avenir Next" panose="020B0503020202020204" pitchFamily="34" charset="0"/>
-              </a:rPr>
-              <a:t>Evolving </a:t>
-            </a:r>
-            <a:r>
-              <a:rPr lang="en-US" dirty="0">
-                <a:latin typeface="Avenir Next" panose="020B0503020202020204" pitchFamily="34" charset="0"/>
-              </a:rPr>
-              <a:t>Forms of Greenwashing: Legal Vacuum</a:t>
-            </a:r>
-            <a:endParaRPr dirty="0">
+              <a:rPr lang="en-US" sz="1350" dirty="0">
+                <a:latin typeface="Avenir Next" panose="020B0503020202020204" pitchFamily="34" charset="0"/>
+              </a:rPr>
+              <a:t>Limited analysis on finding structural reasons for low Enforcement</a:t>
+            </a:r>
+          </a:p>
+          <a:p>
+            <a:pPr>
+              <a:defRPr sz="1050"/>
+            </a:pPr>
+            <a:r>
+              <a:rPr lang="en-US" sz="1350" dirty="0">
+                <a:latin typeface="Avenir Next" panose="020B0503020202020204" pitchFamily="34" charset="0"/>
+              </a:rPr>
+              <a:t>The available discussion on the enforcement of section 166(2) of Companies Act remains thin. Beyond Companies Act also, there is lack of doctrinal studies evaluating why regulators rarely bring deterrent enforcement actions against greenwashing.</a:t>
+            </a:r>
+          </a:p>
+          <a:p>
+            <a:pPr>
+              <a:defRPr sz="1050"/>
+            </a:pPr>
+            <a:endParaRPr lang="en-IN" sz="1350" dirty="0">
               <a:latin typeface="Avenir Next" panose="020B0503020202020204" pitchFamily="34" charset="0"/>
             </a:endParaRPr>
           </a:p>
           <a:p>
             <a:pPr>
-              <a:defRPr sz="1050"/>
-            </a:pPr>
-            <a:r>
-              <a:rPr sz="1400" dirty="0">
-                <a:latin typeface="Avenir Next" panose="020B0503020202020204" pitchFamily="34" charset="0"/>
-              </a:rPr>
-              <a:t>Distant net-zero pledges (e.g. 2070) and questionable carbon-offset claims remain unaddressed in current frameworks.</a:t>
-            </a:r>
-          </a:p>
-        </p:txBody>
-      </p:sp>
-      <p:sp>
-        <p:nvSpPr>
-          <p:cNvPr id="17" name="Rounded Rectangle 16"/>
-          <p:cNvSpPr/>
-          <p:nvPr/>
-        </p:nvSpPr>
-        <p:spPr>
-          <a:xfrm>
-            <a:off x="6233374" y="3050000"/>
-            <a:ext cx="5196625" cy="1080000"/>
-          </a:xfrm>
-          <a:prstGeom prst="roundRect">
-            <a:avLst/>
-          </a:prstGeom>
-          <a:solidFill>
-            <a:srgbClr val="FFFFFF"/>
-          </a:solidFill>
-          <a:ln w="10160">
-            <a:solidFill>
-              <a:srgbClr val="DEE0E5"/>
-            </a:solidFill>
-          </a:ln>
-        </p:spPr>
-        <p:style>
-          <a:lnRef idx="1">
-            <a:schemeClr val="accent1"/>
-          </a:lnRef>
-          <a:fillRef idx="3">
-            <a:schemeClr val="accent1"/>
-          </a:fillRef>
-          <a:effectRef idx="2">
-            <a:schemeClr val="accent1"/>
-          </a:effectRef>
-          <a:fontRef idx="minor">
-            <a:schemeClr val="lt1"/>
-          </a:fontRef>
-        </p:style>
-        <p:txBody>
-          <a:bodyPr rtlCol="0" anchor="ctr"/>
-          <a:lstStyle/>
-          <a:p>
-            <a:pPr algn="ctr"/>
-            <a:endParaRPr sz="2800">
-              <a:latin typeface="Avenir Next" panose="020B0503020202020204" pitchFamily="34" charset="0"/>
-            </a:endParaRPr>
-          </a:p>
-        </p:txBody>
-      </p:sp>
-      <p:sp>
-        <p:nvSpPr>
-          <p:cNvPr id="18" name="Rounded Rectangle 17"/>
-          <p:cNvSpPr/>
-          <p:nvPr/>
-        </p:nvSpPr>
-        <p:spPr>
-          <a:xfrm>
-            <a:off x="6310986" y="3170000"/>
-            <a:ext cx="547013" cy="318828"/>
-          </a:xfrm>
-          <a:prstGeom prst="roundRect">
-            <a:avLst/>
-          </a:prstGeom>
-          <a:solidFill>
-            <a:srgbClr val="0E8A74"/>
-          </a:solidFill>
-          <a:ln>
-            <a:noFill/>
-          </a:ln>
-        </p:spPr>
-        <p:style>
-          <a:lnRef idx="1">
-            <a:schemeClr val="accent1"/>
-          </a:lnRef>
-          <a:fillRef idx="3">
-            <a:schemeClr val="accent1"/>
-          </a:fillRef>
-          <a:effectRef idx="2">
-            <a:schemeClr val="accent1"/>
-          </a:effectRef>
-          <a:fontRef idx="minor">
-            <a:schemeClr val="lt1"/>
-          </a:fontRef>
-        </p:style>
-        <p:txBody>
-          <a:bodyPr rtlCol="0" anchor="ctr"/>
-          <a:lstStyle/>
-          <a:p>
-            <a:pPr algn="ctr">
-              <a:defRPr sz="900" b="1">
-                <a:solidFill>
-                  <a:srgbClr val="FFFFFF"/>
-                </a:solidFill>
-              </a:defRPr>
-            </a:pPr>
-            <a:r>
-              <a:rPr sz="1100">
-                <a:latin typeface="Avenir Next" panose="020B0503020202020204" pitchFamily="34" charset="0"/>
-              </a:rPr>
-              <a:t>Gap 5</a:t>
-            </a:r>
-          </a:p>
-        </p:txBody>
-      </p:sp>
-      <p:sp>
-        <p:nvSpPr>
-          <p:cNvPr id="19" name="TextBox 18"/>
-          <p:cNvSpPr txBox="1"/>
-          <p:nvPr/>
-        </p:nvSpPr>
-        <p:spPr>
-          <a:xfrm>
-            <a:off x="6962318" y="3130000"/>
-            <a:ext cx="4330521" cy="956672"/>
-          </a:xfrm>
-          <a:prstGeom prst="rect">
-            <a:avLst/>
-          </a:prstGeom>
-          <a:noFill/>
-        </p:spPr>
-        <p:txBody>
-          <a:bodyPr wrap="square">
-            <a:spAutoFit/>
-          </a:bodyPr>
-          <a:lstStyle/>
-          <a:p>
-            <a:pPr algn="l">
               <a:spcAft>
                 <a:spcPts val="200"/>
               </a:spcAft>
@@ -25140,10 +24687,10 @@
               </a:defRPr>
             </a:pPr>
             <a:r>
-              <a:rPr dirty="0">
-                <a:latin typeface="Avenir Next" panose="020B0503020202020204" pitchFamily="34" charset="0"/>
-              </a:rPr>
-              <a:t>Real-World Enforcement Analysis</a:t>
+              <a:rPr lang="en-IN" sz="1350" dirty="0">
+                <a:latin typeface="Avenir Next" panose="020B0503020202020204" pitchFamily="34" charset="0"/>
+              </a:rPr>
+              <a:t>Limited study on Verification &amp; Assurance Gap</a:t>
             </a:r>
           </a:p>
           <a:p>
@@ -25151,22 +24698,10 @@
               <a:defRPr sz="1050"/>
             </a:pPr>
             <a:r>
-              <a:rPr sz="1400" dirty="0">
-                <a:latin typeface="Avenir Next" panose="020B0503020202020204" pitchFamily="34" charset="0"/>
-              </a:rPr>
-              <a:t>Lack of </a:t>
-            </a:r>
-            <a:r>
-              <a:rPr lang="en-US" sz="1400" dirty="0">
-                <a:latin typeface="Avenir Next" panose="020B0503020202020204" pitchFamily="34" charset="0"/>
-              </a:rPr>
-              <a:t>doctrinal </a:t>
-            </a:r>
-            <a:r>
-              <a:rPr sz="1400" dirty="0">
-                <a:latin typeface="Avenir Next" panose="020B0503020202020204" pitchFamily="34" charset="0"/>
-              </a:rPr>
-              <a:t>studies evaluating why regulators rarely bring deterrent enforcement actions against greenwashing.</a:t>
+              <a:rPr lang="en-IN" sz="1350" dirty="0">
+                <a:latin typeface="Avenir Next" panose="020B0503020202020204" pitchFamily="34" charset="0"/>
+              </a:rPr>
+              <a:t>Mandatory ESG disclosure has expanded without corresponding third-party verification capacity, resulting in unverified violations and meagre enforcement of regulation.</a:t>
             </a:r>
           </a:p>
         </p:txBody>
@@ -25179,7 +24714,7 @@
         </p:nvSpPr>
         <p:spPr>
           <a:xfrm>
-            <a:off x="731520" y="5665372"/>
+            <a:off x="676302" y="5754490"/>
             <a:ext cx="10698480" cy="944444"/>
           </a:xfrm>
           <a:prstGeom prst="roundRect">
@@ -25227,7 +24762,7 @@
         </p:nvSpPr>
         <p:spPr>
           <a:xfrm>
-            <a:off x="914400" y="5711092"/>
+            <a:off x="1042062" y="5824178"/>
             <a:ext cx="10332720" cy="820738"/>
           </a:xfrm>
           <a:prstGeom prst="rect">
@@ -25367,8 +24902,8 @@
         </p:nvSpPr>
         <p:spPr>
           <a:xfrm>
-            <a:off x="730846" y="357075"/>
-            <a:ext cx="10058400" cy="877163"/>
+            <a:off x="619633" y="161231"/>
+            <a:ext cx="10058400" cy="1123384"/>
           </a:xfrm>
           <a:prstGeom prst="rect">
             <a:avLst/>
@@ -25382,6 +24917,9 @@
           <a:lstStyle/>
           <a:p>
             <a:pPr>
+              <a:lnSpc>
+                <a:spcPct val="150000"/>
+              </a:lnSpc>
               <a:spcAft>
                 <a:spcPts val="600"/>
               </a:spcAft>
@@ -25401,6 +24939,12 @@
               </a:rPr>
               <a:t>Research Methodology</a:t>
             </a:r>
+            <a:endParaRPr sz="1200" b="1" dirty="0">
+              <a:solidFill>
+                <a:srgbClr val="173F35"/>
+              </a:solidFill>
+              <a:latin typeface="Avenir Next Demi Bold"/>
+            </a:endParaRPr>
           </a:p>
           <a:p>
             <a:pPr>
@@ -25412,18 +24956,18 @@
               </a:defRPr>
             </a:pPr>
             <a:r>
-              <a:rPr lang="en-US" sz="1400" dirty="0">
+              <a:rPr lang="en-US" sz="1400" b="1" dirty="0">
                 <a:latin typeface="Avenir Next" panose="020B0503020202020204" pitchFamily="34" charset="0"/>
               </a:rPr>
               <a:t>Comparative and Analytical </a:t>
             </a:r>
             <a:r>
-              <a:rPr sz="1400" dirty="0">
+              <a:rPr sz="1400" b="1" dirty="0">
                 <a:latin typeface="Avenir Next" panose="020B0503020202020204" pitchFamily="34" charset="0"/>
               </a:rPr>
               <a:t>Legal Research</a:t>
             </a:r>
-            <a:endParaRPr sz="1400" dirty="0">
+            <a:endParaRPr sz="1400" b="1" dirty="0">
               <a:latin typeface="Avenir Next" panose="020B0503020202020204" pitchFamily="34" charset="0"/>
               <a:ea typeface="Calibri"/>
               <a:cs typeface="Calibri"/>
@@ -25540,7 +25084,7 @@
         <p:spPr>
           <a:xfrm>
             <a:off x="1005840" y="1600200"/>
-            <a:ext cx="2926080" cy="2385268"/>
+            <a:ext cx="2967598" cy="2385268"/>
           </a:xfrm>
           <a:prstGeom prst="rect">
             <a:avLst/>
@@ -25584,7 +25128,7 @@
               <a:rPr lang="en-IN" sz="1400" dirty="0">
                 <a:latin typeface="Avenir Next" panose="020B0503020202020204" pitchFamily="34" charset="0"/>
               </a:rPr>
-              <a:t>Indian statutes, judicial decisions (Supreme Court, NGT, foreign courts), regulatory instruments (SEBI BRSR, CCPA Guidelines, ASCI Guidelines, etc.), parliamentary reports, research papers.</a:t>
+              <a:t>Indian statutes, judicial decisions (Supreme Court, NGT, SEBI, foreign courts), regulatory instruments (SEBI BRSR, CCPA Guidelines, ASCI Guidelines, etc.), parliamentary reports, research papers.</a:t>
             </a:r>
             <a:endParaRPr lang="en-IN" sz="1400" dirty="0">
               <a:latin typeface="Avenir Next" panose="020B0503020202020204" pitchFamily="34" charset="0"/>
@@ -25719,7 +25263,7 @@
         <p:spPr>
           <a:xfrm>
             <a:off x="4663440" y="1600200"/>
-            <a:ext cx="2926080" cy="1708160"/>
+            <a:ext cx="2926080" cy="1923604"/>
           </a:xfrm>
           <a:prstGeom prst="rect">
             <a:avLst/>
@@ -25765,6 +25309,19 @@
               </a:rPr>
               <a:t>Hohfeldian decomposition of corporate duties into precise legal relations. </a:t>
             </a:r>
+            <a:endParaRPr lang="en-US" sz="1400" dirty="0">
+              <a:latin typeface="Avenir Next" panose="020B0503020202020204" pitchFamily="34" charset="0"/>
+            </a:endParaRPr>
+          </a:p>
+          <a:p>
+            <a:pPr>
+              <a:defRPr sz="1200" b="0">
+                <a:solidFill>
+                  <a:srgbClr val="3A3A4A"/>
+                </a:solidFill>
+                <a:latin typeface="Calibri"/>
+              </a:defRPr>
+            </a:pPr>
             <a:endParaRPr lang="en-US" sz="1400" dirty="0">
               <a:latin typeface="Avenir Next" panose="020B0503020202020204" pitchFamily="34" charset="0"/>
             </a:endParaRPr>
@@ -25902,7 +25459,7 @@
         <p:spPr>
           <a:xfrm>
             <a:off x="8321040" y="1600200"/>
-            <a:ext cx="2926080" cy="1492716"/>
+            <a:ext cx="2926080" cy="1061829"/>
           </a:xfrm>
           <a:prstGeom prst="rect">
             <a:avLst/>
@@ -25946,7 +25503,7 @@
               <a:rPr sz="1400" dirty="0">
                 <a:latin typeface="Avenir Next" panose="020B0503020202020204" pitchFamily="34" charset="0"/>
               </a:rPr>
-              <a:t>Cross-jurisdictional study of EU (CSRD, Green Claims Directive), US (SEC Rules, FTC Green Guides), UK (FCA Rule, CMA),</a:t>
+              <a:t>Cross-jurisdictional study of EU, US, UK,</a:t>
             </a:r>
             <a:r>
               <a:rPr lang="en-US" sz="1400" dirty="0">
@@ -25958,7 +25515,19 @@
               <a:rPr sz="1400" dirty="0">
                 <a:latin typeface="Avenir Next" panose="020B0503020202020204" pitchFamily="34" charset="0"/>
               </a:rPr>
-              <a:t>Australia, and others.</a:t>
+              <a:t>Australia, and </a:t>
+            </a:r>
+            <a:r>
+              <a:rPr lang="en-US" sz="1400" dirty="0">
+                <a:latin typeface="Avenir Next" panose="020B0503020202020204" pitchFamily="34" charset="0"/>
+              </a:rPr>
+              <a:t>also developing countries</a:t>
+            </a:r>
+            <a:r>
+              <a:rPr sz="1400" dirty="0">
+                <a:latin typeface="Avenir Next" panose="020B0503020202020204" pitchFamily="34" charset="0"/>
+              </a:rPr>
+              <a:t>.</a:t>
             </a:r>
           </a:p>
         </p:txBody>
@@ -26172,7 +25741,7 @@
         <p:spPr>
           <a:xfrm>
             <a:off x="960223" y="4080669"/>
-            <a:ext cx="2926080" cy="1708160"/>
+            <a:ext cx="2926080" cy="1492716"/>
           </a:xfrm>
           <a:prstGeom prst="rect">
             <a:avLst/>
@@ -26216,7 +25785,7 @@
               <a:rPr lang="en-IN" sz="1400" dirty="0">
                 <a:latin typeface="Avenir Next" panose="020B0503020202020204" pitchFamily="34" charset="0"/>
               </a:rPr>
-              <a:t>Textual, contextual and purposive analysis of the Companies Act 2013, Consumer Protection Act 2019, Environment Protection Act 1986 (EPA), and SEBI LODR Regulations.</a:t>
+              <a:t>Textual, contextual and purposive analysis of relevant sections of the Companies Act 2013, Consumer Protection Act 2019. And of relevant SEBI Regulations.</a:t>
             </a:r>
             <a:endParaRPr lang="en-IN" sz="1400" dirty="0">
               <a:latin typeface="Avenir Next" panose="020B0503020202020204" pitchFamily="34" charset="0"/>
@@ -26382,7 +25951,19 @@
               <a:rPr sz="1400" dirty="0">
                 <a:latin typeface="Avenir Next" panose="020B0503020202020204" pitchFamily="34" charset="0"/>
               </a:rPr>
-              <a:t>Explicit distinction between what the law currently provides (analysis) and what it should provide (normative reform proposals).</a:t>
+              <a:t>Explicit distinction</a:t>
+            </a:r>
+            <a:r>
+              <a:rPr lang="en-US" sz="1400" dirty="0">
+                <a:latin typeface="Avenir Next" panose="020B0503020202020204" pitchFamily="34" charset="0"/>
+              </a:rPr>
+              <a:t> maintained</a:t>
+            </a:r>
+            <a:r>
+              <a:rPr sz="1400" dirty="0">
+                <a:latin typeface="Avenir Next" panose="020B0503020202020204" pitchFamily="34" charset="0"/>
+              </a:rPr>
+              <a:t> between what the law currently provides and what it should provide (normative reform proposals).</a:t>
             </a:r>
           </a:p>
         </p:txBody>
@@ -26492,7 +26073,19 @@
               <a:rPr sz="1400" dirty="0">
                 <a:latin typeface="Avenir Next" panose="020B0503020202020204" pitchFamily="34" charset="0"/>
               </a:rPr>
-              <a:t>between MCA, SEBI, CCPA, ASCI, FSSAI, NGT, and BIS — identifying gaps, penalty arbitrage, and regulatory backsliding.</a:t>
+              <a:t>between MCA, SEBI, CCPA, ASCI</a:t>
+            </a:r>
+            <a:r>
+              <a:rPr lang="en-US" sz="1400" dirty="0">
+                <a:latin typeface="Avenir Next" panose="020B0503020202020204" pitchFamily="34" charset="0"/>
+              </a:rPr>
+              <a:t>, </a:t>
+            </a:r>
+            <a:r>
+              <a:rPr sz="1400" dirty="0">
+                <a:latin typeface="Avenir Next" panose="020B0503020202020204" pitchFamily="34" charset="0"/>
+              </a:rPr>
+              <a:t>identifying gaps, penalty arbitrage, and regulatory backsliding.</a:t>
             </a:r>
           </a:p>
         </p:txBody>

--- a/Thesis Defence Presentation Final.pptx
+++ b/Thesis Defence Presentation Final.pptx
@@ -508,6 +508,90 @@
 </file>
 
 <file path=ppt/notesSlides/notesSlide1.xml><?xml version="1.0" encoding="utf-8"?>
+<p:notes xmlns:a="http://schemas.openxmlformats.org/drawingml/2006/main" xmlns:r="http://schemas.openxmlformats.org/officeDocument/2006/relationships" xmlns:p="http://schemas.openxmlformats.org/presentationml/2006/main">
+  <p:cSld>
+    <p:spTree>
+      <p:nvGrpSpPr>
+        <p:cNvPr id="1" name=""/>
+        <p:cNvGrpSpPr/>
+        <p:nvPr/>
+      </p:nvGrpSpPr>
+      <p:grpSpPr>
+        <a:xfrm>
+          <a:off x="0" y="0"/>
+          <a:ext cx="0" cy="0"/>
+          <a:chOff x="0" y="0"/>
+          <a:chExt cx="0" cy="0"/>
+        </a:xfrm>
+      </p:grpSpPr>
+      <p:sp>
+        <p:nvSpPr>
+          <p:cNvPr id="2" name="Slide Image Placeholder 1"/>
+          <p:cNvSpPr>
+            <a:spLocks noGrp="1" noRot="1" noChangeAspect="1"/>
+          </p:cNvSpPr>
+          <p:nvPr>
+            <p:ph type="sldImg"/>
+          </p:nvPr>
+        </p:nvSpPr>
+        <p:spPr/>
+      </p:sp>
+      <p:sp>
+        <p:nvSpPr>
+          <p:cNvPr id="3" name="Notes Placeholder 2"/>
+          <p:cNvSpPr>
+            <a:spLocks noGrp="1"/>
+          </p:cNvSpPr>
+          <p:nvPr>
+            <p:ph type="body" idx="1"/>
+          </p:nvPr>
+        </p:nvSpPr>
+        <p:spPr/>
+        <p:txBody>
+          <a:bodyPr/>
+          <a:lstStyle/>
+          <a:p>
+            <a:endParaRPr lang="en-US"/>
+          </a:p>
+        </p:txBody>
+      </p:sp>
+      <p:sp>
+        <p:nvSpPr>
+          <p:cNvPr id="4" name="Slide Number Placeholder 3"/>
+          <p:cNvSpPr>
+            <a:spLocks noGrp="1"/>
+          </p:cNvSpPr>
+          <p:nvPr>
+            <p:ph type="sldNum" sz="quarter" idx="5"/>
+          </p:nvPr>
+        </p:nvSpPr>
+        <p:spPr/>
+        <p:txBody>
+          <a:bodyPr/>
+          <a:lstStyle/>
+          <a:p>
+            <a:fld id="{C762F6BD-97DA-5F40-B046-A0BF2F554C1C}" type="slidenum">
+              <a:rPr lang="en-US" smtClean="0"/>
+              <a:t>1</a:t>
+            </a:fld>
+            <a:endParaRPr lang="en-US"/>
+          </a:p>
+        </p:txBody>
+      </p:sp>
+    </p:spTree>
+    <p:extLst>
+      <p:ext uri="{BB962C8B-B14F-4D97-AF65-F5344CB8AC3E}">
+        <p14:creationId xmlns:p14="http://schemas.microsoft.com/office/powerpoint/2010/main" val="394336565"/>
+      </p:ext>
+    </p:extLst>
+  </p:cSld>
+  <p:clrMapOvr>
+    <a:masterClrMapping/>
+  </p:clrMapOvr>
+</p:notes>
+</file>
+
+<file path=ppt/notesSlides/notesSlide2.xml><?xml version="1.0" encoding="utf-8"?>
 <p:notes xmlns:a="http://schemas.openxmlformats.org/drawingml/2006/main" xmlns:r="http://schemas.openxmlformats.org/officeDocument/2006/relationships" xmlns:p="http://schemas.openxmlformats.org/presentationml/2006/main">
   <p:cSld>
     <p:spTree>
@@ -3710,7 +3794,7 @@
           <p:nvPr/>
         </p:nvPicPr>
         <p:blipFill>
-          <a:blip r:embed="rId2">
+          <a:blip r:embed="rId3">
             <a:extLst>
               <a:ext uri="{28A0092B-C50C-407E-A947-70E740481C1C}">
                 <a14:useLocalDpi xmlns:a14="http://schemas.microsoft.com/office/drawing/2010/main" val="0"/>
@@ -6074,8 +6158,17 @@
               <a:rPr sz="1600" dirty="0">
                 <a:latin typeface="Avenir Next" panose="020B0503020202020204" pitchFamily="34" charset="0"/>
               </a:rPr>
-              <a:t>The Corporate Governance Solution</a:t>
-            </a:r>
+              <a:t>The Corporate Governance </a:t>
+            </a:r>
+            <a:r>
+              <a:rPr lang="en-US" sz="1600" dirty="0">
+                <a:latin typeface="Avenir Next" panose="020B0503020202020204" pitchFamily="34" charset="0"/>
+              </a:rPr>
+              <a:t>Pathway</a:t>
+            </a:r>
+            <a:endParaRPr sz="1600" dirty="0">
+              <a:latin typeface="Avenir Next" panose="020B0503020202020204" pitchFamily="34" charset="0"/>
+            </a:endParaRPr>
           </a:p>
           <a:p>
             <a:pPr>
@@ -6693,7 +6786,7 @@
                 <a:ea typeface="Calibri"/>
                 <a:cs typeface="Calibri"/>
               </a:rPr>
-              <a:t>may not stand legal test</a:t>
+              <a:t>may not stand legal test.</a:t>
             </a:r>
           </a:p>
           <a:p>
@@ -9276,7 +9369,7 @@
         </p:nvSpPr>
         <p:spPr>
           <a:xfrm>
-            <a:off x="799190" y="1015812"/>
+            <a:off x="790823" y="5206916"/>
             <a:ext cx="10587831" cy="605058"/>
           </a:xfrm>
           <a:prstGeom prst="roundRect">
@@ -9324,7 +9417,7 @@
         </p:nvSpPr>
         <p:spPr>
           <a:xfrm>
-            <a:off x="917115" y="1106717"/>
+            <a:off x="908748" y="5297821"/>
             <a:ext cx="10186416" cy="523220"/>
           </a:xfrm>
           <a:prstGeom prst="rect">
@@ -9363,8 +9456,8 @@
         </p:nvSpPr>
         <p:spPr>
           <a:xfrm>
-            <a:off x="822960" y="4953252"/>
-            <a:ext cx="2468880" cy="896112"/>
+            <a:off x="790823" y="3918240"/>
+            <a:ext cx="2468880" cy="1067934"/>
           </a:xfrm>
           <a:prstGeom prst="roundRect">
             <a:avLst/>
@@ -9424,7 +9517,19 @@
               <a:rPr dirty="0">
                 <a:latin typeface="Avenir Next" panose="020B0503020202020204" pitchFamily="34" charset="0"/>
               </a:rPr>
-              <a:t>BRSR becomes mandatory for the top 1000 listed entities</a:t>
+              <a:t>BRSR </a:t>
+            </a:r>
+            <a:r>
+              <a:rPr lang="en-US" dirty="0">
+                <a:latin typeface="Avenir Next" panose="020B0503020202020204" pitchFamily="34" charset="0"/>
+              </a:rPr>
+              <a:t>introduced: </a:t>
+            </a:r>
+            <a:r>
+              <a:rPr dirty="0">
+                <a:latin typeface="Avenir Next" panose="020B0503020202020204" pitchFamily="34" charset="0"/>
+              </a:rPr>
+              <a:t> mandatory for the top 1000 listed entities</a:t>
             </a:r>
           </a:p>
         </p:txBody>
@@ -9437,8 +9542,8 @@
         </p:nvSpPr>
         <p:spPr>
           <a:xfrm>
-            <a:off x="3438144" y="4953252"/>
-            <a:ext cx="2468880" cy="896112"/>
+            <a:off x="3406007" y="3918240"/>
+            <a:ext cx="2468880" cy="1067934"/>
           </a:xfrm>
           <a:prstGeom prst="roundRect">
             <a:avLst/>
@@ -9479,7 +9584,7 @@
               </a:defRPr>
             </a:pPr>
             <a:r>
-              <a:rPr>
+              <a:rPr dirty="0">
                 <a:latin typeface="Avenir Next" panose="020B0503020202020204" pitchFamily="34" charset="0"/>
               </a:rPr>
               <a:t>2023</a:t>
@@ -9495,10 +9600,34 @@
               </a:defRPr>
             </a:pPr>
             <a:r>
-              <a:rPr>
-                <a:latin typeface="Avenir Next" panose="020B0503020202020204" pitchFamily="34" charset="0"/>
-              </a:rPr>
-              <a:t>BRSR Core adds key KPIs, assurance track, and value-chain reporting</a:t>
+              <a:rPr dirty="0">
+                <a:latin typeface="Avenir Next" panose="020B0503020202020204" pitchFamily="34" charset="0"/>
+              </a:rPr>
+              <a:t>BRSR Core</a:t>
+            </a:r>
+            <a:r>
+              <a:rPr lang="en-US" dirty="0">
+                <a:latin typeface="Avenir Next" panose="020B0503020202020204" pitchFamily="34" charset="0"/>
+              </a:rPr>
+              <a:t> introduced: stricter,</a:t>
+            </a:r>
+            <a:r>
+              <a:rPr dirty="0">
+                <a:latin typeface="Avenir Next" panose="020B0503020202020204" pitchFamily="34" charset="0"/>
+              </a:rPr>
+              <a:t> adds KPIs, </a:t>
+            </a:r>
+            <a:r>
+              <a:rPr lang="en-US" dirty="0">
+                <a:latin typeface="Avenir Next" panose="020B0503020202020204" pitchFamily="34" charset="0"/>
+              </a:rPr>
+              <a:t>mandatory reasonable </a:t>
+            </a:r>
+            <a:r>
+              <a:rPr dirty="0">
+                <a:latin typeface="Avenir Next" panose="020B0503020202020204" pitchFamily="34" charset="0"/>
+              </a:rPr>
+              <a:t>assurance and value-chain reporting</a:t>
             </a:r>
           </a:p>
         </p:txBody>
@@ -9511,8 +9640,8 @@
         </p:nvSpPr>
         <p:spPr>
           <a:xfrm>
-            <a:off x="6053328" y="4953252"/>
-            <a:ext cx="2468880" cy="896112"/>
+            <a:off x="6021191" y="3918240"/>
+            <a:ext cx="2468880" cy="1067934"/>
           </a:xfrm>
           <a:prstGeom prst="roundRect">
             <a:avLst/>
@@ -9584,7 +9713,19 @@
               <a:rPr dirty="0">
                 <a:latin typeface="Avenir Next" panose="020B0503020202020204" pitchFamily="34" charset="0"/>
               </a:rPr>
-              <a:t>assurance diluted and value-chain disclosure deferred and made voluntary</a:t>
+              <a:t>assurance diluted </a:t>
+            </a:r>
+            <a:r>
+              <a:rPr lang="en-US" dirty="0">
+                <a:latin typeface="Avenir Next" panose="020B0503020202020204" pitchFamily="34" charset="0"/>
+              </a:rPr>
+              <a:t>to assessment </a:t>
+            </a:r>
+            <a:r>
+              <a:rPr dirty="0">
+                <a:latin typeface="Avenir Next" panose="020B0503020202020204" pitchFamily="34" charset="0"/>
+              </a:rPr>
+              <a:t>and value-chain disclosure deferred and made voluntary</a:t>
             </a:r>
           </a:p>
         </p:txBody>
@@ -9597,8 +9738,8 @@
         </p:nvSpPr>
         <p:spPr>
           <a:xfrm>
-            <a:off x="8668512" y="4953252"/>
-            <a:ext cx="2468880" cy="896112"/>
+            <a:off x="8636375" y="3918240"/>
+            <a:ext cx="2468880" cy="1067934"/>
           </a:xfrm>
           <a:prstGeom prst="roundRect">
             <a:avLst/>
@@ -9639,7 +9780,7 @@
               </a:defRPr>
             </a:pPr>
             <a:r>
-              <a:rPr>
+              <a:rPr dirty="0">
                 <a:latin typeface="Avenir Next" panose="020B0503020202020204" pitchFamily="34" charset="0"/>
               </a:rPr>
               <a:t>2025</a:t>
@@ -9655,10 +9796,10 @@
               </a:defRPr>
             </a:pPr>
             <a:r>
-              <a:rPr>
-                <a:latin typeface="Avenir Next" panose="020B0503020202020204" pitchFamily="34" charset="0"/>
-              </a:rPr>
-              <a:t>scope narrowed further even as the debt framework expands</a:t>
+              <a:rPr dirty="0">
+                <a:latin typeface="Avenir Next" panose="020B0503020202020204" pitchFamily="34" charset="0"/>
+              </a:rPr>
+              <a:t>scope narrowed further</a:t>
             </a:r>
           </a:p>
         </p:txBody>
@@ -9671,8 +9812,8 @@
         </p:nvSpPr>
         <p:spPr>
           <a:xfrm>
-            <a:off x="803750" y="1906551"/>
-            <a:ext cx="3292762" cy="2740563"/>
+            <a:off x="771613" y="1043361"/>
+            <a:ext cx="3292762" cy="2765038"/>
           </a:xfrm>
           <a:prstGeom prst="roundRect">
             <a:avLst/>
@@ -9719,7 +9860,7 @@
         </p:nvSpPr>
         <p:spPr>
           <a:xfrm>
-            <a:off x="972901" y="1986055"/>
+            <a:off x="777805" y="1050441"/>
             <a:ext cx="1389888" cy="400229"/>
           </a:xfrm>
           <a:prstGeom prst="roundRect">
@@ -9775,7 +9916,7 @@
         </p:nvSpPr>
         <p:spPr>
           <a:xfrm>
-            <a:off x="1009476" y="2470475"/>
+            <a:off x="977339" y="1607285"/>
             <a:ext cx="2906923" cy="2108269"/>
           </a:xfrm>
           <a:prstGeom prst="rect">
@@ -9845,8 +9986,8 @@
         </p:nvSpPr>
         <p:spPr>
           <a:xfrm>
-            <a:off x="4468675" y="1900148"/>
-            <a:ext cx="3267149" cy="2869841"/>
+            <a:off x="4436538" y="1036959"/>
+            <a:ext cx="3267149" cy="2197358"/>
           </a:xfrm>
           <a:prstGeom prst="roundRect">
             <a:avLst/>
@@ -9893,7 +10034,7 @@
         </p:nvSpPr>
         <p:spPr>
           <a:xfrm>
-            <a:off x="4612213" y="1986055"/>
+            <a:off x="4417117" y="1050441"/>
             <a:ext cx="1719072" cy="400229"/>
           </a:xfrm>
           <a:prstGeom prst="roundRect">
@@ -9952,8 +10093,8 @@
         </p:nvSpPr>
         <p:spPr>
           <a:xfrm>
-            <a:off x="4648789" y="2470475"/>
-            <a:ext cx="2921592" cy="1892826"/>
+            <a:off x="4616652" y="1607285"/>
+            <a:ext cx="2921592" cy="1423467"/>
           </a:xfrm>
           <a:prstGeom prst="rect">
             <a:avLst/>
@@ -9989,20 +10130,6 @@
           </a:p>
           <a:p>
             <a:pPr>
-              <a:spcAft>
-                <a:spcPts val="300"/>
-              </a:spcAft>
-              <a:defRPr sz="1000"/>
-            </a:pPr>
-            <a:r>
-              <a:rPr sz="1400" dirty="0">
-                <a:latin typeface="Avenir Next" panose="020B0503020202020204" pitchFamily="34" charset="0"/>
-              </a:rPr>
-              <a:t>• Rollout delays leave most ESG data effectively self-certified.</a:t>
-            </a:r>
-          </a:p>
-          <a:p>
-            <a:pPr>
               <a:defRPr sz="1000"/>
             </a:pPr>
             <a:r>
@@ -10022,8 +10149,8 @@
         </p:nvSpPr>
         <p:spPr>
           <a:xfrm>
-            <a:off x="8101583" y="1900149"/>
-            <a:ext cx="3279955" cy="2843082"/>
+            <a:off x="8069446" y="1036959"/>
+            <a:ext cx="3279955" cy="2745599"/>
           </a:xfrm>
           <a:prstGeom prst="roundRect">
             <a:avLst/>
@@ -10070,7 +10197,7 @@
         </p:nvSpPr>
         <p:spPr>
           <a:xfrm>
-            <a:off x="8251524" y="1986056"/>
+            <a:off x="8038322" y="1050442"/>
             <a:ext cx="1997376" cy="467266"/>
           </a:xfrm>
           <a:prstGeom prst="roundRect">
@@ -10138,8 +10265,8 @@
         </p:nvSpPr>
         <p:spPr>
           <a:xfrm>
-            <a:off x="8288099" y="2470475"/>
-            <a:ext cx="2968921" cy="2108269"/>
+            <a:off x="8255962" y="1607285"/>
+            <a:ext cx="2968921" cy="1892826"/>
           </a:xfrm>
           <a:prstGeom prst="rect">
             <a:avLst/>
@@ -10207,8 +10334,29 @@
               <a:rPr sz="1400" dirty="0">
                 <a:latin typeface="Avenir Next" panose="020B0503020202020204" pitchFamily="34" charset="0"/>
               </a:rPr>
-              <a:t>• Still lacks a dedicated ESG enforcement team or cross-checks with pollution data.</a:t>
-            </a:r>
+              <a:t>• S</a:t>
+            </a:r>
+            <a:r>
+              <a:rPr lang="en-US" sz="1400" dirty="0">
+                <a:latin typeface="Avenir Next" panose="020B0503020202020204" pitchFamily="34" charset="0"/>
+              </a:rPr>
+              <a:t>EBI s</a:t>
+            </a:r>
+            <a:r>
+              <a:rPr sz="1400" dirty="0">
+                <a:latin typeface="Avenir Next" panose="020B0503020202020204" pitchFamily="34" charset="0"/>
+              </a:rPr>
+              <a:t>till lacks a dedicated ESG enforcement team</a:t>
+            </a:r>
+            <a:r>
+              <a:rPr lang="en-US" sz="1400" dirty="0">
+                <a:latin typeface="Avenir Next" panose="020B0503020202020204" pitchFamily="34" charset="0"/>
+              </a:rPr>
+              <a:t>.</a:t>
+            </a:r>
+            <a:endParaRPr sz="1400" dirty="0">
+              <a:latin typeface="Avenir Next" panose="020B0503020202020204" pitchFamily="34" charset="0"/>
+            </a:endParaRPr>
           </a:p>
         </p:txBody>
       </p:sp>
@@ -10220,7 +10368,7 @@
         </p:nvSpPr>
         <p:spPr>
           <a:xfrm>
-            <a:off x="11336710" y="5407297"/>
+            <a:off x="11304573" y="4544107"/>
             <a:ext cx="184730" cy="261610"/>
           </a:xfrm>
           <a:prstGeom prst="rect">
@@ -22997,7 +23145,7 @@
         </p:nvSpPr>
         <p:spPr>
           <a:xfrm>
-            <a:off x="548639" y="384048"/>
+            <a:off x="548639" y="289919"/>
             <a:ext cx="9612791" cy="584775"/>
           </a:xfrm>
           <a:prstGeom prst="rect">
@@ -23060,8 +23208,8 @@
         </p:nvSpPr>
         <p:spPr>
           <a:xfrm>
-            <a:off x="783524" y="1614768"/>
-            <a:ext cx="3009045" cy="2574173"/>
+            <a:off x="783524" y="1345828"/>
+            <a:ext cx="3009045" cy="2688290"/>
           </a:xfrm>
           <a:prstGeom prst="roundRect">
             <a:avLst/>
@@ -23108,7 +23256,7 @@
         </p:nvSpPr>
         <p:spPr>
           <a:xfrm>
-            <a:off x="713336" y="1560889"/>
+            <a:off x="713336" y="1291949"/>
             <a:ext cx="2782636" cy="553533"/>
           </a:xfrm>
           <a:prstGeom prst="roundRect">
@@ -23173,7 +23321,7 @@
         </p:nvSpPr>
         <p:spPr>
           <a:xfrm>
-            <a:off x="987552" y="2268243"/>
+            <a:off x="987552" y="1970728"/>
             <a:ext cx="1893914" cy="461665"/>
           </a:xfrm>
           <a:prstGeom prst="rect">
@@ -23212,8 +23360,8 @@
         </p:nvSpPr>
         <p:spPr>
           <a:xfrm>
-            <a:off x="783524" y="2693225"/>
-            <a:ext cx="2712448" cy="1292662"/>
+            <a:off x="783524" y="2424285"/>
+            <a:ext cx="2712448" cy="1431161"/>
           </a:xfrm>
           <a:prstGeom prst="rect">
             <a:avLst/>
@@ -23226,7 +23374,7 @@
           </a:bodyPr>
           <a:lstStyle/>
           <a:p>
-            <a:pPr marL="285750" indent="-285750" algn="just">
+            <a:pPr marL="285750" indent="-285750">
               <a:buFont typeface="Arial" panose="020B0604020202020204" pitchFamily="34" charset="0"/>
               <a:buChar char="•"/>
               <a:defRPr sz="1150" b="0">
@@ -23250,7 +23398,20 @@
             </a:r>
           </a:p>
           <a:p>
-            <a:pPr marL="285750" indent="-285750" algn="just">
+            <a:pPr>
+              <a:defRPr sz="1150" b="0">
+                <a:solidFill>
+                  <a:srgbClr val="2A2A2A"/>
+                </a:solidFill>
+                <a:latin typeface="Avenir Next"/>
+              </a:defRPr>
+            </a:pPr>
+            <a:endParaRPr lang="en-US" sz="800" b="1" dirty="0">
+              <a:latin typeface="Avenir Next" panose="020B0503020202020204" pitchFamily="34" charset="0"/>
+            </a:endParaRPr>
+          </a:p>
+          <a:p>
+            <a:pPr marL="285750" indent="-285750">
               <a:buFont typeface="Arial" panose="020B0604020202020204" pitchFamily="34" charset="0"/>
               <a:buChar char="•"/>
               <a:defRPr sz="1150" b="0">
@@ -23295,8 +23456,8 @@
         </p:nvSpPr>
         <p:spPr>
           <a:xfrm>
-            <a:off x="4133087" y="1614768"/>
-            <a:ext cx="3127248" cy="3150618"/>
+            <a:off x="4133087" y="1345828"/>
+            <a:ext cx="3127248" cy="3365920"/>
           </a:xfrm>
           <a:prstGeom prst="roundRect">
             <a:avLst/>
@@ -23329,7 +23490,7 @@
           <a:lstStyle/>
           <a:p>
             <a:pPr algn="ctr"/>
-            <a:endParaRPr>
+            <a:endParaRPr dirty="0">
               <a:latin typeface="Avenir Next" panose="020B0503020202020204" pitchFamily="34" charset="0"/>
             </a:endParaRPr>
           </a:p>
@@ -23343,7 +23504,7 @@
         </p:nvSpPr>
         <p:spPr>
           <a:xfrm>
-            <a:off x="4068831" y="1548531"/>
+            <a:off x="4068831" y="1279591"/>
             <a:ext cx="2542032" cy="553189"/>
           </a:xfrm>
           <a:prstGeom prst="roundRect">
@@ -23419,8 +23580,8 @@
         </p:nvSpPr>
         <p:spPr>
           <a:xfrm>
-            <a:off x="4169811" y="2221724"/>
-            <a:ext cx="2945376" cy="2492990"/>
+            <a:off x="4169811" y="1952784"/>
+            <a:ext cx="3009972" cy="692497"/>
           </a:xfrm>
           <a:prstGeom prst="rect">
             <a:avLst/>
@@ -23433,9 +23594,7 @@
           </a:bodyPr>
           <a:lstStyle/>
           <a:p>
-            <a:pPr marL="285750" indent="-285750" algn="just">
-              <a:buFont typeface="Arial" panose="020B0604020202020204" pitchFamily="34" charset="0"/>
-              <a:buChar char="•"/>
+            <a:pPr>
               <a:defRPr sz="1150" b="1">
                 <a:solidFill>
                   <a:srgbClr val="2A2A2A"/>
@@ -23444,75 +23603,22 @@
               </a:defRPr>
             </a:pPr>
             <a:r>
+              <a:rPr lang="en-US" sz="1300" dirty="0">
+                <a:latin typeface="Avenir Next" panose="020B0503020202020204" pitchFamily="34" charset="0"/>
+              </a:rPr>
+              <a:t>We looked at two peer reviewed studies highlighting greenwashing of same Nifty 50 </a:t>
+            </a:r>
+            <a:r>
               <a:rPr sz="1300" dirty="0">
                 <a:latin typeface="Avenir Next" panose="020B0503020202020204" pitchFamily="34" charset="0"/>
               </a:rPr>
-              <a:t>54% of NSE-listed firms in one study engaged in greenwashing.</a:t>
-            </a:r>
-            <a:endParaRPr lang="en-US" sz="1300" dirty="0">
-              <a:latin typeface="Avenir Next" panose="020B0503020202020204" pitchFamily="34" charset="0"/>
-            </a:endParaRPr>
-          </a:p>
-          <a:p>
-            <a:pPr algn="just">
-              <a:defRPr sz="1150" b="1">
-                <a:solidFill>
-                  <a:srgbClr val="2A2A2A"/>
-                </a:solidFill>
-                <a:latin typeface="Avenir Next"/>
-              </a:defRPr>
-            </a:pPr>
-            <a:endParaRPr lang="en-US" sz="1050" dirty="0">
-              <a:latin typeface="Avenir Next" panose="020B0503020202020204" pitchFamily="34" charset="0"/>
-            </a:endParaRPr>
-          </a:p>
-          <a:p>
-            <a:pPr marL="285750" indent="-285750" algn="just">
-              <a:buFont typeface="Arial" panose="020B0604020202020204" pitchFamily="34" charset="0"/>
-              <a:buChar char="•"/>
-              <a:defRPr sz="1150" b="1">
-                <a:solidFill>
-                  <a:srgbClr val="2A2A2A"/>
-                </a:solidFill>
-                <a:latin typeface="Avenir Next"/>
-              </a:defRPr>
-            </a:pPr>
-            <a:r>
-              <a:rPr lang="en-IN" sz="1300" dirty="0">
-                <a:latin typeface="Avenir Next" panose="020B0503020202020204" pitchFamily="34" charset="0"/>
-              </a:rPr>
-              <a:t>47% of NIFTY 50 companies were flagged in another research.</a:t>
-            </a:r>
-          </a:p>
-          <a:p>
-            <a:pPr algn="just">
-              <a:defRPr sz="1150" b="1">
-                <a:solidFill>
-                  <a:srgbClr val="2A2A2A"/>
-                </a:solidFill>
-                <a:latin typeface="Avenir Next"/>
-              </a:defRPr>
-            </a:pPr>
-            <a:endParaRPr lang="en-IN" sz="1050" dirty="0">
-              <a:latin typeface="Avenir Next" panose="020B0503020202020204" pitchFamily="34" charset="0"/>
-            </a:endParaRPr>
-          </a:p>
-          <a:p>
-            <a:pPr marL="285750" indent="-285750" algn="just">
-              <a:buFont typeface="Arial" panose="020B0604020202020204" pitchFamily="34" charset="0"/>
-              <a:buChar char="•"/>
-              <a:defRPr sz="1150" b="1">
-                <a:solidFill>
-                  <a:srgbClr val="2A2A2A"/>
-                </a:solidFill>
-                <a:latin typeface="Avenir Next"/>
-              </a:defRPr>
-            </a:pPr>
-            <a:r>
-              <a:rPr lang="en-IN" sz="1300" dirty="0">
-                <a:latin typeface="Avenir Next" panose="020B0503020202020204" pitchFamily="34" charset="0"/>
-              </a:rPr>
-              <a:t>CRISIL also found nearly 80% of 586 companies scored below average or weak on ESG parameters.</a:t>
+              <a:t>firms</a:t>
+            </a:r>
+            <a:r>
+              <a:rPr lang="en-US" sz="1300" dirty="0">
+                <a:latin typeface="Avenir Next" panose="020B0503020202020204" pitchFamily="34" charset="0"/>
+              </a:rPr>
+              <a:t>:</a:t>
             </a:r>
           </a:p>
         </p:txBody>
@@ -23525,7 +23631,7 @@
         </p:nvSpPr>
         <p:spPr>
           <a:xfrm>
-            <a:off x="7588036" y="1614769"/>
+            <a:off x="7588036" y="1345829"/>
             <a:ext cx="4079708" cy="3352221"/>
           </a:xfrm>
           <a:prstGeom prst="roundRect">
@@ -23573,8 +23679,8 @@
         </p:nvSpPr>
         <p:spPr>
           <a:xfrm>
-            <a:off x="7496101" y="1560889"/>
-            <a:ext cx="1792223" cy="426572"/>
+            <a:off x="7473965" y="1291949"/>
+            <a:ext cx="3780707" cy="426572"/>
           </a:xfrm>
           <a:prstGeom prst="roundRect">
             <a:avLst/>
@@ -23613,14 +23719,38 @@
               </a:defRPr>
             </a:pPr>
             <a:r>
-              <a:rPr sz="1400" dirty="0">
+              <a:rPr lang="en-US" sz="1500" dirty="0">
                 <a:solidFill>
                   <a:schemeClr val="bg1"/>
                 </a:solidFill>
                 <a:latin typeface="Avenir Next" panose="020B0503020202020204" pitchFamily="34" charset="0"/>
               </a:rPr>
-              <a:t>ESG market scale</a:t>
-            </a:r>
+              <a:t>Market Scale of </a:t>
+            </a:r>
+            <a:r>
+              <a:rPr sz="1500" dirty="0">
+                <a:solidFill>
+                  <a:schemeClr val="bg1"/>
+                </a:solidFill>
+                <a:latin typeface="Avenir Next" panose="020B0503020202020204" pitchFamily="34" charset="0"/>
+              </a:rPr>
+              <a:t>ESG </a:t>
+            </a:r>
+            <a:r>
+              <a:rPr lang="en-US" sz="1500" dirty="0">
+                <a:solidFill>
+                  <a:schemeClr val="bg1"/>
+                </a:solidFill>
+                <a:latin typeface="Avenir Next" panose="020B0503020202020204" pitchFamily="34" charset="0"/>
+              </a:rPr>
+              <a:t>Equity and Debt</a:t>
+            </a:r>
+            <a:endParaRPr sz="1500" dirty="0">
+              <a:solidFill>
+                <a:schemeClr val="bg1"/>
+              </a:solidFill>
+              <a:latin typeface="Avenir Next" panose="020B0503020202020204" pitchFamily="34" charset="0"/>
+            </a:endParaRPr>
           </a:p>
         </p:txBody>
       </p:sp>
@@ -23632,8 +23762,8 @@
         </p:nvSpPr>
         <p:spPr>
           <a:xfrm>
-            <a:off x="7588036" y="2166020"/>
-            <a:ext cx="1591056" cy="400110"/>
+            <a:off x="7626136" y="1897080"/>
+            <a:ext cx="2134188" cy="400110"/>
           </a:xfrm>
           <a:prstGeom prst="rect">
             <a:avLst/>
@@ -23655,14 +23785,11 @@
               </a:defRPr>
             </a:pPr>
             <a:r>
-              <a:rPr sz="2000" dirty="0">
-                <a:latin typeface="Avenir Next" panose="020B0503020202020204" pitchFamily="34" charset="0"/>
-              </a:rPr>
-              <a:t>USD 1.2B</a:t>
-            </a:r>
-            <a:endParaRPr lang="en-US" sz="2000" dirty="0">
-              <a:latin typeface="Avenir Next" panose="020B0503020202020204" pitchFamily="34" charset="0"/>
-            </a:endParaRPr>
+              <a:rPr lang="en-IN" sz="2000" dirty="0">
+                <a:latin typeface="Avenir Next" panose="020B0503020202020204" pitchFamily="34" charset="0"/>
+              </a:rPr>
+              <a:t>ESG fund AUM</a:t>
+            </a:r>
           </a:p>
         </p:txBody>
       </p:sp>
@@ -23674,8 +23801,8 @@
         </p:nvSpPr>
         <p:spPr>
           <a:xfrm>
-            <a:off x="7719478" y="2510668"/>
-            <a:ext cx="1591056" cy="830997"/>
+            <a:off x="7699865" y="2254266"/>
+            <a:ext cx="1859039" cy="1015663"/>
           </a:xfrm>
           <a:prstGeom prst="rect">
             <a:avLst/>
@@ -23688,7 +23815,7 @@
           </a:bodyPr>
           <a:lstStyle/>
           <a:p>
-            <a:pPr algn="just">
+            <a:pPr>
               <a:defRPr sz="1050" b="0">
                 <a:solidFill>
                   <a:srgbClr val="2A2A2A"/>
@@ -23697,11 +23824,24 @@
               </a:defRPr>
             </a:pPr>
             <a:r>
-              <a:rPr sz="1200" dirty="0">
-                <a:latin typeface="Avenir Next" panose="020B0503020202020204" pitchFamily="34" charset="0"/>
-              </a:rPr>
-              <a:t>ESG fund assets by March 2024, up from USD 331M in 2020.</a:t>
-            </a:r>
+              <a:rPr lang="en-US" sz="1200" dirty="0">
+                <a:latin typeface="Avenir Next" panose="020B0503020202020204" pitchFamily="34" charset="0"/>
+              </a:rPr>
+              <a:t>Grew from US$ 331 million in January 2020 to US$ 1.2 billion by March 2024</a:t>
+            </a:r>
+          </a:p>
+          <a:p>
+            <a:pPr>
+              <a:defRPr sz="1050" b="0">
+                <a:solidFill>
+                  <a:srgbClr val="2A2A2A"/>
+                </a:solidFill>
+                <a:latin typeface="Avenir Next"/>
+              </a:defRPr>
+            </a:pPr>
+            <a:endParaRPr sz="1200" dirty="0">
+              <a:latin typeface="Avenir Next" panose="020B0503020202020204" pitchFamily="34" charset="0"/>
+            </a:endParaRPr>
           </a:p>
         </p:txBody>
       </p:sp>
@@ -23713,8 +23853,8 @@
         </p:nvSpPr>
         <p:spPr>
           <a:xfrm>
-            <a:off x="9400032" y="2166020"/>
-            <a:ext cx="1792224" cy="400110"/>
+            <a:off x="9707819" y="1897080"/>
+            <a:ext cx="1551672" cy="400110"/>
           </a:xfrm>
           <a:prstGeom prst="rect">
             <a:avLst/>
@@ -23736,14 +23876,11 @@
               </a:defRPr>
             </a:pPr>
             <a:r>
-              <a:rPr sz="2000" dirty="0">
-                <a:latin typeface="Avenir Next" panose="020B0503020202020204" pitchFamily="34" charset="0"/>
-              </a:rPr>
-              <a:t>USD 55.9B</a:t>
-            </a:r>
-            <a:endParaRPr lang="en-US" sz="2000" dirty="0">
-              <a:latin typeface="Avenir Next" panose="020B0503020202020204" pitchFamily="34" charset="0"/>
-            </a:endParaRPr>
+              <a:rPr lang="en-US" sz="2000" dirty="0">
+                <a:latin typeface="Avenir Next" panose="020B0503020202020204" pitchFamily="34" charset="0"/>
+              </a:rPr>
+              <a:t>ESG Debt</a:t>
+            </a:r>
           </a:p>
         </p:txBody>
       </p:sp>
@@ -23755,8 +23892,8 @@
         </p:nvSpPr>
         <p:spPr>
           <a:xfrm>
-            <a:off x="9586796" y="2528674"/>
-            <a:ext cx="1591056" cy="830997"/>
+            <a:off x="9838484" y="2259734"/>
+            <a:ext cx="1634637" cy="830997"/>
           </a:xfrm>
           <a:prstGeom prst="rect">
             <a:avLst/>
@@ -23769,7 +23906,7 @@
           </a:bodyPr>
           <a:lstStyle/>
           <a:p>
-            <a:pPr algn="just">
+            <a:pPr>
               <a:defRPr sz="1050" b="0">
                 <a:solidFill>
                   <a:srgbClr val="2A2A2A"/>
@@ -23778,10 +23915,10 @@
               </a:defRPr>
             </a:pPr>
             <a:r>
-              <a:rPr sz="1200" dirty="0">
-                <a:latin typeface="Avenir Next" panose="020B0503020202020204" pitchFamily="34" charset="0"/>
-              </a:rPr>
-              <a:t>Cumulative green, social, and sustainability-linked debt by Dec 2024.</a:t>
+              <a:rPr lang="en-US" sz="1200" dirty="0">
+                <a:latin typeface="Avenir Next" panose="020B0503020202020204" pitchFamily="34" charset="0"/>
+              </a:rPr>
+              <a:t>Reached US$ 56 billion by Dec. 2024, a 186% increase since 2021</a:t>
             </a:r>
           </a:p>
         </p:txBody>
@@ -23794,7 +23931,7 @@
         </p:nvSpPr>
         <p:spPr>
           <a:xfrm>
-            <a:off x="7702107" y="3461824"/>
+            <a:off x="7702107" y="3192884"/>
             <a:ext cx="3657600" cy="1431161"/>
           </a:xfrm>
           <a:prstGeom prst="rect">
@@ -23808,7 +23945,7 @@
           </a:bodyPr>
           <a:lstStyle/>
           <a:p>
-            <a:pPr marL="285750" indent="-285750" algn="just">
+            <a:pPr marL="285750" indent="-285750">
               <a:buFont typeface="Arial" panose="020B0604020202020204" pitchFamily="34" charset="0"/>
               <a:buChar char="•"/>
               <a:defRPr sz="1070" b="1">
@@ -23828,20 +23965,47 @@
                 </a:solidFill>
                 <a:latin typeface="Avenir Next" panose="020B0503020202020204" pitchFamily="34" charset="0"/>
               </a:rPr>
-              <a:t>India is already the fourth-largest emerging-market source of sustainable debt globally, </a:t>
-            </a:r>
-            <a:endParaRPr lang="en-US" sz="1300" dirty="0">
-              <a:solidFill>
-                <a:schemeClr val="tx1">
-                  <a:lumMod val="95000"/>
-                  <a:lumOff val="5000"/>
-                </a:schemeClr>
-              </a:solidFill>
-              <a:latin typeface="Avenir Next" panose="020B0503020202020204" pitchFamily="34" charset="0"/>
-            </a:endParaRPr>
-          </a:p>
-          <a:p>
-            <a:pPr algn="just">
+              <a:t>India is already the fourth-largest emerging</a:t>
+            </a:r>
+            <a:r>
+              <a:rPr lang="en-US" sz="1300" dirty="0">
+                <a:solidFill>
+                  <a:schemeClr val="tx1">
+                    <a:lumMod val="95000"/>
+                    <a:lumOff val="5000"/>
+                  </a:schemeClr>
+                </a:solidFill>
+                <a:latin typeface="Avenir Next" panose="020B0503020202020204" pitchFamily="34" charset="0"/>
+              </a:rPr>
+              <a:t> </a:t>
+            </a:r>
+            <a:r>
+              <a:rPr sz="1300" dirty="0">
+                <a:solidFill>
+                  <a:schemeClr val="tx1">
+                    <a:lumMod val="95000"/>
+                    <a:lumOff val="5000"/>
+                  </a:schemeClr>
+                </a:solidFill>
+                <a:latin typeface="Avenir Next" panose="020B0503020202020204" pitchFamily="34" charset="0"/>
+              </a:rPr>
+              <a:t>market source of sustainable debt globally</a:t>
+            </a:r>
+            <a:r>
+              <a:rPr lang="en-US" sz="1300" dirty="0">
+                <a:solidFill>
+                  <a:schemeClr val="tx1">
+                    <a:lumMod val="95000"/>
+                    <a:lumOff val="5000"/>
+                  </a:schemeClr>
+                </a:solidFill>
+                <a:latin typeface="Avenir Next" panose="020B0503020202020204" pitchFamily="34" charset="0"/>
+              </a:rPr>
+              <a:t>.</a:t>
+            </a:r>
+          </a:p>
+          <a:p>
+            <a:pPr>
               <a:defRPr sz="1070" b="1">
                 <a:solidFill>
                   <a:srgbClr val="A23E2A"/>
@@ -23860,7 +24024,7 @@
             </a:endParaRPr>
           </a:p>
           <a:p>
-            <a:pPr marL="285750" indent="-285750" algn="just">
+            <a:pPr marL="285750" indent="-285750">
               <a:buFont typeface="Arial" panose="020B0604020202020204" pitchFamily="34" charset="0"/>
               <a:buChar char="•"/>
               <a:defRPr sz="1070" b="1">
@@ -23871,7 +24035,7 @@
               </a:defRPr>
             </a:pPr>
             <a:r>
-              <a:rPr lang="en-US" sz="1300" dirty="0">
+              <a:rPr sz="1300" dirty="0">
                 <a:solidFill>
                   <a:schemeClr val="tx1">
                     <a:lumMod val="95000"/>
@@ -23880,10 +24044,10 @@
                 </a:solidFill>
                 <a:latin typeface="Avenir Next" panose="020B0503020202020204" pitchFamily="34" charset="0"/>
               </a:rPr>
-              <a:t>And</a:t>
-            </a:r>
-            <a:r>
-              <a:rPr sz="1300" dirty="0">
+              <a:t>RBI</a:t>
+            </a:r>
+            <a:r>
+              <a:rPr lang="en-US" sz="1300" dirty="0">
                 <a:solidFill>
                   <a:schemeClr val="tx1">
                     <a:lumMod val="95000"/>
@@ -23892,10 +24056,10 @@
                 </a:solidFill>
                 <a:latin typeface="Avenir Next" panose="020B0503020202020204" pitchFamily="34" charset="0"/>
               </a:rPr>
-              <a:t> RBI research finds ESG </a:t>
-            </a:r>
-            <a:r>
-              <a:rPr lang="en-US" sz="1300" dirty="0">
+              <a:t>’s 2023</a:t>
+            </a:r>
+            <a:r>
+              <a:rPr sz="1300" dirty="0">
                 <a:solidFill>
                   <a:schemeClr val="tx1">
                     <a:lumMod val="95000"/>
@@ -23904,10 +24068,10 @@
                 </a:solidFill>
                 <a:latin typeface="Avenir Next" panose="020B0503020202020204" pitchFamily="34" charset="0"/>
               </a:rPr>
-              <a:t>claim based stocks have returns</a:t>
-            </a:r>
-            <a:r>
-              <a:rPr sz="1300" dirty="0">
+              <a:t> research</a:t>
+            </a:r>
+            <a:r>
+              <a:rPr lang="en-US" sz="1300" dirty="0">
                 <a:solidFill>
                   <a:schemeClr val="tx1">
                     <a:lumMod val="95000"/>
@@ -23916,179 +24080,91 @@
                 </a:solidFill>
                 <a:latin typeface="Avenir Next" panose="020B0503020202020204" pitchFamily="34" charset="0"/>
               </a:rPr>
-              <a:t> above market predictions.</a:t>
-            </a:r>
-          </a:p>
-        </p:txBody>
-      </p:sp>
-      <p:sp>
-        <p:nvSpPr>
-          <p:cNvPr id="25" name="Rounded Rectangle 24"/>
-          <p:cNvSpPr/>
-          <p:nvPr/>
-        </p:nvSpPr>
-        <p:spPr>
-          <a:xfrm>
-            <a:off x="770037" y="4909763"/>
-            <a:ext cx="4931936" cy="1553965"/>
-          </a:xfrm>
-          <a:prstGeom prst="roundRect">
-            <a:avLst/>
-          </a:prstGeom>
-          <a:solidFill>
-            <a:srgbClr val="FFFDF8"/>
-          </a:solidFill>
-          <a:ln w="12700">
-            <a:solidFill>
-              <a:srgbClr val="D8D1C6"/>
-            </a:solidFill>
-          </a:ln>
-        </p:spPr>
-        <p:style>
-          <a:lnRef idx="1">
-            <a:schemeClr val="accent1"/>
-          </a:lnRef>
-          <a:fillRef idx="3">
-            <a:schemeClr val="accent1"/>
-          </a:fillRef>
-          <a:effectRef idx="2">
-            <a:schemeClr val="accent1"/>
-          </a:effectRef>
-          <a:fontRef idx="minor">
-            <a:schemeClr val="lt1"/>
-          </a:fontRef>
-        </p:style>
-        <p:txBody>
-          <a:bodyPr rtlCol="0" anchor="ctr"/>
-          <a:lstStyle/>
-          <a:p>
-            <a:pPr algn="ctr"/>
-            <a:endParaRPr>
-              <a:latin typeface="Avenir Next" panose="020B0503020202020204" pitchFamily="34" charset="0"/>
-            </a:endParaRPr>
-          </a:p>
-        </p:txBody>
-      </p:sp>
-      <p:sp>
-        <p:nvSpPr>
-          <p:cNvPr id="26" name="Rounded Rectangle 25"/>
-          <p:cNvSpPr/>
-          <p:nvPr/>
-        </p:nvSpPr>
-        <p:spPr>
-          <a:xfrm>
-            <a:off x="713336" y="4865699"/>
-            <a:ext cx="3459291" cy="487833"/>
-          </a:xfrm>
-          <a:prstGeom prst="roundRect">
-            <a:avLst/>
-          </a:prstGeom>
-          <a:solidFill>
-            <a:srgbClr val="A23E2A"/>
-          </a:solidFill>
-          <a:ln>
-            <a:noFill/>
-          </a:ln>
-        </p:spPr>
-        <p:style>
-          <a:lnRef idx="1">
-            <a:schemeClr val="accent1"/>
-          </a:lnRef>
-          <a:fillRef idx="3">
-            <a:schemeClr val="accent1"/>
-          </a:fillRef>
-          <a:effectRef idx="2">
-            <a:schemeClr val="accent1"/>
-          </a:effectRef>
-          <a:fontRef idx="minor">
-            <a:schemeClr val="lt1"/>
-          </a:fontRef>
-        </p:style>
-        <p:txBody>
-          <a:bodyPr lIns="91440" tIns="45720" rIns="91440" bIns="45720" rtlCol="0" anchor="ctr"/>
-          <a:lstStyle/>
-          <a:p>
-            <a:pPr algn="ctr">
-              <a:defRPr sz="1000" b="1">
-                <a:solidFill>
-                  <a:srgbClr val="FFFFFF"/>
-                </a:solidFill>
-                <a:latin typeface="Avenir Next"/>
-              </a:defRPr>
-            </a:pPr>
-            <a:r>
-              <a:rPr sz="1400" dirty="0">
-                <a:latin typeface="Avenir Next" panose="020B0503020202020204" pitchFamily="34" charset="0"/>
-              </a:rPr>
-              <a:t>Compliance </a:t>
-            </a:r>
-            <a:r>
-              <a:rPr lang="en-US" sz="1400" dirty="0">
-                <a:latin typeface="Avenir Next" panose="020B0503020202020204" pitchFamily="34" charset="0"/>
-              </a:rPr>
-              <a:t>infrastructure in India lacks substance</a:t>
-            </a:r>
-            <a:endParaRPr sz="1400" dirty="0">
-              <a:latin typeface="Avenir Next" panose="020B0503020202020204" pitchFamily="34" charset="0"/>
-            </a:endParaRPr>
-          </a:p>
-        </p:txBody>
-      </p:sp>
-      <p:sp>
-        <p:nvSpPr>
-          <p:cNvPr id="27" name="TextBox 26"/>
-          <p:cNvSpPr txBox="1"/>
-          <p:nvPr/>
-        </p:nvSpPr>
-        <p:spPr>
-          <a:xfrm>
-            <a:off x="770037" y="5417225"/>
-            <a:ext cx="4918449" cy="892552"/>
-          </a:xfrm>
-          <a:prstGeom prst="rect">
-            <a:avLst/>
-          </a:prstGeom>
-          <a:noFill/>
-        </p:spPr>
-        <p:txBody>
-          <a:bodyPr wrap="square" lIns="91440" tIns="45720" rIns="91440" bIns="45720" anchor="t">
-            <a:spAutoFit/>
-          </a:bodyPr>
-          <a:lstStyle/>
-          <a:p>
-            <a:pPr marL="171450" indent="-171450" algn="just">
-              <a:buFont typeface="Arial" panose="020B0604020202020204" pitchFamily="34" charset="0"/>
-              <a:buChar char="•"/>
-              <a:defRPr sz="1100" b="0">
-                <a:solidFill>
-                  <a:srgbClr val="2A2A2A"/>
-                </a:solidFill>
-                <a:latin typeface="Avenir Next"/>
-              </a:defRPr>
-            </a:pPr>
-            <a:r>
-              <a:rPr sz="1300" b="1" dirty="0">
-                <a:latin typeface="Avenir Next" panose="020B0503020202020204" pitchFamily="34" charset="0"/>
-              </a:rPr>
-              <a:t>CPCB uncovered about 600,000 fake EPR certificates in 2024, </a:t>
-            </a:r>
-            <a:r>
-              <a:rPr lang="en-US" sz="1300" b="1" dirty="0">
-                <a:latin typeface="Avenir Next" panose="020B0503020202020204" pitchFamily="34" charset="0"/>
-              </a:rPr>
-              <a:t>and NGT took </a:t>
-            </a:r>
-            <a:r>
-              <a:rPr lang="en-US" sz="1300" b="1" dirty="0" err="1">
-                <a:latin typeface="Avenir Next" panose="020B0503020202020204" pitchFamily="34" charset="0"/>
-              </a:rPr>
-              <a:t>suo</a:t>
-            </a:r>
-            <a:r>
-              <a:rPr lang="en-US" sz="1300" b="1" dirty="0">
-                <a:latin typeface="Avenir Next" panose="020B0503020202020204" pitchFamily="34" charset="0"/>
-              </a:rPr>
-              <a:t> moto cognizance of it; showing that the verification deficit reaches the infrastructure of environmental compliance itself.</a:t>
+              <a:t> study</a:t>
+            </a:r>
+            <a:r>
+              <a:rPr sz="1300" dirty="0">
+                <a:solidFill>
+                  <a:schemeClr val="tx1">
+                    <a:lumMod val="95000"/>
+                    <a:lumOff val="5000"/>
+                  </a:schemeClr>
+                </a:solidFill>
+                <a:latin typeface="Avenir Next" panose="020B0503020202020204" pitchFamily="34" charset="0"/>
+              </a:rPr>
+              <a:t> </a:t>
+            </a:r>
+            <a:r>
+              <a:rPr lang="en-US" sz="1300" dirty="0">
+                <a:solidFill>
+                  <a:schemeClr val="tx1">
+                    <a:lumMod val="95000"/>
+                    <a:lumOff val="5000"/>
+                  </a:schemeClr>
+                </a:solidFill>
+                <a:latin typeface="Avenir Next" panose="020B0503020202020204" pitchFamily="34" charset="0"/>
+              </a:rPr>
+              <a:t>found that </a:t>
+            </a:r>
+            <a:r>
+              <a:rPr sz="1300" dirty="0">
+                <a:solidFill>
+                  <a:schemeClr val="tx1">
+                    <a:lumMod val="95000"/>
+                    <a:lumOff val="5000"/>
+                  </a:schemeClr>
+                </a:solidFill>
+                <a:latin typeface="Avenir Next" panose="020B0503020202020204" pitchFamily="34" charset="0"/>
+              </a:rPr>
+              <a:t>ESG </a:t>
+            </a:r>
+            <a:r>
+              <a:rPr lang="en-US" sz="1300" dirty="0">
+                <a:solidFill>
+                  <a:schemeClr val="tx1">
+                    <a:lumMod val="95000"/>
+                    <a:lumOff val="5000"/>
+                  </a:schemeClr>
+                </a:solidFill>
+                <a:latin typeface="Avenir Next" panose="020B0503020202020204" pitchFamily="34" charset="0"/>
+              </a:rPr>
+              <a:t>based stocks have higher returns</a:t>
+            </a:r>
+            <a:r>
+              <a:rPr sz="1300" dirty="0">
+                <a:solidFill>
+                  <a:schemeClr val="tx1">
+                    <a:lumMod val="95000"/>
+                    <a:lumOff val="5000"/>
+                  </a:schemeClr>
+                </a:solidFill>
+                <a:latin typeface="Avenir Next" panose="020B0503020202020204" pitchFamily="34" charset="0"/>
+              </a:rPr>
+              <a:t> </a:t>
+            </a:r>
+            <a:r>
+              <a:rPr lang="en-US" sz="1300" dirty="0">
+                <a:solidFill>
+                  <a:schemeClr val="tx1">
+                    <a:lumMod val="95000"/>
+                    <a:lumOff val="5000"/>
+                  </a:schemeClr>
+                </a:solidFill>
+                <a:latin typeface="Avenir Next" panose="020B0503020202020204" pitchFamily="34" charset="0"/>
+              </a:rPr>
+              <a:t>compared to </a:t>
+            </a:r>
+            <a:r>
+              <a:rPr sz="1300" dirty="0">
+                <a:solidFill>
+                  <a:schemeClr val="tx1">
+                    <a:lumMod val="95000"/>
+                    <a:lumOff val="5000"/>
+                  </a:schemeClr>
+                </a:solidFill>
+                <a:latin typeface="Avenir Next" panose="020B0503020202020204" pitchFamily="34" charset="0"/>
+              </a:rPr>
+              <a:t>market.</a:t>
             </a:r>
           </a:p>
         </p:txBody>
@@ -24101,8 +24177,8 @@
         </p:nvSpPr>
         <p:spPr>
           <a:xfrm>
-            <a:off x="5925312" y="5390971"/>
-            <a:ext cx="5742432" cy="993388"/>
+            <a:off x="1515292" y="5390971"/>
+            <a:ext cx="9013372" cy="993388"/>
           </a:xfrm>
           <a:prstGeom prst="roundRect">
             <a:avLst/>
@@ -24149,8 +24225,8 @@
         </p:nvSpPr>
         <p:spPr>
           <a:xfrm>
-            <a:off x="5987728" y="5464473"/>
-            <a:ext cx="5266944" cy="861774"/>
+            <a:off x="987552" y="5546637"/>
+            <a:ext cx="10267120" cy="615553"/>
           </a:xfrm>
           <a:prstGeom prst="rect">
             <a:avLst/>
@@ -24221,7 +24297,7 @@
         <p:spPr>
           <a:xfrm>
             <a:off x="643329" y="6557535"/>
-            <a:ext cx="8112927" cy="307777"/>
+            <a:ext cx="8981177" cy="307777"/>
           </a:xfrm>
           <a:prstGeom prst="rect">
             <a:avLst/>
@@ -24251,7 +24327,7 @@
                   </a:schemeClr>
                 </a:solidFill>
               </a:rPr>
-              <a:t>Source base: </a:t>
+              <a:t>Source: </a:t>
             </a:r>
             <a:r>
               <a:rPr lang="en-US" sz="1400" dirty="0">
@@ -24262,7 +24338,7 @@
                   </a:schemeClr>
                 </a:solidFill>
               </a:rPr>
-              <a:t>ASCI</a:t>
+              <a:t>Section 2.5 of Thesis. ASCI</a:t>
             </a:r>
             <a:r>
               <a:rPr sz="1400" dirty="0">
@@ -24284,7 +24360,7 @@
                   </a:schemeClr>
                 </a:solidFill>
               </a:rPr>
-              <a:t> CRISIL,</a:t>
+              <a:t> CRISIL, </a:t>
             </a:r>
             <a:r>
               <a:rPr sz="1400" dirty="0">
@@ -24295,7 +24371,7 @@
                   </a:schemeClr>
                 </a:solidFill>
               </a:rPr>
-              <a:t> CPCB figures</a:t>
+              <a:t> figures</a:t>
             </a:r>
             <a:r>
               <a:rPr lang="en-US" sz="1400" dirty="0">
@@ -24336,7 +24412,7 @@
         </p:nvSpPr>
         <p:spPr>
           <a:xfrm>
-            <a:off x="695718" y="1039482"/>
+            <a:off x="695718" y="864671"/>
             <a:ext cx="5464894" cy="338554"/>
           </a:xfrm>
           <a:prstGeom prst="rect">
@@ -24366,6 +24442,147 @@
                 <a:latin typeface="Avenir Next" panose="020B0503020202020204" pitchFamily="34" charset="0"/>
               </a:rPr>
               <a:t>Based on available data from authority-based sources</a:t>
+            </a:r>
+          </a:p>
+        </p:txBody>
+      </p:sp>
+      <p:sp>
+        <p:nvSpPr>
+          <p:cNvPr id="6" name="TextBox 5">
+            <a:extLst>
+              <a:ext uri="{FF2B5EF4-FFF2-40B4-BE49-F238E27FC236}">
+                <a16:creationId xmlns:a16="http://schemas.microsoft.com/office/drawing/2014/main" id="{5E4D6379-FB21-ECB8-430A-DD00BE2CA29F}"/>
+              </a:ext>
+            </a:extLst>
+          </p:cNvPr>
+          <p:cNvSpPr txBox="1"/>
+          <p:nvPr/>
+        </p:nvSpPr>
+        <p:spPr>
+          <a:xfrm>
+            <a:off x="4169811" y="3832835"/>
+            <a:ext cx="3204595" cy="692497"/>
+          </a:xfrm>
+          <a:prstGeom prst="rect">
+            <a:avLst/>
+          </a:prstGeom>
+          <a:noFill/>
+        </p:spPr>
+        <p:txBody>
+          <a:bodyPr wrap="square">
+            <a:spAutoFit/>
+          </a:bodyPr>
+          <a:lstStyle/>
+          <a:p>
+            <a:pPr>
+              <a:defRPr sz="1150" b="1">
+                <a:solidFill>
+                  <a:srgbClr val="2A2A2A"/>
+                </a:solidFill>
+                <a:latin typeface="Avenir Next"/>
+              </a:defRPr>
+            </a:pPr>
+            <a:r>
+              <a:rPr lang="en-IN" sz="1300" dirty="0">
+                <a:latin typeface="Avenir Next" panose="020B0503020202020204" pitchFamily="34" charset="0"/>
+              </a:rPr>
+              <a:t>A CRISIL Report in 2022, discovered that nearly 80% of 586 companies scored weak on ESG parameters.</a:t>
+            </a:r>
+          </a:p>
+        </p:txBody>
+      </p:sp>
+      <p:sp>
+        <p:nvSpPr>
+          <p:cNvPr id="12" name="TextBox 11">
+            <a:extLst>
+              <a:ext uri="{FF2B5EF4-FFF2-40B4-BE49-F238E27FC236}">
+                <a16:creationId xmlns:a16="http://schemas.microsoft.com/office/drawing/2014/main" id="{03976511-B45A-D9C6-7CF1-E7DF1798451D}"/>
+              </a:ext>
+            </a:extLst>
+          </p:cNvPr>
+          <p:cNvSpPr txBox="1"/>
+          <p:nvPr/>
+        </p:nvSpPr>
+        <p:spPr>
+          <a:xfrm>
+            <a:off x="4429684" y="2912847"/>
+            <a:ext cx="1153453" cy="830997"/>
+          </a:xfrm>
+          <a:prstGeom prst="rect">
+            <a:avLst/>
+          </a:prstGeom>
+          <a:noFill/>
+        </p:spPr>
+        <p:txBody>
+          <a:bodyPr wrap="square">
+            <a:spAutoFit/>
+          </a:bodyPr>
+          <a:lstStyle/>
+          <a:p>
+            <a:pPr>
+              <a:defRPr sz="1150" b="1">
+                <a:solidFill>
+                  <a:srgbClr val="2A2A2A"/>
+                </a:solidFill>
+                <a:latin typeface="Avenir Next"/>
+              </a:defRPr>
+            </a:pPr>
+            <a:r>
+              <a:rPr lang="en-US" sz="1600" dirty="0">
+                <a:solidFill>
+                  <a:srgbClr val="2A6334"/>
+                </a:solidFill>
+                <a:latin typeface="Avenir Next" panose="020B0503020202020204" pitchFamily="34" charset="0"/>
+              </a:rPr>
+              <a:t>54% of Nifty 50 (2022)</a:t>
+            </a:r>
+          </a:p>
+        </p:txBody>
+      </p:sp>
+      <p:sp>
+        <p:nvSpPr>
+          <p:cNvPr id="31" name="TextBox 30">
+            <a:extLst>
+              <a:ext uri="{FF2B5EF4-FFF2-40B4-BE49-F238E27FC236}">
+                <a16:creationId xmlns:a16="http://schemas.microsoft.com/office/drawing/2014/main" id="{13EBFC7C-4502-5C27-2F3A-49DBCBD283E7}"/>
+              </a:ext>
+            </a:extLst>
+          </p:cNvPr>
+          <p:cNvSpPr txBox="1"/>
+          <p:nvPr/>
+        </p:nvSpPr>
+        <p:spPr>
+          <a:xfrm>
+            <a:off x="5891174" y="2918695"/>
+            <a:ext cx="1020207" cy="830997"/>
+          </a:xfrm>
+          <a:prstGeom prst="rect">
+            <a:avLst/>
+          </a:prstGeom>
+          <a:noFill/>
+        </p:spPr>
+        <p:txBody>
+          <a:bodyPr wrap="square">
+            <a:spAutoFit/>
+          </a:bodyPr>
+          <a:lstStyle/>
+          <a:p>
+            <a:pPr>
+              <a:defRPr sz="1150" b="1">
+                <a:solidFill>
+                  <a:srgbClr val="2A2A2A"/>
+                </a:solidFill>
+                <a:latin typeface="Avenir Next"/>
+              </a:defRPr>
+            </a:pPr>
+            <a:r>
+              <a:rPr lang="en-US" sz="1600" dirty="0">
+                <a:solidFill>
+                  <a:srgbClr val="2A6334"/>
+                </a:solidFill>
+                <a:latin typeface="Avenir Next" panose="020B0503020202020204" pitchFamily="34" charset="0"/>
+              </a:rPr>
+              <a:t>47% of Nifty 50 (2025)</a:t>
             </a:r>
           </a:p>
         </p:txBody>
@@ -24663,7 +24880,7 @@
               <a:rPr lang="en-US" sz="1350" dirty="0">
                 <a:latin typeface="Avenir Next" panose="020B0503020202020204" pitchFamily="34" charset="0"/>
               </a:rPr>
-              <a:t>The available discussion on the enforcement of section 166(2) of Companies Act remains thin. Beyond Companies Act also, there is lack of doctrinal studies evaluating why regulators rarely bring deterrent enforcement actions against greenwashing.</a:t>
+              <a:t>The available discussion on the enforcement of section 166(2) of Companies Act remains thin. Beyond Companies Act also, there is lack of doctrinal studies evaluating why SEBI rarely brings deterrent enforcement action against greenwashing.</a:t>
             </a:r>
           </a:p>
           <a:p>
@@ -24788,10 +25005,16 @@
               </a:defRPr>
             </a:pPr>
             <a:r>
+              <a:rPr lang="en-US" sz="1600" dirty="0">
+                <a:latin typeface="Avenir Next" panose="020B0503020202020204" pitchFamily="34" charset="0"/>
+              </a:rPr>
+              <a:t>MY</a:t>
+            </a:r>
+            <a:r>
               <a:rPr sz="1600" dirty="0">
                 <a:latin typeface="Avenir Next" panose="020B0503020202020204" pitchFamily="34" charset="0"/>
               </a:rPr>
-              <a:t>THIS STUDY ADDRESSES THESE GAPS BY:</a:t>
+              <a:t> STUDY ADDRESSES THESE GAPS BY:</a:t>
             </a:r>
           </a:p>
           <a:p>
@@ -24802,7 +25025,19 @@
               <a:rPr sz="1400" dirty="0">
                 <a:latin typeface="Avenir Next" panose="020B0503020202020204" pitchFamily="34" charset="0"/>
               </a:rPr>
-              <a:t>Treating greenwashing as a corporate governance failure at the intersection of company law, securities disclosure, and consumer protection</a:t>
+              <a:t>Treating greenwashing as a corporate governance failure at the intersection of company law, securities disclosure</a:t>
+            </a:r>
+            <a:r>
+              <a:rPr lang="en-US" sz="1400" dirty="0">
+                <a:latin typeface="Avenir Next" panose="020B0503020202020204" pitchFamily="34" charset="0"/>
+              </a:rPr>
+              <a:t> </a:t>
+            </a:r>
+            <a:r>
+              <a:rPr sz="1400" dirty="0">
+                <a:latin typeface="Avenir Next" panose="020B0503020202020204" pitchFamily="34" charset="0"/>
+              </a:rPr>
+              <a:t>and consumer protection</a:t>
             </a:r>
             <a:r>
               <a:rPr lang="en-US" sz="1400" dirty="0">
@@ -27479,13 +27714,22 @@
               </a:defRPr>
             </a:pPr>
             <a:r>
+              <a:rPr lang="en-US" sz="3200" b="1" dirty="0">
+                <a:solidFill>
+                  <a:srgbClr val="173F35"/>
+                </a:solidFill>
+                <a:latin typeface="Avenir Next Demi Bold"/>
+              </a:rPr>
+              <a:t>How </a:t>
+            </a:r>
+            <a:r>
               <a:rPr sz="3200" b="1" dirty="0">
                 <a:solidFill>
                   <a:srgbClr val="173F35"/>
                 </a:solidFill>
                 <a:latin typeface="Avenir Next Demi Bold"/>
               </a:rPr>
-              <a:t>How Greenwashing evolved and why it matters</a:t>
+              <a:t>Greenwashing </a:t>
             </a:r>
             <a:r>
               <a:rPr lang="en-US" sz="3200" b="1" dirty="0">
@@ -27494,7 +27738,25 @@
                 </a:solidFill>
                 <a:latin typeface="Avenir Next Demi Bold"/>
               </a:rPr>
-              <a:t> </a:t>
+              <a:t>has </a:t>
+            </a:r>
+            <a:r>
+              <a:rPr sz="3200" b="1" dirty="0">
+                <a:solidFill>
+                  <a:srgbClr val="173F35"/>
+                </a:solidFill>
+                <a:latin typeface="Avenir Next Demi Bold"/>
+              </a:rPr>
+              <a:t>evolved and </a:t>
+            </a:r>
+            <a:r>
+              <a:rPr lang="en-US" sz="3200" b="1" dirty="0">
+                <a:solidFill>
+                  <a:srgbClr val="173F35"/>
+                </a:solidFill>
+                <a:latin typeface="Avenir Next Demi Bold"/>
+              </a:rPr>
+              <a:t>its consequences</a:t>
             </a:r>
             <a:r>
               <a:rPr sz="3200" b="1" dirty="0">
@@ -27937,7 +28199,7 @@
                 </a:solidFill>
                 <a:latin typeface="Avenir Next"/>
               </a:rPr>
-              <a:t>2. HOW IT HAS GROWN</a:t>
+              <a:t>2. HOW IT HAS EVOLVED</a:t>
             </a:r>
           </a:p>
         </p:txBody>

--- a/Thesis Defence Presentation Final.pptx
+++ b/Thesis Defence Presentation Final.pptx
@@ -23724,7 +23724,7 @@
               <a:rPr lang="en-US" sz="1350" dirty="0">
                 <a:latin typeface="Avenir Next" panose="020B0503020202020204" pitchFamily="34" charset="0"/>
               </a:rPr>
-              <a:t>Limited analysis on finding structural reasons for low Enforcement</a:t>
+              <a:t>Limited analysis of structural reasons for low Enforcement</a:t>
             </a:r>
           </a:p>
           <a:p>

--- a/Thesis Defence Presentation Final.pptx
+++ b/Thesis Defence Presentation Final.pptx
@@ -22534,7 +22534,7 @@
         </p:nvSpPr>
         <p:spPr>
           <a:xfrm>
-            <a:off x="7473965" y="1291949"/>
+            <a:off x="7523393" y="1291949"/>
             <a:ext cx="3780707" cy="426572"/>
           </a:xfrm>
           <a:prstGeom prst="roundRect">

--- a/Thesis Defence Presentation Final.pptx
+++ b/Thesis Defence Presentation Final.pptx
@@ -238,7 +238,7 @@
           <a:p>
             <a:fld id="{5D16D8C7-7ACE-0E43-ADC6-5E8A68AC397B}" type="datetimeFigureOut">
               <a:rPr lang="en-US" smtClean="0"/>
-              <a:t>8/19/26</a:t>
+              <a:t>8/20/26</a:t>
             </a:fld>
             <a:endParaRPr lang="en-US"/>
           </a:p>
@@ -1021,7 +1021,7 @@
           <a:p>
             <a:fld id="{5BCAD085-E8A6-8845-BD4E-CB4CCA059FC4}" type="datetimeFigureOut">
               <a:rPr lang="en-US" smtClean="0"/>
-              <a:t>8/19/26</a:t>
+              <a:t>8/20/26</a:t>
             </a:fld>
             <a:endParaRPr lang="en-US"/>
           </a:p>
@@ -1189,7 +1189,7 @@
           <a:p>
             <a:fld id="{5BCAD085-E8A6-8845-BD4E-CB4CCA059FC4}" type="datetimeFigureOut">
               <a:rPr lang="en-US" smtClean="0"/>
-              <a:t>8/19/26</a:t>
+              <a:t>8/20/26</a:t>
             </a:fld>
             <a:endParaRPr lang="en-US"/>
           </a:p>
@@ -1367,7 +1367,7 @@
           <a:p>
             <a:fld id="{5BCAD085-E8A6-8845-BD4E-CB4CCA059FC4}" type="datetimeFigureOut">
               <a:rPr lang="en-US" smtClean="0"/>
-              <a:t>8/19/26</a:t>
+              <a:t>8/20/26</a:t>
             </a:fld>
             <a:endParaRPr lang="en-US"/>
           </a:p>
@@ -1535,7 +1535,7 @@
           <a:p>
             <a:fld id="{5BCAD085-E8A6-8845-BD4E-CB4CCA059FC4}" type="datetimeFigureOut">
               <a:rPr lang="en-US" smtClean="0"/>
-              <a:t>8/19/26</a:t>
+              <a:t>8/20/26</a:t>
             </a:fld>
             <a:endParaRPr lang="en-US"/>
           </a:p>
@@ -1780,7 +1780,7 @@
           <a:p>
             <a:fld id="{5BCAD085-E8A6-8845-BD4E-CB4CCA059FC4}" type="datetimeFigureOut">
               <a:rPr lang="en-US" smtClean="0"/>
-              <a:t>8/19/26</a:t>
+              <a:t>8/20/26</a:t>
             </a:fld>
             <a:endParaRPr lang="en-US"/>
           </a:p>
@@ -2065,7 +2065,7 @@
           <a:p>
             <a:fld id="{5BCAD085-E8A6-8845-BD4E-CB4CCA059FC4}" type="datetimeFigureOut">
               <a:rPr lang="en-US" smtClean="0"/>
-              <a:t>8/19/26</a:t>
+              <a:t>8/20/26</a:t>
             </a:fld>
             <a:endParaRPr lang="en-US"/>
           </a:p>
@@ -2484,7 +2484,7 @@
           <a:p>
             <a:fld id="{5BCAD085-E8A6-8845-BD4E-CB4CCA059FC4}" type="datetimeFigureOut">
               <a:rPr lang="en-US" smtClean="0"/>
-              <a:t>8/19/26</a:t>
+              <a:t>8/20/26</a:t>
             </a:fld>
             <a:endParaRPr lang="en-US"/>
           </a:p>
@@ -2601,7 +2601,7 @@
           <a:p>
             <a:fld id="{5BCAD085-E8A6-8845-BD4E-CB4CCA059FC4}" type="datetimeFigureOut">
               <a:rPr lang="en-US" smtClean="0"/>
-              <a:t>8/19/26</a:t>
+              <a:t>8/20/26</a:t>
             </a:fld>
             <a:endParaRPr lang="en-US"/>
           </a:p>
@@ -2696,7 +2696,7 @@
           <a:p>
             <a:fld id="{5BCAD085-E8A6-8845-BD4E-CB4CCA059FC4}" type="datetimeFigureOut">
               <a:rPr lang="en-US" smtClean="0"/>
-              <a:t>8/19/26</a:t>
+              <a:t>8/20/26</a:t>
             </a:fld>
             <a:endParaRPr lang="en-US"/>
           </a:p>
@@ -2971,7 +2971,7 @@
           <a:p>
             <a:fld id="{5BCAD085-E8A6-8845-BD4E-CB4CCA059FC4}" type="datetimeFigureOut">
               <a:rPr lang="en-US" smtClean="0"/>
-              <a:t>8/19/26</a:t>
+              <a:t>8/20/26</a:t>
             </a:fld>
             <a:endParaRPr lang="en-US"/>
           </a:p>
@@ -3223,7 +3223,7 @@
           <a:p>
             <a:fld id="{5BCAD085-E8A6-8845-BD4E-CB4CCA059FC4}" type="datetimeFigureOut">
               <a:rPr lang="en-US" smtClean="0"/>
-              <a:t>8/19/26</a:t>
+              <a:t>8/20/26</a:t>
             </a:fld>
             <a:endParaRPr lang="en-US"/>
           </a:p>
@@ -3434,7 +3434,7 @@
           <a:p>
             <a:fld id="{5BCAD085-E8A6-8845-BD4E-CB4CCA059FC4}" type="datetimeFigureOut">
               <a:rPr lang="en-US" smtClean="0"/>
-              <a:t>8/19/26</a:t>
+              <a:t>8/20/26</a:t>
             </a:fld>
             <a:endParaRPr lang="en-US"/>
           </a:p>
@@ -6486,7 +6486,7 @@
         <p:spPr>
           <a:xfrm>
             <a:off x="646996" y="1054085"/>
-            <a:ext cx="6678424" cy="4627128"/>
+            <a:ext cx="6678424" cy="3876261"/>
           </a:xfrm>
           <a:prstGeom prst="roundRect">
             <a:avLst/>
@@ -6633,8 +6633,8 @@
         </p:nvSpPr>
         <p:spPr>
           <a:xfrm>
-            <a:off x="1012755" y="1344127"/>
-            <a:ext cx="6089793" cy="4337085"/>
+            <a:off x="913899" y="1405912"/>
+            <a:ext cx="6089793" cy="3159839"/>
           </a:xfrm>
           <a:prstGeom prst="rect">
             <a:avLst/>
@@ -6789,6 +6789,21 @@
               </a:rPr>
               <a:t>Intervenes only after deceptive claims enter the market.</a:t>
             </a:r>
+            <a:r>
+              <a:rPr lang="en-US" sz="1600" dirty="0">
+                <a:solidFill>
+                  <a:srgbClr val="2D2D2D"/>
+                </a:solidFill>
+                <a:latin typeface="Avenir Next" panose="020B0503020202020204" pitchFamily="34" charset="0"/>
+              </a:rPr>
+              <a:t> Rather than proactive systemic regulation.</a:t>
+            </a:r>
+            <a:endParaRPr lang="en-IN" sz="1600" dirty="0">
+              <a:solidFill>
+                <a:srgbClr val="2D2D2D"/>
+              </a:solidFill>
+              <a:latin typeface="Avenir Next" panose="020B0503020202020204" pitchFamily="34" charset="0"/>
+            </a:endParaRPr>
           </a:p>
           <a:p>
             <a:pPr>
@@ -6800,23 +6815,29 @@
               </a:spcAft>
             </a:pPr>
             <a:r>
-              <a:rPr sz="1600" b="1" dirty="0">
+              <a:rPr lang="en-IN" sz="1600" b="1" dirty="0">
                 <a:solidFill>
                   <a:srgbClr val="22704E"/>
                 </a:solidFill>
                 <a:latin typeface="Avenir Next" panose="020B0503020202020204" pitchFamily="34" charset="0"/>
               </a:rPr>
-              <a:t>2. Individual Harm Focus: </a:t>
-            </a:r>
-            <a:r>
-              <a:rPr sz="1600" dirty="0">
+              <a:t>2. No Upstream Boardroom Mandates: </a:t>
+            </a:r>
+            <a:r>
+              <a:rPr lang="en-IN" sz="1600" dirty="0">
                 <a:solidFill>
                   <a:srgbClr val="2D2D2D"/>
                 </a:solidFill>
                 <a:latin typeface="Avenir Next" panose="020B0503020202020204" pitchFamily="34" charset="0"/>
               </a:rPr>
-              <a:t>Treats greenwashing as single consumer disputes, not systemic governance failure.</a:t>
-            </a:r>
+              <a:t>Regulates ad copy, does not guide internal corporate systems or decision-making.</a:t>
+            </a:r>
+            <a:endParaRPr sz="1600" dirty="0">
+              <a:solidFill>
+                <a:srgbClr val="2D2D2D"/>
+              </a:solidFill>
+              <a:latin typeface="Avenir Next" panose="020B0503020202020204" pitchFamily="34" charset="0"/>
+            </a:endParaRPr>
           </a:p>
           <a:p>
             <a:pPr>
@@ -6828,13 +6849,22 @@
               </a:spcAft>
             </a:pPr>
             <a:r>
+              <a:rPr lang="en-US" sz="1600" b="1" dirty="0">
+                <a:solidFill>
+                  <a:srgbClr val="22704E"/>
+                </a:solidFill>
+                <a:latin typeface="Avenir Next" panose="020B0503020202020204" pitchFamily="34" charset="0"/>
+              </a:rPr>
+              <a:t>3</a:t>
+            </a:r>
+            <a:r>
               <a:rPr sz="1600" b="1" dirty="0">
                 <a:solidFill>
                   <a:srgbClr val="22704E"/>
                 </a:solidFill>
                 <a:latin typeface="Avenir Next" panose="020B0503020202020204" pitchFamily="34" charset="0"/>
               </a:rPr>
-              <a:t>3. Information Asymmetry: </a:t>
+              <a:t>. Individual Harm Focus: </a:t>
             </a:r>
             <a:r>
               <a:rPr sz="1600" dirty="0">
@@ -6843,8 +6873,50 @@
                 </a:solidFill>
                 <a:latin typeface="Avenir Next" panose="020B0503020202020204" pitchFamily="34" charset="0"/>
               </a:rPr>
-              <a:t>Burden of proof falls on ordinary consumers who lack technical data.</a:t>
-            </a:r>
+              <a:t>Treats greenwashing </a:t>
+            </a:r>
+            <a:r>
+              <a:rPr lang="en-US" sz="1600" dirty="0">
+                <a:solidFill>
+                  <a:srgbClr val="2D2D2D"/>
+                </a:solidFill>
+                <a:latin typeface="Avenir Next" panose="020B0503020202020204" pitchFamily="34" charset="0"/>
+              </a:rPr>
+              <a:t>merely </a:t>
+            </a:r>
+            <a:r>
+              <a:rPr sz="1600" dirty="0">
+                <a:solidFill>
+                  <a:srgbClr val="2D2D2D"/>
+                </a:solidFill>
+                <a:latin typeface="Avenir Next" panose="020B0503020202020204" pitchFamily="34" charset="0"/>
+              </a:rPr>
+              <a:t>consumer </a:t>
+            </a:r>
+            <a:r>
+              <a:rPr lang="en-US" sz="1600" dirty="0">
+                <a:solidFill>
+                  <a:srgbClr val="2D2D2D"/>
+                </a:solidFill>
+                <a:latin typeface="Avenir Next" panose="020B0503020202020204" pitchFamily="34" charset="0"/>
+              </a:rPr>
+              <a:t>harm</a:t>
+            </a:r>
+            <a:r>
+              <a:rPr sz="1600" dirty="0">
+                <a:solidFill>
+                  <a:srgbClr val="2D2D2D"/>
+                </a:solidFill>
+                <a:latin typeface="Avenir Next" panose="020B0503020202020204" pitchFamily="34" charset="0"/>
+              </a:rPr>
+              <a:t>, not systemic governance failure.</a:t>
+            </a:r>
+            <a:endParaRPr lang="en-US" sz="1600" dirty="0">
+              <a:solidFill>
+                <a:srgbClr val="2D2D2D"/>
+              </a:solidFill>
+              <a:latin typeface="Avenir Next" panose="020B0503020202020204" pitchFamily="34" charset="0"/>
+            </a:endParaRPr>
           </a:p>
           <a:p>
             <a:pPr>
@@ -6856,13 +6928,31 @@
               </a:spcAft>
             </a:pPr>
             <a:r>
+              <a:rPr lang="en-US" sz="1600" b="1" dirty="0">
+                <a:solidFill>
+                  <a:srgbClr val="22704E"/>
+                </a:solidFill>
+                <a:latin typeface="Avenir Next" panose="020B0503020202020204" pitchFamily="34" charset="0"/>
+              </a:rPr>
+              <a:t>4. </a:t>
+            </a:r>
+            <a:r>
               <a:rPr sz="1600" b="1" dirty="0">
                 <a:solidFill>
                   <a:srgbClr val="22704E"/>
                 </a:solidFill>
                 <a:latin typeface="Avenir Next" panose="020B0503020202020204" pitchFamily="34" charset="0"/>
               </a:rPr>
-              <a:t>4. No Boardroom Mandates: </a:t>
+              <a:t>Puffery Loophole: </a:t>
+            </a:r>
+            <a:r>
+              <a:rPr lang="en-US" sz="1600" dirty="0">
+                <a:solidFill>
+                  <a:srgbClr val="2D2D2D"/>
+                </a:solidFill>
+                <a:latin typeface="Avenir Next" panose="020B0503020202020204" pitchFamily="34" charset="0"/>
+              </a:rPr>
+              <a:t>Scope for </a:t>
             </a:r>
             <a:r>
               <a:rPr sz="1600" dirty="0">
@@ -6871,7 +6961,25 @@
                 </a:solidFill>
                 <a:latin typeface="Avenir Next" panose="020B0503020202020204" pitchFamily="34" charset="0"/>
               </a:rPr>
-              <a:t>Regulates ad copy, not internal corporate systems or decision-making.</a:t>
+              <a:t>exaggerations </a:t>
+            </a:r>
+            <a:r>
+              <a:rPr lang="en-US" sz="1600" dirty="0">
+                <a:solidFill>
+                  <a:srgbClr val="2D2D2D"/>
+                </a:solidFill>
+                <a:latin typeface="Avenir Next" panose="020B0503020202020204" pitchFamily="34" charset="0"/>
+              </a:rPr>
+              <a:t>creates </a:t>
+            </a:r>
+            <a:r>
+              <a:rPr sz="1600" dirty="0">
+                <a:solidFill>
+                  <a:srgbClr val="2D2D2D"/>
+                </a:solidFill>
+                <a:latin typeface="Avenir Next" panose="020B0503020202020204" pitchFamily="34" charset="0"/>
+              </a:rPr>
+              <a:t>loopholes for vague green buzzwords.</a:t>
             </a:r>
           </a:p>
           <a:p>
@@ -6884,13 +6992,58 @@
               </a:spcAft>
             </a:pPr>
             <a:r>
+              <a:rPr lang="en-US" sz="1600" b="1" dirty="0">
+                <a:solidFill>
+                  <a:srgbClr val="22704E"/>
+                </a:solidFill>
+                <a:latin typeface="Avenir Next" panose="020B0503020202020204" pitchFamily="34" charset="0"/>
+              </a:rPr>
+              <a:t>5</a:t>
+            </a:r>
+            <a:r>
               <a:rPr sz="1600" b="1" dirty="0">
                 <a:solidFill>
                   <a:srgbClr val="22704E"/>
                 </a:solidFill>
                 <a:latin typeface="Avenir Next" panose="020B0503020202020204" pitchFamily="34" charset="0"/>
               </a:rPr>
-              <a:t>5. The Puffery Loophole: </a:t>
+              <a:t>. </a:t>
+            </a:r>
+            <a:r>
+              <a:rPr lang="en-US" sz="1600" b="1" dirty="0">
+                <a:solidFill>
+                  <a:srgbClr val="22704E"/>
+                </a:solidFill>
+                <a:latin typeface="Avenir Next" panose="020B0503020202020204" pitchFamily="34" charset="0"/>
+              </a:rPr>
+              <a:t>Fixed cap penalties</a:t>
+            </a:r>
+            <a:r>
+              <a:rPr sz="1600" b="1" dirty="0">
+                <a:solidFill>
+                  <a:srgbClr val="22704E"/>
+                </a:solidFill>
+                <a:latin typeface="Avenir Next" panose="020B0503020202020204" pitchFamily="34" charset="0"/>
+              </a:rPr>
+              <a:t>: </a:t>
+            </a:r>
+            <a:r>
+              <a:rPr lang="en-IN" sz="1600" dirty="0">
+                <a:solidFill>
+                  <a:srgbClr val="2D2D2D"/>
+                </a:solidFill>
+                <a:latin typeface="Avenir Next" panose="020B0503020202020204" pitchFamily="34" charset="0"/>
+              </a:rPr>
+              <a:t>Not turnover linked</a:t>
+            </a:r>
+            <a:r>
+              <a:rPr sz="1600" dirty="0">
+                <a:solidFill>
+                  <a:srgbClr val="2D2D2D"/>
+                </a:solidFill>
+                <a:latin typeface="Avenir Next" panose="020B0503020202020204" pitchFamily="34" charset="0"/>
+              </a:rPr>
+              <a:t>.</a:t>
             </a:r>
             <a:r>
               <a:rPr lang="en-US" sz="1600" dirty="0">
@@ -6899,102 +7052,12 @@
                 </a:solidFill>
                 <a:latin typeface="Avenir Next" panose="020B0503020202020204" pitchFamily="34" charset="0"/>
               </a:rPr>
-              <a:t>Allowing scope for </a:t>
-            </a:r>
-            <a:r>
-              <a:rPr sz="1600" dirty="0">
-                <a:solidFill>
-                  <a:srgbClr val="2D2D2D"/>
-                </a:solidFill>
-                <a:latin typeface="Avenir Next" panose="020B0503020202020204" pitchFamily="34" charset="0"/>
-              </a:rPr>
-              <a:t>exaggerations creates loopholes for vague green buzzwords.</a:t>
-            </a:r>
-          </a:p>
-          <a:p>
-            <a:pPr>
-              <a:spcBef>
-                <a:spcPts val="200"/>
-              </a:spcBef>
-              <a:spcAft>
-                <a:spcPts val="300"/>
-              </a:spcAft>
-            </a:pPr>
-            <a:r>
-              <a:rPr sz="1600" b="1" dirty="0">
-                <a:solidFill>
-                  <a:srgbClr val="22704E"/>
-                </a:solidFill>
-                <a:latin typeface="Avenir Next" panose="020B0503020202020204" pitchFamily="34" charset="0"/>
-              </a:rPr>
-              <a:t>6. Entity-Only Fines: </a:t>
-            </a:r>
-            <a:r>
-              <a:rPr sz="1600" dirty="0">
-                <a:solidFill>
-                  <a:srgbClr val="2D2D2D"/>
-                </a:solidFill>
-                <a:latin typeface="Avenir Next" panose="020B0503020202020204" pitchFamily="34" charset="0"/>
-              </a:rPr>
-              <a:t>Fines the company budget rather than holding directors accountable.</a:t>
+              <a:t> Limited deterrence for big companies.</a:t>
             </a:r>
             <a:endParaRPr lang="en-US" sz="1600" dirty="0">
-              <a:solidFill>
-                <a:srgbClr val="2D2D2D"/>
-              </a:solidFill>
               <a:latin typeface="Avenir Next" panose="020B0503020202020204" pitchFamily="34" charset="0"/>
-            </a:endParaRPr>
-          </a:p>
-          <a:p>
-            <a:pPr>
-              <a:spcBef>
-                <a:spcPts val="200"/>
-              </a:spcBef>
-              <a:spcAft>
-                <a:spcPts val="300"/>
-              </a:spcAft>
-            </a:pPr>
-            <a:r>
-              <a:rPr lang="en-IN" sz="1600" b="1" dirty="0">
-                <a:solidFill>
-                  <a:srgbClr val="22704E"/>
-                </a:solidFill>
-                <a:latin typeface="Avenir Next" panose="020B0503020202020204" pitchFamily="34" charset="0"/>
-              </a:rPr>
-              <a:t>7. </a:t>
-            </a:r>
-            <a:r>
-              <a:rPr lang="en-US" sz="1600" b="1" dirty="0">
-                <a:solidFill>
-                  <a:srgbClr val="22704E"/>
-                </a:solidFill>
-                <a:latin typeface="Avenir Next" panose="020B0503020202020204" pitchFamily="34" charset="0"/>
-              </a:rPr>
-              <a:t>Guidelines only: </a:t>
-            </a:r>
-            <a:r>
-              <a:rPr lang="en-US" sz="1600" dirty="0">
-                <a:latin typeface="Avenir Next" panose="020B0503020202020204" pitchFamily="34" charset="0"/>
-                <a:ea typeface="Calibri"/>
-                <a:cs typeface="Calibri"/>
-              </a:rPr>
-              <a:t>may not stand legal test.</a:t>
-            </a:r>
-          </a:p>
-          <a:p>
-            <a:pPr>
-              <a:spcBef>
-                <a:spcPts val="200"/>
-              </a:spcBef>
-              <a:spcAft>
-                <a:spcPts val="300"/>
-              </a:spcAft>
-            </a:pPr>
-            <a:endParaRPr sz="1600" dirty="0">
-              <a:solidFill>
-                <a:srgbClr val="2D2D2D"/>
-              </a:solidFill>
-              <a:latin typeface="Avenir Next" panose="020B0503020202020204" pitchFamily="34" charset="0"/>
+              <a:ea typeface="Calibri"/>
+              <a:cs typeface="Calibri"/>
             </a:endParaRPr>
           </a:p>
         </p:txBody>
@@ -7013,7 +7076,7 @@
         </p:nvSpPr>
         <p:spPr>
           <a:xfrm>
-            <a:off x="646996" y="6042920"/>
+            <a:off x="646996" y="5845210"/>
             <a:ext cx="11073384" cy="584775"/>
           </a:xfrm>
           <a:prstGeom prst="roundRect">

--- a/Thesis Defence Presentation Final.pptx
+++ b/Thesis Defence Presentation Final.pptx
@@ -18918,17 +18918,14 @@
           <a:lstStyle/>
           <a:p>
             <a:pPr algn="l">
-              <a:defRPr sz="1250" b="1">
+              <a:defRPr sz="1500" b="1">
                 <a:solidFill>
                   <a:srgbClr val="12402D"/>
                 </a:solidFill>
-                <a:latin typeface="Avenir Next Demi Bold"/>
-              </a:defRPr>
-            </a:pPr>
-            <a:r>
-              <a:rPr sz="1600">
-                <a:latin typeface="Avenir Next" panose="020B0503020202020204" pitchFamily="34" charset="0"/>
-              </a:rPr>
+                <a:latin typeface="Avenir Next"/>
+              </a:defRPr>
+            </a:pPr>
+            <a:r>
               <a:t>1. Institutional Integration</a:t>
             </a:r>
           </a:p>
@@ -18957,7 +18954,7 @@
           <a:lstStyle/>
           <a:p>
             <a:pPr algn="l">
-              <a:defRPr sz="1150" b="0">
+              <a:defRPr sz="1350" b="0">
                 <a:solidFill>
                   <a:srgbClr val="2D2D2D"/>
                 </a:solidFill>
@@ -18965,10 +18962,7 @@
               </a:defRPr>
             </a:pPr>
             <a:r>
-              <a:rPr sz="1600">
-                <a:latin typeface="Avenir Next" panose="020B0503020202020204" pitchFamily="34" charset="0"/>
-              </a:rPr>
-              <a:t>Establish a standing inter-regulatory council linking MCA, SEBI, CCPA, MoEFCC, CPCB, and BIS.</a:t>
+              <a:t>Establish a permanent inter-regulatory council linking MCA, SEBI, CCPA, MoEFCC, CPCB, BIS, and FSSAI.</a:t>
             </a:r>
           </a:p>
         </p:txBody>
@@ -19090,17 +19084,14 @@
           <a:lstStyle/>
           <a:p>
             <a:pPr algn="l">
-              <a:defRPr sz="1250" b="1">
+              <a:defRPr sz="1500" b="1">
                 <a:solidFill>
                   <a:srgbClr val="12402D"/>
                 </a:solidFill>
-                <a:latin typeface="Avenir Next Demi Bold"/>
-              </a:defRPr>
-            </a:pPr>
-            <a:r>
-              <a:rPr sz="1600">
-                <a:latin typeface="Avenir Next" panose="020B0503020202020204" pitchFamily="34" charset="0"/>
-              </a:rPr>
+                <a:latin typeface="Avenir Next"/>
+              </a:defRPr>
+            </a:pPr>
+            <a:r>
               <a:t>2. Lead Regulator Model</a:t>
             </a:r>
           </a:p>
@@ -19129,7 +19120,7 @@
           <a:lstStyle/>
           <a:p>
             <a:pPr algn="l">
-              <a:defRPr sz="1150" b="0">
+              <a:defRPr sz="1350" b="0">
                 <a:solidFill>
                   <a:srgbClr val="2D2D2D"/>
                 </a:solidFill>
@@ -19137,10 +19128,7 @@
               </a:defRPr>
             </a:pPr>
             <a:r>
-              <a:rPr sz="1600" dirty="0">
-                <a:latin typeface="Avenir Next" panose="020B0503020202020204" pitchFamily="34" charset="0"/>
-              </a:rPr>
-              <a:t>Designate a coordinating agency with mandatory cross-referral and shared evidence protocols.</a:t>
+              <a:t>Designate a coordinating agency with mandatory cross-referral, shared evidence protocols, and harmonised definitions.</a:t>
             </a:r>
           </a:p>
         </p:txBody>
@@ -19262,17 +19250,14 @@
           <a:lstStyle/>
           <a:p>
             <a:pPr algn="l">
-              <a:defRPr sz="1250" b="1">
+              <a:defRPr sz="1500" b="1">
                 <a:solidFill>
                   <a:srgbClr val="12402D"/>
                 </a:solidFill>
-                <a:latin typeface="Avenir Next Demi Bold"/>
-              </a:defRPr>
-            </a:pPr>
-            <a:r>
-              <a:rPr sz="1600">
-                <a:latin typeface="Avenir Next" panose="020B0503020202020204" pitchFamily="34" charset="0"/>
-              </a:rPr>
+                <a:latin typeface="Avenir Next"/>
+              </a:defRPr>
+            </a:pPr>
+            <a:r>
               <a:t>3. Standardised Verification</a:t>
             </a:r>
           </a:p>
@@ -19301,7 +19286,7 @@
           <a:lstStyle/>
           <a:p>
             <a:pPr algn="l">
-              <a:defRPr sz="1150" b="0">
+              <a:defRPr sz="1350" b="0">
                 <a:solidFill>
                   <a:srgbClr val="2D2D2D"/>
                 </a:solidFill>
@@ -19309,10 +19294,7 @@
               </a:defRPr>
             </a:pPr>
             <a:r>
-              <a:rPr sz="1600">
-                <a:latin typeface="Avenir Next" panose="020B0503020202020204" pitchFamily="34" charset="0"/>
-              </a:rPr>
-              <a:t>Mandate lifecycle verification (LCA), product-category benchmarks, and accredited verifiers.</a:t>
+              <a:t>Mandate ex-ante substantiation, lifecycle assessment (LCA), product-category rules (PCRs), and accredited verifiers.</a:t>
             </a:r>
           </a:p>
         </p:txBody>
@@ -19434,17 +19416,14 @@
           <a:lstStyle/>
           <a:p>
             <a:pPr algn="l">
-              <a:defRPr sz="1250" b="1">
+              <a:defRPr sz="1500" b="1">
                 <a:solidFill>
                   <a:srgbClr val="12402D"/>
                 </a:solidFill>
-                <a:latin typeface="Avenir Next Demi Bold"/>
-              </a:defRPr>
-            </a:pPr>
-            <a:r>
-              <a:rPr sz="1600">
-                <a:latin typeface="Avenir Next" panose="020B0503020202020204" pitchFamily="34" charset="0"/>
-              </a:rPr>
+                <a:latin typeface="Avenir Next"/>
+              </a:defRPr>
+            </a:pPr>
+            <a:r>
               <a:t>4. Proactive Surveillance</a:t>
             </a:r>
           </a:p>
@@ -19473,7 +19452,7 @@
           <a:lstStyle/>
           <a:p>
             <a:pPr algn="l">
-              <a:defRPr sz="1150" b="0">
+              <a:defRPr sz="1350" b="0">
                 <a:solidFill>
                   <a:srgbClr val="2D2D2D"/>
                 </a:solidFill>
@@ -19481,10 +19460,7 @@
               </a:defRPr>
             </a:pPr>
             <a:r>
-              <a:rPr sz="1600">
-                <a:latin typeface="Avenir Next" panose="020B0503020202020204" pitchFamily="34" charset="0"/>
-              </a:rPr>
-              <a:t>Run regular market sweeps in high-risk sectors; cross-check ESG claims against pollution records.</a:t>
+              <a:t>Conduct routine market sweeps; cross-check corporate sustainability claims against CPCB/SPCB pollution records.</a:t>
             </a:r>
           </a:p>
         </p:txBody>
@@ -19606,17 +19582,14 @@
           <a:lstStyle/>
           <a:p>
             <a:pPr algn="l">
-              <a:defRPr sz="1250" b="1">
+              <a:defRPr sz="1500" b="1">
                 <a:solidFill>
                   <a:srgbClr val="12402D"/>
                 </a:solidFill>
-                <a:latin typeface="Avenir Next Demi Bold"/>
-              </a:defRPr>
-            </a:pPr>
-            <a:r>
-              <a:rPr sz="1600">
-                <a:latin typeface="Avenir Next" panose="020B0503020202020204" pitchFamily="34" charset="0"/>
-              </a:rPr>
+                <a:latin typeface="Avenir Next"/>
+              </a:defRPr>
+            </a:pPr>
+            <a:r>
               <a:t>5. Enforcement Capacity</a:t>
             </a:r>
           </a:p>
@@ -19645,7 +19618,7 @@
           <a:lstStyle/>
           <a:p>
             <a:pPr algn="l">
-              <a:defRPr sz="1150" b="0">
+              <a:defRPr sz="1350" b="0">
                 <a:solidFill>
                   <a:srgbClr val="2D2D2D"/>
                 </a:solidFill>
@@ -19653,10 +19626,7 @@
               </a:defRPr>
             </a:pPr>
             <a:r>
-              <a:rPr sz="1600">
-                <a:latin typeface="Avenir Next" panose="020B0503020202020204" pitchFamily="34" charset="0"/>
-              </a:rPr>
-              <a:t>Build shared in-house expertise in carbon accounting, GHG scopes, and ESG assurance.</a:t>
+              <a:t>Build dedicated in-house ESG surveillance capacity and shared expertise in carbon accounting and GHG assurance.</a:t>
             </a:r>
           </a:p>
         </p:txBody>
@@ -20079,8 +20049,8 @@
         </p:nvSpPr>
         <p:spPr>
           <a:xfrm>
-            <a:off x="762418" y="2169567"/>
-            <a:ext cx="3255264" cy="2882840"/>
+            <a:off x="762418" y="2061088"/>
+            <a:ext cx="3255264" cy="3171124"/>
           </a:xfrm>
           <a:prstGeom prst="rect">
             <a:avLst/>
@@ -20094,8 +20064,11 @@
           <a:lstStyle/>
           <a:p>
             <a:pPr algn="l">
+              <a:lnSpc>
+                <a:spcPct val="105000"/>
+              </a:lnSpc>
               <a:spcAft>
-                <a:spcPts val="800"/>
+                <a:spcPts val="600"/>
               </a:spcAft>
               <a:defRPr sz="1150" b="0">
                 <a:solidFill>
@@ -20105,43 +20078,82 @@
               </a:defRPr>
             </a:pPr>
             <a:r>
-              <a:rPr sz="1400" dirty="0">
-                <a:latin typeface="Avenir Next" panose="020B0503020202020204" pitchFamily="34" charset="0"/>
-              </a:rPr>
-              <a:t>• Turnover-Linked Penalties: Amend Section 166(7) so fines scale with company revenue rather than fixed ₹1–5L caps.</a:t>
+              <a:rPr sz="1100" b="1">
+                <a:latin typeface="Avenir Next"/>
+              </a:rPr>
+              <a:t>• Turnover Penalties &amp; Disqualification: </a:t>
+            </a:r>
+            <a:r>
+              <a:rPr sz="1100" b="0">
+                <a:latin typeface="Avenir Next"/>
+              </a:rPr>
+              <a:t>Amend Sec 166(7) to penalise misleading claims up to 1% turnover (min ₹5 Cr) + up to 3-year Director Disqualification under Sec 164(2)(b).</a:t>
             </a:r>
           </a:p>
           <a:p>
             <a:pPr>
+              <a:lnSpc>
+                <a:spcPct val="105000"/>
+              </a:lnSpc>
               <a:spcAft>
-                <a:spcPts val="800"/>
+                <a:spcPts val="600"/>
               </a:spcAft>
-              <a:defRPr sz="1150">
-                <a:solidFill>
-                  <a:srgbClr val="2D2D2D"/>
-                </a:solidFill>
-              </a:defRPr>
-            </a:pPr>
-            <a:r>
-              <a:rPr sz="1400" dirty="0">
-                <a:latin typeface="Avenir Next" panose="020B0503020202020204" pitchFamily="34" charset="0"/>
-              </a:rPr>
-              <a:t>• Expanded Standing: Give affected stakeholders and civil society standing to enforce Section 166(2) duties.</a:t>
+            </a:pPr>
+            <a:r>
+              <a:rPr sz="1100" b="1">
+                <a:latin typeface="Avenir Next"/>
+              </a:rPr>
+              <a:t>• Direct Statutory Standing: </a:t>
+            </a:r>
+            <a:r>
+              <a:rPr sz="1100" b="0">
+                <a:latin typeface="Avenir Next"/>
+              </a:rPr>
+              <a:t>Insert Sec 166(8) empowering affected persons, creditors, and consumer NGOs before NCLT without Sec 244 shareholding caps.</a:t>
             </a:r>
           </a:p>
           <a:p>
             <a:pPr>
-              <a:defRPr sz="1150">
-                <a:solidFill>
-                  <a:srgbClr val="2D2D2D"/>
-                </a:solidFill>
-              </a:defRPr>
-            </a:pPr>
-            <a:r>
-              <a:rPr sz="1400" dirty="0">
-                <a:latin typeface="Avenir Next" panose="020B0503020202020204" pitchFamily="34" charset="0"/>
-              </a:rPr>
-              <a:t>• Boardroom Oversight: Require dedicated Board ESG Committees and environmental whistleblower protections.</a:t>
+              <a:lnSpc>
+                <a:spcPct val="105000"/>
+              </a:lnSpc>
+              <a:spcAft>
+                <a:spcPts val="600"/>
+              </a:spcAft>
+            </a:pPr>
+            <a:r>
+              <a:rPr sz="1100" b="1">
+                <a:latin typeface="Avenir Next"/>
+              </a:rPr>
+              <a:t>• Mandatory ESG Committee: </a:t>
+            </a:r>
+            <a:r>
+              <a:rPr sz="1100" b="0">
+                <a:latin typeface="Avenir Next"/>
+              </a:rPr>
+              <a:t>Insert Sec 135A requiring Board ESG Committee (with carbon/ESG expert) for ex-ante claim pre-approval.</a:t>
+            </a:r>
+          </a:p>
+          <a:p>
+            <a:pPr>
+              <a:lnSpc>
+                <a:spcPct val="105000"/>
+              </a:lnSpc>
+              <a:spcAft>
+                <a:spcPts val="600"/>
+              </a:spcAft>
+            </a:pPr>
+            <a:r>
+              <a:rPr sz="1100" b="1">
+                <a:latin typeface="Avenir Next"/>
+              </a:rPr>
+              <a:t>• Whistleblower Protection: </a:t>
+            </a:r>
+            <a:r>
+              <a:rPr sz="1100" b="0">
+                <a:latin typeface="Avenir Next"/>
+              </a:rPr>
+              <a:t>Amend Sec 177(9) vigil mechanism to explicitly cover environmental misrepresentations under Sec 166(2).</a:t>
             </a:r>
           </a:p>
         </p:txBody>
@@ -20287,8 +20299,8 @@
         </p:nvSpPr>
         <p:spPr>
           <a:xfrm>
-            <a:off x="4389385" y="2142135"/>
-            <a:ext cx="3255264" cy="2667397"/>
+            <a:off x="4389385" y="2035028"/>
+            <a:ext cx="3255264" cy="2934136"/>
           </a:xfrm>
           <a:prstGeom prst="rect">
             <a:avLst/>
@@ -20302,8 +20314,11 @@
           <a:lstStyle/>
           <a:p>
             <a:pPr algn="l">
+              <a:lnSpc>
+                <a:spcPct val="105000"/>
+              </a:lnSpc>
               <a:spcAft>
-                <a:spcPts val="800"/>
+                <a:spcPts val="600"/>
               </a:spcAft>
               <a:defRPr sz="1150" b="0">
                 <a:solidFill>
@@ -20313,43 +20328,82 @@
               </a:defRPr>
             </a:pPr>
             <a:r>
-              <a:rPr sz="1400">
-                <a:latin typeface="Avenir Next" panose="020B0503020202020204" pitchFamily="34" charset="0"/>
-              </a:rPr>
-              <a:t>• Mandatory Reasonable Audits: Return to the time-bound path for full financial-grade ESG audits.</a:t>
+              <a:rPr sz="1100" b="1">
+                <a:latin typeface="Avenir Next"/>
+              </a:rPr>
+              <a:t>• Repeal Backsliding / Restore Rigour: </a:t>
+            </a:r>
+            <a:r>
+              <a:rPr sz="1100" b="0">
+                <a:latin typeface="Avenir Next"/>
+              </a:rPr>
+              <a:t>Amend BRSR to mandate Reasonable Assurance (ISAE 3000) &amp; full Scope 3 Value Chain (repealing 75% cap &amp; 2% threshold).</a:t>
             </a:r>
           </a:p>
           <a:p>
             <a:pPr>
+              <a:lnSpc>
+                <a:spcPct val="105000"/>
+              </a:lnSpc>
               <a:spcAft>
-                <a:spcPts val="800"/>
+                <a:spcPts val="600"/>
               </a:spcAft>
-              <a:defRPr sz="1150">
-                <a:solidFill>
-                  <a:srgbClr val="2D2D2D"/>
-                </a:solidFill>
-              </a:defRPr>
-            </a:pPr>
-            <a:r>
-              <a:rPr sz="1400">
-                <a:latin typeface="Avenir Next" panose="020B0503020202020204" pitchFamily="34" charset="0"/>
-              </a:rPr>
-              <a:t>• Full Scope 3 Value Chain: Restore comprehensive supply-chain emissions reporting without loopholes.</a:t>
+            </a:pPr>
+            <a:r>
+              <a:rPr sz="1100" b="1">
+                <a:latin typeface="Avenir Next"/>
+              </a:rPr>
+              <a:t>• PFUTP Fraud &amp; Referral Bridge: </a:t>
+            </a:r>
+            <a:r>
+              <a:rPr sz="1100" b="0">
+                <a:latin typeface="Avenir Next"/>
+              </a:rPr>
+              <a:t>Classify material ESG misstatements as fraud under PFUTP (Sec 15HA: ₹25 Cr / 3x profit) + mandatory referral to MCA.</a:t>
             </a:r>
           </a:p>
           <a:p>
             <a:pPr>
-              <a:defRPr sz="1150">
-                <a:solidFill>
-                  <a:srgbClr val="2D2D2D"/>
-                </a:solidFill>
-              </a:defRPr>
-            </a:pPr>
-            <a:r>
-              <a:rPr sz="1400">
-                <a:latin typeface="Avenir Next" panose="020B0503020202020204" pitchFamily="34" charset="0"/>
-              </a:rPr>
-              <a:t>• Fraud Classification: Explicitly classify material ESG misstatements as fraudulent under PFUTP regulations.</a:t>
+              <a:lnSpc>
+                <a:spcPct val="105000"/>
+              </a:lnSpc>
+              <a:spcAft>
+                <a:spcPts val="600"/>
+              </a:spcAft>
+            </a:pPr>
+            <a:r>
+              <a:rPr sz="1100" b="1">
+                <a:latin typeface="Avenir Next"/>
+              </a:rPr>
+              <a:t>• Double Materiality &amp; Sector Maps: </a:t>
+            </a:r>
+            <a:r>
+              <a:rPr sz="1100" b="0">
+                <a:latin typeface="Avenir Next"/>
+              </a:rPr>
+              <a:t>Mandate Impact Materiality alongside Financial Materiality, with sector-specific maps for high-impact sectors (Energy, Cement, FMCG).</a:t>
+            </a:r>
+          </a:p>
+          <a:p>
+            <a:pPr>
+              <a:lnSpc>
+                <a:spcPct val="105000"/>
+              </a:lnSpc>
+              <a:spcAft>
+                <a:spcPts val="600"/>
+              </a:spcAft>
+            </a:pPr>
+            <a:r>
+              <a:rPr sz="1100" b="1">
+                <a:latin typeface="Avenir Next"/>
+              </a:rPr>
+              <a:t>• ESG Rating Providers (ERPs): </a:t>
+            </a:r>
+            <a:r>
+              <a:rPr sz="1100" b="0">
+                <a:latin typeface="Avenir Next"/>
+              </a:rPr>
+              <a:t>Introduce monetary penalties under Sec 15HB and minimum competence standards for ESG analysts.</a:t>
             </a:r>
           </a:p>
         </p:txBody>
@@ -20495,8 +20549,8 @@
         </p:nvSpPr>
         <p:spPr>
           <a:xfrm>
-            <a:off x="7937257" y="2114703"/>
-            <a:ext cx="3255264" cy="2882840"/>
+            <a:off x="7937257" y="2008967"/>
+            <a:ext cx="3255264" cy="3171124"/>
           </a:xfrm>
           <a:prstGeom prst="rect">
             <a:avLst/>
@@ -20510,8 +20564,11 @@
           <a:lstStyle/>
           <a:p>
             <a:pPr algn="l">
+              <a:lnSpc>
+                <a:spcPct val="105000"/>
+              </a:lnSpc>
               <a:spcAft>
-                <a:spcPts val="800"/>
+                <a:spcPts val="600"/>
               </a:spcAft>
               <a:defRPr sz="1150" b="0">
                 <a:solidFill>
@@ -20521,43 +20578,82 @@
               </a:defRPr>
             </a:pPr>
             <a:r>
-              <a:rPr sz="1400">
-                <a:latin typeface="Avenir Next" panose="020B0503020202020204" pitchFamily="34" charset="0"/>
-              </a:rPr>
-              <a:t>• Binding Regulations: Elevate the 2024 Guidelines into formal binding rules under the Consumer Protection Act.</a:t>
+              <a:rPr sz="1100" b="1">
+                <a:latin typeface="Avenir Next"/>
+              </a:rPr>
+              <a:t>• Binding Sec 101 Rules: </a:t>
+            </a:r>
+            <a:r>
+              <a:rPr sz="1100" b="0">
+                <a:latin typeface="Avenir Next"/>
+              </a:rPr>
+              <a:t>Elevate 2024 Guidelines into formal delegated legislation with parliamentary oversight and statutory penalty schedules.</a:t>
             </a:r>
           </a:p>
           <a:p>
             <a:pPr>
+              <a:lnSpc>
+                <a:spcPct val="105000"/>
+              </a:lnSpc>
               <a:spcAft>
-                <a:spcPts val="800"/>
+                <a:spcPts val="600"/>
               </a:spcAft>
-              <a:defRPr sz="1150">
-                <a:solidFill>
-                  <a:srgbClr val="2D2D2D"/>
-                </a:solidFill>
-              </a:defRPr>
-            </a:pPr>
-            <a:r>
-              <a:rPr sz="1400">
-                <a:latin typeface="Avenir Next" panose="020B0503020202020204" pitchFamily="34" charset="0"/>
-              </a:rPr>
-              <a:t>• Corrective Advertising: Require public correction notices and turnover-based fines for major deceptive claims.</a:t>
+            </a:pPr>
+            <a:r>
+              <a:rPr sz="1100" b="1">
+                <a:latin typeface="Avenir Next"/>
+              </a:rPr>
+              <a:t>• Turnover Fines &amp; Corrective Ads: </a:t>
+            </a:r>
+            <a:r>
+              <a:rPr sz="1100" b="0">
+                <a:latin typeface="Avenir Next"/>
+              </a:rPr>
+              <a:t>Amend Sec 21 to impose 1% to 4% turnover penalties + Mandatory Corrective Advertising of equal prominence and duration.</a:t>
             </a:r>
           </a:p>
           <a:p>
             <a:pPr>
-              <a:defRPr sz="1150">
-                <a:solidFill>
-                  <a:srgbClr val="2D2D2D"/>
-                </a:solidFill>
-              </a:defRPr>
-            </a:pPr>
-            <a:r>
-              <a:rPr sz="1400">
-                <a:latin typeface="Avenir Next" panose="020B0503020202020204" pitchFamily="34" charset="0"/>
-              </a:rPr>
-              <a:t>• Narrow Puffery Exception: Disallow vague green buzzwords ('eco-friendly', 'sustainable') as mere puffery.</a:t>
+              <a:lnSpc>
+                <a:spcPct val="105000"/>
+              </a:lnSpc>
+              <a:spcAft>
+                <a:spcPts val="600"/>
+              </a:spcAft>
+            </a:pPr>
+            <a:r>
+              <a:rPr sz="1100" b="1">
+                <a:latin typeface="Avenir Next"/>
+              </a:rPr>
+              <a:t>• Narrow Puffery (Guideline 3(h)): </a:t>
+            </a:r>
+            <a:r>
+              <a:rPr sz="1100" b="0">
+                <a:latin typeface="Avenir Next"/>
+              </a:rPr>
+              <a:t>Measurable claims require published transition plans and budgets; green imagery carries rebuttable presumption of claim.</a:t>
+            </a:r>
+          </a:p>
+          <a:p>
+            <a:pPr>
+              <a:lnSpc>
+                <a:spcPct val="105000"/>
+              </a:lnSpc>
+              <a:spcAft>
+                <a:spcPts val="600"/>
+              </a:spcAft>
+            </a:pPr>
+            <a:r>
+              <a:rPr sz="1100" b="1">
+                <a:latin typeface="Avenir Next"/>
+              </a:rPr>
+              <a:t>• Claim-Specific Schedules: </a:t>
+            </a:r>
+            <a:r>
+              <a:rPr sz="1100" b="0">
+                <a:latin typeface="Avenir Next"/>
+              </a:rPr>
+              <a:t>Prescribe statutory testing benchmarks (ISO 14855 for biodegradable; offset caps for net-zero) + CCPA whistleblower channel.</a:t>
             </a:r>
           </a:p>
         </p:txBody>

--- a/Thesis Defence Presentation Final.pptx
+++ b/Thesis Defence Presentation Final.pptx
@@ -5,7 +5,7 @@
     <p:sldMasterId id="2147483648" r:id="rId1"/>
   </p:sldMasterIdLst>
   <p:notesMasterIdLst>
-    <p:notesMasterId r:id="rId25"/>
+    <p:notesMasterId r:id="rId23"/>
   </p:notesMasterIdLst>
   <p:sldIdLst>
     <p:sldId id="279" r:id="rId2"/>
@@ -26,11 +26,9 @@
     <p:sldId id="323" r:id="rId17"/>
     <p:sldId id="272" r:id="rId18"/>
     <p:sldId id="289" r:id="rId19"/>
-    <p:sldId id="296" r:id="rId20"/>
-    <p:sldId id="299" r:id="rId21"/>
-    <p:sldId id="291" r:id="rId22"/>
-    <p:sldId id="266" r:id="rId23"/>
-    <p:sldId id="292" r:id="rId24"/>
+    <p:sldId id="328" r:id="rId20"/>
+    <p:sldId id="266" r:id="rId21"/>
+    <p:sldId id="292" r:id="rId22"/>
   </p:sldIdLst>
   <p:sldSz cx="12192000" cy="6858000"/>
   <p:notesSz cx="6858000" cy="9144000"/>
@@ -15825,7 +15823,7 @@
       </p:grpSpPr>
       <p:sp>
         <p:nvSpPr>
-          <p:cNvPr id="2" name="Rectangle 1"/>
+          <p:cNvPr id="3" name="Rectangle 2"/>
           <p:cNvSpPr/>
           <p:nvPr/>
         </p:nvSpPr>
@@ -15843,7 +15841,6 @@
           <a:ln>
             <a:noFill/>
           </a:ln>
-          <a:effectLst/>
         </p:spPr>
         <p:style>
           <a:lnRef idx="1">
@@ -15863,20 +15860,21 @@
           <a:bodyPr rtlCol="0" anchor="ctr"/>
           <a:lstStyle/>
           <a:p>
+            <a:pPr algn="ctr"/>
             <a:endParaRPr/>
           </a:p>
         </p:txBody>
       </p:sp>
       <p:sp>
         <p:nvSpPr>
-          <p:cNvPr id="3" name="TextBox 2"/>
+          <p:cNvPr id="4" name="TextBox 3"/>
           <p:cNvSpPr txBox="1"/>
           <p:nvPr/>
         </p:nvSpPr>
         <p:spPr>
           <a:xfrm>
-            <a:off x="424550" y="322850"/>
-            <a:ext cx="11000000" cy="477054"/>
+            <a:off x="548639" y="479298"/>
+            <a:ext cx="8968847" cy="584775"/>
           </a:xfrm>
           <a:prstGeom prst="rect">
             <a:avLst/>
@@ -15884,820 +15882,1256 @@
           <a:noFill/>
         </p:spPr>
         <p:txBody>
-          <a:bodyPr wrap="square" lIns="45720" tIns="22860" rIns="45720" bIns="22860" anchor="t">
+          <a:bodyPr wrap="square">
             <a:spAutoFit/>
           </a:bodyPr>
           <a:lstStyle/>
           <a:p>
-            <a:pPr algn="l"/>
-            <a:r>
-              <a:rPr sz="2800" b="1" i="0" dirty="0">
+            <a:pPr>
+              <a:defRPr sz="2200" b="1">
                 <a:solidFill>
                   <a:srgbClr val="173F35"/>
                 </a:solidFill>
                 <a:latin typeface="Avenir Next Demi Bold"/>
-              </a:rPr>
-              <a:t>Research Question</a:t>
-            </a:r>
-            <a:r>
-              <a:rPr lang="en-US" sz="2800" b="1" i="0" dirty="0">
+              </a:defRPr>
+            </a:pPr>
+            <a:r>
+              <a:rPr lang="en-US" sz="3200" dirty="0"/>
+              <a:t>General Suggestions For Regulatory Reform</a:t>
+            </a:r>
+            <a:endParaRPr sz="3200" dirty="0"/>
+          </a:p>
+        </p:txBody>
+      </p:sp>
+      <p:sp>
+        <p:nvSpPr>
+          <p:cNvPr id="6" name="Rounded Rectangle 5"/>
+          <p:cNvSpPr/>
+          <p:nvPr/>
+        </p:nvSpPr>
+        <p:spPr>
+          <a:xfrm>
+            <a:off x="670473" y="1700443"/>
+            <a:ext cx="1911096" cy="3233507"/>
+          </a:xfrm>
+          <a:prstGeom prst="roundRect">
+            <a:avLst/>
+          </a:prstGeom>
+          <a:solidFill>
+            <a:srgbClr val="FFFDF8"/>
+          </a:solidFill>
+          <a:ln w="12700">
+            <a:solidFill>
+              <a:srgbClr val="D8D1C6"/>
+            </a:solidFill>
+          </a:ln>
+        </p:spPr>
+        <p:style>
+          <a:lnRef idx="1">
+            <a:schemeClr val="accent1"/>
+          </a:lnRef>
+          <a:fillRef idx="3">
+            <a:schemeClr val="accent1"/>
+          </a:fillRef>
+          <a:effectRef idx="2">
+            <a:schemeClr val="accent1"/>
+          </a:effectRef>
+          <a:fontRef idx="minor">
+            <a:schemeClr val="lt1"/>
+          </a:fontRef>
+        </p:style>
+        <p:txBody>
+          <a:bodyPr rtlCol="0" anchor="ctr"/>
+          <a:lstStyle/>
+          <a:p>
+            <a:pPr algn="ctr"/>
+            <a:endParaRPr sz="1600">
+              <a:latin typeface="Avenir Next" panose="020B0503020202020204" pitchFamily="34" charset="0"/>
+            </a:endParaRPr>
+          </a:p>
+        </p:txBody>
+      </p:sp>
+      <p:sp>
+        <p:nvSpPr>
+          <p:cNvPr id="7" name="Rectangle 6"/>
+          <p:cNvSpPr/>
+          <p:nvPr/>
+        </p:nvSpPr>
+        <p:spPr>
+          <a:xfrm>
+            <a:off x="670473" y="1700443"/>
+            <a:ext cx="1911096" cy="97615"/>
+          </a:xfrm>
+          <a:prstGeom prst="rect">
+            <a:avLst/>
+          </a:prstGeom>
+          <a:solidFill>
+            <a:srgbClr val="C96A3D"/>
+          </a:solidFill>
+          <a:ln>
+            <a:noFill/>
+          </a:ln>
+        </p:spPr>
+        <p:style>
+          <a:lnRef idx="1">
+            <a:schemeClr val="accent1"/>
+          </a:lnRef>
+          <a:fillRef idx="3">
+            <a:schemeClr val="accent1"/>
+          </a:fillRef>
+          <a:effectRef idx="2">
+            <a:schemeClr val="accent1"/>
+          </a:effectRef>
+          <a:fontRef idx="minor">
+            <a:schemeClr val="lt1"/>
+          </a:fontRef>
+        </p:style>
+        <p:txBody>
+          <a:bodyPr rtlCol="0" anchor="ctr"/>
+          <a:lstStyle/>
+          <a:p>
+            <a:pPr algn="ctr"/>
+            <a:endParaRPr sz="1600">
+              <a:latin typeface="Avenir Next" panose="020B0503020202020204" pitchFamily="34" charset="0"/>
+            </a:endParaRPr>
+          </a:p>
+        </p:txBody>
+      </p:sp>
+      <p:sp>
+        <p:nvSpPr>
+          <p:cNvPr id="8" name="TextBox 7"/>
+          <p:cNvSpPr txBox="1"/>
+          <p:nvPr/>
+        </p:nvSpPr>
+        <p:spPr>
+          <a:xfrm>
+            <a:off x="816777" y="1809600"/>
+            <a:ext cx="1764792" cy="584775"/>
+          </a:xfrm>
+          <a:prstGeom prst="rect">
+            <a:avLst/>
+          </a:prstGeom>
+          <a:noFill/>
+        </p:spPr>
+        <p:txBody>
+          <a:bodyPr wrap="square" anchor="t">
+            <a:spAutoFit/>
+          </a:bodyPr>
+          <a:lstStyle/>
+          <a:p>
+            <a:pPr algn="l">
+              <a:defRPr sz="1500" b="1">
+                <a:solidFill>
+                  <a:srgbClr val="12402D"/>
+                </a:solidFill>
+                <a:latin typeface="Avenir Next"/>
+              </a:defRPr>
+            </a:pPr>
+            <a:r>
+              <a:t>1. Institutional Integration</a:t>
+            </a:r>
+          </a:p>
+        </p:txBody>
+      </p:sp>
+      <p:sp>
+        <p:nvSpPr>
+          <p:cNvPr id="9" name="TextBox 8"/>
+          <p:cNvSpPr txBox="1"/>
+          <p:nvPr/>
+        </p:nvSpPr>
+        <p:spPr>
+          <a:xfrm>
+            <a:off x="816777" y="2442950"/>
+            <a:ext cx="1764792" cy="1338828"/>
+          </a:xfrm>
+          <a:prstGeom prst="rect">
+            <a:avLst/>
+          </a:prstGeom>
+          <a:noFill/>
+        </p:spPr>
+        <p:txBody>
+          <a:bodyPr wrap="square" anchor="t">
+            <a:spAutoFit/>
+          </a:bodyPr>
+          <a:lstStyle/>
+          <a:p>
+            <a:pPr marL="152400" indent="-152400" algn="l">
+              <a:buFont typeface="Avenir Next"/>
+              <a:buChar char="•"/>
+              <a:defRPr sz="1350">
+                <a:solidFill>
+                  <a:srgbClr val="2D2D2D"/>
+                </a:solidFill>
+                <a:latin typeface="Avenir Next"/>
+                <a:ea typeface="Avenir Next"/>
+                <a:cs typeface="Avenir Next"/>
+              </a:defRPr>
+            </a:pPr>
+            <a:r>
+              <a:rPr lang="en-GB" sz="1350" dirty="0">
+                <a:solidFill>
+                  <a:srgbClr val="2D2D2D"/>
+                </a:solidFill>
+                <a:latin typeface="Avenir Next"/>
+                <a:ea typeface="Avenir Next"/>
+                <a:cs typeface="Avenir Next"/>
+              </a:rPr>
+              <a:t>Permanent inter-regulatory council linking MCA, SEBI, CCPA, MoEFCC, CPCB, BIS and FSSAI</a:t>
+            </a:r>
+          </a:p>
+        </p:txBody>
+      </p:sp>
+      <p:sp>
+        <p:nvSpPr>
+          <p:cNvPr id="10" name="Rounded Rectangle 9"/>
+          <p:cNvSpPr/>
+          <p:nvPr/>
+        </p:nvSpPr>
+        <p:spPr>
+          <a:xfrm>
+            <a:off x="2810169" y="1700443"/>
+            <a:ext cx="1911096" cy="3233507"/>
+          </a:xfrm>
+          <a:prstGeom prst="roundRect">
+            <a:avLst/>
+          </a:prstGeom>
+          <a:solidFill>
+            <a:srgbClr val="FFFDF8"/>
+          </a:solidFill>
+          <a:ln w="12700">
+            <a:solidFill>
+              <a:srgbClr val="D8D1C6"/>
+            </a:solidFill>
+          </a:ln>
+        </p:spPr>
+        <p:style>
+          <a:lnRef idx="1">
+            <a:schemeClr val="accent1"/>
+          </a:lnRef>
+          <a:fillRef idx="3">
+            <a:schemeClr val="accent1"/>
+          </a:fillRef>
+          <a:effectRef idx="2">
+            <a:schemeClr val="accent1"/>
+          </a:effectRef>
+          <a:fontRef idx="minor">
+            <a:schemeClr val="lt1"/>
+          </a:fontRef>
+        </p:style>
+        <p:txBody>
+          <a:bodyPr rtlCol="0" anchor="ctr"/>
+          <a:lstStyle/>
+          <a:p>
+            <a:pPr algn="ctr"/>
+            <a:endParaRPr sz="1600">
+              <a:latin typeface="Avenir Next" panose="020B0503020202020204" pitchFamily="34" charset="0"/>
+            </a:endParaRPr>
+          </a:p>
+        </p:txBody>
+      </p:sp>
+      <p:sp>
+        <p:nvSpPr>
+          <p:cNvPr id="11" name="Rectangle 10"/>
+          <p:cNvSpPr/>
+          <p:nvPr/>
+        </p:nvSpPr>
+        <p:spPr>
+          <a:xfrm>
+            <a:off x="2810169" y="1700443"/>
+            <a:ext cx="1911096" cy="97615"/>
+          </a:xfrm>
+          <a:prstGeom prst="rect">
+            <a:avLst/>
+          </a:prstGeom>
+          <a:solidFill>
+            <a:srgbClr val="C8A24D"/>
+          </a:solidFill>
+          <a:ln>
+            <a:noFill/>
+          </a:ln>
+        </p:spPr>
+        <p:style>
+          <a:lnRef idx="1">
+            <a:schemeClr val="accent1"/>
+          </a:lnRef>
+          <a:fillRef idx="3">
+            <a:schemeClr val="accent1"/>
+          </a:fillRef>
+          <a:effectRef idx="2">
+            <a:schemeClr val="accent1"/>
+          </a:effectRef>
+          <a:fontRef idx="minor">
+            <a:schemeClr val="lt1"/>
+          </a:fontRef>
+        </p:style>
+        <p:txBody>
+          <a:bodyPr rtlCol="0" anchor="ctr"/>
+          <a:lstStyle/>
+          <a:p>
+            <a:pPr algn="ctr"/>
+            <a:endParaRPr sz="1600">
+              <a:latin typeface="Avenir Next" panose="020B0503020202020204" pitchFamily="34" charset="0"/>
+            </a:endParaRPr>
+          </a:p>
+        </p:txBody>
+      </p:sp>
+      <p:sp>
+        <p:nvSpPr>
+          <p:cNvPr id="12" name="TextBox 11"/>
+          <p:cNvSpPr txBox="1"/>
+          <p:nvPr/>
+        </p:nvSpPr>
+        <p:spPr>
+          <a:xfrm>
+            <a:off x="2956473" y="1809600"/>
+            <a:ext cx="1764792" cy="830997"/>
+          </a:xfrm>
+          <a:prstGeom prst="rect">
+            <a:avLst/>
+          </a:prstGeom>
+          <a:noFill/>
+        </p:spPr>
+        <p:txBody>
+          <a:bodyPr wrap="square" anchor="t">
+            <a:spAutoFit/>
+          </a:bodyPr>
+          <a:lstStyle/>
+          <a:p>
+            <a:pPr algn="l">
+              <a:defRPr sz="1500" b="1">
+                <a:solidFill>
+                  <a:srgbClr val="12402D"/>
+                </a:solidFill>
+                <a:latin typeface="Avenir Next"/>
+              </a:defRPr>
+            </a:pPr>
+            <a:r>
+              <a:t>2. Lead Regulator Model</a:t>
+            </a:r>
+          </a:p>
+        </p:txBody>
+      </p:sp>
+      <p:sp>
+        <p:nvSpPr>
+          <p:cNvPr id="13" name="TextBox 12"/>
+          <p:cNvSpPr txBox="1"/>
+          <p:nvPr/>
+        </p:nvSpPr>
+        <p:spPr>
+          <a:xfrm>
+            <a:off x="2956473" y="2433044"/>
+            <a:ext cx="1764792" cy="1962076"/>
+          </a:xfrm>
+          <a:prstGeom prst="rect">
+            <a:avLst/>
+          </a:prstGeom>
+          <a:noFill/>
+        </p:spPr>
+        <p:txBody>
+          <a:bodyPr wrap="square" anchor="t">
+            <a:spAutoFit/>
+          </a:bodyPr>
+          <a:lstStyle/>
+          <a:p>
+            <a:pPr marL="152400" indent="-152400" algn="l">
+              <a:buFont typeface="Avenir Next"/>
+              <a:buChar char="•"/>
+              <a:defRPr sz="1350">
+                <a:solidFill>
+                  <a:srgbClr val="2D2D2D"/>
+                </a:solidFill>
+                <a:latin typeface="Avenir Next"/>
+                <a:ea typeface="Avenir Next"/>
+                <a:cs typeface="Avenir Next"/>
+              </a:defRPr>
+            </a:pPr>
+            <a:r>
+              <a:rPr lang="en-GB" sz="1350" dirty="0">
+                <a:solidFill>
+                  <a:srgbClr val="2D2D2D"/>
+                </a:solidFill>
+                <a:latin typeface="Avenir Next"/>
+                <a:ea typeface="Avenir Next"/>
+                <a:cs typeface="Avenir Next"/>
+              </a:rPr>
+              <a:t>Designate a coordinating agency</a:t>
+            </a:r>
+          </a:p>
+          <a:p>
+            <a:pPr algn="l">
+              <a:defRPr sz="1350">
+                <a:solidFill>
+                  <a:srgbClr val="2D2D2D"/>
+                </a:solidFill>
+                <a:latin typeface="Avenir Next"/>
+                <a:ea typeface="Avenir Next"/>
+                <a:cs typeface="Avenir Next"/>
+              </a:defRPr>
+            </a:pPr>
+            <a:endParaRPr lang="en-GB" sz="1350" dirty="0">
+              <a:solidFill>
+                <a:srgbClr val="2D2D2D"/>
+              </a:solidFill>
+              <a:latin typeface="Avenir Next"/>
+              <a:ea typeface="Avenir Next"/>
+              <a:cs typeface="Avenir Next"/>
+            </a:endParaRPr>
+          </a:p>
+          <a:p>
+            <a:pPr marL="152400" indent="-152400">
+              <a:buFont typeface="Avenir Next"/>
+              <a:buChar char="•"/>
+              <a:defRPr sz="1350">
+                <a:solidFill>
+                  <a:srgbClr val="2D2D2D"/>
+                </a:solidFill>
+                <a:latin typeface="Avenir Next"/>
+                <a:ea typeface="Avenir Next"/>
+                <a:cs typeface="Avenir Next"/>
+              </a:defRPr>
+            </a:pPr>
+            <a:r>
+              <a:rPr lang="en-IN" sz="1350" dirty="0">
+                <a:solidFill>
+                  <a:srgbClr val="2D2D2D"/>
+                </a:solidFill>
+                <a:latin typeface="Avenir Next"/>
+              </a:rPr>
+              <a:t>Replaces multiple conflicting inspections with one coordinated approach.</a:t>
+            </a:r>
+            <a:endParaRPr lang="en-GB" sz="1350" dirty="0">
+              <a:solidFill>
+                <a:srgbClr val="2D2D2D"/>
+              </a:solidFill>
+              <a:latin typeface="Avenir Next"/>
+              <a:ea typeface="Avenir Next"/>
+              <a:cs typeface="Avenir Next"/>
+            </a:endParaRPr>
+          </a:p>
+        </p:txBody>
+      </p:sp>
+      <p:sp>
+        <p:nvSpPr>
+          <p:cNvPr id="14" name="Rounded Rectangle 13"/>
+          <p:cNvSpPr/>
+          <p:nvPr/>
+        </p:nvSpPr>
+        <p:spPr>
+          <a:xfrm>
+            <a:off x="4949865" y="1700443"/>
+            <a:ext cx="1911096" cy="3233507"/>
+          </a:xfrm>
+          <a:prstGeom prst="roundRect">
+            <a:avLst/>
+          </a:prstGeom>
+          <a:solidFill>
+            <a:srgbClr val="FFFDF8"/>
+          </a:solidFill>
+          <a:ln w="12700">
+            <a:solidFill>
+              <a:srgbClr val="D8D1C6"/>
+            </a:solidFill>
+          </a:ln>
+        </p:spPr>
+        <p:style>
+          <a:lnRef idx="1">
+            <a:schemeClr val="accent1"/>
+          </a:lnRef>
+          <a:fillRef idx="3">
+            <a:schemeClr val="accent1"/>
+          </a:fillRef>
+          <a:effectRef idx="2">
+            <a:schemeClr val="accent1"/>
+          </a:effectRef>
+          <a:fontRef idx="minor">
+            <a:schemeClr val="lt1"/>
+          </a:fontRef>
+        </p:style>
+        <p:txBody>
+          <a:bodyPr rtlCol="0" anchor="ctr"/>
+          <a:lstStyle/>
+          <a:p>
+            <a:pPr algn="ctr"/>
+            <a:endParaRPr sz="1600">
+              <a:latin typeface="Avenir Next" panose="020B0503020202020204" pitchFamily="34" charset="0"/>
+            </a:endParaRPr>
+          </a:p>
+        </p:txBody>
+      </p:sp>
+      <p:sp>
+        <p:nvSpPr>
+          <p:cNvPr id="15" name="Rectangle 14"/>
+          <p:cNvSpPr/>
+          <p:nvPr/>
+        </p:nvSpPr>
+        <p:spPr>
+          <a:xfrm>
+            <a:off x="4949865" y="1700443"/>
+            <a:ext cx="1911096" cy="97615"/>
+          </a:xfrm>
+          <a:prstGeom prst="rect">
+            <a:avLst/>
+          </a:prstGeom>
+          <a:solidFill>
+            <a:srgbClr val="6A8C69"/>
+          </a:solidFill>
+          <a:ln>
+            <a:noFill/>
+          </a:ln>
+        </p:spPr>
+        <p:style>
+          <a:lnRef idx="1">
+            <a:schemeClr val="accent1"/>
+          </a:lnRef>
+          <a:fillRef idx="3">
+            <a:schemeClr val="accent1"/>
+          </a:fillRef>
+          <a:effectRef idx="2">
+            <a:schemeClr val="accent1"/>
+          </a:effectRef>
+          <a:fontRef idx="minor">
+            <a:schemeClr val="lt1"/>
+          </a:fontRef>
+        </p:style>
+        <p:txBody>
+          <a:bodyPr rtlCol="0" anchor="ctr"/>
+          <a:lstStyle/>
+          <a:p>
+            <a:pPr algn="ctr"/>
+            <a:endParaRPr sz="1600">
+              <a:latin typeface="Avenir Next" panose="020B0503020202020204" pitchFamily="34" charset="0"/>
+            </a:endParaRPr>
+          </a:p>
+        </p:txBody>
+      </p:sp>
+      <p:sp>
+        <p:nvSpPr>
+          <p:cNvPr id="16" name="TextBox 15"/>
+          <p:cNvSpPr txBox="1"/>
+          <p:nvPr/>
+        </p:nvSpPr>
+        <p:spPr>
+          <a:xfrm>
+            <a:off x="5096169" y="1809600"/>
+            <a:ext cx="1764792" cy="584775"/>
+          </a:xfrm>
+          <a:prstGeom prst="rect">
+            <a:avLst/>
+          </a:prstGeom>
+          <a:noFill/>
+        </p:spPr>
+        <p:txBody>
+          <a:bodyPr wrap="square" anchor="t">
+            <a:spAutoFit/>
+          </a:bodyPr>
+          <a:lstStyle/>
+          <a:p>
+            <a:pPr algn="l">
+              <a:defRPr sz="1500" b="1">
+                <a:solidFill>
+                  <a:srgbClr val="12402D"/>
+                </a:solidFill>
+                <a:latin typeface="Avenir Next"/>
+              </a:defRPr>
+            </a:pPr>
+            <a:r>
+              <a:t>3. Standardised Verification</a:t>
+            </a:r>
+          </a:p>
+        </p:txBody>
+      </p:sp>
+      <p:sp>
+        <p:nvSpPr>
+          <p:cNvPr id="17" name="TextBox 16"/>
+          <p:cNvSpPr txBox="1"/>
+          <p:nvPr/>
+        </p:nvSpPr>
+        <p:spPr>
+          <a:xfrm>
+            <a:off x="5096169" y="2442950"/>
+            <a:ext cx="1764792" cy="1754326"/>
+          </a:xfrm>
+          <a:prstGeom prst="rect">
+            <a:avLst/>
+          </a:prstGeom>
+          <a:noFill/>
+        </p:spPr>
+        <p:txBody>
+          <a:bodyPr wrap="square" anchor="t">
+            <a:spAutoFit/>
+          </a:bodyPr>
+          <a:lstStyle/>
+          <a:p>
+            <a:pPr marL="152400" indent="-152400" algn="l">
+              <a:buFont typeface="Avenir Next"/>
+              <a:buChar char="•"/>
+              <a:defRPr sz="1350">
+                <a:solidFill>
+                  <a:srgbClr val="2D2D2D"/>
+                </a:solidFill>
+                <a:latin typeface="Avenir Next"/>
+                <a:ea typeface="Avenir Next"/>
+                <a:cs typeface="Avenir Next"/>
+              </a:defRPr>
+            </a:pPr>
+            <a:r>
+              <a:rPr lang="en-GB" sz="1350" dirty="0">
+                <a:solidFill>
+                  <a:srgbClr val="2D2D2D"/>
+                </a:solidFill>
+                <a:latin typeface="Avenir Next"/>
+                <a:ea typeface="Avenir Next"/>
+                <a:cs typeface="Avenir Next"/>
+              </a:rPr>
+              <a:t>Ex-ante claim substantiation</a:t>
+            </a:r>
+          </a:p>
+          <a:p>
+            <a:pPr algn="l">
+              <a:defRPr sz="1350">
+                <a:solidFill>
+                  <a:srgbClr val="2D2D2D"/>
+                </a:solidFill>
+                <a:latin typeface="Avenir Next"/>
+                <a:ea typeface="Avenir Next"/>
+                <a:cs typeface="Avenir Next"/>
+              </a:defRPr>
+            </a:pPr>
+            <a:endParaRPr lang="en-GB" sz="1350" dirty="0">
+              <a:solidFill>
+                <a:srgbClr val="2D2D2D"/>
+              </a:solidFill>
+              <a:latin typeface="Avenir Next"/>
+              <a:ea typeface="Avenir Next"/>
+              <a:cs typeface="Avenir Next"/>
+            </a:endParaRPr>
+          </a:p>
+          <a:p>
+            <a:pPr marL="152400" indent="-152400" algn="l">
+              <a:buFont typeface="Avenir Next"/>
+              <a:buChar char="•"/>
+              <a:defRPr sz="1350">
+                <a:solidFill>
+                  <a:srgbClr val="2D2D2D"/>
+                </a:solidFill>
+                <a:latin typeface="Avenir Next"/>
+                <a:ea typeface="Avenir Next"/>
+                <a:cs typeface="Avenir Next"/>
+              </a:defRPr>
+            </a:pPr>
+            <a:r>
+              <a:rPr lang="en-GB" sz="1350" dirty="0">
+                <a:solidFill>
+                  <a:srgbClr val="2D2D2D"/>
+                </a:solidFill>
+                <a:latin typeface="Avenir Next"/>
+                <a:ea typeface="Avenir Next"/>
+                <a:cs typeface="Avenir Next"/>
+              </a:rPr>
+              <a:t>Accredited third party verifiers for each type of environmental claim verification</a:t>
+            </a:r>
+          </a:p>
+        </p:txBody>
+      </p:sp>
+      <p:sp>
+        <p:nvSpPr>
+          <p:cNvPr id="18" name="Rounded Rectangle 17"/>
+          <p:cNvSpPr/>
+          <p:nvPr/>
+        </p:nvSpPr>
+        <p:spPr>
+          <a:xfrm>
+            <a:off x="7089561" y="1700443"/>
+            <a:ext cx="1911096" cy="3233507"/>
+          </a:xfrm>
+          <a:prstGeom prst="roundRect">
+            <a:avLst/>
+          </a:prstGeom>
+          <a:solidFill>
+            <a:srgbClr val="FFFDF8"/>
+          </a:solidFill>
+          <a:ln w="12700">
+            <a:solidFill>
+              <a:srgbClr val="D8D1C6"/>
+            </a:solidFill>
+          </a:ln>
+        </p:spPr>
+        <p:style>
+          <a:lnRef idx="1">
+            <a:schemeClr val="accent1"/>
+          </a:lnRef>
+          <a:fillRef idx="3">
+            <a:schemeClr val="accent1"/>
+          </a:fillRef>
+          <a:effectRef idx="2">
+            <a:schemeClr val="accent1"/>
+          </a:effectRef>
+          <a:fontRef idx="minor">
+            <a:schemeClr val="lt1"/>
+          </a:fontRef>
+        </p:style>
+        <p:txBody>
+          <a:bodyPr rtlCol="0" anchor="ctr"/>
+          <a:lstStyle/>
+          <a:p>
+            <a:pPr algn="ctr"/>
+            <a:endParaRPr sz="1600">
+              <a:latin typeface="Avenir Next" panose="020B0503020202020204" pitchFamily="34" charset="0"/>
+            </a:endParaRPr>
+          </a:p>
+        </p:txBody>
+      </p:sp>
+      <p:sp>
+        <p:nvSpPr>
+          <p:cNvPr id="19" name="Rectangle 18"/>
+          <p:cNvSpPr/>
+          <p:nvPr/>
+        </p:nvSpPr>
+        <p:spPr>
+          <a:xfrm>
+            <a:off x="7089561" y="1700443"/>
+            <a:ext cx="1911096" cy="97615"/>
+          </a:xfrm>
+          <a:prstGeom prst="rect">
+            <a:avLst/>
+          </a:prstGeom>
+          <a:solidFill>
+            <a:srgbClr val="C96A3D"/>
+          </a:solidFill>
+          <a:ln>
+            <a:noFill/>
+          </a:ln>
+        </p:spPr>
+        <p:style>
+          <a:lnRef idx="1">
+            <a:schemeClr val="accent1"/>
+          </a:lnRef>
+          <a:fillRef idx="3">
+            <a:schemeClr val="accent1"/>
+          </a:fillRef>
+          <a:effectRef idx="2">
+            <a:schemeClr val="accent1"/>
+          </a:effectRef>
+          <a:fontRef idx="minor">
+            <a:schemeClr val="lt1"/>
+          </a:fontRef>
+        </p:style>
+        <p:txBody>
+          <a:bodyPr rtlCol="0" anchor="ctr"/>
+          <a:lstStyle/>
+          <a:p>
+            <a:pPr algn="ctr"/>
+            <a:endParaRPr sz="1600">
+              <a:latin typeface="Avenir Next" panose="020B0503020202020204" pitchFamily="34" charset="0"/>
+            </a:endParaRPr>
+          </a:p>
+        </p:txBody>
+      </p:sp>
+      <p:sp>
+        <p:nvSpPr>
+          <p:cNvPr id="20" name="TextBox 19"/>
+          <p:cNvSpPr txBox="1"/>
+          <p:nvPr/>
+        </p:nvSpPr>
+        <p:spPr>
+          <a:xfrm>
+            <a:off x="7235865" y="1809600"/>
+            <a:ext cx="1764792" cy="584775"/>
+          </a:xfrm>
+          <a:prstGeom prst="rect">
+            <a:avLst/>
+          </a:prstGeom>
+          <a:noFill/>
+        </p:spPr>
+        <p:txBody>
+          <a:bodyPr wrap="square" anchor="t">
+            <a:spAutoFit/>
+          </a:bodyPr>
+          <a:lstStyle/>
+          <a:p>
+            <a:pPr algn="l">
+              <a:defRPr sz="1500" b="1">
+                <a:solidFill>
+                  <a:srgbClr val="12402D"/>
+                </a:solidFill>
+                <a:latin typeface="Avenir Next"/>
+              </a:defRPr>
+            </a:pPr>
+            <a:r>
+              <a:t>4. Proactive Surveillance</a:t>
+            </a:r>
+          </a:p>
+        </p:txBody>
+      </p:sp>
+      <p:sp>
+        <p:nvSpPr>
+          <p:cNvPr id="21" name="TextBox 20"/>
+          <p:cNvSpPr txBox="1"/>
+          <p:nvPr/>
+        </p:nvSpPr>
+        <p:spPr>
+          <a:xfrm>
+            <a:off x="7235865" y="2442950"/>
+            <a:ext cx="1764792" cy="1754326"/>
+          </a:xfrm>
+          <a:prstGeom prst="rect">
+            <a:avLst/>
+          </a:prstGeom>
+          <a:noFill/>
+        </p:spPr>
+        <p:txBody>
+          <a:bodyPr wrap="square" anchor="t">
+            <a:spAutoFit/>
+          </a:bodyPr>
+          <a:lstStyle/>
+          <a:p>
+            <a:pPr marL="152400" indent="-152400" algn="l">
+              <a:buFont typeface="Avenir Next"/>
+              <a:buChar char="•"/>
+              <a:defRPr sz="1350">
+                <a:solidFill>
+                  <a:srgbClr val="2D2D2D"/>
+                </a:solidFill>
+                <a:latin typeface="Avenir Next"/>
+                <a:ea typeface="Avenir Next"/>
+                <a:cs typeface="Avenir Next"/>
+              </a:defRPr>
+            </a:pPr>
+            <a:r>
+              <a:rPr lang="en-GB" sz="1350" dirty="0">
+                <a:solidFill>
+                  <a:srgbClr val="2D2D2D"/>
+                </a:solidFill>
+                <a:latin typeface="Avenir Next"/>
+                <a:ea typeface="Avenir Next"/>
+                <a:cs typeface="Avenir Next"/>
+              </a:rPr>
+              <a:t>Routine market sweeps</a:t>
+            </a:r>
+          </a:p>
+          <a:p>
+            <a:pPr algn="l">
+              <a:defRPr sz="1350">
+                <a:solidFill>
+                  <a:srgbClr val="2D2D2D"/>
+                </a:solidFill>
+                <a:latin typeface="Avenir Next"/>
+                <a:ea typeface="Avenir Next"/>
+                <a:cs typeface="Avenir Next"/>
+              </a:defRPr>
+            </a:pPr>
+            <a:endParaRPr lang="en-GB" sz="1350" dirty="0">
+              <a:solidFill>
+                <a:srgbClr val="2D2D2D"/>
+              </a:solidFill>
+              <a:latin typeface="Avenir Next"/>
+              <a:ea typeface="Avenir Next"/>
+              <a:cs typeface="Avenir Next"/>
+            </a:endParaRPr>
+          </a:p>
+          <a:p>
+            <a:pPr marL="152400" indent="-152400" algn="l">
+              <a:buFont typeface="Avenir Next"/>
+              <a:buChar char="•"/>
+              <a:defRPr sz="1350">
+                <a:solidFill>
+                  <a:srgbClr val="2D2D2D"/>
+                </a:solidFill>
+                <a:latin typeface="Avenir Next"/>
+                <a:ea typeface="Avenir Next"/>
+                <a:cs typeface="Avenir Next"/>
+              </a:defRPr>
+            </a:pPr>
+            <a:r>
+              <a:rPr lang="en-GB" sz="1350" dirty="0">
+                <a:solidFill>
+                  <a:srgbClr val="2D2D2D"/>
+                </a:solidFill>
+                <a:latin typeface="Avenir Next"/>
+                <a:ea typeface="Avenir Next"/>
+                <a:cs typeface="Avenir Next"/>
+              </a:rPr>
+              <a:t>Cross-check environmental claims against CPCB/SPCB pollution records</a:t>
+            </a:r>
+          </a:p>
+        </p:txBody>
+      </p:sp>
+      <p:sp>
+        <p:nvSpPr>
+          <p:cNvPr id="22" name="Rounded Rectangle 21"/>
+          <p:cNvSpPr/>
+          <p:nvPr/>
+        </p:nvSpPr>
+        <p:spPr>
+          <a:xfrm>
+            <a:off x="9229257" y="1700443"/>
+            <a:ext cx="1911096" cy="3233507"/>
+          </a:xfrm>
+          <a:prstGeom prst="roundRect">
+            <a:avLst/>
+          </a:prstGeom>
+          <a:solidFill>
+            <a:srgbClr val="FFFDF8"/>
+          </a:solidFill>
+          <a:ln w="12700">
+            <a:solidFill>
+              <a:srgbClr val="D8D1C6"/>
+            </a:solidFill>
+          </a:ln>
+        </p:spPr>
+        <p:style>
+          <a:lnRef idx="1">
+            <a:schemeClr val="accent1"/>
+          </a:lnRef>
+          <a:fillRef idx="3">
+            <a:schemeClr val="accent1"/>
+          </a:fillRef>
+          <a:effectRef idx="2">
+            <a:schemeClr val="accent1"/>
+          </a:effectRef>
+          <a:fontRef idx="minor">
+            <a:schemeClr val="lt1"/>
+          </a:fontRef>
+        </p:style>
+        <p:txBody>
+          <a:bodyPr rtlCol="0" anchor="ctr"/>
+          <a:lstStyle/>
+          <a:p>
+            <a:pPr algn="ctr"/>
+            <a:endParaRPr sz="1600">
+              <a:latin typeface="Avenir Next" panose="020B0503020202020204" pitchFamily="34" charset="0"/>
+            </a:endParaRPr>
+          </a:p>
+        </p:txBody>
+      </p:sp>
+      <p:sp>
+        <p:nvSpPr>
+          <p:cNvPr id="23" name="Rectangle 22"/>
+          <p:cNvSpPr/>
+          <p:nvPr/>
+        </p:nvSpPr>
+        <p:spPr>
+          <a:xfrm>
+            <a:off x="9229257" y="1700443"/>
+            <a:ext cx="1911096" cy="97615"/>
+          </a:xfrm>
+          <a:prstGeom prst="rect">
+            <a:avLst/>
+          </a:prstGeom>
+          <a:solidFill>
+            <a:srgbClr val="A23E2A"/>
+          </a:solidFill>
+          <a:ln>
+            <a:noFill/>
+          </a:ln>
+        </p:spPr>
+        <p:style>
+          <a:lnRef idx="1">
+            <a:schemeClr val="accent1"/>
+          </a:lnRef>
+          <a:fillRef idx="3">
+            <a:schemeClr val="accent1"/>
+          </a:fillRef>
+          <a:effectRef idx="2">
+            <a:schemeClr val="accent1"/>
+          </a:effectRef>
+          <a:fontRef idx="minor">
+            <a:schemeClr val="lt1"/>
+          </a:fontRef>
+        </p:style>
+        <p:txBody>
+          <a:bodyPr rtlCol="0" anchor="ctr"/>
+          <a:lstStyle/>
+          <a:p>
+            <a:pPr algn="ctr"/>
+            <a:endParaRPr sz="1600">
+              <a:latin typeface="Avenir Next" panose="020B0503020202020204" pitchFamily="34" charset="0"/>
+            </a:endParaRPr>
+          </a:p>
+        </p:txBody>
+      </p:sp>
+      <p:sp>
+        <p:nvSpPr>
+          <p:cNvPr id="24" name="TextBox 23"/>
+          <p:cNvSpPr txBox="1"/>
+          <p:nvPr/>
+        </p:nvSpPr>
+        <p:spPr>
+          <a:xfrm>
+            <a:off x="9375561" y="1809600"/>
+            <a:ext cx="1764792" cy="584775"/>
+          </a:xfrm>
+          <a:prstGeom prst="rect">
+            <a:avLst/>
+          </a:prstGeom>
+          <a:noFill/>
+        </p:spPr>
+        <p:txBody>
+          <a:bodyPr wrap="square" anchor="t">
+            <a:spAutoFit/>
+          </a:bodyPr>
+          <a:lstStyle/>
+          <a:p>
+            <a:pPr algn="l">
+              <a:defRPr sz="1500" b="1">
+                <a:solidFill>
+                  <a:srgbClr val="12402D"/>
+                </a:solidFill>
+                <a:latin typeface="Avenir Next"/>
+              </a:defRPr>
+            </a:pPr>
+            <a:r>
+              <a:t>5. Enforcement Capacity</a:t>
+            </a:r>
+          </a:p>
+        </p:txBody>
+      </p:sp>
+      <p:sp>
+        <p:nvSpPr>
+          <p:cNvPr id="25" name="TextBox 24"/>
+          <p:cNvSpPr txBox="1"/>
+          <p:nvPr/>
+        </p:nvSpPr>
+        <p:spPr>
+          <a:xfrm>
+            <a:off x="9375561" y="2442950"/>
+            <a:ext cx="1764792" cy="2377574"/>
+          </a:xfrm>
+          <a:prstGeom prst="rect">
+            <a:avLst/>
+          </a:prstGeom>
+          <a:noFill/>
+        </p:spPr>
+        <p:txBody>
+          <a:bodyPr wrap="square" anchor="t">
+            <a:spAutoFit/>
+          </a:bodyPr>
+          <a:lstStyle/>
+          <a:p>
+            <a:pPr marL="152400" indent="-152400" algn="l">
+              <a:buFont typeface="Avenir Next"/>
+              <a:buChar char="•"/>
+              <a:defRPr sz="1350">
+                <a:solidFill>
+                  <a:srgbClr val="2D2D2D"/>
+                </a:solidFill>
+                <a:latin typeface="Avenir Next"/>
+                <a:ea typeface="Avenir Next"/>
+                <a:cs typeface="Avenir Next"/>
+              </a:defRPr>
+            </a:pPr>
+            <a:r>
+              <a:rPr lang="en-GB" sz="1350" dirty="0">
+                <a:solidFill>
+                  <a:srgbClr val="2D2D2D"/>
+                </a:solidFill>
+                <a:latin typeface="Avenir Next"/>
+                <a:ea typeface="Avenir Next"/>
+                <a:cs typeface="Avenir Next"/>
+              </a:rPr>
+              <a:t>In-house ESG surveillance capacity for relevant regulators like SEBI.</a:t>
+            </a:r>
+          </a:p>
+          <a:p>
+            <a:pPr algn="l">
+              <a:defRPr sz="1350">
+                <a:solidFill>
+                  <a:srgbClr val="2D2D2D"/>
+                </a:solidFill>
+                <a:latin typeface="Avenir Next"/>
+                <a:ea typeface="Avenir Next"/>
+                <a:cs typeface="Avenir Next"/>
+              </a:defRPr>
+            </a:pPr>
+            <a:endParaRPr lang="en-GB" sz="1350" dirty="0">
+              <a:solidFill>
+                <a:srgbClr val="2D2D2D"/>
+              </a:solidFill>
+              <a:latin typeface="Avenir Next"/>
+              <a:ea typeface="Avenir Next"/>
+              <a:cs typeface="Avenir Next"/>
+            </a:endParaRPr>
+          </a:p>
+          <a:p>
+            <a:pPr marL="152400" indent="-152400" algn="l">
+              <a:buFont typeface="Avenir Next"/>
+              <a:buChar char="•"/>
+              <a:defRPr sz="1350">
+                <a:solidFill>
+                  <a:srgbClr val="2D2D2D"/>
+                </a:solidFill>
+                <a:latin typeface="Avenir Next"/>
+                <a:ea typeface="Avenir Next"/>
+                <a:cs typeface="Avenir Next"/>
+              </a:defRPr>
+            </a:pPr>
+            <a:r>
+              <a:rPr lang="en-GB" sz="1350" dirty="0">
+                <a:solidFill>
+                  <a:srgbClr val="2D2D2D"/>
+                </a:solidFill>
+                <a:latin typeface="Avenir Next"/>
+                <a:ea typeface="Avenir Next"/>
+                <a:cs typeface="Avenir Next"/>
+              </a:rPr>
+              <a:t>Shared carbon-accounting and GHG-assurance expert panels.</a:t>
+            </a:r>
+          </a:p>
+        </p:txBody>
+      </p:sp>
+      <p:sp>
+        <p:nvSpPr>
+          <p:cNvPr id="28" name="TextBox 27"/>
+          <p:cNvSpPr txBox="1"/>
+          <p:nvPr/>
+        </p:nvSpPr>
+        <p:spPr>
+          <a:xfrm>
+            <a:off x="734355" y="6572273"/>
+            <a:ext cx="1596912" cy="246221"/>
+          </a:xfrm>
+          <a:prstGeom prst="rect">
+            <a:avLst/>
+          </a:prstGeom>
+          <a:noFill/>
+        </p:spPr>
+        <p:txBody>
+          <a:bodyPr wrap="none">
+            <a:spAutoFit/>
+          </a:bodyPr>
+          <a:lstStyle/>
+          <a:p>
+            <a:pPr>
+              <a:defRPr sz="850">
+                <a:solidFill>
+                  <a:srgbClr val="6B6F6A"/>
+                </a:solidFill>
+                <a:latin typeface="Avenir Next"/>
+              </a:defRPr>
+            </a:pPr>
+            <a:r>
+              <a:rPr sz="1000" dirty="0"/>
+              <a:t>Source base: Chapter 6</a:t>
+            </a:r>
+            <a:r>
+              <a:rPr lang="en-US" sz="1000" dirty="0"/>
+              <a:t>.</a:t>
+            </a:r>
+            <a:endParaRPr sz="1000" dirty="0"/>
+          </a:p>
+        </p:txBody>
+      </p:sp>
+      <p:sp>
+        <p:nvSpPr>
+          <p:cNvPr id="2" name="Rounded Rectangle 1">
+            <a:extLst>
+              <a:ext uri="{FF2B5EF4-FFF2-40B4-BE49-F238E27FC236}">
+                <a16:creationId xmlns:a16="http://schemas.microsoft.com/office/drawing/2014/main" id="{FBD67D51-3F39-14D2-2C48-0863C65689EA}"/>
+              </a:ext>
+            </a:extLst>
+          </p:cNvPr>
+          <p:cNvSpPr/>
+          <p:nvPr/>
+        </p:nvSpPr>
+        <p:spPr>
+          <a:xfrm>
+            <a:off x="620714" y="5680103"/>
+            <a:ext cx="10835640" cy="584775"/>
+          </a:xfrm>
+          <a:prstGeom prst="roundRect">
+            <a:avLst>
+              <a:gd name="adj" fmla="val 14000"/>
+            </a:avLst>
+          </a:prstGeom>
+          <a:solidFill>
+            <a:srgbClr val="FFF6EA"/>
+          </a:solidFill>
+          <a:ln w="12700">
+            <a:solidFill>
+              <a:srgbClr val="E7C894"/>
+            </a:solidFill>
+          </a:ln>
+          <a:effectLst/>
+        </p:spPr>
+        <p:style>
+          <a:lnRef idx="1">
+            <a:schemeClr val="accent1"/>
+          </a:lnRef>
+          <a:fillRef idx="3">
+            <a:schemeClr val="accent1"/>
+          </a:fillRef>
+          <a:effectRef idx="2">
+            <a:schemeClr val="accent1"/>
+          </a:effectRef>
+          <a:fontRef idx="minor">
+            <a:schemeClr val="lt1"/>
+          </a:fontRef>
+        </p:style>
+        <p:txBody>
+          <a:bodyPr rtlCol="0" anchor="ctr"/>
+          <a:lstStyle/>
+          <a:p>
+            <a:endParaRPr sz="2400">
+              <a:latin typeface="Avenir Next" panose="020B0503020202020204" pitchFamily="34" charset="0"/>
+            </a:endParaRPr>
+          </a:p>
+        </p:txBody>
+      </p:sp>
+      <p:sp>
+        <p:nvSpPr>
+          <p:cNvPr id="26" name="TextBox 25">
+            <a:extLst>
+              <a:ext uri="{FF2B5EF4-FFF2-40B4-BE49-F238E27FC236}">
+                <a16:creationId xmlns:a16="http://schemas.microsoft.com/office/drawing/2014/main" id="{8089D9FA-8EE8-EC8F-BD84-3F5E80F48418}"/>
+              </a:ext>
+            </a:extLst>
+          </p:cNvPr>
+          <p:cNvSpPr txBox="1"/>
+          <p:nvPr/>
+        </p:nvSpPr>
+        <p:spPr>
+          <a:xfrm>
+            <a:off x="750714" y="5744235"/>
+            <a:ext cx="10575640" cy="477054"/>
+          </a:xfrm>
+          <a:prstGeom prst="rect">
+            <a:avLst/>
+          </a:prstGeom>
+          <a:noFill/>
+        </p:spPr>
+        <p:txBody>
+          <a:bodyPr wrap="square" lIns="45720" tIns="22860" rIns="45720" bIns="22860" anchor="ctr">
+            <a:spAutoFit/>
+          </a:bodyPr>
+          <a:lstStyle/>
+          <a:p>
+            <a:pPr algn="just">
+              <a:defRPr sz="1100">
+                <a:solidFill>
+                  <a:srgbClr val="282828"/>
+                </a:solidFill>
+              </a:defRPr>
+            </a:pPr>
+            <a:r>
+              <a:rPr lang="en-IN" sz="1400" b="1" dirty="0">
                 <a:solidFill>
                   <a:srgbClr val="173F35"/>
                 </a:solidFill>
-                <a:latin typeface="Avenir Next Demi Bold"/>
-              </a:rPr>
-              <a:t>s Addressed</a:t>
-            </a:r>
-            <a:endParaRPr sz="2800" b="1" i="0" dirty="0">
+              </a:rPr>
+              <a:t>Answers Research Question 7: What legal and policy recommendations can create an integrated liability framework that holds corporations accountable for misleading environmental claims?</a:t>
+            </a:r>
+            <a:endParaRPr lang="en-US" sz="1400" b="1" dirty="0">
               <a:solidFill>
                 <a:srgbClr val="173F35"/>
               </a:solidFill>
-              <a:latin typeface="Avenir Next Demi Bold"/>
             </a:endParaRPr>
           </a:p>
         </p:txBody>
       </p:sp>
-      <p:graphicFrame>
-        <p:nvGraphicFramePr>
-          <p:cNvPr id="5" name="Table 4"/>
-          <p:cNvGraphicFramePr>
-            <a:graphicFrameLocks noGrp="1"/>
-          </p:cNvGraphicFramePr>
-          <p:nvPr>
-            <p:extLst>
-              <p:ext uri="{D42A27DB-BD31-4B8C-83A1-F6EECF244321}">
-                <p14:modId xmlns:p14="http://schemas.microsoft.com/office/powerpoint/2010/main" val="786651673"/>
-              </p:ext>
-            </p:extLst>
-          </p:nvPr>
-        </p:nvGraphicFramePr>
-        <p:xfrm>
-          <a:off x="377059" y="886402"/>
-          <a:ext cx="11407110" cy="5864390"/>
-        </p:xfrm>
-        <a:graphic>
-          <a:graphicData uri="http://schemas.openxmlformats.org/drawingml/2006/table">
-            <a:tbl>
-              <a:tblPr firstRow="1">
-                <a:tableStyleId>{5C22544A-7EE6-4342-B048-85BDC9FD1C3A}</a:tableStyleId>
-              </a:tblPr>
-              <a:tblGrid>
-                <a:gridCol w="480000">
-                  <a:extLst>
-                    <a:ext uri="{9D8B030D-6E8A-4147-A177-3AD203B41FA5}">
-                      <a16:colId xmlns:a16="http://schemas.microsoft.com/office/drawing/2014/main" val="20000"/>
-                    </a:ext>
-                  </a:extLst>
-                </a:gridCol>
-                <a:gridCol w="3939793">
-                  <a:extLst>
-                    <a:ext uri="{9D8B030D-6E8A-4147-A177-3AD203B41FA5}">
-                      <a16:colId xmlns:a16="http://schemas.microsoft.com/office/drawing/2014/main" val="20001"/>
-                    </a:ext>
-                  </a:extLst>
-                </a:gridCol>
-                <a:gridCol w="1079292">
-                  <a:extLst>
-                    <a:ext uri="{9D8B030D-6E8A-4147-A177-3AD203B41FA5}">
-                      <a16:colId xmlns:a16="http://schemas.microsoft.com/office/drawing/2014/main" val="20002"/>
-                    </a:ext>
-                  </a:extLst>
-                </a:gridCol>
-                <a:gridCol w="5908025">
-                  <a:extLst>
-                    <a:ext uri="{9D8B030D-6E8A-4147-A177-3AD203B41FA5}">
-                      <a16:colId xmlns:a16="http://schemas.microsoft.com/office/drawing/2014/main" val="20003"/>
-                    </a:ext>
-                  </a:extLst>
-                </a:gridCol>
-              </a:tblGrid>
-              <a:tr h="360426">
-                <a:tc>
-                  <a:txBody>
-                    <a:bodyPr/>
-                    <a:lstStyle/>
-                    <a:p>
-                      <a:pPr algn="ctr"/>
-                      <a:endParaRPr sz="1200" b="1" dirty="0">
-                        <a:solidFill>
-                          <a:srgbClr val="FFFFFF"/>
-                        </a:solidFill>
-                        <a:latin typeface="Avenir Next" panose="020B0503020202020204" pitchFamily="34" charset="0"/>
-                      </a:endParaRPr>
-                    </a:p>
-                  </a:txBody>
-                  <a:tcPr marL="73152" marR="73152" marT="36576" marB="36576" anchor="ctr">
-                    <a:solidFill>
-                      <a:srgbClr val="173F35"/>
-                    </a:solidFill>
-                  </a:tcPr>
-                </a:tc>
-                <a:tc>
-                  <a:txBody>
-                    <a:bodyPr/>
-                    <a:lstStyle/>
-                    <a:p>
-                      <a:pPr algn="l"/>
-                      <a:r>
-                        <a:rPr lang="en-US" sz="1200" b="1" dirty="0">
-                          <a:solidFill>
-                            <a:srgbClr val="FFFFFF"/>
-                          </a:solidFill>
-                          <a:latin typeface="Avenir Next" panose="020B0503020202020204" pitchFamily="34" charset="0"/>
-                        </a:rPr>
-                        <a:t>Research Question</a:t>
-                      </a:r>
-                      <a:endParaRPr sz="1200" b="1" dirty="0">
-                        <a:solidFill>
-                          <a:srgbClr val="FFFFFF"/>
-                        </a:solidFill>
-                        <a:latin typeface="Avenir Next" panose="020B0503020202020204" pitchFamily="34" charset="0"/>
-                      </a:endParaRPr>
-                    </a:p>
-                  </a:txBody>
-                  <a:tcPr marL="73152" marR="73152" marT="36576" marB="36576" anchor="ctr">
-                    <a:solidFill>
-                      <a:srgbClr val="173F35"/>
-                    </a:solidFill>
-                  </a:tcPr>
-                </a:tc>
-                <a:tc>
-                  <a:txBody>
-                    <a:bodyPr/>
-                    <a:lstStyle/>
-                    <a:p>
-                      <a:pPr algn="l"/>
-                      <a:r>
-                        <a:rPr lang="en-US" sz="1200" b="1" dirty="0">
-                          <a:solidFill>
-                            <a:srgbClr val="FFFFFF"/>
-                          </a:solidFill>
-                          <a:latin typeface="Avenir Next" panose="020B0503020202020204" pitchFamily="34" charset="0"/>
-                        </a:rPr>
-                        <a:t>Related </a:t>
-                      </a:r>
-                      <a:r>
-                        <a:rPr sz="1200" b="1" dirty="0">
-                          <a:solidFill>
-                            <a:srgbClr val="FFFFFF"/>
-                          </a:solidFill>
-                          <a:latin typeface="Avenir Next" panose="020B0503020202020204" pitchFamily="34" charset="0"/>
-                        </a:rPr>
-                        <a:t>Chapter</a:t>
-                      </a:r>
-                    </a:p>
-                  </a:txBody>
-                  <a:tcPr marL="73152" marR="73152" marT="36576" marB="36576" anchor="ctr">
-                    <a:solidFill>
-                      <a:srgbClr val="173F35"/>
-                    </a:solidFill>
-                  </a:tcPr>
-                </a:tc>
-                <a:tc>
-                  <a:txBody>
-                    <a:bodyPr/>
-                    <a:lstStyle/>
-                    <a:p>
-                      <a:pPr algn="l"/>
-                      <a:r>
-                        <a:rPr lang="en-US" sz="1200" b="1" dirty="0">
-                          <a:solidFill>
-                            <a:srgbClr val="FFFFFF"/>
-                          </a:solidFill>
-                          <a:latin typeface="Avenir Next" panose="020B0503020202020204" pitchFamily="34" charset="0"/>
-                        </a:rPr>
-                        <a:t>S</a:t>
-                      </a:r>
-                      <a:r>
-                        <a:rPr sz="1200" b="1" dirty="0">
-                          <a:solidFill>
-                            <a:srgbClr val="FFFFFF"/>
-                          </a:solidFill>
-                          <a:latin typeface="Avenir Next" panose="020B0503020202020204" pitchFamily="34" charset="0"/>
-                        </a:rPr>
-                        <a:t>hort </a:t>
-                      </a:r>
-                      <a:r>
-                        <a:rPr lang="en-US" sz="1200" b="1" dirty="0">
-                          <a:solidFill>
-                            <a:srgbClr val="FFFFFF"/>
-                          </a:solidFill>
-                          <a:latin typeface="Avenir Next" panose="020B0503020202020204" pitchFamily="34" charset="0"/>
-                        </a:rPr>
-                        <a:t>A</a:t>
-                      </a:r>
-                      <a:r>
-                        <a:rPr sz="1200" b="1" dirty="0">
-                          <a:solidFill>
-                            <a:srgbClr val="FFFFFF"/>
-                          </a:solidFill>
-                          <a:latin typeface="Avenir Next" panose="020B0503020202020204" pitchFamily="34" charset="0"/>
-                        </a:rPr>
-                        <a:t>nswer</a:t>
-                      </a:r>
-                    </a:p>
-                  </a:txBody>
-                  <a:tcPr marL="73152" marR="73152" marT="36576" marB="36576" anchor="ctr">
-                    <a:solidFill>
-                      <a:srgbClr val="173F35"/>
-                    </a:solidFill>
-                  </a:tcPr>
-                </a:tc>
-                <a:extLst>
-                  <a:ext uri="{0D108BD9-81ED-4DB2-BD59-A6C34878D82A}">
-                    <a16:rowId xmlns:a16="http://schemas.microsoft.com/office/drawing/2014/main" val="10000"/>
-                  </a:ext>
-                </a:extLst>
-              </a:tr>
-              <a:tr h="720853">
-                <a:tc>
-                  <a:txBody>
-                    <a:bodyPr/>
-                    <a:lstStyle/>
-                    <a:p>
-                      <a:r>
-                        <a:rPr sz="1200" b="1">
-                          <a:latin typeface="Avenir Next" panose="020B0503020202020204" pitchFamily="34" charset="0"/>
-                        </a:rPr>
-                        <a:t>1</a:t>
-                      </a:r>
-                    </a:p>
-                  </a:txBody>
-                  <a:tcPr marL="36576" marR="36576" anchor="ctr">
-                    <a:solidFill>
-                      <a:srgbClr val="FFF6EA"/>
-                    </a:solidFill>
-                  </a:tcPr>
-                </a:tc>
-                <a:tc>
-                  <a:txBody>
-                    <a:bodyPr/>
-                    <a:lstStyle/>
-                    <a:p>
-                      <a:r>
-                        <a:rPr sz="1200" dirty="0">
-                          <a:latin typeface="Avenir Next" panose="020B0503020202020204" pitchFamily="34" charset="0"/>
-                        </a:rPr>
-                        <a:t>What is greenwashing, how has it evolved and what are its consequences?</a:t>
-                      </a:r>
-                    </a:p>
-                  </a:txBody>
-                  <a:tcPr marL="73152" marR="73152" marT="36576" marB="36576" anchor="ctr">
-                    <a:solidFill>
-                      <a:srgbClr val="FFF6EA"/>
-                    </a:solidFill>
-                  </a:tcPr>
-                </a:tc>
-                <a:tc>
-                  <a:txBody>
-                    <a:bodyPr/>
-                    <a:lstStyle/>
-                    <a:p>
-                      <a:r>
-                        <a:rPr sz="1200" b="1">
-                          <a:latin typeface="Avenir Next" panose="020B0503020202020204" pitchFamily="34" charset="0"/>
-                        </a:rPr>
-                        <a:t>Chapter 2</a:t>
-                      </a:r>
-                    </a:p>
-                  </a:txBody>
-                  <a:tcPr marL="73152" marR="73152" marT="36576" marB="36576" anchor="ctr">
-                    <a:solidFill>
-                      <a:srgbClr val="FFF6EA"/>
-                    </a:solidFill>
-                  </a:tcPr>
-                </a:tc>
-                <a:tc>
-                  <a:txBody>
-                    <a:bodyPr/>
-                    <a:lstStyle/>
-                    <a:p>
-                      <a:r>
-                        <a:rPr sz="1200">
-                          <a:latin typeface="Avenir Next" panose="020B0503020202020204" pitchFamily="34" charset="0"/>
-                        </a:rPr>
-                        <a:t>Moved from product labels to corporate ESG balance sheets—misdirecting investments, slowing climate action, and breaking public trust.</a:t>
-                      </a:r>
-                    </a:p>
-                  </a:txBody>
-                  <a:tcPr marL="73152" marR="73152" marT="36576" marB="36576" anchor="ctr">
-                    <a:solidFill>
-                      <a:srgbClr val="FFF6EA"/>
-                    </a:solidFill>
-                  </a:tcPr>
-                </a:tc>
-                <a:extLst>
-                  <a:ext uri="{0D108BD9-81ED-4DB2-BD59-A6C34878D82A}">
-                    <a16:rowId xmlns:a16="http://schemas.microsoft.com/office/drawing/2014/main" val="10001"/>
-                  </a:ext>
-                </a:extLst>
-              </a:tr>
-              <a:tr h="720853">
-                <a:tc>
-                  <a:txBody>
-                    <a:bodyPr/>
-                    <a:lstStyle/>
-                    <a:p>
-                      <a:r>
-                        <a:rPr sz="1200" b="1">
-                          <a:latin typeface="Avenir Next" panose="020B0503020202020204" pitchFamily="34" charset="0"/>
-                        </a:rPr>
-                        <a:t>2</a:t>
-                      </a:r>
-                    </a:p>
-                  </a:txBody>
-                  <a:tcPr marL="36576" marR="36576" anchor="ctr">
-                    <a:solidFill>
-                      <a:srgbClr val="E8EFE6"/>
-                    </a:solidFill>
-                  </a:tcPr>
-                </a:tc>
-                <a:tc>
-                  <a:txBody>
-                    <a:bodyPr/>
-                    <a:lstStyle/>
-                    <a:p>
-                      <a:r>
-                        <a:rPr sz="1200" dirty="0">
-                          <a:latin typeface="Avenir Next" panose="020B0503020202020204" pitchFamily="34" charset="0"/>
-                        </a:rPr>
-                        <a:t>What are the structural limitations of consumer protection and advertising law in addressing greenwashing and what legal pathways exist through corporate governance?</a:t>
-                      </a:r>
-                    </a:p>
-                  </a:txBody>
-                  <a:tcPr marL="73152" marR="73152" marT="36576" marB="36576" anchor="ctr">
-                    <a:solidFill>
-                      <a:srgbClr val="E8EFE6"/>
-                    </a:solidFill>
-                  </a:tcPr>
-                </a:tc>
-                <a:tc>
-                  <a:txBody>
-                    <a:bodyPr/>
-                    <a:lstStyle/>
-                    <a:p>
-                      <a:r>
-                        <a:rPr sz="1200" b="1" dirty="0">
-                          <a:latin typeface="Avenir Next" panose="020B0503020202020204" pitchFamily="34" charset="0"/>
-                        </a:rPr>
-                        <a:t>Chapter 2, Chapter 5</a:t>
-                      </a:r>
-                    </a:p>
-                  </a:txBody>
-                  <a:tcPr marL="73152" marR="73152" marT="36576" marB="36576" anchor="ctr">
-                    <a:solidFill>
-                      <a:srgbClr val="E8EFE6"/>
-                    </a:solidFill>
-                  </a:tcPr>
-                </a:tc>
-                <a:tc>
-                  <a:txBody>
-                    <a:bodyPr/>
-                    <a:lstStyle/>
-                    <a:p>
-                      <a:r>
-                        <a:rPr sz="1200" dirty="0">
-                          <a:latin typeface="Avenir Next" panose="020B0503020202020204" pitchFamily="34" charset="0"/>
-                        </a:rPr>
-                        <a:t>Consumer law only reacts after publication; corporate governance fixes the boardroom systems and verified data before claims are made.</a:t>
-                      </a:r>
-                    </a:p>
-                  </a:txBody>
-                  <a:tcPr marL="73152" marR="73152" marT="36576" marB="36576" anchor="ctr">
-                    <a:solidFill>
-                      <a:srgbClr val="E8EFE6"/>
-                    </a:solidFill>
-                  </a:tcPr>
-                </a:tc>
-                <a:extLst>
-                  <a:ext uri="{0D108BD9-81ED-4DB2-BD59-A6C34878D82A}">
-                    <a16:rowId xmlns:a16="http://schemas.microsoft.com/office/drawing/2014/main" val="10002"/>
-                  </a:ext>
-                </a:extLst>
-              </a:tr>
-              <a:tr h="720853">
-                <a:tc>
-                  <a:txBody>
-                    <a:bodyPr/>
-                    <a:lstStyle/>
-                    <a:p>
-                      <a:r>
-                        <a:rPr sz="1200" b="1">
-                          <a:latin typeface="Avenir Next" panose="020B0503020202020204" pitchFamily="34" charset="0"/>
-                        </a:rPr>
-                        <a:t>3</a:t>
-                      </a:r>
-                    </a:p>
-                  </a:txBody>
-                  <a:tcPr marL="36576" marR="36576" anchor="ctr">
-                    <a:solidFill>
-                      <a:srgbClr val="FFF6EA"/>
-                    </a:solidFill>
-                  </a:tcPr>
-                </a:tc>
-                <a:tc>
-                  <a:txBody>
-                    <a:bodyPr/>
-                    <a:lstStyle/>
-                    <a:p>
-                      <a:r>
-                        <a:rPr sz="1200">
-                          <a:latin typeface="Avenir Next" panose="020B0503020202020204" pitchFamily="34" charset="0"/>
-                        </a:rPr>
-                        <a:t>What are the jurisprudential foundations of corporate responsibility that justify treating greenwashing as a failure of corporate accountability?</a:t>
-                      </a:r>
-                    </a:p>
-                  </a:txBody>
-                  <a:tcPr marL="73152" marR="73152" marT="36576" marB="36576" anchor="ctr">
-                    <a:solidFill>
-                      <a:srgbClr val="FFF6EA"/>
-                    </a:solidFill>
-                  </a:tcPr>
-                </a:tc>
-                <a:tc>
-                  <a:txBody>
-                    <a:bodyPr/>
-                    <a:lstStyle/>
-                    <a:p>
-                      <a:r>
-                        <a:rPr sz="1200" b="1">
-                          <a:latin typeface="Avenir Next" panose="020B0503020202020204" pitchFamily="34" charset="0"/>
-                        </a:rPr>
-                        <a:t>Chapter 3</a:t>
-                      </a:r>
-                    </a:p>
-                  </a:txBody>
-                  <a:tcPr marL="73152" marR="73152" marT="36576" marB="36576" anchor="ctr">
-                    <a:solidFill>
-                      <a:srgbClr val="FFF6EA"/>
-                    </a:solidFill>
-                  </a:tcPr>
-                </a:tc>
-                <a:tc>
-                  <a:txBody>
-                    <a:bodyPr/>
-                    <a:lstStyle/>
-                    <a:p>
-                      <a:r>
-                        <a:rPr sz="1200" dirty="0">
-                          <a:latin typeface="Avenir Next" panose="020B0503020202020204" pitchFamily="34" charset="0"/>
-                        </a:rPr>
-                        <a:t>Through Hohfeldian analysis, greenwashing is a broken duty, an abuse of communication freedom, and an exploitation of information asymmetry.</a:t>
-                      </a:r>
-                    </a:p>
-                  </a:txBody>
-                  <a:tcPr marL="73152" marR="73152" marT="36576" marB="36576" anchor="ctr">
-                    <a:solidFill>
-                      <a:srgbClr val="FFF6EA"/>
-                    </a:solidFill>
-                  </a:tcPr>
-                </a:tc>
-                <a:extLst>
-                  <a:ext uri="{0D108BD9-81ED-4DB2-BD59-A6C34878D82A}">
-                    <a16:rowId xmlns:a16="http://schemas.microsoft.com/office/drawing/2014/main" val="10003"/>
-                  </a:ext>
-                </a:extLst>
-              </a:tr>
-              <a:tr h="720853">
-                <a:tc>
-                  <a:txBody>
-                    <a:bodyPr/>
-                    <a:lstStyle/>
-                    <a:p>
-                      <a:r>
-                        <a:rPr sz="1200" b="1" dirty="0">
-                          <a:latin typeface="Avenir Next" panose="020B0503020202020204" pitchFamily="34" charset="0"/>
-                        </a:rPr>
-                        <a:t>4</a:t>
-                      </a:r>
-                    </a:p>
-                  </a:txBody>
-                  <a:tcPr marL="36576" marR="36576" anchor="ctr">
-                    <a:solidFill>
-                      <a:srgbClr val="E8EFE6"/>
-                    </a:solidFill>
-                  </a:tcPr>
-                </a:tc>
-                <a:tc>
-                  <a:txBody>
-                    <a:bodyPr/>
-                    <a:lstStyle/>
-                    <a:p>
-                      <a:r>
-                        <a:rPr sz="1200" dirty="0">
-                          <a:latin typeface="Avenir Next" panose="020B0503020202020204" pitchFamily="34" charset="0"/>
-                        </a:rPr>
-                        <a:t>What duties of directors, disclosure obligations and assurance requirements, under Indian company and securities law, can ground liability for misleading environmental claims?</a:t>
-                      </a:r>
-                    </a:p>
-                  </a:txBody>
-                  <a:tcPr marL="73152" marR="73152" marT="36576" marB="36576" anchor="ctr">
-                    <a:solidFill>
-                      <a:srgbClr val="E8EFE6"/>
-                    </a:solidFill>
-                  </a:tcPr>
-                </a:tc>
-                <a:tc>
-                  <a:txBody>
-                    <a:bodyPr/>
-                    <a:lstStyle/>
-                    <a:p>
-                      <a:r>
-                        <a:rPr sz="1200" b="1">
-                          <a:latin typeface="Avenir Next" panose="020B0503020202020204" pitchFamily="34" charset="0"/>
-                        </a:rPr>
-                        <a:t>Chapter 3, Chapter 5</a:t>
-                      </a:r>
-                    </a:p>
-                  </a:txBody>
-                  <a:tcPr marL="73152" marR="73152" marT="36576" marB="36576" anchor="ctr">
-                    <a:solidFill>
-                      <a:srgbClr val="E8EFE6"/>
-                    </a:solidFill>
-                  </a:tcPr>
-                </a:tc>
-                <a:tc>
-                  <a:txBody>
-                    <a:bodyPr/>
-                    <a:lstStyle/>
-                    <a:p>
-                      <a:r>
-                        <a:rPr sz="1200" dirty="0">
-                          <a:latin typeface="Avenir Next" panose="020B0503020202020204" pitchFamily="34" charset="0"/>
-                        </a:rPr>
-                        <a:t>Section 166(2) and BRSR Core provide the foundation, but are blocked by narrow standing, tiny fines, and delayed audits.</a:t>
-                      </a:r>
-                    </a:p>
-                  </a:txBody>
-                  <a:tcPr marL="73152" marR="73152" marT="36576" marB="36576" anchor="ctr">
-                    <a:solidFill>
-                      <a:srgbClr val="E8EFE6"/>
-                    </a:solidFill>
-                  </a:tcPr>
-                </a:tc>
-                <a:extLst>
-                  <a:ext uri="{0D108BD9-81ED-4DB2-BD59-A6C34878D82A}">
-                    <a16:rowId xmlns:a16="http://schemas.microsoft.com/office/drawing/2014/main" val="10004"/>
-                  </a:ext>
-                </a:extLst>
-              </a:tr>
-              <a:tr h="720853">
-                <a:tc>
-                  <a:txBody>
-                    <a:bodyPr/>
-                    <a:lstStyle/>
-                    <a:p>
-                      <a:r>
-                        <a:rPr sz="1200" b="1">
-                          <a:latin typeface="Avenir Next" panose="020B0503020202020204" pitchFamily="34" charset="0"/>
-                        </a:rPr>
-                        <a:t>5</a:t>
-                      </a:r>
-                    </a:p>
-                  </a:txBody>
-                  <a:tcPr marL="36576" marR="36576" anchor="ctr">
-                    <a:solidFill>
-                      <a:srgbClr val="FFF6EA"/>
-                    </a:solidFill>
-                  </a:tcPr>
-                </a:tc>
-                <a:tc>
-                  <a:txBody>
-                    <a:bodyPr/>
-                    <a:lstStyle/>
-                    <a:p>
-                      <a:r>
-                        <a:rPr sz="1200">
-                          <a:latin typeface="Avenir Next" panose="020B0503020202020204" pitchFamily="34" charset="0"/>
-                        </a:rPr>
-                        <a:t>What comparative regulatory models and enforcement techniques have emerged in other jurisdictions to control greenwashing and what design lessons do they offer?</a:t>
-                      </a:r>
-                    </a:p>
-                  </a:txBody>
-                  <a:tcPr marL="73152" marR="73152" marT="36576" marB="36576" anchor="ctr">
-                    <a:solidFill>
-                      <a:srgbClr val="FFF6EA"/>
-                    </a:solidFill>
-                  </a:tcPr>
-                </a:tc>
-                <a:tc>
-                  <a:txBody>
-                    <a:bodyPr/>
-                    <a:lstStyle/>
-                    <a:p>
-                      <a:r>
-                        <a:rPr sz="1200" b="1">
-                          <a:latin typeface="Avenir Next" panose="020B0503020202020204" pitchFamily="34" charset="0"/>
-                        </a:rPr>
-                        <a:t>Chapter 4</a:t>
-                      </a:r>
-                    </a:p>
-                  </a:txBody>
-                  <a:tcPr marL="73152" marR="73152" marT="36576" marB="36576" anchor="ctr">
-                    <a:solidFill>
-                      <a:srgbClr val="FFF6EA"/>
-                    </a:solidFill>
-                  </a:tcPr>
-                </a:tc>
-                <a:tc>
-                  <a:txBody>
-                    <a:bodyPr/>
-                    <a:lstStyle/>
-                    <a:p>
-                      <a:r>
-                        <a:rPr sz="1200" dirty="0">
-                          <a:latin typeface="Avenir Next" panose="020B0503020202020204" pitchFamily="34" charset="0"/>
-                        </a:rPr>
-                        <a:t>10 core levers: pre-publication proof, mandatory audits, connected regulators, and turnover-linked penalties.</a:t>
-                      </a:r>
-                    </a:p>
-                  </a:txBody>
-                  <a:tcPr marL="73152" marR="73152" marT="36576" marB="36576" anchor="ctr">
-                    <a:solidFill>
-                      <a:srgbClr val="FFF6EA"/>
-                    </a:solidFill>
-                  </a:tcPr>
-                </a:tc>
-                <a:extLst>
-                  <a:ext uri="{0D108BD9-81ED-4DB2-BD59-A6C34878D82A}">
-                    <a16:rowId xmlns:a16="http://schemas.microsoft.com/office/drawing/2014/main" val="10005"/>
-                  </a:ext>
-                </a:extLst>
-              </a:tr>
-              <a:tr h="720853">
-                <a:tc>
-                  <a:txBody>
-                    <a:bodyPr/>
-                    <a:lstStyle/>
-                    <a:p>
-                      <a:r>
-                        <a:rPr sz="1200" b="1">
-                          <a:latin typeface="Avenir Next" panose="020B0503020202020204" pitchFamily="34" charset="0"/>
-                        </a:rPr>
-                        <a:t>6</a:t>
-                      </a:r>
-                    </a:p>
-                  </a:txBody>
-                  <a:tcPr marL="36576" marR="36576" anchor="ctr">
-                    <a:solidFill>
-                      <a:srgbClr val="E8EFE6"/>
-                    </a:solidFill>
-                  </a:tcPr>
-                </a:tc>
-                <a:tc>
-                  <a:txBody>
-                    <a:bodyPr/>
-                    <a:lstStyle/>
-                    <a:p>
-                      <a:r>
-                        <a:rPr sz="1200">
-                          <a:latin typeface="Avenir Next" panose="020B0503020202020204" pitchFamily="34" charset="0"/>
-                        </a:rPr>
-                        <a:t>How do fragmentation, overlap, weak coordination and limited enforcement in India’s regulatory ecosystem, impede accountability for greenwashing?</a:t>
-                      </a:r>
-                    </a:p>
-                  </a:txBody>
-                  <a:tcPr marL="73152" marR="73152" marT="36576" marB="36576" anchor="ctr">
-                    <a:solidFill>
-                      <a:srgbClr val="E8EFE6"/>
-                    </a:solidFill>
-                  </a:tcPr>
-                </a:tc>
-                <a:tc>
-                  <a:txBody>
-                    <a:bodyPr/>
-                    <a:lstStyle/>
-                    <a:p>
-                      <a:r>
-                        <a:rPr sz="1200" b="1">
-                          <a:latin typeface="Avenir Next" panose="020B0503020202020204" pitchFamily="34" charset="0"/>
-                        </a:rPr>
-                        <a:t>Chapter 5</a:t>
-                      </a:r>
-                    </a:p>
-                  </a:txBody>
-                  <a:tcPr marL="73152" marR="73152" marT="36576" marB="36576" anchor="ctr">
-                    <a:solidFill>
-                      <a:srgbClr val="E8EFE6"/>
-                    </a:solidFill>
-                  </a:tcPr>
-                </a:tc>
-                <a:tc>
-                  <a:txBody>
-                    <a:bodyPr/>
-                    <a:lstStyle/>
-                    <a:p>
-                      <a:r>
-                        <a:rPr sz="1200" dirty="0">
-                          <a:latin typeface="Avenir Next" panose="020B0503020202020204" pitchFamily="34" charset="0"/>
-                        </a:rPr>
-                        <a:t>5 structural flaws: disconnected definitions, regulatory clutter, diluted auditing, slow reactive policing, and cheap penalties.</a:t>
-                      </a:r>
-                    </a:p>
-                  </a:txBody>
-                  <a:tcPr marL="73152" marR="73152" marT="36576" marB="36576" anchor="ctr">
-                    <a:solidFill>
-                      <a:srgbClr val="E8EFE6"/>
-                    </a:solidFill>
-                  </a:tcPr>
-                </a:tc>
-                <a:extLst>
-                  <a:ext uri="{0D108BD9-81ED-4DB2-BD59-A6C34878D82A}">
-                    <a16:rowId xmlns:a16="http://schemas.microsoft.com/office/drawing/2014/main" val="10006"/>
-                  </a:ext>
-                </a:extLst>
-              </a:tr>
-              <a:tr h="848903">
-                <a:tc>
-                  <a:txBody>
-                    <a:bodyPr/>
-                    <a:lstStyle/>
-                    <a:p>
-                      <a:r>
-                        <a:rPr sz="1200" b="1">
-                          <a:latin typeface="Avenir Next" panose="020B0503020202020204" pitchFamily="34" charset="0"/>
-                        </a:rPr>
-                        <a:t>7</a:t>
-                      </a:r>
-                    </a:p>
-                  </a:txBody>
-                  <a:tcPr marL="36576" marR="36576" anchor="ctr">
-                    <a:solidFill>
-                      <a:srgbClr val="FFF6EA"/>
-                    </a:solidFill>
-                  </a:tcPr>
-                </a:tc>
-                <a:tc>
-                  <a:txBody>
-                    <a:bodyPr/>
-                    <a:lstStyle/>
-                    <a:p>
-                      <a:r>
-                        <a:rPr sz="1200">
-                          <a:latin typeface="Avenir Next" panose="020B0503020202020204" pitchFamily="34" charset="0"/>
-                        </a:rPr>
-                        <a:t>What legal and policy recommendations can create an integrated liability framework that holds corporations accountable for misleading environmental claims?</a:t>
-                      </a:r>
-                    </a:p>
-                  </a:txBody>
-                  <a:tcPr marL="73152" marR="73152" marT="36576" marB="36576" anchor="ctr">
-                    <a:solidFill>
-                      <a:srgbClr val="FFF6EA"/>
-                    </a:solidFill>
-                  </a:tcPr>
-                </a:tc>
-                <a:tc>
-                  <a:txBody>
-                    <a:bodyPr/>
-                    <a:lstStyle/>
-                    <a:p>
-                      <a:r>
-                        <a:rPr sz="1200" b="1" dirty="0">
-                          <a:latin typeface="Avenir Next" panose="020B0503020202020204" pitchFamily="34" charset="0"/>
-                        </a:rPr>
-                        <a:t>Chapter 6</a:t>
-                      </a:r>
-                    </a:p>
-                  </a:txBody>
-                  <a:tcPr marL="73152" marR="73152" marT="36576" marB="36576" anchor="ctr">
-                    <a:solidFill>
-                      <a:srgbClr val="FFF6EA"/>
-                    </a:solidFill>
-                  </a:tcPr>
-                </a:tc>
-                <a:tc>
-                  <a:txBody>
-                    <a:bodyPr/>
-                    <a:lstStyle/>
-                    <a:p>
-                      <a:r>
-                        <a:rPr sz="1200" dirty="0">
-                          <a:latin typeface="Avenir Next" panose="020B0503020202020204" pitchFamily="34" charset="0"/>
-                        </a:rPr>
-                        <a:t>A sequenced 3-statute framework: verify before publishing, audit independently, share cases automatically, and link fines to turnover.</a:t>
-                      </a:r>
-                    </a:p>
-                  </a:txBody>
-                  <a:tcPr marL="73152" marR="73152" marT="36576" marB="36576" anchor="ctr">
-                    <a:solidFill>
-                      <a:srgbClr val="FFF6EA"/>
-                    </a:solidFill>
-                  </a:tcPr>
-                </a:tc>
-                <a:extLst>
-                  <a:ext uri="{0D108BD9-81ED-4DB2-BD59-A6C34878D82A}">
-                    <a16:rowId xmlns:a16="http://schemas.microsoft.com/office/drawing/2014/main" val="10007"/>
-                  </a:ext>
-                </a:extLst>
-              </a:tr>
-            </a:tbl>
-          </a:graphicData>
-        </a:graphic>
-      </p:graphicFrame>
     </p:spTree>
     <p:extLst>
       <p:ext uri="{BB962C8B-B14F-4D97-AF65-F5344CB8AC3E}">
-        <p14:creationId xmlns:p14="http://schemas.microsoft.com/office/powerpoint/2010/main" val="3047954273"/>
+        <p14:creationId xmlns:p14="http://schemas.microsoft.com/office/powerpoint/2010/main" val="511364848"/>
       </p:ext>
     </p:extLst>
   </p:cSld>
@@ -17438,7 +17872,7 @@
       </p:grpSpPr>
       <p:sp>
         <p:nvSpPr>
-          <p:cNvPr id="2" name="Rectangle 1"/>
+          <p:cNvPr id="3" name="Rectangle 2"/>
           <p:cNvSpPr/>
           <p:nvPr/>
         </p:nvSpPr>
@@ -17482,14 +17916,14 @@
       </p:sp>
       <p:sp>
         <p:nvSpPr>
-          <p:cNvPr id="3" name="TextBox 2"/>
+          <p:cNvPr id="4" name="TextBox 3"/>
           <p:cNvSpPr txBox="1"/>
           <p:nvPr/>
         </p:nvSpPr>
         <p:spPr>
           <a:xfrm>
-            <a:off x="548639" y="340000"/>
-            <a:ext cx="9500000" cy="430887"/>
+            <a:off x="548639" y="384048"/>
+            <a:ext cx="9380971" cy="584775"/>
           </a:xfrm>
           <a:prstGeom prst="rect">
             <a:avLst/>
@@ -17497,13 +17931,13 @@
           <a:noFill/>
         </p:spPr>
         <p:txBody>
-          <a:bodyPr wrap="square" lIns="0" tIns="0" rIns="0" bIns="0">
+          <a:bodyPr wrap="square">
             <a:spAutoFit/>
           </a:bodyPr>
           <a:lstStyle/>
           <a:p>
             <a:pPr>
-              <a:defRPr sz="2500" b="1">
+              <a:defRPr sz="2200" b="1">
                 <a:solidFill>
                   <a:srgbClr val="173F35"/>
                 </a:solidFill>
@@ -17511,89 +17945,39 @@
               </a:defRPr>
             </a:pPr>
             <a:r>
-              <a:rPr sz="2800" dirty="0"/>
-              <a:t>Testing of Hypotheses</a:t>
-            </a:r>
-          </a:p>
-        </p:txBody>
-      </p:sp>
-      <p:sp>
-        <p:nvSpPr>
-          <p:cNvPr id="4" name="TextBox 3"/>
-          <p:cNvSpPr txBox="1"/>
-          <p:nvPr/>
-        </p:nvSpPr>
-        <p:spPr>
-          <a:xfrm>
-            <a:off x="548639" y="860000"/>
-            <a:ext cx="11094722" cy="215444"/>
-          </a:xfrm>
-          <a:prstGeom prst="rect">
-            <a:avLst/>
-          </a:prstGeom>
-          <a:noFill/>
-        </p:spPr>
-        <p:txBody>
-          <a:bodyPr wrap="square" lIns="0" tIns="0" rIns="0" bIns="0">
-            <a:spAutoFit/>
-          </a:bodyPr>
-          <a:lstStyle/>
-          <a:p>
-            <a:r>
-              <a:rPr sz="1400" b="1" dirty="0">
-                <a:solidFill>
-                  <a:srgbClr val="173F35"/>
-                </a:solidFill>
-                <a:latin typeface="Avenir Next" panose="020B0503020202020204" pitchFamily="34" charset="0"/>
-              </a:rPr>
-              <a:t>Doctrinal &amp; </a:t>
-            </a:r>
-            <a:r>
-              <a:rPr lang="en-IN" sz="1400" b="1" dirty="0">
-                <a:solidFill>
-                  <a:srgbClr val="173F35"/>
-                </a:solidFill>
-                <a:latin typeface="Avenir Next" panose="020B0503020202020204" pitchFamily="34" charset="0"/>
-              </a:rPr>
-              <a:t>Analytical </a:t>
-            </a:r>
-            <a:r>
-              <a:rPr sz="1400" b="1" dirty="0">
-                <a:solidFill>
-                  <a:srgbClr val="173F35"/>
-                </a:solidFill>
-                <a:latin typeface="Avenir Next" panose="020B0503020202020204" pitchFamily="34" charset="0"/>
-              </a:rPr>
-              <a:t>Validity-Check</a:t>
-            </a:r>
-            <a:r>
-              <a:rPr lang="en-US" sz="1400" b="1" dirty="0">
-                <a:solidFill>
-                  <a:srgbClr val="173F35"/>
-                </a:solidFill>
-                <a:latin typeface="Avenir Next" panose="020B0503020202020204" pitchFamily="34" charset="0"/>
-              </a:rPr>
-              <a:t>s</a:t>
-            </a:r>
-            <a:endParaRPr sz="1400" dirty="0">
-              <a:solidFill>
-                <a:srgbClr val="6B6F6A"/>
-              </a:solidFill>
-              <a:latin typeface="Avenir Next" panose="020B0503020202020204" pitchFamily="34" charset="0"/>
-            </a:endParaRPr>
-          </a:p>
-        </p:txBody>
-      </p:sp>
-      <p:sp>
-        <p:nvSpPr>
-          <p:cNvPr id="5" name="Rounded Rectangle 4"/>
+              <a:rPr lang="en-US" sz="3200" dirty="0"/>
+              <a:t>Specific </a:t>
+            </a:r>
+            <a:r>
+              <a:rPr sz="3200" dirty="0"/>
+              <a:t>Recommendations</a:t>
+            </a:r>
+            <a:r>
+              <a:rPr lang="en-US" sz="3200" dirty="0"/>
+              <a:t> for</a:t>
+            </a:r>
+            <a:r>
+              <a:rPr sz="3200" dirty="0"/>
+              <a:t> Legal Refor</a:t>
+            </a:r>
+            <a:r>
+              <a:rPr lang="en-US" sz="3200" dirty="0"/>
+              <a:t>m</a:t>
+            </a:r>
+            <a:endParaRPr sz="3200" dirty="0"/>
+          </a:p>
+        </p:txBody>
+      </p:sp>
+      <p:sp>
+        <p:nvSpPr>
+          <p:cNvPr id="6" name="Rounded Rectangle 5"/>
           <p:cNvSpPr/>
           <p:nvPr/>
         </p:nvSpPr>
         <p:spPr>
           <a:xfrm>
-            <a:off x="400433" y="1150000"/>
-            <a:ext cx="3683771" cy="4848000"/>
+            <a:off x="652690" y="1474623"/>
+            <a:ext cx="3300984" cy="4023360"/>
           </a:xfrm>
           <a:prstGeom prst="roundRect">
             <a:avLst/>
@@ -17634,14 +18018,14 @@
       </p:sp>
       <p:sp>
         <p:nvSpPr>
-          <p:cNvPr id="6" name="Rectangle 5"/>
+          <p:cNvPr id="7" name="Rectangle 6"/>
           <p:cNvSpPr/>
           <p:nvPr/>
         </p:nvSpPr>
         <p:spPr>
           <a:xfrm>
-            <a:off x="463498" y="1156935"/>
-            <a:ext cx="3547872" cy="76267"/>
+            <a:off x="652690" y="1474623"/>
+            <a:ext cx="3255264" cy="73152"/>
           </a:xfrm>
           <a:prstGeom prst="rect">
             <a:avLst/>
@@ -17680,14 +18064,14 @@
       </p:sp>
       <p:sp>
         <p:nvSpPr>
-          <p:cNvPr id="7" name="TextBox 6"/>
+          <p:cNvPr id="8" name="TextBox 7"/>
           <p:cNvSpPr txBox="1"/>
           <p:nvPr/>
         </p:nvSpPr>
         <p:spPr>
           <a:xfrm>
-            <a:off x="653652" y="1350000"/>
-            <a:ext cx="3154654" cy="1077218"/>
+            <a:off x="798994" y="1659789"/>
+            <a:ext cx="3255264" cy="338554"/>
           </a:xfrm>
           <a:prstGeom prst="rect">
             <a:avLst/>
@@ -17695,58 +18079,38 @@
           <a:noFill/>
         </p:spPr>
         <p:txBody>
-          <a:bodyPr wrap="square" lIns="0" tIns="0" rIns="0" bIns="0">
+          <a:bodyPr wrap="square" anchor="t">
             <a:spAutoFit/>
           </a:bodyPr>
           <a:lstStyle/>
           <a:p>
-            <a:pPr>
-              <a:spcAft>
-                <a:spcPts val="200"/>
-              </a:spcAft>
-              <a:defRPr sz="1100" b="1">
-                <a:solidFill>
-                  <a:srgbClr val="12402D"/>
-                </a:solidFill>
-              </a:defRPr>
-            </a:pPr>
-            <a:r>
-              <a:rPr sz="1400" dirty="0">
-                <a:latin typeface="Avenir Next" panose="020B0503020202020204" pitchFamily="34" charset="0"/>
-              </a:rPr>
-              <a:t>H₁: "Greenwashing in India is primarily a consequence of weak corporate governance and the limited </a:t>
-            </a:r>
-            <a:r>
-              <a:rPr sz="1400" dirty="0" err="1">
-                <a:latin typeface="Avenir Next" panose="020B0503020202020204" pitchFamily="34" charset="0"/>
-              </a:rPr>
-              <a:t>operationalisation</a:t>
-            </a:r>
-            <a:r>
-              <a:rPr sz="1400" dirty="0">
-                <a:latin typeface="Avenir Next" panose="020B0503020202020204" pitchFamily="34" charset="0"/>
-              </a:rPr>
-              <a:t> of board-level environmental responsibility."</a:t>
-            </a:r>
-            <a:endParaRPr sz="1400" b="1" dirty="0">
-              <a:solidFill>
-                <a:srgbClr val="173F35"/>
-              </a:solidFill>
-              <a:latin typeface="Avenir Next" panose="020B0503020202020204" pitchFamily="34" charset="0"/>
-            </a:endParaRPr>
-          </a:p>
-        </p:txBody>
-      </p:sp>
-      <p:sp>
-        <p:nvSpPr>
-          <p:cNvPr id="8" name="TextBox 7"/>
+            <a:pPr algn="l">
+              <a:defRPr sz="1600" b="1">
+                <a:solidFill>
+                  <a:srgbClr val="173F35"/>
+                </a:solidFill>
+                <a:latin typeface="Avenir Next Demi Bold"/>
+              </a:defRPr>
+            </a:pPr>
+            <a:r>
+              <a:rPr sz="1600" dirty="0">
+                <a:latin typeface="Avenir Next" panose="020B0503020202020204" pitchFamily="34" charset="0"/>
+              </a:rPr>
+              <a:t>Companies Act / MCA</a:t>
+            </a:r>
+          </a:p>
+        </p:txBody>
+      </p:sp>
+      <p:sp>
+        <p:nvSpPr>
+          <p:cNvPr id="9" name="TextBox 8"/>
           <p:cNvSpPr txBox="1"/>
           <p:nvPr/>
         </p:nvSpPr>
         <p:spPr>
           <a:xfrm>
-            <a:off x="653650" y="2564300"/>
-            <a:ext cx="3154654" cy="3070071"/>
+            <a:off x="762418" y="2061088"/>
+            <a:ext cx="3255264" cy="3421706"/>
           </a:xfrm>
           <a:prstGeom prst="rect">
             <a:avLst/>
@@ -17754,209 +18118,150 @@
           <a:noFill/>
         </p:spPr>
         <p:txBody>
-          <a:bodyPr wrap="square" lIns="0" tIns="0" rIns="0" bIns="0">
+          <a:bodyPr wrap="square" anchor="t">
             <a:spAutoFit/>
           </a:bodyPr>
           <a:lstStyle/>
           <a:p>
             <a:pPr>
-              <a:spcBef>
-                <a:spcPts val="300"/>
-              </a:spcBef>
+              <a:lnSpc>
+                <a:spcPct val="105000"/>
+              </a:lnSpc>
               <a:spcAft>
-                <a:spcPts val="400"/>
+                <a:spcPts val="600"/>
               </a:spcAft>
             </a:pPr>
             <a:r>
-              <a:rPr sz="1300" b="1" dirty="0">
-                <a:solidFill>
-                  <a:srgbClr val="22704E"/>
-                </a:solidFill>
-                <a:latin typeface="Avenir Next" panose="020B0503020202020204" pitchFamily="34" charset="0"/>
-              </a:rPr>
-              <a:t>1. Scope: </a:t>
-            </a:r>
-            <a:r>
-              <a:rPr lang="en-IN" sz="1300" dirty="0">
-                <a:solidFill>
-                  <a:srgbClr val="2A2A2A"/>
-                </a:solidFill>
-                <a:latin typeface="Avenir Next" panose="020B0503020202020204" pitchFamily="34" charset="0"/>
-              </a:rPr>
-              <a:t>Greenwashing scope extends beyond consumer ads into investor-facing disclosures</a:t>
-            </a:r>
-            <a:r>
-              <a:rPr sz="1300" dirty="0">
-                <a:solidFill>
-                  <a:srgbClr val="2D2D2D"/>
-                </a:solidFill>
-                <a:latin typeface="Avenir Next" panose="020B0503020202020204" pitchFamily="34" charset="0"/>
-              </a:rPr>
-              <a:t> </a:t>
-            </a:r>
-            <a:r>
-              <a:rPr lang="en-US" sz="1300" dirty="0">
-                <a:solidFill>
-                  <a:srgbClr val="2D2D2D"/>
-                </a:solidFill>
-                <a:latin typeface="Avenir Next" panose="020B0503020202020204" pitchFamily="34" charset="0"/>
-              </a:rPr>
-              <a:t>(</a:t>
-            </a:r>
-            <a:r>
-              <a:rPr sz="1300" dirty="0">
-                <a:solidFill>
-                  <a:srgbClr val="2D2D2D"/>
-                </a:solidFill>
-                <a:latin typeface="Avenir Next" panose="020B0503020202020204" pitchFamily="34" charset="0"/>
-              </a:rPr>
-              <a:t>BRSR reports, net-zero roadmaps and transition pledges</a:t>
-            </a:r>
-            <a:r>
-              <a:rPr lang="en-US" sz="1300" dirty="0">
-                <a:solidFill>
-                  <a:srgbClr val="2D2D2D"/>
-                </a:solidFill>
-                <a:latin typeface="Avenir Next" panose="020B0503020202020204" pitchFamily="34" charset="0"/>
-              </a:rPr>
-              <a:t>).</a:t>
-            </a:r>
-            <a:endParaRPr sz="1300" dirty="0">
-              <a:solidFill>
-                <a:srgbClr val="2D2D2D"/>
-              </a:solidFill>
-              <a:latin typeface="Avenir Next" panose="020B0503020202020204" pitchFamily="34" charset="0"/>
+              <a:rPr sz="1100" b="1" dirty="0">
+                <a:latin typeface="Avenir Next"/>
+              </a:rPr>
+              <a:t>• Direct Statutory Standing: </a:t>
+            </a:r>
+            <a:r>
+              <a:rPr sz="1100" b="0" dirty="0">
+                <a:latin typeface="Avenir Next"/>
+              </a:rPr>
+              <a:t>Insert</a:t>
+            </a:r>
+            <a:r>
+              <a:rPr lang="en-US" sz="1100" b="0" dirty="0">
+                <a:latin typeface="Avenir Next"/>
+              </a:rPr>
+              <a:t> new</a:t>
+            </a:r>
+            <a:r>
+              <a:rPr sz="1100" b="0" dirty="0">
+                <a:latin typeface="Avenir Next"/>
+              </a:rPr>
+              <a:t> Sec 166(8) empowering affected persons, creditors, and consumer NGOs before NCLT without Sec 244 shareholding caps.</a:t>
+            </a:r>
+          </a:p>
+          <a:p>
+            <a:pPr>
+              <a:lnSpc>
+                <a:spcPct val="105000"/>
+              </a:lnSpc>
+              <a:spcAft>
+                <a:spcPts val="600"/>
+              </a:spcAft>
+            </a:pPr>
+            <a:r>
+              <a:rPr sz="1100" b="1" dirty="0">
+                <a:latin typeface="Avenir Next"/>
+              </a:rPr>
+              <a:t>• Mandatory ESG Committee: </a:t>
+            </a:r>
+            <a:r>
+              <a:rPr sz="1100" b="0" dirty="0">
+                <a:latin typeface="Avenir Next"/>
+              </a:rPr>
+              <a:t>Insert </a:t>
+            </a:r>
+            <a:r>
+              <a:rPr lang="en-US" sz="1100" b="0" dirty="0">
+                <a:latin typeface="Avenir Next"/>
+              </a:rPr>
+              <a:t>new </a:t>
+            </a:r>
+            <a:r>
+              <a:rPr sz="1100" b="0" dirty="0">
+                <a:latin typeface="Avenir Next"/>
+              </a:rPr>
+              <a:t>Sec 135A requiring Board ESG Committee for ex-ante claim pre-approval.</a:t>
+            </a:r>
+          </a:p>
+          <a:p>
+            <a:pPr>
+              <a:lnSpc>
+                <a:spcPct val="105000"/>
+              </a:lnSpc>
+              <a:spcAft>
+                <a:spcPts val="600"/>
+              </a:spcAft>
+            </a:pPr>
+            <a:r>
+              <a:rPr sz="1100" b="1" dirty="0">
+                <a:latin typeface="Avenir Next"/>
+              </a:rPr>
+              <a:t>• Whistleblower Protection: </a:t>
+            </a:r>
+            <a:r>
+              <a:rPr sz="1100" b="0" dirty="0">
+                <a:latin typeface="Avenir Next"/>
+              </a:rPr>
+              <a:t>Amend Sec 177(9) vigil mechanism to explicitly cover environmental misrepresentations under Sec 166(2).</a:t>
+            </a:r>
+            <a:endParaRPr lang="en-US" sz="1100" b="0" dirty="0">
+              <a:latin typeface="Avenir Next"/>
             </a:endParaRPr>
           </a:p>
           <a:p>
             <a:pPr>
-              <a:spcBef>
-                <a:spcPts val="300"/>
-              </a:spcBef>
+              <a:lnSpc>
+                <a:spcPct val="105000"/>
+              </a:lnSpc>
               <a:spcAft>
-                <a:spcPts val="400"/>
+                <a:spcPts val="600"/>
               </a:spcAft>
             </a:pPr>
             <a:r>
-              <a:rPr sz="1300" b="1" dirty="0">
-                <a:solidFill>
-                  <a:srgbClr val="22704E"/>
-                </a:solidFill>
-                <a:latin typeface="Avenir Next" panose="020B0503020202020204" pitchFamily="34" charset="0"/>
-              </a:rPr>
-              <a:t>2. Duty Allocation: </a:t>
-            </a:r>
-            <a:r>
-              <a:rPr sz="1300" dirty="0">
-                <a:solidFill>
-                  <a:srgbClr val="2D2D2D"/>
-                </a:solidFill>
-                <a:latin typeface="Avenir Next" panose="020B0503020202020204" pitchFamily="34" charset="0"/>
-              </a:rPr>
-              <a:t>Consumer rules police ads; corporate governance is the proper anchor for boardroom oversight.</a:t>
+              <a:rPr lang="en-IN" sz="1100" b="1" dirty="0">
+                <a:latin typeface="Avenir Next"/>
+              </a:rPr>
+              <a:t>• Turnover Penalties &amp; Disqualification: </a:t>
+            </a:r>
+            <a:r>
+              <a:rPr lang="en-IN" sz="1100" dirty="0">
+                <a:latin typeface="Avenir Next"/>
+              </a:rPr>
+              <a:t>Amend Sec 166(7) to penalise misleading claims up to 1% turnover (min ₹5 Cr) + up to 3-year Director Disqualification under Sec 164(2)(b).</a:t>
             </a:r>
           </a:p>
           <a:p>
             <a:pPr>
-              <a:spcBef>
-                <a:spcPts val="300"/>
-              </a:spcBef>
+              <a:lnSpc>
+                <a:spcPct val="105000"/>
+              </a:lnSpc>
               <a:spcAft>
-                <a:spcPts val="400"/>
+                <a:spcPts val="600"/>
               </a:spcAft>
             </a:pPr>
-            <a:r>
-              <a:rPr sz="1300" b="1" dirty="0">
-                <a:solidFill>
-                  <a:srgbClr val="22704E"/>
-                </a:solidFill>
-                <a:latin typeface="Avenir Next" panose="020B0503020202020204" pitchFamily="34" charset="0"/>
-              </a:rPr>
-              <a:t>3. </a:t>
-            </a:r>
-            <a:r>
-              <a:rPr lang="en-US" sz="1300" b="1" dirty="0">
-                <a:solidFill>
-                  <a:srgbClr val="22704E"/>
-                </a:solidFill>
-                <a:latin typeface="Avenir Next" panose="020B0503020202020204" pitchFamily="34" charset="0"/>
-              </a:rPr>
-              <a:t>Enforcement </a:t>
-            </a:r>
-            <a:r>
-              <a:rPr sz="1300" b="1" dirty="0">
-                <a:solidFill>
-                  <a:srgbClr val="22704E"/>
-                </a:solidFill>
-                <a:latin typeface="Avenir Next" panose="020B0503020202020204" pitchFamily="34" charset="0"/>
-              </a:rPr>
-              <a:t>Pathway:</a:t>
-            </a:r>
-            <a:r>
-              <a:rPr lang="en-US" sz="1300" b="1" dirty="0">
-                <a:solidFill>
-                  <a:srgbClr val="2D2D2D"/>
-                </a:solidFill>
-                <a:latin typeface="Avenir Next" panose="020B0503020202020204" pitchFamily="34" charset="0"/>
-              </a:rPr>
-              <a:t> </a:t>
-            </a:r>
-            <a:r>
-              <a:rPr lang="en-US" sz="1300" dirty="0">
-                <a:solidFill>
-                  <a:srgbClr val="2D2D2D"/>
-                </a:solidFill>
-                <a:latin typeface="Avenir Next" panose="020B0503020202020204" pitchFamily="34" charset="0"/>
-              </a:rPr>
-              <a:t>Consumer law is reactive and complaint-led; corporate/securities routes reach upstream — board oversight, controls, assurance.</a:t>
-            </a:r>
-            <a:endParaRPr sz="1300" dirty="0">
-              <a:solidFill>
-                <a:srgbClr val="2D2D2D"/>
-              </a:solidFill>
-              <a:latin typeface="Avenir Next" panose="020B0503020202020204" pitchFamily="34" charset="0"/>
+            <a:endParaRPr sz="1100" b="0" dirty="0">
+              <a:latin typeface="Avenir Next"/>
             </a:endParaRPr>
           </a:p>
-          <a:p>
-            <a:pPr>
-              <a:spcBef>
-                <a:spcPts val="300"/>
-              </a:spcBef>
-              <a:spcAft>
-                <a:spcPts val="400"/>
-              </a:spcAft>
-            </a:pPr>
-            <a:r>
-              <a:rPr sz="1300" b="1" dirty="0">
-                <a:solidFill>
-                  <a:srgbClr val="22704E"/>
-                </a:solidFill>
-                <a:latin typeface="Avenir Next" panose="020B0503020202020204" pitchFamily="34" charset="0"/>
-              </a:rPr>
-              <a:t>4. Conclusion: </a:t>
-            </a:r>
-            <a:r>
-              <a:rPr sz="1300" dirty="0">
-                <a:solidFill>
-                  <a:srgbClr val="2D2D2D"/>
-                </a:solidFill>
-                <a:latin typeface="Avenir Next" panose="020B0503020202020204" pitchFamily="34" charset="0"/>
-              </a:rPr>
-              <a:t>VALIDATED — Root cause is weak corporate governance.</a:t>
-            </a:r>
-          </a:p>
-        </p:txBody>
-      </p:sp>
-      <p:sp>
-        <p:nvSpPr>
-          <p:cNvPr id="9" name="Rounded Rectangle 8"/>
+        </p:txBody>
+      </p:sp>
+      <p:sp>
+        <p:nvSpPr>
+          <p:cNvPr id="10" name="Rounded Rectangle 9"/>
           <p:cNvSpPr/>
           <p:nvPr/>
         </p:nvSpPr>
         <p:spPr>
           <a:xfrm>
-            <a:off x="4264587" y="1150000"/>
-            <a:ext cx="3843209" cy="5014354"/>
+            <a:off x="4246282" y="1474623"/>
+            <a:ext cx="3300984" cy="4023360"/>
           </a:xfrm>
           <a:prstGeom prst="roundRect">
             <a:avLst/>
@@ -17997,14 +18302,14 @@
       </p:sp>
       <p:sp>
         <p:nvSpPr>
-          <p:cNvPr id="10" name="Rectangle 9"/>
+          <p:cNvPr id="11" name="Rectangle 10"/>
           <p:cNvSpPr/>
           <p:nvPr/>
         </p:nvSpPr>
         <p:spPr>
           <a:xfrm>
-            <a:off x="4439412" y="1156935"/>
-            <a:ext cx="3547872" cy="76267"/>
+            <a:off x="4246282" y="1474623"/>
+            <a:ext cx="3255264" cy="73152"/>
           </a:xfrm>
           <a:prstGeom prst="rect">
             <a:avLst/>
@@ -18043,14 +18348,14 @@
       </p:sp>
       <p:sp>
         <p:nvSpPr>
-          <p:cNvPr id="11" name="TextBox 10"/>
+          <p:cNvPr id="12" name="TextBox 11"/>
           <p:cNvSpPr txBox="1"/>
           <p:nvPr/>
         </p:nvSpPr>
         <p:spPr>
           <a:xfrm>
-            <a:off x="4439412" y="1350000"/>
-            <a:ext cx="3433572" cy="1292662"/>
+            <a:off x="4392586" y="1659789"/>
+            <a:ext cx="3255264" cy="338554"/>
           </a:xfrm>
           <a:prstGeom prst="rect">
             <a:avLst/>
@@ -18058,40 +18363,38 @@
           <a:noFill/>
         </p:spPr>
         <p:txBody>
-          <a:bodyPr wrap="square" lIns="0" tIns="0" rIns="0" bIns="0">
+          <a:bodyPr wrap="square" anchor="t">
             <a:spAutoFit/>
           </a:bodyPr>
           <a:lstStyle/>
           <a:p>
-            <a:pPr>
-              <a:spcAft>
-                <a:spcPts val="200"/>
-              </a:spcAft>
-              <a:defRPr sz="1050" b="1">
-                <a:solidFill>
-                  <a:srgbClr val="12402D"/>
-                </a:solidFill>
-              </a:defRPr>
-            </a:pPr>
-            <a:r>
-              <a:rPr sz="1400" dirty="0">
-                <a:latin typeface="Avenir Next" panose="020B0503020202020204" pitchFamily="34" charset="0"/>
-              </a:rPr>
-              <a:t>H₂: "The existing legal framework does not impose sufficiently clear, stringent, and deterrent liability for misleading environmental disclosures, thereby enabling corporations to avoid meaningful accountability."</a:t>
-            </a:r>
-          </a:p>
-        </p:txBody>
-      </p:sp>
-      <p:sp>
-        <p:nvSpPr>
-          <p:cNvPr id="12" name="TextBox 11"/>
+            <a:pPr algn="l">
+              <a:defRPr sz="1600" b="1">
+                <a:solidFill>
+                  <a:srgbClr val="173F35"/>
+                </a:solidFill>
+                <a:latin typeface="Avenir Next Demi Bold"/>
+              </a:defRPr>
+            </a:pPr>
+            <a:r>
+              <a:rPr sz="1600">
+                <a:latin typeface="Avenir Next" panose="020B0503020202020204" pitchFamily="34" charset="0"/>
+              </a:rPr>
+              <a:t>SEBI / Securities law</a:t>
+            </a:r>
+          </a:p>
+        </p:txBody>
+      </p:sp>
+      <p:sp>
+        <p:nvSpPr>
+          <p:cNvPr id="13" name="TextBox 12"/>
           <p:cNvSpPr txBox="1"/>
           <p:nvPr/>
         </p:nvSpPr>
         <p:spPr>
           <a:xfrm>
-            <a:off x="4439412" y="2775180"/>
-            <a:ext cx="3433572" cy="3100849"/>
+            <a:off x="4389385" y="2035028"/>
+            <a:ext cx="3255264" cy="2633798"/>
           </a:xfrm>
           <a:prstGeom prst="rect">
             <a:avLst/>
@@ -18099,188 +18402,176 @@
           <a:noFill/>
         </p:spPr>
         <p:txBody>
-          <a:bodyPr wrap="square" lIns="0" tIns="0" rIns="0" bIns="0">
+          <a:bodyPr wrap="square" anchor="t">
             <a:spAutoFit/>
           </a:bodyPr>
           <a:lstStyle/>
           <a:p>
+            <a:pPr algn="l">
+              <a:lnSpc>
+                <a:spcPct val="105000"/>
+              </a:lnSpc>
+              <a:spcAft>
+                <a:spcPts val="600"/>
+              </a:spcAft>
+              <a:defRPr sz="1150" b="0">
+                <a:solidFill>
+                  <a:srgbClr val="2D2D2D"/>
+                </a:solidFill>
+                <a:latin typeface="Avenir Next"/>
+              </a:defRPr>
+            </a:pPr>
+            <a:r>
+              <a:rPr sz="1100" b="1" dirty="0">
+                <a:latin typeface="Avenir Next"/>
+              </a:rPr>
+              <a:t>• Repeal Backsliding / Restore </a:t>
+            </a:r>
+            <a:r>
+              <a:rPr sz="1100" b="1" dirty="0" err="1">
+                <a:latin typeface="Avenir Next"/>
+              </a:rPr>
+              <a:t>Rigour</a:t>
+            </a:r>
+            <a:r>
+              <a:rPr sz="1100" b="1" dirty="0">
+                <a:latin typeface="Avenir Next"/>
+              </a:rPr>
+              <a:t>: </a:t>
+            </a:r>
+            <a:r>
+              <a:rPr sz="1100" b="0" dirty="0">
+                <a:latin typeface="Avenir Next"/>
+              </a:rPr>
+              <a:t>Amend BRSR to mandate Reasonable Assurance &amp; full Scope 3 Value Chain </a:t>
+            </a:r>
+            <a:r>
+              <a:rPr lang="en-US" sz="1100" dirty="0">
+                <a:latin typeface="Avenir Next"/>
+              </a:rPr>
+              <a:t>Disclosures</a:t>
+            </a:r>
+            <a:r>
+              <a:rPr sz="1100" b="0" dirty="0">
+                <a:latin typeface="Avenir Next"/>
+              </a:rPr>
+              <a:t>.</a:t>
+            </a:r>
+          </a:p>
+          <a:p>
             <a:pPr>
-              <a:spcBef>
-                <a:spcPts val="300"/>
-              </a:spcBef>
+              <a:lnSpc>
+                <a:spcPct val="105000"/>
+              </a:lnSpc>
               <a:spcAft>
-                <a:spcPts val="400"/>
+                <a:spcPts val="600"/>
               </a:spcAft>
             </a:pPr>
             <a:r>
-              <a:rPr sz="1300" b="1" dirty="0">
-                <a:solidFill>
-                  <a:srgbClr val="22704E"/>
-                </a:solidFill>
-                <a:latin typeface="Avenir Next" panose="020B0503020202020204" pitchFamily="34" charset="0"/>
-              </a:rPr>
-              <a:t>1. Scope: </a:t>
-            </a:r>
-            <a:r>
-              <a:rPr lang="en-IN" sz="1300" dirty="0">
-                <a:solidFill>
-                  <a:srgbClr val="2D2D2D"/>
-                </a:solidFill>
-                <a:latin typeface="Avenir Next" panose="020B0503020202020204" pitchFamily="34" charset="0"/>
-              </a:rPr>
-              <a:t>Tests whether penalties are large and certain enough to outweigh the gains from greenwashing — across company, securities, and consumer law.</a:t>
-            </a:r>
-            <a:endParaRPr sz="1300" dirty="0">
-              <a:solidFill>
-                <a:srgbClr val="2D2D2D"/>
-              </a:solidFill>
-              <a:latin typeface="Avenir Next" panose="020B0503020202020204" pitchFamily="34" charset="0"/>
-            </a:endParaRPr>
+              <a:rPr sz="1100" b="1" dirty="0">
+                <a:latin typeface="Avenir Next"/>
+              </a:rPr>
+              <a:t>• PFUTP Fraud &amp; Referral Bridge: </a:t>
+            </a:r>
+            <a:r>
+              <a:rPr sz="1100" b="0" dirty="0">
+                <a:latin typeface="Avenir Next"/>
+              </a:rPr>
+              <a:t>Classify material ESG misstatements as fraud under PFUTP</a:t>
+            </a:r>
+            <a:r>
+              <a:rPr lang="en-US" sz="1100" b="0" dirty="0">
+                <a:latin typeface="Avenir Next"/>
+              </a:rPr>
+              <a:t> Regulations</a:t>
+            </a:r>
+            <a:r>
+              <a:rPr sz="1100" b="0" dirty="0">
+                <a:latin typeface="Avenir Next"/>
+              </a:rPr>
+              <a:t> + mandatory referral to MCA.</a:t>
+            </a:r>
           </a:p>
           <a:p>
             <a:pPr>
-              <a:spcBef>
-                <a:spcPts val="300"/>
-              </a:spcBef>
+              <a:lnSpc>
+                <a:spcPct val="105000"/>
+              </a:lnSpc>
               <a:spcAft>
-                <a:spcPts val="400"/>
+                <a:spcPts val="600"/>
               </a:spcAft>
             </a:pPr>
             <a:r>
-              <a:rPr sz="1300" b="1" dirty="0">
-                <a:solidFill>
-                  <a:srgbClr val="22704E"/>
-                </a:solidFill>
-                <a:latin typeface="Avenir Next" panose="020B0503020202020204" pitchFamily="34" charset="0"/>
-              </a:rPr>
-              <a:t>2. Duty Allocation: </a:t>
-            </a:r>
-            <a:r>
-              <a:rPr lang="en-IN" sz="1300" dirty="0">
-                <a:solidFill>
-                  <a:srgbClr val="2A2A2A"/>
-                </a:solidFill>
-                <a:latin typeface="Avenir Next" panose="020B0503020202020204" pitchFamily="34" charset="0"/>
-              </a:rPr>
-              <a:t>Duties exist, but enforcement routes are weak for Section 166(2); and consumer penalties lack deterrence.</a:t>
-            </a:r>
-            <a:endParaRPr sz="1300" dirty="0">
-              <a:solidFill>
-                <a:srgbClr val="2D2D2D"/>
-              </a:solidFill>
-              <a:latin typeface="Avenir Next" panose="020B0503020202020204" pitchFamily="34" charset="0"/>
-            </a:endParaRPr>
+              <a:rPr sz="1100" b="1" dirty="0">
+                <a:latin typeface="Avenir Next"/>
+              </a:rPr>
+              <a:t>• Double Materiality: </a:t>
+            </a:r>
+            <a:r>
+              <a:rPr sz="1100" b="0" dirty="0">
+                <a:latin typeface="Avenir Next"/>
+              </a:rPr>
+              <a:t>Mandate Impact Materiality alongside Financial Materialit</a:t>
+            </a:r>
+            <a:r>
+              <a:rPr lang="en-US" sz="1100" b="0" dirty="0">
+                <a:latin typeface="Avenir Next"/>
+              </a:rPr>
+              <a:t>y</a:t>
+            </a:r>
+            <a:r>
+              <a:rPr sz="1100" b="0" dirty="0">
+                <a:latin typeface="Avenir Next"/>
+              </a:rPr>
+              <a:t>.</a:t>
+            </a:r>
           </a:p>
           <a:p>
             <a:pPr>
-              <a:spcBef>
-                <a:spcPts val="300"/>
-              </a:spcBef>
+              <a:lnSpc>
+                <a:spcPct val="105000"/>
+              </a:lnSpc>
               <a:spcAft>
-                <a:spcPts val="400"/>
+                <a:spcPts val="600"/>
               </a:spcAft>
             </a:pPr>
             <a:r>
-              <a:rPr sz="1300" b="1" dirty="0">
-                <a:solidFill>
-                  <a:srgbClr val="22704E"/>
-                </a:solidFill>
-                <a:latin typeface="Avenir Next" panose="020B0503020202020204" pitchFamily="34" charset="0"/>
-              </a:rPr>
-              <a:t>3. </a:t>
-            </a:r>
-            <a:r>
-              <a:rPr lang="en-US" sz="1300" b="1" dirty="0">
-                <a:solidFill>
-                  <a:srgbClr val="22704E"/>
-                </a:solidFill>
-                <a:latin typeface="Avenir Next" panose="020B0503020202020204" pitchFamily="34" charset="0"/>
-              </a:rPr>
-              <a:t>Enforcement Pathway</a:t>
-            </a:r>
-            <a:r>
-              <a:rPr sz="1300" b="1" dirty="0">
-                <a:solidFill>
-                  <a:srgbClr val="22704E"/>
-                </a:solidFill>
-                <a:latin typeface="Avenir Next" panose="020B0503020202020204" pitchFamily="34" charset="0"/>
-              </a:rPr>
-              <a:t>: </a:t>
-            </a:r>
-            <a:r>
-              <a:rPr sz="1300" dirty="0">
-                <a:solidFill>
-                  <a:srgbClr val="2D2D2D"/>
-                </a:solidFill>
-                <a:latin typeface="Avenir Next" panose="020B0503020202020204" pitchFamily="34" charset="0"/>
-              </a:rPr>
-              <a:t>Weak verification and high proof burdens shield violators.</a:t>
-            </a:r>
-            <a:r>
-              <a:rPr lang="en-US" sz="1300" dirty="0">
-                <a:solidFill>
-                  <a:srgbClr val="2D2D2D"/>
-                </a:solidFill>
-                <a:latin typeface="Avenir Next" panose="020B0503020202020204" pitchFamily="34" charset="0"/>
-              </a:rPr>
-              <a:t> </a:t>
-            </a:r>
-            <a:r>
-              <a:rPr lang="en-IN" sz="1400" dirty="0">
-                <a:solidFill>
-                  <a:srgbClr val="2A2A2A"/>
-                </a:solidFill>
-                <a:latin typeface="Avenir Next" panose="020B0503020202020204" pitchFamily="34" charset="0"/>
-              </a:rPr>
-              <a:t>Legal duties without accessible triggers fail to create real liability.</a:t>
-            </a:r>
-            <a:endParaRPr sz="1300" dirty="0">
-              <a:solidFill>
-                <a:srgbClr val="2D2D2D"/>
-              </a:solidFill>
-              <a:latin typeface="Avenir Next" panose="020B0503020202020204" pitchFamily="34" charset="0"/>
-            </a:endParaRPr>
-          </a:p>
-          <a:p>
-            <a:pPr>
-              <a:spcBef>
-                <a:spcPts val="300"/>
-              </a:spcBef>
-              <a:spcAft>
-                <a:spcPts val="400"/>
-              </a:spcAft>
-            </a:pPr>
-            <a:r>
-              <a:rPr sz="1300" b="1" dirty="0">
-                <a:solidFill>
-                  <a:srgbClr val="22704E"/>
-                </a:solidFill>
-                <a:latin typeface="Avenir Next" panose="020B0503020202020204" pitchFamily="34" charset="0"/>
-              </a:rPr>
-              <a:t>4. Conclusion: </a:t>
-            </a:r>
-            <a:r>
-              <a:rPr sz="1300" dirty="0">
-                <a:solidFill>
-                  <a:srgbClr val="2D2D2D"/>
-                </a:solidFill>
-                <a:latin typeface="Avenir Next" panose="020B0503020202020204" pitchFamily="34" charset="0"/>
-              </a:rPr>
-              <a:t>VALIDATED — Framework lacks deterrent liability.</a:t>
-            </a:r>
-          </a:p>
-        </p:txBody>
-      </p:sp>
-      <p:sp>
-        <p:nvSpPr>
-          <p:cNvPr id="13" name="Rounded Rectangle 12"/>
+              <a:rPr sz="1100" b="1" dirty="0">
+                <a:latin typeface="Avenir Next"/>
+              </a:rPr>
+              <a:t>• ESG Rating Providers (ERPs): </a:t>
+            </a:r>
+            <a:r>
+              <a:rPr sz="1100" b="0" dirty="0">
+                <a:latin typeface="Avenir Next"/>
+              </a:rPr>
+              <a:t>Introduce minimum competence </a:t>
+            </a:r>
+            <a:r>
+              <a:rPr lang="en-US" sz="1100" b="0" dirty="0">
+                <a:latin typeface="Avenir Next"/>
+              </a:rPr>
+              <a:t>and certifications </a:t>
+            </a:r>
+            <a:r>
+              <a:rPr sz="1100" b="0" dirty="0">
+                <a:latin typeface="Avenir Next"/>
+              </a:rPr>
+              <a:t>for ESG analysts.</a:t>
+            </a:r>
+          </a:p>
+        </p:txBody>
+      </p:sp>
+      <p:sp>
+        <p:nvSpPr>
+          <p:cNvPr id="14" name="Rounded Rectangle 13"/>
           <p:cNvSpPr/>
           <p:nvPr/>
         </p:nvSpPr>
         <p:spPr>
           <a:xfrm>
-            <a:off x="8281316" y="1150000"/>
-            <a:ext cx="3683771" cy="4848000"/>
+            <a:off x="7839874" y="1474623"/>
+            <a:ext cx="3300984" cy="4023360"/>
           </a:xfrm>
           <a:prstGeom prst="roundRect">
             <a:avLst/>
@@ -18321,14 +18612,14 @@
       </p:sp>
       <p:sp>
         <p:nvSpPr>
-          <p:cNvPr id="14" name="Rectangle 13"/>
+          <p:cNvPr id="15" name="Rectangle 14"/>
           <p:cNvSpPr/>
           <p:nvPr/>
         </p:nvSpPr>
         <p:spPr>
           <a:xfrm>
-            <a:off x="8281317" y="1156935"/>
-            <a:ext cx="3547872" cy="76267"/>
+            <a:off x="7839874" y="1474623"/>
+            <a:ext cx="3255264" cy="73152"/>
           </a:xfrm>
           <a:prstGeom prst="rect">
             <a:avLst/>
@@ -18367,14 +18658,14 @@
       </p:sp>
       <p:sp>
         <p:nvSpPr>
-          <p:cNvPr id="15" name="TextBox 14"/>
+          <p:cNvPr id="16" name="TextBox 15"/>
           <p:cNvSpPr txBox="1"/>
           <p:nvPr/>
         </p:nvSpPr>
         <p:spPr>
           <a:xfrm>
-            <a:off x="8534535" y="1350000"/>
-            <a:ext cx="3154654" cy="1077218"/>
+            <a:off x="7986178" y="1659789"/>
+            <a:ext cx="3255264" cy="338554"/>
           </a:xfrm>
           <a:prstGeom prst="rect">
             <a:avLst/>
@@ -18382,37 +18673,38 @@
           <a:noFill/>
         </p:spPr>
         <p:txBody>
-          <a:bodyPr wrap="square" lIns="0" tIns="0" rIns="0" bIns="0">
+          <a:bodyPr wrap="square" anchor="t">
             <a:spAutoFit/>
           </a:bodyPr>
           <a:lstStyle/>
           <a:p>
-            <a:pPr>
-              <a:defRPr sz="1100" b="1">
-                <a:solidFill>
-                  <a:srgbClr val="12402D"/>
-                </a:solidFill>
-              </a:defRPr>
-            </a:pPr>
-            <a:r>
-              <a:rPr sz="1400">
-                <a:latin typeface="Avenir Next" panose="020B0503020202020204" pitchFamily="34" charset="0"/>
-              </a:rPr>
-              <a:t>H₃: "In addressing the issue of greenwashing, the present legal mechanism involving different regulatory bodies is inchoate and incomplete."</a:t>
-            </a:r>
-          </a:p>
-        </p:txBody>
-      </p:sp>
-      <p:sp>
-        <p:nvSpPr>
-          <p:cNvPr id="16" name="TextBox 15"/>
+            <a:pPr algn="l">
+              <a:defRPr sz="1600" b="1">
+                <a:solidFill>
+                  <a:srgbClr val="173F35"/>
+                </a:solidFill>
+                <a:latin typeface="Avenir Next Demi Bold"/>
+              </a:defRPr>
+            </a:pPr>
+            <a:r>
+              <a:rPr sz="1600">
+                <a:latin typeface="Avenir Next" panose="020B0503020202020204" pitchFamily="34" charset="0"/>
+              </a:rPr>
+              <a:t>CCPA / Consumer law</a:t>
+            </a:r>
+          </a:p>
+        </p:txBody>
+      </p:sp>
+      <p:sp>
+        <p:nvSpPr>
+          <p:cNvPr id="17" name="TextBox 16"/>
           <p:cNvSpPr txBox="1"/>
           <p:nvPr/>
         </p:nvSpPr>
         <p:spPr>
           <a:xfrm>
-            <a:off x="8534535" y="2602400"/>
-            <a:ext cx="3257032" cy="2669962"/>
+            <a:off x="7937257" y="2008967"/>
+            <a:ext cx="3255264" cy="2456057"/>
           </a:xfrm>
           <a:prstGeom prst="rect">
             <a:avLst/>
@@ -18420,164 +18712,205 @@
           <a:noFill/>
         </p:spPr>
         <p:txBody>
-          <a:bodyPr wrap="square" lIns="0" tIns="0" rIns="0" bIns="0">
+          <a:bodyPr wrap="square" anchor="t">
             <a:spAutoFit/>
           </a:bodyPr>
           <a:lstStyle/>
           <a:p>
+            <a:pPr algn="l">
+              <a:lnSpc>
+                <a:spcPct val="105000"/>
+              </a:lnSpc>
+              <a:spcAft>
+                <a:spcPts val="600"/>
+              </a:spcAft>
+              <a:defRPr sz="1150" b="0">
+                <a:solidFill>
+                  <a:srgbClr val="2D2D2D"/>
+                </a:solidFill>
+                <a:latin typeface="Avenir Next"/>
+              </a:defRPr>
+            </a:pPr>
+            <a:r>
+              <a:rPr sz="1100" b="1" dirty="0">
+                <a:latin typeface="Avenir Next"/>
+              </a:rPr>
+              <a:t>• Binding Sec 101 Rules: </a:t>
+            </a:r>
+            <a:r>
+              <a:rPr sz="1100" b="0" dirty="0">
+                <a:latin typeface="Avenir Next"/>
+              </a:rPr>
+              <a:t>Elevate 2024 Guidelines into formal delegated legislation.</a:t>
+            </a:r>
+          </a:p>
+          <a:p>
             <a:pPr>
-              <a:spcBef>
-                <a:spcPts val="300"/>
-              </a:spcBef>
+              <a:lnSpc>
+                <a:spcPct val="105000"/>
+              </a:lnSpc>
               <a:spcAft>
-                <a:spcPts val="400"/>
+                <a:spcPts val="600"/>
               </a:spcAft>
             </a:pPr>
             <a:r>
-              <a:rPr sz="1300" b="1" dirty="0">
-                <a:solidFill>
-                  <a:srgbClr val="22704E"/>
-                </a:solidFill>
-                <a:latin typeface="Avenir Next" panose="020B0503020202020204" pitchFamily="34" charset="0"/>
-              </a:rPr>
-              <a:t>1. Scope: </a:t>
-            </a:r>
-            <a:r>
-              <a:rPr sz="1300" dirty="0">
-                <a:solidFill>
-                  <a:srgbClr val="2D2D2D"/>
-                </a:solidFill>
-                <a:latin typeface="Avenir Next" panose="020B0503020202020204" pitchFamily="34" charset="0"/>
-              </a:rPr>
-              <a:t>Greenwashing </a:t>
-            </a:r>
-            <a:r>
-              <a:rPr lang="en-US" sz="1300" dirty="0">
-                <a:solidFill>
-                  <a:srgbClr val="2D2D2D"/>
-                </a:solidFill>
-                <a:latin typeface="Avenir Next" panose="020B0503020202020204" pitchFamily="34" charset="0"/>
-              </a:rPr>
-              <a:t>is a lifecycle phenomenon spanning products, ads, annual reports, ESG filings, and green bonds.</a:t>
+              <a:rPr sz="1100" b="1" dirty="0">
+                <a:latin typeface="Avenir Next"/>
+              </a:rPr>
+              <a:t>• Turnover Fines &amp; Corrective Ads: </a:t>
+            </a:r>
+            <a:r>
+              <a:rPr sz="1100" b="0" dirty="0">
+                <a:latin typeface="Avenir Next"/>
+              </a:rPr>
+              <a:t>Amend Sec 21 to impose 1% to 4% turnover penalties + Mandatory Corrective Advertising of equal prominence and duration.</a:t>
             </a:r>
           </a:p>
           <a:p>
             <a:pPr>
-              <a:spcBef>
-                <a:spcPts val="300"/>
-              </a:spcBef>
+              <a:lnSpc>
+                <a:spcPct val="105000"/>
+              </a:lnSpc>
               <a:spcAft>
-                <a:spcPts val="400"/>
+                <a:spcPts val="600"/>
               </a:spcAft>
             </a:pPr>
             <a:r>
-              <a:rPr sz="1300" b="1" dirty="0">
-                <a:solidFill>
-                  <a:srgbClr val="22704E"/>
-                </a:solidFill>
-                <a:latin typeface="Avenir Next" panose="020B0503020202020204" pitchFamily="34" charset="0"/>
-              </a:rPr>
-              <a:t>2. Duty Allocation: </a:t>
-            </a:r>
-            <a:r>
-              <a:rPr sz="1300" dirty="0">
-                <a:solidFill>
-                  <a:srgbClr val="2D2D2D"/>
-                </a:solidFill>
-                <a:latin typeface="Avenir Next" panose="020B0503020202020204" pitchFamily="34" charset="0"/>
-              </a:rPr>
-              <a:t>Disconnected regulators create gaps and conflicting standards across venues.</a:t>
+              <a:rPr sz="1100" b="1" dirty="0">
+                <a:latin typeface="Avenir Next"/>
+              </a:rPr>
+              <a:t>• Narrow Puffery (Guideline 3(h)): </a:t>
+            </a:r>
+            <a:r>
+              <a:rPr lang="en-US" sz="1100" b="0" dirty="0">
+                <a:latin typeface="Avenir Next"/>
+              </a:rPr>
+              <a:t>Cl</a:t>
+            </a:r>
+            <a:r>
+              <a:rPr sz="1100" b="0" dirty="0">
+                <a:latin typeface="Avenir Next"/>
+              </a:rPr>
+              <a:t>aims</a:t>
+            </a:r>
+            <a:r>
+              <a:rPr lang="en-US" sz="1100" dirty="0">
+                <a:latin typeface="Avenir Next"/>
+              </a:rPr>
+              <a:t> should </a:t>
+            </a:r>
+            <a:r>
+              <a:rPr sz="1100" b="0" dirty="0">
+                <a:latin typeface="Avenir Next"/>
+              </a:rPr>
+              <a:t>require published transition plans and budgets.</a:t>
             </a:r>
           </a:p>
           <a:p>
             <a:pPr>
-              <a:spcBef>
-                <a:spcPts val="300"/>
-              </a:spcBef>
+              <a:lnSpc>
+                <a:spcPct val="105000"/>
+              </a:lnSpc>
               <a:spcAft>
-                <a:spcPts val="400"/>
+                <a:spcPts val="600"/>
               </a:spcAft>
             </a:pPr>
             <a:r>
-              <a:rPr sz="1300" b="1" dirty="0">
-                <a:solidFill>
-                  <a:srgbClr val="22704E"/>
-                </a:solidFill>
-                <a:latin typeface="Avenir Next" panose="020B0503020202020204" pitchFamily="34" charset="0"/>
-              </a:rPr>
-              <a:t>3. </a:t>
-            </a:r>
-            <a:r>
-              <a:rPr lang="en-US" sz="1300" b="1" dirty="0">
-                <a:solidFill>
-                  <a:srgbClr val="22704E"/>
-                </a:solidFill>
-                <a:latin typeface="Avenir Next" panose="020B0503020202020204" pitchFamily="34" charset="0"/>
-              </a:rPr>
-              <a:t>Enforcement Pathway </a:t>
-            </a:r>
-            <a:r>
-              <a:rPr sz="1300" b="1" dirty="0">
-                <a:solidFill>
-                  <a:srgbClr val="22704E"/>
-                </a:solidFill>
-                <a:latin typeface="Avenir Next" panose="020B0503020202020204" pitchFamily="34" charset="0"/>
-              </a:rPr>
-              <a:t>: </a:t>
-            </a:r>
-            <a:r>
-              <a:rPr sz="1300" dirty="0">
-                <a:solidFill>
-                  <a:srgbClr val="2D2D2D"/>
-                </a:solidFill>
-                <a:latin typeface="Avenir Next" panose="020B0503020202020204" pitchFamily="34" charset="0"/>
-              </a:rPr>
-              <a:t>No lead agency, no mandatory case referrals, and no shared data.</a:t>
-            </a:r>
-          </a:p>
+              <a:rPr sz="1100" b="1" dirty="0">
+                <a:latin typeface="Avenir Next"/>
+              </a:rPr>
+              <a:t>• Claim-Specific Schedules: </a:t>
+            </a:r>
+            <a:r>
+              <a:rPr sz="1100" b="0" dirty="0">
+                <a:latin typeface="Avenir Next"/>
+              </a:rPr>
+              <a:t>Prescribe statutory testing benchmarks </a:t>
+            </a:r>
+            <a:r>
+              <a:rPr lang="en-US" sz="1100" dirty="0">
+                <a:latin typeface="Avenir Next"/>
+              </a:rPr>
+              <a:t>specific to the type of environmental claim</a:t>
+            </a:r>
+            <a:r>
+              <a:rPr sz="1100" b="0" dirty="0">
+                <a:latin typeface="Avenir Next"/>
+              </a:rPr>
+              <a:t>.</a:t>
+            </a:r>
+          </a:p>
+        </p:txBody>
+      </p:sp>
+      <p:sp>
+        <p:nvSpPr>
+          <p:cNvPr id="18" name="TextBox 17"/>
+          <p:cNvSpPr txBox="1"/>
+          <p:nvPr/>
+        </p:nvSpPr>
+        <p:spPr>
+          <a:xfrm>
+            <a:off x="730574" y="6635463"/>
+            <a:ext cx="1733167" cy="261610"/>
+          </a:xfrm>
+          <a:prstGeom prst="rect">
+            <a:avLst/>
+          </a:prstGeom>
+          <a:noFill/>
+        </p:spPr>
+        <p:txBody>
+          <a:bodyPr wrap="none" lIns="91440" tIns="45720" rIns="91440" bIns="45720" anchor="t">
+            <a:spAutoFit/>
+          </a:bodyPr>
+          <a:lstStyle/>
           <a:p>
             <a:pPr>
-              <a:spcBef>
-                <a:spcPts val="300"/>
-              </a:spcBef>
-              <a:spcAft>
-                <a:spcPts val="400"/>
-              </a:spcAft>
-            </a:pPr>
-            <a:r>
-              <a:rPr sz="1300" b="1" dirty="0">
-                <a:solidFill>
-                  <a:srgbClr val="22704E"/>
-                </a:solidFill>
-                <a:latin typeface="Avenir Next" panose="020B0503020202020204" pitchFamily="34" charset="0"/>
-              </a:rPr>
-              <a:t>4. Conclusion: </a:t>
-            </a:r>
-            <a:r>
-              <a:rPr sz="1300" dirty="0">
-                <a:solidFill>
-                  <a:srgbClr val="2D2D2D"/>
-                </a:solidFill>
-                <a:latin typeface="Avenir Next" panose="020B0503020202020204" pitchFamily="34" charset="0"/>
-              </a:rPr>
-              <a:t>VALIDATED — Ecosystem is fragmented and incomplete.</a:t>
-            </a:r>
-          </a:p>
-        </p:txBody>
-      </p:sp>
-      <p:sp>
-        <p:nvSpPr>
-          <p:cNvPr id="17" name="Rounded Rectangle 16"/>
+              <a:defRPr sz="850">
+                <a:solidFill>
+                  <a:srgbClr val="6B6F6A"/>
+                </a:solidFill>
+                <a:latin typeface="Avenir Next"/>
+              </a:defRPr>
+            </a:pPr>
+            <a:r>
+              <a:rPr sz="1100" dirty="0">
+                <a:latin typeface="Avenir Next" panose="020B0503020202020204" pitchFamily="34" charset="0"/>
+              </a:rPr>
+              <a:t>Source base: Chapter 6</a:t>
+            </a:r>
+            <a:r>
+              <a:rPr lang="en-US" sz="1100" dirty="0">
+                <a:latin typeface="Avenir Next" panose="020B0503020202020204" pitchFamily="34" charset="0"/>
+              </a:rPr>
+              <a:t>.</a:t>
+            </a:r>
+            <a:endParaRPr sz="1100" dirty="0">
+              <a:latin typeface="Avenir Next" panose="020B0503020202020204" pitchFamily="34" charset="0"/>
+            </a:endParaRPr>
+          </a:p>
+        </p:txBody>
+      </p:sp>
+      <p:sp>
+        <p:nvSpPr>
+          <p:cNvPr id="2" name="Rounded Rectangle 1">
+            <a:extLst>
+              <a:ext uri="{FF2B5EF4-FFF2-40B4-BE49-F238E27FC236}">
+                <a16:creationId xmlns:a16="http://schemas.microsoft.com/office/drawing/2014/main" id="{E944D5AA-E07A-684A-99A2-363958AA91F5}"/>
+              </a:ext>
+            </a:extLst>
+          </p:cNvPr>
           <p:cNvSpPr/>
           <p:nvPr/>
         </p:nvSpPr>
         <p:spPr>
           <a:xfrm>
-            <a:off x="731519" y="6322112"/>
-            <a:ext cx="10911841" cy="340620"/>
+            <a:off x="608357" y="6064911"/>
+            <a:ext cx="10835640" cy="409041"/>
           </a:xfrm>
           <a:prstGeom prst="roundRect">
-            <a:avLst/>
+            <a:avLst>
+              <a:gd name="adj" fmla="val 14000"/>
+            </a:avLst>
           </a:prstGeom>
           <a:solidFill>
             <a:srgbClr val="FFF6EA"/>
@@ -18587,6 +18920,7 @@
               <a:srgbClr val="E7C894"/>
             </a:solidFill>
           </a:ln>
+          <a:effectLst/>
         </p:spPr>
         <p:style>
           <a:lnRef idx="1">
@@ -18606,8 +18940,7 @@
           <a:bodyPr rtlCol="0" anchor="ctr"/>
           <a:lstStyle/>
           <a:p>
-            <a:pPr algn="ctr"/>
-            <a:endParaRPr sz="1400">
+            <a:endParaRPr sz="2400">
               <a:latin typeface="Avenir Next" panose="020B0503020202020204" pitchFamily="34" charset="0"/>
             </a:endParaRPr>
           </a:p>
@@ -18615,14 +18948,20 @@
       </p:sp>
       <p:sp>
         <p:nvSpPr>
-          <p:cNvPr id="18" name="TextBox 17"/>
+          <p:cNvPr id="5" name="TextBox 4">
+            <a:extLst>
+              <a:ext uri="{FF2B5EF4-FFF2-40B4-BE49-F238E27FC236}">
+                <a16:creationId xmlns:a16="http://schemas.microsoft.com/office/drawing/2014/main" id="{89502B22-55AB-9C8B-6A2C-AF2AF36D9F98}"/>
+              </a:ext>
+            </a:extLst>
+          </p:cNvPr>
           <p:cNvSpPr txBox="1"/>
           <p:nvPr/>
         </p:nvSpPr>
         <p:spPr>
           <a:xfrm>
-            <a:off x="858319" y="6403757"/>
-            <a:ext cx="10475056" cy="198516"/>
+            <a:off x="738357" y="6136164"/>
+            <a:ext cx="10575640" cy="261610"/>
           </a:xfrm>
           <a:prstGeom prst="rect">
             <a:avLst/>
@@ -18630,67 +18969,31 @@
           <a:noFill/>
         </p:spPr>
         <p:txBody>
-          <a:bodyPr wrap="square" lIns="0" tIns="0" rIns="0" bIns="0">
+          <a:bodyPr wrap="square" lIns="45720" tIns="22860" rIns="45720" bIns="22860" anchor="ctr">
             <a:spAutoFit/>
           </a:bodyPr>
           <a:lstStyle/>
           <a:p>
-            <a:pPr algn="ctr">
-              <a:lnSpc>
-                <a:spcPct val="110000"/>
-              </a:lnSpc>
-              <a:defRPr sz="1300" b="1">
-                <a:solidFill>
-                  <a:srgbClr val="12402D"/>
-                </a:solidFill>
-              </a:defRPr>
-            </a:pPr>
-            <a:r>
-              <a:rPr sz="1200" dirty="0">
-                <a:latin typeface="Avenir Next" panose="020B0503020202020204" pitchFamily="34" charset="0"/>
-              </a:rPr>
-              <a:t>All Three Hypotheses Stand Formally Validated</a:t>
-            </a:r>
-            <a:endParaRPr sz="1200" dirty="0">
+            <a:pPr algn="just">
+              <a:defRPr sz="1100">
+                <a:solidFill>
+                  <a:srgbClr val="282828"/>
+                </a:solidFill>
+              </a:defRPr>
+            </a:pPr>
+            <a:r>
+              <a:rPr lang="en-IN" sz="1400" b="1" dirty="0">
+                <a:solidFill>
+                  <a:srgbClr val="173F35"/>
+                </a:solidFill>
+              </a:rPr>
+              <a:t>Answers Research Question 7 (Contd.)</a:t>
+            </a:r>
+            <a:endParaRPr lang="en-US" sz="1400" b="1" dirty="0">
               <a:solidFill>
-                <a:srgbClr val="3A3A4A"/>
+                <a:srgbClr val="173F35"/>
               </a:solidFill>
-              <a:latin typeface="Avenir Next" panose="020B0503020202020204" pitchFamily="34" charset="0"/>
             </a:endParaRPr>
-          </a:p>
-        </p:txBody>
-      </p:sp>
-      <p:sp>
-        <p:nvSpPr>
-          <p:cNvPr id="19" name="TextBox 18"/>
-          <p:cNvSpPr txBox="1"/>
-          <p:nvPr/>
-        </p:nvSpPr>
-        <p:spPr>
-          <a:xfrm>
-            <a:off x="730574" y="6730356"/>
-            <a:ext cx="1370568" cy="146194"/>
-          </a:xfrm>
-          <a:prstGeom prst="rect">
-            <a:avLst/>
-          </a:prstGeom>
-          <a:noFill/>
-        </p:spPr>
-        <p:txBody>
-          <a:bodyPr wrap="none" lIns="0" tIns="0" rIns="0" bIns="0">
-            <a:spAutoFit/>
-          </a:bodyPr>
-          <a:lstStyle/>
-          <a:p>
-            <a:r>
-              <a:rPr sz="950" dirty="0">
-                <a:solidFill>
-                  <a:srgbClr val="6B6F6A"/>
-                </a:solidFill>
-                <a:latin typeface="Avenir Next"/>
-              </a:rPr>
-              <a:t>Source base: Chapter 6 </a:t>
-            </a:r>
           </a:p>
         </p:txBody>
       </p:sp>
@@ -18771,2125 +19074,6 @@
         </p:nvSpPr>
         <p:spPr>
           <a:xfrm>
-            <a:off x="548639" y="479298"/>
-            <a:ext cx="8968847" cy="584775"/>
-          </a:xfrm>
-          <a:prstGeom prst="rect">
-            <a:avLst/>
-          </a:prstGeom>
-          <a:noFill/>
-        </p:spPr>
-        <p:txBody>
-          <a:bodyPr wrap="square">
-            <a:spAutoFit/>
-          </a:bodyPr>
-          <a:lstStyle/>
-          <a:p>
-            <a:pPr>
-              <a:defRPr sz="2200" b="1">
-                <a:solidFill>
-                  <a:srgbClr val="173F35"/>
-                </a:solidFill>
-                <a:latin typeface="Avenir Next Demi Bold"/>
-              </a:defRPr>
-            </a:pPr>
-            <a:r>
-              <a:rPr lang="en-US" sz="3200" dirty="0"/>
-              <a:t>General Suggestions For Regulatory Reform</a:t>
-            </a:r>
-            <a:endParaRPr sz="3200" dirty="0"/>
-          </a:p>
-        </p:txBody>
-      </p:sp>
-      <p:sp>
-        <p:nvSpPr>
-          <p:cNvPr id="6" name="Rounded Rectangle 5"/>
-          <p:cNvSpPr/>
-          <p:nvPr/>
-        </p:nvSpPr>
-        <p:spPr>
-          <a:xfrm>
-            <a:off x="670473" y="1700443"/>
-            <a:ext cx="1911096" cy="3233507"/>
-          </a:xfrm>
-          <a:prstGeom prst="roundRect">
-            <a:avLst/>
-          </a:prstGeom>
-          <a:solidFill>
-            <a:srgbClr val="FFFDF8"/>
-          </a:solidFill>
-          <a:ln w="12700">
-            <a:solidFill>
-              <a:srgbClr val="D8D1C6"/>
-            </a:solidFill>
-          </a:ln>
-        </p:spPr>
-        <p:style>
-          <a:lnRef idx="1">
-            <a:schemeClr val="accent1"/>
-          </a:lnRef>
-          <a:fillRef idx="3">
-            <a:schemeClr val="accent1"/>
-          </a:fillRef>
-          <a:effectRef idx="2">
-            <a:schemeClr val="accent1"/>
-          </a:effectRef>
-          <a:fontRef idx="minor">
-            <a:schemeClr val="lt1"/>
-          </a:fontRef>
-        </p:style>
-        <p:txBody>
-          <a:bodyPr rtlCol="0" anchor="ctr"/>
-          <a:lstStyle/>
-          <a:p>
-            <a:pPr algn="ctr"/>
-            <a:endParaRPr sz="1600">
-              <a:latin typeface="Avenir Next" panose="020B0503020202020204" pitchFamily="34" charset="0"/>
-            </a:endParaRPr>
-          </a:p>
-        </p:txBody>
-      </p:sp>
-      <p:sp>
-        <p:nvSpPr>
-          <p:cNvPr id="7" name="Rectangle 6"/>
-          <p:cNvSpPr/>
-          <p:nvPr/>
-        </p:nvSpPr>
-        <p:spPr>
-          <a:xfrm>
-            <a:off x="670473" y="1700443"/>
-            <a:ext cx="1911096" cy="97615"/>
-          </a:xfrm>
-          <a:prstGeom prst="rect">
-            <a:avLst/>
-          </a:prstGeom>
-          <a:solidFill>
-            <a:srgbClr val="C96A3D"/>
-          </a:solidFill>
-          <a:ln>
-            <a:noFill/>
-          </a:ln>
-        </p:spPr>
-        <p:style>
-          <a:lnRef idx="1">
-            <a:schemeClr val="accent1"/>
-          </a:lnRef>
-          <a:fillRef idx="3">
-            <a:schemeClr val="accent1"/>
-          </a:fillRef>
-          <a:effectRef idx="2">
-            <a:schemeClr val="accent1"/>
-          </a:effectRef>
-          <a:fontRef idx="minor">
-            <a:schemeClr val="lt1"/>
-          </a:fontRef>
-        </p:style>
-        <p:txBody>
-          <a:bodyPr rtlCol="0" anchor="ctr"/>
-          <a:lstStyle/>
-          <a:p>
-            <a:pPr algn="ctr"/>
-            <a:endParaRPr sz="1600">
-              <a:latin typeface="Avenir Next" panose="020B0503020202020204" pitchFamily="34" charset="0"/>
-            </a:endParaRPr>
-          </a:p>
-        </p:txBody>
-      </p:sp>
-      <p:sp>
-        <p:nvSpPr>
-          <p:cNvPr id="8" name="TextBox 7"/>
-          <p:cNvSpPr txBox="1"/>
-          <p:nvPr/>
-        </p:nvSpPr>
-        <p:spPr>
-          <a:xfrm>
-            <a:off x="816777" y="1809600"/>
-            <a:ext cx="1764792" cy="584775"/>
-          </a:xfrm>
-          <a:prstGeom prst="rect">
-            <a:avLst/>
-          </a:prstGeom>
-          <a:noFill/>
-        </p:spPr>
-        <p:txBody>
-          <a:bodyPr wrap="square" anchor="t">
-            <a:spAutoFit/>
-          </a:bodyPr>
-          <a:lstStyle/>
-          <a:p>
-            <a:pPr algn="l">
-              <a:defRPr sz="1500" b="1">
-                <a:solidFill>
-                  <a:srgbClr val="12402D"/>
-                </a:solidFill>
-                <a:latin typeface="Avenir Next"/>
-              </a:defRPr>
-            </a:pPr>
-            <a:r>
-              <a:t>1. Institutional Integration</a:t>
-            </a:r>
-          </a:p>
-        </p:txBody>
-      </p:sp>
-      <p:sp>
-        <p:nvSpPr>
-          <p:cNvPr id="9" name="TextBox 8"/>
-          <p:cNvSpPr txBox="1"/>
-          <p:nvPr/>
-        </p:nvSpPr>
-        <p:spPr>
-          <a:xfrm>
-            <a:off x="816777" y="2442950"/>
-            <a:ext cx="1764792" cy="1815882"/>
-          </a:xfrm>
-          <a:prstGeom prst="rect">
-            <a:avLst/>
-          </a:prstGeom>
-          <a:noFill/>
-        </p:spPr>
-        <p:txBody>
-          <a:bodyPr wrap="square" anchor="t">
-            <a:spAutoFit/>
-          </a:bodyPr>
-          <a:lstStyle/>
-          <a:p>
-            <a:pPr algn="l">
-              <a:defRPr sz="1350" b="0">
-                <a:solidFill>
-                  <a:srgbClr val="2D2D2D"/>
-                </a:solidFill>
-                <a:latin typeface="Avenir Next"/>
-              </a:defRPr>
-            </a:pPr>
-            <a:r>
-              <a:t>Establish a permanent inter-regulatory council linking MCA, SEBI, CCPA, MoEFCC, CPCB, BIS, and FSSAI.</a:t>
-            </a:r>
-          </a:p>
-        </p:txBody>
-      </p:sp>
-      <p:sp>
-        <p:nvSpPr>
-          <p:cNvPr id="10" name="Rounded Rectangle 9"/>
-          <p:cNvSpPr/>
-          <p:nvPr/>
-        </p:nvSpPr>
-        <p:spPr>
-          <a:xfrm>
-            <a:off x="2810169" y="1700443"/>
-            <a:ext cx="1911096" cy="3233507"/>
-          </a:xfrm>
-          <a:prstGeom prst="roundRect">
-            <a:avLst/>
-          </a:prstGeom>
-          <a:solidFill>
-            <a:srgbClr val="FFFDF8"/>
-          </a:solidFill>
-          <a:ln w="12700">
-            <a:solidFill>
-              <a:srgbClr val="D8D1C6"/>
-            </a:solidFill>
-          </a:ln>
-        </p:spPr>
-        <p:style>
-          <a:lnRef idx="1">
-            <a:schemeClr val="accent1"/>
-          </a:lnRef>
-          <a:fillRef idx="3">
-            <a:schemeClr val="accent1"/>
-          </a:fillRef>
-          <a:effectRef idx="2">
-            <a:schemeClr val="accent1"/>
-          </a:effectRef>
-          <a:fontRef idx="minor">
-            <a:schemeClr val="lt1"/>
-          </a:fontRef>
-        </p:style>
-        <p:txBody>
-          <a:bodyPr rtlCol="0" anchor="ctr"/>
-          <a:lstStyle/>
-          <a:p>
-            <a:pPr algn="ctr"/>
-            <a:endParaRPr sz="1600">
-              <a:latin typeface="Avenir Next" panose="020B0503020202020204" pitchFamily="34" charset="0"/>
-            </a:endParaRPr>
-          </a:p>
-        </p:txBody>
-      </p:sp>
-      <p:sp>
-        <p:nvSpPr>
-          <p:cNvPr id="11" name="Rectangle 10"/>
-          <p:cNvSpPr/>
-          <p:nvPr/>
-        </p:nvSpPr>
-        <p:spPr>
-          <a:xfrm>
-            <a:off x="2810169" y="1700443"/>
-            <a:ext cx="1911096" cy="97615"/>
-          </a:xfrm>
-          <a:prstGeom prst="rect">
-            <a:avLst/>
-          </a:prstGeom>
-          <a:solidFill>
-            <a:srgbClr val="C8A24D"/>
-          </a:solidFill>
-          <a:ln>
-            <a:noFill/>
-          </a:ln>
-        </p:spPr>
-        <p:style>
-          <a:lnRef idx="1">
-            <a:schemeClr val="accent1"/>
-          </a:lnRef>
-          <a:fillRef idx="3">
-            <a:schemeClr val="accent1"/>
-          </a:fillRef>
-          <a:effectRef idx="2">
-            <a:schemeClr val="accent1"/>
-          </a:effectRef>
-          <a:fontRef idx="minor">
-            <a:schemeClr val="lt1"/>
-          </a:fontRef>
-        </p:style>
-        <p:txBody>
-          <a:bodyPr rtlCol="0" anchor="ctr"/>
-          <a:lstStyle/>
-          <a:p>
-            <a:pPr algn="ctr"/>
-            <a:endParaRPr sz="1600">
-              <a:latin typeface="Avenir Next" panose="020B0503020202020204" pitchFamily="34" charset="0"/>
-            </a:endParaRPr>
-          </a:p>
-        </p:txBody>
-      </p:sp>
-      <p:sp>
-        <p:nvSpPr>
-          <p:cNvPr id="12" name="TextBox 11"/>
-          <p:cNvSpPr txBox="1"/>
-          <p:nvPr/>
-        </p:nvSpPr>
-        <p:spPr>
-          <a:xfrm>
-            <a:off x="2956473" y="1809600"/>
-            <a:ext cx="1764792" cy="830997"/>
-          </a:xfrm>
-          <a:prstGeom prst="rect">
-            <a:avLst/>
-          </a:prstGeom>
-          <a:noFill/>
-        </p:spPr>
-        <p:txBody>
-          <a:bodyPr wrap="square" anchor="t">
-            <a:spAutoFit/>
-          </a:bodyPr>
-          <a:lstStyle/>
-          <a:p>
-            <a:pPr algn="l">
-              <a:defRPr sz="1500" b="1">
-                <a:solidFill>
-                  <a:srgbClr val="12402D"/>
-                </a:solidFill>
-                <a:latin typeface="Avenir Next"/>
-              </a:defRPr>
-            </a:pPr>
-            <a:r>
-              <a:t>2. Lead Regulator Model</a:t>
-            </a:r>
-          </a:p>
-        </p:txBody>
-      </p:sp>
-      <p:sp>
-        <p:nvSpPr>
-          <p:cNvPr id="13" name="TextBox 12"/>
-          <p:cNvSpPr txBox="1"/>
-          <p:nvPr/>
-        </p:nvSpPr>
-        <p:spPr>
-          <a:xfrm>
-            <a:off x="2956473" y="2652500"/>
-            <a:ext cx="1764792" cy="2062103"/>
-          </a:xfrm>
-          <a:prstGeom prst="rect">
-            <a:avLst/>
-          </a:prstGeom>
-          <a:noFill/>
-        </p:spPr>
-        <p:txBody>
-          <a:bodyPr wrap="square" anchor="t">
-            <a:spAutoFit/>
-          </a:bodyPr>
-          <a:lstStyle/>
-          <a:p>
-            <a:pPr algn="l">
-              <a:defRPr sz="1350" b="0">
-                <a:solidFill>
-                  <a:srgbClr val="2D2D2D"/>
-                </a:solidFill>
-                <a:latin typeface="Avenir Next"/>
-              </a:defRPr>
-            </a:pPr>
-            <a:r>
-              <a:t>Designate a coordinating agency with mandatory cross-referral, shared evidence protocols, and harmonised definitions.</a:t>
-            </a:r>
-          </a:p>
-        </p:txBody>
-      </p:sp>
-      <p:sp>
-        <p:nvSpPr>
-          <p:cNvPr id="14" name="Rounded Rectangle 13"/>
-          <p:cNvSpPr/>
-          <p:nvPr/>
-        </p:nvSpPr>
-        <p:spPr>
-          <a:xfrm>
-            <a:off x="4949865" y="1700443"/>
-            <a:ext cx="1911096" cy="3233507"/>
-          </a:xfrm>
-          <a:prstGeom prst="roundRect">
-            <a:avLst/>
-          </a:prstGeom>
-          <a:solidFill>
-            <a:srgbClr val="FFFDF8"/>
-          </a:solidFill>
-          <a:ln w="12700">
-            <a:solidFill>
-              <a:srgbClr val="D8D1C6"/>
-            </a:solidFill>
-          </a:ln>
-        </p:spPr>
-        <p:style>
-          <a:lnRef idx="1">
-            <a:schemeClr val="accent1"/>
-          </a:lnRef>
-          <a:fillRef idx="3">
-            <a:schemeClr val="accent1"/>
-          </a:fillRef>
-          <a:effectRef idx="2">
-            <a:schemeClr val="accent1"/>
-          </a:effectRef>
-          <a:fontRef idx="minor">
-            <a:schemeClr val="lt1"/>
-          </a:fontRef>
-        </p:style>
-        <p:txBody>
-          <a:bodyPr rtlCol="0" anchor="ctr"/>
-          <a:lstStyle/>
-          <a:p>
-            <a:pPr algn="ctr"/>
-            <a:endParaRPr sz="1600">
-              <a:latin typeface="Avenir Next" panose="020B0503020202020204" pitchFamily="34" charset="0"/>
-            </a:endParaRPr>
-          </a:p>
-        </p:txBody>
-      </p:sp>
-      <p:sp>
-        <p:nvSpPr>
-          <p:cNvPr id="15" name="Rectangle 14"/>
-          <p:cNvSpPr/>
-          <p:nvPr/>
-        </p:nvSpPr>
-        <p:spPr>
-          <a:xfrm>
-            <a:off x="4949865" y="1700443"/>
-            <a:ext cx="1911096" cy="97615"/>
-          </a:xfrm>
-          <a:prstGeom prst="rect">
-            <a:avLst/>
-          </a:prstGeom>
-          <a:solidFill>
-            <a:srgbClr val="6A8C69"/>
-          </a:solidFill>
-          <a:ln>
-            <a:noFill/>
-          </a:ln>
-        </p:spPr>
-        <p:style>
-          <a:lnRef idx="1">
-            <a:schemeClr val="accent1"/>
-          </a:lnRef>
-          <a:fillRef idx="3">
-            <a:schemeClr val="accent1"/>
-          </a:fillRef>
-          <a:effectRef idx="2">
-            <a:schemeClr val="accent1"/>
-          </a:effectRef>
-          <a:fontRef idx="minor">
-            <a:schemeClr val="lt1"/>
-          </a:fontRef>
-        </p:style>
-        <p:txBody>
-          <a:bodyPr rtlCol="0" anchor="ctr"/>
-          <a:lstStyle/>
-          <a:p>
-            <a:pPr algn="ctr"/>
-            <a:endParaRPr sz="1600">
-              <a:latin typeface="Avenir Next" panose="020B0503020202020204" pitchFamily="34" charset="0"/>
-            </a:endParaRPr>
-          </a:p>
-        </p:txBody>
-      </p:sp>
-      <p:sp>
-        <p:nvSpPr>
-          <p:cNvPr id="16" name="TextBox 15"/>
-          <p:cNvSpPr txBox="1"/>
-          <p:nvPr/>
-        </p:nvSpPr>
-        <p:spPr>
-          <a:xfrm>
-            <a:off x="5096169" y="1809600"/>
-            <a:ext cx="1764792" cy="584775"/>
-          </a:xfrm>
-          <a:prstGeom prst="rect">
-            <a:avLst/>
-          </a:prstGeom>
-          <a:noFill/>
-        </p:spPr>
-        <p:txBody>
-          <a:bodyPr wrap="square" anchor="t">
-            <a:spAutoFit/>
-          </a:bodyPr>
-          <a:lstStyle/>
-          <a:p>
-            <a:pPr algn="l">
-              <a:defRPr sz="1500" b="1">
-                <a:solidFill>
-                  <a:srgbClr val="12402D"/>
-                </a:solidFill>
-                <a:latin typeface="Avenir Next"/>
-              </a:defRPr>
-            </a:pPr>
-            <a:r>
-              <a:t>3. Standardised Verification</a:t>
-            </a:r>
-          </a:p>
-        </p:txBody>
-      </p:sp>
-      <p:sp>
-        <p:nvSpPr>
-          <p:cNvPr id="17" name="TextBox 16"/>
-          <p:cNvSpPr txBox="1"/>
-          <p:nvPr/>
-        </p:nvSpPr>
-        <p:spPr>
-          <a:xfrm>
-            <a:off x="5096169" y="2442950"/>
-            <a:ext cx="1764792" cy="2062103"/>
-          </a:xfrm>
-          <a:prstGeom prst="rect">
-            <a:avLst/>
-          </a:prstGeom>
-          <a:noFill/>
-        </p:spPr>
-        <p:txBody>
-          <a:bodyPr wrap="square" anchor="t">
-            <a:spAutoFit/>
-          </a:bodyPr>
-          <a:lstStyle/>
-          <a:p>
-            <a:pPr algn="l">
-              <a:defRPr sz="1350" b="0">
-                <a:solidFill>
-                  <a:srgbClr val="2D2D2D"/>
-                </a:solidFill>
-                <a:latin typeface="Avenir Next"/>
-              </a:defRPr>
-            </a:pPr>
-            <a:r>
-              <a:t>Mandate ex-ante substantiation, lifecycle assessment (LCA), product-category rules (PCRs), and accredited verifiers.</a:t>
-            </a:r>
-          </a:p>
-        </p:txBody>
-      </p:sp>
-      <p:sp>
-        <p:nvSpPr>
-          <p:cNvPr id="18" name="Rounded Rectangle 17"/>
-          <p:cNvSpPr/>
-          <p:nvPr/>
-        </p:nvSpPr>
-        <p:spPr>
-          <a:xfrm>
-            <a:off x="7089561" y="1700443"/>
-            <a:ext cx="1911096" cy="3233507"/>
-          </a:xfrm>
-          <a:prstGeom prst="roundRect">
-            <a:avLst/>
-          </a:prstGeom>
-          <a:solidFill>
-            <a:srgbClr val="FFFDF8"/>
-          </a:solidFill>
-          <a:ln w="12700">
-            <a:solidFill>
-              <a:srgbClr val="D8D1C6"/>
-            </a:solidFill>
-          </a:ln>
-        </p:spPr>
-        <p:style>
-          <a:lnRef idx="1">
-            <a:schemeClr val="accent1"/>
-          </a:lnRef>
-          <a:fillRef idx="3">
-            <a:schemeClr val="accent1"/>
-          </a:fillRef>
-          <a:effectRef idx="2">
-            <a:schemeClr val="accent1"/>
-          </a:effectRef>
-          <a:fontRef idx="minor">
-            <a:schemeClr val="lt1"/>
-          </a:fontRef>
-        </p:style>
-        <p:txBody>
-          <a:bodyPr rtlCol="0" anchor="ctr"/>
-          <a:lstStyle/>
-          <a:p>
-            <a:pPr algn="ctr"/>
-            <a:endParaRPr sz="1600">
-              <a:latin typeface="Avenir Next" panose="020B0503020202020204" pitchFamily="34" charset="0"/>
-            </a:endParaRPr>
-          </a:p>
-        </p:txBody>
-      </p:sp>
-      <p:sp>
-        <p:nvSpPr>
-          <p:cNvPr id="19" name="Rectangle 18"/>
-          <p:cNvSpPr/>
-          <p:nvPr/>
-        </p:nvSpPr>
-        <p:spPr>
-          <a:xfrm>
-            <a:off x="7089561" y="1700443"/>
-            <a:ext cx="1911096" cy="97615"/>
-          </a:xfrm>
-          <a:prstGeom prst="rect">
-            <a:avLst/>
-          </a:prstGeom>
-          <a:solidFill>
-            <a:srgbClr val="C96A3D"/>
-          </a:solidFill>
-          <a:ln>
-            <a:noFill/>
-          </a:ln>
-        </p:spPr>
-        <p:style>
-          <a:lnRef idx="1">
-            <a:schemeClr val="accent1"/>
-          </a:lnRef>
-          <a:fillRef idx="3">
-            <a:schemeClr val="accent1"/>
-          </a:fillRef>
-          <a:effectRef idx="2">
-            <a:schemeClr val="accent1"/>
-          </a:effectRef>
-          <a:fontRef idx="minor">
-            <a:schemeClr val="lt1"/>
-          </a:fontRef>
-        </p:style>
-        <p:txBody>
-          <a:bodyPr rtlCol="0" anchor="ctr"/>
-          <a:lstStyle/>
-          <a:p>
-            <a:pPr algn="ctr"/>
-            <a:endParaRPr sz="1600">
-              <a:latin typeface="Avenir Next" panose="020B0503020202020204" pitchFamily="34" charset="0"/>
-            </a:endParaRPr>
-          </a:p>
-        </p:txBody>
-      </p:sp>
-      <p:sp>
-        <p:nvSpPr>
-          <p:cNvPr id="20" name="TextBox 19"/>
-          <p:cNvSpPr txBox="1"/>
-          <p:nvPr/>
-        </p:nvSpPr>
-        <p:spPr>
-          <a:xfrm>
-            <a:off x="7235865" y="1809600"/>
-            <a:ext cx="1764792" cy="584775"/>
-          </a:xfrm>
-          <a:prstGeom prst="rect">
-            <a:avLst/>
-          </a:prstGeom>
-          <a:noFill/>
-        </p:spPr>
-        <p:txBody>
-          <a:bodyPr wrap="square" anchor="t">
-            <a:spAutoFit/>
-          </a:bodyPr>
-          <a:lstStyle/>
-          <a:p>
-            <a:pPr algn="l">
-              <a:defRPr sz="1500" b="1">
-                <a:solidFill>
-                  <a:srgbClr val="12402D"/>
-                </a:solidFill>
-                <a:latin typeface="Avenir Next"/>
-              </a:defRPr>
-            </a:pPr>
-            <a:r>
-              <a:t>4. Proactive Surveillance</a:t>
-            </a:r>
-          </a:p>
-        </p:txBody>
-      </p:sp>
-      <p:sp>
-        <p:nvSpPr>
-          <p:cNvPr id="21" name="TextBox 20"/>
-          <p:cNvSpPr txBox="1"/>
-          <p:nvPr/>
-        </p:nvSpPr>
-        <p:spPr>
-          <a:xfrm>
-            <a:off x="7235865" y="2442950"/>
-            <a:ext cx="1764792" cy="2062103"/>
-          </a:xfrm>
-          <a:prstGeom prst="rect">
-            <a:avLst/>
-          </a:prstGeom>
-          <a:noFill/>
-        </p:spPr>
-        <p:txBody>
-          <a:bodyPr wrap="square" anchor="t">
-            <a:spAutoFit/>
-          </a:bodyPr>
-          <a:lstStyle/>
-          <a:p>
-            <a:pPr algn="l">
-              <a:defRPr sz="1350" b="0">
-                <a:solidFill>
-                  <a:srgbClr val="2D2D2D"/>
-                </a:solidFill>
-                <a:latin typeface="Avenir Next"/>
-              </a:defRPr>
-            </a:pPr>
-            <a:r>
-              <a:t>Conduct routine market sweeps; cross-check corporate sustainability claims against CPCB/SPCB pollution records.</a:t>
-            </a:r>
-          </a:p>
-        </p:txBody>
-      </p:sp>
-      <p:sp>
-        <p:nvSpPr>
-          <p:cNvPr id="22" name="Rounded Rectangle 21"/>
-          <p:cNvSpPr/>
-          <p:nvPr/>
-        </p:nvSpPr>
-        <p:spPr>
-          <a:xfrm>
-            <a:off x="9229257" y="1700443"/>
-            <a:ext cx="1911096" cy="3233507"/>
-          </a:xfrm>
-          <a:prstGeom prst="roundRect">
-            <a:avLst/>
-          </a:prstGeom>
-          <a:solidFill>
-            <a:srgbClr val="FFFDF8"/>
-          </a:solidFill>
-          <a:ln w="12700">
-            <a:solidFill>
-              <a:srgbClr val="D8D1C6"/>
-            </a:solidFill>
-          </a:ln>
-        </p:spPr>
-        <p:style>
-          <a:lnRef idx="1">
-            <a:schemeClr val="accent1"/>
-          </a:lnRef>
-          <a:fillRef idx="3">
-            <a:schemeClr val="accent1"/>
-          </a:fillRef>
-          <a:effectRef idx="2">
-            <a:schemeClr val="accent1"/>
-          </a:effectRef>
-          <a:fontRef idx="minor">
-            <a:schemeClr val="lt1"/>
-          </a:fontRef>
-        </p:style>
-        <p:txBody>
-          <a:bodyPr rtlCol="0" anchor="ctr"/>
-          <a:lstStyle/>
-          <a:p>
-            <a:pPr algn="ctr"/>
-            <a:endParaRPr sz="1600">
-              <a:latin typeface="Avenir Next" panose="020B0503020202020204" pitchFamily="34" charset="0"/>
-            </a:endParaRPr>
-          </a:p>
-        </p:txBody>
-      </p:sp>
-      <p:sp>
-        <p:nvSpPr>
-          <p:cNvPr id="23" name="Rectangle 22"/>
-          <p:cNvSpPr/>
-          <p:nvPr/>
-        </p:nvSpPr>
-        <p:spPr>
-          <a:xfrm>
-            <a:off x="9229257" y="1700443"/>
-            <a:ext cx="1911096" cy="97615"/>
-          </a:xfrm>
-          <a:prstGeom prst="rect">
-            <a:avLst/>
-          </a:prstGeom>
-          <a:solidFill>
-            <a:srgbClr val="A23E2A"/>
-          </a:solidFill>
-          <a:ln>
-            <a:noFill/>
-          </a:ln>
-        </p:spPr>
-        <p:style>
-          <a:lnRef idx="1">
-            <a:schemeClr val="accent1"/>
-          </a:lnRef>
-          <a:fillRef idx="3">
-            <a:schemeClr val="accent1"/>
-          </a:fillRef>
-          <a:effectRef idx="2">
-            <a:schemeClr val="accent1"/>
-          </a:effectRef>
-          <a:fontRef idx="minor">
-            <a:schemeClr val="lt1"/>
-          </a:fontRef>
-        </p:style>
-        <p:txBody>
-          <a:bodyPr rtlCol="0" anchor="ctr"/>
-          <a:lstStyle/>
-          <a:p>
-            <a:pPr algn="ctr"/>
-            <a:endParaRPr sz="1600">
-              <a:latin typeface="Avenir Next" panose="020B0503020202020204" pitchFamily="34" charset="0"/>
-            </a:endParaRPr>
-          </a:p>
-        </p:txBody>
-      </p:sp>
-      <p:sp>
-        <p:nvSpPr>
-          <p:cNvPr id="24" name="TextBox 23"/>
-          <p:cNvSpPr txBox="1"/>
-          <p:nvPr/>
-        </p:nvSpPr>
-        <p:spPr>
-          <a:xfrm>
-            <a:off x="9375561" y="1809600"/>
-            <a:ext cx="1764792" cy="584775"/>
-          </a:xfrm>
-          <a:prstGeom prst="rect">
-            <a:avLst/>
-          </a:prstGeom>
-          <a:noFill/>
-        </p:spPr>
-        <p:txBody>
-          <a:bodyPr wrap="square" anchor="t">
-            <a:spAutoFit/>
-          </a:bodyPr>
-          <a:lstStyle/>
-          <a:p>
-            <a:pPr algn="l">
-              <a:defRPr sz="1500" b="1">
-                <a:solidFill>
-                  <a:srgbClr val="12402D"/>
-                </a:solidFill>
-                <a:latin typeface="Avenir Next"/>
-              </a:defRPr>
-            </a:pPr>
-            <a:r>
-              <a:t>5. Enforcement Capacity</a:t>
-            </a:r>
-          </a:p>
-        </p:txBody>
-      </p:sp>
-      <p:sp>
-        <p:nvSpPr>
-          <p:cNvPr id="25" name="TextBox 24"/>
-          <p:cNvSpPr txBox="1"/>
-          <p:nvPr/>
-        </p:nvSpPr>
-        <p:spPr>
-          <a:xfrm>
-            <a:off x="9375561" y="2442950"/>
-            <a:ext cx="1764792" cy="1815882"/>
-          </a:xfrm>
-          <a:prstGeom prst="rect">
-            <a:avLst/>
-          </a:prstGeom>
-          <a:noFill/>
-        </p:spPr>
-        <p:txBody>
-          <a:bodyPr wrap="square" anchor="t">
-            <a:spAutoFit/>
-          </a:bodyPr>
-          <a:lstStyle/>
-          <a:p>
-            <a:pPr algn="l">
-              <a:defRPr sz="1350" b="0">
-                <a:solidFill>
-                  <a:srgbClr val="2D2D2D"/>
-                </a:solidFill>
-                <a:latin typeface="Avenir Next"/>
-              </a:defRPr>
-            </a:pPr>
-            <a:r>
-              <a:t>Build dedicated in-house ESG surveillance capacity and shared expertise in carbon accounting and GHG assurance.</a:t>
-            </a:r>
-          </a:p>
-        </p:txBody>
-      </p:sp>
-      <p:sp>
-        <p:nvSpPr>
-          <p:cNvPr id="28" name="TextBox 27"/>
-          <p:cNvSpPr txBox="1"/>
-          <p:nvPr/>
-        </p:nvSpPr>
-        <p:spPr>
-          <a:xfrm>
-            <a:off x="734355" y="6572273"/>
-            <a:ext cx="1596912" cy="246221"/>
-          </a:xfrm>
-          <a:prstGeom prst="rect">
-            <a:avLst/>
-          </a:prstGeom>
-          <a:noFill/>
-        </p:spPr>
-        <p:txBody>
-          <a:bodyPr wrap="none">
-            <a:spAutoFit/>
-          </a:bodyPr>
-          <a:lstStyle/>
-          <a:p>
-            <a:pPr>
-              <a:defRPr sz="850">
-                <a:solidFill>
-                  <a:srgbClr val="6B6F6A"/>
-                </a:solidFill>
-                <a:latin typeface="Avenir Next"/>
-              </a:defRPr>
-            </a:pPr>
-            <a:r>
-              <a:rPr sz="1000" dirty="0"/>
-              <a:t>Source base: Chapter 6</a:t>
-            </a:r>
-            <a:r>
-              <a:rPr lang="en-US" sz="1000" dirty="0"/>
-              <a:t>.</a:t>
-            </a:r>
-            <a:endParaRPr sz="1000" dirty="0"/>
-          </a:p>
-        </p:txBody>
-      </p:sp>
-      <p:sp>
-        <p:nvSpPr>
-          <p:cNvPr id="2" name="Rounded Rectangle 1">
-            <a:extLst>
-              <a:ext uri="{FF2B5EF4-FFF2-40B4-BE49-F238E27FC236}">
-                <a16:creationId xmlns:a16="http://schemas.microsoft.com/office/drawing/2014/main" id="{FBD67D51-3F39-14D2-2C48-0863C65689EA}"/>
-              </a:ext>
-            </a:extLst>
-          </p:cNvPr>
-          <p:cNvSpPr/>
-          <p:nvPr/>
-        </p:nvSpPr>
-        <p:spPr>
-          <a:xfrm>
-            <a:off x="620714" y="5680103"/>
-            <a:ext cx="10835640" cy="584775"/>
-          </a:xfrm>
-          <a:prstGeom prst="roundRect">
-            <a:avLst>
-              <a:gd name="adj" fmla="val 14000"/>
-            </a:avLst>
-          </a:prstGeom>
-          <a:solidFill>
-            <a:srgbClr val="FFF6EA"/>
-          </a:solidFill>
-          <a:ln w="12700">
-            <a:solidFill>
-              <a:srgbClr val="E7C894"/>
-            </a:solidFill>
-          </a:ln>
-          <a:effectLst/>
-        </p:spPr>
-        <p:style>
-          <a:lnRef idx="1">
-            <a:schemeClr val="accent1"/>
-          </a:lnRef>
-          <a:fillRef idx="3">
-            <a:schemeClr val="accent1"/>
-          </a:fillRef>
-          <a:effectRef idx="2">
-            <a:schemeClr val="accent1"/>
-          </a:effectRef>
-          <a:fontRef idx="minor">
-            <a:schemeClr val="lt1"/>
-          </a:fontRef>
-        </p:style>
-        <p:txBody>
-          <a:bodyPr rtlCol="0" anchor="ctr"/>
-          <a:lstStyle/>
-          <a:p>
-            <a:endParaRPr sz="2400">
-              <a:latin typeface="Avenir Next" panose="020B0503020202020204" pitchFamily="34" charset="0"/>
-            </a:endParaRPr>
-          </a:p>
-        </p:txBody>
-      </p:sp>
-      <p:sp>
-        <p:nvSpPr>
-          <p:cNvPr id="26" name="TextBox 25">
-            <a:extLst>
-              <a:ext uri="{FF2B5EF4-FFF2-40B4-BE49-F238E27FC236}">
-                <a16:creationId xmlns:a16="http://schemas.microsoft.com/office/drawing/2014/main" id="{8089D9FA-8EE8-EC8F-BD84-3F5E80F48418}"/>
-              </a:ext>
-            </a:extLst>
-          </p:cNvPr>
-          <p:cNvSpPr txBox="1"/>
-          <p:nvPr/>
-        </p:nvSpPr>
-        <p:spPr>
-          <a:xfrm>
-            <a:off x="750714" y="5744235"/>
-            <a:ext cx="10575640" cy="477054"/>
-          </a:xfrm>
-          <a:prstGeom prst="rect">
-            <a:avLst/>
-          </a:prstGeom>
-          <a:noFill/>
-        </p:spPr>
-        <p:txBody>
-          <a:bodyPr wrap="square" lIns="45720" tIns="22860" rIns="45720" bIns="22860" anchor="ctr">
-            <a:spAutoFit/>
-          </a:bodyPr>
-          <a:lstStyle/>
-          <a:p>
-            <a:pPr algn="just">
-              <a:defRPr sz="1100">
-                <a:solidFill>
-                  <a:srgbClr val="282828"/>
-                </a:solidFill>
-              </a:defRPr>
-            </a:pPr>
-            <a:r>
-              <a:rPr lang="en-IN" sz="1400" b="1" dirty="0">
-                <a:solidFill>
-                  <a:srgbClr val="173F35"/>
-                </a:solidFill>
-              </a:rPr>
-              <a:t>Answers Research Question 7: What legal and policy recommendations can create an integrated liability framework that holds corporations accountable for misleading environmental claims?</a:t>
-            </a:r>
-            <a:endParaRPr lang="en-US" sz="1400" b="1" dirty="0">
-              <a:solidFill>
-                <a:srgbClr val="173F35"/>
-              </a:solidFill>
-            </a:endParaRPr>
-          </a:p>
-        </p:txBody>
-      </p:sp>
-    </p:spTree>
-    <p:extLst>
-      <p:ext uri="{BB962C8B-B14F-4D97-AF65-F5344CB8AC3E}">
-        <p14:creationId xmlns:p14="http://schemas.microsoft.com/office/powerpoint/2010/main" val="918971880"/>
-      </p:ext>
-    </p:extLst>
-  </p:cSld>
-  <p:clrMapOvr>
-    <a:masterClrMapping/>
-  </p:clrMapOvr>
-</p:sld>
-</file>
-
-<file path=ppt/slides/slide22.xml><?xml version="1.0" encoding="utf-8"?>
-<p:sld xmlns:a="http://schemas.openxmlformats.org/drawingml/2006/main" xmlns:r="http://schemas.openxmlformats.org/officeDocument/2006/relationships" xmlns:p="http://schemas.openxmlformats.org/presentationml/2006/main">
-  <p:cSld>
-    <p:spTree>
-      <p:nvGrpSpPr>
-        <p:cNvPr id="1" name=""/>
-        <p:cNvGrpSpPr/>
-        <p:nvPr/>
-      </p:nvGrpSpPr>
-      <p:grpSpPr>
-        <a:xfrm>
-          <a:off x="0" y="0"/>
-          <a:ext cx="0" cy="0"/>
-          <a:chOff x="0" y="0"/>
-          <a:chExt cx="0" cy="0"/>
-        </a:xfrm>
-      </p:grpSpPr>
-      <p:sp>
-        <p:nvSpPr>
-          <p:cNvPr id="3" name="Rectangle 2"/>
-          <p:cNvSpPr/>
-          <p:nvPr/>
-        </p:nvSpPr>
-        <p:spPr>
-          <a:xfrm>
-            <a:off x="0" y="0"/>
-            <a:ext cx="12191695" cy="201168"/>
-          </a:xfrm>
-          <a:prstGeom prst="rect">
-            <a:avLst/>
-          </a:prstGeom>
-          <a:solidFill>
-            <a:srgbClr val="173F35"/>
-          </a:solidFill>
-          <a:ln>
-            <a:noFill/>
-          </a:ln>
-        </p:spPr>
-        <p:style>
-          <a:lnRef idx="1">
-            <a:schemeClr val="accent1"/>
-          </a:lnRef>
-          <a:fillRef idx="3">
-            <a:schemeClr val="accent1"/>
-          </a:fillRef>
-          <a:effectRef idx="2">
-            <a:schemeClr val="accent1"/>
-          </a:effectRef>
-          <a:fontRef idx="minor">
-            <a:schemeClr val="lt1"/>
-          </a:fontRef>
-        </p:style>
-        <p:txBody>
-          <a:bodyPr rtlCol="0" anchor="ctr"/>
-          <a:lstStyle/>
-          <a:p>
-            <a:pPr algn="ctr"/>
-            <a:endParaRPr/>
-          </a:p>
-        </p:txBody>
-      </p:sp>
-      <p:sp>
-        <p:nvSpPr>
-          <p:cNvPr id="4" name="TextBox 3"/>
-          <p:cNvSpPr txBox="1"/>
-          <p:nvPr/>
-        </p:nvSpPr>
-        <p:spPr>
-          <a:xfrm>
-            <a:off x="548639" y="384048"/>
-            <a:ext cx="9380971" cy="584775"/>
-          </a:xfrm>
-          <a:prstGeom prst="rect">
-            <a:avLst/>
-          </a:prstGeom>
-          <a:noFill/>
-        </p:spPr>
-        <p:txBody>
-          <a:bodyPr wrap="square">
-            <a:spAutoFit/>
-          </a:bodyPr>
-          <a:lstStyle/>
-          <a:p>
-            <a:pPr>
-              <a:defRPr sz="2200" b="1">
-                <a:solidFill>
-                  <a:srgbClr val="173F35"/>
-                </a:solidFill>
-                <a:latin typeface="Avenir Next Demi Bold"/>
-              </a:defRPr>
-            </a:pPr>
-            <a:r>
-              <a:rPr lang="en-US" sz="3200" dirty="0"/>
-              <a:t>Specific </a:t>
-            </a:r>
-            <a:r>
-              <a:rPr sz="3200" dirty="0"/>
-              <a:t>Recommendations</a:t>
-            </a:r>
-            <a:r>
-              <a:rPr lang="en-US" sz="3200" dirty="0"/>
-              <a:t> for</a:t>
-            </a:r>
-            <a:r>
-              <a:rPr sz="3200" dirty="0"/>
-              <a:t> Legal Refor</a:t>
-            </a:r>
-            <a:r>
-              <a:rPr lang="en-US" sz="3200" dirty="0"/>
-              <a:t>m</a:t>
-            </a:r>
-            <a:endParaRPr sz="3200" dirty="0"/>
-          </a:p>
-        </p:txBody>
-      </p:sp>
-      <p:sp>
-        <p:nvSpPr>
-          <p:cNvPr id="6" name="Rounded Rectangle 5"/>
-          <p:cNvSpPr/>
-          <p:nvPr/>
-        </p:nvSpPr>
-        <p:spPr>
-          <a:xfrm>
-            <a:off x="652690" y="1474623"/>
-            <a:ext cx="3300984" cy="4023360"/>
-          </a:xfrm>
-          <a:prstGeom prst="roundRect">
-            <a:avLst/>
-          </a:prstGeom>
-          <a:solidFill>
-            <a:srgbClr val="FFFDF8"/>
-          </a:solidFill>
-          <a:ln w="12700">
-            <a:solidFill>
-              <a:srgbClr val="D8D1C6"/>
-            </a:solidFill>
-          </a:ln>
-        </p:spPr>
-        <p:style>
-          <a:lnRef idx="1">
-            <a:schemeClr val="accent1"/>
-          </a:lnRef>
-          <a:fillRef idx="3">
-            <a:schemeClr val="accent1"/>
-          </a:fillRef>
-          <a:effectRef idx="2">
-            <a:schemeClr val="accent1"/>
-          </a:effectRef>
-          <a:fontRef idx="minor">
-            <a:schemeClr val="lt1"/>
-          </a:fontRef>
-        </p:style>
-        <p:txBody>
-          <a:bodyPr rtlCol="0" anchor="ctr"/>
-          <a:lstStyle/>
-          <a:p>
-            <a:pPr algn="ctr"/>
-            <a:endParaRPr sz="1400">
-              <a:latin typeface="Avenir Next" panose="020B0503020202020204" pitchFamily="34" charset="0"/>
-            </a:endParaRPr>
-          </a:p>
-        </p:txBody>
-      </p:sp>
-      <p:sp>
-        <p:nvSpPr>
-          <p:cNvPr id="7" name="Rectangle 6"/>
-          <p:cNvSpPr/>
-          <p:nvPr/>
-        </p:nvSpPr>
-        <p:spPr>
-          <a:xfrm>
-            <a:off x="652690" y="1474623"/>
-            <a:ext cx="3255264" cy="73152"/>
-          </a:xfrm>
-          <a:prstGeom prst="rect">
-            <a:avLst/>
-          </a:prstGeom>
-          <a:solidFill>
-            <a:srgbClr val="C96A3D"/>
-          </a:solidFill>
-          <a:ln>
-            <a:noFill/>
-          </a:ln>
-        </p:spPr>
-        <p:style>
-          <a:lnRef idx="1">
-            <a:schemeClr val="accent1"/>
-          </a:lnRef>
-          <a:fillRef idx="3">
-            <a:schemeClr val="accent1"/>
-          </a:fillRef>
-          <a:effectRef idx="2">
-            <a:schemeClr val="accent1"/>
-          </a:effectRef>
-          <a:fontRef idx="minor">
-            <a:schemeClr val="lt1"/>
-          </a:fontRef>
-        </p:style>
-        <p:txBody>
-          <a:bodyPr rtlCol="0" anchor="ctr"/>
-          <a:lstStyle/>
-          <a:p>
-            <a:pPr algn="ctr"/>
-            <a:endParaRPr sz="1400">
-              <a:latin typeface="Avenir Next" panose="020B0503020202020204" pitchFamily="34" charset="0"/>
-            </a:endParaRPr>
-          </a:p>
-        </p:txBody>
-      </p:sp>
-      <p:sp>
-        <p:nvSpPr>
-          <p:cNvPr id="8" name="TextBox 7"/>
-          <p:cNvSpPr txBox="1"/>
-          <p:nvPr/>
-        </p:nvSpPr>
-        <p:spPr>
-          <a:xfrm>
-            <a:off x="798994" y="1659789"/>
-            <a:ext cx="3255264" cy="338554"/>
-          </a:xfrm>
-          <a:prstGeom prst="rect">
-            <a:avLst/>
-          </a:prstGeom>
-          <a:noFill/>
-        </p:spPr>
-        <p:txBody>
-          <a:bodyPr wrap="square" anchor="t">
-            <a:spAutoFit/>
-          </a:bodyPr>
-          <a:lstStyle/>
-          <a:p>
-            <a:pPr algn="l">
-              <a:defRPr sz="1600" b="1">
-                <a:solidFill>
-                  <a:srgbClr val="173F35"/>
-                </a:solidFill>
-                <a:latin typeface="Avenir Next Demi Bold"/>
-              </a:defRPr>
-            </a:pPr>
-            <a:r>
-              <a:rPr sz="1600" dirty="0">
-                <a:latin typeface="Avenir Next" panose="020B0503020202020204" pitchFamily="34" charset="0"/>
-              </a:rPr>
-              <a:t>Companies Act / MCA</a:t>
-            </a:r>
-          </a:p>
-        </p:txBody>
-      </p:sp>
-      <p:sp>
-        <p:nvSpPr>
-          <p:cNvPr id="9" name="TextBox 8"/>
-          <p:cNvSpPr txBox="1"/>
-          <p:nvPr/>
-        </p:nvSpPr>
-        <p:spPr>
-          <a:xfrm>
-            <a:off x="762418" y="2061088"/>
-            <a:ext cx="3255264" cy="3171124"/>
-          </a:xfrm>
-          <a:prstGeom prst="rect">
-            <a:avLst/>
-          </a:prstGeom>
-          <a:noFill/>
-        </p:spPr>
-        <p:txBody>
-          <a:bodyPr wrap="square" anchor="t">
-            <a:spAutoFit/>
-          </a:bodyPr>
-          <a:lstStyle/>
-          <a:p>
-            <a:pPr algn="l">
-              <a:lnSpc>
-                <a:spcPct val="105000"/>
-              </a:lnSpc>
-              <a:spcAft>
-                <a:spcPts val="600"/>
-              </a:spcAft>
-              <a:defRPr sz="1150" b="0">
-                <a:solidFill>
-                  <a:srgbClr val="2D2D2D"/>
-                </a:solidFill>
-                <a:latin typeface="Avenir Next"/>
-              </a:defRPr>
-            </a:pPr>
-            <a:r>
-              <a:rPr sz="1100" b="1">
-                <a:latin typeface="Avenir Next"/>
-              </a:rPr>
-              <a:t>• Turnover Penalties &amp; Disqualification: </a:t>
-            </a:r>
-            <a:r>
-              <a:rPr sz="1100" b="0">
-                <a:latin typeface="Avenir Next"/>
-              </a:rPr>
-              <a:t>Amend Sec 166(7) to penalise misleading claims up to 1% turnover (min ₹5 Cr) + up to 3-year Director Disqualification under Sec 164(2)(b).</a:t>
-            </a:r>
-          </a:p>
-          <a:p>
-            <a:pPr>
-              <a:lnSpc>
-                <a:spcPct val="105000"/>
-              </a:lnSpc>
-              <a:spcAft>
-                <a:spcPts val="600"/>
-              </a:spcAft>
-            </a:pPr>
-            <a:r>
-              <a:rPr sz="1100" b="1">
-                <a:latin typeface="Avenir Next"/>
-              </a:rPr>
-              <a:t>• Direct Statutory Standing: </a:t>
-            </a:r>
-            <a:r>
-              <a:rPr sz="1100" b="0">
-                <a:latin typeface="Avenir Next"/>
-              </a:rPr>
-              <a:t>Insert Sec 166(8) empowering affected persons, creditors, and consumer NGOs before NCLT without Sec 244 shareholding caps.</a:t>
-            </a:r>
-          </a:p>
-          <a:p>
-            <a:pPr>
-              <a:lnSpc>
-                <a:spcPct val="105000"/>
-              </a:lnSpc>
-              <a:spcAft>
-                <a:spcPts val="600"/>
-              </a:spcAft>
-            </a:pPr>
-            <a:r>
-              <a:rPr sz="1100" b="1">
-                <a:latin typeface="Avenir Next"/>
-              </a:rPr>
-              <a:t>• Mandatory ESG Committee: </a:t>
-            </a:r>
-            <a:r>
-              <a:rPr sz="1100" b="0">
-                <a:latin typeface="Avenir Next"/>
-              </a:rPr>
-              <a:t>Insert Sec 135A requiring Board ESG Committee (with carbon/ESG expert) for ex-ante claim pre-approval.</a:t>
-            </a:r>
-          </a:p>
-          <a:p>
-            <a:pPr>
-              <a:lnSpc>
-                <a:spcPct val="105000"/>
-              </a:lnSpc>
-              <a:spcAft>
-                <a:spcPts val="600"/>
-              </a:spcAft>
-            </a:pPr>
-            <a:r>
-              <a:rPr sz="1100" b="1">
-                <a:latin typeface="Avenir Next"/>
-              </a:rPr>
-              <a:t>• Whistleblower Protection: </a:t>
-            </a:r>
-            <a:r>
-              <a:rPr sz="1100" b="0">
-                <a:latin typeface="Avenir Next"/>
-              </a:rPr>
-              <a:t>Amend Sec 177(9) vigil mechanism to explicitly cover environmental misrepresentations under Sec 166(2).</a:t>
-            </a:r>
-          </a:p>
-        </p:txBody>
-      </p:sp>
-      <p:sp>
-        <p:nvSpPr>
-          <p:cNvPr id="10" name="Rounded Rectangle 9"/>
-          <p:cNvSpPr/>
-          <p:nvPr/>
-        </p:nvSpPr>
-        <p:spPr>
-          <a:xfrm>
-            <a:off x="4246282" y="1474623"/>
-            <a:ext cx="3300984" cy="4023360"/>
-          </a:xfrm>
-          <a:prstGeom prst="roundRect">
-            <a:avLst/>
-          </a:prstGeom>
-          <a:solidFill>
-            <a:srgbClr val="FFFDF8"/>
-          </a:solidFill>
-          <a:ln w="12700">
-            <a:solidFill>
-              <a:srgbClr val="D8D1C6"/>
-            </a:solidFill>
-          </a:ln>
-        </p:spPr>
-        <p:style>
-          <a:lnRef idx="1">
-            <a:schemeClr val="accent1"/>
-          </a:lnRef>
-          <a:fillRef idx="3">
-            <a:schemeClr val="accent1"/>
-          </a:fillRef>
-          <a:effectRef idx="2">
-            <a:schemeClr val="accent1"/>
-          </a:effectRef>
-          <a:fontRef idx="minor">
-            <a:schemeClr val="lt1"/>
-          </a:fontRef>
-        </p:style>
-        <p:txBody>
-          <a:bodyPr rtlCol="0" anchor="ctr"/>
-          <a:lstStyle/>
-          <a:p>
-            <a:pPr algn="ctr"/>
-            <a:endParaRPr sz="1400">
-              <a:latin typeface="Avenir Next" panose="020B0503020202020204" pitchFamily="34" charset="0"/>
-            </a:endParaRPr>
-          </a:p>
-        </p:txBody>
-      </p:sp>
-      <p:sp>
-        <p:nvSpPr>
-          <p:cNvPr id="11" name="Rectangle 10"/>
-          <p:cNvSpPr/>
-          <p:nvPr/>
-        </p:nvSpPr>
-        <p:spPr>
-          <a:xfrm>
-            <a:off x="4246282" y="1474623"/>
-            <a:ext cx="3255264" cy="73152"/>
-          </a:xfrm>
-          <a:prstGeom prst="rect">
-            <a:avLst/>
-          </a:prstGeom>
-          <a:solidFill>
-            <a:srgbClr val="C8A24D"/>
-          </a:solidFill>
-          <a:ln>
-            <a:noFill/>
-          </a:ln>
-        </p:spPr>
-        <p:style>
-          <a:lnRef idx="1">
-            <a:schemeClr val="accent1"/>
-          </a:lnRef>
-          <a:fillRef idx="3">
-            <a:schemeClr val="accent1"/>
-          </a:fillRef>
-          <a:effectRef idx="2">
-            <a:schemeClr val="accent1"/>
-          </a:effectRef>
-          <a:fontRef idx="minor">
-            <a:schemeClr val="lt1"/>
-          </a:fontRef>
-        </p:style>
-        <p:txBody>
-          <a:bodyPr rtlCol="0" anchor="ctr"/>
-          <a:lstStyle/>
-          <a:p>
-            <a:pPr algn="ctr"/>
-            <a:endParaRPr sz="1400">
-              <a:latin typeface="Avenir Next" panose="020B0503020202020204" pitchFamily="34" charset="0"/>
-            </a:endParaRPr>
-          </a:p>
-        </p:txBody>
-      </p:sp>
-      <p:sp>
-        <p:nvSpPr>
-          <p:cNvPr id="12" name="TextBox 11"/>
-          <p:cNvSpPr txBox="1"/>
-          <p:nvPr/>
-        </p:nvSpPr>
-        <p:spPr>
-          <a:xfrm>
-            <a:off x="4392586" y="1659789"/>
-            <a:ext cx="3255264" cy="338554"/>
-          </a:xfrm>
-          <a:prstGeom prst="rect">
-            <a:avLst/>
-          </a:prstGeom>
-          <a:noFill/>
-        </p:spPr>
-        <p:txBody>
-          <a:bodyPr wrap="square" anchor="t">
-            <a:spAutoFit/>
-          </a:bodyPr>
-          <a:lstStyle/>
-          <a:p>
-            <a:pPr algn="l">
-              <a:defRPr sz="1600" b="1">
-                <a:solidFill>
-                  <a:srgbClr val="173F35"/>
-                </a:solidFill>
-                <a:latin typeface="Avenir Next Demi Bold"/>
-              </a:defRPr>
-            </a:pPr>
-            <a:r>
-              <a:rPr sz="1600">
-                <a:latin typeface="Avenir Next" panose="020B0503020202020204" pitchFamily="34" charset="0"/>
-              </a:rPr>
-              <a:t>SEBI / Securities law</a:t>
-            </a:r>
-          </a:p>
-        </p:txBody>
-      </p:sp>
-      <p:sp>
-        <p:nvSpPr>
-          <p:cNvPr id="13" name="TextBox 12"/>
-          <p:cNvSpPr txBox="1"/>
-          <p:nvPr/>
-        </p:nvSpPr>
-        <p:spPr>
-          <a:xfrm>
-            <a:off x="4389385" y="2035028"/>
-            <a:ext cx="3255264" cy="2934136"/>
-          </a:xfrm>
-          <a:prstGeom prst="rect">
-            <a:avLst/>
-          </a:prstGeom>
-          <a:noFill/>
-        </p:spPr>
-        <p:txBody>
-          <a:bodyPr wrap="square" anchor="t">
-            <a:spAutoFit/>
-          </a:bodyPr>
-          <a:lstStyle/>
-          <a:p>
-            <a:pPr algn="l">
-              <a:lnSpc>
-                <a:spcPct val="105000"/>
-              </a:lnSpc>
-              <a:spcAft>
-                <a:spcPts val="600"/>
-              </a:spcAft>
-              <a:defRPr sz="1150" b="0">
-                <a:solidFill>
-                  <a:srgbClr val="2D2D2D"/>
-                </a:solidFill>
-                <a:latin typeface="Avenir Next"/>
-              </a:defRPr>
-            </a:pPr>
-            <a:r>
-              <a:rPr sz="1100" b="1">
-                <a:latin typeface="Avenir Next"/>
-              </a:rPr>
-              <a:t>• Repeal Backsliding / Restore Rigour: </a:t>
-            </a:r>
-            <a:r>
-              <a:rPr sz="1100" b="0">
-                <a:latin typeface="Avenir Next"/>
-              </a:rPr>
-              <a:t>Amend BRSR to mandate Reasonable Assurance (ISAE 3000) &amp; full Scope 3 Value Chain (repealing 75% cap &amp; 2% threshold).</a:t>
-            </a:r>
-          </a:p>
-          <a:p>
-            <a:pPr>
-              <a:lnSpc>
-                <a:spcPct val="105000"/>
-              </a:lnSpc>
-              <a:spcAft>
-                <a:spcPts val="600"/>
-              </a:spcAft>
-            </a:pPr>
-            <a:r>
-              <a:rPr sz="1100" b="1">
-                <a:latin typeface="Avenir Next"/>
-              </a:rPr>
-              <a:t>• PFUTP Fraud &amp; Referral Bridge: </a:t>
-            </a:r>
-            <a:r>
-              <a:rPr sz="1100" b="0">
-                <a:latin typeface="Avenir Next"/>
-              </a:rPr>
-              <a:t>Classify material ESG misstatements as fraud under PFUTP (Sec 15HA: ₹25 Cr / 3x profit) + mandatory referral to MCA.</a:t>
-            </a:r>
-          </a:p>
-          <a:p>
-            <a:pPr>
-              <a:lnSpc>
-                <a:spcPct val="105000"/>
-              </a:lnSpc>
-              <a:spcAft>
-                <a:spcPts val="600"/>
-              </a:spcAft>
-            </a:pPr>
-            <a:r>
-              <a:rPr sz="1100" b="1">
-                <a:latin typeface="Avenir Next"/>
-              </a:rPr>
-              <a:t>• Double Materiality &amp; Sector Maps: </a:t>
-            </a:r>
-            <a:r>
-              <a:rPr sz="1100" b="0">
-                <a:latin typeface="Avenir Next"/>
-              </a:rPr>
-              <a:t>Mandate Impact Materiality alongside Financial Materiality, with sector-specific maps for high-impact sectors (Energy, Cement, FMCG).</a:t>
-            </a:r>
-          </a:p>
-          <a:p>
-            <a:pPr>
-              <a:lnSpc>
-                <a:spcPct val="105000"/>
-              </a:lnSpc>
-              <a:spcAft>
-                <a:spcPts val="600"/>
-              </a:spcAft>
-            </a:pPr>
-            <a:r>
-              <a:rPr sz="1100" b="1">
-                <a:latin typeface="Avenir Next"/>
-              </a:rPr>
-              <a:t>• ESG Rating Providers (ERPs): </a:t>
-            </a:r>
-            <a:r>
-              <a:rPr sz="1100" b="0">
-                <a:latin typeface="Avenir Next"/>
-              </a:rPr>
-              <a:t>Introduce monetary penalties under Sec 15HB and minimum competence standards for ESG analysts.</a:t>
-            </a:r>
-          </a:p>
-        </p:txBody>
-      </p:sp>
-      <p:sp>
-        <p:nvSpPr>
-          <p:cNvPr id="14" name="Rounded Rectangle 13"/>
-          <p:cNvSpPr/>
-          <p:nvPr/>
-        </p:nvSpPr>
-        <p:spPr>
-          <a:xfrm>
-            <a:off x="7839874" y="1474623"/>
-            <a:ext cx="3300984" cy="4023360"/>
-          </a:xfrm>
-          <a:prstGeom prst="roundRect">
-            <a:avLst/>
-          </a:prstGeom>
-          <a:solidFill>
-            <a:srgbClr val="FFFDF8"/>
-          </a:solidFill>
-          <a:ln w="12700">
-            <a:solidFill>
-              <a:srgbClr val="D8D1C6"/>
-            </a:solidFill>
-          </a:ln>
-        </p:spPr>
-        <p:style>
-          <a:lnRef idx="1">
-            <a:schemeClr val="accent1"/>
-          </a:lnRef>
-          <a:fillRef idx="3">
-            <a:schemeClr val="accent1"/>
-          </a:fillRef>
-          <a:effectRef idx="2">
-            <a:schemeClr val="accent1"/>
-          </a:effectRef>
-          <a:fontRef idx="minor">
-            <a:schemeClr val="lt1"/>
-          </a:fontRef>
-        </p:style>
-        <p:txBody>
-          <a:bodyPr rtlCol="0" anchor="ctr"/>
-          <a:lstStyle/>
-          <a:p>
-            <a:pPr algn="ctr"/>
-            <a:endParaRPr sz="1400">
-              <a:latin typeface="Avenir Next" panose="020B0503020202020204" pitchFamily="34" charset="0"/>
-            </a:endParaRPr>
-          </a:p>
-        </p:txBody>
-      </p:sp>
-      <p:sp>
-        <p:nvSpPr>
-          <p:cNvPr id="15" name="Rectangle 14"/>
-          <p:cNvSpPr/>
-          <p:nvPr/>
-        </p:nvSpPr>
-        <p:spPr>
-          <a:xfrm>
-            <a:off x="7839874" y="1474623"/>
-            <a:ext cx="3255264" cy="73152"/>
-          </a:xfrm>
-          <a:prstGeom prst="rect">
-            <a:avLst/>
-          </a:prstGeom>
-          <a:solidFill>
-            <a:srgbClr val="6A8C69"/>
-          </a:solidFill>
-          <a:ln>
-            <a:noFill/>
-          </a:ln>
-        </p:spPr>
-        <p:style>
-          <a:lnRef idx="1">
-            <a:schemeClr val="accent1"/>
-          </a:lnRef>
-          <a:fillRef idx="3">
-            <a:schemeClr val="accent1"/>
-          </a:fillRef>
-          <a:effectRef idx="2">
-            <a:schemeClr val="accent1"/>
-          </a:effectRef>
-          <a:fontRef idx="minor">
-            <a:schemeClr val="lt1"/>
-          </a:fontRef>
-        </p:style>
-        <p:txBody>
-          <a:bodyPr rtlCol="0" anchor="ctr"/>
-          <a:lstStyle/>
-          <a:p>
-            <a:pPr algn="ctr"/>
-            <a:endParaRPr sz="1400">
-              <a:latin typeface="Avenir Next" panose="020B0503020202020204" pitchFamily="34" charset="0"/>
-            </a:endParaRPr>
-          </a:p>
-        </p:txBody>
-      </p:sp>
-      <p:sp>
-        <p:nvSpPr>
-          <p:cNvPr id="16" name="TextBox 15"/>
-          <p:cNvSpPr txBox="1"/>
-          <p:nvPr/>
-        </p:nvSpPr>
-        <p:spPr>
-          <a:xfrm>
-            <a:off x="7986178" y="1659789"/>
-            <a:ext cx="3255264" cy="338554"/>
-          </a:xfrm>
-          <a:prstGeom prst="rect">
-            <a:avLst/>
-          </a:prstGeom>
-          <a:noFill/>
-        </p:spPr>
-        <p:txBody>
-          <a:bodyPr wrap="square" anchor="t">
-            <a:spAutoFit/>
-          </a:bodyPr>
-          <a:lstStyle/>
-          <a:p>
-            <a:pPr algn="l">
-              <a:defRPr sz="1600" b="1">
-                <a:solidFill>
-                  <a:srgbClr val="173F35"/>
-                </a:solidFill>
-                <a:latin typeface="Avenir Next Demi Bold"/>
-              </a:defRPr>
-            </a:pPr>
-            <a:r>
-              <a:rPr sz="1600">
-                <a:latin typeface="Avenir Next" panose="020B0503020202020204" pitchFamily="34" charset="0"/>
-              </a:rPr>
-              <a:t>CCPA / Consumer law</a:t>
-            </a:r>
-          </a:p>
-        </p:txBody>
-      </p:sp>
-      <p:sp>
-        <p:nvSpPr>
-          <p:cNvPr id="17" name="TextBox 16"/>
-          <p:cNvSpPr txBox="1"/>
-          <p:nvPr/>
-        </p:nvSpPr>
-        <p:spPr>
-          <a:xfrm>
-            <a:off x="7937257" y="2008967"/>
-            <a:ext cx="3255264" cy="3171124"/>
-          </a:xfrm>
-          <a:prstGeom prst="rect">
-            <a:avLst/>
-          </a:prstGeom>
-          <a:noFill/>
-        </p:spPr>
-        <p:txBody>
-          <a:bodyPr wrap="square" anchor="t">
-            <a:spAutoFit/>
-          </a:bodyPr>
-          <a:lstStyle/>
-          <a:p>
-            <a:pPr algn="l">
-              <a:lnSpc>
-                <a:spcPct val="105000"/>
-              </a:lnSpc>
-              <a:spcAft>
-                <a:spcPts val="600"/>
-              </a:spcAft>
-              <a:defRPr sz="1150" b="0">
-                <a:solidFill>
-                  <a:srgbClr val="2D2D2D"/>
-                </a:solidFill>
-                <a:latin typeface="Avenir Next"/>
-              </a:defRPr>
-            </a:pPr>
-            <a:r>
-              <a:rPr sz="1100" b="1">
-                <a:latin typeface="Avenir Next"/>
-              </a:rPr>
-              <a:t>• Binding Sec 101 Rules: </a:t>
-            </a:r>
-            <a:r>
-              <a:rPr sz="1100" b="0">
-                <a:latin typeface="Avenir Next"/>
-              </a:rPr>
-              <a:t>Elevate 2024 Guidelines into formal delegated legislation with parliamentary oversight and statutory penalty schedules.</a:t>
-            </a:r>
-          </a:p>
-          <a:p>
-            <a:pPr>
-              <a:lnSpc>
-                <a:spcPct val="105000"/>
-              </a:lnSpc>
-              <a:spcAft>
-                <a:spcPts val="600"/>
-              </a:spcAft>
-            </a:pPr>
-            <a:r>
-              <a:rPr sz="1100" b="1">
-                <a:latin typeface="Avenir Next"/>
-              </a:rPr>
-              <a:t>• Turnover Fines &amp; Corrective Ads: </a:t>
-            </a:r>
-            <a:r>
-              <a:rPr sz="1100" b="0">
-                <a:latin typeface="Avenir Next"/>
-              </a:rPr>
-              <a:t>Amend Sec 21 to impose 1% to 4% turnover penalties + Mandatory Corrective Advertising of equal prominence and duration.</a:t>
-            </a:r>
-          </a:p>
-          <a:p>
-            <a:pPr>
-              <a:lnSpc>
-                <a:spcPct val="105000"/>
-              </a:lnSpc>
-              <a:spcAft>
-                <a:spcPts val="600"/>
-              </a:spcAft>
-            </a:pPr>
-            <a:r>
-              <a:rPr sz="1100" b="1">
-                <a:latin typeface="Avenir Next"/>
-              </a:rPr>
-              <a:t>• Narrow Puffery (Guideline 3(h)): </a:t>
-            </a:r>
-            <a:r>
-              <a:rPr sz="1100" b="0">
-                <a:latin typeface="Avenir Next"/>
-              </a:rPr>
-              <a:t>Measurable claims require published transition plans and budgets; green imagery carries rebuttable presumption of claim.</a:t>
-            </a:r>
-          </a:p>
-          <a:p>
-            <a:pPr>
-              <a:lnSpc>
-                <a:spcPct val="105000"/>
-              </a:lnSpc>
-              <a:spcAft>
-                <a:spcPts val="600"/>
-              </a:spcAft>
-            </a:pPr>
-            <a:r>
-              <a:rPr sz="1100" b="1">
-                <a:latin typeface="Avenir Next"/>
-              </a:rPr>
-              <a:t>• Claim-Specific Schedules: </a:t>
-            </a:r>
-            <a:r>
-              <a:rPr sz="1100" b="0">
-                <a:latin typeface="Avenir Next"/>
-              </a:rPr>
-              <a:t>Prescribe statutory testing benchmarks (ISO 14855 for biodegradable; offset caps for net-zero) + CCPA whistleblower channel.</a:t>
-            </a:r>
-          </a:p>
-        </p:txBody>
-      </p:sp>
-      <p:sp>
-        <p:nvSpPr>
-          <p:cNvPr id="18" name="TextBox 17"/>
-          <p:cNvSpPr txBox="1"/>
-          <p:nvPr/>
-        </p:nvSpPr>
-        <p:spPr>
-          <a:xfrm>
-            <a:off x="730574" y="6635463"/>
-            <a:ext cx="1733167" cy="261610"/>
-          </a:xfrm>
-          <a:prstGeom prst="rect">
-            <a:avLst/>
-          </a:prstGeom>
-          <a:noFill/>
-        </p:spPr>
-        <p:txBody>
-          <a:bodyPr wrap="none" lIns="91440" tIns="45720" rIns="91440" bIns="45720" anchor="t">
-            <a:spAutoFit/>
-          </a:bodyPr>
-          <a:lstStyle/>
-          <a:p>
-            <a:pPr>
-              <a:defRPr sz="850">
-                <a:solidFill>
-                  <a:srgbClr val="6B6F6A"/>
-                </a:solidFill>
-                <a:latin typeface="Avenir Next"/>
-              </a:defRPr>
-            </a:pPr>
-            <a:r>
-              <a:rPr sz="1100" dirty="0">
-                <a:latin typeface="Avenir Next" panose="020B0503020202020204" pitchFamily="34" charset="0"/>
-              </a:rPr>
-              <a:t>Source base: Chapter 6</a:t>
-            </a:r>
-            <a:r>
-              <a:rPr lang="en-US" sz="1100" dirty="0">
-                <a:latin typeface="Avenir Next" panose="020B0503020202020204" pitchFamily="34" charset="0"/>
-              </a:rPr>
-              <a:t>.</a:t>
-            </a:r>
-            <a:endParaRPr sz="1100" dirty="0">
-              <a:latin typeface="Avenir Next" panose="020B0503020202020204" pitchFamily="34" charset="0"/>
-            </a:endParaRPr>
-          </a:p>
-        </p:txBody>
-      </p:sp>
-      <p:sp>
-        <p:nvSpPr>
-          <p:cNvPr id="2" name="Rounded Rectangle 1">
-            <a:extLst>
-              <a:ext uri="{FF2B5EF4-FFF2-40B4-BE49-F238E27FC236}">
-                <a16:creationId xmlns:a16="http://schemas.microsoft.com/office/drawing/2014/main" id="{E944D5AA-E07A-684A-99A2-363958AA91F5}"/>
-              </a:ext>
-            </a:extLst>
-          </p:cNvPr>
-          <p:cNvSpPr/>
-          <p:nvPr/>
-        </p:nvSpPr>
-        <p:spPr>
-          <a:xfrm>
-            <a:off x="608357" y="6064911"/>
-            <a:ext cx="10835640" cy="409041"/>
-          </a:xfrm>
-          <a:prstGeom prst="roundRect">
-            <a:avLst>
-              <a:gd name="adj" fmla="val 14000"/>
-            </a:avLst>
-          </a:prstGeom>
-          <a:solidFill>
-            <a:srgbClr val="FFF6EA"/>
-          </a:solidFill>
-          <a:ln w="12700">
-            <a:solidFill>
-              <a:srgbClr val="E7C894"/>
-            </a:solidFill>
-          </a:ln>
-          <a:effectLst/>
-        </p:spPr>
-        <p:style>
-          <a:lnRef idx="1">
-            <a:schemeClr val="accent1"/>
-          </a:lnRef>
-          <a:fillRef idx="3">
-            <a:schemeClr val="accent1"/>
-          </a:fillRef>
-          <a:effectRef idx="2">
-            <a:schemeClr val="accent1"/>
-          </a:effectRef>
-          <a:fontRef idx="minor">
-            <a:schemeClr val="lt1"/>
-          </a:fontRef>
-        </p:style>
-        <p:txBody>
-          <a:bodyPr rtlCol="0" anchor="ctr"/>
-          <a:lstStyle/>
-          <a:p>
-            <a:endParaRPr sz="2400">
-              <a:latin typeface="Avenir Next" panose="020B0503020202020204" pitchFamily="34" charset="0"/>
-            </a:endParaRPr>
-          </a:p>
-        </p:txBody>
-      </p:sp>
-      <p:sp>
-        <p:nvSpPr>
-          <p:cNvPr id="5" name="TextBox 4">
-            <a:extLst>
-              <a:ext uri="{FF2B5EF4-FFF2-40B4-BE49-F238E27FC236}">
-                <a16:creationId xmlns:a16="http://schemas.microsoft.com/office/drawing/2014/main" id="{89502B22-55AB-9C8B-6A2C-AF2AF36D9F98}"/>
-              </a:ext>
-            </a:extLst>
-          </p:cNvPr>
-          <p:cNvSpPr txBox="1"/>
-          <p:nvPr/>
-        </p:nvSpPr>
-        <p:spPr>
-          <a:xfrm>
-            <a:off x="738357" y="6136164"/>
-            <a:ext cx="10575640" cy="261610"/>
-          </a:xfrm>
-          <a:prstGeom prst="rect">
-            <a:avLst/>
-          </a:prstGeom>
-          <a:noFill/>
-        </p:spPr>
-        <p:txBody>
-          <a:bodyPr wrap="square" lIns="45720" tIns="22860" rIns="45720" bIns="22860" anchor="ctr">
-            <a:spAutoFit/>
-          </a:bodyPr>
-          <a:lstStyle/>
-          <a:p>
-            <a:pPr algn="just">
-              <a:defRPr sz="1100">
-                <a:solidFill>
-                  <a:srgbClr val="282828"/>
-                </a:solidFill>
-              </a:defRPr>
-            </a:pPr>
-            <a:r>
-              <a:rPr lang="en-IN" sz="1400" b="1" dirty="0">
-                <a:solidFill>
-                  <a:srgbClr val="173F35"/>
-                </a:solidFill>
-              </a:rPr>
-              <a:t>Answers Research Question 7 (Contd.)</a:t>
-            </a:r>
-            <a:endParaRPr lang="en-US" sz="1400" b="1" dirty="0">
-              <a:solidFill>
-                <a:srgbClr val="173F35"/>
-              </a:solidFill>
-            </a:endParaRPr>
-          </a:p>
-        </p:txBody>
-      </p:sp>
-    </p:spTree>
-  </p:cSld>
-  <p:clrMapOvr>
-    <a:masterClrMapping/>
-  </p:clrMapOvr>
-</p:sld>
-</file>
-
-<file path=ppt/slides/slide23.xml><?xml version="1.0" encoding="utf-8"?>
-<p:sld xmlns:a="http://schemas.openxmlformats.org/drawingml/2006/main" xmlns:r="http://schemas.openxmlformats.org/officeDocument/2006/relationships" xmlns:p="http://schemas.openxmlformats.org/presentationml/2006/main">
-  <p:cSld>
-    <p:spTree>
-      <p:nvGrpSpPr>
-        <p:cNvPr id="1" name=""/>
-        <p:cNvGrpSpPr/>
-        <p:nvPr/>
-      </p:nvGrpSpPr>
-      <p:grpSpPr>
-        <a:xfrm>
-          <a:off x="0" y="0"/>
-          <a:ext cx="0" cy="0"/>
-          <a:chOff x="0" y="0"/>
-          <a:chExt cx="0" cy="0"/>
-        </a:xfrm>
-      </p:grpSpPr>
-      <p:sp>
-        <p:nvSpPr>
-          <p:cNvPr id="3" name="Rectangle 2"/>
-          <p:cNvSpPr/>
-          <p:nvPr/>
-        </p:nvSpPr>
-        <p:spPr>
-          <a:xfrm>
-            <a:off x="0" y="0"/>
-            <a:ext cx="12191695" cy="201168"/>
-          </a:xfrm>
-          <a:prstGeom prst="rect">
-            <a:avLst/>
-          </a:prstGeom>
-          <a:solidFill>
-            <a:srgbClr val="173F35"/>
-          </a:solidFill>
-          <a:ln>
-            <a:noFill/>
-          </a:ln>
-        </p:spPr>
-        <p:style>
-          <a:lnRef idx="1">
-            <a:schemeClr val="accent1"/>
-          </a:lnRef>
-          <a:fillRef idx="3">
-            <a:schemeClr val="accent1"/>
-          </a:fillRef>
-          <a:effectRef idx="2">
-            <a:schemeClr val="accent1"/>
-          </a:effectRef>
-          <a:fontRef idx="minor">
-            <a:schemeClr val="lt1"/>
-          </a:fontRef>
-        </p:style>
-        <p:txBody>
-          <a:bodyPr rtlCol="0" anchor="ctr"/>
-          <a:lstStyle/>
-          <a:p>
-            <a:pPr algn="ctr"/>
-            <a:endParaRPr/>
-          </a:p>
-        </p:txBody>
-      </p:sp>
-      <p:sp>
-        <p:nvSpPr>
-          <p:cNvPr id="4" name="TextBox 3"/>
-          <p:cNvSpPr txBox="1"/>
-          <p:nvPr/>
-        </p:nvSpPr>
-        <p:spPr>
-          <a:xfrm>
             <a:off x="822960" y="1200000"/>
             <a:ext cx="10607040" cy="1200329"/>
           </a:xfrm>
@@ -21234,6 +19418,7 @@
               </a:defRPr>
             </a:pPr>
             <a:r>
+              <a:rPr dirty="0"/>
               <a:t>Concluding Imperative</a:t>
             </a:r>
           </a:p>
@@ -21246,6 +19431,7 @@
               </a:defRPr>
             </a:pPr>
             <a:r>
+              <a:rPr dirty="0"/>
               <a:t>Without truth in corporate environmental claims, clean investment cannot reach real climate solutions, and consumers cannot make genuine sustainable choices. Stopping greenwashing is essential not just for fair financial markets, but for the health of our planet.</a:t>
             </a:r>
           </a:p>
@@ -28758,9 +26944,9 @@
     <we:reference id="wa200011214" version="1.0.0.1" store="wa200011214" storeType="OMEX"/>
   </we:alternateReferences>
   <we:properties>
-    <we:property name="_flush" value="1786868305192"/>
-    <we:property name="_postImportCommit" value="1786868305192"/>
-    <we:property name="grokConversationBinding" value="{&quot;responseId&quot;:&quot;262e1e5b-f2ad-9fc2-aee0-e09e10d73375&quot;,&quot;title&quot;:&quot;Reduce Text Load Sections 1,3&quot;,&quot;transport&quot;:&quot;responses&quot;}"/>
+    <we:property name="_flush" value="1787248853329"/>
+    <we:property name="_postImportCommit" value="1787248853329"/>
+    <we:property name="grokConversationBinding" value="{&quot;responseId&quot;:&quot;47752631-de79-967a-a584-cc161d29c90d&quot;,&quot;title&quot;:&quot;Semantic Improvement of 5 Suggestions&quot;,&quot;transport&quot;:&quot;responses&quot;}"/>
   </we:properties>
   <we:bindings/>
   <we:snapshot xmlns:r="http://schemas.openxmlformats.org/officeDocument/2006/relationships"/>

--- a/Thesis Defence Presentation Final.pptx
+++ b/Thesis Defence Presentation Final.pptx
@@ -236,7 +236,7 @@
           <a:p>
             <a:fld id="{5D16D8C7-7ACE-0E43-ADC6-5E8A68AC397B}" type="datetimeFigureOut">
               <a:rPr lang="en-US" smtClean="0"/>
-              <a:t>8/20/26</a:t>
+              <a:t>8/21/26</a:t>
             </a:fld>
             <a:endParaRPr lang="en-US"/>
           </a:p>
@@ -1019,7 +1019,7 @@
           <a:p>
             <a:fld id="{5BCAD085-E8A6-8845-BD4E-CB4CCA059FC4}" type="datetimeFigureOut">
               <a:rPr lang="en-US" smtClean="0"/>
-              <a:t>8/20/26</a:t>
+              <a:t>8/21/26</a:t>
             </a:fld>
             <a:endParaRPr lang="en-US"/>
           </a:p>
@@ -1187,7 +1187,7 @@
           <a:p>
             <a:fld id="{5BCAD085-E8A6-8845-BD4E-CB4CCA059FC4}" type="datetimeFigureOut">
               <a:rPr lang="en-US" smtClean="0"/>
-              <a:t>8/20/26</a:t>
+              <a:t>8/21/26</a:t>
             </a:fld>
             <a:endParaRPr lang="en-US"/>
           </a:p>
@@ -1365,7 +1365,7 @@
           <a:p>
             <a:fld id="{5BCAD085-E8A6-8845-BD4E-CB4CCA059FC4}" type="datetimeFigureOut">
               <a:rPr lang="en-US" smtClean="0"/>
-              <a:t>8/20/26</a:t>
+              <a:t>8/21/26</a:t>
             </a:fld>
             <a:endParaRPr lang="en-US"/>
           </a:p>
@@ -1533,7 +1533,7 @@
           <a:p>
             <a:fld id="{5BCAD085-E8A6-8845-BD4E-CB4CCA059FC4}" type="datetimeFigureOut">
               <a:rPr lang="en-US" smtClean="0"/>
-              <a:t>8/20/26</a:t>
+              <a:t>8/21/26</a:t>
             </a:fld>
             <a:endParaRPr lang="en-US"/>
           </a:p>
@@ -1778,7 +1778,7 @@
           <a:p>
             <a:fld id="{5BCAD085-E8A6-8845-BD4E-CB4CCA059FC4}" type="datetimeFigureOut">
               <a:rPr lang="en-US" smtClean="0"/>
-              <a:t>8/20/26</a:t>
+              <a:t>8/21/26</a:t>
             </a:fld>
             <a:endParaRPr lang="en-US"/>
           </a:p>
@@ -2063,7 +2063,7 @@
           <a:p>
             <a:fld id="{5BCAD085-E8A6-8845-BD4E-CB4CCA059FC4}" type="datetimeFigureOut">
               <a:rPr lang="en-US" smtClean="0"/>
-              <a:t>8/20/26</a:t>
+              <a:t>8/21/26</a:t>
             </a:fld>
             <a:endParaRPr lang="en-US"/>
           </a:p>
@@ -2482,7 +2482,7 @@
           <a:p>
             <a:fld id="{5BCAD085-E8A6-8845-BD4E-CB4CCA059FC4}" type="datetimeFigureOut">
               <a:rPr lang="en-US" smtClean="0"/>
-              <a:t>8/20/26</a:t>
+              <a:t>8/21/26</a:t>
             </a:fld>
             <a:endParaRPr lang="en-US"/>
           </a:p>
@@ -2599,7 +2599,7 @@
           <a:p>
             <a:fld id="{5BCAD085-E8A6-8845-BD4E-CB4CCA059FC4}" type="datetimeFigureOut">
               <a:rPr lang="en-US" smtClean="0"/>
-              <a:t>8/20/26</a:t>
+              <a:t>8/21/26</a:t>
             </a:fld>
             <a:endParaRPr lang="en-US"/>
           </a:p>
@@ -2694,7 +2694,7 @@
           <a:p>
             <a:fld id="{5BCAD085-E8A6-8845-BD4E-CB4CCA059FC4}" type="datetimeFigureOut">
               <a:rPr lang="en-US" smtClean="0"/>
-              <a:t>8/20/26</a:t>
+              <a:t>8/21/26</a:t>
             </a:fld>
             <a:endParaRPr lang="en-US"/>
           </a:p>
@@ -2969,7 +2969,7 @@
           <a:p>
             <a:fld id="{5BCAD085-E8A6-8845-BD4E-CB4CCA059FC4}" type="datetimeFigureOut">
               <a:rPr lang="en-US" smtClean="0"/>
-              <a:t>8/20/26</a:t>
+              <a:t>8/21/26</a:t>
             </a:fld>
             <a:endParaRPr lang="en-US"/>
           </a:p>
@@ -3221,7 +3221,7 @@
           <a:p>
             <a:fld id="{5BCAD085-E8A6-8845-BD4E-CB4CCA059FC4}" type="datetimeFigureOut">
               <a:rPr lang="en-US" smtClean="0"/>
-              <a:t>8/20/26</a:t>
+              <a:t>8/21/26</a:t>
             </a:fld>
             <a:endParaRPr lang="en-US"/>
           </a:p>
@@ -3432,7 +3432,7 @@
           <a:p>
             <a:fld id="{5BCAD085-E8A6-8845-BD4E-CB4CCA059FC4}" type="datetimeFigureOut">
               <a:rPr lang="en-US" smtClean="0"/>
-              <a:t>8/20/26</a:t>
+              <a:t>8/21/26</a:t>
             </a:fld>
             <a:endParaRPr lang="en-US"/>
           </a:p>
@@ -6231,8 +6231,8 @@
         </p:nvSpPr>
         <p:spPr>
           <a:xfrm>
-            <a:off x="152400" y="384048"/>
-            <a:ext cx="11644435" cy="584775"/>
+            <a:off x="566928" y="393978"/>
+            <a:ext cx="10082335" cy="584775"/>
           </a:xfrm>
           <a:prstGeom prst="rect">
             <a:avLst/>
@@ -6255,7 +6255,7 @@
             </a:pPr>
             <a:r>
               <a:rPr lang="en-US" sz="3200" dirty="0"/>
-              <a:t>Limitations of Consumer Law In Tackling Greenwashing</a:t>
+              <a:t>Main Limitations of CCPA Greenwashing Guidelines</a:t>
             </a:r>
           </a:p>
         </p:txBody>
@@ -6320,7 +6320,7 @@
         <p:spPr>
           <a:xfrm>
             <a:off x="7740502" y="2105439"/>
-            <a:ext cx="3934413" cy="2164695"/>
+            <a:ext cx="3934413" cy="1918474"/>
           </a:xfrm>
           <a:prstGeom prst="rect">
             <a:avLst/>
@@ -6414,7 +6414,19 @@
               <a:rPr sz="1600" dirty="0">
                 <a:latin typeface="Avenir Next" panose="020B0503020202020204" pitchFamily="34" charset="0"/>
               </a:rPr>
-              <a:t>• Uses Section 166(2) and audit committees to hold leadership personally responsible for truth in sustainability.</a:t>
+              <a:t>• Uses Section 166(2) and audit committees to hold leadership</a:t>
+            </a:r>
+            <a:r>
+              <a:rPr lang="en-US" sz="1600" dirty="0">
+                <a:latin typeface="Avenir Next" panose="020B0503020202020204" pitchFamily="34" charset="0"/>
+              </a:rPr>
+              <a:t> </a:t>
+            </a:r>
+            <a:r>
+              <a:rPr sz="1600" dirty="0">
+                <a:latin typeface="Avenir Next" panose="020B0503020202020204" pitchFamily="34" charset="0"/>
+              </a:rPr>
+              <a:t>responsible for truth in sustainability.</a:t>
             </a:r>
           </a:p>
         </p:txBody>
@@ -6483,8 +6495,8 @@
         </p:nvSpPr>
         <p:spPr>
           <a:xfrm>
-            <a:off x="646996" y="1054085"/>
-            <a:ext cx="6678424" cy="3876261"/>
+            <a:off x="608896" y="1206485"/>
+            <a:ext cx="6678424" cy="4153527"/>
           </a:xfrm>
           <a:prstGeom prst="roundRect">
             <a:avLst/>
@@ -6631,8 +6643,8 @@
         </p:nvSpPr>
         <p:spPr>
           <a:xfrm>
-            <a:off x="913899" y="1405912"/>
-            <a:ext cx="6089793" cy="3159839"/>
+            <a:off x="903211" y="1348657"/>
+            <a:ext cx="6089793" cy="4011355"/>
           </a:xfrm>
           <a:prstGeom prst="rect">
             <a:avLst/>
@@ -6739,98 +6751,69 @@
             </a:lvl9pPr>
           </a:lstStyle>
           <a:p>
-            <a:pPr>
-              <a:spcAft>
-                <a:spcPts val="600"/>
-              </a:spcAft>
-              <a:defRPr sz="1350" b="1">
-                <a:solidFill>
-                  <a:srgbClr val="12402D"/>
-                </a:solidFill>
-                <a:latin typeface="Calibri"/>
-              </a:defRPr>
-            </a:pPr>
-            <a:r>
-              <a:rPr sz="1600" dirty="0">
-                <a:latin typeface="Avenir Next" panose="020B0503020202020204" pitchFamily="34" charset="0"/>
-              </a:rPr>
-              <a:t>Limitations of Consumer Law (CPA 2019 / CCPA)</a:t>
-            </a:r>
-            <a:endParaRPr lang="en-US" sz="1600" dirty="0">
-              <a:latin typeface="Avenir Next" panose="020B0503020202020204" pitchFamily="34" charset="0"/>
-            </a:endParaRPr>
-          </a:p>
-          <a:p>
-            <a:pPr>
+            <a:pPr marL="342900" indent="-342900">
               <a:spcBef>
                 <a:spcPts val="200"/>
               </a:spcBef>
               <a:spcAft>
                 <a:spcPts val="300"/>
               </a:spcAft>
-            </a:pPr>
-            <a:r>
-              <a:rPr sz="1600" b="1" dirty="0">
+              <a:buAutoNum type="arabicPeriod"/>
+            </a:pPr>
+            <a:r>
+              <a:rPr lang="en-IN" sz="1400" b="1" dirty="0">
                 <a:solidFill>
                   <a:srgbClr val="22704E"/>
                 </a:solidFill>
                 <a:latin typeface="Avenir Next" panose="020B0503020202020204" pitchFamily="34" charset="0"/>
               </a:rPr>
-              <a:t>1. Reactive by Nature: </a:t>
-            </a:r>
-            <a:r>
-              <a:rPr sz="1600" dirty="0">
+              <a:t>Guidelines without Governance Obligations: </a:t>
+            </a:r>
+            <a:r>
+              <a:rPr lang="en-IN" sz="1400" dirty="0">
                 <a:solidFill>
                   <a:srgbClr val="2D2D2D"/>
                 </a:solidFill>
                 <a:latin typeface="Avenir Next" panose="020B0503020202020204" pitchFamily="34" charset="0"/>
               </a:rPr>
-              <a:t>Intervenes only after deceptive claims enter the market.</a:t>
-            </a:r>
-            <a:r>
-              <a:rPr lang="en-US" sz="1600" dirty="0">
-                <a:solidFill>
-                  <a:srgbClr val="2D2D2D"/>
-                </a:solidFill>
-                <a:latin typeface="Avenir Next" panose="020B0503020202020204" pitchFamily="34" charset="0"/>
-              </a:rPr>
-              <a:t> Rather than proactive systemic regulation.</a:t>
-            </a:r>
-            <a:endParaRPr lang="en-IN" sz="1600" dirty="0">
+              <a:t>They prescribe what environmental claims must demonstrate but not what internal governance or processes must exist to ensure such demonstration.</a:t>
+            </a:r>
+            <a:endParaRPr lang="en-IN" sz="1400" b="1" dirty="0">
               <a:solidFill>
-                <a:srgbClr val="2D2D2D"/>
+                <a:srgbClr val="22704E"/>
               </a:solidFill>
               <a:latin typeface="Avenir Next" panose="020B0503020202020204" pitchFamily="34" charset="0"/>
             </a:endParaRPr>
           </a:p>
           <a:p>
-            <a:pPr>
+            <a:pPr marL="342900" indent="-342900">
               <a:spcBef>
                 <a:spcPts val="200"/>
               </a:spcBef>
               <a:spcAft>
                 <a:spcPts val="300"/>
               </a:spcAft>
-            </a:pPr>
-            <a:r>
-              <a:rPr lang="en-IN" sz="1600" b="1" dirty="0">
+              <a:buAutoNum type="arabicPeriod"/>
+            </a:pPr>
+            <a:r>
+              <a:rPr lang="en-IN" sz="1400" b="1" dirty="0">
                 <a:solidFill>
                   <a:srgbClr val="22704E"/>
                 </a:solidFill>
                 <a:latin typeface="Avenir Next" panose="020B0503020202020204" pitchFamily="34" charset="0"/>
               </a:rPr>
-              <a:t>2. No Upstream Boardroom Mandates: </a:t>
-            </a:r>
-            <a:r>
-              <a:rPr lang="en-IN" sz="1600" dirty="0">
+              <a:t>No Board Level Deterrence: </a:t>
+            </a:r>
+            <a:r>
+              <a:rPr lang="en-IN" sz="1400" dirty="0">
                 <a:solidFill>
                   <a:srgbClr val="2D2D2D"/>
                 </a:solidFill>
                 <a:latin typeface="Avenir Next" panose="020B0503020202020204" pitchFamily="34" charset="0"/>
               </a:rPr>
-              <a:t>Regulates ad copy, does not guide internal corporate systems or decision-making.</a:t>
-            </a:r>
-            <a:endParaRPr sz="1600" dirty="0">
+              <a:t>Because its remit is restricted to consumer facing products and ads only; the institutional greenwashing such as corporate PR campaigns, annual sustainability overstatements that do not mention any specific product or service are allowed.</a:t>
+            </a:r>
+            <a:endParaRPr lang="en-US" sz="1400" dirty="0">
               <a:solidFill>
                 <a:srgbClr val="2D2D2D"/>
               </a:solidFill>
@@ -6838,195 +6821,96 @@
             </a:endParaRPr>
           </a:p>
           <a:p>
-            <a:pPr>
+            <a:pPr marL="342900" indent="-342900">
               <a:spcBef>
                 <a:spcPts val="200"/>
               </a:spcBef>
               <a:spcAft>
                 <a:spcPts val="300"/>
               </a:spcAft>
-            </a:pPr>
-            <a:r>
-              <a:rPr lang="en-US" sz="1600" b="1" dirty="0">
+              <a:buFontTx/>
+              <a:buAutoNum type="arabicPeriod"/>
+            </a:pPr>
+            <a:r>
+              <a:rPr lang="en-US" sz="1400" b="1" dirty="0">
                 <a:solidFill>
                   <a:srgbClr val="22704E"/>
                 </a:solidFill>
                 <a:latin typeface="Avenir Next" panose="020B0503020202020204" pitchFamily="34" charset="0"/>
               </a:rPr>
-              <a:t>3</a:t>
-            </a:r>
-            <a:r>
-              <a:rPr sz="1600" b="1" dirty="0">
-                <a:solidFill>
-                  <a:srgbClr val="22704E"/>
-                </a:solidFill>
-                <a:latin typeface="Avenir Next" panose="020B0503020202020204" pitchFamily="34" charset="0"/>
-              </a:rPr>
-              <a:t>. Individual Harm Focus: </a:t>
-            </a:r>
-            <a:r>
-              <a:rPr sz="1600" dirty="0">
+              <a:t>Weak Oversight on Future Claims: </a:t>
+            </a:r>
+            <a:r>
+              <a:rPr lang="en-US" sz="1400" dirty="0">
                 <a:solidFill>
                   <a:srgbClr val="2D2D2D"/>
                 </a:solidFill>
                 <a:latin typeface="Avenir Next" panose="020B0503020202020204" pitchFamily="34" charset="0"/>
               </a:rPr>
-              <a:t>Treats greenwashing </a:t>
-            </a:r>
-            <a:r>
-              <a:rPr lang="en-US" sz="1600" dirty="0">
-                <a:solidFill>
-                  <a:srgbClr val="2D2D2D"/>
-                </a:solidFill>
-                <a:latin typeface="Avenir Next" panose="020B0503020202020204" pitchFamily="34" charset="0"/>
-              </a:rPr>
-              <a:t>merely </a:t>
-            </a:r>
-            <a:r>
-              <a:rPr sz="1600" dirty="0">
-                <a:solidFill>
-                  <a:srgbClr val="2D2D2D"/>
-                </a:solidFill>
-                <a:latin typeface="Avenir Next" panose="020B0503020202020204" pitchFamily="34" charset="0"/>
-              </a:rPr>
-              <a:t>consumer </a:t>
-            </a:r>
-            <a:r>
-              <a:rPr lang="en-US" sz="1600" dirty="0">
-                <a:solidFill>
-                  <a:srgbClr val="2D2D2D"/>
-                </a:solidFill>
-                <a:latin typeface="Avenir Next" panose="020B0503020202020204" pitchFamily="34" charset="0"/>
-              </a:rPr>
-              <a:t>harm</a:t>
-            </a:r>
-            <a:r>
-              <a:rPr sz="1600" dirty="0">
-                <a:solidFill>
-                  <a:srgbClr val="2D2D2D"/>
-                </a:solidFill>
-                <a:latin typeface="Avenir Next" panose="020B0503020202020204" pitchFamily="34" charset="0"/>
-              </a:rPr>
-              <a:t>, not systemic governance failure.</a:t>
-            </a:r>
-            <a:endParaRPr lang="en-US" sz="1600" dirty="0">
-              <a:solidFill>
-                <a:srgbClr val="2D2D2D"/>
-              </a:solidFill>
-              <a:latin typeface="Avenir Next" panose="020B0503020202020204" pitchFamily="34" charset="0"/>
-            </a:endParaRPr>
-          </a:p>
-          <a:p>
-            <a:pPr>
+              <a:t>It permits futuristic claims, without mandatory interim milestone reporting and no independent verification of interim progress or a penalty on non-delivery of these targets. </a:t>
+            </a:r>
+          </a:p>
+          <a:p>
+            <a:pPr marL="342900" indent="-342900">
               <a:spcBef>
                 <a:spcPts val="200"/>
               </a:spcBef>
               <a:spcAft>
                 <a:spcPts val="300"/>
               </a:spcAft>
-            </a:pPr>
-            <a:r>
-              <a:rPr lang="en-US" sz="1600" b="1" dirty="0">
+              <a:buFontTx/>
+              <a:buAutoNum type="arabicPeriod"/>
+            </a:pPr>
+            <a:r>
+              <a:rPr lang="en-US" sz="1400" b="1" dirty="0">
                 <a:solidFill>
                   <a:srgbClr val="22704E"/>
                 </a:solidFill>
                 <a:latin typeface="Avenir Next" panose="020B0503020202020204" pitchFamily="34" charset="0"/>
               </a:rPr>
-              <a:t>4. </a:t>
-            </a:r>
-            <a:r>
-              <a:rPr sz="1600" b="1" dirty="0">
-                <a:solidFill>
-                  <a:srgbClr val="22704E"/>
-                </a:solidFill>
-                <a:latin typeface="Avenir Next" panose="020B0503020202020204" pitchFamily="34" charset="0"/>
-              </a:rPr>
-              <a:t>Puffery Loophole: </a:t>
-            </a:r>
-            <a:r>
-              <a:rPr lang="en-US" sz="1600" dirty="0">
+              <a:t>Visual Imagery &amp; Puffery Loophole: </a:t>
+            </a:r>
+            <a:r>
+              <a:rPr lang="en-US" sz="1400" dirty="0">
                 <a:solidFill>
                   <a:srgbClr val="2D2D2D"/>
                 </a:solidFill>
                 <a:latin typeface="Avenir Next" panose="020B0503020202020204" pitchFamily="34" charset="0"/>
               </a:rPr>
-              <a:t>Scope for </a:t>
-            </a:r>
-            <a:r>
-              <a:rPr sz="1600" dirty="0">
-                <a:solidFill>
-                  <a:srgbClr val="2D2D2D"/>
-                </a:solidFill>
-                <a:latin typeface="Avenir Next" panose="020B0503020202020204" pitchFamily="34" charset="0"/>
-              </a:rPr>
-              <a:t>exaggerations </a:t>
-            </a:r>
-            <a:r>
-              <a:rPr lang="en-US" sz="1600" dirty="0">
-                <a:solidFill>
-                  <a:srgbClr val="2D2D2D"/>
-                </a:solidFill>
-                <a:latin typeface="Avenir Next" panose="020B0503020202020204" pitchFamily="34" charset="0"/>
-              </a:rPr>
-              <a:t>creates </a:t>
-            </a:r>
-            <a:r>
-              <a:rPr sz="1600" dirty="0">
-                <a:solidFill>
-                  <a:srgbClr val="2D2D2D"/>
-                </a:solidFill>
-                <a:latin typeface="Avenir Next" panose="020B0503020202020204" pitchFamily="34" charset="0"/>
-              </a:rPr>
-              <a:t>loopholes for vague green buzzwords.</a:t>
-            </a:r>
-          </a:p>
-          <a:p>
-            <a:pPr>
+              <a:t>It exempts generic nature visuals and exaggerated talk in advertisements, which leaves scope for greenwashing. </a:t>
+            </a:r>
+          </a:p>
+          <a:p>
+            <a:pPr marL="342900" indent="-342900">
               <a:spcBef>
                 <a:spcPts val="200"/>
               </a:spcBef>
               <a:spcAft>
                 <a:spcPts val="300"/>
               </a:spcAft>
-            </a:pPr>
-            <a:r>
-              <a:rPr lang="en-US" sz="1600" b="1" dirty="0">
+              <a:buFontTx/>
+              <a:buAutoNum type="arabicPeriod"/>
+            </a:pPr>
+            <a:r>
+              <a:rPr lang="en-US" sz="1400" b="1" dirty="0">
                 <a:solidFill>
                   <a:srgbClr val="22704E"/>
                 </a:solidFill>
                 <a:latin typeface="Avenir Next" panose="020B0503020202020204" pitchFamily="34" charset="0"/>
               </a:rPr>
-              <a:t>5</a:t>
-            </a:r>
-            <a:r>
-              <a:rPr sz="1600" b="1" dirty="0">
+              <a:t>Fixed cap penalties</a:t>
+            </a:r>
+            <a:r>
+              <a:rPr sz="1400" b="1" dirty="0">
                 <a:solidFill>
                   <a:srgbClr val="22704E"/>
                 </a:solidFill>
                 <a:latin typeface="Avenir Next" panose="020B0503020202020204" pitchFamily="34" charset="0"/>
               </a:rPr>
-              <a:t>. </a:t>
-            </a:r>
-            <a:r>
-              <a:rPr lang="en-US" sz="1600" b="1" dirty="0">
-                <a:solidFill>
-                  <a:srgbClr val="22704E"/>
-                </a:solidFill>
-                <a:latin typeface="Avenir Next" panose="020B0503020202020204" pitchFamily="34" charset="0"/>
-              </a:rPr>
-              <a:t>Fixed cap penalties</a:t>
-            </a:r>
-            <a:r>
-              <a:rPr sz="1600" b="1" dirty="0">
-                <a:solidFill>
-                  <a:srgbClr val="22704E"/>
-                </a:solidFill>
-                <a:latin typeface="Avenir Next" panose="020B0503020202020204" pitchFamily="34" charset="0"/>
-              </a:rPr>
               <a:t>: </a:t>
             </a:r>
             <a:r>
-              <a:rPr lang="en-IN" sz="1600" dirty="0">
+              <a:rPr lang="en-IN" sz="1400" dirty="0">
                 <a:solidFill>
                   <a:srgbClr val="2D2D2D"/>
                 </a:solidFill>
@@ -7035,7 +6919,7 @@
               <a:t>Not turnover linked</a:t>
             </a:r>
             <a:r>
-              <a:rPr sz="1600" dirty="0">
+              <a:rPr sz="1400" dirty="0">
                 <a:solidFill>
                   <a:srgbClr val="2D2D2D"/>
                 </a:solidFill>
@@ -7044,7 +6928,7 @@
               <a:t>.</a:t>
             </a:r>
             <a:r>
-              <a:rPr lang="en-US" sz="1600" dirty="0">
+              <a:rPr lang="en-US" sz="1400" dirty="0">
                 <a:solidFill>
                   <a:srgbClr val="2D2D2D"/>
                 </a:solidFill>
@@ -7052,7 +6936,7 @@
               </a:rPr>
               <a:t> Limited deterrence for big companies.</a:t>
             </a:r>
-            <a:endParaRPr lang="en-US" sz="1600" dirty="0">
+            <a:endParaRPr lang="en-US" sz="1400" dirty="0">
               <a:latin typeface="Avenir Next" panose="020B0503020202020204" pitchFamily="34" charset="0"/>
               <a:ea typeface="Calibri"/>
               <a:cs typeface="Calibri"/>
